--- a/Current Presentation/Spring 2026.pptx
+++ b/Current Presentation/Spring 2026.pptx
@@ -6,6 +6,7 @@
   </p:sldMasterIdLst>
   <p:sldIdLst>
     <p:sldId id="256" r:id="rId2"/>
+    <p:sldId id="257" r:id="rId3"/>
   </p:sldIdLst>
   <p:sldSz cx="12192000" cy="6858000"/>
   <p:notesSz cx="6858000" cy="9144000"/>
@@ -3394,6 +3395,674 @@
     <p:extLst>
       <p:ext uri="{BB962C8B-B14F-4D97-AF65-F5344CB8AC3E}">
         <p14:creationId xmlns:p14="http://schemas.microsoft.com/office/powerpoint/2010/main" val="2451799315"/>
+      </p:ext>
+    </p:extLst>
+  </p:cSld>
+  <p:clrMapOvr>
+    <a:masterClrMapping/>
+  </p:clrMapOvr>
+</p:sld>
+</file>
+
+<file path=ppt/slides/slide2.xml><?xml version="1.0" encoding="utf-8"?>
+<p:sld xmlns:a="http://schemas.openxmlformats.org/drawingml/2006/main" xmlns:r="http://schemas.openxmlformats.org/officeDocument/2006/relationships" xmlns:p="http://schemas.openxmlformats.org/presentationml/2006/main">
+  <p:cSld>
+    <p:spTree>
+      <p:nvGrpSpPr>
+        <p:cNvPr id="1" name="">
+          <a:extLst>
+            <a:ext uri="{FF2B5EF4-FFF2-40B4-BE49-F238E27FC236}">
+              <a16:creationId xmlns:a16="http://schemas.microsoft.com/office/drawing/2014/main" id="{0CD9B9C6-84BD-3439-D33E-8CB02480D2CA}"/>
+            </a:ext>
+          </a:extLst>
+        </p:cNvPr>
+        <p:cNvGrpSpPr/>
+        <p:nvPr/>
+      </p:nvGrpSpPr>
+      <p:grpSpPr>
+        <a:xfrm>
+          <a:off x="0" y="0"/>
+          <a:ext cx="0" cy="0"/>
+          <a:chOff x="0" y="0"/>
+          <a:chExt cx="0" cy="0"/>
+        </a:xfrm>
+      </p:grpSpPr>
+      <p:sp>
+        <p:nvSpPr>
+          <p:cNvPr id="2" name="Title 1">
+            <a:extLst>
+              <a:ext uri="{FF2B5EF4-FFF2-40B4-BE49-F238E27FC236}">
+                <a16:creationId xmlns:a16="http://schemas.microsoft.com/office/drawing/2014/main" id="{ABA19744-CADB-AA00-17E2-D9EC8E13708C}"/>
+              </a:ext>
+            </a:extLst>
+          </p:cNvPr>
+          <p:cNvSpPr>
+            <a:spLocks noGrp="1"/>
+          </p:cNvSpPr>
+          <p:nvPr>
+            <p:ph type="ctrTitle"/>
+          </p:nvPr>
+        </p:nvSpPr>
+        <p:spPr/>
+        <p:txBody>
+          <a:bodyPr/>
+          <a:lstStyle/>
+          <a:p>
+            <a:r>
+              <a:rPr lang="en-US" dirty="0"/>
+              <a:t>Charlie’s</a:t>
+            </a:r>
+            <a:br>
+              <a:rPr lang="en-US" dirty="0"/>
+            </a:br>
+            <a:r>
+              <a:rPr lang="en-US" dirty="0"/>
+              <a:t>Spring Term Presentation</a:t>
+            </a:r>
+          </a:p>
+        </p:txBody>
+      </p:sp>
+      <p:sp>
+        <p:nvSpPr>
+          <p:cNvPr id="4" name="Subtitle 2">
+            <a:extLst>
+              <a:ext uri="{FF2B5EF4-FFF2-40B4-BE49-F238E27FC236}">
+                <a16:creationId xmlns:a16="http://schemas.microsoft.com/office/drawing/2014/main" id="{03ED965D-5808-9F89-291D-4E09679DAC8E}"/>
+              </a:ext>
+            </a:extLst>
+          </p:cNvPr>
+          <p:cNvSpPr txBox="1">
+            <a:spLocks/>
+          </p:cNvSpPr>
+          <p:nvPr/>
+        </p:nvSpPr>
+        <p:spPr>
+          <a:xfrm>
+            <a:off x="5123688" y="3602038"/>
+            <a:ext cx="1944624" cy="430466"/>
+          </a:xfrm>
+          <a:prstGeom prst="rect">
+            <a:avLst/>
+          </a:prstGeom>
+        </p:spPr>
+        <p:txBody>
+          <a:bodyPr vert="horz" lIns="91440" tIns="45720" rIns="91440" bIns="45720" rtlCol="0">
+            <a:normAutofit fontScale="92500" lnSpcReduction="10000"/>
+          </a:bodyPr>
+          <a:lstStyle>
+            <a:lvl1pPr marL="0" indent="0" algn="ctr" defTabSz="914400" rtl="0" eaLnBrk="1" latinLnBrk="0" hangingPunct="1">
+              <a:lnSpc>
+                <a:spcPct val="90000"/>
+              </a:lnSpc>
+              <a:spcBef>
+                <a:spcPts val="1000"/>
+              </a:spcBef>
+              <a:buFont typeface="Arial" panose="020B0604020202020204" pitchFamily="34" charset="0"/>
+              <a:buNone/>
+              <a:defRPr sz="2400" kern="1200">
+                <a:solidFill>
+                  <a:schemeClr val="tx1"/>
+                </a:solidFill>
+                <a:latin typeface="+mn-lt"/>
+                <a:ea typeface="+mn-ea"/>
+                <a:cs typeface="+mn-cs"/>
+              </a:defRPr>
+            </a:lvl1pPr>
+            <a:lvl2pPr marL="457200" indent="0" algn="ctr" defTabSz="914400" rtl="0" eaLnBrk="1" latinLnBrk="0" hangingPunct="1">
+              <a:lnSpc>
+                <a:spcPct val="90000"/>
+              </a:lnSpc>
+              <a:spcBef>
+                <a:spcPts val="500"/>
+              </a:spcBef>
+              <a:buFont typeface="Arial" panose="020B0604020202020204" pitchFamily="34" charset="0"/>
+              <a:buNone/>
+              <a:defRPr sz="2000" kern="1200">
+                <a:solidFill>
+                  <a:schemeClr val="tx1"/>
+                </a:solidFill>
+                <a:latin typeface="+mn-lt"/>
+                <a:ea typeface="+mn-ea"/>
+                <a:cs typeface="+mn-cs"/>
+              </a:defRPr>
+            </a:lvl2pPr>
+            <a:lvl3pPr marL="914400" indent="0" algn="ctr" defTabSz="914400" rtl="0" eaLnBrk="1" latinLnBrk="0" hangingPunct="1">
+              <a:lnSpc>
+                <a:spcPct val="90000"/>
+              </a:lnSpc>
+              <a:spcBef>
+                <a:spcPts val="500"/>
+              </a:spcBef>
+              <a:buFont typeface="Arial" panose="020B0604020202020204" pitchFamily="34" charset="0"/>
+              <a:buNone/>
+              <a:defRPr sz="1800" kern="1200">
+                <a:solidFill>
+                  <a:schemeClr val="tx1"/>
+                </a:solidFill>
+                <a:latin typeface="+mn-lt"/>
+                <a:ea typeface="+mn-ea"/>
+                <a:cs typeface="+mn-cs"/>
+              </a:defRPr>
+            </a:lvl3pPr>
+            <a:lvl4pPr marL="1371600" indent="0" algn="ctr" defTabSz="914400" rtl="0" eaLnBrk="1" latinLnBrk="0" hangingPunct="1">
+              <a:lnSpc>
+                <a:spcPct val="90000"/>
+              </a:lnSpc>
+              <a:spcBef>
+                <a:spcPts val="500"/>
+              </a:spcBef>
+              <a:buFont typeface="Arial" panose="020B0604020202020204" pitchFamily="34" charset="0"/>
+              <a:buNone/>
+              <a:defRPr sz="1600" kern="1200">
+                <a:solidFill>
+                  <a:schemeClr val="tx1"/>
+                </a:solidFill>
+                <a:latin typeface="+mn-lt"/>
+                <a:ea typeface="+mn-ea"/>
+                <a:cs typeface="+mn-cs"/>
+              </a:defRPr>
+            </a:lvl4pPr>
+            <a:lvl5pPr marL="1828800" indent="0" algn="ctr" defTabSz="914400" rtl="0" eaLnBrk="1" latinLnBrk="0" hangingPunct="1">
+              <a:lnSpc>
+                <a:spcPct val="90000"/>
+              </a:lnSpc>
+              <a:spcBef>
+                <a:spcPts val="500"/>
+              </a:spcBef>
+              <a:buFont typeface="Arial" panose="020B0604020202020204" pitchFamily="34" charset="0"/>
+              <a:buNone/>
+              <a:defRPr sz="1600" kern="1200">
+                <a:solidFill>
+                  <a:schemeClr val="tx1"/>
+                </a:solidFill>
+                <a:latin typeface="+mn-lt"/>
+                <a:ea typeface="+mn-ea"/>
+                <a:cs typeface="+mn-cs"/>
+              </a:defRPr>
+            </a:lvl5pPr>
+            <a:lvl6pPr marL="2286000" indent="0" algn="ctr" defTabSz="914400" rtl="0" eaLnBrk="1" latinLnBrk="0" hangingPunct="1">
+              <a:lnSpc>
+                <a:spcPct val="90000"/>
+              </a:lnSpc>
+              <a:spcBef>
+                <a:spcPts val="500"/>
+              </a:spcBef>
+              <a:buFont typeface="Arial" panose="020B0604020202020204" pitchFamily="34" charset="0"/>
+              <a:buNone/>
+              <a:defRPr sz="1600" kern="1200">
+                <a:solidFill>
+                  <a:schemeClr val="tx1"/>
+                </a:solidFill>
+                <a:latin typeface="+mn-lt"/>
+                <a:ea typeface="+mn-ea"/>
+                <a:cs typeface="+mn-cs"/>
+              </a:defRPr>
+            </a:lvl6pPr>
+            <a:lvl7pPr marL="2743200" indent="0" algn="ctr" defTabSz="914400" rtl="0" eaLnBrk="1" latinLnBrk="0" hangingPunct="1">
+              <a:lnSpc>
+                <a:spcPct val="90000"/>
+              </a:lnSpc>
+              <a:spcBef>
+                <a:spcPts val="500"/>
+              </a:spcBef>
+              <a:buFont typeface="Arial" panose="020B0604020202020204" pitchFamily="34" charset="0"/>
+              <a:buNone/>
+              <a:defRPr sz="1600" kern="1200">
+                <a:solidFill>
+                  <a:schemeClr val="tx1"/>
+                </a:solidFill>
+                <a:latin typeface="+mn-lt"/>
+                <a:ea typeface="+mn-ea"/>
+                <a:cs typeface="+mn-cs"/>
+              </a:defRPr>
+            </a:lvl7pPr>
+            <a:lvl8pPr marL="3200400" indent="0" algn="ctr" defTabSz="914400" rtl="0" eaLnBrk="1" latinLnBrk="0" hangingPunct="1">
+              <a:lnSpc>
+                <a:spcPct val="90000"/>
+              </a:lnSpc>
+              <a:spcBef>
+                <a:spcPts val="500"/>
+              </a:spcBef>
+              <a:buFont typeface="Arial" panose="020B0604020202020204" pitchFamily="34" charset="0"/>
+              <a:buNone/>
+              <a:defRPr sz="1600" kern="1200">
+                <a:solidFill>
+                  <a:schemeClr val="tx1"/>
+                </a:solidFill>
+                <a:latin typeface="+mn-lt"/>
+                <a:ea typeface="+mn-ea"/>
+                <a:cs typeface="+mn-cs"/>
+              </a:defRPr>
+            </a:lvl8pPr>
+            <a:lvl9pPr marL="3657600" indent="0" algn="ctr" defTabSz="914400" rtl="0" eaLnBrk="1" latinLnBrk="0" hangingPunct="1">
+              <a:lnSpc>
+                <a:spcPct val="90000"/>
+              </a:lnSpc>
+              <a:spcBef>
+                <a:spcPts val="500"/>
+              </a:spcBef>
+              <a:buFont typeface="Arial" panose="020B0604020202020204" pitchFamily="34" charset="0"/>
+              <a:buNone/>
+              <a:defRPr sz="1600" kern="1200">
+                <a:solidFill>
+                  <a:schemeClr val="tx1"/>
+                </a:solidFill>
+                <a:latin typeface="+mn-lt"/>
+                <a:ea typeface="+mn-ea"/>
+                <a:cs typeface="+mn-cs"/>
+              </a:defRPr>
+            </a:lvl9pPr>
+          </a:lstStyle>
+          <a:p>
+            <a:r>
+              <a:rPr lang="en-US" sz="2800" b="1" dirty="0"/>
+              <a:t>By</a:t>
+            </a:r>
+          </a:p>
+        </p:txBody>
+      </p:sp>
+      <p:sp>
+        <p:nvSpPr>
+          <p:cNvPr id="8" name="Subtitle 2">
+            <a:extLst>
+              <a:ext uri="{FF2B5EF4-FFF2-40B4-BE49-F238E27FC236}">
+                <a16:creationId xmlns:a16="http://schemas.microsoft.com/office/drawing/2014/main" id="{88EE8B7A-565F-11D1-F96E-AB49B1B7FE99}"/>
+              </a:ext>
+            </a:extLst>
+          </p:cNvPr>
+          <p:cNvSpPr txBox="1">
+            <a:spLocks/>
+          </p:cNvSpPr>
+          <p:nvPr/>
+        </p:nvSpPr>
+        <p:spPr>
+          <a:xfrm>
+            <a:off x="5056632" y="4032504"/>
+            <a:ext cx="1167384" cy="430466"/>
+          </a:xfrm>
+          <a:prstGeom prst="rect">
+            <a:avLst/>
+          </a:prstGeom>
+        </p:spPr>
+        <p:txBody>
+          <a:bodyPr vert="horz" lIns="91440" tIns="45720" rIns="91440" bIns="45720" rtlCol="0">
+            <a:normAutofit/>
+          </a:bodyPr>
+          <a:lstStyle>
+            <a:lvl1pPr marL="0" indent="0" algn="ctr" defTabSz="914400" rtl="0" eaLnBrk="1" latinLnBrk="0" hangingPunct="1">
+              <a:lnSpc>
+                <a:spcPct val="90000"/>
+              </a:lnSpc>
+              <a:spcBef>
+                <a:spcPts val="1000"/>
+              </a:spcBef>
+              <a:buFont typeface="Arial" panose="020B0604020202020204" pitchFamily="34" charset="0"/>
+              <a:buNone/>
+              <a:defRPr sz="2400" kern="1200">
+                <a:solidFill>
+                  <a:schemeClr val="tx1"/>
+                </a:solidFill>
+                <a:latin typeface="+mn-lt"/>
+                <a:ea typeface="+mn-ea"/>
+                <a:cs typeface="+mn-cs"/>
+              </a:defRPr>
+            </a:lvl1pPr>
+            <a:lvl2pPr marL="457200" indent="0" algn="ctr" defTabSz="914400" rtl="0" eaLnBrk="1" latinLnBrk="0" hangingPunct="1">
+              <a:lnSpc>
+                <a:spcPct val="90000"/>
+              </a:lnSpc>
+              <a:spcBef>
+                <a:spcPts val="500"/>
+              </a:spcBef>
+              <a:buFont typeface="Arial" panose="020B0604020202020204" pitchFamily="34" charset="0"/>
+              <a:buNone/>
+              <a:defRPr sz="2000" kern="1200">
+                <a:solidFill>
+                  <a:schemeClr val="tx1"/>
+                </a:solidFill>
+                <a:latin typeface="+mn-lt"/>
+                <a:ea typeface="+mn-ea"/>
+                <a:cs typeface="+mn-cs"/>
+              </a:defRPr>
+            </a:lvl2pPr>
+            <a:lvl3pPr marL="914400" indent="0" algn="ctr" defTabSz="914400" rtl="0" eaLnBrk="1" latinLnBrk="0" hangingPunct="1">
+              <a:lnSpc>
+                <a:spcPct val="90000"/>
+              </a:lnSpc>
+              <a:spcBef>
+                <a:spcPts val="500"/>
+              </a:spcBef>
+              <a:buFont typeface="Arial" panose="020B0604020202020204" pitchFamily="34" charset="0"/>
+              <a:buNone/>
+              <a:defRPr sz="1800" kern="1200">
+                <a:solidFill>
+                  <a:schemeClr val="tx1"/>
+                </a:solidFill>
+                <a:latin typeface="+mn-lt"/>
+                <a:ea typeface="+mn-ea"/>
+                <a:cs typeface="+mn-cs"/>
+              </a:defRPr>
+            </a:lvl3pPr>
+            <a:lvl4pPr marL="1371600" indent="0" algn="ctr" defTabSz="914400" rtl="0" eaLnBrk="1" latinLnBrk="0" hangingPunct="1">
+              <a:lnSpc>
+                <a:spcPct val="90000"/>
+              </a:lnSpc>
+              <a:spcBef>
+                <a:spcPts val="500"/>
+              </a:spcBef>
+              <a:buFont typeface="Arial" panose="020B0604020202020204" pitchFamily="34" charset="0"/>
+              <a:buNone/>
+              <a:defRPr sz="1600" kern="1200">
+                <a:solidFill>
+                  <a:schemeClr val="tx1"/>
+                </a:solidFill>
+                <a:latin typeface="+mn-lt"/>
+                <a:ea typeface="+mn-ea"/>
+                <a:cs typeface="+mn-cs"/>
+              </a:defRPr>
+            </a:lvl4pPr>
+            <a:lvl5pPr marL="1828800" indent="0" algn="ctr" defTabSz="914400" rtl="0" eaLnBrk="1" latinLnBrk="0" hangingPunct="1">
+              <a:lnSpc>
+                <a:spcPct val="90000"/>
+              </a:lnSpc>
+              <a:spcBef>
+                <a:spcPts val="500"/>
+              </a:spcBef>
+              <a:buFont typeface="Arial" panose="020B0604020202020204" pitchFamily="34" charset="0"/>
+              <a:buNone/>
+              <a:defRPr sz="1600" kern="1200">
+                <a:solidFill>
+                  <a:schemeClr val="tx1"/>
+                </a:solidFill>
+                <a:latin typeface="+mn-lt"/>
+                <a:ea typeface="+mn-ea"/>
+                <a:cs typeface="+mn-cs"/>
+              </a:defRPr>
+            </a:lvl5pPr>
+            <a:lvl6pPr marL="2286000" indent="0" algn="ctr" defTabSz="914400" rtl="0" eaLnBrk="1" latinLnBrk="0" hangingPunct="1">
+              <a:lnSpc>
+                <a:spcPct val="90000"/>
+              </a:lnSpc>
+              <a:spcBef>
+                <a:spcPts val="500"/>
+              </a:spcBef>
+              <a:buFont typeface="Arial" panose="020B0604020202020204" pitchFamily="34" charset="0"/>
+              <a:buNone/>
+              <a:defRPr sz="1600" kern="1200">
+                <a:solidFill>
+                  <a:schemeClr val="tx1"/>
+                </a:solidFill>
+                <a:latin typeface="+mn-lt"/>
+                <a:ea typeface="+mn-ea"/>
+                <a:cs typeface="+mn-cs"/>
+              </a:defRPr>
+            </a:lvl6pPr>
+            <a:lvl7pPr marL="2743200" indent="0" algn="ctr" defTabSz="914400" rtl="0" eaLnBrk="1" latinLnBrk="0" hangingPunct="1">
+              <a:lnSpc>
+                <a:spcPct val="90000"/>
+              </a:lnSpc>
+              <a:spcBef>
+                <a:spcPts val="500"/>
+              </a:spcBef>
+              <a:buFont typeface="Arial" panose="020B0604020202020204" pitchFamily="34" charset="0"/>
+              <a:buNone/>
+              <a:defRPr sz="1600" kern="1200">
+                <a:solidFill>
+                  <a:schemeClr val="tx1"/>
+                </a:solidFill>
+                <a:latin typeface="+mn-lt"/>
+                <a:ea typeface="+mn-ea"/>
+                <a:cs typeface="+mn-cs"/>
+              </a:defRPr>
+            </a:lvl7pPr>
+            <a:lvl8pPr marL="3200400" indent="0" algn="ctr" defTabSz="914400" rtl="0" eaLnBrk="1" latinLnBrk="0" hangingPunct="1">
+              <a:lnSpc>
+                <a:spcPct val="90000"/>
+              </a:lnSpc>
+              <a:spcBef>
+                <a:spcPts val="500"/>
+              </a:spcBef>
+              <a:buFont typeface="Arial" panose="020B0604020202020204" pitchFamily="34" charset="0"/>
+              <a:buNone/>
+              <a:defRPr sz="1600" kern="1200">
+                <a:solidFill>
+                  <a:schemeClr val="tx1"/>
+                </a:solidFill>
+                <a:latin typeface="+mn-lt"/>
+                <a:ea typeface="+mn-ea"/>
+                <a:cs typeface="+mn-cs"/>
+              </a:defRPr>
+            </a:lvl8pPr>
+            <a:lvl9pPr marL="3657600" indent="0" algn="ctr" defTabSz="914400" rtl="0" eaLnBrk="1" latinLnBrk="0" hangingPunct="1">
+              <a:lnSpc>
+                <a:spcPct val="90000"/>
+              </a:lnSpc>
+              <a:spcBef>
+                <a:spcPts val="500"/>
+              </a:spcBef>
+              <a:buFont typeface="Arial" panose="020B0604020202020204" pitchFamily="34" charset="0"/>
+              <a:buNone/>
+              <a:defRPr sz="1600" kern="1200">
+                <a:solidFill>
+                  <a:schemeClr val="tx1"/>
+                </a:solidFill>
+                <a:latin typeface="+mn-lt"/>
+                <a:ea typeface="+mn-ea"/>
+                <a:cs typeface="+mn-cs"/>
+              </a:defRPr>
+            </a:lvl9pPr>
+          </a:lstStyle>
+          <a:p>
+            <a:r>
+              <a:rPr lang="en-US" dirty="0"/>
+              <a:t>Charlie</a:t>
+            </a:r>
+          </a:p>
+        </p:txBody>
+      </p:sp>
+      <p:sp>
+        <p:nvSpPr>
+          <p:cNvPr id="10" name="Subtitle 2">
+            <a:extLst>
+              <a:ext uri="{FF2B5EF4-FFF2-40B4-BE49-F238E27FC236}">
+                <a16:creationId xmlns:a16="http://schemas.microsoft.com/office/drawing/2014/main" id="{2598C96E-8C23-B82E-CB5B-FB26D10EA56B}"/>
+              </a:ext>
+            </a:extLst>
+          </p:cNvPr>
+          <p:cNvSpPr txBox="1">
+            <a:spLocks/>
+          </p:cNvSpPr>
+          <p:nvPr/>
+        </p:nvSpPr>
+        <p:spPr>
+          <a:xfrm>
+            <a:off x="6096000" y="4032504"/>
+            <a:ext cx="1021080" cy="430466"/>
+          </a:xfrm>
+          <a:prstGeom prst="rect">
+            <a:avLst/>
+          </a:prstGeom>
+        </p:spPr>
+        <p:txBody>
+          <a:bodyPr vert="horz" lIns="91440" tIns="45720" rIns="91440" bIns="45720" rtlCol="0">
+            <a:normAutofit/>
+          </a:bodyPr>
+          <a:lstStyle>
+            <a:lvl1pPr marL="0" indent="0" algn="ctr" defTabSz="914400" rtl="0" eaLnBrk="1" latinLnBrk="0" hangingPunct="1">
+              <a:lnSpc>
+                <a:spcPct val="90000"/>
+              </a:lnSpc>
+              <a:spcBef>
+                <a:spcPts val="1000"/>
+              </a:spcBef>
+              <a:buFont typeface="Arial" panose="020B0604020202020204" pitchFamily="34" charset="0"/>
+              <a:buNone/>
+              <a:defRPr sz="2400" kern="1200">
+                <a:solidFill>
+                  <a:schemeClr val="tx1"/>
+                </a:solidFill>
+                <a:latin typeface="+mn-lt"/>
+                <a:ea typeface="+mn-ea"/>
+                <a:cs typeface="+mn-cs"/>
+              </a:defRPr>
+            </a:lvl1pPr>
+            <a:lvl2pPr marL="457200" indent="0" algn="ctr" defTabSz="914400" rtl="0" eaLnBrk="1" latinLnBrk="0" hangingPunct="1">
+              <a:lnSpc>
+                <a:spcPct val="90000"/>
+              </a:lnSpc>
+              <a:spcBef>
+                <a:spcPts val="500"/>
+              </a:spcBef>
+              <a:buFont typeface="Arial" panose="020B0604020202020204" pitchFamily="34" charset="0"/>
+              <a:buNone/>
+              <a:defRPr sz="2000" kern="1200">
+                <a:solidFill>
+                  <a:schemeClr val="tx1"/>
+                </a:solidFill>
+                <a:latin typeface="+mn-lt"/>
+                <a:ea typeface="+mn-ea"/>
+                <a:cs typeface="+mn-cs"/>
+              </a:defRPr>
+            </a:lvl2pPr>
+            <a:lvl3pPr marL="914400" indent="0" algn="ctr" defTabSz="914400" rtl="0" eaLnBrk="1" latinLnBrk="0" hangingPunct="1">
+              <a:lnSpc>
+                <a:spcPct val="90000"/>
+              </a:lnSpc>
+              <a:spcBef>
+                <a:spcPts val="500"/>
+              </a:spcBef>
+              <a:buFont typeface="Arial" panose="020B0604020202020204" pitchFamily="34" charset="0"/>
+              <a:buNone/>
+              <a:defRPr sz="1800" kern="1200">
+                <a:solidFill>
+                  <a:schemeClr val="tx1"/>
+                </a:solidFill>
+                <a:latin typeface="+mn-lt"/>
+                <a:ea typeface="+mn-ea"/>
+                <a:cs typeface="+mn-cs"/>
+              </a:defRPr>
+            </a:lvl3pPr>
+            <a:lvl4pPr marL="1371600" indent="0" algn="ctr" defTabSz="914400" rtl="0" eaLnBrk="1" latinLnBrk="0" hangingPunct="1">
+              <a:lnSpc>
+                <a:spcPct val="90000"/>
+              </a:lnSpc>
+              <a:spcBef>
+                <a:spcPts val="500"/>
+              </a:spcBef>
+              <a:buFont typeface="Arial" panose="020B0604020202020204" pitchFamily="34" charset="0"/>
+              <a:buNone/>
+              <a:defRPr sz="1600" kern="1200">
+                <a:solidFill>
+                  <a:schemeClr val="tx1"/>
+                </a:solidFill>
+                <a:latin typeface="+mn-lt"/>
+                <a:ea typeface="+mn-ea"/>
+                <a:cs typeface="+mn-cs"/>
+              </a:defRPr>
+            </a:lvl4pPr>
+            <a:lvl5pPr marL="1828800" indent="0" algn="ctr" defTabSz="914400" rtl="0" eaLnBrk="1" latinLnBrk="0" hangingPunct="1">
+              <a:lnSpc>
+                <a:spcPct val="90000"/>
+              </a:lnSpc>
+              <a:spcBef>
+                <a:spcPts val="500"/>
+              </a:spcBef>
+              <a:buFont typeface="Arial" panose="020B0604020202020204" pitchFamily="34" charset="0"/>
+              <a:buNone/>
+              <a:defRPr sz="1600" kern="1200">
+                <a:solidFill>
+                  <a:schemeClr val="tx1"/>
+                </a:solidFill>
+                <a:latin typeface="+mn-lt"/>
+                <a:ea typeface="+mn-ea"/>
+                <a:cs typeface="+mn-cs"/>
+              </a:defRPr>
+            </a:lvl5pPr>
+            <a:lvl6pPr marL="2286000" indent="0" algn="ctr" defTabSz="914400" rtl="0" eaLnBrk="1" latinLnBrk="0" hangingPunct="1">
+              <a:lnSpc>
+                <a:spcPct val="90000"/>
+              </a:lnSpc>
+              <a:spcBef>
+                <a:spcPts val="500"/>
+              </a:spcBef>
+              <a:buFont typeface="Arial" panose="020B0604020202020204" pitchFamily="34" charset="0"/>
+              <a:buNone/>
+              <a:defRPr sz="1600" kern="1200">
+                <a:solidFill>
+                  <a:schemeClr val="tx1"/>
+                </a:solidFill>
+                <a:latin typeface="+mn-lt"/>
+                <a:ea typeface="+mn-ea"/>
+                <a:cs typeface="+mn-cs"/>
+              </a:defRPr>
+            </a:lvl6pPr>
+            <a:lvl7pPr marL="2743200" indent="0" algn="ctr" defTabSz="914400" rtl="0" eaLnBrk="1" latinLnBrk="0" hangingPunct="1">
+              <a:lnSpc>
+                <a:spcPct val="90000"/>
+              </a:lnSpc>
+              <a:spcBef>
+                <a:spcPts val="500"/>
+              </a:spcBef>
+              <a:buFont typeface="Arial" panose="020B0604020202020204" pitchFamily="34" charset="0"/>
+              <a:buNone/>
+              <a:defRPr sz="1600" kern="1200">
+                <a:solidFill>
+                  <a:schemeClr val="tx1"/>
+                </a:solidFill>
+                <a:latin typeface="+mn-lt"/>
+                <a:ea typeface="+mn-ea"/>
+                <a:cs typeface="+mn-cs"/>
+              </a:defRPr>
+            </a:lvl7pPr>
+            <a:lvl8pPr marL="3200400" indent="0" algn="ctr" defTabSz="914400" rtl="0" eaLnBrk="1" latinLnBrk="0" hangingPunct="1">
+              <a:lnSpc>
+                <a:spcPct val="90000"/>
+              </a:lnSpc>
+              <a:spcBef>
+                <a:spcPts val="500"/>
+              </a:spcBef>
+              <a:buFont typeface="Arial" panose="020B0604020202020204" pitchFamily="34" charset="0"/>
+              <a:buNone/>
+              <a:defRPr sz="1600" kern="1200">
+                <a:solidFill>
+                  <a:schemeClr val="tx1"/>
+                </a:solidFill>
+                <a:latin typeface="+mn-lt"/>
+                <a:ea typeface="+mn-ea"/>
+                <a:cs typeface="+mn-cs"/>
+              </a:defRPr>
+            </a:lvl8pPr>
+            <a:lvl9pPr marL="3657600" indent="0" algn="ctr" defTabSz="914400" rtl="0" eaLnBrk="1" latinLnBrk="0" hangingPunct="1">
+              <a:lnSpc>
+                <a:spcPct val="90000"/>
+              </a:lnSpc>
+              <a:spcBef>
+                <a:spcPts val="500"/>
+              </a:spcBef>
+              <a:buFont typeface="Arial" panose="020B0604020202020204" pitchFamily="34" charset="0"/>
+              <a:buNone/>
+              <a:defRPr sz="1600" kern="1200">
+                <a:solidFill>
+                  <a:schemeClr val="tx1"/>
+                </a:solidFill>
+                <a:latin typeface="+mn-lt"/>
+                <a:ea typeface="+mn-ea"/>
+                <a:cs typeface="+mn-cs"/>
+              </a:defRPr>
+            </a:lvl9pPr>
+          </a:lstStyle>
+          <a:p>
+            <a:r>
+              <a:rPr lang="en-US" dirty="0"/>
+              <a:t>Hatch</a:t>
+            </a:r>
+          </a:p>
+        </p:txBody>
+      </p:sp>
+    </p:spTree>
+    <p:extLst>
+      <p:ext uri="{BB962C8B-B14F-4D97-AF65-F5344CB8AC3E}">
+        <p14:creationId xmlns:p14="http://schemas.microsoft.com/office/powerpoint/2010/main" val="4067232557"/>
       </p:ext>
     </p:extLst>
   </p:cSld>

--- a/Current Presentation/Spring 2026.pptx
+++ b/Current Presentation/Spring 2026.pptx
@@ -7,6 +7,7 @@
   <p:sldIdLst>
     <p:sldId id="256" r:id="rId2"/>
     <p:sldId id="257" r:id="rId3"/>
+    <p:sldId id="258" r:id="rId4"/>
   </p:sldIdLst>
   <p:sldSz cx="12192000" cy="6858000"/>
   <p:notesSz cx="6858000" cy="9144000"/>
@@ -3478,8 +3479,8 @@
         </p:nvSpPr>
         <p:spPr>
           <a:xfrm>
-            <a:off x="5123688" y="3602038"/>
-            <a:ext cx="1944624" cy="430466"/>
+            <a:off x="5809488" y="3602038"/>
+            <a:ext cx="573024" cy="430466"/>
           </a:xfrm>
           <a:prstGeom prst="rect">
             <a:avLst/>
@@ -4055,6 +4056,404 @@
             <a:r>
               <a:rPr lang="en-US" dirty="0"/>
               <a:t>Hatch</a:t>
+            </a:r>
+          </a:p>
+        </p:txBody>
+      </p:sp>
+      <p:sp>
+        <p:nvSpPr>
+          <p:cNvPr id="16" name="Subtitle 2">
+            <a:extLst>
+              <a:ext uri="{FF2B5EF4-FFF2-40B4-BE49-F238E27FC236}">
+                <a16:creationId xmlns:a16="http://schemas.microsoft.com/office/drawing/2014/main" id="{65A68BF6-5315-AA56-5210-A9B86AB9AEF2}"/>
+              </a:ext>
+            </a:extLst>
+          </p:cNvPr>
+          <p:cNvSpPr txBox="1">
+            <a:spLocks/>
+          </p:cNvSpPr>
+          <p:nvPr/>
+        </p:nvSpPr>
+        <p:spPr>
+          <a:xfrm>
+            <a:off x="5809488" y="5201400"/>
+            <a:ext cx="573024" cy="430466"/>
+          </a:xfrm>
+          <a:prstGeom prst="rect">
+            <a:avLst/>
+          </a:prstGeom>
+        </p:spPr>
+        <p:txBody>
+          <a:bodyPr vert="horz" lIns="91440" tIns="45720" rIns="91440" bIns="45720" rtlCol="0">
+            <a:normAutofit fontScale="92500" lnSpcReduction="10000"/>
+          </a:bodyPr>
+          <a:lstStyle>
+            <a:lvl1pPr marL="0" indent="0" algn="ctr" defTabSz="914400" rtl="0" eaLnBrk="1" latinLnBrk="0" hangingPunct="1">
+              <a:lnSpc>
+                <a:spcPct val="90000"/>
+              </a:lnSpc>
+              <a:spcBef>
+                <a:spcPts val="1000"/>
+              </a:spcBef>
+              <a:buFont typeface="Arial" panose="020B0604020202020204" pitchFamily="34" charset="0"/>
+              <a:buNone/>
+              <a:defRPr sz="2400" kern="1200">
+                <a:solidFill>
+                  <a:schemeClr val="tx1"/>
+                </a:solidFill>
+                <a:latin typeface="+mn-lt"/>
+                <a:ea typeface="+mn-ea"/>
+                <a:cs typeface="+mn-cs"/>
+              </a:defRPr>
+            </a:lvl1pPr>
+            <a:lvl2pPr marL="457200" indent="0" algn="ctr" defTabSz="914400" rtl="0" eaLnBrk="1" latinLnBrk="0" hangingPunct="1">
+              <a:lnSpc>
+                <a:spcPct val="90000"/>
+              </a:lnSpc>
+              <a:spcBef>
+                <a:spcPts val="500"/>
+              </a:spcBef>
+              <a:buFont typeface="Arial" panose="020B0604020202020204" pitchFamily="34" charset="0"/>
+              <a:buNone/>
+              <a:defRPr sz="2000" kern="1200">
+                <a:solidFill>
+                  <a:schemeClr val="tx1"/>
+                </a:solidFill>
+                <a:latin typeface="+mn-lt"/>
+                <a:ea typeface="+mn-ea"/>
+                <a:cs typeface="+mn-cs"/>
+              </a:defRPr>
+            </a:lvl2pPr>
+            <a:lvl3pPr marL="914400" indent="0" algn="ctr" defTabSz="914400" rtl="0" eaLnBrk="1" latinLnBrk="0" hangingPunct="1">
+              <a:lnSpc>
+                <a:spcPct val="90000"/>
+              </a:lnSpc>
+              <a:spcBef>
+                <a:spcPts val="500"/>
+              </a:spcBef>
+              <a:buFont typeface="Arial" panose="020B0604020202020204" pitchFamily="34" charset="0"/>
+              <a:buNone/>
+              <a:defRPr sz="1800" kern="1200">
+                <a:solidFill>
+                  <a:schemeClr val="tx1"/>
+                </a:solidFill>
+                <a:latin typeface="+mn-lt"/>
+                <a:ea typeface="+mn-ea"/>
+                <a:cs typeface="+mn-cs"/>
+              </a:defRPr>
+            </a:lvl3pPr>
+            <a:lvl4pPr marL="1371600" indent="0" algn="ctr" defTabSz="914400" rtl="0" eaLnBrk="1" latinLnBrk="0" hangingPunct="1">
+              <a:lnSpc>
+                <a:spcPct val="90000"/>
+              </a:lnSpc>
+              <a:spcBef>
+                <a:spcPts val="500"/>
+              </a:spcBef>
+              <a:buFont typeface="Arial" panose="020B0604020202020204" pitchFamily="34" charset="0"/>
+              <a:buNone/>
+              <a:defRPr sz="1600" kern="1200">
+                <a:solidFill>
+                  <a:schemeClr val="tx1"/>
+                </a:solidFill>
+                <a:latin typeface="+mn-lt"/>
+                <a:ea typeface="+mn-ea"/>
+                <a:cs typeface="+mn-cs"/>
+              </a:defRPr>
+            </a:lvl4pPr>
+            <a:lvl5pPr marL="1828800" indent="0" algn="ctr" defTabSz="914400" rtl="0" eaLnBrk="1" latinLnBrk="0" hangingPunct="1">
+              <a:lnSpc>
+                <a:spcPct val="90000"/>
+              </a:lnSpc>
+              <a:spcBef>
+                <a:spcPts val="500"/>
+              </a:spcBef>
+              <a:buFont typeface="Arial" panose="020B0604020202020204" pitchFamily="34" charset="0"/>
+              <a:buNone/>
+              <a:defRPr sz="1600" kern="1200">
+                <a:solidFill>
+                  <a:schemeClr val="tx1"/>
+                </a:solidFill>
+                <a:latin typeface="+mn-lt"/>
+                <a:ea typeface="+mn-ea"/>
+                <a:cs typeface="+mn-cs"/>
+              </a:defRPr>
+            </a:lvl5pPr>
+            <a:lvl6pPr marL="2286000" indent="0" algn="ctr" defTabSz="914400" rtl="0" eaLnBrk="1" latinLnBrk="0" hangingPunct="1">
+              <a:lnSpc>
+                <a:spcPct val="90000"/>
+              </a:lnSpc>
+              <a:spcBef>
+                <a:spcPts val="500"/>
+              </a:spcBef>
+              <a:buFont typeface="Arial" panose="020B0604020202020204" pitchFamily="34" charset="0"/>
+              <a:buNone/>
+              <a:defRPr sz="1600" kern="1200">
+                <a:solidFill>
+                  <a:schemeClr val="tx1"/>
+                </a:solidFill>
+                <a:latin typeface="+mn-lt"/>
+                <a:ea typeface="+mn-ea"/>
+                <a:cs typeface="+mn-cs"/>
+              </a:defRPr>
+            </a:lvl6pPr>
+            <a:lvl7pPr marL="2743200" indent="0" algn="ctr" defTabSz="914400" rtl="0" eaLnBrk="1" latinLnBrk="0" hangingPunct="1">
+              <a:lnSpc>
+                <a:spcPct val="90000"/>
+              </a:lnSpc>
+              <a:spcBef>
+                <a:spcPts val="500"/>
+              </a:spcBef>
+              <a:buFont typeface="Arial" panose="020B0604020202020204" pitchFamily="34" charset="0"/>
+              <a:buNone/>
+              <a:defRPr sz="1600" kern="1200">
+                <a:solidFill>
+                  <a:schemeClr val="tx1"/>
+                </a:solidFill>
+                <a:latin typeface="+mn-lt"/>
+                <a:ea typeface="+mn-ea"/>
+                <a:cs typeface="+mn-cs"/>
+              </a:defRPr>
+            </a:lvl7pPr>
+            <a:lvl8pPr marL="3200400" indent="0" algn="ctr" defTabSz="914400" rtl="0" eaLnBrk="1" latinLnBrk="0" hangingPunct="1">
+              <a:lnSpc>
+                <a:spcPct val="90000"/>
+              </a:lnSpc>
+              <a:spcBef>
+                <a:spcPts val="500"/>
+              </a:spcBef>
+              <a:buFont typeface="Arial" panose="020B0604020202020204" pitchFamily="34" charset="0"/>
+              <a:buNone/>
+              <a:defRPr sz="1600" kern="1200">
+                <a:solidFill>
+                  <a:schemeClr val="tx1"/>
+                </a:solidFill>
+                <a:latin typeface="+mn-lt"/>
+                <a:ea typeface="+mn-ea"/>
+                <a:cs typeface="+mn-cs"/>
+              </a:defRPr>
+            </a:lvl8pPr>
+            <a:lvl9pPr marL="3657600" indent="0" algn="ctr" defTabSz="914400" rtl="0" eaLnBrk="1" latinLnBrk="0" hangingPunct="1">
+              <a:lnSpc>
+                <a:spcPct val="90000"/>
+              </a:lnSpc>
+              <a:spcBef>
+                <a:spcPts val="500"/>
+              </a:spcBef>
+              <a:buFont typeface="Arial" panose="020B0604020202020204" pitchFamily="34" charset="0"/>
+              <a:buNone/>
+              <a:defRPr sz="1600" kern="1200">
+                <a:solidFill>
+                  <a:schemeClr val="tx1"/>
+                </a:solidFill>
+                <a:latin typeface="+mn-lt"/>
+                <a:ea typeface="+mn-ea"/>
+                <a:cs typeface="+mn-cs"/>
+              </a:defRPr>
+            </a:lvl9pPr>
+          </a:lstStyle>
+          <a:p>
+            <a:r>
+              <a:rPr lang="en-US" sz="2800" b="1" dirty="0"/>
+              <a:t>By</a:t>
+            </a:r>
+          </a:p>
+        </p:txBody>
+      </p:sp>
+      <p:sp>
+        <p:nvSpPr>
+          <p:cNvPr id="17" name="Subtitle 2">
+            <a:extLst>
+              <a:ext uri="{FF2B5EF4-FFF2-40B4-BE49-F238E27FC236}">
+                <a16:creationId xmlns:a16="http://schemas.microsoft.com/office/drawing/2014/main" id="{1CEDFCB4-D474-9771-D59A-9F9895A0CE20}"/>
+              </a:ext>
+            </a:extLst>
+          </p:cNvPr>
+          <p:cNvSpPr txBox="1">
+            <a:spLocks/>
+          </p:cNvSpPr>
+          <p:nvPr/>
+        </p:nvSpPr>
+        <p:spPr>
+          <a:xfrm>
+            <a:off x="7258125" y="5045354"/>
+            <a:ext cx="573024" cy="430466"/>
+          </a:xfrm>
+          <a:prstGeom prst="rect">
+            <a:avLst/>
+          </a:prstGeom>
+        </p:spPr>
+        <p:txBody>
+          <a:bodyPr vert="horz" lIns="91440" tIns="45720" rIns="91440" bIns="45720" rtlCol="0">
+            <a:normAutofit fontScale="92500" lnSpcReduction="10000"/>
+          </a:bodyPr>
+          <a:lstStyle>
+            <a:lvl1pPr marL="0" indent="0" algn="ctr" defTabSz="914400" rtl="0" eaLnBrk="1" latinLnBrk="0" hangingPunct="1">
+              <a:lnSpc>
+                <a:spcPct val="90000"/>
+              </a:lnSpc>
+              <a:spcBef>
+                <a:spcPts val="1000"/>
+              </a:spcBef>
+              <a:buFont typeface="Arial" panose="020B0604020202020204" pitchFamily="34" charset="0"/>
+              <a:buNone/>
+              <a:defRPr sz="2400" kern="1200">
+                <a:solidFill>
+                  <a:schemeClr val="tx1"/>
+                </a:solidFill>
+                <a:latin typeface="+mn-lt"/>
+                <a:ea typeface="+mn-ea"/>
+                <a:cs typeface="+mn-cs"/>
+              </a:defRPr>
+            </a:lvl1pPr>
+            <a:lvl2pPr marL="457200" indent="0" algn="ctr" defTabSz="914400" rtl="0" eaLnBrk="1" latinLnBrk="0" hangingPunct="1">
+              <a:lnSpc>
+                <a:spcPct val="90000"/>
+              </a:lnSpc>
+              <a:spcBef>
+                <a:spcPts val="500"/>
+              </a:spcBef>
+              <a:buFont typeface="Arial" panose="020B0604020202020204" pitchFamily="34" charset="0"/>
+              <a:buNone/>
+              <a:defRPr sz="2000" kern="1200">
+                <a:solidFill>
+                  <a:schemeClr val="tx1"/>
+                </a:solidFill>
+                <a:latin typeface="+mn-lt"/>
+                <a:ea typeface="+mn-ea"/>
+                <a:cs typeface="+mn-cs"/>
+              </a:defRPr>
+            </a:lvl2pPr>
+            <a:lvl3pPr marL="914400" indent="0" algn="ctr" defTabSz="914400" rtl="0" eaLnBrk="1" latinLnBrk="0" hangingPunct="1">
+              <a:lnSpc>
+                <a:spcPct val="90000"/>
+              </a:lnSpc>
+              <a:spcBef>
+                <a:spcPts val="500"/>
+              </a:spcBef>
+              <a:buFont typeface="Arial" panose="020B0604020202020204" pitchFamily="34" charset="0"/>
+              <a:buNone/>
+              <a:defRPr sz="1800" kern="1200">
+                <a:solidFill>
+                  <a:schemeClr val="tx1"/>
+                </a:solidFill>
+                <a:latin typeface="+mn-lt"/>
+                <a:ea typeface="+mn-ea"/>
+                <a:cs typeface="+mn-cs"/>
+              </a:defRPr>
+            </a:lvl3pPr>
+            <a:lvl4pPr marL="1371600" indent="0" algn="ctr" defTabSz="914400" rtl="0" eaLnBrk="1" latinLnBrk="0" hangingPunct="1">
+              <a:lnSpc>
+                <a:spcPct val="90000"/>
+              </a:lnSpc>
+              <a:spcBef>
+                <a:spcPts val="500"/>
+              </a:spcBef>
+              <a:buFont typeface="Arial" panose="020B0604020202020204" pitchFamily="34" charset="0"/>
+              <a:buNone/>
+              <a:defRPr sz="1600" kern="1200">
+                <a:solidFill>
+                  <a:schemeClr val="tx1"/>
+                </a:solidFill>
+                <a:latin typeface="+mn-lt"/>
+                <a:ea typeface="+mn-ea"/>
+                <a:cs typeface="+mn-cs"/>
+              </a:defRPr>
+            </a:lvl4pPr>
+            <a:lvl5pPr marL="1828800" indent="0" algn="ctr" defTabSz="914400" rtl="0" eaLnBrk="1" latinLnBrk="0" hangingPunct="1">
+              <a:lnSpc>
+                <a:spcPct val="90000"/>
+              </a:lnSpc>
+              <a:spcBef>
+                <a:spcPts val="500"/>
+              </a:spcBef>
+              <a:buFont typeface="Arial" panose="020B0604020202020204" pitchFamily="34" charset="0"/>
+              <a:buNone/>
+              <a:defRPr sz="1600" kern="1200">
+                <a:solidFill>
+                  <a:schemeClr val="tx1"/>
+                </a:solidFill>
+                <a:latin typeface="+mn-lt"/>
+                <a:ea typeface="+mn-ea"/>
+                <a:cs typeface="+mn-cs"/>
+              </a:defRPr>
+            </a:lvl5pPr>
+            <a:lvl6pPr marL="2286000" indent="0" algn="ctr" defTabSz="914400" rtl="0" eaLnBrk="1" latinLnBrk="0" hangingPunct="1">
+              <a:lnSpc>
+                <a:spcPct val="90000"/>
+              </a:lnSpc>
+              <a:spcBef>
+                <a:spcPts val="500"/>
+              </a:spcBef>
+              <a:buFont typeface="Arial" panose="020B0604020202020204" pitchFamily="34" charset="0"/>
+              <a:buNone/>
+              <a:defRPr sz="1600" kern="1200">
+                <a:solidFill>
+                  <a:schemeClr val="tx1"/>
+                </a:solidFill>
+                <a:latin typeface="+mn-lt"/>
+                <a:ea typeface="+mn-ea"/>
+                <a:cs typeface="+mn-cs"/>
+              </a:defRPr>
+            </a:lvl6pPr>
+            <a:lvl7pPr marL="2743200" indent="0" algn="ctr" defTabSz="914400" rtl="0" eaLnBrk="1" latinLnBrk="0" hangingPunct="1">
+              <a:lnSpc>
+                <a:spcPct val="90000"/>
+              </a:lnSpc>
+              <a:spcBef>
+                <a:spcPts val="500"/>
+              </a:spcBef>
+              <a:buFont typeface="Arial" panose="020B0604020202020204" pitchFamily="34" charset="0"/>
+              <a:buNone/>
+              <a:defRPr sz="1600" kern="1200">
+                <a:solidFill>
+                  <a:schemeClr val="tx1"/>
+                </a:solidFill>
+                <a:latin typeface="+mn-lt"/>
+                <a:ea typeface="+mn-ea"/>
+                <a:cs typeface="+mn-cs"/>
+              </a:defRPr>
+            </a:lvl7pPr>
+            <a:lvl8pPr marL="3200400" indent="0" algn="ctr" defTabSz="914400" rtl="0" eaLnBrk="1" latinLnBrk="0" hangingPunct="1">
+              <a:lnSpc>
+                <a:spcPct val="90000"/>
+              </a:lnSpc>
+              <a:spcBef>
+                <a:spcPts val="500"/>
+              </a:spcBef>
+              <a:buFont typeface="Arial" panose="020B0604020202020204" pitchFamily="34" charset="0"/>
+              <a:buNone/>
+              <a:defRPr sz="1600" kern="1200">
+                <a:solidFill>
+                  <a:schemeClr val="tx1"/>
+                </a:solidFill>
+                <a:latin typeface="+mn-lt"/>
+                <a:ea typeface="+mn-ea"/>
+                <a:cs typeface="+mn-cs"/>
+              </a:defRPr>
+            </a:lvl8pPr>
+            <a:lvl9pPr marL="3657600" indent="0" algn="ctr" defTabSz="914400" rtl="0" eaLnBrk="1" latinLnBrk="0" hangingPunct="1">
+              <a:lnSpc>
+                <a:spcPct val="90000"/>
+              </a:lnSpc>
+              <a:spcBef>
+                <a:spcPts val="500"/>
+              </a:spcBef>
+              <a:buFont typeface="Arial" panose="020B0604020202020204" pitchFamily="34" charset="0"/>
+              <a:buNone/>
+              <a:defRPr sz="1600" kern="1200">
+                <a:solidFill>
+                  <a:schemeClr val="tx1"/>
+                </a:solidFill>
+                <a:latin typeface="+mn-lt"/>
+                <a:ea typeface="+mn-ea"/>
+                <a:cs typeface="+mn-cs"/>
+              </a:defRPr>
+            </a:lvl9pPr>
+          </a:lstStyle>
+          <a:p>
+            <a:r>
+              <a:rPr lang="en-US" sz="2800" b="1" dirty="0"/>
+              <a:t>y</a:t>
             </a:r>
           </a:p>
         </p:txBody>
@@ -4069,6 +4468,2491 @@
   <p:clrMapOvr>
     <a:masterClrMapping/>
   </p:clrMapOvr>
+  <mc:AlternateContent xmlns:mc="http://schemas.openxmlformats.org/markup-compatibility/2006">
+    <mc:Choice xmlns:p14="http://schemas.microsoft.com/office/powerpoint/2010/main" Requires="p14">
+      <p:timing>
+        <p:tnLst>
+          <p:par>
+            <p:cTn id="1" dur="indefinite" restart="never" nodeType="tmRoot">
+              <p:childTnLst>
+                <p:seq concurrent="1" nextAc="seek">
+                  <p:cTn id="2" dur="indefinite" nodeType="mainSeq">
+                    <p:childTnLst>
+                      <p:par>
+                        <p:cTn id="3" fill="hold">
+                          <p:stCondLst>
+                            <p:cond delay="indefinite"/>
+                          </p:stCondLst>
+                          <p:childTnLst>
+                            <p:par>
+                              <p:cTn id="4" fill="hold">
+                                <p:stCondLst>
+                                  <p:cond delay="0"/>
+                                </p:stCondLst>
+                                <p:childTnLst>
+                                  <p:par>
+                                    <p:cTn id="5" presetID="45" presetClass="entr" presetSubtype="0" fill="hold" grpId="0" nodeType="clickEffect">
+                                      <p:stCondLst>
+                                        <p:cond delay="0"/>
+                                      </p:stCondLst>
+                                      <p:childTnLst>
+                                        <p:set>
+                                          <p:cBhvr>
+                                            <p:cTn id="6" dur="1" fill="hold">
+                                              <p:stCondLst>
+                                                <p:cond delay="0"/>
+                                              </p:stCondLst>
+                                            </p:cTn>
+                                            <p:tgtEl>
+                                              <p:spTgt spid="2"/>
+                                            </p:tgtEl>
+                                            <p:attrNameLst>
+                                              <p:attrName>style.visibility</p:attrName>
+                                            </p:attrNameLst>
+                                          </p:cBhvr>
+                                          <p:to>
+                                            <p:strVal val="visible"/>
+                                          </p:to>
+                                        </p:set>
+                                        <p:animEffect transition="in" filter="fade">
+                                          <p:cBhvr>
+                                            <p:cTn id="7" dur="2000"/>
+                                            <p:tgtEl>
+                                              <p:spTgt spid="2"/>
+                                            </p:tgtEl>
+                                          </p:cBhvr>
+                                        </p:animEffect>
+                                        <p:anim calcmode="lin" valueType="num">
+                                          <p:cBhvr>
+                                            <p:cTn id="8" dur="2000" fill="hold"/>
+                                            <p:tgtEl>
+                                              <p:spTgt spid="2"/>
+                                            </p:tgtEl>
+                                            <p:attrNameLst>
+                                              <p:attrName>ppt_w</p:attrName>
+                                            </p:attrNameLst>
+                                          </p:cBhvr>
+                                          <p:tavLst>
+                                            <p:tav tm="0" fmla="#ppt_w*sin(2.5*pi*$)">
+                                              <p:val>
+                                                <p:fltVal val="0"/>
+                                              </p:val>
+                                            </p:tav>
+                                            <p:tav tm="100000">
+                                              <p:val>
+                                                <p:fltVal val="1"/>
+                                              </p:val>
+                                            </p:tav>
+                                          </p:tavLst>
+                                        </p:anim>
+                                        <p:anim calcmode="lin" valueType="num">
+                                          <p:cBhvr>
+                                            <p:cTn id="9" dur="2000" fill="hold"/>
+                                            <p:tgtEl>
+                                              <p:spTgt spid="2"/>
+                                            </p:tgtEl>
+                                            <p:attrNameLst>
+                                              <p:attrName>ppt_h</p:attrName>
+                                            </p:attrNameLst>
+                                          </p:cBhvr>
+                                          <p:tavLst>
+                                            <p:tav tm="0">
+                                              <p:val>
+                                                <p:strVal val="#ppt_h"/>
+                                              </p:val>
+                                            </p:tav>
+                                            <p:tav tm="100000">
+                                              <p:val>
+                                                <p:strVal val="#ppt_h"/>
+                                              </p:val>
+                                            </p:tav>
+                                          </p:tavLst>
+                                        </p:anim>
+                                      </p:childTnLst>
+                                    </p:cTn>
+                                  </p:par>
+                                </p:childTnLst>
+                              </p:cTn>
+                            </p:par>
+                            <p:par>
+                              <p:cTn id="10" fill="hold">
+                                <p:stCondLst>
+                                  <p:cond delay="2000"/>
+                                </p:stCondLst>
+                                <p:childTnLst>
+                                  <p:par>
+                                    <p:cTn id="11" presetID="2" presetClass="entr" presetSubtype="2" fill="hold" grpId="0" nodeType="afterEffect" p14:presetBounceEnd="16667">
+                                      <p:stCondLst>
+                                        <p:cond delay="0"/>
+                                      </p:stCondLst>
+                                      <p:childTnLst>
+                                        <p:set>
+                                          <p:cBhvr>
+                                            <p:cTn id="12" dur="1" fill="hold">
+                                              <p:stCondLst>
+                                                <p:cond delay="0"/>
+                                              </p:stCondLst>
+                                            </p:cTn>
+                                            <p:tgtEl>
+                                              <p:spTgt spid="8"/>
+                                            </p:tgtEl>
+                                            <p:attrNameLst>
+                                              <p:attrName>style.visibility</p:attrName>
+                                            </p:attrNameLst>
+                                          </p:cBhvr>
+                                          <p:to>
+                                            <p:strVal val="visible"/>
+                                          </p:to>
+                                        </p:set>
+                                        <p:anim calcmode="lin" valueType="num" p14:bounceEnd="16667">
+                                          <p:cBhvr additive="base">
+                                            <p:cTn id="13" dur="1500" fill="hold"/>
+                                            <p:tgtEl>
+                                              <p:spTgt spid="8"/>
+                                            </p:tgtEl>
+                                            <p:attrNameLst>
+                                              <p:attrName>ppt_x</p:attrName>
+                                            </p:attrNameLst>
+                                          </p:cBhvr>
+                                          <p:tavLst>
+                                            <p:tav tm="0">
+                                              <p:val>
+                                                <p:strVal val="1+#ppt_w/2"/>
+                                              </p:val>
+                                            </p:tav>
+                                            <p:tav tm="100000">
+                                              <p:val>
+                                                <p:strVal val="#ppt_x"/>
+                                              </p:val>
+                                            </p:tav>
+                                          </p:tavLst>
+                                        </p:anim>
+                                        <p:anim calcmode="lin" valueType="num" p14:bounceEnd="16667">
+                                          <p:cBhvr additive="base">
+                                            <p:cTn id="14" dur="1500" fill="hold"/>
+                                            <p:tgtEl>
+                                              <p:spTgt spid="8"/>
+                                            </p:tgtEl>
+                                            <p:attrNameLst>
+                                              <p:attrName>ppt_y</p:attrName>
+                                            </p:attrNameLst>
+                                          </p:cBhvr>
+                                          <p:tavLst>
+                                            <p:tav tm="0">
+                                              <p:val>
+                                                <p:strVal val="#ppt_y"/>
+                                              </p:val>
+                                            </p:tav>
+                                            <p:tav tm="100000">
+                                              <p:val>
+                                                <p:strVal val="#ppt_y"/>
+                                              </p:val>
+                                            </p:tav>
+                                          </p:tavLst>
+                                        </p:anim>
+                                      </p:childTnLst>
+                                    </p:cTn>
+                                  </p:par>
+                                  <p:par>
+                                    <p:cTn id="15" presetID="2" presetClass="entr" presetSubtype="8" fill="hold" grpId="0" nodeType="withEffect" p14:presetBounceEnd="16667">
+                                      <p:stCondLst>
+                                        <p:cond delay="0"/>
+                                      </p:stCondLst>
+                                      <p:childTnLst>
+                                        <p:set>
+                                          <p:cBhvr>
+                                            <p:cTn id="16" dur="1" fill="hold">
+                                              <p:stCondLst>
+                                                <p:cond delay="0"/>
+                                              </p:stCondLst>
+                                            </p:cTn>
+                                            <p:tgtEl>
+                                              <p:spTgt spid="10"/>
+                                            </p:tgtEl>
+                                            <p:attrNameLst>
+                                              <p:attrName>style.visibility</p:attrName>
+                                            </p:attrNameLst>
+                                          </p:cBhvr>
+                                          <p:to>
+                                            <p:strVal val="visible"/>
+                                          </p:to>
+                                        </p:set>
+                                        <p:anim calcmode="lin" valueType="num" p14:bounceEnd="16667">
+                                          <p:cBhvr additive="base">
+                                            <p:cTn id="17" dur="1500" fill="hold"/>
+                                            <p:tgtEl>
+                                              <p:spTgt spid="10"/>
+                                            </p:tgtEl>
+                                            <p:attrNameLst>
+                                              <p:attrName>ppt_x</p:attrName>
+                                            </p:attrNameLst>
+                                          </p:cBhvr>
+                                          <p:tavLst>
+                                            <p:tav tm="0">
+                                              <p:val>
+                                                <p:strVal val="0-#ppt_w/2"/>
+                                              </p:val>
+                                            </p:tav>
+                                            <p:tav tm="100000">
+                                              <p:val>
+                                                <p:strVal val="#ppt_x"/>
+                                              </p:val>
+                                            </p:tav>
+                                          </p:tavLst>
+                                        </p:anim>
+                                        <p:anim calcmode="lin" valueType="num" p14:bounceEnd="16667">
+                                          <p:cBhvr additive="base">
+                                            <p:cTn id="18" dur="1500" fill="hold"/>
+                                            <p:tgtEl>
+                                              <p:spTgt spid="10"/>
+                                            </p:tgtEl>
+                                            <p:attrNameLst>
+                                              <p:attrName>ppt_y</p:attrName>
+                                            </p:attrNameLst>
+                                          </p:cBhvr>
+                                          <p:tavLst>
+                                            <p:tav tm="0">
+                                              <p:val>
+                                                <p:strVal val="#ppt_y"/>
+                                              </p:val>
+                                            </p:tav>
+                                            <p:tav tm="100000">
+                                              <p:val>
+                                                <p:strVal val="#ppt_y"/>
+                                              </p:val>
+                                            </p:tav>
+                                          </p:tavLst>
+                                        </p:anim>
+                                      </p:childTnLst>
+                                    </p:cTn>
+                                  </p:par>
+                                </p:childTnLst>
+                              </p:cTn>
+                            </p:par>
+                            <p:par>
+                              <p:cTn id="19" fill="hold">
+                                <p:stCondLst>
+                                  <p:cond delay="3500"/>
+                                </p:stCondLst>
+                                <p:childTnLst>
+                                  <p:par>
+                                    <p:cTn id="20" presetID="10" presetClass="entr" presetSubtype="0" fill="hold" grpId="0" nodeType="afterEffect">
+                                      <p:stCondLst>
+                                        <p:cond delay="0"/>
+                                      </p:stCondLst>
+                                      <p:childTnLst>
+                                        <p:set>
+                                          <p:cBhvr>
+                                            <p:cTn id="21" dur="1" fill="hold">
+                                              <p:stCondLst>
+                                                <p:cond delay="0"/>
+                                              </p:stCondLst>
+                                            </p:cTn>
+                                            <p:tgtEl>
+                                              <p:spTgt spid="4"/>
+                                            </p:tgtEl>
+                                            <p:attrNameLst>
+                                              <p:attrName>style.visibility</p:attrName>
+                                            </p:attrNameLst>
+                                          </p:cBhvr>
+                                          <p:to>
+                                            <p:strVal val="visible"/>
+                                          </p:to>
+                                        </p:set>
+                                        <p:animEffect transition="in" filter="fade">
+                                          <p:cBhvr>
+                                            <p:cTn id="22" dur="500"/>
+                                            <p:tgtEl>
+                                              <p:spTgt spid="4"/>
+                                            </p:tgtEl>
+                                          </p:cBhvr>
+                                        </p:animEffect>
+                                      </p:childTnLst>
+                                    </p:cTn>
+                                  </p:par>
+                                </p:childTnLst>
+                              </p:cTn>
+                            </p:par>
+                            <p:par>
+                              <p:cTn id="23" fill="hold">
+                                <p:stCondLst>
+                                  <p:cond delay="4000"/>
+                                </p:stCondLst>
+                                <p:childTnLst>
+                                  <p:par>
+                                    <p:cTn id="24" presetID="10" presetClass="entr" presetSubtype="0" fill="hold" grpId="0" nodeType="afterEffect">
+                                      <p:stCondLst>
+                                        <p:cond delay="0"/>
+                                      </p:stCondLst>
+                                      <p:childTnLst>
+                                        <p:set>
+                                          <p:cBhvr>
+                                            <p:cTn id="25" dur="1" fill="hold">
+                                              <p:stCondLst>
+                                                <p:cond delay="0"/>
+                                              </p:stCondLst>
+                                            </p:cTn>
+                                            <p:tgtEl>
+                                              <p:spTgt spid="16"/>
+                                            </p:tgtEl>
+                                            <p:attrNameLst>
+                                              <p:attrName>style.visibility</p:attrName>
+                                            </p:attrNameLst>
+                                          </p:cBhvr>
+                                          <p:to>
+                                            <p:strVal val="visible"/>
+                                          </p:to>
+                                        </p:set>
+                                        <p:animEffect transition="in" filter="fade">
+                                          <p:cBhvr>
+                                            <p:cTn id="26" dur="500"/>
+                                            <p:tgtEl>
+                                              <p:spTgt spid="16"/>
+                                            </p:tgtEl>
+                                          </p:cBhvr>
+                                        </p:animEffect>
+                                      </p:childTnLst>
+                                    </p:cTn>
+                                  </p:par>
+                                </p:childTnLst>
+                              </p:cTn>
+                            </p:par>
+                            <p:par>
+                              <p:cTn id="27" fill="hold">
+                                <p:stCondLst>
+                                  <p:cond delay="4500"/>
+                                </p:stCondLst>
+                                <p:childTnLst>
+                                  <p:par>
+                                    <p:cTn id="28" presetID="10" presetClass="entr" presetSubtype="0" fill="hold" grpId="0" nodeType="afterEffect">
+                                      <p:stCondLst>
+                                        <p:cond delay="0"/>
+                                      </p:stCondLst>
+                                      <p:childTnLst>
+                                        <p:set>
+                                          <p:cBhvr>
+                                            <p:cTn id="29" dur="1" fill="hold">
+                                              <p:stCondLst>
+                                                <p:cond delay="0"/>
+                                              </p:stCondLst>
+                                            </p:cTn>
+                                            <p:tgtEl>
+                                              <p:spTgt spid="17"/>
+                                            </p:tgtEl>
+                                            <p:attrNameLst>
+                                              <p:attrName>style.visibility</p:attrName>
+                                            </p:attrNameLst>
+                                          </p:cBhvr>
+                                          <p:to>
+                                            <p:strVal val="visible"/>
+                                          </p:to>
+                                        </p:set>
+                                        <p:animEffect transition="in" filter="fade">
+                                          <p:cBhvr>
+                                            <p:cTn id="30" dur="500"/>
+                                            <p:tgtEl>
+                                              <p:spTgt spid="17"/>
+                                            </p:tgtEl>
+                                          </p:cBhvr>
+                                        </p:animEffect>
+                                      </p:childTnLst>
+                                    </p:cTn>
+                                  </p:par>
+                                </p:childTnLst>
+                              </p:cTn>
+                            </p:par>
+                          </p:childTnLst>
+                        </p:cTn>
+                      </p:par>
+                    </p:childTnLst>
+                  </p:cTn>
+                  <p:prevCondLst>
+                    <p:cond evt="onPrev" delay="0">
+                      <p:tgtEl>
+                        <p:sldTgt/>
+                      </p:tgtEl>
+                    </p:cond>
+                  </p:prevCondLst>
+                  <p:nextCondLst>
+                    <p:cond evt="onNext" delay="0">
+                      <p:tgtEl>
+                        <p:sldTgt/>
+                      </p:tgtEl>
+                    </p:cond>
+                  </p:nextCondLst>
+                </p:seq>
+              </p:childTnLst>
+            </p:cTn>
+          </p:par>
+        </p:tnLst>
+        <p:bldLst>
+          <p:bldP spid="2" grpId="0"/>
+          <p:bldP spid="4" grpId="0"/>
+          <p:bldP spid="8" grpId="0"/>
+          <p:bldP spid="10" grpId="0"/>
+          <p:bldP spid="16" grpId="0"/>
+          <p:bldP spid="17" grpId="0"/>
+        </p:bldLst>
+      </p:timing>
+    </mc:Choice>
+    <mc:Fallback>
+      <p:timing>
+        <p:tnLst>
+          <p:par>
+            <p:cTn id="1" dur="indefinite" restart="never" nodeType="tmRoot">
+              <p:childTnLst>
+                <p:seq concurrent="1" nextAc="seek">
+                  <p:cTn id="2" dur="indefinite" nodeType="mainSeq">
+                    <p:childTnLst>
+                      <p:par>
+                        <p:cTn id="3" fill="hold">
+                          <p:stCondLst>
+                            <p:cond delay="indefinite"/>
+                          </p:stCondLst>
+                          <p:childTnLst>
+                            <p:par>
+                              <p:cTn id="4" fill="hold">
+                                <p:stCondLst>
+                                  <p:cond delay="0"/>
+                                </p:stCondLst>
+                                <p:childTnLst>
+                                  <p:par>
+                                    <p:cTn id="5" presetID="45" presetClass="entr" presetSubtype="0" fill="hold" grpId="0" nodeType="clickEffect">
+                                      <p:stCondLst>
+                                        <p:cond delay="0"/>
+                                      </p:stCondLst>
+                                      <p:childTnLst>
+                                        <p:set>
+                                          <p:cBhvr>
+                                            <p:cTn id="6" dur="1" fill="hold">
+                                              <p:stCondLst>
+                                                <p:cond delay="0"/>
+                                              </p:stCondLst>
+                                            </p:cTn>
+                                            <p:tgtEl>
+                                              <p:spTgt spid="2"/>
+                                            </p:tgtEl>
+                                            <p:attrNameLst>
+                                              <p:attrName>style.visibility</p:attrName>
+                                            </p:attrNameLst>
+                                          </p:cBhvr>
+                                          <p:to>
+                                            <p:strVal val="visible"/>
+                                          </p:to>
+                                        </p:set>
+                                        <p:animEffect transition="in" filter="fade">
+                                          <p:cBhvr>
+                                            <p:cTn id="7" dur="2000"/>
+                                            <p:tgtEl>
+                                              <p:spTgt spid="2"/>
+                                            </p:tgtEl>
+                                          </p:cBhvr>
+                                        </p:animEffect>
+                                        <p:anim calcmode="lin" valueType="num">
+                                          <p:cBhvr>
+                                            <p:cTn id="8" dur="2000" fill="hold"/>
+                                            <p:tgtEl>
+                                              <p:spTgt spid="2"/>
+                                            </p:tgtEl>
+                                            <p:attrNameLst>
+                                              <p:attrName>ppt_w</p:attrName>
+                                            </p:attrNameLst>
+                                          </p:cBhvr>
+                                          <p:tavLst>
+                                            <p:tav tm="0" fmla="#ppt_w*sin(2.5*pi*$)">
+                                              <p:val>
+                                                <p:fltVal val="0"/>
+                                              </p:val>
+                                            </p:tav>
+                                            <p:tav tm="100000">
+                                              <p:val>
+                                                <p:fltVal val="1"/>
+                                              </p:val>
+                                            </p:tav>
+                                          </p:tavLst>
+                                        </p:anim>
+                                        <p:anim calcmode="lin" valueType="num">
+                                          <p:cBhvr>
+                                            <p:cTn id="9" dur="2000" fill="hold"/>
+                                            <p:tgtEl>
+                                              <p:spTgt spid="2"/>
+                                            </p:tgtEl>
+                                            <p:attrNameLst>
+                                              <p:attrName>ppt_h</p:attrName>
+                                            </p:attrNameLst>
+                                          </p:cBhvr>
+                                          <p:tavLst>
+                                            <p:tav tm="0">
+                                              <p:val>
+                                                <p:strVal val="#ppt_h"/>
+                                              </p:val>
+                                            </p:tav>
+                                            <p:tav tm="100000">
+                                              <p:val>
+                                                <p:strVal val="#ppt_h"/>
+                                              </p:val>
+                                            </p:tav>
+                                          </p:tavLst>
+                                        </p:anim>
+                                      </p:childTnLst>
+                                    </p:cTn>
+                                  </p:par>
+                                </p:childTnLst>
+                              </p:cTn>
+                            </p:par>
+                            <p:par>
+                              <p:cTn id="10" fill="hold">
+                                <p:stCondLst>
+                                  <p:cond delay="2000"/>
+                                </p:stCondLst>
+                                <p:childTnLst>
+                                  <p:par>
+                                    <p:cTn id="11" presetID="2" presetClass="entr" presetSubtype="2" fill="hold" grpId="0" nodeType="afterEffect">
+                                      <p:stCondLst>
+                                        <p:cond delay="0"/>
+                                      </p:stCondLst>
+                                      <p:childTnLst>
+                                        <p:set>
+                                          <p:cBhvr>
+                                            <p:cTn id="12" dur="1" fill="hold">
+                                              <p:stCondLst>
+                                                <p:cond delay="0"/>
+                                              </p:stCondLst>
+                                            </p:cTn>
+                                            <p:tgtEl>
+                                              <p:spTgt spid="8"/>
+                                            </p:tgtEl>
+                                            <p:attrNameLst>
+                                              <p:attrName>style.visibility</p:attrName>
+                                            </p:attrNameLst>
+                                          </p:cBhvr>
+                                          <p:to>
+                                            <p:strVal val="visible"/>
+                                          </p:to>
+                                        </p:set>
+                                        <p:anim calcmode="lin" valueType="num">
+                                          <p:cBhvr additive="base">
+                                            <p:cTn id="13" dur="1500" fill="hold"/>
+                                            <p:tgtEl>
+                                              <p:spTgt spid="8"/>
+                                            </p:tgtEl>
+                                            <p:attrNameLst>
+                                              <p:attrName>ppt_x</p:attrName>
+                                            </p:attrNameLst>
+                                          </p:cBhvr>
+                                          <p:tavLst>
+                                            <p:tav tm="0">
+                                              <p:val>
+                                                <p:strVal val="1+#ppt_w/2"/>
+                                              </p:val>
+                                            </p:tav>
+                                            <p:tav tm="100000">
+                                              <p:val>
+                                                <p:strVal val="#ppt_x"/>
+                                              </p:val>
+                                            </p:tav>
+                                          </p:tavLst>
+                                        </p:anim>
+                                        <p:anim calcmode="lin" valueType="num">
+                                          <p:cBhvr additive="base">
+                                            <p:cTn id="14" dur="1500" fill="hold"/>
+                                            <p:tgtEl>
+                                              <p:spTgt spid="8"/>
+                                            </p:tgtEl>
+                                            <p:attrNameLst>
+                                              <p:attrName>ppt_y</p:attrName>
+                                            </p:attrNameLst>
+                                          </p:cBhvr>
+                                          <p:tavLst>
+                                            <p:tav tm="0">
+                                              <p:val>
+                                                <p:strVal val="#ppt_y"/>
+                                              </p:val>
+                                            </p:tav>
+                                            <p:tav tm="100000">
+                                              <p:val>
+                                                <p:strVal val="#ppt_y"/>
+                                              </p:val>
+                                            </p:tav>
+                                          </p:tavLst>
+                                        </p:anim>
+                                      </p:childTnLst>
+                                    </p:cTn>
+                                  </p:par>
+                                  <p:par>
+                                    <p:cTn id="15" presetID="2" presetClass="entr" presetSubtype="8" fill="hold" grpId="0" nodeType="withEffect">
+                                      <p:stCondLst>
+                                        <p:cond delay="0"/>
+                                      </p:stCondLst>
+                                      <p:childTnLst>
+                                        <p:set>
+                                          <p:cBhvr>
+                                            <p:cTn id="16" dur="1" fill="hold">
+                                              <p:stCondLst>
+                                                <p:cond delay="0"/>
+                                              </p:stCondLst>
+                                            </p:cTn>
+                                            <p:tgtEl>
+                                              <p:spTgt spid="10"/>
+                                            </p:tgtEl>
+                                            <p:attrNameLst>
+                                              <p:attrName>style.visibility</p:attrName>
+                                            </p:attrNameLst>
+                                          </p:cBhvr>
+                                          <p:to>
+                                            <p:strVal val="visible"/>
+                                          </p:to>
+                                        </p:set>
+                                        <p:anim calcmode="lin" valueType="num">
+                                          <p:cBhvr additive="base">
+                                            <p:cTn id="17" dur="1500" fill="hold"/>
+                                            <p:tgtEl>
+                                              <p:spTgt spid="10"/>
+                                            </p:tgtEl>
+                                            <p:attrNameLst>
+                                              <p:attrName>ppt_x</p:attrName>
+                                            </p:attrNameLst>
+                                          </p:cBhvr>
+                                          <p:tavLst>
+                                            <p:tav tm="0">
+                                              <p:val>
+                                                <p:strVal val="0-#ppt_w/2"/>
+                                              </p:val>
+                                            </p:tav>
+                                            <p:tav tm="100000">
+                                              <p:val>
+                                                <p:strVal val="#ppt_x"/>
+                                              </p:val>
+                                            </p:tav>
+                                          </p:tavLst>
+                                        </p:anim>
+                                        <p:anim calcmode="lin" valueType="num">
+                                          <p:cBhvr additive="base">
+                                            <p:cTn id="18" dur="1500" fill="hold"/>
+                                            <p:tgtEl>
+                                              <p:spTgt spid="10"/>
+                                            </p:tgtEl>
+                                            <p:attrNameLst>
+                                              <p:attrName>ppt_y</p:attrName>
+                                            </p:attrNameLst>
+                                          </p:cBhvr>
+                                          <p:tavLst>
+                                            <p:tav tm="0">
+                                              <p:val>
+                                                <p:strVal val="#ppt_y"/>
+                                              </p:val>
+                                            </p:tav>
+                                            <p:tav tm="100000">
+                                              <p:val>
+                                                <p:strVal val="#ppt_y"/>
+                                              </p:val>
+                                            </p:tav>
+                                          </p:tavLst>
+                                        </p:anim>
+                                      </p:childTnLst>
+                                    </p:cTn>
+                                  </p:par>
+                                </p:childTnLst>
+                              </p:cTn>
+                            </p:par>
+                            <p:par>
+                              <p:cTn id="19" fill="hold">
+                                <p:stCondLst>
+                                  <p:cond delay="3500"/>
+                                </p:stCondLst>
+                                <p:childTnLst>
+                                  <p:par>
+                                    <p:cTn id="20" presetID="10" presetClass="entr" presetSubtype="0" fill="hold" grpId="0" nodeType="afterEffect">
+                                      <p:stCondLst>
+                                        <p:cond delay="0"/>
+                                      </p:stCondLst>
+                                      <p:childTnLst>
+                                        <p:set>
+                                          <p:cBhvr>
+                                            <p:cTn id="21" dur="1" fill="hold">
+                                              <p:stCondLst>
+                                                <p:cond delay="0"/>
+                                              </p:stCondLst>
+                                            </p:cTn>
+                                            <p:tgtEl>
+                                              <p:spTgt spid="4"/>
+                                            </p:tgtEl>
+                                            <p:attrNameLst>
+                                              <p:attrName>style.visibility</p:attrName>
+                                            </p:attrNameLst>
+                                          </p:cBhvr>
+                                          <p:to>
+                                            <p:strVal val="visible"/>
+                                          </p:to>
+                                        </p:set>
+                                        <p:animEffect transition="in" filter="fade">
+                                          <p:cBhvr>
+                                            <p:cTn id="22" dur="500"/>
+                                            <p:tgtEl>
+                                              <p:spTgt spid="4"/>
+                                            </p:tgtEl>
+                                          </p:cBhvr>
+                                        </p:animEffect>
+                                      </p:childTnLst>
+                                    </p:cTn>
+                                  </p:par>
+                                </p:childTnLst>
+                              </p:cTn>
+                            </p:par>
+                            <p:par>
+                              <p:cTn id="23" fill="hold">
+                                <p:stCondLst>
+                                  <p:cond delay="4000"/>
+                                </p:stCondLst>
+                                <p:childTnLst>
+                                  <p:par>
+                                    <p:cTn id="24" presetID="10" presetClass="entr" presetSubtype="0" fill="hold" grpId="0" nodeType="afterEffect">
+                                      <p:stCondLst>
+                                        <p:cond delay="0"/>
+                                      </p:stCondLst>
+                                      <p:childTnLst>
+                                        <p:set>
+                                          <p:cBhvr>
+                                            <p:cTn id="25" dur="1" fill="hold">
+                                              <p:stCondLst>
+                                                <p:cond delay="0"/>
+                                              </p:stCondLst>
+                                            </p:cTn>
+                                            <p:tgtEl>
+                                              <p:spTgt spid="16"/>
+                                            </p:tgtEl>
+                                            <p:attrNameLst>
+                                              <p:attrName>style.visibility</p:attrName>
+                                            </p:attrNameLst>
+                                          </p:cBhvr>
+                                          <p:to>
+                                            <p:strVal val="visible"/>
+                                          </p:to>
+                                        </p:set>
+                                        <p:animEffect transition="in" filter="fade">
+                                          <p:cBhvr>
+                                            <p:cTn id="26" dur="500"/>
+                                            <p:tgtEl>
+                                              <p:spTgt spid="16"/>
+                                            </p:tgtEl>
+                                          </p:cBhvr>
+                                        </p:animEffect>
+                                      </p:childTnLst>
+                                    </p:cTn>
+                                  </p:par>
+                                </p:childTnLst>
+                              </p:cTn>
+                            </p:par>
+                            <p:par>
+                              <p:cTn id="27" fill="hold">
+                                <p:stCondLst>
+                                  <p:cond delay="4500"/>
+                                </p:stCondLst>
+                                <p:childTnLst>
+                                  <p:par>
+                                    <p:cTn id="28" presetID="10" presetClass="entr" presetSubtype="0" fill="hold" grpId="0" nodeType="afterEffect">
+                                      <p:stCondLst>
+                                        <p:cond delay="0"/>
+                                      </p:stCondLst>
+                                      <p:childTnLst>
+                                        <p:set>
+                                          <p:cBhvr>
+                                            <p:cTn id="29" dur="1" fill="hold">
+                                              <p:stCondLst>
+                                                <p:cond delay="0"/>
+                                              </p:stCondLst>
+                                            </p:cTn>
+                                            <p:tgtEl>
+                                              <p:spTgt spid="17"/>
+                                            </p:tgtEl>
+                                            <p:attrNameLst>
+                                              <p:attrName>style.visibility</p:attrName>
+                                            </p:attrNameLst>
+                                          </p:cBhvr>
+                                          <p:to>
+                                            <p:strVal val="visible"/>
+                                          </p:to>
+                                        </p:set>
+                                        <p:animEffect transition="in" filter="fade">
+                                          <p:cBhvr>
+                                            <p:cTn id="30" dur="500"/>
+                                            <p:tgtEl>
+                                              <p:spTgt spid="17"/>
+                                            </p:tgtEl>
+                                          </p:cBhvr>
+                                        </p:animEffect>
+                                      </p:childTnLst>
+                                    </p:cTn>
+                                  </p:par>
+                                </p:childTnLst>
+                              </p:cTn>
+                            </p:par>
+                          </p:childTnLst>
+                        </p:cTn>
+                      </p:par>
+                    </p:childTnLst>
+                  </p:cTn>
+                  <p:prevCondLst>
+                    <p:cond evt="onPrev" delay="0">
+                      <p:tgtEl>
+                        <p:sldTgt/>
+                      </p:tgtEl>
+                    </p:cond>
+                  </p:prevCondLst>
+                  <p:nextCondLst>
+                    <p:cond evt="onNext" delay="0">
+                      <p:tgtEl>
+                        <p:sldTgt/>
+                      </p:tgtEl>
+                    </p:cond>
+                  </p:nextCondLst>
+                </p:seq>
+              </p:childTnLst>
+            </p:cTn>
+          </p:par>
+        </p:tnLst>
+        <p:bldLst>
+          <p:bldP spid="2" grpId="0"/>
+          <p:bldP spid="4" grpId="0"/>
+          <p:bldP spid="8" grpId="0"/>
+          <p:bldP spid="10" grpId="0"/>
+          <p:bldP spid="16" grpId="0"/>
+          <p:bldP spid="17" grpId="0"/>
+        </p:bldLst>
+      </p:timing>
+    </mc:Fallback>
+  </mc:AlternateContent>
+</p:sld>
+</file>
+
+<file path=ppt/slides/slide3.xml><?xml version="1.0" encoding="utf-8"?>
+<p:sld xmlns:a="http://schemas.openxmlformats.org/drawingml/2006/main" xmlns:r="http://schemas.openxmlformats.org/officeDocument/2006/relationships" xmlns:p="http://schemas.openxmlformats.org/presentationml/2006/main">
+  <p:cSld>
+    <p:spTree>
+      <p:nvGrpSpPr>
+        <p:cNvPr id="1" name="">
+          <a:extLst>
+            <a:ext uri="{FF2B5EF4-FFF2-40B4-BE49-F238E27FC236}">
+              <a16:creationId xmlns:a16="http://schemas.microsoft.com/office/drawing/2014/main" id="{F1B5EE29-CF6D-1F24-51CD-22D1EF7DCABA}"/>
+            </a:ext>
+          </a:extLst>
+        </p:cNvPr>
+        <p:cNvGrpSpPr/>
+        <p:nvPr/>
+      </p:nvGrpSpPr>
+      <p:grpSpPr>
+        <a:xfrm>
+          <a:off x="0" y="0"/>
+          <a:ext cx="0" cy="0"/>
+          <a:chOff x="0" y="0"/>
+          <a:chExt cx="0" cy="0"/>
+        </a:xfrm>
+      </p:grpSpPr>
+      <p:sp>
+        <p:nvSpPr>
+          <p:cNvPr id="2" name="Title 1">
+            <a:extLst>
+              <a:ext uri="{FF2B5EF4-FFF2-40B4-BE49-F238E27FC236}">
+                <a16:creationId xmlns:a16="http://schemas.microsoft.com/office/drawing/2014/main" id="{1ECF2163-017D-0FC9-7D20-134A97BDD531}"/>
+              </a:ext>
+            </a:extLst>
+          </p:cNvPr>
+          <p:cNvSpPr>
+            <a:spLocks noGrp="1"/>
+          </p:cNvSpPr>
+          <p:nvPr>
+            <p:ph type="ctrTitle"/>
+          </p:nvPr>
+        </p:nvSpPr>
+        <p:spPr/>
+        <p:txBody>
+          <a:bodyPr/>
+          <a:lstStyle/>
+          <a:p>
+            <a:r>
+              <a:rPr lang="en-US" dirty="0"/>
+              <a:t>Charlie’s</a:t>
+            </a:r>
+            <a:br>
+              <a:rPr lang="en-US" dirty="0"/>
+            </a:br>
+            <a:r>
+              <a:rPr lang="en-US" dirty="0"/>
+              <a:t>Spring Term Presentation</a:t>
+            </a:r>
+          </a:p>
+        </p:txBody>
+      </p:sp>
+      <p:sp>
+        <p:nvSpPr>
+          <p:cNvPr id="8" name="Subtitle 2">
+            <a:extLst>
+              <a:ext uri="{FF2B5EF4-FFF2-40B4-BE49-F238E27FC236}">
+                <a16:creationId xmlns:a16="http://schemas.microsoft.com/office/drawing/2014/main" id="{F1288192-E533-C186-5A7C-EB90D432B7CF}"/>
+              </a:ext>
+            </a:extLst>
+          </p:cNvPr>
+          <p:cNvSpPr txBox="1">
+            <a:spLocks/>
+          </p:cNvSpPr>
+          <p:nvPr/>
+        </p:nvSpPr>
+        <p:spPr>
+          <a:xfrm>
+            <a:off x="5056632" y="4032504"/>
+            <a:ext cx="1167384" cy="430466"/>
+          </a:xfrm>
+          <a:prstGeom prst="rect">
+            <a:avLst/>
+          </a:prstGeom>
+        </p:spPr>
+        <p:txBody>
+          <a:bodyPr vert="horz" lIns="91440" tIns="45720" rIns="91440" bIns="45720" rtlCol="0">
+            <a:normAutofit/>
+          </a:bodyPr>
+          <a:lstStyle>
+            <a:lvl1pPr marL="0" indent="0" algn="ctr" defTabSz="914400" rtl="0" eaLnBrk="1" latinLnBrk="0" hangingPunct="1">
+              <a:lnSpc>
+                <a:spcPct val="90000"/>
+              </a:lnSpc>
+              <a:spcBef>
+                <a:spcPts val="1000"/>
+              </a:spcBef>
+              <a:buFont typeface="Arial" panose="020B0604020202020204" pitchFamily="34" charset="0"/>
+              <a:buNone/>
+              <a:defRPr sz="2400" kern="1200">
+                <a:solidFill>
+                  <a:schemeClr val="tx1"/>
+                </a:solidFill>
+                <a:latin typeface="+mn-lt"/>
+                <a:ea typeface="+mn-ea"/>
+                <a:cs typeface="+mn-cs"/>
+              </a:defRPr>
+            </a:lvl1pPr>
+            <a:lvl2pPr marL="457200" indent="0" algn="ctr" defTabSz="914400" rtl="0" eaLnBrk="1" latinLnBrk="0" hangingPunct="1">
+              <a:lnSpc>
+                <a:spcPct val="90000"/>
+              </a:lnSpc>
+              <a:spcBef>
+                <a:spcPts val="500"/>
+              </a:spcBef>
+              <a:buFont typeface="Arial" panose="020B0604020202020204" pitchFamily="34" charset="0"/>
+              <a:buNone/>
+              <a:defRPr sz="2000" kern="1200">
+                <a:solidFill>
+                  <a:schemeClr val="tx1"/>
+                </a:solidFill>
+                <a:latin typeface="+mn-lt"/>
+                <a:ea typeface="+mn-ea"/>
+                <a:cs typeface="+mn-cs"/>
+              </a:defRPr>
+            </a:lvl2pPr>
+            <a:lvl3pPr marL="914400" indent="0" algn="ctr" defTabSz="914400" rtl="0" eaLnBrk="1" latinLnBrk="0" hangingPunct="1">
+              <a:lnSpc>
+                <a:spcPct val="90000"/>
+              </a:lnSpc>
+              <a:spcBef>
+                <a:spcPts val="500"/>
+              </a:spcBef>
+              <a:buFont typeface="Arial" panose="020B0604020202020204" pitchFamily="34" charset="0"/>
+              <a:buNone/>
+              <a:defRPr sz="1800" kern="1200">
+                <a:solidFill>
+                  <a:schemeClr val="tx1"/>
+                </a:solidFill>
+                <a:latin typeface="+mn-lt"/>
+                <a:ea typeface="+mn-ea"/>
+                <a:cs typeface="+mn-cs"/>
+              </a:defRPr>
+            </a:lvl3pPr>
+            <a:lvl4pPr marL="1371600" indent="0" algn="ctr" defTabSz="914400" rtl="0" eaLnBrk="1" latinLnBrk="0" hangingPunct="1">
+              <a:lnSpc>
+                <a:spcPct val="90000"/>
+              </a:lnSpc>
+              <a:spcBef>
+                <a:spcPts val="500"/>
+              </a:spcBef>
+              <a:buFont typeface="Arial" panose="020B0604020202020204" pitchFamily="34" charset="0"/>
+              <a:buNone/>
+              <a:defRPr sz="1600" kern="1200">
+                <a:solidFill>
+                  <a:schemeClr val="tx1"/>
+                </a:solidFill>
+                <a:latin typeface="+mn-lt"/>
+                <a:ea typeface="+mn-ea"/>
+                <a:cs typeface="+mn-cs"/>
+              </a:defRPr>
+            </a:lvl4pPr>
+            <a:lvl5pPr marL="1828800" indent="0" algn="ctr" defTabSz="914400" rtl="0" eaLnBrk="1" latinLnBrk="0" hangingPunct="1">
+              <a:lnSpc>
+                <a:spcPct val="90000"/>
+              </a:lnSpc>
+              <a:spcBef>
+                <a:spcPts val="500"/>
+              </a:spcBef>
+              <a:buFont typeface="Arial" panose="020B0604020202020204" pitchFamily="34" charset="0"/>
+              <a:buNone/>
+              <a:defRPr sz="1600" kern="1200">
+                <a:solidFill>
+                  <a:schemeClr val="tx1"/>
+                </a:solidFill>
+                <a:latin typeface="+mn-lt"/>
+                <a:ea typeface="+mn-ea"/>
+                <a:cs typeface="+mn-cs"/>
+              </a:defRPr>
+            </a:lvl5pPr>
+            <a:lvl6pPr marL="2286000" indent="0" algn="ctr" defTabSz="914400" rtl="0" eaLnBrk="1" latinLnBrk="0" hangingPunct="1">
+              <a:lnSpc>
+                <a:spcPct val="90000"/>
+              </a:lnSpc>
+              <a:spcBef>
+                <a:spcPts val="500"/>
+              </a:spcBef>
+              <a:buFont typeface="Arial" panose="020B0604020202020204" pitchFamily="34" charset="0"/>
+              <a:buNone/>
+              <a:defRPr sz="1600" kern="1200">
+                <a:solidFill>
+                  <a:schemeClr val="tx1"/>
+                </a:solidFill>
+                <a:latin typeface="+mn-lt"/>
+                <a:ea typeface="+mn-ea"/>
+                <a:cs typeface="+mn-cs"/>
+              </a:defRPr>
+            </a:lvl6pPr>
+            <a:lvl7pPr marL="2743200" indent="0" algn="ctr" defTabSz="914400" rtl="0" eaLnBrk="1" latinLnBrk="0" hangingPunct="1">
+              <a:lnSpc>
+                <a:spcPct val="90000"/>
+              </a:lnSpc>
+              <a:spcBef>
+                <a:spcPts val="500"/>
+              </a:spcBef>
+              <a:buFont typeface="Arial" panose="020B0604020202020204" pitchFamily="34" charset="0"/>
+              <a:buNone/>
+              <a:defRPr sz="1600" kern="1200">
+                <a:solidFill>
+                  <a:schemeClr val="tx1"/>
+                </a:solidFill>
+                <a:latin typeface="+mn-lt"/>
+                <a:ea typeface="+mn-ea"/>
+                <a:cs typeface="+mn-cs"/>
+              </a:defRPr>
+            </a:lvl7pPr>
+            <a:lvl8pPr marL="3200400" indent="0" algn="ctr" defTabSz="914400" rtl="0" eaLnBrk="1" latinLnBrk="0" hangingPunct="1">
+              <a:lnSpc>
+                <a:spcPct val="90000"/>
+              </a:lnSpc>
+              <a:spcBef>
+                <a:spcPts val="500"/>
+              </a:spcBef>
+              <a:buFont typeface="Arial" panose="020B0604020202020204" pitchFamily="34" charset="0"/>
+              <a:buNone/>
+              <a:defRPr sz="1600" kern="1200">
+                <a:solidFill>
+                  <a:schemeClr val="tx1"/>
+                </a:solidFill>
+                <a:latin typeface="+mn-lt"/>
+                <a:ea typeface="+mn-ea"/>
+                <a:cs typeface="+mn-cs"/>
+              </a:defRPr>
+            </a:lvl8pPr>
+            <a:lvl9pPr marL="3657600" indent="0" algn="ctr" defTabSz="914400" rtl="0" eaLnBrk="1" latinLnBrk="0" hangingPunct="1">
+              <a:lnSpc>
+                <a:spcPct val="90000"/>
+              </a:lnSpc>
+              <a:spcBef>
+                <a:spcPts val="500"/>
+              </a:spcBef>
+              <a:buFont typeface="Arial" panose="020B0604020202020204" pitchFamily="34" charset="0"/>
+              <a:buNone/>
+              <a:defRPr sz="1600" kern="1200">
+                <a:solidFill>
+                  <a:schemeClr val="tx1"/>
+                </a:solidFill>
+                <a:latin typeface="+mn-lt"/>
+                <a:ea typeface="+mn-ea"/>
+                <a:cs typeface="+mn-cs"/>
+              </a:defRPr>
+            </a:lvl9pPr>
+          </a:lstStyle>
+          <a:p>
+            <a:r>
+              <a:rPr lang="en-US" dirty="0"/>
+              <a:t>Charlie</a:t>
+            </a:r>
+          </a:p>
+        </p:txBody>
+      </p:sp>
+      <p:sp>
+        <p:nvSpPr>
+          <p:cNvPr id="10" name="Subtitle 2">
+            <a:extLst>
+              <a:ext uri="{FF2B5EF4-FFF2-40B4-BE49-F238E27FC236}">
+                <a16:creationId xmlns:a16="http://schemas.microsoft.com/office/drawing/2014/main" id="{B0DE85A5-109D-BC81-55A4-F638BBA82280}"/>
+              </a:ext>
+            </a:extLst>
+          </p:cNvPr>
+          <p:cNvSpPr txBox="1">
+            <a:spLocks/>
+          </p:cNvSpPr>
+          <p:nvPr/>
+        </p:nvSpPr>
+        <p:spPr>
+          <a:xfrm>
+            <a:off x="6096000" y="4032504"/>
+            <a:ext cx="1021080" cy="430466"/>
+          </a:xfrm>
+          <a:prstGeom prst="rect">
+            <a:avLst/>
+          </a:prstGeom>
+        </p:spPr>
+        <p:txBody>
+          <a:bodyPr vert="horz" lIns="91440" tIns="45720" rIns="91440" bIns="45720" rtlCol="0">
+            <a:normAutofit/>
+          </a:bodyPr>
+          <a:lstStyle>
+            <a:lvl1pPr marL="0" indent="0" algn="ctr" defTabSz="914400" rtl="0" eaLnBrk="1" latinLnBrk="0" hangingPunct="1">
+              <a:lnSpc>
+                <a:spcPct val="90000"/>
+              </a:lnSpc>
+              <a:spcBef>
+                <a:spcPts val="1000"/>
+              </a:spcBef>
+              <a:buFont typeface="Arial" panose="020B0604020202020204" pitchFamily="34" charset="0"/>
+              <a:buNone/>
+              <a:defRPr sz="2400" kern="1200">
+                <a:solidFill>
+                  <a:schemeClr val="tx1"/>
+                </a:solidFill>
+                <a:latin typeface="+mn-lt"/>
+                <a:ea typeface="+mn-ea"/>
+                <a:cs typeface="+mn-cs"/>
+              </a:defRPr>
+            </a:lvl1pPr>
+            <a:lvl2pPr marL="457200" indent="0" algn="ctr" defTabSz="914400" rtl="0" eaLnBrk="1" latinLnBrk="0" hangingPunct="1">
+              <a:lnSpc>
+                <a:spcPct val="90000"/>
+              </a:lnSpc>
+              <a:spcBef>
+                <a:spcPts val="500"/>
+              </a:spcBef>
+              <a:buFont typeface="Arial" panose="020B0604020202020204" pitchFamily="34" charset="0"/>
+              <a:buNone/>
+              <a:defRPr sz="2000" kern="1200">
+                <a:solidFill>
+                  <a:schemeClr val="tx1"/>
+                </a:solidFill>
+                <a:latin typeface="+mn-lt"/>
+                <a:ea typeface="+mn-ea"/>
+                <a:cs typeface="+mn-cs"/>
+              </a:defRPr>
+            </a:lvl2pPr>
+            <a:lvl3pPr marL="914400" indent="0" algn="ctr" defTabSz="914400" rtl="0" eaLnBrk="1" latinLnBrk="0" hangingPunct="1">
+              <a:lnSpc>
+                <a:spcPct val="90000"/>
+              </a:lnSpc>
+              <a:spcBef>
+                <a:spcPts val="500"/>
+              </a:spcBef>
+              <a:buFont typeface="Arial" panose="020B0604020202020204" pitchFamily="34" charset="0"/>
+              <a:buNone/>
+              <a:defRPr sz="1800" kern="1200">
+                <a:solidFill>
+                  <a:schemeClr val="tx1"/>
+                </a:solidFill>
+                <a:latin typeface="+mn-lt"/>
+                <a:ea typeface="+mn-ea"/>
+                <a:cs typeface="+mn-cs"/>
+              </a:defRPr>
+            </a:lvl3pPr>
+            <a:lvl4pPr marL="1371600" indent="0" algn="ctr" defTabSz="914400" rtl="0" eaLnBrk="1" latinLnBrk="0" hangingPunct="1">
+              <a:lnSpc>
+                <a:spcPct val="90000"/>
+              </a:lnSpc>
+              <a:spcBef>
+                <a:spcPts val="500"/>
+              </a:spcBef>
+              <a:buFont typeface="Arial" panose="020B0604020202020204" pitchFamily="34" charset="0"/>
+              <a:buNone/>
+              <a:defRPr sz="1600" kern="1200">
+                <a:solidFill>
+                  <a:schemeClr val="tx1"/>
+                </a:solidFill>
+                <a:latin typeface="+mn-lt"/>
+                <a:ea typeface="+mn-ea"/>
+                <a:cs typeface="+mn-cs"/>
+              </a:defRPr>
+            </a:lvl4pPr>
+            <a:lvl5pPr marL="1828800" indent="0" algn="ctr" defTabSz="914400" rtl="0" eaLnBrk="1" latinLnBrk="0" hangingPunct="1">
+              <a:lnSpc>
+                <a:spcPct val="90000"/>
+              </a:lnSpc>
+              <a:spcBef>
+                <a:spcPts val="500"/>
+              </a:spcBef>
+              <a:buFont typeface="Arial" panose="020B0604020202020204" pitchFamily="34" charset="0"/>
+              <a:buNone/>
+              <a:defRPr sz="1600" kern="1200">
+                <a:solidFill>
+                  <a:schemeClr val="tx1"/>
+                </a:solidFill>
+                <a:latin typeface="+mn-lt"/>
+                <a:ea typeface="+mn-ea"/>
+                <a:cs typeface="+mn-cs"/>
+              </a:defRPr>
+            </a:lvl5pPr>
+            <a:lvl6pPr marL="2286000" indent="0" algn="ctr" defTabSz="914400" rtl="0" eaLnBrk="1" latinLnBrk="0" hangingPunct="1">
+              <a:lnSpc>
+                <a:spcPct val="90000"/>
+              </a:lnSpc>
+              <a:spcBef>
+                <a:spcPts val="500"/>
+              </a:spcBef>
+              <a:buFont typeface="Arial" panose="020B0604020202020204" pitchFamily="34" charset="0"/>
+              <a:buNone/>
+              <a:defRPr sz="1600" kern="1200">
+                <a:solidFill>
+                  <a:schemeClr val="tx1"/>
+                </a:solidFill>
+                <a:latin typeface="+mn-lt"/>
+                <a:ea typeface="+mn-ea"/>
+                <a:cs typeface="+mn-cs"/>
+              </a:defRPr>
+            </a:lvl6pPr>
+            <a:lvl7pPr marL="2743200" indent="0" algn="ctr" defTabSz="914400" rtl="0" eaLnBrk="1" latinLnBrk="0" hangingPunct="1">
+              <a:lnSpc>
+                <a:spcPct val="90000"/>
+              </a:lnSpc>
+              <a:spcBef>
+                <a:spcPts val="500"/>
+              </a:spcBef>
+              <a:buFont typeface="Arial" panose="020B0604020202020204" pitchFamily="34" charset="0"/>
+              <a:buNone/>
+              <a:defRPr sz="1600" kern="1200">
+                <a:solidFill>
+                  <a:schemeClr val="tx1"/>
+                </a:solidFill>
+                <a:latin typeface="+mn-lt"/>
+                <a:ea typeface="+mn-ea"/>
+                <a:cs typeface="+mn-cs"/>
+              </a:defRPr>
+            </a:lvl7pPr>
+            <a:lvl8pPr marL="3200400" indent="0" algn="ctr" defTabSz="914400" rtl="0" eaLnBrk="1" latinLnBrk="0" hangingPunct="1">
+              <a:lnSpc>
+                <a:spcPct val="90000"/>
+              </a:lnSpc>
+              <a:spcBef>
+                <a:spcPts val="500"/>
+              </a:spcBef>
+              <a:buFont typeface="Arial" panose="020B0604020202020204" pitchFamily="34" charset="0"/>
+              <a:buNone/>
+              <a:defRPr sz="1600" kern="1200">
+                <a:solidFill>
+                  <a:schemeClr val="tx1"/>
+                </a:solidFill>
+                <a:latin typeface="+mn-lt"/>
+                <a:ea typeface="+mn-ea"/>
+                <a:cs typeface="+mn-cs"/>
+              </a:defRPr>
+            </a:lvl8pPr>
+            <a:lvl9pPr marL="3657600" indent="0" algn="ctr" defTabSz="914400" rtl="0" eaLnBrk="1" latinLnBrk="0" hangingPunct="1">
+              <a:lnSpc>
+                <a:spcPct val="90000"/>
+              </a:lnSpc>
+              <a:spcBef>
+                <a:spcPts val="500"/>
+              </a:spcBef>
+              <a:buFont typeface="Arial" panose="020B0604020202020204" pitchFamily="34" charset="0"/>
+              <a:buNone/>
+              <a:defRPr sz="1600" kern="1200">
+                <a:solidFill>
+                  <a:schemeClr val="tx1"/>
+                </a:solidFill>
+                <a:latin typeface="+mn-lt"/>
+                <a:ea typeface="+mn-ea"/>
+                <a:cs typeface="+mn-cs"/>
+              </a:defRPr>
+            </a:lvl9pPr>
+          </a:lstStyle>
+          <a:p>
+            <a:r>
+              <a:rPr lang="en-US" dirty="0"/>
+              <a:t>Hatch</a:t>
+            </a:r>
+          </a:p>
+        </p:txBody>
+      </p:sp>
+      <p:sp>
+        <p:nvSpPr>
+          <p:cNvPr id="16" name="Subtitle 2">
+            <a:extLst>
+              <a:ext uri="{FF2B5EF4-FFF2-40B4-BE49-F238E27FC236}">
+                <a16:creationId xmlns:a16="http://schemas.microsoft.com/office/drawing/2014/main" id="{515353C8-C457-02E1-AC35-11BDA6D25E72}"/>
+              </a:ext>
+            </a:extLst>
+          </p:cNvPr>
+          <p:cNvSpPr txBox="1">
+            <a:spLocks/>
+          </p:cNvSpPr>
+          <p:nvPr/>
+        </p:nvSpPr>
+        <p:spPr>
+          <a:xfrm>
+            <a:off x="5667756" y="3628503"/>
+            <a:ext cx="573024" cy="430466"/>
+          </a:xfrm>
+          <a:prstGeom prst="rect">
+            <a:avLst/>
+          </a:prstGeom>
+        </p:spPr>
+        <p:txBody>
+          <a:bodyPr vert="horz" lIns="91440" tIns="45720" rIns="91440" bIns="45720" rtlCol="0">
+            <a:normAutofit fontScale="92500" lnSpcReduction="10000"/>
+          </a:bodyPr>
+          <a:lstStyle>
+            <a:lvl1pPr marL="0" indent="0" algn="ctr" defTabSz="914400" rtl="0" eaLnBrk="1" latinLnBrk="0" hangingPunct="1">
+              <a:lnSpc>
+                <a:spcPct val="90000"/>
+              </a:lnSpc>
+              <a:spcBef>
+                <a:spcPts val="1000"/>
+              </a:spcBef>
+              <a:buFont typeface="Arial" panose="020B0604020202020204" pitchFamily="34" charset="0"/>
+              <a:buNone/>
+              <a:defRPr sz="2400" kern="1200">
+                <a:solidFill>
+                  <a:schemeClr val="tx1"/>
+                </a:solidFill>
+                <a:latin typeface="+mn-lt"/>
+                <a:ea typeface="+mn-ea"/>
+                <a:cs typeface="+mn-cs"/>
+              </a:defRPr>
+            </a:lvl1pPr>
+            <a:lvl2pPr marL="457200" indent="0" algn="ctr" defTabSz="914400" rtl="0" eaLnBrk="1" latinLnBrk="0" hangingPunct="1">
+              <a:lnSpc>
+                <a:spcPct val="90000"/>
+              </a:lnSpc>
+              <a:spcBef>
+                <a:spcPts val="500"/>
+              </a:spcBef>
+              <a:buFont typeface="Arial" panose="020B0604020202020204" pitchFamily="34" charset="0"/>
+              <a:buNone/>
+              <a:defRPr sz="2000" kern="1200">
+                <a:solidFill>
+                  <a:schemeClr val="tx1"/>
+                </a:solidFill>
+                <a:latin typeface="+mn-lt"/>
+                <a:ea typeface="+mn-ea"/>
+                <a:cs typeface="+mn-cs"/>
+              </a:defRPr>
+            </a:lvl2pPr>
+            <a:lvl3pPr marL="914400" indent="0" algn="ctr" defTabSz="914400" rtl="0" eaLnBrk="1" latinLnBrk="0" hangingPunct="1">
+              <a:lnSpc>
+                <a:spcPct val="90000"/>
+              </a:lnSpc>
+              <a:spcBef>
+                <a:spcPts val="500"/>
+              </a:spcBef>
+              <a:buFont typeface="Arial" panose="020B0604020202020204" pitchFamily="34" charset="0"/>
+              <a:buNone/>
+              <a:defRPr sz="1800" kern="1200">
+                <a:solidFill>
+                  <a:schemeClr val="tx1"/>
+                </a:solidFill>
+                <a:latin typeface="+mn-lt"/>
+                <a:ea typeface="+mn-ea"/>
+                <a:cs typeface="+mn-cs"/>
+              </a:defRPr>
+            </a:lvl3pPr>
+            <a:lvl4pPr marL="1371600" indent="0" algn="ctr" defTabSz="914400" rtl="0" eaLnBrk="1" latinLnBrk="0" hangingPunct="1">
+              <a:lnSpc>
+                <a:spcPct val="90000"/>
+              </a:lnSpc>
+              <a:spcBef>
+                <a:spcPts val="500"/>
+              </a:spcBef>
+              <a:buFont typeface="Arial" panose="020B0604020202020204" pitchFamily="34" charset="0"/>
+              <a:buNone/>
+              <a:defRPr sz="1600" kern="1200">
+                <a:solidFill>
+                  <a:schemeClr val="tx1"/>
+                </a:solidFill>
+                <a:latin typeface="+mn-lt"/>
+                <a:ea typeface="+mn-ea"/>
+                <a:cs typeface="+mn-cs"/>
+              </a:defRPr>
+            </a:lvl4pPr>
+            <a:lvl5pPr marL="1828800" indent="0" algn="ctr" defTabSz="914400" rtl="0" eaLnBrk="1" latinLnBrk="0" hangingPunct="1">
+              <a:lnSpc>
+                <a:spcPct val="90000"/>
+              </a:lnSpc>
+              <a:spcBef>
+                <a:spcPts val="500"/>
+              </a:spcBef>
+              <a:buFont typeface="Arial" panose="020B0604020202020204" pitchFamily="34" charset="0"/>
+              <a:buNone/>
+              <a:defRPr sz="1600" kern="1200">
+                <a:solidFill>
+                  <a:schemeClr val="tx1"/>
+                </a:solidFill>
+                <a:latin typeface="+mn-lt"/>
+                <a:ea typeface="+mn-ea"/>
+                <a:cs typeface="+mn-cs"/>
+              </a:defRPr>
+            </a:lvl5pPr>
+            <a:lvl6pPr marL="2286000" indent="0" algn="ctr" defTabSz="914400" rtl="0" eaLnBrk="1" latinLnBrk="0" hangingPunct="1">
+              <a:lnSpc>
+                <a:spcPct val="90000"/>
+              </a:lnSpc>
+              <a:spcBef>
+                <a:spcPts val="500"/>
+              </a:spcBef>
+              <a:buFont typeface="Arial" panose="020B0604020202020204" pitchFamily="34" charset="0"/>
+              <a:buNone/>
+              <a:defRPr sz="1600" kern="1200">
+                <a:solidFill>
+                  <a:schemeClr val="tx1"/>
+                </a:solidFill>
+                <a:latin typeface="+mn-lt"/>
+                <a:ea typeface="+mn-ea"/>
+                <a:cs typeface="+mn-cs"/>
+              </a:defRPr>
+            </a:lvl6pPr>
+            <a:lvl7pPr marL="2743200" indent="0" algn="ctr" defTabSz="914400" rtl="0" eaLnBrk="1" latinLnBrk="0" hangingPunct="1">
+              <a:lnSpc>
+                <a:spcPct val="90000"/>
+              </a:lnSpc>
+              <a:spcBef>
+                <a:spcPts val="500"/>
+              </a:spcBef>
+              <a:buFont typeface="Arial" panose="020B0604020202020204" pitchFamily="34" charset="0"/>
+              <a:buNone/>
+              <a:defRPr sz="1600" kern="1200">
+                <a:solidFill>
+                  <a:schemeClr val="tx1"/>
+                </a:solidFill>
+                <a:latin typeface="+mn-lt"/>
+                <a:ea typeface="+mn-ea"/>
+                <a:cs typeface="+mn-cs"/>
+              </a:defRPr>
+            </a:lvl7pPr>
+            <a:lvl8pPr marL="3200400" indent="0" algn="ctr" defTabSz="914400" rtl="0" eaLnBrk="1" latinLnBrk="0" hangingPunct="1">
+              <a:lnSpc>
+                <a:spcPct val="90000"/>
+              </a:lnSpc>
+              <a:spcBef>
+                <a:spcPts val="500"/>
+              </a:spcBef>
+              <a:buFont typeface="Arial" panose="020B0604020202020204" pitchFamily="34" charset="0"/>
+              <a:buNone/>
+              <a:defRPr sz="1600" kern="1200">
+                <a:solidFill>
+                  <a:schemeClr val="tx1"/>
+                </a:solidFill>
+                <a:latin typeface="+mn-lt"/>
+                <a:ea typeface="+mn-ea"/>
+                <a:cs typeface="+mn-cs"/>
+              </a:defRPr>
+            </a:lvl8pPr>
+            <a:lvl9pPr marL="3657600" indent="0" algn="ctr" defTabSz="914400" rtl="0" eaLnBrk="1" latinLnBrk="0" hangingPunct="1">
+              <a:lnSpc>
+                <a:spcPct val="90000"/>
+              </a:lnSpc>
+              <a:spcBef>
+                <a:spcPts val="500"/>
+              </a:spcBef>
+              <a:buFont typeface="Arial" panose="020B0604020202020204" pitchFamily="34" charset="0"/>
+              <a:buNone/>
+              <a:defRPr sz="1600" kern="1200">
+                <a:solidFill>
+                  <a:schemeClr val="tx1"/>
+                </a:solidFill>
+                <a:latin typeface="+mn-lt"/>
+                <a:ea typeface="+mn-ea"/>
+                <a:cs typeface="+mn-cs"/>
+              </a:defRPr>
+            </a:lvl9pPr>
+          </a:lstStyle>
+          <a:p>
+            <a:r>
+              <a:rPr lang="en-US" sz="2800" b="1" dirty="0"/>
+              <a:t>B</a:t>
+            </a:r>
+          </a:p>
+        </p:txBody>
+      </p:sp>
+      <p:sp>
+        <p:nvSpPr>
+          <p:cNvPr id="17" name="Subtitle 2">
+            <a:extLst>
+              <a:ext uri="{FF2B5EF4-FFF2-40B4-BE49-F238E27FC236}">
+                <a16:creationId xmlns:a16="http://schemas.microsoft.com/office/drawing/2014/main" id="{71C0F234-080A-2895-B649-BFD3BE648757}"/>
+              </a:ext>
+            </a:extLst>
+          </p:cNvPr>
+          <p:cNvSpPr txBox="1">
+            <a:spLocks/>
+          </p:cNvSpPr>
+          <p:nvPr/>
+        </p:nvSpPr>
+        <p:spPr>
+          <a:xfrm>
+            <a:off x="5937504" y="3602038"/>
+            <a:ext cx="573024" cy="430466"/>
+          </a:xfrm>
+          <a:prstGeom prst="rect">
+            <a:avLst/>
+          </a:prstGeom>
+        </p:spPr>
+        <p:txBody>
+          <a:bodyPr vert="horz" lIns="91440" tIns="45720" rIns="91440" bIns="45720" rtlCol="0">
+            <a:normAutofit fontScale="92500" lnSpcReduction="10000"/>
+          </a:bodyPr>
+          <a:lstStyle>
+            <a:lvl1pPr marL="0" indent="0" algn="ctr" defTabSz="914400" rtl="0" eaLnBrk="1" latinLnBrk="0" hangingPunct="1">
+              <a:lnSpc>
+                <a:spcPct val="90000"/>
+              </a:lnSpc>
+              <a:spcBef>
+                <a:spcPts val="1000"/>
+              </a:spcBef>
+              <a:buFont typeface="Arial" panose="020B0604020202020204" pitchFamily="34" charset="0"/>
+              <a:buNone/>
+              <a:defRPr sz="2400" kern="1200">
+                <a:solidFill>
+                  <a:schemeClr val="tx1"/>
+                </a:solidFill>
+                <a:latin typeface="+mn-lt"/>
+                <a:ea typeface="+mn-ea"/>
+                <a:cs typeface="+mn-cs"/>
+              </a:defRPr>
+            </a:lvl1pPr>
+            <a:lvl2pPr marL="457200" indent="0" algn="ctr" defTabSz="914400" rtl="0" eaLnBrk="1" latinLnBrk="0" hangingPunct="1">
+              <a:lnSpc>
+                <a:spcPct val="90000"/>
+              </a:lnSpc>
+              <a:spcBef>
+                <a:spcPts val="500"/>
+              </a:spcBef>
+              <a:buFont typeface="Arial" panose="020B0604020202020204" pitchFamily="34" charset="0"/>
+              <a:buNone/>
+              <a:defRPr sz="2000" kern="1200">
+                <a:solidFill>
+                  <a:schemeClr val="tx1"/>
+                </a:solidFill>
+                <a:latin typeface="+mn-lt"/>
+                <a:ea typeface="+mn-ea"/>
+                <a:cs typeface="+mn-cs"/>
+              </a:defRPr>
+            </a:lvl2pPr>
+            <a:lvl3pPr marL="914400" indent="0" algn="ctr" defTabSz="914400" rtl="0" eaLnBrk="1" latinLnBrk="0" hangingPunct="1">
+              <a:lnSpc>
+                <a:spcPct val="90000"/>
+              </a:lnSpc>
+              <a:spcBef>
+                <a:spcPts val="500"/>
+              </a:spcBef>
+              <a:buFont typeface="Arial" panose="020B0604020202020204" pitchFamily="34" charset="0"/>
+              <a:buNone/>
+              <a:defRPr sz="1800" kern="1200">
+                <a:solidFill>
+                  <a:schemeClr val="tx1"/>
+                </a:solidFill>
+                <a:latin typeface="+mn-lt"/>
+                <a:ea typeface="+mn-ea"/>
+                <a:cs typeface="+mn-cs"/>
+              </a:defRPr>
+            </a:lvl3pPr>
+            <a:lvl4pPr marL="1371600" indent="0" algn="ctr" defTabSz="914400" rtl="0" eaLnBrk="1" latinLnBrk="0" hangingPunct="1">
+              <a:lnSpc>
+                <a:spcPct val="90000"/>
+              </a:lnSpc>
+              <a:spcBef>
+                <a:spcPts val="500"/>
+              </a:spcBef>
+              <a:buFont typeface="Arial" panose="020B0604020202020204" pitchFamily="34" charset="0"/>
+              <a:buNone/>
+              <a:defRPr sz="1600" kern="1200">
+                <a:solidFill>
+                  <a:schemeClr val="tx1"/>
+                </a:solidFill>
+                <a:latin typeface="+mn-lt"/>
+                <a:ea typeface="+mn-ea"/>
+                <a:cs typeface="+mn-cs"/>
+              </a:defRPr>
+            </a:lvl4pPr>
+            <a:lvl5pPr marL="1828800" indent="0" algn="ctr" defTabSz="914400" rtl="0" eaLnBrk="1" latinLnBrk="0" hangingPunct="1">
+              <a:lnSpc>
+                <a:spcPct val="90000"/>
+              </a:lnSpc>
+              <a:spcBef>
+                <a:spcPts val="500"/>
+              </a:spcBef>
+              <a:buFont typeface="Arial" panose="020B0604020202020204" pitchFamily="34" charset="0"/>
+              <a:buNone/>
+              <a:defRPr sz="1600" kern="1200">
+                <a:solidFill>
+                  <a:schemeClr val="tx1"/>
+                </a:solidFill>
+                <a:latin typeface="+mn-lt"/>
+                <a:ea typeface="+mn-ea"/>
+                <a:cs typeface="+mn-cs"/>
+              </a:defRPr>
+            </a:lvl5pPr>
+            <a:lvl6pPr marL="2286000" indent="0" algn="ctr" defTabSz="914400" rtl="0" eaLnBrk="1" latinLnBrk="0" hangingPunct="1">
+              <a:lnSpc>
+                <a:spcPct val="90000"/>
+              </a:lnSpc>
+              <a:spcBef>
+                <a:spcPts val="500"/>
+              </a:spcBef>
+              <a:buFont typeface="Arial" panose="020B0604020202020204" pitchFamily="34" charset="0"/>
+              <a:buNone/>
+              <a:defRPr sz="1600" kern="1200">
+                <a:solidFill>
+                  <a:schemeClr val="tx1"/>
+                </a:solidFill>
+                <a:latin typeface="+mn-lt"/>
+                <a:ea typeface="+mn-ea"/>
+                <a:cs typeface="+mn-cs"/>
+              </a:defRPr>
+            </a:lvl6pPr>
+            <a:lvl7pPr marL="2743200" indent="0" algn="ctr" defTabSz="914400" rtl="0" eaLnBrk="1" latinLnBrk="0" hangingPunct="1">
+              <a:lnSpc>
+                <a:spcPct val="90000"/>
+              </a:lnSpc>
+              <a:spcBef>
+                <a:spcPts val="500"/>
+              </a:spcBef>
+              <a:buFont typeface="Arial" panose="020B0604020202020204" pitchFamily="34" charset="0"/>
+              <a:buNone/>
+              <a:defRPr sz="1600" kern="1200">
+                <a:solidFill>
+                  <a:schemeClr val="tx1"/>
+                </a:solidFill>
+                <a:latin typeface="+mn-lt"/>
+                <a:ea typeface="+mn-ea"/>
+                <a:cs typeface="+mn-cs"/>
+              </a:defRPr>
+            </a:lvl7pPr>
+            <a:lvl8pPr marL="3200400" indent="0" algn="ctr" defTabSz="914400" rtl="0" eaLnBrk="1" latinLnBrk="0" hangingPunct="1">
+              <a:lnSpc>
+                <a:spcPct val="90000"/>
+              </a:lnSpc>
+              <a:spcBef>
+                <a:spcPts val="500"/>
+              </a:spcBef>
+              <a:buFont typeface="Arial" panose="020B0604020202020204" pitchFamily="34" charset="0"/>
+              <a:buNone/>
+              <a:defRPr sz="1600" kern="1200">
+                <a:solidFill>
+                  <a:schemeClr val="tx1"/>
+                </a:solidFill>
+                <a:latin typeface="+mn-lt"/>
+                <a:ea typeface="+mn-ea"/>
+                <a:cs typeface="+mn-cs"/>
+              </a:defRPr>
+            </a:lvl8pPr>
+            <a:lvl9pPr marL="3657600" indent="0" algn="ctr" defTabSz="914400" rtl="0" eaLnBrk="1" latinLnBrk="0" hangingPunct="1">
+              <a:lnSpc>
+                <a:spcPct val="90000"/>
+              </a:lnSpc>
+              <a:spcBef>
+                <a:spcPts val="500"/>
+              </a:spcBef>
+              <a:buFont typeface="Arial" panose="020B0604020202020204" pitchFamily="34" charset="0"/>
+              <a:buNone/>
+              <a:defRPr sz="1600" kern="1200">
+                <a:solidFill>
+                  <a:schemeClr val="tx1"/>
+                </a:solidFill>
+                <a:latin typeface="+mn-lt"/>
+                <a:ea typeface="+mn-ea"/>
+                <a:cs typeface="+mn-cs"/>
+              </a:defRPr>
+            </a:lvl9pPr>
+          </a:lstStyle>
+          <a:p>
+            <a:r>
+              <a:rPr lang="en-US" sz="2800" b="1" dirty="0"/>
+              <a:t>y</a:t>
+            </a:r>
+          </a:p>
+        </p:txBody>
+      </p:sp>
+    </p:spTree>
+    <p:extLst>
+      <p:ext uri="{BB962C8B-B14F-4D97-AF65-F5344CB8AC3E}">
+        <p14:creationId xmlns:p14="http://schemas.microsoft.com/office/powerpoint/2010/main" val="2630662124"/>
+      </p:ext>
+    </p:extLst>
+  </p:cSld>
+  <p:clrMapOvr>
+    <a:masterClrMapping/>
+  </p:clrMapOvr>
+  <mc:AlternateContent xmlns:mc="http://schemas.openxmlformats.org/markup-compatibility/2006">
+    <mc:Choice xmlns:p14="http://schemas.microsoft.com/office/powerpoint/2010/main" Requires="p14">
+      <p:timing>
+        <p:tnLst>
+          <p:par>
+            <p:cTn id="1" dur="indefinite" restart="never" nodeType="tmRoot">
+              <p:childTnLst>
+                <p:seq concurrent="1" nextAc="seek">
+                  <p:cTn id="2" dur="indefinite" nodeType="mainSeq">
+                    <p:childTnLst>
+                      <p:par>
+                        <p:cTn id="3" fill="hold">
+                          <p:stCondLst>
+                            <p:cond delay="indefinite"/>
+                          </p:stCondLst>
+                          <p:childTnLst>
+                            <p:par>
+                              <p:cTn id="4" fill="hold">
+                                <p:stCondLst>
+                                  <p:cond delay="0"/>
+                                </p:stCondLst>
+                                <p:childTnLst>
+                                  <p:par>
+                                    <p:cTn id="5" presetID="45" presetClass="entr" presetSubtype="0" fill="hold" grpId="0" nodeType="clickEffect">
+                                      <p:stCondLst>
+                                        <p:cond delay="0"/>
+                                      </p:stCondLst>
+                                      <p:childTnLst>
+                                        <p:set>
+                                          <p:cBhvr>
+                                            <p:cTn id="6" dur="1" fill="hold">
+                                              <p:stCondLst>
+                                                <p:cond delay="0"/>
+                                              </p:stCondLst>
+                                            </p:cTn>
+                                            <p:tgtEl>
+                                              <p:spTgt spid="2"/>
+                                            </p:tgtEl>
+                                            <p:attrNameLst>
+                                              <p:attrName>style.visibility</p:attrName>
+                                            </p:attrNameLst>
+                                          </p:cBhvr>
+                                          <p:to>
+                                            <p:strVal val="visible"/>
+                                          </p:to>
+                                        </p:set>
+                                        <p:animEffect transition="in" filter="fade">
+                                          <p:cBhvr>
+                                            <p:cTn id="7" dur="2000"/>
+                                            <p:tgtEl>
+                                              <p:spTgt spid="2"/>
+                                            </p:tgtEl>
+                                          </p:cBhvr>
+                                        </p:animEffect>
+                                        <p:anim calcmode="lin" valueType="num">
+                                          <p:cBhvr>
+                                            <p:cTn id="8" dur="2000" fill="hold"/>
+                                            <p:tgtEl>
+                                              <p:spTgt spid="2"/>
+                                            </p:tgtEl>
+                                            <p:attrNameLst>
+                                              <p:attrName>ppt_w</p:attrName>
+                                            </p:attrNameLst>
+                                          </p:cBhvr>
+                                          <p:tavLst>
+                                            <p:tav tm="0" fmla="#ppt_w*sin(2.5*pi*$)">
+                                              <p:val>
+                                                <p:fltVal val="0"/>
+                                              </p:val>
+                                            </p:tav>
+                                            <p:tav tm="100000">
+                                              <p:val>
+                                                <p:fltVal val="1"/>
+                                              </p:val>
+                                            </p:tav>
+                                          </p:tavLst>
+                                        </p:anim>
+                                        <p:anim calcmode="lin" valueType="num">
+                                          <p:cBhvr>
+                                            <p:cTn id="9" dur="2000" fill="hold"/>
+                                            <p:tgtEl>
+                                              <p:spTgt spid="2"/>
+                                            </p:tgtEl>
+                                            <p:attrNameLst>
+                                              <p:attrName>ppt_h</p:attrName>
+                                            </p:attrNameLst>
+                                          </p:cBhvr>
+                                          <p:tavLst>
+                                            <p:tav tm="0">
+                                              <p:val>
+                                                <p:strVal val="#ppt_h"/>
+                                              </p:val>
+                                            </p:tav>
+                                            <p:tav tm="100000">
+                                              <p:val>
+                                                <p:strVal val="#ppt_h"/>
+                                              </p:val>
+                                            </p:tav>
+                                          </p:tavLst>
+                                        </p:anim>
+                                      </p:childTnLst>
+                                    </p:cTn>
+                                  </p:par>
+                                </p:childTnLst>
+                              </p:cTn>
+                            </p:par>
+                            <p:par>
+                              <p:cTn id="10" fill="hold">
+                                <p:stCondLst>
+                                  <p:cond delay="2000"/>
+                                </p:stCondLst>
+                                <p:childTnLst>
+                                  <p:par>
+                                    <p:cTn id="11" presetID="2" presetClass="entr" presetSubtype="2" fill="hold" grpId="0" nodeType="afterEffect" p14:presetBounceEnd="16667">
+                                      <p:stCondLst>
+                                        <p:cond delay="0"/>
+                                      </p:stCondLst>
+                                      <p:childTnLst>
+                                        <p:set>
+                                          <p:cBhvr>
+                                            <p:cTn id="12" dur="1" fill="hold">
+                                              <p:stCondLst>
+                                                <p:cond delay="0"/>
+                                              </p:stCondLst>
+                                            </p:cTn>
+                                            <p:tgtEl>
+                                              <p:spTgt spid="8"/>
+                                            </p:tgtEl>
+                                            <p:attrNameLst>
+                                              <p:attrName>style.visibility</p:attrName>
+                                            </p:attrNameLst>
+                                          </p:cBhvr>
+                                          <p:to>
+                                            <p:strVal val="visible"/>
+                                          </p:to>
+                                        </p:set>
+                                        <p:anim calcmode="lin" valueType="num" p14:bounceEnd="16667">
+                                          <p:cBhvr additive="base">
+                                            <p:cTn id="13" dur="1500" fill="hold"/>
+                                            <p:tgtEl>
+                                              <p:spTgt spid="8"/>
+                                            </p:tgtEl>
+                                            <p:attrNameLst>
+                                              <p:attrName>ppt_x</p:attrName>
+                                            </p:attrNameLst>
+                                          </p:cBhvr>
+                                          <p:tavLst>
+                                            <p:tav tm="0">
+                                              <p:val>
+                                                <p:strVal val="1+#ppt_w/2"/>
+                                              </p:val>
+                                            </p:tav>
+                                            <p:tav tm="100000">
+                                              <p:val>
+                                                <p:strVal val="#ppt_x"/>
+                                              </p:val>
+                                            </p:tav>
+                                          </p:tavLst>
+                                        </p:anim>
+                                        <p:anim calcmode="lin" valueType="num" p14:bounceEnd="16667">
+                                          <p:cBhvr additive="base">
+                                            <p:cTn id="14" dur="1500" fill="hold"/>
+                                            <p:tgtEl>
+                                              <p:spTgt spid="8"/>
+                                            </p:tgtEl>
+                                            <p:attrNameLst>
+                                              <p:attrName>ppt_y</p:attrName>
+                                            </p:attrNameLst>
+                                          </p:cBhvr>
+                                          <p:tavLst>
+                                            <p:tav tm="0">
+                                              <p:val>
+                                                <p:strVal val="#ppt_y"/>
+                                              </p:val>
+                                            </p:tav>
+                                            <p:tav tm="100000">
+                                              <p:val>
+                                                <p:strVal val="#ppt_y"/>
+                                              </p:val>
+                                            </p:tav>
+                                          </p:tavLst>
+                                        </p:anim>
+                                      </p:childTnLst>
+                                    </p:cTn>
+                                  </p:par>
+                                  <p:par>
+                                    <p:cTn id="15" presetID="2" presetClass="entr" presetSubtype="8" fill="hold" grpId="0" nodeType="withEffect" p14:presetBounceEnd="16667">
+                                      <p:stCondLst>
+                                        <p:cond delay="0"/>
+                                      </p:stCondLst>
+                                      <p:childTnLst>
+                                        <p:set>
+                                          <p:cBhvr>
+                                            <p:cTn id="16" dur="1" fill="hold">
+                                              <p:stCondLst>
+                                                <p:cond delay="0"/>
+                                              </p:stCondLst>
+                                            </p:cTn>
+                                            <p:tgtEl>
+                                              <p:spTgt spid="10"/>
+                                            </p:tgtEl>
+                                            <p:attrNameLst>
+                                              <p:attrName>style.visibility</p:attrName>
+                                            </p:attrNameLst>
+                                          </p:cBhvr>
+                                          <p:to>
+                                            <p:strVal val="visible"/>
+                                          </p:to>
+                                        </p:set>
+                                        <p:anim calcmode="lin" valueType="num" p14:bounceEnd="16667">
+                                          <p:cBhvr additive="base">
+                                            <p:cTn id="17" dur="1500" fill="hold"/>
+                                            <p:tgtEl>
+                                              <p:spTgt spid="10"/>
+                                            </p:tgtEl>
+                                            <p:attrNameLst>
+                                              <p:attrName>ppt_x</p:attrName>
+                                            </p:attrNameLst>
+                                          </p:cBhvr>
+                                          <p:tavLst>
+                                            <p:tav tm="0">
+                                              <p:val>
+                                                <p:strVal val="0-#ppt_w/2"/>
+                                              </p:val>
+                                            </p:tav>
+                                            <p:tav tm="100000">
+                                              <p:val>
+                                                <p:strVal val="#ppt_x"/>
+                                              </p:val>
+                                            </p:tav>
+                                          </p:tavLst>
+                                        </p:anim>
+                                        <p:anim calcmode="lin" valueType="num" p14:bounceEnd="16667">
+                                          <p:cBhvr additive="base">
+                                            <p:cTn id="18" dur="1500" fill="hold"/>
+                                            <p:tgtEl>
+                                              <p:spTgt spid="10"/>
+                                            </p:tgtEl>
+                                            <p:attrNameLst>
+                                              <p:attrName>ppt_y</p:attrName>
+                                            </p:attrNameLst>
+                                          </p:cBhvr>
+                                          <p:tavLst>
+                                            <p:tav tm="0">
+                                              <p:val>
+                                                <p:strVal val="#ppt_y"/>
+                                              </p:val>
+                                            </p:tav>
+                                            <p:tav tm="100000">
+                                              <p:val>
+                                                <p:strVal val="#ppt_y"/>
+                                              </p:val>
+                                            </p:tav>
+                                          </p:tavLst>
+                                        </p:anim>
+                                      </p:childTnLst>
+                                    </p:cTn>
+                                  </p:par>
+                                </p:childTnLst>
+                              </p:cTn>
+                            </p:par>
+                            <p:par>
+                              <p:cTn id="19" fill="hold">
+                                <p:stCondLst>
+                                  <p:cond delay="3500"/>
+                                </p:stCondLst>
+                                <p:childTnLst>
+                                  <p:par>
+                                    <p:cTn id="20" presetID="10" presetClass="entr" presetSubtype="0" fill="hold" grpId="0" nodeType="afterEffect">
+                                      <p:stCondLst>
+                                        <p:cond delay="0"/>
+                                      </p:stCondLst>
+                                      <p:childTnLst>
+                                        <p:set>
+                                          <p:cBhvr>
+                                            <p:cTn id="21" dur="1" fill="hold">
+                                              <p:stCondLst>
+                                                <p:cond delay="0"/>
+                                              </p:stCondLst>
+                                            </p:cTn>
+                                            <p:tgtEl>
+                                              <p:spTgt spid="16"/>
+                                            </p:tgtEl>
+                                            <p:attrNameLst>
+                                              <p:attrName>style.visibility</p:attrName>
+                                            </p:attrNameLst>
+                                          </p:cBhvr>
+                                          <p:to>
+                                            <p:strVal val="visible"/>
+                                          </p:to>
+                                        </p:set>
+                                        <p:animEffect transition="in" filter="fade">
+                                          <p:cBhvr>
+                                            <p:cTn id="22" dur="500"/>
+                                            <p:tgtEl>
+                                              <p:spTgt spid="16"/>
+                                            </p:tgtEl>
+                                          </p:cBhvr>
+                                        </p:animEffect>
+                                      </p:childTnLst>
+                                    </p:cTn>
+                                  </p:par>
+                                </p:childTnLst>
+                              </p:cTn>
+                            </p:par>
+                            <p:par>
+                              <p:cTn id="23" fill="hold">
+                                <p:stCondLst>
+                                  <p:cond delay="4000"/>
+                                </p:stCondLst>
+                                <p:childTnLst>
+                                  <p:par>
+                                    <p:cTn id="24" presetID="10" presetClass="entr" presetSubtype="0" fill="hold" grpId="0" nodeType="afterEffect">
+                                      <p:stCondLst>
+                                        <p:cond delay="0"/>
+                                      </p:stCondLst>
+                                      <p:childTnLst>
+                                        <p:set>
+                                          <p:cBhvr>
+                                            <p:cTn id="25" dur="1" fill="hold">
+                                              <p:stCondLst>
+                                                <p:cond delay="0"/>
+                                              </p:stCondLst>
+                                            </p:cTn>
+                                            <p:tgtEl>
+                                              <p:spTgt spid="17"/>
+                                            </p:tgtEl>
+                                            <p:attrNameLst>
+                                              <p:attrName>style.visibility</p:attrName>
+                                            </p:attrNameLst>
+                                          </p:cBhvr>
+                                          <p:to>
+                                            <p:strVal val="visible"/>
+                                          </p:to>
+                                        </p:set>
+                                        <p:animEffect transition="in" filter="fade">
+                                          <p:cBhvr>
+                                            <p:cTn id="26" dur="500"/>
+                                            <p:tgtEl>
+                                              <p:spTgt spid="17"/>
+                                            </p:tgtEl>
+                                          </p:cBhvr>
+                                        </p:animEffect>
+                                      </p:childTnLst>
+                                    </p:cTn>
+                                  </p:par>
+                                </p:childTnLst>
+                              </p:cTn>
+                            </p:par>
+                          </p:childTnLst>
+                        </p:cTn>
+                      </p:par>
+                    </p:childTnLst>
+                  </p:cTn>
+                  <p:prevCondLst>
+                    <p:cond evt="onPrev" delay="0">
+                      <p:tgtEl>
+                        <p:sldTgt/>
+                      </p:tgtEl>
+                    </p:cond>
+                  </p:prevCondLst>
+                  <p:nextCondLst>
+                    <p:cond evt="onNext" delay="0">
+                      <p:tgtEl>
+                        <p:sldTgt/>
+                      </p:tgtEl>
+                    </p:cond>
+                  </p:nextCondLst>
+                </p:seq>
+              </p:childTnLst>
+            </p:cTn>
+          </p:par>
+        </p:tnLst>
+        <p:bldLst>
+          <p:bldP spid="2" grpId="0"/>
+          <p:bldP spid="8" grpId="0"/>
+          <p:bldP spid="10" grpId="0"/>
+          <p:bldP spid="16" grpId="0"/>
+          <p:bldP spid="17" grpId="0"/>
+        </p:bldLst>
+      </p:timing>
+    </mc:Choice>
+    <mc:Fallback>
+      <p:timing>
+        <p:tnLst>
+          <p:par>
+            <p:cTn id="1" dur="indefinite" restart="never" nodeType="tmRoot">
+              <p:childTnLst>
+                <p:seq concurrent="1" nextAc="seek">
+                  <p:cTn id="2" dur="indefinite" nodeType="mainSeq">
+                    <p:childTnLst>
+                      <p:par>
+                        <p:cTn id="3" fill="hold">
+                          <p:stCondLst>
+                            <p:cond delay="indefinite"/>
+                          </p:stCondLst>
+                          <p:childTnLst>
+                            <p:par>
+                              <p:cTn id="4" fill="hold">
+                                <p:stCondLst>
+                                  <p:cond delay="0"/>
+                                </p:stCondLst>
+                                <p:childTnLst>
+                                  <p:par>
+                                    <p:cTn id="5" presetID="45" presetClass="entr" presetSubtype="0" fill="hold" grpId="0" nodeType="clickEffect">
+                                      <p:stCondLst>
+                                        <p:cond delay="0"/>
+                                      </p:stCondLst>
+                                      <p:childTnLst>
+                                        <p:set>
+                                          <p:cBhvr>
+                                            <p:cTn id="6" dur="1" fill="hold">
+                                              <p:stCondLst>
+                                                <p:cond delay="0"/>
+                                              </p:stCondLst>
+                                            </p:cTn>
+                                            <p:tgtEl>
+                                              <p:spTgt spid="2"/>
+                                            </p:tgtEl>
+                                            <p:attrNameLst>
+                                              <p:attrName>style.visibility</p:attrName>
+                                            </p:attrNameLst>
+                                          </p:cBhvr>
+                                          <p:to>
+                                            <p:strVal val="visible"/>
+                                          </p:to>
+                                        </p:set>
+                                        <p:animEffect transition="in" filter="fade">
+                                          <p:cBhvr>
+                                            <p:cTn id="7" dur="2000"/>
+                                            <p:tgtEl>
+                                              <p:spTgt spid="2"/>
+                                            </p:tgtEl>
+                                          </p:cBhvr>
+                                        </p:animEffect>
+                                        <p:anim calcmode="lin" valueType="num">
+                                          <p:cBhvr>
+                                            <p:cTn id="8" dur="2000" fill="hold"/>
+                                            <p:tgtEl>
+                                              <p:spTgt spid="2"/>
+                                            </p:tgtEl>
+                                            <p:attrNameLst>
+                                              <p:attrName>ppt_w</p:attrName>
+                                            </p:attrNameLst>
+                                          </p:cBhvr>
+                                          <p:tavLst>
+                                            <p:tav tm="0" fmla="#ppt_w*sin(2.5*pi*$)">
+                                              <p:val>
+                                                <p:fltVal val="0"/>
+                                              </p:val>
+                                            </p:tav>
+                                            <p:tav tm="100000">
+                                              <p:val>
+                                                <p:fltVal val="1"/>
+                                              </p:val>
+                                            </p:tav>
+                                          </p:tavLst>
+                                        </p:anim>
+                                        <p:anim calcmode="lin" valueType="num">
+                                          <p:cBhvr>
+                                            <p:cTn id="9" dur="2000" fill="hold"/>
+                                            <p:tgtEl>
+                                              <p:spTgt spid="2"/>
+                                            </p:tgtEl>
+                                            <p:attrNameLst>
+                                              <p:attrName>ppt_h</p:attrName>
+                                            </p:attrNameLst>
+                                          </p:cBhvr>
+                                          <p:tavLst>
+                                            <p:tav tm="0">
+                                              <p:val>
+                                                <p:strVal val="#ppt_h"/>
+                                              </p:val>
+                                            </p:tav>
+                                            <p:tav tm="100000">
+                                              <p:val>
+                                                <p:strVal val="#ppt_h"/>
+                                              </p:val>
+                                            </p:tav>
+                                          </p:tavLst>
+                                        </p:anim>
+                                      </p:childTnLst>
+                                    </p:cTn>
+                                  </p:par>
+                                </p:childTnLst>
+                              </p:cTn>
+                            </p:par>
+                            <p:par>
+                              <p:cTn id="10" fill="hold">
+                                <p:stCondLst>
+                                  <p:cond delay="2000"/>
+                                </p:stCondLst>
+                                <p:childTnLst>
+                                  <p:par>
+                                    <p:cTn id="11" presetID="2" presetClass="entr" presetSubtype="2" fill="hold" grpId="0" nodeType="afterEffect">
+                                      <p:stCondLst>
+                                        <p:cond delay="0"/>
+                                      </p:stCondLst>
+                                      <p:childTnLst>
+                                        <p:set>
+                                          <p:cBhvr>
+                                            <p:cTn id="12" dur="1" fill="hold">
+                                              <p:stCondLst>
+                                                <p:cond delay="0"/>
+                                              </p:stCondLst>
+                                            </p:cTn>
+                                            <p:tgtEl>
+                                              <p:spTgt spid="8"/>
+                                            </p:tgtEl>
+                                            <p:attrNameLst>
+                                              <p:attrName>style.visibility</p:attrName>
+                                            </p:attrNameLst>
+                                          </p:cBhvr>
+                                          <p:to>
+                                            <p:strVal val="visible"/>
+                                          </p:to>
+                                        </p:set>
+                                        <p:anim calcmode="lin" valueType="num">
+                                          <p:cBhvr additive="base">
+                                            <p:cTn id="13" dur="1500" fill="hold"/>
+                                            <p:tgtEl>
+                                              <p:spTgt spid="8"/>
+                                            </p:tgtEl>
+                                            <p:attrNameLst>
+                                              <p:attrName>ppt_x</p:attrName>
+                                            </p:attrNameLst>
+                                          </p:cBhvr>
+                                          <p:tavLst>
+                                            <p:tav tm="0">
+                                              <p:val>
+                                                <p:strVal val="1+#ppt_w/2"/>
+                                              </p:val>
+                                            </p:tav>
+                                            <p:tav tm="100000">
+                                              <p:val>
+                                                <p:strVal val="#ppt_x"/>
+                                              </p:val>
+                                            </p:tav>
+                                          </p:tavLst>
+                                        </p:anim>
+                                        <p:anim calcmode="lin" valueType="num">
+                                          <p:cBhvr additive="base">
+                                            <p:cTn id="14" dur="1500" fill="hold"/>
+                                            <p:tgtEl>
+                                              <p:spTgt spid="8"/>
+                                            </p:tgtEl>
+                                            <p:attrNameLst>
+                                              <p:attrName>ppt_y</p:attrName>
+                                            </p:attrNameLst>
+                                          </p:cBhvr>
+                                          <p:tavLst>
+                                            <p:tav tm="0">
+                                              <p:val>
+                                                <p:strVal val="#ppt_y"/>
+                                              </p:val>
+                                            </p:tav>
+                                            <p:tav tm="100000">
+                                              <p:val>
+                                                <p:strVal val="#ppt_y"/>
+                                              </p:val>
+                                            </p:tav>
+                                          </p:tavLst>
+                                        </p:anim>
+                                      </p:childTnLst>
+                                    </p:cTn>
+                                  </p:par>
+                                  <p:par>
+                                    <p:cTn id="15" presetID="2" presetClass="entr" presetSubtype="8" fill="hold" grpId="0" nodeType="withEffect">
+                                      <p:stCondLst>
+                                        <p:cond delay="0"/>
+                                      </p:stCondLst>
+                                      <p:childTnLst>
+                                        <p:set>
+                                          <p:cBhvr>
+                                            <p:cTn id="16" dur="1" fill="hold">
+                                              <p:stCondLst>
+                                                <p:cond delay="0"/>
+                                              </p:stCondLst>
+                                            </p:cTn>
+                                            <p:tgtEl>
+                                              <p:spTgt spid="10"/>
+                                            </p:tgtEl>
+                                            <p:attrNameLst>
+                                              <p:attrName>style.visibility</p:attrName>
+                                            </p:attrNameLst>
+                                          </p:cBhvr>
+                                          <p:to>
+                                            <p:strVal val="visible"/>
+                                          </p:to>
+                                        </p:set>
+                                        <p:anim calcmode="lin" valueType="num">
+                                          <p:cBhvr additive="base">
+                                            <p:cTn id="17" dur="1500" fill="hold"/>
+                                            <p:tgtEl>
+                                              <p:spTgt spid="10"/>
+                                            </p:tgtEl>
+                                            <p:attrNameLst>
+                                              <p:attrName>ppt_x</p:attrName>
+                                            </p:attrNameLst>
+                                          </p:cBhvr>
+                                          <p:tavLst>
+                                            <p:tav tm="0">
+                                              <p:val>
+                                                <p:strVal val="0-#ppt_w/2"/>
+                                              </p:val>
+                                            </p:tav>
+                                            <p:tav tm="100000">
+                                              <p:val>
+                                                <p:strVal val="#ppt_x"/>
+                                              </p:val>
+                                            </p:tav>
+                                          </p:tavLst>
+                                        </p:anim>
+                                        <p:anim calcmode="lin" valueType="num">
+                                          <p:cBhvr additive="base">
+                                            <p:cTn id="18" dur="1500" fill="hold"/>
+                                            <p:tgtEl>
+                                              <p:spTgt spid="10"/>
+                                            </p:tgtEl>
+                                            <p:attrNameLst>
+                                              <p:attrName>ppt_y</p:attrName>
+                                            </p:attrNameLst>
+                                          </p:cBhvr>
+                                          <p:tavLst>
+                                            <p:tav tm="0">
+                                              <p:val>
+                                                <p:strVal val="#ppt_y"/>
+                                              </p:val>
+                                            </p:tav>
+                                            <p:tav tm="100000">
+                                              <p:val>
+                                                <p:strVal val="#ppt_y"/>
+                                              </p:val>
+                                            </p:tav>
+                                          </p:tavLst>
+                                        </p:anim>
+                                      </p:childTnLst>
+                                    </p:cTn>
+                                  </p:par>
+                                </p:childTnLst>
+                              </p:cTn>
+                            </p:par>
+                            <p:par>
+                              <p:cTn id="19" fill="hold">
+                                <p:stCondLst>
+                                  <p:cond delay="3500"/>
+                                </p:stCondLst>
+                                <p:childTnLst>
+                                  <p:par>
+                                    <p:cTn id="20" presetID="10" presetClass="entr" presetSubtype="0" fill="hold" grpId="0" nodeType="afterEffect">
+                                      <p:stCondLst>
+                                        <p:cond delay="0"/>
+                                      </p:stCondLst>
+                                      <p:childTnLst>
+                                        <p:set>
+                                          <p:cBhvr>
+                                            <p:cTn id="21" dur="1" fill="hold">
+                                              <p:stCondLst>
+                                                <p:cond delay="0"/>
+                                              </p:stCondLst>
+                                            </p:cTn>
+                                            <p:tgtEl>
+                                              <p:spTgt spid="16"/>
+                                            </p:tgtEl>
+                                            <p:attrNameLst>
+                                              <p:attrName>style.visibility</p:attrName>
+                                            </p:attrNameLst>
+                                          </p:cBhvr>
+                                          <p:to>
+                                            <p:strVal val="visible"/>
+                                          </p:to>
+                                        </p:set>
+                                        <p:animEffect transition="in" filter="fade">
+                                          <p:cBhvr>
+                                            <p:cTn id="22" dur="500"/>
+                                            <p:tgtEl>
+                                              <p:spTgt spid="16"/>
+                                            </p:tgtEl>
+                                          </p:cBhvr>
+                                        </p:animEffect>
+                                      </p:childTnLst>
+                                    </p:cTn>
+                                  </p:par>
+                                </p:childTnLst>
+                              </p:cTn>
+                            </p:par>
+                            <p:par>
+                              <p:cTn id="23" fill="hold">
+                                <p:stCondLst>
+                                  <p:cond delay="4000"/>
+                                </p:stCondLst>
+                                <p:childTnLst>
+                                  <p:par>
+                                    <p:cTn id="24" presetID="10" presetClass="entr" presetSubtype="0" fill="hold" grpId="0" nodeType="afterEffect">
+                                      <p:stCondLst>
+                                        <p:cond delay="0"/>
+                                      </p:stCondLst>
+                                      <p:childTnLst>
+                                        <p:set>
+                                          <p:cBhvr>
+                                            <p:cTn id="25" dur="1" fill="hold">
+                                              <p:stCondLst>
+                                                <p:cond delay="0"/>
+                                              </p:stCondLst>
+                                            </p:cTn>
+                                            <p:tgtEl>
+                                              <p:spTgt spid="17"/>
+                                            </p:tgtEl>
+                                            <p:attrNameLst>
+                                              <p:attrName>style.visibility</p:attrName>
+                                            </p:attrNameLst>
+                                          </p:cBhvr>
+                                          <p:to>
+                                            <p:strVal val="visible"/>
+                                          </p:to>
+                                        </p:set>
+                                        <p:animEffect transition="in" filter="fade">
+                                          <p:cBhvr>
+                                            <p:cTn id="26" dur="500"/>
+                                            <p:tgtEl>
+                                              <p:spTgt spid="17"/>
+                                            </p:tgtEl>
+                                          </p:cBhvr>
+                                        </p:animEffect>
+                                      </p:childTnLst>
+                                    </p:cTn>
+                                  </p:par>
+                                </p:childTnLst>
+                              </p:cTn>
+                            </p:par>
+                          </p:childTnLst>
+                        </p:cTn>
+                      </p:par>
+                    </p:childTnLst>
+                  </p:cTn>
+                  <p:prevCondLst>
+                    <p:cond evt="onPrev" delay="0">
+                      <p:tgtEl>
+                        <p:sldTgt/>
+                      </p:tgtEl>
+                    </p:cond>
+                  </p:prevCondLst>
+                  <p:nextCondLst>
+                    <p:cond evt="onNext" delay="0">
+                      <p:tgtEl>
+                        <p:sldTgt/>
+                      </p:tgtEl>
+                    </p:cond>
+                  </p:nextCondLst>
+                </p:seq>
+              </p:childTnLst>
+            </p:cTn>
+          </p:par>
+        </p:tnLst>
+        <p:bldLst>
+          <p:bldP spid="2" grpId="0"/>
+          <p:bldP spid="8" grpId="0"/>
+          <p:bldP spid="10" grpId="0"/>
+          <p:bldP spid="16" grpId="0"/>
+          <p:bldP spid="17" grpId="0"/>
+        </p:bldLst>
+      </p:timing>
+    </mc:Fallback>
+  </mc:AlternateContent>
 </p:sld>
 </file>
 

--- a/Current Presentation/Spring 2026.pptx
+++ b/Current Presentation/Spring 2026.pptx
@@ -5,9 +5,7 @@
     <p:sldMasterId id="2147483648" r:id="rId1"/>
   </p:sldMasterIdLst>
   <p:sldIdLst>
-    <p:sldId id="256" r:id="rId2"/>
-    <p:sldId id="257" r:id="rId3"/>
-    <p:sldId id="258" r:id="rId4"/>
+    <p:sldId id="258" r:id="rId2"/>
   </p:sldIdLst>
   <p:sldSz cx="12192000" cy="6858000"/>
   <p:notesSz cx="6858000" cy="9144000"/>
@@ -3311,2025 +3309,6 @@
   <p:cSld>
     <p:spTree>
       <p:nvGrpSpPr>
-        <p:cNvPr id="1" name=""/>
-        <p:cNvGrpSpPr/>
-        <p:nvPr/>
-      </p:nvGrpSpPr>
-      <p:grpSpPr>
-        <a:xfrm>
-          <a:off x="0" y="0"/>
-          <a:ext cx="0" cy="0"/>
-          <a:chOff x="0" y="0"/>
-          <a:chExt cx="0" cy="0"/>
-        </a:xfrm>
-      </p:grpSpPr>
-      <p:sp>
-        <p:nvSpPr>
-          <p:cNvPr id="2" name="Title 1">
-            <a:extLst>
-              <a:ext uri="{FF2B5EF4-FFF2-40B4-BE49-F238E27FC236}">
-                <a16:creationId xmlns:a16="http://schemas.microsoft.com/office/drawing/2014/main" id="{7197EF85-AB64-80CF-6410-4C598774A00A}"/>
-              </a:ext>
-            </a:extLst>
-          </p:cNvPr>
-          <p:cNvSpPr>
-            <a:spLocks noGrp="1"/>
-          </p:cNvSpPr>
-          <p:nvPr>
-            <p:ph type="ctrTitle"/>
-          </p:nvPr>
-        </p:nvSpPr>
-        <p:spPr/>
-        <p:txBody>
-          <a:bodyPr/>
-          <a:lstStyle/>
-          <a:p>
-            <a:r>
-              <a:rPr lang="en-US" dirty="0"/>
-              <a:t>Charlie’s</a:t>
-            </a:r>
-            <a:br>
-              <a:rPr lang="en-US" dirty="0"/>
-            </a:br>
-            <a:r>
-              <a:rPr lang="en-US" dirty="0"/>
-              <a:t>Spring Term Presentation</a:t>
-            </a:r>
-          </a:p>
-        </p:txBody>
-      </p:sp>
-      <p:sp>
-        <p:nvSpPr>
-          <p:cNvPr id="3" name="Subtitle 2">
-            <a:extLst>
-              <a:ext uri="{FF2B5EF4-FFF2-40B4-BE49-F238E27FC236}">
-                <a16:creationId xmlns:a16="http://schemas.microsoft.com/office/drawing/2014/main" id="{5C63CCE0-4CA3-A91F-5D44-35A15C040417}"/>
-              </a:ext>
-            </a:extLst>
-          </p:cNvPr>
-          <p:cNvSpPr>
-            <a:spLocks noGrp="1"/>
-          </p:cNvSpPr>
-          <p:nvPr>
-            <p:ph type="subTitle" idx="1"/>
-          </p:nvPr>
-        </p:nvSpPr>
-        <p:spPr/>
-        <p:txBody>
-          <a:bodyPr/>
-          <a:lstStyle/>
-          <a:p>
-            <a:r>
-              <a:rPr lang="en-US" dirty="0"/>
-              <a:t>By</a:t>
-            </a:r>
-          </a:p>
-          <a:p>
-            <a:r>
-              <a:rPr lang="en-US" dirty="0"/>
-              <a:t>Charlie Hatch</a:t>
-            </a:r>
-          </a:p>
-        </p:txBody>
-      </p:sp>
-    </p:spTree>
-    <p:extLst>
-      <p:ext uri="{BB962C8B-B14F-4D97-AF65-F5344CB8AC3E}">
-        <p14:creationId xmlns:p14="http://schemas.microsoft.com/office/powerpoint/2010/main" val="2451799315"/>
-      </p:ext>
-    </p:extLst>
-  </p:cSld>
-  <p:clrMapOvr>
-    <a:masterClrMapping/>
-  </p:clrMapOvr>
-</p:sld>
-</file>
-
-<file path=ppt/slides/slide2.xml><?xml version="1.0" encoding="utf-8"?>
-<p:sld xmlns:a="http://schemas.openxmlformats.org/drawingml/2006/main" xmlns:r="http://schemas.openxmlformats.org/officeDocument/2006/relationships" xmlns:p="http://schemas.openxmlformats.org/presentationml/2006/main">
-  <p:cSld>
-    <p:spTree>
-      <p:nvGrpSpPr>
-        <p:cNvPr id="1" name="">
-          <a:extLst>
-            <a:ext uri="{FF2B5EF4-FFF2-40B4-BE49-F238E27FC236}">
-              <a16:creationId xmlns:a16="http://schemas.microsoft.com/office/drawing/2014/main" id="{0CD9B9C6-84BD-3439-D33E-8CB02480D2CA}"/>
-            </a:ext>
-          </a:extLst>
-        </p:cNvPr>
-        <p:cNvGrpSpPr/>
-        <p:nvPr/>
-      </p:nvGrpSpPr>
-      <p:grpSpPr>
-        <a:xfrm>
-          <a:off x="0" y="0"/>
-          <a:ext cx="0" cy="0"/>
-          <a:chOff x="0" y="0"/>
-          <a:chExt cx="0" cy="0"/>
-        </a:xfrm>
-      </p:grpSpPr>
-      <p:sp>
-        <p:nvSpPr>
-          <p:cNvPr id="2" name="Title 1">
-            <a:extLst>
-              <a:ext uri="{FF2B5EF4-FFF2-40B4-BE49-F238E27FC236}">
-                <a16:creationId xmlns:a16="http://schemas.microsoft.com/office/drawing/2014/main" id="{ABA19744-CADB-AA00-17E2-D9EC8E13708C}"/>
-              </a:ext>
-            </a:extLst>
-          </p:cNvPr>
-          <p:cNvSpPr>
-            <a:spLocks noGrp="1"/>
-          </p:cNvSpPr>
-          <p:nvPr>
-            <p:ph type="ctrTitle"/>
-          </p:nvPr>
-        </p:nvSpPr>
-        <p:spPr/>
-        <p:txBody>
-          <a:bodyPr/>
-          <a:lstStyle/>
-          <a:p>
-            <a:r>
-              <a:rPr lang="en-US" dirty="0"/>
-              <a:t>Charlie’s</a:t>
-            </a:r>
-            <a:br>
-              <a:rPr lang="en-US" dirty="0"/>
-            </a:br>
-            <a:r>
-              <a:rPr lang="en-US" dirty="0"/>
-              <a:t>Spring Term Presentation</a:t>
-            </a:r>
-          </a:p>
-        </p:txBody>
-      </p:sp>
-      <p:sp>
-        <p:nvSpPr>
-          <p:cNvPr id="4" name="Subtitle 2">
-            <a:extLst>
-              <a:ext uri="{FF2B5EF4-FFF2-40B4-BE49-F238E27FC236}">
-                <a16:creationId xmlns:a16="http://schemas.microsoft.com/office/drawing/2014/main" id="{03ED965D-5808-9F89-291D-4E09679DAC8E}"/>
-              </a:ext>
-            </a:extLst>
-          </p:cNvPr>
-          <p:cNvSpPr txBox="1">
-            <a:spLocks/>
-          </p:cNvSpPr>
-          <p:nvPr/>
-        </p:nvSpPr>
-        <p:spPr>
-          <a:xfrm>
-            <a:off x="5809488" y="3602038"/>
-            <a:ext cx="573024" cy="430466"/>
-          </a:xfrm>
-          <a:prstGeom prst="rect">
-            <a:avLst/>
-          </a:prstGeom>
-        </p:spPr>
-        <p:txBody>
-          <a:bodyPr vert="horz" lIns="91440" tIns="45720" rIns="91440" bIns="45720" rtlCol="0">
-            <a:normAutofit fontScale="92500" lnSpcReduction="10000"/>
-          </a:bodyPr>
-          <a:lstStyle>
-            <a:lvl1pPr marL="0" indent="0" algn="ctr" defTabSz="914400" rtl="0" eaLnBrk="1" latinLnBrk="0" hangingPunct="1">
-              <a:lnSpc>
-                <a:spcPct val="90000"/>
-              </a:lnSpc>
-              <a:spcBef>
-                <a:spcPts val="1000"/>
-              </a:spcBef>
-              <a:buFont typeface="Arial" panose="020B0604020202020204" pitchFamily="34" charset="0"/>
-              <a:buNone/>
-              <a:defRPr sz="2400" kern="1200">
-                <a:solidFill>
-                  <a:schemeClr val="tx1"/>
-                </a:solidFill>
-                <a:latin typeface="+mn-lt"/>
-                <a:ea typeface="+mn-ea"/>
-                <a:cs typeface="+mn-cs"/>
-              </a:defRPr>
-            </a:lvl1pPr>
-            <a:lvl2pPr marL="457200" indent="0" algn="ctr" defTabSz="914400" rtl="0" eaLnBrk="1" latinLnBrk="0" hangingPunct="1">
-              <a:lnSpc>
-                <a:spcPct val="90000"/>
-              </a:lnSpc>
-              <a:spcBef>
-                <a:spcPts val="500"/>
-              </a:spcBef>
-              <a:buFont typeface="Arial" panose="020B0604020202020204" pitchFamily="34" charset="0"/>
-              <a:buNone/>
-              <a:defRPr sz="2000" kern="1200">
-                <a:solidFill>
-                  <a:schemeClr val="tx1"/>
-                </a:solidFill>
-                <a:latin typeface="+mn-lt"/>
-                <a:ea typeface="+mn-ea"/>
-                <a:cs typeface="+mn-cs"/>
-              </a:defRPr>
-            </a:lvl2pPr>
-            <a:lvl3pPr marL="914400" indent="0" algn="ctr" defTabSz="914400" rtl="0" eaLnBrk="1" latinLnBrk="0" hangingPunct="1">
-              <a:lnSpc>
-                <a:spcPct val="90000"/>
-              </a:lnSpc>
-              <a:spcBef>
-                <a:spcPts val="500"/>
-              </a:spcBef>
-              <a:buFont typeface="Arial" panose="020B0604020202020204" pitchFamily="34" charset="0"/>
-              <a:buNone/>
-              <a:defRPr sz="1800" kern="1200">
-                <a:solidFill>
-                  <a:schemeClr val="tx1"/>
-                </a:solidFill>
-                <a:latin typeface="+mn-lt"/>
-                <a:ea typeface="+mn-ea"/>
-                <a:cs typeface="+mn-cs"/>
-              </a:defRPr>
-            </a:lvl3pPr>
-            <a:lvl4pPr marL="1371600" indent="0" algn="ctr" defTabSz="914400" rtl="0" eaLnBrk="1" latinLnBrk="0" hangingPunct="1">
-              <a:lnSpc>
-                <a:spcPct val="90000"/>
-              </a:lnSpc>
-              <a:spcBef>
-                <a:spcPts val="500"/>
-              </a:spcBef>
-              <a:buFont typeface="Arial" panose="020B0604020202020204" pitchFamily="34" charset="0"/>
-              <a:buNone/>
-              <a:defRPr sz="1600" kern="1200">
-                <a:solidFill>
-                  <a:schemeClr val="tx1"/>
-                </a:solidFill>
-                <a:latin typeface="+mn-lt"/>
-                <a:ea typeface="+mn-ea"/>
-                <a:cs typeface="+mn-cs"/>
-              </a:defRPr>
-            </a:lvl4pPr>
-            <a:lvl5pPr marL="1828800" indent="0" algn="ctr" defTabSz="914400" rtl="0" eaLnBrk="1" latinLnBrk="0" hangingPunct="1">
-              <a:lnSpc>
-                <a:spcPct val="90000"/>
-              </a:lnSpc>
-              <a:spcBef>
-                <a:spcPts val="500"/>
-              </a:spcBef>
-              <a:buFont typeface="Arial" panose="020B0604020202020204" pitchFamily="34" charset="0"/>
-              <a:buNone/>
-              <a:defRPr sz="1600" kern="1200">
-                <a:solidFill>
-                  <a:schemeClr val="tx1"/>
-                </a:solidFill>
-                <a:latin typeface="+mn-lt"/>
-                <a:ea typeface="+mn-ea"/>
-                <a:cs typeface="+mn-cs"/>
-              </a:defRPr>
-            </a:lvl5pPr>
-            <a:lvl6pPr marL="2286000" indent="0" algn="ctr" defTabSz="914400" rtl="0" eaLnBrk="1" latinLnBrk="0" hangingPunct="1">
-              <a:lnSpc>
-                <a:spcPct val="90000"/>
-              </a:lnSpc>
-              <a:spcBef>
-                <a:spcPts val="500"/>
-              </a:spcBef>
-              <a:buFont typeface="Arial" panose="020B0604020202020204" pitchFamily="34" charset="0"/>
-              <a:buNone/>
-              <a:defRPr sz="1600" kern="1200">
-                <a:solidFill>
-                  <a:schemeClr val="tx1"/>
-                </a:solidFill>
-                <a:latin typeface="+mn-lt"/>
-                <a:ea typeface="+mn-ea"/>
-                <a:cs typeface="+mn-cs"/>
-              </a:defRPr>
-            </a:lvl6pPr>
-            <a:lvl7pPr marL="2743200" indent="0" algn="ctr" defTabSz="914400" rtl="0" eaLnBrk="1" latinLnBrk="0" hangingPunct="1">
-              <a:lnSpc>
-                <a:spcPct val="90000"/>
-              </a:lnSpc>
-              <a:spcBef>
-                <a:spcPts val="500"/>
-              </a:spcBef>
-              <a:buFont typeface="Arial" panose="020B0604020202020204" pitchFamily="34" charset="0"/>
-              <a:buNone/>
-              <a:defRPr sz="1600" kern="1200">
-                <a:solidFill>
-                  <a:schemeClr val="tx1"/>
-                </a:solidFill>
-                <a:latin typeface="+mn-lt"/>
-                <a:ea typeface="+mn-ea"/>
-                <a:cs typeface="+mn-cs"/>
-              </a:defRPr>
-            </a:lvl7pPr>
-            <a:lvl8pPr marL="3200400" indent="0" algn="ctr" defTabSz="914400" rtl="0" eaLnBrk="1" latinLnBrk="0" hangingPunct="1">
-              <a:lnSpc>
-                <a:spcPct val="90000"/>
-              </a:lnSpc>
-              <a:spcBef>
-                <a:spcPts val="500"/>
-              </a:spcBef>
-              <a:buFont typeface="Arial" panose="020B0604020202020204" pitchFamily="34" charset="0"/>
-              <a:buNone/>
-              <a:defRPr sz="1600" kern="1200">
-                <a:solidFill>
-                  <a:schemeClr val="tx1"/>
-                </a:solidFill>
-                <a:latin typeface="+mn-lt"/>
-                <a:ea typeface="+mn-ea"/>
-                <a:cs typeface="+mn-cs"/>
-              </a:defRPr>
-            </a:lvl8pPr>
-            <a:lvl9pPr marL="3657600" indent="0" algn="ctr" defTabSz="914400" rtl="0" eaLnBrk="1" latinLnBrk="0" hangingPunct="1">
-              <a:lnSpc>
-                <a:spcPct val="90000"/>
-              </a:lnSpc>
-              <a:spcBef>
-                <a:spcPts val="500"/>
-              </a:spcBef>
-              <a:buFont typeface="Arial" panose="020B0604020202020204" pitchFamily="34" charset="0"/>
-              <a:buNone/>
-              <a:defRPr sz="1600" kern="1200">
-                <a:solidFill>
-                  <a:schemeClr val="tx1"/>
-                </a:solidFill>
-                <a:latin typeface="+mn-lt"/>
-                <a:ea typeface="+mn-ea"/>
-                <a:cs typeface="+mn-cs"/>
-              </a:defRPr>
-            </a:lvl9pPr>
-          </a:lstStyle>
-          <a:p>
-            <a:r>
-              <a:rPr lang="en-US" sz="2800" b="1" dirty="0"/>
-              <a:t>By</a:t>
-            </a:r>
-          </a:p>
-        </p:txBody>
-      </p:sp>
-      <p:sp>
-        <p:nvSpPr>
-          <p:cNvPr id="8" name="Subtitle 2">
-            <a:extLst>
-              <a:ext uri="{FF2B5EF4-FFF2-40B4-BE49-F238E27FC236}">
-                <a16:creationId xmlns:a16="http://schemas.microsoft.com/office/drawing/2014/main" id="{88EE8B7A-565F-11D1-F96E-AB49B1B7FE99}"/>
-              </a:ext>
-            </a:extLst>
-          </p:cNvPr>
-          <p:cNvSpPr txBox="1">
-            <a:spLocks/>
-          </p:cNvSpPr>
-          <p:nvPr/>
-        </p:nvSpPr>
-        <p:spPr>
-          <a:xfrm>
-            <a:off x="5056632" y="4032504"/>
-            <a:ext cx="1167384" cy="430466"/>
-          </a:xfrm>
-          <a:prstGeom prst="rect">
-            <a:avLst/>
-          </a:prstGeom>
-        </p:spPr>
-        <p:txBody>
-          <a:bodyPr vert="horz" lIns="91440" tIns="45720" rIns="91440" bIns="45720" rtlCol="0">
-            <a:normAutofit/>
-          </a:bodyPr>
-          <a:lstStyle>
-            <a:lvl1pPr marL="0" indent="0" algn="ctr" defTabSz="914400" rtl="0" eaLnBrk="1" latinLnBrk="0" hangingPunct="1">
-              <a:lnSpc>
-                <a:spcPct val="90000"/>
-              </a:lnSpc>
-              <a:spcBef>
-                <a:spcPts val="1000"/>
-              </a:spcBef>
-              <a:buFont typeface="Arial" panose="020B0604020202020204" pitchFamily="34" charset="0"/>
-              <a:buNone/>
-              <a:defRPr sz="2400" kern="1200">
-                <a:solidFill>
-                  <a:schemeClr val="tx1"/>
-                </a:solidFill>
-                <a:latin typeface="+mn-lt"/>
-                <a:ea typeface="+mn-ea"/>
-                <a:cs typeface="+mn-cs"/>
-              </a:defRPr>
-            </a:lvl1pPr>
-            <a:lvl2pPr marL="457200" indent="0" algn="ctr" defTabSz="914400" rtl="0" eaLnBrk="1" latinLnBrk="0" hangingPunct="1">
-              <a:lnSpc>
-                <a:spcPct val="90000"/>
-              </a:lnSpc>
-              <a:spcBef>
-                <a:spcPts val="500"/>
-              </a:spcBef>
-              <a:buFont typeface="Arial" panose="020B0604020202020204" pitchFamily="34" charset="0"/>
-              <a:buNone/>
-              <a:defRPr sz="2000" kern="1200">
-                <a:solidFill>
-                  <a:schemeClr val="tx1"/>
-                </a:solidFill>
-                <a:latin typeface="+mn-lt"/>
-                <a:ea typeface="+mn-ea"/>
-                <a:cs typeface="+mn-cs"/>
-              </a:defRPr>
-            </a:lvl2pPr>
-            <a:lvl3pPr marL="914400" indent="0" algn="ctr" defTabSz="914400" rtl="0" eaLnBrk="1" latinLnBrk="0" hangingPunct="1">
-              <a:lnSpc>
-                <a:spcPct val="90000"/>
-              </a:lnSpc>
-              <a:spcBef>
-                <a:spcPts val="500"/>
-              </a:spcBef>
-              <a:buFont typeface="Arial" panose="020B0604020202020204" pitchFamily="34" charset="0"/>
-              <a:buNone/>
-              <a:defRPr sz="1800" kern="1200">
-                <a:solidFill>
-                  <a:schemeClr val="tx1"/>
-                </a:solidFill>
-                <a:latin typeface="+mn-lt"/>
-                <a:ea typeface="+mn-ea"/>
-                <a:cs typeface="+mn-cs"/>
-              </a:defRPr>
-            </a:lvl3pPr>
-            <a:lvl4pPr marL="1371600" indent="0" algn="ctr" defTabSz="914400" rtl="0" eaLnBrk="1" latinLnBrk="0" hangingPunct="1">
-              <a:lnSpc>
-                <a:spcPct val="90000"/>
-              </a:lnSpc>
-              <a:spcBef>
-                <a:spcPts val="500"/>
-              </a:spcBef>
-              <a:buFont typeface="Arial" panose="020B0604020202020204" pitchFamily="34" charset="0"/>
-              <a:buNone/>
-              <a:defRPr sz="1600" kern="1200">
-                <a:solidFill>
-                  <a:schemeClr val="tx1"/>
-                </a:solidFill>
-                <a:latin typeface="+mn-lt"/>
-                <a:ea typeface="+mn-ea"/>
-                <a:cs typeface="+mn-cs"/>
-              </a:defRPr>
-            </a:lvl4pPr>
-            <a:lvl5pPr marL="1828800" indent="0" algn="ctr" defTabSz="914400" rtl="0" eaLnBrk="1" latinLnBrk="0" hangingPunct="1">
-              <a:lnSpc>
-                <a:spcPct val="90000"/>
-              </a:lnSpc>
-              <a:spcBef>
-                <a:spcPts val="500"/>
-              </a:spcBef>
-              <a:buFont typeface="Arial" panose="020B0604020202020204" pitchFamily="34" charset="0"/>
-              <a:buNone/>
-              <a:defRPr sz="1600" kern="1200">
-                <a:solidFill>
-                  <a:schemeClr val="tx1"/>
-                </a:solidFill>
-                <a:latin typeface="+mn-lt"/>
-                <a:ea typeface="+mn-ea"/>
-                <a:cs typeface="+mn-cs"/>
-              </a:defRPr>
-            </a:lvl5pPr>
-            <a:lvl6pPr marL="2286000" indent="0" algn="ctr" defTabSz="914400" rtl="0" eaLnBrk="1" latinLnBrk="0" hangingPunct="1">
-              <a:lnSpc>
-                <a:spcPct val="90000"/>
-              </a:lnSpc>
-              <a:spcBef>
-                <a:spcPts val="500"/>
-              </a:spcBef>
-              <a:buFont typeface="Arial" panose="020B0604020202020204" pitchFamily="34" charset="0"/>
-              <a:buNone/>
-              <a:defRPr sz="1600" kern="1200">
-                <a:solidFill>
-                  <a:schemeClr val="tx1"/>
-                </a:solidFill>
-                <a:latin typeface="+mn-lt"/>
-                <a:ea typeface="+mn-ea"/>
-                <a:cs typeface="+mn-cs"/>
-              </a:defRPr>
-            </a:lvl6pPr>
-            <a:lvl7pPr marL="2743200" indent="0" algn="ctr" defTabSz="914400" rtl="0" eaLnBrk="1" latinLnBrk="0" hangingPunct="1">
-              <a:lnSpc>
-                <a:spcPct val="90000"/>
-              </a:lnSpc>
-              <a:spcBef>
-                <a:spcPts val="500"/>
-              </a:spcBef>
-              <a:buFont typeface="Arial" panose="020B0604020202020204" pitchFamily="34" charset="0"/>
-              <a:buNone/>
-              <a:defRPr sz="1600" kern="1200">
-                <a:solidFill>
-                  <a:schemeClr val="tx1"/>
-                </a:solidFill>
-                <a:latin typeface="+mn-lt"/>
-                <a:ea typeface="+mn-ea"/>
-                <a:cs typeface="+mn-cs"/>
-              </a:defRPr>
-            </a:lvl7pPr>
-            <a:lvl8pPr marL="3200400" indent="0" algn="ctr" defTabSz="914400" rtl="0" eaLnBrk="1" latinLnBrk="0" hangingPunct="1">
-              <a:lnSpc>
-                <a:spcPct val="90000"/>
-              </a:lnSpc>
-              <a:spcBef>
-                <a:spcPts val="500"/>
-              </a:spcBef>
-              <a:buFont typeface="Arial" panose="020B0604020202020204" pitchFamily="34" charset="0"/>
-              <a:buNone/>
-              <a:defRPr sz="1600" kern="1200">
-                <a:solidFill>
-                  <a:schemeClr val="tx1"/>
-                </a:solidFill>
-                <a:latin typeface="+mn-lt"/>
-                <a:ea typeface="+mn-ea"/>
-                <a:cs typeface="+mn-cs"/>
-              </a:defRPr>
-            </a:lvl8pPr>
-            <a:lvl9pPr marL="3657600" indent="0" algn="ctr" defTabSz="914400" rtl="0" eaLnBrk="1" latinLnBrk="0" hangingPunct="1">
-              <a:lnSpc>
-                <a:spcPct val="90000"/>
-              </a:lnSpc>
-              <a:spcBef>
-                <a:spcPts val="500"/>
-              </a:spcBef>
-              <a:buFont typeface="Arial" panose="020B0604020202020204" pitchFamily="34" charset="0"/>
-              <a:buNone/>
-              <a:defRPr sz="1600" kern="1200">
-                <a:solidFill>
-                  <a:schemeClr val="tx1"/>
-                </a:solidFill>
-                <a:latin typeface="+mn-lt"/>
-                <a:ea typeface="+mn-ea"/>
-                <a:cs typeface="+mn-cs"/>
-              </a:defRPr>
-            </a:lvl9pPr>
-          </a:lstStyle>
-          <a:p>
-            <a:r>
-              <a:rPr lang="en-US" dirty="0"/>
-              <a:t>Charlie</a:t>
-            </a:r>
-          </a:p>
-        </p:txBody>
-      </p:sp>
-      <p:sp>
-        <p:nvSpPr>
-          <p:cNvPr id="10" name="Subtitle 2">
-            <a:extLst>
-              <a:ext uri="{FF2B5EF4-FFF2-40B4-BE49-F238E27FC236}">
-                <a16:creationId xmlns:a16="http://schemas.microsoft.com/office/drawing/2014/main" id="{2598C96E-8C23-B82E-CB5B-FB26D10EA56B}"/>
-              </a:ext>
-            </a:extLst>
-          </p:cNvPr>
-          <p:cNvSpPr txBox="1">
-            <a:spLocks/>
-          </p:cNvSpPr>
-          <p:nvPr/>
-        </p:nvSpPr>
-        <p:spPr>
-          <a:xfrm>
-            <a:off x="6096000" y="4032504"/>
-            <a:ext cx="1021080" cy="430466"/>
-          </a:xfrm>
-          <a:prstGeom prst="rect">
-            <a:avLst/>
-          </a:prstGeom>
-        </p:spPr>
-        <p:txBody>
-          <a:bodyPr vert="horz" lIns="91440" tIns="45720" rIns="91440" bIns="45720" rtlCol="0">
-            <a:normAutofit/>
-          </a:bodyPr>
-          <a:lstStyle>
-            <a:lvl1pPr marL="0" indent="0" algn="ctr" defTabSz="914400" rtl="0" eaLnBrk="1" latinLnBrk="0" hangingPunct="1">
-              <a:lnSpc>
-                <a:spcPct val="90000"/>
-              </a:lnSpc>
-              <a:spcBef>
-                <a:spcPts val="1000"/>
-              </a:spcBef>
-              <a:buFont typeface="Arial" panose="020B0604020202020204" pitchFamily="34" charset="0"/>
-              <a:buNone/>
-              <a:defRPr sz="2400" kern="1200">
-                <a:solidFill>
-                  <a:schemeClr val="tx1"/>
-                </a:solidFill>
-                <a:latin typeface="+mn-lt"/>
-                <a:ea typeface="+mn-ea"/>
-                <a:cs typeface="+mn-cs"/>
-              </a:defRPr>
-            </a:lvl1pPr>
-            <a:lvl2pPr marL="457200" indent="0" algn="ctr" defTabSz="914400" rtl="0" eaLnBrk="1" latinLnBrk="0" hangingPunct="1">
-              <a:lnSpc>
-                <a:spcPct val="90000"/>
-              </a:lnSpc>
-              <a:spcBef>
-                <a:spcPts val="500"/>
-              </a:spcBef>
-              <a:buFont typeface="Arial" panose="020B0604020202020204" pitchFamily="34" charset="0"/>
-              <a:buNone/>
-              <a:defRPr sz="2000" kern="1200">
-                <a:solidFill>
-                  <a:schemeClr val="tx1"/>
-                </a:solidFill>
-                <a:latin typeface="+mn-lt"/>
-                <a:ea typeface="+mn-ea"/>
-                <a:cs typeface="+mn-cs"/>
-              </a:defRPr>
-            </a:lvl2pPr>
-            <a:lvl3pPr marL="914400" indent="0" algn="ctr" defTabSz="914400" rtl="0" eaLnBrk="1" latinLnBrk="0" hangingPunct="1">
-              <a:lnSpc>
-                <a:spcPct val="90000"/>
-              </a:lnSpc>
-              <a:spcBef>
-                <a:spcPts val="500"/>
-              </a:spcBef>
-              <a:buFont typeface="Arial" panose="020B0604020202020204" pitchFamily="34" charset="0"/>
-              <a:buNone/>
-              <a:defRPr sz="1800" kern="1200">
-                <a:solidFill>
-                  <a:schemeClr val="tx1"/>
-                </a:solidFill>
-                <a:latin typeface="+mn-lt"/>
-                <a:ea typeface="+mn-ea"/>
-                <a:cs typeface="+mn-cs"/>
-              </a:defRPr>
-            </a:lvl3pPr>
-            <a:lvl4pPr marL="1371600" indent="0" algn="ctr" defTabSz="914400" rtl="0" eaLnBrk="1" latinLnBrk="0" hangingPunct="1">
-              <a:lnSpc>
-                <a:spcPct val="90000"/>
-              </a:lnSpc>
-              <a:spcBef>
-                <a:spcPts val="500"/>
-              </a:spcBef>
-              <a:buFont typeface="Arial" panose="020B0604020202020204" pitchFamily="34" charset="0"/>
-              <a:buNone/>
-              <a:defRPr sz="1600" kern="1200">
-                <a:solidFill>
-                  <a:schemeClr val="tx1"/>
-                </a:solidFill>
-                <a:latin typeface="+mn-lt"/>
-                <a:ea typeface="+mn-ea"/>
-                <a:cs typeface="+mn-cs"/>
-              </a:defRPr>
-            </a:lvl4pPr>
-            <a:lvl5pPr marL="1828800" indent="0" algn="ctr" defTabSz="914400" rtl="0" eaLnBrk="1" latinLnBrk="0" hangingPunct="1">
-              <a:lnSpc>
-                <a:spcPct val="90000"/>
-              </a:lnSpc>
-              <a:spcBef>
-                <a:spcPts val="500"/>
-              </a:spcBef>
-              <a:buFont typeface="Arial" panose="020B0604020202020204" pitchFamily="34" charset="0"/>
-              <a:buNone/>
-              <a:defRPr sz="1600" kern="1200">
-                <a:solidFill>
-                  <a:schemeClr val="tx1"/>
-                </a:solidFill>
-                <a:latin typeface="+mn-lt"/>
-                <a:ea typeface="+mn-ea"/>
-                <a:cs typeface="+mn-cs"/>
-              </a:defRPr>
-            </a:lvl5pPr>
-            <a:lvl6pPr marL="2286000" indent="0" algn="ctr" defTabSz="914400" rtl="0" eaLnBrk="1" latinLnBrk="0" hangingPunct="1">
-              <a:lnSpc>
-                <a:spcPct val="90000"/>
-              </a:lnSpc>
-              <a:spcBef>
-                <a:spcPts val="500"/>
-              </a:spcBef>
-              <a:buFont typeface="Arial" panose="020B0604020202020204" pitchFamily="34" charset="0"/>
-              <a:buNone/>
-              <a:defRPr sz="1600" kern="1200">
-                <a:solidFill>
-                  <a:schemeClr val="tx1"/>
-                </a:solidFill>
-                <a:latin typeface="+mn-lt"/>
-                <a:ea typeface="+mn-ea"/>
-                <a:cs typeface="+mn-cs"/>
-              </a:defRPr>
-            </a:lvl6pPr>
-            <a:lvl7pPr marL="2743200" indent="0" algn="ctr" defTabSz="914400" rtl="0" eaLnBrk="1" latinLnBrk="0" hangingPunct="1">
-              <a:lnSpc>
-                <a:spcPct val="90000"/>
-              </a:lnSpc>
-              <a:spcBef>
-                <a:spcPts val="500"/>
-              </a:spcBef>
-              <a:buFont typeface="Arial" panose="020B0604020202020204" pitchFamily="34" charset="0"/>
-              <a:buNone/>
-              <a:defRPr sz="1600" kern="1200">
-                <a:solidFill>
-                  <a:schemeClr val="tx1"/>
-                </a:solidFill>
-                <a:latin typeface="+mn-lt"/>
-                <a:ea typeface="+mn-ea"/>
-                <a:cs typeface="+mn-cs"/>
-              </a:defRPr>
-            </a:lvl7pPr>
-            <a:lvl8pPr marL="3200400" indent="0" algn="ctr" defTabSz="914400" rtl="0" eaLnBrk="1" latinLnBrk="0" hangingPunct="1">
-              <a:lnSpc>
-                <a:spcPct val="90000"/>
-              </a:lnSpc>
-              <a:spcBef>
-                <a:spcPts val="500"/>
-              </a:spcBef>
-              <a:buFont typeface="Arial" panose="020B0604020202020204" pitchFamily="34" charset="0"/>
-              <a:buNone/>
-              <a:defRPr sz="1600" kern="1200">
-                <a:solidFill>
-                  <a:schemeClr val="tx1"/>
-                </a:solidFill>
-                <a:latin typeface="+mn-lt"/>
-                <a:ea typeface="+mn-ea"/>
-                <a:cs typeface="+mn-cs"/>
-              </a:defRPr>
-            </a:lvl8pPr>
-            <a:lvl9pPr marL="3657600" indent="0" algn="ctr" defTabSz="914400" rtl="0" eaLnBrk="1" latinLnBrk="0" hangingPunct="1">
-              <a:lnSpc>
-                <a:spcPct val="90000"/>
-              </a:lnSpc>
-              <a:spcBef>
-                <a:spcPts val="500"/>
-              </a:spcBef>
-              <a:buFont typeface="Arial" panose="020B0604020202020204" pitchFamily="34" charset="0"/>
-              <a:buNone/>
-              <a:defRPr sz="1600" kern="1200">
-                <a:solidFill>
-                  <a:schemeClr val="tx1"/>
-                </a:solidFill>
-                <a:latin typeface="+mn-lt"/>
-                <a:ea typeface="+mn-ea"/>
-                <a:cs typeface="+mn-cs"/>
-              </a:defRPr>
-            </a:lvl9pPr>
-          </a:lstStyle>
-          <a:p>
-            <a:r>
-              <a:rPr lang="en-US" dirty="0"/>
-              <a:t>Hatch</a:t>
-            </a:r>
-          </a:p>
-        </p:txBody>
-      </p:sp>
-      <p:sp>
-        <p:nvSpPr>
-          <p:cNvPr id="16" name="Subtitle 2">
-            <a:extLst>
-              <a:ext uri="{FF2B5EF4-FFF2-40B4-BE49-F238E27FC236}">
-                <a16:creationId xmlns:a16="http://schemas.microsoft.com/office/drawing/2014/main" id="{65A68BF6-5315-AA56-5210-A9B86AB9AEF2}"/>
-              </a:ext>
-            </a:extLst>
-          </p:cNvPr>
-          <p:cNvSpPr txBox="1">
-            <a:spLocks/>
-          </p:cNvSpPr>
-          <p:nvPr/>
-        </p:nvSpPr>
-        <p:spPr>
-          <a:xfrm>
-            <a:off x="5809488" y="5201400"/>
-            <a:ext cx="573024" cy="430466"/>
-          </a:xfrm>
-          <a:prstGeom prst="rect">
-            <a:avLst/>
-          </a:prstGeom>
-        </p:spPr>
-        <p:txBody>
-          <a:bodyPr vert="horz" lIns="91440" tIns="45720" rIns="91440" bIns="45720" rtlCol="0">
-            <a:normAutofit fontScale="92500" lnSpcReduction="10000"/>
-          </a:bodyPr>
-          <a:lstStyle>
-            <a:lvl1pPr marL="0" indent="0" algn="ctr" defTabSz="914400" rtl="0" eaLnBrk="1" latinLnBrk="0" hangingPunct="1">
-              <a:lnSpc>
-                <a:spcPct val="90000"/>
-              </a:lnSpc>
-              <a:spcBef>
-                <a:spcPts val="1000"/>
-              </a:spcBef>
-              <a:buFont typeface="Arial" panose="020B0604020202020204" pitchFamily="34" charset="0"/>
-              <a:buNone/>
-              <a:defRPr sz="2400" kern="1200">
-                <a:solidFill>
-                  <a:schemeClr val="tx1"/>
-                </a:solidFill>
-                <a:latin typeface="+mn-lt"/>
-                <a:ea typeface="+mn-ea"/>
-                <a:cs typeface="+mn-cs"/>
-              </a:defRPr>
-            </a:lvl1pPr>
-            <a:lvl2pPr marL="457200" indent="0" algn="ctr" defTabSz="914400" rtl="0" eaLnBrk="1" latinLnBrk="0" hangingPunct="1">
-              <a:lnSpc>
-                <a:spcPct val="90000"/>
-              </a:lnSpc>
-              <a:spcBef>
-                <a:spcPts val="500"/>
-              </a:spcBef>
-              <a:buFont typeface="Arial" panose="020B0604020202020204" pitchFamily="34" charset="0"/>
-              <a:buNone/>
-              <a:defRPr sz="2000" kern="1200">
-                <a:solidFill>
-                  <a:schemeClr val="tx1"/>
-                </a:solidFill>
-                <a:latin typeface="+mn-lt"/>
-                <a:ea typeface="+mn-ea"/>
-                <a:cs typeface="+mn-cs"/>
-              </a:defRPr>
-            </a:lvl2pPr>
-            <a:lvl3pPr marL="914400" indent="0" algn="ctr" defTabSz="914400" rtl="0" eaLnBrk="1" latinLnBrk="0" hangingPunct="1">
-              <a:lnSpc>
-                <a:spcPct val="90000"/>
-              </a:lnSpc>
-              <a:spcBef>
-                <a:spcPts val="500"/>
-              </a:spcBef>
-              <a:buFont typeface="Arial" panose="020B0604020202020204" pitchFamily="34" charset="0"/>
-              <a:buNone/>
-              <a:defRPr sz="1800" kern="1200">
-                <a:solidFill>
-                  <a:schemeClr val="tx1"/>
-                </a:solidFill>
-                <a:latin typeface="+mn-lt"/>
-                <a:ea typeface="+mn-ea"/>
-                <a:cs typeface="+mn-cs"/>
-              </a:defRPr>
-            </a:lvl3pPr>
-            <a:lvl4pPr marL="1371600" indent="0" algn="ctr" defTabSz="914400" rtl="0" eaLnBrk="1" latinLnBrk="0" hangingPunct="1">
-              <a:lnSpc>
-                <a:spcPct val="90000"/>
-              </a:lnSpc>
-              <a:spcBef>
-                <a:spcPts val="500"/>
-              </a:spcBef>
-              <a:buFont typeface="Arial" panose="020B0604020202020204" pitchFamily="34" charset="0"/>
-              <a:buNone/>
-              <a:defRPr sz="1600" kern="1200">
-                <a:solidFill>
-                  <a:schemeClr val="tx1"/>
-                </a:solidFill>
-                <a:latin typeface="+mn-lt"/>
-                <a:ea typeface="+mn-ea"/>
-                <a:cs typeface="+mn-cs"/>
-              </a:defRPr>
-            </a:lvl4pPr>
-            <a:lvl5pPr marL="1828800" indent="0" algn="ctr" defTabSz="914400" rtl="0" eaLnBrk="1" latinLnBrk="0" hangingPunct="1">
-              <a:lnSpc>
-                <a:spcPct val="90000"/>
-              </a:lnSpc>
-              <a:spcBef>
-                <a:spcPts val="500"/>
-              </a:spcBef>
-              <a:buFont typeface="Arial" panose="020B0604020202020204" pitchFamily="34" charset="0"/>
-              <a:buNone/>
-              <a:defRPr sz="1600" kern="1200">
-                <a:solidFill>
-                  <a:schemeClr val="tx1"/>
-                </a:solidFill>
-                <a:latin typeface="+mn-lt"/>
-                <a:ea typeface="+mn-ea"/>
-                <a:cs typeface="+mn-cs"/>
-              </a:defRPr>
-            </a:lvl5pPr>
-            <a:lvl6pPr marL="2286000" indent="0" algn="ctr" defTabSz="914400" rtl="0" eaLnBrk="1" latinLnBrk="0" hangingPunct="1">
-              <a:lnSpc>
-                <a:spcPct val="90000"/>
-              </a:lnSpc>
-              <a:spcBef>
-                <a:spcPts val="500"/>
-              </a:spcBef>
-              <a:buFont typeface="Arial" panose="020B0604020202020204" pitchFamily="34" charset="0"/>
-              <a:buNone/>
-              <a:defRPr sz="1600" kern="1200">
-                <a:solidFill>
-                  <a:schemeClr val="tx1"/>
-                </a:solidFill>
-                <a:latin typeface="+mn-lt"/>
-                <a:ea typeface="+mn-ea"/>
-                <a:cs typeface="+mn-cs"/>
-              </a:defRPr>
-            </a:lvl6pPr>
-            <a:lvl7pPr marL="2743200" indent="0" algn="ctr" defTabSz="914400" rtl="0" eaLnBrk="1" latinLnBrk="0" hangingPunct="1">
-              <a:lnSpc>
-                <a:spcPct val="90000"/>
-              </a:lnSpc>
-              <a:spcBef>
-                <a:spcPts val="500"/>
-              </a:spcBef>
-              <a:buFont typeface="Arial" panose="020B0604020202020204" pitchFamily="34" charset="0"/>
-              <a:buNone/>
-              <a:defRPr sz="1600" kern="1200">
-                <a:solidFill>
-                  <a:schemeClr val="tx1"/>
-                </a:solidFill>
-                <a:latin typeface="+mn-lt"/>
-                <a:ea typeface="+mn-ea"/>
-                <a:cs typeface="+mn-cs"/>
-              </a:defRPr>
-            </a:lvl7pPr>
-            <a:lvl8pPr marL="3200400" indent="0" algn="ctr" defTabSz="914400" rtl="0" eaLnBrk="1" latinLnBrk="0" hangingPunct="1">
-              <a:lnSpc>
-                <a:spcPct val="90000"/>
-              </a:lnSpc>
-              <a:spcBef>
-                <a:spcPts val="500"/>
-              </a:spcBef>
-              <a:buFont typeface="Arial" panose="020B0604020202020204" pitchFamily="34" charset="0"/>
-              <a:buNone/>
-              <a:defRPr sz="1600" kern="1200">
-                <a:solidFill>
-                  <a:schemeClr val="tx1"/>
-                </a:solidFill>
-                <a:latin typeface="+mn-lt"/>
-                <a:ea typeface="+mn-ea"/>
-                <a:cs typeface="+mn-cs"/>
-              </a:defRPr>
-            </a:lvl8pPr>
-            <a:lvl9pPr marL="3657600" indent="0" algn="ctr" defTabSz="914400" rtl="0" eaLnBrk="1" latinLnBrk="0" hangingPunct="1">
-              <a:lnSpc>
-                <a:spcPct val="90000"/>
-              </a:lnSpc>
-              <a:spcBef>
-                <a:spcPts val="500"/>
-              </a:spcBef>
-              <a:buFont typeface="Arial" panose="020B0604020202020204" pitchFamily="34" charset="0"/>
-              <a:buNone/>
-              <a:defRPr sz="1600" kern="1200">
-                <a:solidFill>
-                  <a:schemeClr val="tx1"/>
-                </a:solidFill>
-                <a:latin typeface="+mn-lt"/>
-                <a:ea typeface="+mn-ea"/>
-                <a:cs typeface="+mn-cs"/>
-              </a:defRPr>
-            </a:lvl9pPr>
-          </a:lstStyle>
-          <a:p>
-            <a:r>
-              <a:rPr lang="en-US" sz="2800" b="1" dirty="0"/>
-              <a:t>By</a:t>
-            </a:r>
-          </a:p>
-        </p:txBody>
-      </p:sp>
-      <p:sp>
-        <p:nvSpPr>
-          <p:cNvPr id="17" name="Subtitle 2">
-            <a:extLst>
-              <a:ext uri="{FF2B5EF4-FFF2-40B4-BE49-F238E27FC236}">
-                <a16:creationId xmlns:a16="http://schemas.microsoft.com/office/drawing/2014/main" id="{1CEDFCB4-D474-9771-D59A-9F9895A0CE20}"/>
-              </a:ext>
-            </a:extLst>
-          </p:cNvPr>
-          <p:cNvSpPr txBox="1">
-            <a:spLocks/>
-          </p:cNvSpPr>
-          <p:nvPr/>
-        </p:nvSpPr>
-        <p:spPr>
-          <a:xfrm>
-            <a:off x="7258125" y="5045354"/>
-            <a:ext cx="573024" cy="430466"/>
-          </a:xfrm>
-          <a:prstGeom prst="rect">
-            <a:avLst/>
-          </a:prstGeom>
-        </p:spPr>
-        <p:txBody>
-          <a:bodyPr vert="horz" lIns="91440" tIns="45720" rIns="91440" bIns="45720" rtlCol="0">
-            <a:normAutofit fontScale="92500" lnSpcReduction="10000"/>
-          </a:bodyPr>
-          <a:lstStyle>
-            <a:lvl1pPr marL="0" indent="0" algn="ctr" defTabSz="914400" rtl="0" eaLnBrk="1" latinLnBrk="0" hangingPunct="1">
-              <a:lnSpc>
-                <a:spcPct val="90000"/>
-              </a:lnSpc>
-              <a:spcBef>
-                <a:spcPts val="1000"/>
-              </a:spcBef>
-              <a:buFont typeface="Arial" panose="020B0604020202020204" pitchFamily="34" charset="0"/>
-              <a:buNone/>
-              <a:defRPr sz="2400" kern="1200">
-                <a:solidFill>
-                  <a:schemeClr val="tx1"/>
-                </a:solidFill>
-                <a:latin typeface="+mn-lt"/>
-                <a:ea typeface="+mn-ea"/>
-                <a:cs typeface="+mn-cs"/>
-              </a:defRPr>
-            </a:lvl1pPr>
-            <a:lvl2pPr marL="457200" indent="0" algn="ctr" defTabSz="914400" rtl="0" eaLnBrk="1" latinLnBrk="0" hangingPunct="1">
-              <a:lnSpc>
-                <a:spcPct val="90000"/>
-              </a:lnSpc>
-              <a:spcBef>
-                <a:spcPts val="500"/>
-              </a:spcBef>
-              <a:buFont typeface="Arial" panose="020B0604020202020204" pitchFamily="34" charset="0"/>
-              <a:buNone/>
-              <a:defRPr sz="2000" kern="1200">
-                <a:solidFill>
-                  <a:schemeClr val="tx1"/>
-                </a:solidFill>
-                <a:latin typeface="+mn-lt"/>
-                <a:ea typeface="+mn-ea"/>
-                <a:cs typeface="+mn-cs"/>
-              </a:defRPr>
-            </a:lvl2pPr>
-            <a:lvl3pPr marL="914400" indent="0" algn="ctr" defTabSz="914400" rtl="0" eaLnBrk="1" latinLnBrk="0" hangingPunct="1">
-              <a:lnSpc>
-                <a:spcPct val="90000"/>
-              </a:lnSpc>
-              <a:spcBef>
-                <a:spcPts val="500"/>
-              </a:spcBef>
-              <a:buFont typeface="Arial" panose="020B0604020202020204" pitchFamily="34" charset="0"/>
-              <a:buNone/>
-              <a:defRPr sz="1800" kern="1200">
-                <a:solidFill>
-                  <a:schemeClr val="tx1"/>
-                </a:solidFill>
-                <a:latin typeface="+mn-lt"/>
-                <a:ea typeface="+mn-ea"/>
-                <a:cs typeface="+mn-cs"/>
-              </a:defRPr>
-            </a:lvl3pPr>
-            <a:lvl4pPr marL="1371600" indent="0" algn="ctr" defTabSz="914400" rtl="0" eaLnBrk="1" latinLnBrk="0" hangingPunct="1">
-              <a:lnSpc>
-                <a:spcPct val="90000"/>
-              </a:lnSpc>
-              <a:spcBef>
-                <a:spcPts val="500"/>
-              </a:spcBef>
-              <a:buFont typeface="Arial" panose="020B0604020202020204" pitchFamily="34" charset="0"/>
-              <a:buNone/>
-              <a:defRPr sz="1600" kern="1200">
-                <a:solidFill>
-                  <a:schemeClr val="tx1"/>
-                </a:solidFill>
-                <a:latin typeface="+mn-lt"/>
-                <a:ea typeface="+mn-ea"/>
-                <a:cs typeface="+mn-cs"/>
-              </a:defRPr>
-            </a:lvl4pPr>
-            <a:lvl5pPr marL="1828800" indent="0" algn="ctr" defTabSz="914400" rtl="0" eaLnBrk="1" latinLnBrk="0" hangingPunct="1">
-              <a:lnSpc>
-                <a:spcPct val="90000"/>
-              </a:lnSpc>
-              <a:spcBef>
-                <a:spcPts val="500"/>
-              </a:spcBef>
-              <a:buFont typeface="Arial" panose="020B0604020202020204" pitchFamily="34" charset="0"/>
-              <a:buNone/>
-              <a:defRPr sz="1600" kern="1200">
-                <a:solidFill>
-                  <a:schemeClr val="tx1"/>
-                </a:solidFill>
-                <a:latin typeface="+mn-lt"/>
-                <a:ea typeface="+mn-ea"/>
-                <a:cs typeface="+mn-cs"/>
-              </a:defRPr>
-            </a:lvl5pPr>
-            <a:lvl6pPr marL="2286000" indent="0" algn="ctr" defTabSz="914400" rtl="0" eaLnBrk="1" latinLnBrk="0" hangingPunct="1">
-              <a:lnSpc>
-                <a:spcPct val="90000"/>
-              </a:lnSpc>
-              <a:spcBef>
-                <a:spcPts val="500"/>
-              </a:spcBef>
-              <a:buFont typeface="Arial" panose="020B0604020202020204" pitchFamily="34" charset="0"/>
-              <a:buNone/>
-              <a:defRPr sz="1600" kern="1200">
-                <a:solidFill>
-                  <a:schemeClr val="tx1"/>
-                </a:solidFill>
-                <a:latin typeface="+mn-lt"/>
-                <a:ea typeface="+mn-ea"/>
-                <a:cs typeface="+mn-cs"/>
-              </a:defRPr>
-            </a:lvl6pPr>
-            <a:lvl7pPr marL="2743200" indent="0" algn="ctr" defTabSz="914400" rtl="0" eaLnBrk="1" latinLnBrk="0" hangingPunct="1">
-              <a:lnSpc>
-                <a:spcPct val="90000"/>
-              </a:lnSpc>
-              <a:spcBef>
-                <a:spcPts val="500"/>
-              </a:spcBef>
-              <a:buFont typeface="Arial" panose="020B0604020202020204" pitchFamily="34" charset="0"/>
-              <a:buNone/>
-              <a:defRPr sz="1600" kern="1200">
-                <a:solidFill>
-                  <a:schemeClr val="tx1"/>
-                </a:solidFill>
-                <a:latin typeface="+mn-lt"/>
-                <a:ea typeface="+mn-ea"/>
-                <a:cs typeface="+mn-cs"/>
-              </a:defRPr>
-            </a:lvl7pPr>
-            <a:lvl8pPr marL="3200400" indent="0" algn="ctr" defTabSz="914400" rtl="0" eaLnBrk="1" latinLnBrk="0" hangingPunct="1">
-              <a:lnSpc>
-                <a:spcPct val="90000"/>
-              </a:lnSpc>
-              <a:spcBef>
-                <a:spcPts val="500"/>
-              </a:spcBef>
-              <a:buFont typeface="Arial" panose="020B0604020202020204" pitchFamily="34" charset="0"/>
-              <a:buNone/>
-              <a:defRPr sz="1600" kern="1200">
-                <a:solidFill>
-                  <a:schemeClr val="tx1"/>
-                </a:solidFill>
-                <a:latin typeface="+mn-lt"/>
-                <a:ea typeface="+mn-ea"/>
-                <a:cs typeface="+mn-cs"/>
-              </a:defRPr>
-            </a:lvl8pPr>
-            <a:lvl9pPr marL="3657600" indent="0" algn="ctr" defTabSz="914400" rtl="0" eaLnBrk="1" latinLnBrk="0" hangingPunct="1">
-              <a:lnSpc>
-                <a:spcPct val="90000"/>
-              </a:lnSpc>
-              <a:spcBef>
-                <a:spcPts val="500"/>
-              </a:spcBef>
-              <a:buFont typeface="Arial" panose="020B0604020202020204" pitchFamily="34" charset="0"/>
-              <a:buNone/>
-              <a:defRPr sz="1600" kern="1200">
-                <a:solidFill>
-                  <a:schemeClr val="tx1"/>
-                </a:solidFill>
-                <a:latin typeface="+mn-lt"/>
-                <a:ea typeface="+mn-ea"/>
-                <a:cs typeface="+mn-cs"/>
-              </a:defRPr>
-            </a:lvl9pPr>
-          </a:lstStyle>
-          <a:p>
-            <a:r>
-              <a:rPr lang="en-US" sz="2800" b="1" dirty="0"/>
-              <a:t>y</a:t>
-            </a:r>
-          </a:p>
-        </p:txBody>
-      </p:sp>
-    </p:spTree>
-    <p:extLst>
-      <p:ext uri="{BB962C8B-B14F-4D97-AF65-F5344CB8AC3E}">
-        <p14:creationId xmlns:p14="http://schemas.microsoft.com/office/powerpoint/2010/main" val="4067232557"/>
-      </p:ext>
-    </p:extLst>
-  </p:cSld>
-  <p:clrMapOvr>
-    <a:masterClrMapping/>
-  </p:clrMapOvr>
-  <mc:AlternateContent xmlns:mc="http://schemas.openxmlformats.org/markup-compatibility/2006">
-    <mc:Choice xmlns:p14="http://schemas.microsoft.com/office/powerpoint/2010/main" Requires="p14">
-      <p:timing>
-        <p:tnLst>
-          <p:par>
-            <p:cTn id="1" dur="indefinite" restart="never" nodeType="tmRoot">
-              <p:childTnLst>
-                <p:seq concurrent="1" nextAc="seek">
-                  <p:cTn id="2" dur="indefinite" nodeType="mainSeq">
-                    <p:childTnLst>
-                      <p:par>
-                        <p:cTn id="3" fill="hold">
-                          <p:stCondLst>
-                            <p:cond delay="indefinite"/>
-                          </p:stCondLst>
-                          <p:childTnLst>
-                            <p:par>
-                              <p:cTn id="4" fill="hold">
-                                <p:stCondLst>
-                                  <p:cond delay="0"/>
-                                </p:stCondLst>
-                                <p:childTnLst>
-                                  <p:par>
-                                    <p:cTn id="5" presetID="45" presetClass="entr" presetSubtype="0" fill="hold" grpId="0" nodeType="clickEffect">
-                                      <p:stCondLst>
-                                        <p:cond delay="0"/>
-                                      </p:stCondLst>
-                                      <p:childTnLst>
-                                        <p:set>
-                                          <p:cBhvr>
-                                            <p:cTn id="6" dur="1" fill="hold">
-                                              <p:stCondLst>
-                                                <p:cond delay="0"/>
-                                              </p:stCondLst>
-                                            </p:cTn>
-                                            <p:tgtEl>
-                                              <p:spTgt spid="2"/>
-                                            </p:tgtEl>
-                                            <p:attrNameLst>
-                                              <p:attrName>style.visibility</p:attrName>
-                                            </p:attrNameLst>
-                                          </p:cBhvr>
-                                          <p:to>
-                                            <p:strVal val="visible"/>
-                                          </p:to>
-                                        </p:set>
-                                        <p:animEffect transition="in" filter="fade">
-                                          <p:cBhvr>
-                                            <p:cTn id="7" dur="2000"/>
-                                            <p:tgtEl>
-                                              <p:spTgt spid="2"/>
-                                            </p:tgtEl>
-                                          </p:cBhvr>
-                                        </p:animEffect>
-                                        <p:anim calcmode="lin" valueType="num">
-                                          <p:cBhvr>
-                                            <p:cTn id="8" dur="2000" fill="hold"/>
-                                            <p:tgtEl>
-                                              <p:spTgt spid="2"/>
-                                            </p:tgtEl>
-                                            <p:attrNameLst>
-                                              <p:attrName>ppt_w</p:attrName>
-                                            </p:attrNameLst>
-                                          </p:cBhvr>
-                                          <p:tavLst>
-                                            <p:tav tm="0" fmla="#ppt_w*sin(2.5*pi*$)">
-                                              <p:val>
-                                                <p:fltVal val="0"/>
-                                              </p:val>
-                                            </p:tav>
-                                            <p:tav tm="100000">
-                                              <p:val>
-                                                <p:fltVal val="1"/>
-                                              </p:val>
-                                            </p:tav>
-                                          </p:tavLst>
-                                        </p:anim>
-                                        <p:anim calcmode="lin" valueType="num">
-                                          <p:cBhvr>
-                                            <p:cTn id="9" dur="2000" fill="hold"/>
-                                            <p:tgtEl>
-                                              <p:spTgt spid="2"/>
-                                            </p:tgtEl>
-                                            <p:attrNameLst>
-                                              <p:attrName>ppt_h</p:attrName>
-                                            </p:attrNameLst>
-                                          </p:cBhvr>
-                                          <p:tavLst>
-                                            <p:tav tm="0">
-                                              <p:val>
-                                                <p:strVal val="#ppt_h"/>
-                                              </p:val>
-                                            </p:tav>
-                                            <p:tav tm="100000">
-                                              <p:val>
-                                                <p:strVal val="#ppt_h"/>
-                                              </p:val>
-                                            </p:tav>
-                                          </p:tavLst>
-                                        </p:anim>
-                                      </p:childTnLst>
-                                    </p:cTn>
-                                  </p:par>
-                                </p:childTnLst>
-                              </p:cTn>
-                            </p:par>
-                            <p:par>
-                              <p:cTn id="10" fill="hold">
-                                <p:stCondLst>
-                                  <p:cond delay="2000"/>
-                                </p:stCondLst>
-                                <p:childTnLst>
-                                  <p:par>
-                                    <p:cTn id="11" presetID="2" presetClass="entr" presetSubtype="2" fill="hold" grpId="0" nodeType="afterEffect" p14:presetBounceEnd="16667">
-                                      <p:stCondLst>
-                                        <p:cond delay="0"/>
-                                      </p:stCondLst>
-                                      <p:childTnLst>
-                                        <p:set>
-                                          <p:cBhvr>
-                                            <p:cTn id="12" dur="1" fill="hold">
-                                              <p:stCondLst>
-                                                <p:cond delay="0"/>
-                                              </p:stCondLst>
-                                            </p:cTn>
-                                            <p:tgtEl>
-                                              <p:spTgt spid="8"/>
-                                            </p:tgtEl>
-                                            <p:attrNameLst>
-                                              <p:attrName>style.visibility</p:attrName>
-                                            </p:attrNameLst>
-                                          </p:cBhvr>
-                                          <p:to>
-                                            <p:strVal val="visible"/>
-                                          </p:to>
-                                        </p:set>
-                                        <p:anim calcmode="lin" valueType="num" p14:bounceEnd="16667">
-                                          <p:cBhvr additive="base">
-                                            <p:cTn id="13" dur="1500" fill="hold"/>
-                                            <p:tgtEl>
-                                              <p:spTgt spid="8"/>
-                                            </p:tgtEl>
-                                            <p:attrNameLst>
-                                              <p:attrName>ppt_x</p:attrName>
-                                            </p:attrNameLst>
-                                          </p:cBhvr>
-                                          <p:tavLst>
-                                            <p:tav tm="0">
-                                              <p:val>
-                                                <p:strVal val="1+#ppt_w/2"/>
-                                              </p:val>
-                                            </p:tav>
-                                            <p:tav tm="100000">
-                                              <p:val>
-                                                <p:strVal val="#ppt_x"/>
-                                              </p:val>
-                                            </p:tav>
-                                          </p:tavLst>
-                                        </p:anim>
-                                        <p:anim calcmode="lin" valueType="num" p14:bounceEnd="16667">
-                                          <p:cBhvr additive="base">
-                                            <p:cTn id="14" dur="1500" fill="hold"/>
-                                            <p:tgtEl>
-                                              <p:spTgt spid="8"/>
-                                            </p:tgtEl>
-                                            <p:attrNameLst>
-                                              <p:attrName>ppt_y</p:attrName>
-                                            </p:attrNameLst>
-                                          </p:cBhvr>
-                                          <p:tavLst>
-                                            <p:tav tm="0">
-                                              <p:val>
-                                                <p:strVal val="#ppt_y"/>
-                                              </p:val>
-                                            </p:tav>
-                                            <p:tav tm="100000">
-                                              <p:val>
-                                                <p:strVal val="#ppt_y"/>
-                                              </p:val>
-                                            </p:tav>
-                                          </p:tavLst>
-                                        </p:anim>
-                                      </p:childTnLst>
-                                    </p:cTn>
-                                  </p:par>
-                                  <p:par>
-                                    <p:cTn id="15" presetID="2" presetClass="entr" presetSubtype="8" fill="hold" grpId="0" nodeType="withEffect" p14:presetBounceEnd="16667">
-                                      <p:stCondLst>
-                                        <p:cond delay="0"/>
-                                      </p:stCondLst>
-                                      <p:childTnLst>
-                                        <p:set>
-                                          <p:cBhvr>
-                                            <p:cTn id="16" dur="1" fill="hold">
-                                              <p:stCondLst>
-                                                <p:cond delay="0"/>
-                                              </p:stCondLst>
-                                            </p:cTn>
-                                            <p:tgtEl>
-                                              <p:spTgt spid="10"/>
-                                            </p:tgtEl>
-                                            <p:attrNameLst>
-                                              <p:attrName>style.visibility</p:attrName>
-                                            </p:attrNameLst>
-                                          </p:cBhvr>
-                                          <p:to>
-                                            <p:strVal val="visible"/>
-                                          </p:to>
-                                        </p:set>
-                                        <p:anim calcmode="lin" valueType="num" p14:bounceEnd="16667">
-                                          <p:cBhvr additive="base">
-                                            <p:cTn id="17" dur="1500" fill="hold"/>
-                                            <p:tgtEl>
-                                              <p:spTgt spid="10"/>
-                                            </p:tgtEl>
-                                            <p:attrNameLst>
-                                              <p:attrName>ppt_x</p:attrName>
-                                            </p:attrNameLst>
-                                          </p:cBhvr>
-                                          <p:tavLst>
-                                            <p:tav tm="0">
-                                              <p:val>
-                                                <p:strVal val="0-#ppt_w/2"/>
-                                              </p:val>
-                                            </p:tav>
-                                            <p:tav tm="100000">
-                                              <p:val>
-                                                <p:strVal val="#ppt_x"/>
-                                              </p:val>
-                                            </p:tav>
-                                          </p:tavLst>
-                                        </p:anim>
-                                        <p:anim calcmode="lin" valueType="num" p14:bounceEnd="16667">
-                                          <p:cBhvr additive="base">
-                                            <p:cTn id="18" dur="1500" fill="hold"/>
-                                            <p:tgtEl>
-                                              <p:spTgt spid="10"/>
-                                            </p:tgtEl>
-                                            <p:attrNameLst>
-                                              <p:attrName>ppt_y</p:attrName>
-                                            </p:attrNameLst>
-                                          </p:cBhvr>
-                                          <p:tavLst>
-                                            <p:tav tm="0">
-                                              <p:val>
-                                                <p:strVal val="#ppt_y"/>
-                                              </p:val>
-                                            </p:tav>
-                                            <p:tav tm="100000">
-                                              <p:val>
-                                                <p:strVal val="#ppt_y"/>
-                                              </p:val>
-                                            </p:tav>
-                                          </p:tavLst>
-                                        </p:anim>
-                                      </p:childTnLst>
-                                    </p:cTn>
-                                  </p:par>
-                                </p:childTnLst>
-                              </p:cTn>
-                            </p:par>
-                            <p:par>
-                              <p:cTn id="19" fill="hold">
-                                <p:stCondLst>
-                                  <p:cond delay="3500"/>
-                                </p:stCondLst>
-                                <p:childTnLst>
-                                  <p:par>
-                                    <p:cTn id="20" presetID="10" presetClass="entr" presetSubtype="0" fill="hold" grpId="0" nodeType="afterEffect">
-                                      <p:stCondLst>
-                                        <p:cond delay="0"/>
-                                      </p:stCondLst>
-                                      <p:childTnLst>
-                                        <p:set>
-                                          <p:cBhvr>
-                                            <p:cTn id="21" dur="1" fill="hold">
-                                              <p:stCondLst>
-                                                <p:cond delay="0"/>
-                                              </p:stCondLst>
-                                            </p:cTn>
-                                            <p:tgtEl>
-                                              <p:spTgt spid="4"/>
-                                            </p:tgtEl>
-                                            <p:attrNameLst>
-                                              <p:attrName>style.visibility</p:attrName>
-                                            </p:attrNameLst>
-                                          </p:cBhvr>
-                                          <p:to>
-                                            <p:strVal val="visible"/>
-                                          </p:to>
-                                        </p:set>
-                                        <p:animEffect transition="in" filter="fade">
-                                          <p:cBhvr>
-                                            <p:cTn id="22" dur="500"/>
-                                            <p:tgtEl>
-                                              <p:spTgt spid="4"/>
-                                            </p:tgtEl>
-                                          </p:cBhvr>
-                                        </p:animEffect>
-                                      </p:childTnLst>
-                                    </p:cTn>
-                                  </p:par>
-                                </p:childTnLst>
-                              </p:cTn>
-                            </p:par>
-                            <p:par>
-                              <p:cTn id="23" fill="hold">
-                                <p:stCondLst>
-                                  <p:cond delay="4000"/>
-                                </p:stCondLst>
-                                <p:childTnLst>
-                                  <p:par>
-                                    <p:cTn id="24" presetID="10" presetClass="entr" presetSubtype="0" fill="hold" grpId="0" nodeType="afterEffect">
-                                      <p:stCondLst>
-                                        <p:cond delay="0"/>
-                                      </p:stCondLst>
-                                      <p:childTnLst>
-                                        <p:set>
-                                          <p:cBhvr>
-                                            <p:cTn id="25" dur="1" fill="hold">
-                                              <p:stCondLst>
-                                                <p:cond delay="0"/>
-                                              </p:stCondLst>
-                                            </p:cTn>
-                                            <p:tgtEl>
-                                              <p:spTgt spid="16"/>
-                                            </p:tgtEl>
-                                            <p:attrNameLst>
-                                              <p:attrName>style.visibility</p:attrName>
-                                            </p:attrNameLst>
-                                          </p:cBhvr>
-                                          <p:to>
-                                            <p:strVal val="visible"/>
-                                          </p:to>
-                                        </p:set>
-                                        <p:animEffect transition="in" filter="fade">
-                                          <p:cBhvr>
-                                            <p:cTn id="26" dur="500"/>
-                                            <p:tgtEl>
-                                              <p:spTgt spid="16"/>
-                                            </p:tgtEl>
-                                          </p:cBhvr>
-                                        </p:animEffect>
-                                      </p:childTnLst>
-                                    </p:cTn>
-                                  </p:par>
-                                </p:childTnLst>
-                              </p:cTn>
-                            </p:par>
-                            <p:par>
-                              <p:cTn id="27" fill="hold">
-                                <p:stCondLst>
-                                  <p:cond delay="4500"/>
-                                </p:stCondLst>
-                                <p:childTnLst>
-                                  <p:par>
-                                    <p:cTn id="28" presetID="10" presetClass="entr" presetSubtype="0" fill="hold" grpId="0" nodeType="afterEffect">
-                                      <p:stCondLst>
-                                        <p:cond delay="0"/>
-                                      </p:stCondLst>
-                                      <p:childTnLst>
-                                        <p:set>
-                                          <p:cBhvr>
-                                            <p:cTn id="29" dur="1" fill="hold">
-                                              <p:stCondLst>
-                                                <p:cond delay="0"/>
-                                              </p:stCondLst>
-                                            </p:cTn>
-                                            <p:tgtEl>
-                                              <p:spTgt spid="17"/>
-                                            </p:tgtEl>
-                                            <p:attrNameLst>
-                                              <p:attrName>style.visibility</p:attrName>
-                                            </p:attrNameLst>
-                                          </p:cBhvr>
-                                          <p:to>
-                                            <p:strVal val="visible"/>
-                                          </p:to>
-                                        </p:set>
-                                        <p:animEffect transition="in" filter="fade">
-                                          <p:cBhvr>
-                                            <p:cTn id="30" dur="500"/>
-                                            <p:tgtEl>
-                                              <p:spTgt spid="17"/>
-                                            </p:tgtEl>
-                                          </p:cBhvr>
-                                        </p:animEffect>
-                                      </p:childTnLst>
-                                    </p:cTn>
-                                  </p:par>
-                                </p:childTnLst>
-                              </p:cTn>
-                            </p:par>
-                          </p:childTnLst>
-                        </p:cTn>
-                      </p:par>
-                    </p:childTnLst>
-                  </p:cTn>
-                  <p:prevCondLst>
-                    <p:cond evt="onPrev" delay="0">
-                      <p:tgtEl>
-                        <p:sldTgt/>
-                      </p:tgtEl>
-                    </p:cond>
-                  </p:prevCondLst>
-                  <p:nextCondLst>
-                    <p:cond evt="onNext" delay="0">
-                      <p:tgtEl>
-                        <p:sldTgt/>
-                      </p:tgtEl>
-                    </p:cond>
-                  </p:nextCondLst>
-                </p:seq>
-              </p:childTnLst>
-            </p:cTn>
-          </p:par>
-        </p:tnLst>
-        <p:bldLst>
-          <p:bldP spid="2" grpId="0"/>
-          <p:bldP spid="4" grpId="0"/>
-          <p:bldP spid="8" grpId="0"/>
-          <p:bldP spid="10" grpId="0"/>
-          <p:bldP spid="16" grpId="0"/>
-          <p:bldP spid="17" grpId="0"/>
-        </p:bldLst>
-      </p:timing>
-    </mc:Choice>
-    <mc:Fallback>
-      <p:timing>
-        <p:tnLst>
-          <p:par>
-            <p:cTn id="1" dur="indefinite" restart="never" nodeType="tmRoot">
-              <p:childTnLst>
-                <p:seq concurrent="1" nextAc="seek">
-                  <p:cTn id="2" dur="indefinite" nodeType="mainSeq">
-                    <p:childTnLst>
-                      <p:par>
-                        <p:cTn id="3" fill="hold">
-                          <p:stCondLst>
-                            <p:cond delay="indefinite"/>
-                          </p:stCondLst>
-                          <p:childTnLst>
-                            <p:par>
-                              <p:cTn id="4" fill="hold">
-                                <p:stCondLst>
-                                  <p:cond delay="0"/>
-                                </p:stCondLst>
-                                <p:childTnLst>
-                                  <p:par>
-                                    <p:cTn id="5" presetID="45" presetClass="entr" presetSubtype="0" fill="hold" grpId="0" nodeType="clickEffect">
-                                      <p:stCondLst>
-                                        <p:cond delay="0"/>
-                                      </p:stCondLst>
-                                      <p:childTnLst>
-                                        <p:set>
-                                          <p:cBhvr>
-                                            <p:cTn id="6" dur="1" fill="hold">
-                                              <p:stCondLst>
-                                                <p:cond delay="0"/>
-                                              </p:stCondLst>
-                                            </p:cTn>
-                                            <p:tgtEl>
-                                              <p:spTgt spid="2"/>
-                                            </p:tgtEl>
-                                            <p:attrNameLst>
-                                              <p:attrName>style.visibility</p:attrName>
-                                            </p:attrNameLst>
-                                          </p:cBhvr>
-                                          <p:to>
-                                            <p:strVal val="visible"/>
-                                          </p:to>
-                                        </p:set>
-                                        <p:animEffect transition="in" filter="fade">
-                                          <p:cBhvr>
-                                            <p:cTn id="7" dur="2000"/>
-                                            <p:tgtEl>
-                                              <p:spTgt spid="2"/>
-                                            </p:tgtEl>
-                                          </p:cBhvr>
-                                        </p:animEffect>
-                                        <p:anim calcmode="lin" valueType="num">
-                                          <p:cBhvr>
-                                            <p:cTn id="8" dur="2000" fill="hold"/>
-                                            <p:tgtEl>
-                                              <p:spTgt spid="2"/>
-                                            </p:tgtEl>
-                                            <p:attrNameLst>
-                                              <p:attrName>ppt_w</p:attrName>
-                                            </p:attrNameLst>
-                                          </p:cBhvr>
-                                          <p:tavLst>
-                                            <p:tav tm="0" fmla="#ppt_w*sin(2.5*pi*$)">
-                                              <p:val>
-                                                <p:fltVal val="0"/>
-                                              </p:val>
-                                            </p:tav>
-                                            <p:tav tm="100000">
-                                              <p:val>
-                                                <p:fltVal val="1"/>
-                                              </p:val>
-                                            </p:tav>
-                                          </p:tavLst>
-                                        </p:anim>
-                                        <p:anim calcmode="lin" valueType="num">
-                                          <p:cBhvr>
-                                            <p:cTn id="9" dur="2000" fill="hold"/>
-                                            <p:tgtEl>
-                                              <p:spTgt spid="2"/>
-                                            </p:tgtEl>
-                                            <p:attrNameLst>
-                                              <p:attrName>ppt_h</p:attrName>
-                                            </p:attrNameLst>
-                                          </p:cBhvr>
-                                          <p:tavLst>
-                                            <p:tav tm="0">
-                                              <p:val>
-                                                <p:strVal val="#ppt_h"/>
-                                              </p:val>
-                                            </p:tav>
-                                            <p:tav tm="100000">
-                                              <p:val>
-                                                <p:strVal val="#ppt_h"/>
-                                              </p:val>
-                                            </p:tav>
-                                          </p:tavLst>
-                                        </p:anim>
-                                      </p:childTnLst>
-                                    </p:cTn>
-                                  </p:par>
-                                </p:childTnLst>
-                              </p:cTn>
-                            </p:par>
-                            <p:par>
-                              <p:cTn id="10" fill="hold">
-                                <p:stCondLst>
-                                  <p:cond delay="2000"/>
-                                </p:stCondLst>
-                                <p:childTnLst>
-                                  <p:par>
-                                    <p:cTn id="11" presetID="2" presetClass="entr" presetSubtype="2" fill="hold" grpId="0" nodeType="afterEffect">
-                                      <p:stCondLst>
-                                        <p:cond delay="0"/>
-                                      </p:stCondLst>
-                                      <p:childTnLst>
-                                        <p:set>
-                                          <p:cBhvr>
-                                            <p:cTn id="12" dur="1" fill="hold">
-                                              <p:stCondLst>
-                                                <p:cond delay="0"/>
-                                              </p:stCondLst>
-                                            </p:cTn>
-                                            <p:tgtEl>
-                                              <p:spTgt spid="8"/>
-                                            </p:tgtEl>
-                                            <p:attrNameLst>
-                                              <p:attrName>style.visibility</p:attrName>
-                                            </p:attrNameLst>
-                                          </p:cBhvr>
-                                          <p:to>
-                                            <p:strVal val="visible"/>
-                                          </p:to>
-                                        </p:set>
-                                        <p:anim calcmode="lin" valueType="num">
-                                          <p:cBhvr additive="base">
-                                            <p:cTn id="13" dur="1500" fill="hold"/>
-                                            <p:tgtEl>
-                                              <p:spTgt spid="8"/>
-                                            </p:tgtEl>
-                                            <p:attrNameLst>
-                                              <p:attrName>ppt_x</p:attrName>
-                                            </p:attrNameLst>
-                                          </p:cBhvr>
-                                          <p:tavLst>
-                                            <p:tav tm="0">
-                                              <p:val>
-                                                <p:strVal val="1+#ppt_w/2"/>
-                                              </p:val>
-                                            </p:tav>
-                                            <p:tav tm="100000">
-                                              <p:val>
-                                                <p:strVal val="#ppt_x"/>
-                                              </p:val>
-                                            </p:tav>
-                                          </p:tavLst>
-                                        </p:anim>
-                                        <p:anim calcmode="lin" valueType="num">
-                                          <p:cBhvr additive="base">
-                                            <p:cTn id="14" dur="1500" fill="hold"/>
-                                            <p:tgtEl>
-                                              <p:spTgt spid="8"/>
-                                            </p:tgtEl>
-                                            <p:attrNameLst>
-                                              <p:attrName>ppt_y</p:attrName>
-                                            </p:attrNameLst>
-                                          </p:cBhvr>
-                                          <p:tavLst>
-                                            <p:tav tm="0">
-                                              <p:val>
-                                                <p:strVal val="#ppt_y"/>
-                                              </p:val>
-                                            </p:tav>
-                                            <p:tav tm="100000">
-                                              <p:val>
-                                                <p:strVal val="#ppt_y"/>
-                                              </p:val>
-                                            </p:tav>
-                                          </p:tavLst>
-                                        </p:anim>
-                                      </p:childTnLst>
-                                    </p:cTn>
-                                  </p:par>
-                                  <p:par>
-                                    <p:cTn id="15" presetID="2" presetClass="entr" presetSubtype="8" fill="hold" grpId="0" nodeType="withEffect">
-                                      <p:stCondLst>
-                                        <p:cond delay="0"/>
-                                      </p:stCondLst>
-                                      <p:childTnLst>
-                                        <p:set>
-                                          <p:cBhvr>
-                                            <p:cTn id="16" dur="1" fill="hold">
-                                              <p:stCondLst>
-                                                <p:cond delay="0"/>
-                                              </p:stCondLst>
-                                            </p:cTn>
-                                            <p:tgtEl>
-                                              <p:spTgt spid="10"/>
-                                            </p:tgtEl>
-                                            <p:attrNameLst>
-                                              <p:attrName>style.visibility</p:attrName>
-                                            </p:attrNameLst>
-                                          </p:cBhvr>
-                                          <p:to>
-                                            <p:strVal val="visible"/>
-                                          </p:to>
-                                        </p:set>
-                                        <p:anim calcmode="lin" valueType="num">
-                                          <p:cBhvr additive="base">
-                                            <p:cTn id="17" dur="1500" fill="hold"/>
-                                            <p:tgtEl>
-                                              <p:spTgt spid="10"/>
-                                            </p:tgtEl>
-                                            <p:attrNameLst>
-                                              <p:attrName>ppt_x</p:attrName>
-                                            </p:attrNameLst>
-                                          </p:cBhvr>
-                                          <p:tavLst>
-                                            <p:tav tm="0">
-                                              <p:val>
-                                                <p:strVal val="0-#ppt_w/2"/>
-                                              </p:val>
-                                            </p:tav>
-                                            <p:tav tm="100000">
-                                              <p:val>
-                                                <p:strVal val="#ppt_x"/>
-                                              </p:val>
-                                            </p:tav>
-                                          </p:tavLst>
-                                        </p:anim>
-                                        <p:anim calcmode="lin" valueType="num">
-                                          <p:cBhvr additive="base">
-                                            <p:cTn id="18" dur="1500" fill="hold"/>
-                                            <p:tgtEl>
-                                              <p:spTgt spid="10"/>
-                                            </p:tgtEl>
-                                            <p:attrNameLst>
-                                              <p:attrName>ppt_y</p:attrName>
-                                            </p:attrNameLst>
-                                          </p:cBhvr>
-                                          <p:tavLst>
-                                            <p:tav tm="0">
-                                              <p:val>
-                                                <p:strVal val="#ppt_y"/>
-                                              </p:val>
-                                            </p:tav>
-                                            <p:tav tm="100000">
-                                              <p:val>
-                                                <p:strVal val="#ppt_y"/>
-                                              </p:val>
-                                            </p:tav>
-                                          </p:tavLst>
-                                        </p:anim>
-                                      </p:childTnLst>
-                                    </p:cTn>
-                                  </p:par>
-                                </p:childTnLst>
-                              </p:cTn>
-                            </p:par>
-                            <p:par>
-                              <p:cTn id="19" fill="hold">
-                                <p:stCondLst>
-                                  <p:cond delay="3500"/>
-                                </p:stCondLst>
-                                <p:childTnLst>
-                                  <p:par>
-                                    <p:cTn id="20" presetID="10" presetClass="entr" presetSubtype="0" fill="hold" grpId="0" nodeType="afterEffect">
-                                      <p:stCondLst>
-                                        <p:cond delay="0"/>
-                                      </p:stCondLst>
-                                      <p:childTnLst>
-                                        <p:set>
-                                          <p:cBhvr>
-                                            <p:cTn id="21" dur="1" fill="hold">
-                                              <p:stCondLst>
-                                                <p:cond delay="0"/>
-                                              </p:stCondLst>
-                                            </p:cTn>
-                                            <p:tgtEl>
-                                              <p:spTgt spid="4"/>
-                                            </p:tgtEl>
-                                            <p:attrNameLst>
-                                              <p:attrName>style.visibility</p:attrName>
-                                            </p:attrNameLst>
-                                          </p:cBhvr>
-                                          <p:to>
-                                            <p:strVal val="visible"/>
-                                          </p:to>
-                                        </p:set>
-                                        <p:animEffect transition="in" filter="fade">
-                                          <p:cBhvr>
-                                            <p:cTn id="22" dur="500"/>
-                                            <p:tgtEl>
-                                              <p:spTgt spid="4"/>
-                                            </p:tgtEl>
-                                          </p:cBhvr>
-                                        </p:animEffect>
-                                      </p:childTnLst>
-                                    </p:cTn>
-                                  </p:par>
-                                </p:childTnLst>
-                              </p:cTn>
-                            </p:par>
-                            <p:par>
-                              <p:cTn id="23" fill="hold">
-                                <p:stCondLst>
-                                  <p:cond delay="4000"/>
-                                </p:stCondLst>
-                                <p:childTnLst>
-                                  <p:par>
-                                    <p:cTn id="24" presetID="10" presetClass="entr" presetSubtype="0" fill="hold" grpId="0" nodeType="afterEffect">
-                                      <p:stCondLst>
-                                        <p:cond delay="0"/>
-                                      </p:stCondLst>
-                                      <p:childTnLst>
-                                        <p:set>
-                                          <p:cBhvr>
-                                            <p:cTn id="25" dur="1" fill="hold">
-                                              <p:stCondLst>
-                                                <p:cond delay="0"/>
-                                              </p:stCondLst>
-                                            </p:cTn>
-                                            <p:tgtEl>
-                                              <p:spTgt spid="16"/>
-                                            </p:tgtEl>
-                                            <p:attrNameLst>
-                                              <p:attrName>style.visibility</p:attrName>
-                                            </p:attrNameLst>
-                                          </p:cBhvr>
-                                          <p:to>
-                                            <p:strVal val="visible"/>
-                                          </p:to>
-                                        </p:set>
-                                        <p:animEffect transition="in" filter="fade">
-                                          <p:cBhvr>
-                                            <p:cTn id="26" dur="500"/>
-                                            <p:tgtEl>
-                                              <p:spTgt spid="16"/>
-                                            </p:tgtEl>
-                                          </p:cBhvr>
-                                        </p:animEffect>
-                                      </p:childTnLst>
-                                    </p:cTn>
-                                  </p:par>
-                                </p:childTnLst>
-                              </p:cTn>
-                            </p:par>
-                            <p:par>
-                              <p:cTn id="27" fill="hold">
-                                <p:stCondLst>
-                                  <p:cond delay="4500"/>
-                                </p:stCondLst>
-                                <p:childTnLst>
-                                  <p:par>
-                                    <p:cTn id="28" presetID="10" presetClass="entr" presetSubtype="0" fill="hold" grpId="0" nodeType="afterEffect">
-                                      <p:stCondLst>
-                                        <p:cond delay="0"/>
-                                      </p:stCondLst>
-                                      <p:childTnLst>
-                                        <p:set>
-                                          <p:cBhvr>
-                                            <p:cTn id="29" dur="1" fill="hold">
-                                              <p:stCondLst>
-                                                <p:cond delay="0"/>
-                                              </p:stCondLst>
-                                            </p:cTn>
-                                            <p:tgtEl>
-                                              <p:spTgt spid="17"/>
-                                            </p:tgtEl>
-                                            <p:attrNameLst>
-                                              <p:attrName>style.visibility</p:attrName>
-                                            </p:attrNameLst>
-                                          </p:cBhvr>
-                                          <p:to>
-                                            <p:strVal val="visible"/>
-                                          </p:to>
-                                        </p:set>
-                                        <p:animEffect transition="in" filter="fade">
-                                          <p:cBhvr>
-                                            <p:cTn id="30" dur="500"/>
-                                            <p:tgtEl>
-                                              <p:spTgt spid="17"/>
-                                            </p:tgtEl>
-                                          </p:cBhvr>
-                                        </p:animEffect>
-                                      </p:childTnLst>
-                                    </p:cTn>
-                                  </p:par>
-                                </p:childTnLst>
-                              </p:cTn>
-                            </p:par>
-                          </p:childTnLst>
-                        </p:cTn>
-                      </p:par>
-                    </p:childTnLst>
-                  </p:cTn>
-                  <p:prevCondLst>
-                    <p:cond evt="onPrev" delay="0">
-                      <p:tgtEl>
-                        <p:sldTgt/>
-                      </p:tgtEl>
-                    </p:cond>
-                  </p:prevCondLst>
-                  <p:nextCondLst>
-                    <p:cond evt="onNext" delay="0">
-                      <p:tgtEl>
-                        <p:sldTgt/>
-                      </p:tgtEl>
-                    </p:cond>
-                  </p:nextCondLst>
-                </p:seq>
-              </p:childTnLst>
-            </p:cTn>
-          </p:par>
-        </p:tnLst>
-        <p:bldLst>
-          <p:bldP spid="2" grpId="0"/>
-          <p:bldP spid="4" grpId="0"/>
-          <p:bldP spid="8" grpId="0"/>
-          <p:bldP spid="10" grpId="0"/>
-          <p:bldP spid="16" grpId="0"/>
-          <p:bldP spid="17" grpId="0"/>
-        </p:bldLst>
-      </p:timing>
-    </mc:Fallback>
-  </mc:AlternateContent>
-</p:sld>
-</file>
-
-<file path=ppt/slides/slide3.xml><?xml version="1.0" encoding="utf-8"?>
-<p:sld xmlns:a="http://schemas.openxmlformats.org/drawingml/2006/main" xmlns:r="http://schemas.openxmlformats.org/officeDocument/2006/relationships" xmlns:p="http://schemas.openxmlformats.org/presentationml/2006/main">
-  <p:cSld>
-    <p:spTree>
-      <p:nvGrpSpPr>
         <p:cNvPr id="1" name="">
           <a:extLst>
             <a:ext uri="{FF2B5EF4-FFF2-40B4-BE49-F238E27FC236}">
@@ -5399,7 +3378,7 @@
         </p:nvSpPr>
         <p:spPr>
           <a:xfrm>
-            <a:off x="5056632" y="4032504"/>
+            <a:off x="5076728" y="4032504"/>
             <a:ext cx="1167384" cy="430466"/>
           </a:xfrm>
           <a:prstGeom prst="rect">
@@ -5598,7 +3577,7 @@
         </p:nvSpPr>
         <p:spPr>
           <a:xfrm>
-            <a:off x="6096000" y="4032504"/>
+            <a:off x="6075904" y="4032504"/>
             <a:ext cx="1021080" cy="430466"/>
           </a:xfrm>
           <a:prstGeom prst="rect">
@@ -5797,7 +3776,7 @@
         </p:nvSpPr>
         <p:spPr>
           <a:xfrm>
-            <a:off x="5667756" y="3628503"/>
+            <a:off x="5707948" y="3628503"/>
             <a:ext cx="573024" cy="430466"/>
           </a:xfrm>
           <a:prstGeom prst="rect">
@@ -5996,7 +3975,7 @@
         </p:nvSpPr>
         <p:spPr>
           <a:xfrm>
-            <a:off x="5937504" y="3602038"/>
+            <a:off x="5897312" y="3602038"/>
             <a:ext cx="573024" cy="430466"/>
           </a:xfrm>
           <a:prstGeom prst="rect">
@@ -6189,770 +4168,406 @@
   <p:clrMapOvr>
     <a:masterClrMapping/>
   </p:clrMapOvr>
-  <mc:AlternateContent xmlns:mc="http://schemas.openxmlformats.org/markup-compatibility/2006">
-    <mc:Choice xmlns:p14="http://schemas.microsoft.com/office/powerpoint/2010/main" Requires="p14">
-      <p:timing>
-        <p:tnLst>
-          <p:par>
-            <p:cTn id="1" dur="indefinite" restart="never" nodeType="tmRoot">
-              <p:childTnLst>
-                <p:seq concurrent="1" nextAc="seek">
-                  <p:cTn id="2" dur="indefinite" nodeType="mainSeq">
-                    <p:childTnLst>
-                      <p:par>
-                        <p:cTn id="3" fill="hold">
-                          <p:stCondLst>
-                            <p:cond delay="indefinite"/>
-                          </p:stCondLst>
-                          <p:childTnLst>
-                            <p:par>
-                              <p:cTn id="4" fill="hold">
-                                <p:stCondLst>
-                                  <p:cond delay="0"/>
-                                </p:stCondLst>
-                                <p:childTnLst>
-                                  <p:par>
-                                    <p:cTn id="5" presetID="45" presetClass="entr" presetSubtype="0" fill="hold" grpId="0" nodeType="clickEffect">
-                                      <p:stCondLst>
-                                        <p:cond delay="0"/>
-                                      </p:stCondLst>
-                                      <p:childTnLst>
-                                        <p:set>
-                                          <p:cBhvr>
-                                            <p:cTn id="6" dur="1" fill="hold">
-                                              <p:stCondLst>
-                                                <p:cond delay="0"/>
-                                              </p:stCondLst>
-                                            </p:cTn>
-                                            <p:tgtEl>
-                                              <p:spTgt spid="2"/>
-                                            </p:tgtEl>
-                                            <p:attrNameLst>
-                                              <p:attrName>style.visibility</p:attrName>
-                                            </p:attrNameLst>
-                                          </p:cBhvr>
-                                          <p:to>
-                                            <p:strVal val="visible"/>
-                                          </p:to>
-                                        </p:set>
-                                        <p:animEffect transition="in" filter="fade">
-                                          <p:cBhvr>
-                                            <p:cTn id="7" dur="2000"/>
-                                            <p:tgtEl>
-                                              <p:spTgt spid="2"/>
-                                            </p:tgtEl>
-                                          </p:cBhvr>
-                                        </p:animEffect>
-                                        <p:anim calcmode="lin" valueType="num">
-                                          <p:cBhvr>
-                                            <p:cTn id="8" dur="2000" fill="hold"/>
-                                            <p:tgtEl>
-                                              <p:spTgt spid="2"/>
-                                            </p:tgtEl>
-                                            <p:attrNameLst>
-                                              <p:attrName>ppt_w</p:attrName>
-                                            </p:attrNameLst>
-                                          </p:cBhvr>
-                                          <p:tavLst>
-                                            <p:tav tm="0" fmla="#ppt_w*sin(2.5*pi*$)">
-                                              <p:val>
-                                                <p:fltVal val="0"/>
-                                              </p:val>
-                                            </p:tav>
-                                            <p:tav tm="100000">
-                                              <p:val>
-                                                <p:fltVal val="1"/>
-                                              </p:val>
-                                            </p:tav>
-                                          </p:tavLst>
-                                        </p:anim>
-                                        <p:anim calcmode="lin" valueType="num">
-                                          <p:cBhvr>
-                                            <p:cTn id="9" dur="2000" fill="hold"/>
-                                            <p:tgtEl>
-                                              <p:spTgt spid="2"/>
-                                            </p:tgtEl>
-                                            <p:attrNameLst>
-                                              <p:attrName>ppt_h</p:attrName>
-                                            </p:attrNameLst>
-                                          </p:cBhvr>
-                                          <p:tavLst>
-                                            <p:tav tm="0">
-                                              <p:val>
-                                                <p:strVal val="#ppt_h"/>
-                                              </p:val>
-                                            </p:tav>
-                                            <p:tav tm="100000">
-                                              <p:val>
-                                                <p:strVal val="#ppt_h"/>
-                                              </p:val>
-                                            </p:tav>
-                                          </p:tavLst>
-                                        </p:anim>
-                                      </p:childTnLst>
-                                    </p:cTn>
-                                  </p:par>
-                                </p:childTnLst>
-                              </p:cTn>
-                            </p:par>
-                            <p:par>
-                              <p:cTn id="10" fill="hold">
-                                <p:stCondLst>
-                                  <p:cond delay="2000"/>
-                                </p:stCondLst>
-                                <p:childTnLst>
-                                  <p:par>
-                                    <p:cTn id="11" presetID="2" presetClass="entr" presetSubtype="2" fill="hold" grpId="0" nodeType="afterEffect" p14:presetBounceEnd="16667">
-                                      <p:stCondLst>
-                                        <p:cond delay="0"/>
-                                      </p:stCondLst>
-                                      <p:childTnLst>
-                                        <p:set>
-                                          <p:cBhvr>
-                                            <p:cTn id="12" dur="1" fill="hold">
-                                              <p:stCondLst>
-                                                <p:cond delay="0"/>
-                                              </p:stCondLst>
-                                            </p:cTn>
-                                            <p:tgtEl>
-                                              <p:spTgt spid="8"/>
-                                            </p:tgtEl>
-                                            <p:attrNameLst>
-                                              <p:attrName>style.visibility</p:attrName>
-                                            </p:attrNameLst>
-                                          </p:cBhvr>
-                                          <p:to>
-                                            <p:strVal val="visible"/>
-                                          </p:to>
-                                        </p:set>
-                                        <p:anim calcmode="lin" valueType="num" p14:bounceEnd="16667">
-                                          <p:cBhvr additive="base">
-                                            <p:cTn id="13" dur="1500" fill="hold"/>
-                                            <p:tgtEl>
-                                              <p:spTgt spid="8"/>
-                                            </p:tgtEl>
-                                            <p:attrNameLst>
-                                              <p:attrName>ppt_x</p:attrName>
-                                            </p:attrNameLst>
-                                          </p:cBhvr>
-                                          <p:tavLst>
-                                            <p:tav tm="0">
-                                              <p:val>
-                                                <p:strVal val="1+#ppt_w/2"/>
-                                              </p:val>
-                                            </p:tav>
-                                            <p:tav tm="100000">
-                                              <p:val>
-                                                <p:strVal val="#ppt_x"/>
-                                              </p:val>
-                                            </p:tav>
-                                          </p:tavLst>
-                                        </p:anim>
-                                        <p:anim calcmode="lin" valueType="num" p14:bounceEnd="16667">
-                                          <p:cBhvr additive="base">
-                                            <p:cTn id="14" dur="1500" fill="hold"/>
-                                            <p:tgtEl>
-                                              <p:spTgt spid="8"/>
-                                            </p:tgtEl>
-                                            <p:attrNameLst>
-                                              <p:attrName>ppt_y</p:attrName>
-                                            </p:attrNameLst>
-                                          </p:cBhvr>
-                                          <p:tavLst>
-                                            <p:tav tm="0">
-                                              <p:val>
-                                                <p:strVal val="#ppt_y"/>
-                                              </p:val>
-                                            </p:tav>
-                                            <p:tav tm="100000">
-                                              <p:val>
-                                                <p:strVal val="#ppt_y"/>
-                                              </p:val>
-                                            </p:tav>
-                                          </p:tavLst>
-                                        </p:anim>
-                                      </p:childTnLst>
-                                    </p:cTn>
-                                  </p:par>
-                                  <p:par>
-                                    <p:cTn id="15" presetID="2" presetClass="entr" presetSubtype="8" fill="hold" grpId="0" nodeType="withEffect" p14:presetBounceEnd="16667">
-                                      <p:stCondLst>
-                                        <p:cond delay="0"/>
-                                      </p:stCondLst>
-                                      <p:childTnLst>
-                                        <p:set>
-                                          <p:cBhvr>
-                                            <p:cTn id="16" dur="1" fill="hold">
-                                              <p:stCondLst>
-                                                <p:cond delay="0"/>
-                                              </p:stCondLst>
-                                            </p:cTn>
-                                            <p:tgtEl>
-                                              <p:spTgt spid="10"/>
-                                            </p:tgtEl>
-                                            <p:attrNameLst>
-                                              <p:attrName>style.visibility</p:attrName>
-                                            </p:attrNameLst>
-                                          </p:cBhvr>
-                                          <p:to>
-                                            <p:strVal val="visible"/>
-                                          </p:to>
-                                        </p:set>
-                                        <p:anim calcmode="lin" valueType="num" p14:bounceEnd="16667">
-                                          <p:cBhvr additive="base">
-                                            <p:cTn id="17" dur="1500" fill="hold"/>
-                                            <p:tgtEl>
-                                              <p:spTgt spid="10"/>
-                                            </p:tgtEl>
-                                            <p:attrNameLst>
-                                              <p:attrName>ppt_x</p:attrName>
-                                            </p:attrNameLst>
-                                          </p:cBhvr>
-                                          <p:tavLst>
-                                            <p:tav tm="0">
-                                              <p:val>
-                                                <p:strVal val="0-#ppt_w/2"/>
-                                              </p:val>
-                                            </p:tav>
-                                            <p:tav tm="100000">
-                                              <p:val>
-                                                <p:strVal val="#ppt_x"/>
-                                              </p:val>
-                                            </p:tav>
-                                          </p:tavLst>
-                                        </p:anim>
-                                        <p:anim calcmode="lin" valueType="num" p14:bounceEnd="16667">
-                                          <p:cBhvr additive="base">
-                                            <p:cTn id="18" dur="1500" fill="hold"/>
-                                            <p:tgtEl>
-                                              <p:spTgt spid="10"/>
-                                            </p:tgtEl>
-                                            <p:attrNameLst>
-                                              <p:attrName>ppt_y</p:attrName>
-                                            </p:attrNameLst>
-                                          </p:cBhvr>
-                                          <p:tavLst>
-                                            <p:tav tm="0">
-                                              <p:val>
-                                                <p:strVal val="#ppt_y"/>
-                                              </p:val>
-                                            </p:tav>
-                                            <p:tav tm="100000">
-                                              <p:val>
-                                                <p:strVal val="#ppt_y"/>
-                                              </p:val>
-                                            </p:tav>
-                                          </p:tavLst>
-                                        </p:anim>
-                                      </p:childTnLst>
-                                    </p:cTn>
-                                  </p:par>
-                                </p:childTnLst>
-                              </p:cTn>
-                            </p:par>
-                            <p:par>
-                              <p:cTn id="19" fill="hold">
-                                <p:stCondLst>
-                                  <p:cond delay="3500"/>
-                                </p:stCondLst>
-                                <p:childTnLst>
-                                  <p:par>
-                                    <p:cTn id="20" presetID="10" presetClass="entr" presetSubtype="0" fill="hold" grpId="0" nodeType="afterEffect">
-                                      <p:stCondLst>
-                                        <p:cond delay="0"/>
-                                      </p:stCondLst>
-                                      <p:childTnLst>
-                                        <p:set>
-                                          <p:cBhvr>
-                                            <p:cTn id="21" dur="1" fill="hold">
-                                              <p:stCondLst>
-                                                <p:cond delay="0"/>
-                                              </p:stCondLst>
-                                            </p:cTn>
-                                            <p:tgtEl>
-                                              <p:spTgt spid="16"/>
-                                            </p:tgtEl>
-                                            <p:attrNameLst>
-                                              <p:attrName>style.visibility</p:attrName>
-                                            </p:attrNameLst>
-                                          </p:cBhvr>
-                                          <p:to>
-                                            <p:strVal val="visible"/>
-                                          </p:to>
-                                        </p:set>
-                                        <p:animEffect transition="in" filter="fade">
-                                          <p:cBhvr>
-                                            <p:cTn id="22" dur="500"/>
-                                            <p:tgtEl>
-                                              <p:spTgt spid="16"/>
-                                            </p:tgtEl>
-                                          </p:cBhvr>
-                                        </p:animEffect>
-                                      </p:childTnLst>
-                                    </p:cTn>
-                                  </p:par>
-                                </p:childTnLst>
-                              </p:cTn>
-                            </p:par>
-                            <p:par>
-                              <p:cTn id="23" fill="hold">
-                                <p:stCondLst>
-                                  <p:cond delay="4000"/>
-                                </p:stCondLst>
-                                <p:childTnLst>
-                                  <p:par>
-                                    <p:cTn id="24" presetID="10" presetClass="entr" presetSubtype="0" fill="hold" grpId="0" nodeType="afterEffect">
-                                      <p:stCondLst>
-                                        <p:cond delay="0"/>
-                                      </p:stCondLst>
-                                      <p:childTnLst>
-                                        <p:set>
-                                          <p:cBhvr>
-                                            <p:cTn id="25" dur="1" fill="hold">
-                                              <p:stCondLst>
-                                                <p:cond delay="0"/>
-                                              </p:stCondLst>
-                                            </p:cTn>
-                                            <p:tgtEl>
-                                              <p:spTgt spid="17"/>
-                                            </p:tgtEl>
-                                            <p:attrNameLst>
-                                              <p:attrName>style.visibility</p:attrName>
-                                            </p:attrNameLst>
-                                          </p:cBhvr>
-                                          <p:to>
-                                            <p:strVal val="visible"/>
-                                          </p:to>
-                                        </p:set>
-                                        <p:animEffect transition="in" filter="fade">
-                                          <p:cBhvr>
-                                            <p:cTn id="26" dur="500"/>
-                                            <p:tgtEl>
-                                              <p:spTgt spid="17"/>
-                                            </p:tgtEl>
-                                          </p:cBhvr>
-                                        </p:animEffect>
-                                      </p:childTnLst>
-                                    </p:cTn>
-                                  </p:par>
-                                </p:childTnLst>
-                              </p:cTn>
-                            </p:par>
-                          </p:childTnLst>
-                        </p:cTn>
-                      </p:par>
-                    </p:childTnLst>
-                  </p:cTn>
-                  <p:prevCondLst>
-                    <p:cond evt="onPrev" delay="0">
-                      <p:tgtEl>
-                        <p:sldTgt/>
-                      </p:tgtEl>
-                    </p:cond>
-                  </p:prevCondLst>
-                  <p:nextCondLst>
-                    <p:cond evt="onNext" delay="0">
-                      <p:tgtEl>
-                        <p:sldTgt/>
-                      </p:tgtEl>
-                    </p:cond>
-                  </p:nextCondLst>
-                </p:seq>
-              </p:childTnLst>
-            </p:cTn>
-          </p:par>
-        </p:tnLst>
-        <p:bldLst>
-          <p:bldP spid="2" grpId="0"/>
-          <p:bldP spid="8" grpId="0"/>
-          <p:bldP spid="10" grpId="0"/>
-          <p:bldP spid="16" grpId="0"/>
-          <p:bldP spid="17" grpId="0"/>
-        </p:bldLst>
-      </p:timing>
-    </mc:Choice>
-    <mc:Fallback>
-      <p:timing>
-        <p:tnLst>
-          <p:par>
-            <p:cTn id="1" dur="indefinite" restart="never" nodeType="tmRoot">
-              <p:childTnLst>
-                <p:seq concurrent="1" nextAc="seek">
-                  <p:cTn id="2" dur="indefinite" nodeType="mainSeq">
-                    <p:childTnLst>
-                      <p:par>
-                        <p:cTn id="3" fill="hold">
-                          <p:stCondLst>
-                            <p:cond delay="indefinite"/>
-                          </p:stCondLst>
-                          <p:childTnLst>
-                            <p:par>
-                              <p:cTn id="4" fill="hold">
-                                <p:stCondLst>
-                                  <p:cond delay="0"/>
-                                </p:stCondLst>
-                                <p:childTnLst>
-                                  <p:par>
-                                    <p:cTn id="5" presetID="45" presetClass="entr" presetSubtype="0" fill="hold" grpId="0" nodeType="clickEffect">
-                                      <p:stCondLst>
-                                        <p:cond delay="0"/>
-                                      </p:stCondLst>
-                                      <p:childTnLst>
-                                        <p:set>
-                                          <p:cBhvr>
-                                            <p:cTn id="6" dur="1" fill="hold">
-                                              <p:stCondLst>
-                                                <p:cond delay="0"/>
-                                              </p:stCondLst>
-                                            </p:cTn>
-                                            <p:tgtEl>
-                                              <p:spTgt spid="2"/>
-                                            </p:tgtEl>
-                                            <p:attrNameLst>
-                                              <p:attrName>style.visibility</p:attrName>
-                                            </p:attrNameLst>
-                                          </p:cBhvr>
-                                          <p:to>
-                                            <p:strVal val="visible"/>
-                                          </p:to>
-                                        </p:set>
-                                        <p:animEffect transition="in" filter="fade">
-                                          <p:cBhvr>
-                                            <p:cTn id="7" dur="2000"/>
-                                            <p:tgtEl>
-                                              <p:spTgt spid="2"/>
-                                            </p:tgtEl>
-                                          </p:cBhvr>
-                                        </p:animEffect>
-                                        <p:anim calcmode="lin" valueType="num">
-                                          <p:cBhvr>
-                                            <p:cTn id="8" dur="2000" fill="hold"/>
-                                            <p:tgtEl>
-                                              <p:spTgt spid="2"/>
-                                            </p:tgtEl>
-                                            <p:attrNameLst>
-                                              <p:attrName>ppt_w</p:attrName>
-                                            </p:attrNameLst>
-                                          </p:cBhvr>
-                                          <p:tavLst>
-                                            <p:tav tm="0" fmla="#ppt_w*sin(2.5*pi*$)">
-                                              <p:val>
-                                                <p:fltVal val="0"/>
-                                              </p:val>
-                                            </p:tav>
-                                            <p:tav tm="100000">
-                                              <p:val>
-                                                <p:fltVal val="1"/>
-                                              </p:val>
-                                            </p:tav>
-                                          </p:tavLst>
-                                        </p:anim>
-                                        <p:anim calcmode="lin" valueType="num">
-                                          <p:cBhvr>
-                                            <p:cTn id="9" dur="2000" fill="hold"/>
-                                            <p:tgtEl>
-                                              <p:spTgt spid="2"/>
-                                            </p:tgtEl>
-                                            <p:attrNameLst>
-                                              <p:attrName>ppt_h</p:attrName>
-                                            </p:attrNameLst>
-                                          </p:cBhvr>
-                                          <p:tavLst>
-                                            <p:tav tm="0">
-                                              <p:val>
-                                                <p:strVal val="#ppt_h"/>
-                                              </p:val>
-                                            </p:tav>
-                                            <p:tav tm="100000">
-                                              <p:val>
-                                                <p:strVal val="#ppt_h"/>
-                                              </p:val>
-                                            </p:tav>
-                                          </p:tavLst>
-                                        </p:anim>
-                                      </p:childTnLst>
-                                    </p:cTn>
-                                  </p:par>
-                                </p:childTnLst>
-                              </p:cTn>
-                            </p:par>
-                            <p:par>
-                              <p:cTn id="10" fill="hold">
-                                <p:stCondLst>
-                                  <p:cond delay="2000"/>
-                                </p:stCondLst>
-                                <p:childTnLst>
-                                  <p:par>
-                                    <p:cTn id="11" presetID="2" presetClass="entr" presetSubtype="2" fill="hold" grpId="0" nodeType="afterEffect">
-                                      <p:stCondLst>
-                                        <p:cond delay="0"/>
-                                      </p:stCondLst>
-                                      <p:childTnLst>
-                                        <p:set>
-                                          <p:cBhvr>
-                                            <p:cTn id="12" dur="1" fill="hold">
-                                              <p:stCondLst>
-                                                <p:cond delay="0"/>
-                                              </p:stCondLst>
-                                            </p:cTn>
-                                            <p:tgtEl>
-                                              <p:spTgt spid="8"/>
-                                            </p:tgtEl>
-                                            <p:attrNameLst>
-                                              <p:attrName>style.visibility</p:attrName>
-                                            </p:attrNameLst>
-                                          </p:cBhvr>
-                                          <p:to>
-                                            <p:strVal val="visible"/>
-                                          </p:to>
-                                        </p:set>
-                                        <p:anim calcmode="lin" valueType="num">
-                                          <p:cBhvr additive="base">
-                                            <p:cTn id="13" dur="1500" fill="hold"/>
-                                            <p:tgtEl>
-                                              <p:spTgt spid="8"/>
-                                            </p:tgtEl>
-                                            <p:attrNameLst>
-                                              <p:attrName>ppt_x</p:attrName>
-                                            </p:attrNameLst>
-                                          </p:cBhvr>
-                                          <p:tavLst>
-                                            <p:tav tm="0">
-                                              <p:val>
-                                                <p:strVal val="1+#ppt_w/2"/>
-                                              </p:val>
-                                            </p:tav>
-                                            <p:tav tm="100000">
-                                              <p:val>
-                                                <p:strVal val="#ppt_x"/>
-                                              </p:val>
-                                            </p:tav>
-                                          </p:tavLst>
-                                        </p:anim>
-                                        <p:anim calcmode="lin" valueType="num">
-                                          <p:cBhvr additive="base">
-                                            <p:cTn id="14" dur="1500" fill="hold"/>
-                                            <p:tgtEl>
-                                              <p:spTgt spid="8"/>
-                                            </p:tgtEl>
-                                            <p:attrNameLst>
-                                              <p:attrName>ppt_y</p:attrName>
-                                            </p:attrNameLst>
-                                          </p:cBhvr>
-                                          <p:tavLst>
-                                            <p:tav tm="0">
-                                              <p:val>
-                                                <p:strVal val="#ppt_y"/>
-                                              </p:val>
-                                            </p:tav>
-                                            <p:tav tm="100000">
-                                              <p:val>
-                                                <p:strVal val="#ppt_y"/>
-                                              </p:val>
-                                            </p:tav>
-                                          </p:tavLst>
-                                        </p:anim>
-                                      </p:childTnLst>
-                                    </p:cTn>
-                                  </p:par>
-                                  <p:par>
-                                    <p:cTn id="15" presetID="2" presetClass="entr" presetSubtype="8" fill="hold" grpId="0" nodeType="withEffect">
-                                      <p:stCondLst>
-                                        <p:cond delay="0"/>
-                                      </p:stCondLst>
-                                      <p:childTnLst>
-                                        <p:set>
-                                          <p:cBhvr>
-                                            <p:cTn id="16" dur="1" fill="hold">
-                                              <p:stCondLst>
-                                                <p:cond delay="0"/>
-                                              </p:stCondLst>
-                                            </p:cTn>
-                                            <p:tgtEl>
-                                              <p:spTgt spid="10"/>
-                                            </p:tgtEl>
-                                            <p:attrNameLst>
-                                              <p:attrName>style.visibility</p:attrName>
-                                            </p:attrNameLst>
-                                          </p:cBhvr>
-                                          <p:to>
-                                            <p:strVal val="visible"/>
-                                          </p:to>
-                                        </p:set>
-                                        <p:anim calcmode="lin" valueType="num">
-                                          <p:cBhvr additive="base">
-                                            <p:cTn id="17" dur="1500" fill="hold"/>
-                                            <p:tgtEl>
-                                              <p:spTgt spid="10"/>
-                                            </p:tgtEl>
-                                            <p:attrNameLst>
-                                              <p:attrName>ppt_x</p:attrName>
-                                            </p:attrNameLst>
-                                          </p:cBhvr>
-                                          <p:tavLst>
-                                            <p:tav tm="0">
-                                              <p:val>
-                                                <p:strVal val="0-#ppt_w/2"/>
-                                              </p:val>
-                                            </p:tav>
-                                            <p:tav tm="100000">
-                                              <p:val>
-                                                <p:strVal val="#ppt_x"/>
-                                              </p:val>
-                                            </p:tav>
-                                          </p:tavLst>
-                                        </p:anim>
-                                        <p:anim calcmode="lin" valueType="num">
-                                          <p:cBhvr additive="base">
-                                            <p:cTn id="18" dur="1500" fill="hold"/>
-                                            <p:tgtEl>
-                                              <p:spTgt spid="10"/>
-                                            </p:tgtEl>
-                                            <p:attrNameLst>
-                                              <p:attrName>ppt_y</p:attrName>
-                                            </p:attrNameLst>
-                                          </p:cBhvr>
-                                          <p:tavLst>
-                                            <p:tav tm="0">
-                                              <p:val>
-                                                <p:strVal val="#ppt_y"/>
-                                              </p:val>
-                                            </p:tav>
-                                            <p:tav tm="100000">
-                                              <p:val>
-                                                <p:strVal val="#ppt_y"/>
-                                              </p:val>
-                                            </p:tav>
-                                          </p:tavLst>
-                                        </p:anim>
-                                      </p:childTnLst>
-                                    </p:cTn>
-                                  </p:par>
-                                </p:childTnLst>
-                              </p:cTn>
-                            </p:par>
-                            <p:par>
-                              <p:cTn id="19" fill="hold">
-                                <p:stCondLst>
-                                  <p:cond delay="3500"/>
-                                </p:stCondLst>
-                                <p:childTnLst>
-                                  <p:par>
-                                    <p:cTn id="20" presetID="10" presetClass="entr" presetSubtype="0" fill="hold" grpId="0" nodeType="afterEffect">
-                                      <p:stCondLst>
-                                        <p:cond delay="0"/>
-                                      </p:stCondLst>
-                                      <p:childTnLst>
-                                        <p:set>
-                                          <p:cBhvr>
-                                            <p:cTn id="21" dur="1" fill="hold">
-                                              <p:stCondLst>
-                                                <p:cond delay="0"/>
-                                              </p:stCondLst>
-                                            </p:cTn>
-                                            <p:tgtEl>
-                                              <p:spTgt spid="16"/>
-                                            </p:tgtEl>
-                                            <p:attrNameLst>
-                                              <p:attrName>style.visibility</p:attrName>
-                                            </p:attrNameLst>
-                                          </p:cBhvr>
-                                          <p:to>
-                                            <p:strVal val="visible"/>
-                                          </p:to>
-                                        </p:set>
-                                        <p:animEffect transition="in" filter="fade">
-                                          <p:cBhvr>
-                                            <p:cTn id="22" dur="500"/>
-                                            <p:tgtEl>
-                                              <p:spTgt spid="16"/>
-                                            </p:tgtEl>
-                                          </p:cBhvr>
-                                        </p:animEffect>
-                                      </p:childTnLst>
-                                    </p:cTn>
-                                  </p:par>
-                                </p:childTnLst>
-                              </p:cTn>
-                            </p:par>
-                            <p:par>
-                              <p:cTn id="23" fill="hold">
-                                <p:stCondLst>
-                                  <p:cond delay="4000"/>
-                                </p:stCondLst>
-                                <p:childTnLst>
-                                  <p:par>
-                                    <p:cTn id="24" presetID="10" presetClass="entr" presetSubtype="0" fill="hold" grpId="0" nodeType="afterEffect">
-                                      <p:stCondLst>
-                                        <p:cond delay="0"/>
-                                      </p:stCondLst>
-                                      <p:childTnLst>
-                                        <p:set>
-                                          <p:cBhvr>
-                                            <p:cTn id="25" dur="1" fill="hold">
-                                              <p:stCondLst>
-                                                <p:cond delay="0"/>
-                                              </p:stCondLst>
-                                            </p:cTn>
-                                            <p:tgtEl>
-                                              <p:spTgt spid="17"/>
-                                            </p:tgtEl>
-                                            <p:attrNameLst>
-                                              <p:attrName>style.visibility</p:attrName>
-                                            </p:attrNameLst>
-                                          </p:cBhvr>
-                                          <p:to>
-                                            <p:strVal val="visible"/>
-                                          </p:to>
-                                        </p:set>
-                                        <p:animEffect transition="in" filter="fade">
-                                          <p:cBhvr>
-                                            <p:cTn id="26" dur="500"/>
-                                            <p:tgtEl>
-                                              <p:spTgt spid="17"/>
-                                            </p:tgtEl>
-                                          </p:cBhvr>
-                                        </p:animEffect>
-                                      </p:childTnLst>
-                                    </p:cTn>
-                                  </p:par>
-                                </p:childTnLst>
-                              </p:cTn>
-                            </p:par>
-                          </p:childTnLst>
-                        </p:cTn>
-                      </p:par>
-                    </p:childTnLst>
-                  </p:cTn>
-                  <p:prevCondLst>
-                    <p:cond evt="onPrev" delay="0">
-                      <p:tgtEl>
-                        <p:sldTgt/>
-                      </p:tgtEl>
-                    </p:cond>
-                  </p:prevCondLst>
-                  <p:nextCondLst>
-                    <p:cond evt="onNext" delay="0">
-                      <p:tgtEl>
-                        <p:sldTgt/>
-                      </p:tgtEl>
-                    </p:cond>
-                  </p:nextCondLst>
-                </p:seq>
-              </p:childTnLst>
-            </p:cTn>
-          </p:par>
-        </p:tnLst>
-        <p:bldLst>
-          <p:bldP spid="2" grpId="0"/>
-          <p:bldP spid="8" grpId="0"/>
-          <p:bldP spid="10" grpId="0"/>
-          <p:bldP spid="16" grpId="0"/>
-          <p:bldP spid="17" grpId="0"/>
-        </p:bldLst>
-      </p:timing>
-    </mc:Fallback>
-  </mc:AlternateContent>
+  <p:timing>
+    <p:tnLst>
+      <p:par>
+        <p:cTn id="1" dur="indefinite" restart="never" nodeType="tmRoot">
+          <p:childTnLst>
+            <p:seq concurrent="1" nextAc="seek">
+              <p:cTn id="2" dur="indefinite" nodeType="mainSeq">
+                <p:childTnLst>
+                  <p:par>
+                    <p:cTn id="3" fill="hold">
+                      <p:stCondLst>
+                        <p:cond delay="indefinite"/>
+                      </p:stCondLst>
+                      <p:childTnLst>
+                        <p:par>
+                          <p:cTn id="4" fill="hold">
+                            <p:stCondLst>
+                              <p:cond delay="0"/>
+                            </p:stCondLst>
+                            <p:childTnLst>
+                              <p:par>
+                                <p:cTn id="5" presetID="2" presetClass="entr" presetSubtype="4" fill="hold" grpId="0" nodeType="clickEffect">
+                                  <p:stCondLst>
+                                    <p:cond delay="0"/>
+                                  </p:stCondLst>
+                                  <p:childTnLst>
+                                    <p:set>
+                                      <p:cBhvr>
+                                        <p:cTn id="6" dur="1" fill="hold">
+                                          <p:stCondLst>
+                                            <p:cond delay="0"/>
+                                          </p:stCondLst>
+                                        </p:cTn>
+                                        <p:tgtEl>
+                                          <p:spTgt spid="10"/>
+                                        </p:tgtEl>
+                                        <p:attrNameLst>
+                                          <p:attrName>style.visibility</p:attrName>
+                                        </p:attrNameLst>
+                                      </p:cBhvr>
+                                      <p:to>
+                                        <p:strVal val="visible"/>
+                                      </p:to>
+                                    </p:set>
+                                    <p:anim calcmode="lin" valueType="num">
+                                      <p:cBhvr additive="base">
+                                        <p:cTn id="7" dur="500" fill="hold"/>
+                                        <p:tgtEl>
+                                          <p:spTgt spid="10"/>
+                                        </p:tgtEl>
+                                        <p:attrNameLst>
+                                          <p:attrName>ppt_x</p:attrName>
+                                        </p:attrNameLst>
+                                      </p:cBhvr>
+                                      <p:tavLst>
+                                        <p:tav tm="0">
+                                          <p:val>
+                                            <p:strVal val="#ppt_x"/>
+                                          </p:val>
+                                        </p:tav>
+                                        <p:tav tm="100000">
+                                          <p:val>
+                                            <p:strVal val="#ppt_x"/>
+                                          </p:val>
+                                        </p:tav>
+                                      </p:tavLst>
+                                    </p:anim>
+                                    <p:anim calcmode="lin" valueType="num">
+                                      <p:cBhvr additive="base">
+                                        <p:cTn id="8" dur="500" fill="hold"/>
+                                        <p:tgtEl>
+                                          <p:spTgt spid="10"/>
+                                        </p:tgtEl>
+                                        <p:attrNameLst>
+                                          <p:attrName>ppt_y</p:attrName>
+                                        </p:attrNameLst>
+                                      </p:cBhvr>
+                                      <p:tavLst>
+                                        <p:tav tm="0">
+                                          <p:val>
+                                            <p:strVal val="1+#ppt_h/2"/>
+                                          </p:val>
+                                        </p:tav>
+                                        <p:tav tm="100000">
+                                          <p:val>
+                                            <p:strVal val="#ppt_y"/>
+                                          </p:val>
+                                        </p:tav>
+                                      </p:tavLst>
+                                    </p:anim>
+                                  </p:childTnLst>
+                                </p:cTn>
+                              </p:par>
+                            </p:childTnLst>
+                          </p:cTn>
+                        </p:par>
+                      </p:childTnLst>
+                    </p:cTn>
+                  </p:par>
+                  <p:par>
+                    <p:cTn id="9" fill="hold">
+                      <p:stCondLst>
+                        <p:cond delay="indefinite"/>
+                      </p:stCondLst>
+                      <p:childTnLst>
+                        <p:par>
+                          <p:cTn id="10" fill="hold">
+                            <p:stCondLst>
+                              <p:cond delay="0"/>
+                            </p:stCondLst>
+                            <p:childTnLst>
+                              <p:par>
+                                <p:cTn id="11" presetID="2" presetClass="entr" presetSubtype="4" fill="hold" grpId="0" nodeType="clickEffect">
+                                  <p:stCondLst>
+                                    <p:cond delay="0"/>
+                                  </p:stCondLst>
+                                  <p:childTnLst>
+                                    <p:set>
+                                      <p:cBhvr>
+                                        <p:cTn id="12" dur="1" fill="hold">
+                                          <p:stCondLst>
+                                            <p:cond delay="0"/>
+                                          </p:stCondLst>
+                                        </p:cTn>
+                                        <p:tgtEl>
+                                          <p:spTgt spid="8"/>
+                                        </p:tgtEl>
+                                        <p:attrNameLst>
+                                          <p:attrName>style.visibility</p:attrName>
+                                        </p:attrNameLst>
+                                      </p:cBhvr>
+                                      <p:to>
+                                        <p:strVal val="visible"/>
+                                      </p:to>
+                                    </p:set>
+                                    <p:anim calcmode="lin" valueType="num">
+                                      <p:cBhvr additive="base">
+                                        <p:cTn id="13" dur="500" fill="hold"/>
+                                        <p:tgtEl>
+                                          <p:spTgt spid="8"/>
+                                        </p:tgtEl>
+                                        <p:attrNameLst>
+                                          <p:attrName>ppt_x</p:attrName>
+                                        </p:attrNameLst>
+                                      </p:cBhvr>
+                                      <p:tavLst>
+                                        <p:tav tm="0">
+                                          <p:val>
+                                            <p:strVal val="#ppt_x"/>
+                                          </p:val>
+                                        </p:tav>
+                                        <p:tav tm="100000">
+                                          <p:val>
+                                            <p:strVal val="#ppt_x"/>
+                                          </p:val>
+                                        </p:tav>
+                                      </p:tavLst>
+                                    </p:anim>
+                                    <p:anim calcmode="lin" valueType="num">
+                                      <p:cBhvr additive="base">
+                                        <p:cTn id="14" dur="500" fill="hold"/>
+                                        <p:tgtEl>
+                                          <p:spTgt spid="8"/>
+                                        </p:tgtEl>
+                                        <p:attrNameLst>
+                                          <p:attrName>ppt_y</p:attrName>
+                                        </p:attrNameLst>
+                                      </p:cBhvr>
+                                      <p:tavLst>
+                                        <p:tav tm="0">
+                                          <p:val>
+                                            <p:strVal val="1+#ppt_h/2"/>
+                                          </p:val>
+                                        </p:tav>
+                                        <p:tav tm="100000">
+                                          <p:val>
+                                            <p:strVal val="#ppt_y"/>
+                                          </p:val>
+                                        </p:tav>
+                                      </p:tavLst>
+                                    </p:anim>
+                                  </p:childTnLst>
+                                </p:cTn>
+                              </p:par>
+                            </p:childTnLst>
+                          </p:cTn>
+                        </p:par>
+                      </p:childTnLst>
+                    </p:cTn>
+                  </p:par>
+                  <p:par>
+                    <p:cTn id="15" fill="hold">
+                      <p:stCondLst>
+                        <p:cond delay="indefinite"/>
+                      </p:stCondLst>
+                      <p:childTnLst>
+                        <p:par>
+                          <p:cTn id="16" fill="hold">
+                            <p:stCondLst>
+                              <p:cond delay="0"/>
+                            </p:stCondLst>
+                            <p:childTnLst>
+                              <p:par>
+                                <p:cTn id="17" presetID="2" presetClass="entr" presetSubtype="4" fill="hold" grpId="0" nodeType="clickEffect">
+                                  <p:stCondLst>
+                                    <p:cond delay="0"/>
+                                  </p:stCondLst>
+                                  <p:childTnLst>
+                                    <p:set>
+                                      <p:cBhvr>
+                                        <p:cTn id="18" dur="1" fill="hold">
+                                          <p:stCondLst>
+                                            <p:cond delay="0"/>
+                                          </p:stCondLst>
+                                        </p:cTn>
+                                        <p:tgtEl>
+                                          <p:spTgt spid="16"/>
+                                        </p:tgtEl>
+                                        <p:attrNameLst>
+                                          <p:attrName>style.visibility</p:attrName>
+                                        </p:attrNameLst>
+                                      </p:cBhvr>
+                                      <p:to>
+                                        <p:strVal val="visible"/>
+                                      </p:to>
+                                    </p:set>
+                                    <p:anim calcmode="lin" valueType="num">
+                                      <p:cBhvr additive="base">
+                                        <p:cTn id="19" dur="500" fill="hold"/>
+                                        <p:tgtEl>
+                                          <p:spTgt spid="16"/>
+                                        </p:tgtEl>
+                                        <p:attrNameLst>
+                                          <p:attrName>ppt_x</p:attrName>
+                                        </p:attrNameLst>
+                                      </p:cBhvr>
+                                      <p:tavLst>
+                                        <p:tav tm="0">
+                                          <p:val>
+                                            <p:strVal val="#ppt_x"/>
+                                          </p:val>
+                                        </p:tav>
+                                        <p:tav tm="100000">
+                                          <p:val>
+                                            <p:strVal val="#ppt_x"/>
+                                          </p:val>
+                                        </p:tav>
+                                      </p:tavLst>
+                                    </p:anim>
+                                    <p:anim calcmode="lin" valueType="num">
+                                      <p:cBhvr additive="base">
+                                        <p:cTn id="20" dur="500" fill="hold"/>
+                                        <p:tgtEl>
+                                          <p:spTgt spid="16"/>
+                                        </p:tgtEl>
+                                        <p:attrNameLst>
+                                          <p:attrName>ppt_y</p:attrName>
+                                        </p:attrNameLst>
+                                      </p:cBhvr>
+                                      <p:tavLst>
+                                        <p:tav tm="0">
+                                          <p:val>
+                                            <p:strVal val="1+#ppt_h/2"/>
+                                          </p:val>
+                                        </p:tav>
+                                        <p:tav tm="100000">
+                                          <p:val>
+                                            <p:strVal val="#ppt_y"/>
+                                          </p:val>
+                                        </p:tav>
+                                      </p:tavLst>
+                                    </p:anim>
+                                  </p:childTnLst>
+                                </p:cTn>
+                              </p:par>
+                            </p:childTnLst>
+                          </p:cTn>
+                        </p:par>
+                      </p:childTnLst>
+                    </p:cTn>
+                  </p:par>
+                  <p:par>
+                    <p:cTn id="21" fill="hold">
+                      <p:stCondLst>
+                        <p:cond delay="indefinite"/>
+                      </p:stCondLst>
+                      <p:childTnLst>
+                        <p:par>
+                          <p:cTn id="22" fill="hold">
+                            <p:stCondLst>
+                              <p:cond delay="0"/>
+                            </p:stCondLst>
+                            <p:childTnLst>
+                              <p:par>
+                                <p:cTn id="23" presetID="2" presetClass="entr" presetSubtype="4" fill="hold" grpId="0" nodeType="clickEffect">
+                                  <p:stCondLst>
+                                    <p:cond delay="0"/>
+                                  </p:stCondLst>
+                                  <p:childTnLst>
+                                    <p:set>
+                                      <p:cBhvr>
+                                        <p:cTn id="24" dur="1" fill="hold">
+                                          <p:stCondLst>
+                                            <p:cond delay="0"/>
+                                          </p:stCondLst>
+                                        </p:cTn>
+                                        <p:tgtEl>
+                                          <p:spTgt spid="17"/>
+                                        </p:tgtEl>
+                                        <p:attrNameLst>
+                                          <p:attrName>style.visibility</p:attrName>
+                                        </p:attrNameLst>
+                                      </p:cBhvr>
+                                      <p:to>
+                                        <p:strVal val="visible"/>
+                                      </p:to>
+                                    </p:set>
+                                    <p:anim calcmode="lin" valueType="num">
+                                      <p:cBhvr additive="base">
+                                        <p:cTn id="25" dur="500" fill="hold"/>
+                                        <p:tgtEl>
+                                          <p:spTgt spid="17"/>
+                                        </p:tgtEl>
+                                        <p:attrNameLst>
+                                          <p:attrName>ppt_x</p:attrName>
+                                        </p:attrNameLst>
+                                      </p:cBhvr>
+                                      <p:tavLst>
+                                        <p:tav tm="0">
+                                          <p:val>
+                                            <p:strVal val="#ppt_x"/>
+                                          </p:val>
+                                        </p:tav>
+                                        <p:tav tm="100000">
+                                          <p:val>
+                                            <p:strVal val="#ppt_x"/>
+                                          </p:val>
+                                        </p:tav>
+                                      </p:tavLst>
+                                    </p:anim>
+                                    <p:anim calcmode="lin" valueType="num">
+                                      <p:cBhvr additive="base">
+                                        <p:cTn id="26" dur="500" fill="hold"/>
+                                        <p:tgtEl>
+                                          <p:spTgt spid="17"/>
+                                        </p:tgtEl>
+                                        <p:attrNameLst>
+                                          <p:attrName>ppt_y</p:attrName>
+                                        </p:attrNameLst>
+                                      </p:cBhvr>
+                                      <p:tavLst>
+                                        <p:tav tm="0">
+                                          <p:val>
+                                            <p:strVal val="1+#ppt_h/2"/>
+                                          </p:val>
+                                        </p:tav>
+                                        <p:tav tm="100000">
+                                          <p:val>
+                                            <p:strVal val="#ppt_y"/>
+                                          </p:val>
+                                        </p:tav>
+                                      </p:tavLst>
+                                    </p:anim>
+                                  </p:childTnLst>
+                                </p:cTn>
+                              </p:par>
+                            </p:childTnLst>
+                          </p:cTn>
+                        </p:par>
+                      </p:childTnLst>
+                    </p:cTn>
+                  </p:par>
+                </p:childTnLst>
+              </p:cTn>
+              <p:prevCondLst>
+                <p:cond evt="onPrev" delay="0">
+                  <p:tgtEl>
+                    <p:sldTgt/>
+                  </p:tgtEl>
+                </p:cond>
+              </p:prevCondLst>
+              <p:nextCondLst>
+                <p:cond evt="onNext" delay="0">
+                  <p:tgtEl>
+                    <p:sldTgt/>
+                  </p:tgtEl>
+                </p:cond>
+              </p:nextCondLst>
+            </p:seq>
+          </p:childTnLst>
+        </p:cTn>
+      </p:par>
+    </p:tnLst>
+    <p:bldLst>
+      <p:bldP spid="8" grpId="0"/>
+      <p:bldP spid="10" grpId="0"/>
+      <p:bldP spid="16" grpId="0"/>
+      <p:bldP spid="17" grpId="0"/>
+    </p:bldLst>
+  </p:timing>
 </p:sld>
 </file>
 

--- a/Current Presentation/Spring 2026.pptx
+++ b/Current Presentation/Spring 2026.pptx
@@ -4189,7 +4189,7 @@
                             </p:stCondLst>
                             <p:childTnLst>
                               <p:par>
-                                <p:cTn id="5" presetID="2" presetClass="entr" presetSubtype="4" fill="hold" grpId="0" nodeType="clickEffect">
+                                <p:cTn id="5" presetID="2" presetClass="entr" presetSubtype="8" fill="hold" grpId="0" nodeType="clickEffect">
                                   <p:stCondLst>
                                     <p:cond delay="0"/>
                                   </p:stCondLst>
@@ -4214,7 +4214,7 @@
                                     </p:set>
                                     <p:anim calcmode="lin" valueType="num">
                                       <p:cBhvr additive="base">
-                                        <p:cTn id="7" dur="500" fill="hold"/>
+                                        <p:cTn id="7" dur="1500" fill="hold"/>
                                         <p:tgtEl>
                                           <p:spTgt spid="10"/>
                                         </p:tgtEl>
@@ -4225,7 +4225,7 @@
                                       <p:tavLst>
                                         <p:tav tm="0">
                                           <p:val>
-                                            <p:strVal val="#ppt_x"/>
+                                            <p:strVal val="0-#ppt_w/2"/>
                                           </p:val>
                                         </p:tav>
                                         <p:tav tm="100000">
@@ -4237,7 +4237,7 @@
                                     </p:anim>
                                     <p:anim calcmode="lin" valueType="num">
                                       <p:cBhvr additive="base">
-                                        <p:cTn id="8" dur="500" fill="hold"/>
+                                        <p:cTn id="8" dur="1500" fill="hold"/>
                                         <p:tgtEl>
                                           <p:spTgt spid="10"/>
                                         </p:tgtEl>
@@ -4248,7 +4248,7 @@
                                       <p:tavLst>
                                         <p:tav tm="0">
                                           <p:val>
-                                            <p:strVal val="1+#ppt_h/2"/>
+                                            <p:strVal val="#ppt_y"/>
                                           </p:val>
                                         </p:tav>
                                         <p:tav tm="100000">
@@ -4261,33 +4261,15 @@
                                   </p:childTnLst>
                                 </p:cTn>
                               </p:par>
-                            </p:childTnLst>
-                          </p:cTn>
-                        </p:par>
-                      </p:childTnLst>
-                    </p:cTn>
-                  </p:par>
-                  <p:par>
-                    <p:cTn id="9" fill="hold">
-                      <p:stCondLst>
-                        <p:cond delay="indefinite"/>
-                      </p:stCondLst>
-                      <p:childTnLst>
-                        <p:par>
-                          <p:cTn id="10" fill="hold">
-                            <p:stCondLst>
-                              <p:cond delay="0"/>
-                            </p:stCondLst>
-                            <p:childTnLst>
                               <p:par>
-                                <p:cTn id="11" presetID="2" presetClass="entr" presetSubtype="4" fill="hold" grpId="0" nodeType="clickEffect">
+                                <p:cTn id="9" presetID="2" presetClass="entr" presetSubtype="2" fill="hold" grpId="0" nodeType="withEffect">
                                   <p:stCondLst>
                                     <p:cond delay="0"/>
                                   </p:stCondLst>
                                   <p:childTnLst>
                                     <p:set>
                                       <p:cBhvr>
-                                        <p:cTn id="12" dur="1" fill="hold">
+                                        <p:cTn id="10" dur="1" fill="hold">
                                           <p:stCondLst>
                                             <p:cond delay="0"/>
                                           </p:stCondLst>
@@ -4305,7 +4287,7 @@
                                     </p:set>
                                     <p:anim calcmode="lin" valueType="num">
                                       <p:cBhvr additive="base">
-                                        <p:cTn id="13" dur="500" fill="hold"/>
+                                        <p:cTn id="11" dur="1500" fill="hold"/>
                                         <p:tgtEl>
                                           <p:spTgt spid="8"/>
                                         </p:tgtEl>
@@ -4316,7 +4298,7 @@
                                       <p:tavLst>
                                         <p:tav tm="0">
                                           <p:val>
-                                            <p:strVal val="#ppt_x"/>
+                                            <p:strVal val="1+#ppt_w/2"/>
                                           </p:val>
                                         </p:tav>
                                         <p:tav tm="100000">
@@ -4328,7 +4310,7 @@
                                     </p:anim>
                                     <p:anim calcmode="lin" valueType="num">
                                       <p:cBhvr additive="base">
-                                        <p:cTn id="14" dur="500" fill="hold"/>
+                                        <p:cTn id="12" dur="1500" fill="hold"/>
                                         <p:tgtEl>
                                           <p:spTgt spid="8"/>
                                         </p:tgtEl>
@@ -4339,7 +4321,7 @@
                                       <p:tavLst>
                                         <p:tav tm="0">
                                           <p:val>
-                                            <p:strVal val="1+#ppt_h/2"/>
+                                            <p:strVal val="#ppt_y"/>
                                           </p:val>
                                         </p:tav>
                                         <p:tav tm="100000">
@@ -4352,33 +4334,15 @@
                                   </p:childTnLst>
                                 </p:cTn>
                               </p:par>
-                            </p:childTnLst>
-                          </p:cTn>
-                        </p:par>
-                      </p:childTnLst>
-                    </p:cTn>
-                  </p:par>
-                  <p:par>
-                    <p:cTn id="15" fill="hold">
-                      <p:stCondLst>
-                        <p:cond delay="indefinite"/>
-                      </p:stCondLst>
-                      <p:childTnLst>
-                        <p:par>
-                          <p:cTn id="16" fill="hold">
-                            <p:stCondLst>
-                              <p:cond delay="0"/>
-                            </p:stCondLst>
-                            <p:childTnLst>
                               <p:par>
-                                <p:cTn id="17" presetID="2" presetClass="entr" presetSubtype="4" fill="hold" grpId="0" nodeType="clickEffect">
+                                <p:cTn id="13" presetID="2" presetClass="entr" presetSubtype="6" fill="hold" grpId="0" nodeType="withEffect">
                                   <p:stCondLst>
                                     <p:cond delay="0"/>
                                   </p:stCondLst>
                                   <p:childTnLst>
                                     <p:set>
                                       <p:cBhvr>
-                                        <p:cTn id="18" dur="1" fill="hold">
+                                        <p:cTn id="14" dur="1" fill="hold">
                                           <p:stCondLst>
                                             <p:cond delay="0"/>
                                           </p:stCondLst>
@@ -4396,7 +4360,7 @@
                                     </p:set>
                                     <p:anim calcmode="lin" valueType="num">
                                       <p:cBhvr additive="base">
-                                        <p:cTn id="19" dur="500" fill="hold"/>
+                                        <p:cTn id="15" dur="1500" fill="hold"/>
                                         <p:tgtEl>
                                           <p:spTgt spid="16"/>
                                         </p:tgtEl>
@@ -4407,7 +4371,7 @@
                                       <p:tavLst>
                                         <p:tav tm="0">
                                           <p:val>
-                                            <p:strVal val="#ppt_x"/>
+                                            <p:strVal val="1+#ppt_w/2"/>
                                           </p:val>
                                         </p:tav>
                                         <p:tav tm="100000">
@@ -4419,7 +4383,7 @@
                                     </p:anim>
                                     <p:anim calcmode="lin" valueType="num">
                                       <p:cBhvr additive="base">
-                                        <p:cTn id="20" dur="500" fill="hold"/>
+                                        <p:cTn id="16" dur="1500" fill="hold"/>
                                         <p:tgtEl>
                                           <p:spTgt spid="16"/>
                                         </p:tgtEl>
@@ -4443,33 +4407,15 @@
                                   </p:childTnLst>
                                 </p:cTn>
                               </p:par>
-                            </p:childTnLst>
-                          </p:cTn>
-                        </p:par>
-                      </p:childTnLst>
-                    </p:cTn>
-                  </p:par>
-                  <p:par>
-                    <p:cTn id="21" fill="hold">
-                      <p:stCondLst>
-                        <p:cond delay="indefinite"/>
-                      </p:stCondLst>
-                      <p:childTnLst>
-                        <p:par>
-                          <p:cTn id="22" fill="hold">
-                            <p:stCondLst>
-                              <p:cond delay="0"/>
-                            </p:stCondLst>
-                            <p:childTnLst>
                               <p:par>
-                                <p:cTn id="23" presetID="2" presetClass="entr" presetSubtype="4" fill="hold" grpId="0" nodeType="clickEffect">
+                                <p:cTn id="17" presetID="2" presetClass="entr" presetSubtype="12" fill="hold" grpId="0" nodeType="withEffect">
                                   <p:stCondLst>
                                     <p:cond delay="0"/>
                                   </p:stCondLst>
                                   <p:childTnLst>
                                     <p:set>
                                       <p:cBhvr>
-                                        <p:cTn id="24" dur="1" fill="hold">
+                                        <p:cTn id="18" dur="1" fill="hold">
                                           <p:stCondLst>
                                             <p:cond delay="0"/>
                                           </p:stCondLst>
@@ -4487,7 +4433,7 @@
                                     </p:set>
                                     <p:anim calcmode="lin" valueType="num">
                                       <p:cBhvr additive="base">
-                                        <p:cTn id="25" dur="500" fill="hold"/>
+                                        <p:cTn id="19" dur="1500" fill="hold"/>
                                         <p:tgtEl>
                                           <p:spTgt spid="17"/>
                                         </p:tgtEl>
@@ -4498,7 +4444,7 @@
                                       <p:tavLst>
                                         <p:tav tm="0">
                                           <p:val>
-                                            <p:strVal val="#ppt_x"/>
+                                            <p:strVal val="0-#ppt_w/2"/>
                                           </p:val>
                                         </p:tav>
                                         <p:tav tm="100000">
@@ -4510,7 +4456,7 @@
                                     </p:anim>
                                     <p:anim calcmode="lin" valueType="num">
                                       <p:cBhvr additive="base">
-                                        <p:cTn id="26" dur="500" fill="hold"/>
+                                        <p:cTn id="20" dur="1500" fill="hold"/>
                                         <p:tgtEl>
                                           <p:spTgt spid="17"/>
                                         </p:tgtEl>

--- a/Current Presentation/Spring 2026.pptx
+++ b/Current Presentation/Spring 2026.pptx
@@ -5,7 +5,7 @@
     <p:sldMasterId id="2147483648" r:id="rId1"/>
   </p:sldMasterIdLst>
   <p:sldIdLst>
-    <p:sldId id="258" r:id="rId2"/>
+    <p:sldId id="260" r:id="rId2"/>
   </p:sldIdLst>
   <p:sldSz cx="12192000" cy="6858000"/>
   <p:notesSz cx="6858000" cy="9144000"/>
@@ -3312,7 +3312,7 @@
         <p:cNvPr id="1" name="">
           <a:extLst>
             <a:ext uri="{FF2B5EF4-FFF2-40B4-BE49-F238E27FC236}">
-              <a16:creationId xmlns:a16="http://schemas.microsoft.com/office/drawing/2014/main" id="{F1B5EE29-CF6D-1F24-51CD-22D1EF7DCABA}"/>
+              <a16:creationId xmlns:a16="http://schemas.microsoft.com/office/drawing/2014/main" id="{98071FAF-C6B0-38AC-9F95-1D6B0F02C122}"/>
             </a:ext>
           </a:extLst>
         </p:cNvPr>
@@ -3332,7 +3332,7 @@
           <p:cNvPr id="2" name="Title 1">
             <a:extLst>
               <a:ext uri="{FF2B5EF4-FFF2-40B4-BE49-F238E27FC236}">
-                <a16:creationId xmlns:a16="http://schemas.microsoft.com/office/drawing/2014/main" id="{1ECF2163-017D-0FC9-7D20-134A97BDD531}"/>
+                <a16:creationId xmlns:a16="http://schemas.microsoft.com/office/drawing/2014/main" id="{4BE67BC7-8656-F7ED-1039-66F678C88F45}"/>
               </a:ext>
             </a:extLst>
           </p:cNvPr>
@@ -3343,9 +3343,16 @@
             <p:ph type="ctrTitle"/>
           </p:nvPr>
         </p:nvSpPr>
-        <p:spPr/>
-        <p:txBody>
-          <a:bodyPr/>
+        <p:spPr>
+          <a:xfrm>
+            <a:off x="1524000" y="1771649"/>
+            <a:ext cx="9144000" cy="1738313"/>
+          </a:xfrm>
+        </p:spPr>
+        <p:txBody>
+          <a:bodyPr>
+            <a:normAutofit fontScale="90000"/>
+          </a:bodyPr>
           <a:lstStyle/>
           <a:p>
             <a:r>
@@ -3367,7 +3374,7 @@
           <p:cNvPr id="8" name="Subtitle 2">
             <a:extLst>
               <a:ext uri="{FF2B5EF4-FFF2-40B4-BE49-F238E27FC236}">
-                <a16:creationId xmlns:a16="http://schemas.microsoft.com/office/drawing/2014/main" id="{F1288192-E533-C186-5A7C-EB90D432B7CF}"/>
+                <a16:creationId xmlns:a16="http://schemas.microsoft.com/office/drawing/2014/main" id="{3A43815D-8181-84B3-7647-DDD66602B421}"/>
               </a:ext>
             </a:extLst>
           </p:cNvPr>
@@ -3566,7 +3573,7 @@
           <p:cNvPr id="10" name="Subtitle 2">
             <a:extLst>
               <a:ext uri="{FF2B5EF4-FFF2-40B4-BE49-F238E27FC236}">
-                <a16:creationId xmlns:a16="http://schemas.microsoft.com/office/drawing/2014/main" id="{B0DE85A5-109D-BC81-55A4-F638BBA82280}"/>
+                <a16:creationId xmlns:a16="http://schemas.microsoft.com/office/drawing/2014/main" id="{4AA1E5B6-F66B-5C77-EE50-BF9E9417468A}"/>
               </a:ext>
             </a:extLst>
           </p:cNvPr>
@@ -3765,7 +3772,7 @@
           <p:cNvPr id="16" name="Subtitle 2">
             <a:extLst>
               <a:ext uri="{FF2B5EF4-FFF2-40B4-BE49-F238E27FC236}">
-                <a16:creationId xmlns:a16="http://schemas.microsoft.com/office/drawing/2014/main" id="{515353C8-C457-02E1-AC35-11BDA6D25E72}"/>
+                <a16:creationId xmlns:a16="http://schemas.microsoft.com/office/drawing/2014/main" id="{80C038D9-E5C4-4AAC-F408-A2AC791A02D6}"/>
               </a:ext>
             </a:extLst>
           </p:cNvPr>
@@ -3964,7 +3971,7 @@
           <p:cNvPr id="17" name="Subtitle 2">
             <a:extLst>
               <a:ext uri="{FF2B5EF4-FFF2-40B4-BE49-F238E27FC236}">
-                <a16:creationId xmlns:a16="http://schemas.microsoft.com/office/drawing/2014/main" id="{71C0F234-080A-2895-B649-BFD3BE648757}"/>
+                <a16:creationId xmlns:a16="http://schemas.microsoft.com/office/drawing/2014/main" id="{D77FA4EE-35F5-0F5A-3208-8DFF3CE03759}"/>
               </a:ext>
             </a:extLst>
           </p:cNvPr>
@@ -4161,13 +4168,25 @@
     </p:spTree>
     <p:extLst>
       <p:ext uri="{BB962C8B-B14F-4D97-AF65-F5344CB8AC3E}">
-        <p14:creationId xmlns:p14="http://schemas.microsoft.com/office/powerpoint/2010/main" val="2630662124"/>
+        <p14:creationId xmlns:p14="http://schemas.microsoft.com/office/powerpoint/2010/main" val="3373281182"/>
       </p:ext>
     </p:extLst>
   </p:cSld>
   <p:clrMapOvr>
     <a:masterClrMapping/>
   </p:clrMapOvr>
+  <mc:AlternateContent xmlns:mc="http://schemas.openxmlformats.org/markup-compatibility/2006">
+    <mc:Choice xmlns:p15="http://schemas.microsoft.com/office/powerpoint/2012/main" Requires="p15">
+      <p:transition xmlns:p14="http://schemas.microsoft.com/office/powerpoint/2010/main" spd="slow" p14:dur="6000">
+        <p15:prstTrans prst="curtains"/>
+      </p:transition>
+    </mc:Choice>
+    <mc:Fallback>
+      <p:transition spd="slow">
+        <p:fade/>
+      </p:transition>
+    </mc:Fallback>
+  </mc:AlternateContent>
   <p:timing>
     <p:tnLst>
       <p:par>

--- a/Current Presentation/Spring 2026.pptx
+++ b/Current Presentation/Spring 2026.pptx
@@ -104,6 +104,11 @@
       </a:defRPr>
     </a:lvl9pPr>
   </p:defaultTextStyle>
+  <p:extLst>
+    <p:ext uri="{EFAFB233-063F-42B5-8137-9DF3F51BA10A}">
+      <p15:sldGuideLst xmlns:p15="http://schemas.microsoft.com/office/powerpoint/2012/main"/>
+    </p:ext>
+  </p:extLst>
 </p:presentation>
 </file>
 
@@ -254,7 +259,7 @@
           <a:p>
             <a:fld id="{3001F3D3-B64E-45E5-A774-FFEE7077F3D9}" type="datetimeFigureOut">
               <a:rPr lang="en-US" smtClean="0"/>
-              <a:t>6/10/2026</a:t>
+              <a:t>6/15/2026</a:t>
             </a:fld>
             <a:endParaRPr lang="en-US"/>
           </a:p>
@@ -452,7 +457,7 @@
           <a:p>
             <a:fld id="{3001F3D3-B64E-45E5-A774-FFEE7077F3D9}" type="datetimeFigureOut">
               <a:rPr lang="en-US" smtClean="0"/>
-              <a:t>6/10/2026</a:t>
+              <a:t>6/15/2026</a:t>
             </a:fld>
             <a:endParaRPr lang="en-US"/>
           </a:p>
@@ -660,7 +665,7 @@
           <a:p>
             <a:fld id="{3001F3D3-B64E-45E5-A774-FFEE7077F3D9}" type="datetimeFigureOut">
               <a:rPr lang="en-US" smtClean="0"/>
-              <a:t>6/10/2026</a:t>
+              <a:t>6/15/2026</a:t>
             </a:fld>
             <a:endParaRPr lang="en-US"/>
           </a:p>
@@ -858,7 +863,7 @@
           <a:p>
             <a:fld id="{3001F3D3-B64E-45E5-A774-FFEE7077F3D9}" type="datetimeFigureOut">
               <a:rPr lang="en-US" smtClean="0"/>
-              <a:t>6/10/2026</a:t>
+              <a:t>6/15/2026</a:t>
             </a:fld>
             <a:endParaRPr lang="en-US"/>
           </a:p>
@@ -1133,7 +1138,7 @@
           <a:p>
             <a:fld id="{3001F3D3-B64E-45E5-A774-FFEE7077F3D9}" type="datetimeFigureOut">
               <a:rPr lang="en-US" smtClean="0"/>
-              <a:t>6/10/2026</a:t>
+              <a:t>6/15/2026</a:t>
             </a:fld>
             <a:endParaRPr lang="en-US"/>
           </a:p>
@@ -1398,7 +1403,7 @@
           <a:p>
             <a:fld id="{3001F3D3-B64E-45E5-A774-FFEE7077F3D9}" type="datetimeFigureOut">
               <a:rPr lang="en-US" smtClean="0"/>
-              <a:t>6/10/2026</a:t>
+              <a:t>6/15/2026</a:t>
             </a:fld>
             <a:endParaRPr lang="en-US"/>
           </a:p>
@@ -1810,7 +1815,7 @@
           <a:p>
             <a:fld id="{3001F3D3-B64E-45E5-A774-FFEE7077F3D9}" type="datetimeFigureOut">
               <a:rPr lang="en-US" smtClean="0"/>
-              <a:t>6/10/2026</a:t>
+              <a:t>6/15/2026</a:t>
             </a:fld>
             <a:endParaRPr lang="en-US"/>
           </a:p>
@@ -1951,7 +1956,7 @@
           <a:p>
             <a:fld id="{3001F3D3-B64E-45E5-A774-FFEE7077F3D9}" type="datetimeFigureOut">
               <a:rPr lang="en-US" smtClean="0"/>
-              <a:t>6/10/2026</a:t>
+              <a:t>6/15/2026</a:t>
             </a:fld>
             <a:endParaRPr lang="en-US"/>
           </a:p>
@@ -2064,7 +2069,7 @@
           <a:p>
             <a:fld id="{3001F3D3-B64E-45E5-A774-FFEE7077F3D9}" type="datetimeFigureOut">
               <a:rPr lang="en-US" smtClean="0"/>
-              <a:t>6/10/2026</a:t>
+              <a:t>6/15/2026</a:t>
             </a:fld>
             <a:endParaRPr lang="en-US"/>
           </a:p>
@@ -2375,7 +2380,7 @@
           <a:p>
             <a:fld id="{3001F3D3-B64E-45E5-A774-FFEE7077F3D9}" type="datetimeFigureOut">
               <a:rPr lang="en-US" smtClean="0"/>
-              <a:t>6/10/2026</a:t>
+              <a:t>6/15/2026</a:t>
             </a:fld>
             <a:endParaRPr lang="en-US"/>
           </a:p>
@@ -2663,7 +2668,7 @@
           <a:p>
             <a:fld id="{3001F3D3-B64E-45E5-A774-FFEE7077F3D9}" type="datetimeFigureOut">
               <a:rPr lang="en-US" smtClean="0"/>
-              <a:t>6/10/2026</a:t>
+              <a:t>6/15/2026</a:t>
             </a:fld>
             <a:endParaRPr lang="en-US"/>
           </a:p>
@@ -2904,7 +2909,7 @@
           <a:p>
             <a:fld id="{3001F3D3-B64E-45E5-A774-FFEE7077F3D9}" type="datetimeFigureOut">
               <a:rPr lang="en-US" smtClean="0"/>
-              <a:t>6/10/2026</a:t>
+              <a:t>6/15/2026</a:t>
             </a:fld>
             <a:endParaRPr lang="en-US"/>
           </a:p>
@@ -3329,48 +3334,6 @@
       </p:grpSpPr>
       <p:sp>
         <p:nvSpPr>
-          <p:cNvPr id="2" name="Title 1">
-            <a:extLst>
-              <a:ext uri="{FF2B5EF4-FFF2-40B4-BE49-F238E27FC236}">
-                <a16:creationId xmlns:a16="http://schemas.microsoft.com/office/drawing/2014/main" id="{4BE67BC7-8656-F7ED-1039-66F678C88F45}"/>
-              </a:ext>
-            </a:extLst>
-          </p:cNvPr>
-          <p:cNvSpPr>
-            <a:spLocks noGrp="1"/>
-          </p:cNvSpPr>
-          <p:nvPr>
-            <p:ph type="ctrTitle"/>
-          </p:nvPr>
-        </p:nvSpPr>
-        <p:spPr>
-          <a:xfrm>
-            <a:off x="1524000" y="1771649"/>
-            <a:ext cx="9144000" cy="1738313"/>
-          </a:xfrm>
-        </p:spPr>
-        <p:txBody>
-          <a:bodyPr>
-            <a:normAutofit fontScale="90000"/>
-          </a:bodyPr>
-          <a:lstStyle/>
-          <a:p>
-            <a:r>
-              <a:rPr lang="en-US" dirty="0"/>
-              <a:t>Charlie’s</a:t>
-            </a:r>
-            <a:br>
-              <a:rPr lang="en-US" dirty="0"/>
-            </a:br>
-            <a:r>
-              <a:rPr lang="en-US" dirty="0"/>
-              <a:t>Spring Term Presentation</a:t>
-            </a:r>
-          </a:p>
-        </p:txBody>
-      </p:sp>
-      <p:sp>
-        <p:nvSpPr>
           <p:cNvPr id="8" name="Subtitle 2">
             <a:extLst>
               <a:ext uri="{FF2B5EF4-FFF2-40B4-BE49-F238E27FC236}">
@@ -4165,6 +4128,155 @@
           </a:p>
         </p:txBody>
       </p:sp>
+      <p:sp>
+        <p:nvSpPr>
+          <p:cNvPr id="14" name="Title 1">
+            <a:extLst>
+              <a:ext uri="{FF2B5EF4-FFF2-40B4-BE49-F238E27FC236}">
+                <a16:creationId xmlns:a16="http://schemas.microsoft.com/office/drawing/2014/main" id="{D584476D-0D57-B3A0-F621-BAD7DB6ABFE9}"/>
+              </a:ext>
+            </a:extLst>
+          </p:cNvPr>
+          <p:cNvSpPr txBox="1">
+            <a:spLocks noChangeAspect="1"/>
+          </p:cNvSpPr>
+          <p:nvPr/>
+        </p:nvSpPr>
+        <p:spPr>
+          <a:xfrm>
+            <a:off x="1272114" y="2733835"/>
+            <a:ext cx="9250396" cy="875474"/>
+          </a:xfrm>
+          <a:prstGeom prst="rect">
+            <a:avLst/>
+          </a:prstGeom>
+        </p:spPr>
+        <p:txBody>
+          <a:bodyPr vert="horz" lIns="91440" tIns="45720" rIns="91440" bIns="45720" rtlCol="0" anchor="b">
+            <a:normAutofit fontScale="97500" lnSpcReduction="10000"/>
+          </a:bodyPr>
+          <a:lstStyle>
+            <a:lvl1pPr algn="ctr" defTabSz="914400" rtl="0" eaLnBrk="1" latinLnBrk="0" hangingPunct="1">
+              <a:lnSpc>
+                <a:spcPct val="90000"/>
+              </a:lnSpc>
+              <a:spcBef>
+                <a:spcPct val="0"/>
+              </a:spcBef>
+              <a:buNone/>
+              <a:defRPr sz="6000" kern="1200">
+                <a:solidFill>
+                  <a:schemeClr val="tx1"/>
+                </a:solidFill>
+                <a:latin typeface="+mj-lt"/>
+                <a:ea typeface="+mj-ea"/>
+                <a:cs typeface="+mj-cs"/>
+              </a:defRPr>
+            </a:lvl1pPr>
+          </a:lstStyle>
+          <a:p>
+            <a:r>
+              <a:rPr lang="en-US" dirty="0"/>
+              <a:t>Spring Term Presentation:</a:t>
+            </a:r>
+          </a:p>
+        </p:txBody>
+      </p:sp>
+      <p:sp>
+        <p:nvSpPr>
+          <p:cNvPr id="20" name="Title 1">
+            <a:extLst>
+              <a:ext uri="{FF2B5EF4-FFF2-40B4-BE49-F238E27FC236}">
+                <a16:creationId xmlns:a16="http://schemas.microsoft.com/office/drawing/2014/main" id="{3123E4C2-492B-A787-60B7-EFEDD1177385}"/>
+              </a:ext>
+            </a:extLst>
+          </p:cNvPr>
+          <p:cNvSpPr txBox="1">
+            <a:spLocks noChangeAspect="1"/>
+          </p:cNvSpPr>
+          <p:nvPr/>
+        </p:nvSpPr>
+        <p:spPr>
+          <a:xfrm>
+            <a:off x="1272114" y="2734056"/>
+            <a:ext cx="9250396" cy="875474"/>
+          </a:xfrm>
+          <a:prstGeom prst="rect">
+            <a:avLst/>
+          </a:prstGeom>
+        </p:spPr>
+        <p:txBody>
+          <a:bodyPr vert="horz" lIns="91440" tIns="45720" rIns="91440" bIns="45720" rtlCol="0" anchor="b">
+            <a:normAutofit fontScale="97500" lnSpcReduction="10000"/>
+          </a:bodyPr>
+          <a:lstStyle>
+            <a:lvl1pPr algn="ctr" defTabSz="914400" rtl="0" eaLnBrk="1" latinLnBrk="0" hangingPunct="1">
+              <a:lnSpc>
+                <a:spcPct val="90000"/>
+              </a:lnSpc>
+              <a:spcBef>
+                <a:spcPct val="0"/>
+              </a:spcBef>
+              <a:buNone/>
+              <a:defRPr sz="6000" kern="1200">
+                <a:solidFill>
+                  <a:schemeClr val="tx1"/>
+                </a:solidFill>
+                <a:latin typeface="+mj-lt"/>
+                <a:ea typeface="+mj-ea"/>
+                <a:cs typeface="+mj-cs"/>
+              </a:defRPr>
+            </a:lvl1pPr>
+          </a:lstStyle>
+          <a:p>
+            <a:r>
+              <a:rPr lang="en-US" dirty="0"/>
+              <a:t>Presentation: Spring 2026</a:t>
+            </a:r>
+          </a:p>
+        </p:txBody>
+      </p:sp>
+      <p:cxnSp>
+        <p:nvCxnSpPr>
+          <p:cNvPr id="24" name="Straight Connector 23">
+            <a:extLst>
+              <a:ext uri="{FF2B5EF4-FFF2-40B4-BE49-F238E27FC236}">
+                <a16:creationId xmlns:a16="http://schemas.microsoft.com/office/drawing/2014/main" id="{DCAB94CA-1D0D-FC6F-D7C1-529F68B3DF95}"/>
+              </a:ext>
+            </a:extLst>
+          </p:cNvPr>
+          <p:cNvCxnSpPr/>
+          <p:nvPr/>
+        </p:nvCxnSpPr>
+        <p:spPr>
+          <a:xfrm>
+            <a:off x="447675" y="5724525"/>
+            <a:ext cx="0" cy="847725"/>
+          </a:xfrm>
+          <a:prstGeom prst="line">
+            <a:avLst/>
+          </a:prstGeom>
+          <a:ln>
+            <a:solidFill>
+              <a:schemeClr val="bg1"/>
+            </a:solidFill>
+          </a:ln>
+        </p:spPr>
+        <p:style>
+          <a:lnRef idx="2">
+            <a:schemeClr val="accent1"/>
+          </a:lnRef>
+          <a:fillRef idx="0">
+            <a:schemeClr val="accent1"/>
+          </a:fillRef>
+          <a:effectRef idx="1">
+            <a:schemeClr val="accent1"/>
+          </a:effectRef>
+          <a:fontRef idx="minor">
+            <a:schemeClr val="tx1"/>
+          </a:fontRef>
+        </p:style>
+      </p:cxnSp>
     </p:spTree>
     <p:extLst>
       <p:ext uri="{BB962C8B-B14F-4D97-AF65-F5344CB8AC3E}">
@@ -4175,13 +4287,13 @@
   <p:clrMapOvr>
     <a:masterClrMapping/>
   </p:clrMapOvr>
-  <mc:AlternateContent xmlns:mc="http://schemas.openxmlformats.org/markup-compatibility/2006">
-    <mc:Choice xmlns:p15="http://schemas.microsoft.com/office/powerpoint/2012/main" Requires="p15">
+  <mc:AlternateContent xmlns:mc="http://schemas.openxmlformats.org/markup-compatibility/2006" xmlns:p15="http://schemas.microsoft.com/office/powerpoint/2012/main">
+    <mc:Choice Requires="p15">
       <p:transition xmlns:p14="http://schemas.microsoft.com/office/powerpoint/2010/main" spd="slow" p14:dur="6000">
         <p15:prstTrans prst="curtains"/>
       </p:transition>
     </mc:Choice>
-    <mc:Fallback>
+    <mc:Fallback xmlns="">
       <p:transition spd="slow">
         <p:fade/>
       </p:transition>
@@ -4199,6 +4311,9 @@
                     <p:cTn id="3" fill="hold">
                       <p:stCondLst>
                         <p:cond delay="indefinite"/>
+                        <p:cond evt="onBegin" delay="0">
+                          <p:tn val="2"/>
+                        </p:cond>
                       </p:stCondLst>
                       <p:childTnLst>
                         <p:par>
@@ -4208,14 +4323,89 @@
                             </p:stCondLst>
                             <p:childTnLst>
                               <p:par>
-                                <p:cTn id="5" presetID="2" presetClass="entr" presetSubtype="8" fill="hold" grpId="0" nodeType="clickEffect">
+                                <p:cTn id="5" presetID="1" presetClass="entr" presetSubtype="0" fill="hold" grpId="0" nodeType="withEffect">
+                                  <p:stCondLst>
+                                    <p:cond delay="0"/>
+                                  </p:stCondLst>
+                                  <p:iterate type="lt">
+                                    <p:tmAbs val="100"/>
+                                  </p:iterate>
+                                  <p:childTnLst>
+                                    <p:set>
+                                      <p:cBhvr>
+                                        <p:cTn id="6" dur="1" fill="hold">
+                                          <p:stCondLst>
+                                            <p:cond delay="0"/>
+                                          </p:stCondLst>
+                                        </p:cTn>
+                                        <p:tgtEl>
+                                          <p:spTgt spid="14"/>
+                                        </p:tgtEl>
+                                        <p:attrNameLst>
+                                          <p:attrName>style.visibility</p:attrName>
+                                        </p:attrNameLst>
+                                      </p:cBhvr>
+                                      <p:to>
+                                        <p:strVal val="visible"/>
+                                      </p:to>
+                                    </p:set>
+                                  </p:childTnLst>
+                                </p:cTn>
+                              </p:par>
+                            </p:childTnLst>
+                          </p:cTn>
+                        </p:par>
+                        <p:par>
+                          <p:cTn id="7" fill="hold">
+                            <p:stCondLst>
+                              <p:cond delay="2201"/>
+                            </p:stCondLst>
+                            <p:childTnLst>
+                              <p:par>
+                                <p:cTn id="8" presetID="1" presetClass="entr" presetSubtype="0" fill="hold" nodeType="afterEffect">
                                   <p:stCondLst>
                                     <p:cond delay="0"/>
                                   </p:stCondLst>
                                   <p:childTnLst>
                                     <p:set>
                                       <p:cBhvr>
-                                        <p:cTn id="6" dur="1" fill="hold">
+                                        <p:cTn id="9" dur="1" fill="hold">
+                                          <p:stCondLst>
+                                            <p:cond delay="0"/>
+                                          </p:stCondLst>
+                                        </p:cTn>
+                                        <p:tgtEl>
+                                          <p:spTgt spid="24"/>
+                                        </p:tgtEl>
+                                        <p:attrNameLst>
+                                          <p:attrName>style.visibility</p:attrName>
+                                        </p:attrNameLst>
+                                      </p:cBhvr>
+                                      <p:to>
+                                        <p:strVal val="visible"/>
+                                      </p:to>
+                                    </p:set>
+                                  </p:childTnLst>
+                                </p:cTn>
+                              </p:par>
+                            </p:childTnLst>
+                          </p:cTn>
+                        </p:par>
+                        <p:par>
+                          <p:cTn id="10" fill="hold">
+                            <p:stCondLst>
+                              <p:cond delay="2201"/>
+                            </p:stCondLst>
+                            <p:childTnLst>
+                              <p:par>
+                                <p:cTn id="11" presetID="2" presetClass="entr" presetSubtype="8" fill="hold" grpId="0" nodeType="afterEffect">
+                                  <p:stCondLst>
+                                    <p:cond delay="0"/>
+                                  </p:stCondLst>
+                                  <p:childTnLst>
+                                    <p:set>
+                                      <p:cBhvr>
+                                        <p:cTn id="12" dur="1" fill="hold">
                                           <p:stCondLst>
                                             <p:cond delay="0"/>
                                           </p:stCondLst>
@@ -4233,7 +4423,7 @@
                                     </p:set>
                                     <p:anim calcmode="lin" valueType="num">
                                       <p:cBhvr additive="base">
-                                        <p:cTn id="7" dur="1500" fill="hold"/>
+                                        <p:cTn id="13" dur="1500" fill="hold"/>
                                         <p:tgtEl>
                                           <p:spTgt spid="10"/>
                                         </p:tgtEl>
@@ -4256,7 +4446,7 @@
                                     </p:anim>
                                     <p:anim calcmode="lin" valueType="num">
                                       <p:cBhvr additive="base">
-                                        <p:cTn id="8" dur="1500" fill="hold"/>
+                                        <p:cTn id="14" dur="1500" fill="hold"/>
                                         <p:tgtEl>
                                           <p:spTgt spid="10"/>
                                         </p:tgtEl>
@@ -4281,14 +4471,14 @@
                                 </p:cTn>
                               </p:par>
                               <p:par>
-                                <p:cTn id="9" presetID="2" presetClass="entr" presetSubtype="2" fill="hold" grpId="0" nodeType="withEffect">
+                                <p:cTn id="15" presetID="2" presetClass="entr" presetSubtype="2" fill="hold" grpId="0" nodeType="withEffect">
                                   <p:stCondLst>
                                     <p:cond delay="0"/>
                                   </p:stCondLst>
                                   <p:childTnLst>
                                     <p:set>
                                       <p:cBhvr>
-                                        <p:cTn id="10" dur="1" fill="hold">
+                                        <p:cTn id="16" dur="1" fill="hold">
                                           <p:stCondLst>
                                             <p:cond delay="0"/>
                                           </p:stCondLst>
@@ -4306,7 +4496,7 @@
                                     </p:set>
                                     <p:anim calcmode="lin" valueType="num">
                                       <p:cBhvr additive="base">
-                                        <p:cTn id="11" dur="1500" fill="hold"/>
+                                        <p:cTn id="17" dur="1500" fill="hold"/>
                                         <p:tgtEl>
                                           <p:spTgt spid="8"/>
                                         </p:tgtEl>
@@ -4329,7 +4519,7 @@
                                     </p:anim>
                                     <p:anim calcmode="lin" valueType="num">
                                       <p:cBhvr additive="base">
-                                        <p:cTn id="12" dur="1500" fill="hold"/>
+                                        <p:cTn id="18" dur="1500" fill="hold"/>
                                         <p:tgtEl>
                                           <p:spTgt spid="8"/>
                                         </p:tgtEl>
@@ -4354,14 +4544,14 @@
                                 </p:cTn>
                               </p:par>
                               <p:par>
-                                <p:cTn id="13" presetID="2" presetClass="entr" presetSubtype="6" fill="hold" grpId="0" nodeType="withEffect">
+                                <p:cTn id="19" presetID="2" presetClass="entr" presetSubtype="6" fill="hold" grpId="0" nodeType="withEffect">
                                   <p:stCondLst>
                                     <p:cond delay="0"/>
                                   </p:stCondLst>
                                   <p:childTnLst>
                                     <p:set>
                                       <p:cBhvr>
-                                        <p:cTn id="14" dur="1" fill="hold">
+                                        <p:cTn id="20" dur="1" fill="hold">
                                           <p:stCondLst>
                                             <p:cond delay="0"/>
                                           </p:stCondLst>
@@ -4379,7 +4569,7 @@
                                     </p:set>
                                     <p:anim calcmode="lin" valueType="num">
                                       <p:cBhvr additive="base">
-                                        <p:cTn id="15" dur="1500" fill="hold"/>
+                                        <p:cTn id="21" dur="1500" fill="hold"/>
                                         <p:tgtEl>
                                           <p:spTgt spid="16"/>
                                         </p:tgtEl>
@@ -4402,7 +4592,7 @@
                                     </p:anim>
                                     <p:anim calcmode="lin" valueType="num">
                                       <p:cBhvr additive="base">
-                                        <p:cTn id="16" dur="1500" fill="hold"/>
+                                        <p:cTn id="22" dur="1500" fill="hold"/>
                                         <p:tgtEl>
                                           <p:spTgt spid="16"/>
                                         </p:tgtEl>
@@ -4427,14 +4617,14 @@
                                 </p:cTn>
                               </p:par>
                               <p:par>
-                                <p:cTn id="17" presetID="2" presetClass="entr" presetSubtype="12" fill="hold" grpId="0" nodeType="withEffect">
+                                <p:cTn id="23" presetID="2" presetClass="entr" presetSubtype="12" fill="hold" grpId="0" nodeType="withEffect">
                                   <p:stCondLst>
                                     <p:cond delay="0"/>
                                   </p:stCondLst>
                                   <p:childTnLst>
                                     <p:set>
                                       <p:cBhvr>
-                                        <p:cTn id="18" dur="1" fill="hold">
+                                        <p:cTn id="24" dur="1" fill="hold">
                                           <p:stCondLst>
                                             <p:cond delay="0"/>
                                           </p:stCondLst>
@@ -4452,7 +4642,7 @@
                                     </p:set>
                                     <p:anim calcmode="lin" valueType="num">
                                       <p:cBhvr additive="base">
-                                        <p:cTn id="19" dur="1500" fill="hold"/>
+                                        <p:cTn id="25" dur="1500" fill="hold"/>
                                         <p:tgtEl>
                                           <p:spTgt spid="17"/>
                                         </p:tgtEl>
@@ -4475,7 +4665,7 @@
                                     </p:anim>
                                     <p:anim calcmode="lin" valueType="num">
                                       <p:cBhvr additive="base">
-                                        <p:cTn id="20" dur="1500" fill="hold"/>
+                                        <p:cTn id="26" dur="1500" fill="hold"/>
                                         <p:tgtEl>
                                           <p:spTgt spid="17"/>
                                         </p:tgtEl>
@@ -4496,6 +4686,111 @@
                                         </p:tav>
                                       </p:tavLst>
                                     </p:anim>
+                                  </p:childTnLst>
+                                </p:cTn>
+                              </p:par>
+                            </p:childTnLst>
+                          </p:cTn>
+                        </p:par>
+                        <p:par>
+                          <p:cTn id="27" fill="hold">
+                            <p:stCondLst>
+                              <p:cond delay="3701"/>
+                            </p:stCondLst>
+                            <p:childTnLst>
+                              <p:par>
+                                <p:cTn id="28" presetID="1" presetClass="entr" presetSubtype="0" fill="hold" nodeType="afterEffect">
+                                  <p:stCondLst>
+                                    <p:cond delay="300"/>
+                                  </p:stCondLst>
+                                  <p:childTnLst>
+                                    <p:set>
+                                      <p:cBhvr>
+                                        <p:cTn id="29" dur="1" fill="hold">
+                                          <p:stCondLst>
+                                            <p:cond delay="0"/>
+                                          </p:stCondLst>
+                                        </p:cTn>
+                                        <p:tgtEl>
+                                          <p:spTgt spid="24"/>
+                                        </p:tgtEl>
+                                        <p:attrNameLst>
+                                          <p:attrName>style.visibility</p:attrName>
+                                        </p:attrNameLst>
+                                      </p:cBhvr>
+                                      <p:to>
+                                        <p:strVal val="visible"/>
+                                      </p:to>
+                                    </p:set>
+                                  </p:childTnLst>
+                                </p:cTn>
+                              </p:par>
+                            </p:childTnLst>
+                          </p:cTn>
+                        </p:par>
+                        <p:par>
+                          <p:cTn id="30" fill="hold">
+                            <p:stCondLst>
+                              <p:cond delay="4001"/>
+                            </p:stCondLst>
+                            <p:childTnLst>
+                              <p:par>
+                                <p:cTn id="31" presetID="1" presetClass="entr" presetSubtype="0" fill="hold" grpId="0" nodeType="afterEffect">
+                                  <p:stCondLst>
+                                    <p:cond delay="0"/>
+                                  </p:stCondLst>
+                                  <p:iterate type="lt">
+                                    <p:tmAbs val="100"/>
+                                  </p:iterate>
+                                  <p:childTnLst>
+                                    <p:set>
+                                      <p:cBhvr>
+                                        <p:cTn id="32" dur="1" fill="hold">
+                                          <p:stCondLst>
+                                            <p:cond delay="0"/>
+                                          </p:stCondLst>
+                                        </p:cTn>
+                                        <p:tgtEl>
+                                          <p:spTgt spid="20"/>
+                                        </p:tgtEl>
+                                        <p:attrNameLst>
+                                          <p:attrName>style.visibility</p:attrName>
+                                        </p:attrNameLst>
+                                      </p:cBhvr>
+                                      <p:to>
+                                        <p:strVal val="visible"/>
+                                      </p:to>
+                                    </p:set>
+                                  </p:childTnLst>
+                                </p:cTn>
+                              </p:par>
+                              <p:par>
+                                <p:cTn id="33" presetID="1" presetClass="exit" presetSubtype="0" fill="hold" grpId="1" nodeType="withEffect">
+                                  <p:stCondLst>
+                                    <p:cond delay="0"/>
+                                  </p:stCondLst>
+                                  <p:iterate type="lt">
+                                    <p:tmAbs val="100"/>
+                                  </p:iterate>
+                                  <p:childTnLst>
+                                    <p:set>
+                                      <p:cBhvr>
+                                        <p:cTn id="34" dur="1" fill="hold">
+                                          <p:stCondLst>
+                                            <p:cond delay="0"/>
+                                          </p:stCondLst>
+                                        </p:cTn>
+                                        <p:tgtEl>
+                                          <p:spTgt spid="14"/>
+                                        </p:tgtEl>
+                                        <p:attrNameLst>
+                                          <p:attrName>style.visibility</p:attrName>
+                                        </p:attrNameLst>
+                                      </p:cBhvr>
+                                      <p:to>
+                                        <p:strVal val="hidden"/>
+                                      </p:to>
+                                    </p:set>
                                   </p:childTnLst>
                                 </p:cTn>
                               </p:par>
@@ -4531,6 +4826,9 @@
       <p:bldP spid="10" grpId="0"/>
       <p:bldP spid="16" grpId="0"/>
       <p:bldP spid="17" grpId="0"/>
+      <p:bldP spid="14" grpId="0"/>
+      <p:bldP spid="14" grpId="1"/>
+      <p:bldP spid="20" grpId="0"/>
     </p:bldLst>
   </p:timing>
 </p:sld>

--- a/Current Presentation/Spring 2026.pptx
+++ b/Current Presentation/Spring 2026.pptx
@@ -104,7 +104,39 @@
       </a:defRPr>
     </a:lvl9pPr>
   </p:defaultTextStyle>
+  <p:extLst>
+    <p:ext uri="{EFAFB233-063F-42B5-8137-9DF3F51BA10A}">
+      <p15:sldGuideLst xmlns:p15="http://schemas.microsoft.com/office/powerpoint/2012/main"/>
+    </p:ext>
+  </p:extLst>
 </p:presentation>
+</file>
+
+<file path=ppt/ink/ink1.xml><?xml version="1.0" encoding="utf-8"?>
+<inkml:ink xmlns:inkml="http://www.w3.org/2003/InkML">
+  <inkml:definitions>
+    <inkml:context xml:id="ctx0">
+      <inkml:inkSource xml:id="inkSrc0">
+        <inkml:traceFormat>
+          <inkml:channel name="X" type="integer" min="-2.14748E9" max="2.14748E9" units="cm"/>
+          <inkml:channel name="Y" type="integer" min="-2.14748E9" max="2.14748E9" units="cm"/>
+          <inkml:channel name="F" type="integer" max="32767" units="dev"/>
+        </inkml:traceFormat>
+        <inkml:channelProperties>
+          <inkml:channelProperty channel="X" name="resolution" value="1000" units="1/cm"/>
+          <inkml:channelProperty channel="Y" name="resolution" value="1000" units="1/cm"/>
+          <inkml:channelProperty channel="F" name="resolution" value="0" units="1/dev"/>
+        </inkml:channelProperties>
+      </inkml:inkSource>
+      <inkml:timestamp xml:id="ts0" timeString="2026-06-15T16:24:39.144"/>
+    </inkml:context>
+    <inkml:brush xml:id="br0">
+      <inkml:brushProperty name="width" value="0.035" units="cm"/>
+      <inkml:brushProperty name="height" value="0.035" units="cm"/>
+    </inkml:brush>
+  </inkml:definitions>
+  <inkml:trace contextRef="#ctx0" brushRef="#br0">0 0 24575,'0'0'-8191</inkml:trace>
+</inkml:ink>
 </file>
 
 <file path=ppt/slideLayouts/slideLayout1.xml><?xml version="1.0" encoding="utf-8"?>
@@ -254,7 +286,7 @@
           <a:p>
             <a:fld id="{3001F3D3-B64E-45E5-A774-FFEE7077F3D9}" type="datetimeFigureOut">
               <a:rPr lang="en-US" smtClean="0"/>
-              <a:t>6/10/2026</a:t>
+              <a:t>6/15/2026</a:t>
             </a:fld>
             <a:endParaRPr lang="en-US"/>
           </a:p>
@@ -452,7 +484,7 @@
           <a:p>
             <a:fld id="{3001F3D3-B64E-45E5-A774-FFEE7077F3D9}" type="datetimeFigureOut">
               <a:rPr lang="en-US" smtClean="0"/>
-              <a:t>6/10/2026</a:t>
+              <a:t>6/15/2026</a:t>
             </a:fld>
             <a:endParaRPr lang="en-US"/>
           </a:p>
@@ -660,7 +692,7 @@
           <a:p>
             <a:fld id="{3001F3D3-B64E-45E5-A774-FFEE7077F3D9}" type="datetimeFigureOut">
               <a:rPr lang="en-US" smtClean="0"/>
-              <a:t>6/10/2026</a:t>
+              <a:t>6/15/2026</a:t>
             </a:fld>
             <a:endParaRPr lang="en-US"/>
           </a:p>
@@ -858,7 +890,7 @@
           <a:p>
             <a:fld id="{3001F3D3-B64E-45E5-A774-FFEE7077F3D9}" type="datetimeFigureOut">
               <a:rPr lang="en-US" smtClean="0"/>
-              <a:t>6/10/2026</a:t>
+              <a:t>6/15/2026</a:t>
             </a:fld>
             <a:endParaRPr lang="en-US"/>
           </a:p>
@@ -1133,7 +1165,7 @@
           <a:p>
             <a:fld id="{3001F3D3-B64E-45E5-A774-FFEE7077F3D9}" type="datetimeFigureOut">
               <a:rPr lang="en-US" smtClean="0"/>
-              <a:t>6/10/2026</a:t>
+              <a:t>6/15/2026</a:t>
             </a:fld>
             <a:endParaRPr lang="en-US"/>
           </a:p>
@@ -1398,7 +1430,7 @@
           <a:p>
             <a:fld id="{3001F3D3-B64E-45E5-A774-FFEE7077F3D9}" type="datetimeFigureOut">
               <a:rPr lang="en-US" smtClean="0"/>
-              <a:t>6/10/2026</a:t>
+              <a:t>6/15/2026</a:t>
             </a:fld>
             <a:endParaRPr lang="en-US"/>
           </a:p>
@@ -1810,7 +1842,7 @@
           <a:p>
             <a:fld id="{3001F3D3-B64E-45E5-A774-FFEE7077F3D9}" type="datetimeFigureOut">
               <a:rPr lang="en-US" smtClean="0"/>
-              <a:t>6/10/2026</a:t>
+              <a:t>6/15/2026</a:t>
             </a:fld>
             <a:endParaRPr lang="en-US"/>
           </a:p>
@@ -1951,7 +1983,7 @@
           <a:p>
             <a:fld id="{3001F3D3-B64E-45E5-A774-FFEE7077F3D9}" type="datetimeFigureOut">
               <a:rPr lang="en-US" smtClean="0"/>
-              <a:t>6/10/2026</a:t>
+              <a:t>6/15/2026</a:t>
             </a:fld>
             <a:endParaRPr lang="en-US"/>
           </a:p>
@@ -2064,7 +2096,7 @@
           <a:p>
             <a:fld id="{3001F3D3-B64E-45E5-A774-FFEE7077F3D9}" type="datetimeFigureOut">
               <a:rPr lang="en-US" smtClean="0"/>
-              <a:t>6/10/2026</a:t>
+              <a:t>6/15/2026</a:t>
             </a:fld>
             <a:endParaRPr lang="en-US"/>
           </a:p>
@@ -2375,7 +2407,7 @@
           <a:p>
             <a:fld id="{3001F3D3-B64E-45E5-A774-FFEE7077F3D9}" type="datetimeFigureOut">
               <a:rPr lang="en-US" smtClean="0"/>
-              <a:t>6/10/2026</a:t>
+              <a:t>6/15/2026</a:t>
             </a:fld>
             <a:endParaRPr lang="en-US"/>
           </a:p>
@@ -2663,7 +2695,7 @@
           <a:p>
             <a:fld id="{3001F3D3-B64E-45E5-A774-FFEE7077F3D9}" type="datetimeFigureOut">
               <a:rPr lang="en-US" smtClean="0"/>
-              <a:t>6/10/2026</a:t>
+              <a:t>6/15/2026</a:t>
             </a:fld>
             <a:endParaRPr lang="en-US"/>
           </a:p>
@@ -2904,7 +2936,7 @@
           <a:p>
             <a:fld id="{3001F3D3-B64E-45E5-A774-FFEE7077F3D9}" type="datetimeFigureOut">
               <a:rPr lang="en-US" smtClean="0"/>
-              <a:t>6/10/2026</a:t>
+              <a:t>6/15/2026</a:t>
             </a:fld>
             <a:endParaRPr lang="en-US"/>
           </a:p>
@@ -4165,6 +4197,114 @@
           </a:p>
         </p:txBody>
       </p:sp>
+      <mc:AlternateContent xmlns:mc="http://schemas.openxmlformats.org/markup-compatibility/2006">
+        <mc:Choice xmlns:p14="http://schemas.microsoft.com/office/powerpoint/2010/main" Requires="p14">
+          <p:contentPart p14:bwMode="auto" r:id="rId2">
+            <p14:nvContentPartPr>
+              <p14:cNvPr id="4" name="Ink 3">
+                <a:extLst>
+                  <a:ext uri="{FF2B5EF4-FFF2-40B4-BE49-F238E27FC236}">
+                    <a16:creationId xmlns:a16="http://schemas.microsoft.com/office/drawing/2014/main" id="{B871843D-0883-EB06-DA3D-9EBA602F3080}"/>
+                  </a:ext>
+                </a:extLst>
+              </p14:cNvPr>
+              <p14:cNvContentPartPr/>
+              <p14:nvPr/>
+            </p14:nvContentPartPr>
+            <p14:xfrm>
+              <a:off x="1133175" y="3095550"/>
+              <a:ext cx="360" cy="360"/>
+            </p14:xfrm>
+          </p:contentPart>
+        </mc:Choice>
+        <mc:Fallback>
+          <p:pic>
+            <p:nvPicPr>
+              <p:cNvPr id="4" name="Ink 3">
+                <a:extLst>
+                  <a:ext uri="{FF2B5EF4-FFF2-40B4-BE49-F238E27FC236}">
+                    <a16:creationId xmlns:a16="http://schemas.microsoft.com/office/drawing/2014/main" id="{B871843D-0883-EB06-DA3D-9EBA602F3080}"/>
+                  </a:ext>
+                </a:extLst>
+              </p:cNvPr>
+              <p:cNvPicPr/>
+              <p:nvPr/>
+            </p:nvPicPr>
+            <p:blipFill>
+              <a:blip r:embed="rId3"/>
+              <a:stretch>
+                <a:fillRect/>
+              </a:stretch>
+            </p:blipFill>
+            <p:spPr>
+              <a:xfrm>
+                <a:off x="1127055" y="3089430"/>
+                <a:ext cx="12600" cy="12600"/>
+              </a:xfrm>
+              <a:prstGeom prst="rect">
+                <a:avLst/>
+              </a:prstGeom>
+            </p:spPr>
+          </p:pic>
+        </mc:Fallback>
+      </mc:AlternateContent>
+      <p:sp>
+        <p:nvSpPr>
+          <p:cNvPr id="11" name="Conector recto 10">
+            <a:extLst>
+              <a:ext uri="{FF2B5EF4-FFF2-40B4-BE49-F238E27FC236}">
+                <a16:creationId xmlns:a16="http://schemas.microsoft.com/office/drawing/2014/main" id="{AD1FF79A-F404-4C13-8BEE-2D19D60C99B5}"/>
+              </a:ext>
+            </a:extLst>
+          </p:cNvPr>
+          <p:cNvSpPr/>
+          <p:nvPr/>
+        </p:nvSpPr>
+        <p:spPr>
+          <a:xfrm rot="6812815">
+            <a:off x="85360" y="5232600"/>
+            <a:ext cx="1097280" cy="0"/>
+          </a:xfrm>
+          <a:prstGeom prst="line">
+            <a:avLst/>
+          </a:prstGeom>
+          <a:solidFill>
+            <a:srgbClr val="000000">
+              <a:alpha val="5000"/>
+            </a:srgbClr>
+          </a:solidFill>
+          <a:ln w="12600">
+            <a:solidFill>
+              <a:schemeClr val="bg1"/>
+            </a:solidFill>
+          </a:ln>
+        </p:spPr>
+        <p:style>
+          <a:lnRef idx="2">
+            <a:schemeClr val="accent1"/>
+          </a:lnRef>
+          <a:fillRef idx="0">
+            <a:schemeClr val="accent1"/>
+          </a:fillRef>
+          <a:effectRef idx="1">
+            <a:schemeClr val="accent1"/>
+          </a:effectRef>
+          <a:fontRef idx="minor">
+            <a:schemeClr val="tx1"/>
+          </a:fontRef>
+        </p:style>
+        <p:txBody>
+          <a:bodyPr wrap="none" rtlCol="0" anchor="ctr" anchorCtr="1"/>
+          <a:lstStyle/>
+          <a:p>
+            <a:endParaRPr lang="en-US">
+              <a:solidFill>
+                <a:srgbClr val="000000"/>
+              </a:solidFill>
+            </a:endParaRPr>
+          </a:p>
+        </p:txBody>
+      </p:sp>
     </p:spTree>
     <p:extLst>
       <p:ext uri="{BB962C8B-B14F-4D97-AF65-F5344CB8AC3E}">
@@ -4175,13 +4315,13 @@
   <p:clrMapOvr>
     <a:masterClrMapping/>
   </p:clrMapOvr>
-  <mc:AlternateContent xmlns:mc="http://schemas.openxmlformats.org/markup-compatibility/2006">
-    <mc:Choice xmlns:p15="http://schemas.microsoft.com/office/powerpoint/2012/main" Requires="p15">
+  <mc:AlternateContent xmlns:mc="http://schemas.openxmlformats.org/markup-compatibility/2006" xmlns:p15="http://schemas.microsoft.com/office/powerpoint/2012/main">
+    <mc:Choice Requires="p15">
       <p:transition xmlns:p14="http://schemas.microsoft.com/office/powerpoint/2010/main" spd="slow" p14:dur="6000">
         <p15:prstTrans prst="curtains"/>
       </p:transition>
     </mc:Choice>
-    <mc:Fallback>
+    <mc:Fallback xmlns="">
       <p:transition spd="slow">
         <p:fade/>
       </p:transition>
@@ -4208,14 +4348,89 @@
                             </p:stCondLst>
                             <p:childTnLst>
                               <p:par>
-                                <p:cTn id="5" presetID="2" presetClass="entr" presetSubtype="8" fill="hold" grpId="0" nodeType="clickEffect">
+                                <p:cTn id="5" presetID="1" presetClass="entr" presetSubtype="0" fill="hold" grpId="0" nodeType="clickEffect">
+                                  <p:stCondLst>
+                                    <p:cond delay="0"/>
+                                  </p:stCondLst>
+                                  <p:iterate type="lt">
+                                    <p:tmAbs val="70"/>
+                                  </p:iterate>
+                                  <p:childTnLst>
+                                    <p:set>
+                                      <p:cBhvr>
+                                        <p:cTn id="6" dur="1" fill="hold">
+                                          <p:stCondLst>
+                                            <p:cond delay="0"/>
+                                          </p:stCondLst>
+                                        </p:cTn>
+                                        <p:tgtEl>
+                                          <p:spTgt spid="2"/>
+                                        </p:tgtEl>
+                                        <p:attrNameLst>
+                                          <p:attrName>style.visibility</p:attrName>
+                                        </p:attrNameLst>
+                                      </p:cBhvr>
+                                      <p:to>
+                                        <p:strVal val="visible"/>
+                                      </p:to>
+                                    </p:set>
+                                  </p:childTnLst>
+                                </p:cTn>
+                              </p:par>
+                            </p:childTnLst>
+                          </p:cTn>
+                        </p:par>
+                        <p:par>
+                          <p:cTn id="7" fill="hold">
+                            <p:stCondLst>
+                              <p:cond delay="2101"/>
+                            </p:stCondLst>
+                            <p:childTnLst>
+                              <p:par>
+                                <p:cTn id="8" presetID="1" presetClass="entr" presetSubtype="0" fill="hold" grpId="0" nodeType="afterEffect">
+                                  <p:stCondLst>
+                                    <p:cond delay="150"/>
+                                  </p:stCondLst>
+                                  <p:childTnLst>
+                                    <p:set>
+                                      <p:cBhvr>
+                                        <p:cTn id="9" dur="1" fill="hold">
+                                          <p:stCondLst>
+                                            <p:cond delay="0"/>
+                                          </p:stCondLst>
+                                        </p:cTn>
+                                        <p:tgtEl>
+                                          <p:spTgt spid="11"/>
+                                        </p:tgtEl>
+                                        <p:attrNameLst>
+                                          <p:attrName>style.visibility</p:attrName>
+                                        </p:attrNameLst>
+                                      </p:cBhvr>
+                                      <p:to>
+                                        <p:strVal val="visible"/>
+                                      </p:to>
+                                    </p:set>
+                                  </p:childTnLst>
+                                </p:cTn>
+                              </p:par>
+                            </p:childTnLst>
+                          </p:cTn>
+                        </p:par>
+                        <p:par>
+                          <p:cTn id="10" fill="hold">
+                            <p:stCondLst>
+                              <p:cond delay="2251"/>
+                            </p:stCondLst>
+                            <p:childTnLst>
+                              <p:par>
+                                <p:cTn id="11" presetID="2" presetClass="entr" presetSubtype="8" fill="hold" grpId="0" nodeType="afterEffect">
                                   <p:stCondLst>
                                     <p:cond delay="0"/>
                                   </p:stCondLst>
                                   <p:childTnLst>
                                     <p:set>
                                       <p:cBhvr>
-                                        <p:cTn id="6" dur="1" fill="hold">
+                                        <p:cTn id="12" dur="1" fill="hold">
                                           <p:stCondLst>
                                             <p:cond delay="0"/>
                                           </p:stCondLst>
@@ -4233,7 +4448,7 @@
                                     </p:set>
                                     <p:anim calcmode="lin" valueType="num">
                                       <p:cBhvr additive="base">
-                                        <p:cTn id="7" dur="1500" fill="hold"/>
+                                        <p:cTn id="13" dur="1500" fill="hold"/>
                                         <p:tgtEl>
                                           <p:spTgt spid="10"/>
                                         </p:tgtEl>
@@ -4256,7 +4471,7 @@
                                     </p:anim>
                                     <p:anim calcmode="lin" valueType="num">
                                       <p:cBhvr additive="base">
-                                        <p:cTn id="8" dur="1500" fill="hold"/>
+                                        <p:cTn id="14" dur="1500" fill="hold"/>
                                         <p:tgtEl>
                                           <p:spTgt spid="10"/>
                                         </p:tgtEl>
@@ -4281,14 +4496,14 @@
                                 </p:cTn>
                               </p:par>
                               <p:par>
-                                <p:cTn id="9" presetID="2" presetClass="entr" presetSubtype="2" fill="hold" grpId="0" nodeType="withEffect">
+                                <p:cTn id="15" presetID="2" presetClass="entr" presetSubtype="2" fill="hold" grpId="0" nodeType="withEffect">
                                   <p:stCondLst>
                                     <p:cond delay="0"/>
                                   </p:stCondLst>
                                   <p:childTnLst>
                                     <p:set>
                                       <p:cBhvr>
-                                        <p:cTn id="10" dur="1" fill="hold">
+                                        <p:cTn id="16" dur="1" fill="hold">
                                           <p:stCondLst>
                                             <p:cond delay="0"/>
                                           </p:stCondLst>
@@ -4306,7 +4521,7 @@
                                     </p:set>
                                     <p:anim calcmode="lin" valueType="num">
                                       <p:cBhvr additive="base">
-                                        <p:cTn id="11" dur="1500" fill="hold"/>
+                                        <p:cTn id="17" dur="1500" fill="hold"/>
                                         <p:tgtEl>
                                           <p:spTgt spid="8"/>
                                         </p:tgtEl>
@@ -4329,7 +4544,7 @@
                                     </p:anim>
                                     <p:anim calcmode="lin" valueType="num">
                                       <p:cBhvr additive="base">
-                                        <p:cTn id="12" dur="1500" fill="hold"/>
+                                        <p:cTn id="18" dur="1500" fill="hold"/>
                                         <p:tgtEl>
                                           <p:spTgt spid="8"/>
                                         </p:tgtEl>
@@ -4354,14 +4569,14 @@
                                 </p:cTn>
                               </p:par>
                               <p:par>
-                                <p:cTn id="13" presetID="2" presetClass="entr" presetSubtype="6" fill="hold" grpId="0" nodeType="withEffect">
+                                <p:cTn id="19" presetID="2" presetClass="entr" presetSubtype="6" fill="hold" grpId="0" nodeType="withEffect">
                                   <p:stCondLst>
                                     <p:cond delay="0"/>
                                   </p:stCondLst>
                                   <p:childTnLst>
                                     <p:set>
                                       <p:cBhvr>
-                                        <p:cTn id="14" dur="1" fill="hold">
+                                        <p:cTn id="20" dur="1" fill="hold">
                                           <p:stCondLst>
                                             <p:cond delay="0"/>
                                           </p:stCondLst>
@@ -4379,7 +4594,7 @@
                                     </p:set>
                                     <p:anim calcmode="lin" valueType="num">
                                       <p:cBhvr additive="base">
-                                        <p:cTn id="15" dur="1500" fill="hold"/>
+                                        <p:cTn id="21" dur="1500" fill="hold"/>
                                         <p:tgtEl>
                                           <p:spTgt spid="16"/>
                                         </p:tgtEl>
@@ -4402,7 +4617,7 @@
                                     </p:anim>
                                     <p:anim calcmode="lin" valueType="num">
                                       <p:cBhvr additive="base">
-                                        <p:cTn id="16" dur="1500" fill="hold"/>
+                                        <p:cTn id="22" dur="1500" fill="hold"/>
                                         <p:tgtEl>
                                           <p:spTgt spid="16"/>
                                         </p:tgtEl>
@@ -4427,14 +4642,14 @@
                                 </p:cTn>
                               </p:par>
                               <p:par>
-                                <p:cTn id="17" presetID="2" presetClass="entr" presetSubtype="12" fill="hold" grpId="0" nodeType="withEffect">
+                                <p:cTn id="23" presetID="2" presetClass="entr" presetSubtype="12" fill="hold" grpId="0" nodeType="withEffect">
                                   <p:stCondLst>
                                     <p:cond delay="0"/>
                                   </p:stCondLst>
                                   <p:childTnLst>
                                     <p:set>
                                       <p:cBhvr>
-                                        <p:cTn id="18" dur="1" fill="hold">
+                                        <p:cTn id="24" dur="1" fill="hold">
                                           <p:stCondLst>
                                             <p:cond delay="0"/>
                                           </p:stCondLst>
@@ -4452,7 +4667,7 @@
                                     </p:set>
                                     <p:anim calcmode="lin" valueType="num">
                                       <p:cBhvr additive="base">
-                                        <p:cTn id="19" dur="1500" fill="hold"/>
+                                        <p:cTn id="25" dur="1500" fill="hold"/>
                                         <p:tgtEl>
                                           <p:spTgt spid="17"/>
                                         </p:tgtEl>
@@ -4475,7 +4690,7 @@
                                     </p:anim>
                                     <p:anim calcmode="lin" valueType="num">
                                       <p:cBhvr additive="base">
-                                        <p:cTn id="20" dur="1500" fill="hold"/>
+                                        <p:cTn id="26" dur="1500" fill="hold"/>
                                         <p:tgtEl>
                                           <p:spTgt spid="17"/>
                                         </p:tgtEl>
@@ -4527,10 +4742,12 @@
       </p:par>
     </p:tnLst>
     <p:bldLst>
+      <p:bldP spid="2" grpId="0"/>
       <p:bldP spid="8" grpId="0"/>
       <p:bldP spid="10" grpId="0"/>
       <p:bldP spid="16" grpId="0"/>
       <p:bldP spid="17" grpId="0"/>
+      <p:bldP spid="11" grpId="0" animBg="1"/>
     </p:bldLst>
   </p:timing>
 </p:sld>

--- a/Current Presentation/Spring 2026.pptx
+++ b/Current Presentation/Spring 2026.pptx
@@ -104,6 +104,11 @@
       </a:defRPr>
     </a:lvl9pPr>
   </p:defaultTextStyle>
+  <p:extLst>
+    <p:ext uri="{EFAFB233-063F-42B5-8137-9DF3F51BA10A}">
+      <p15:sldGuideLst xmlns:p15="http://schemas.microsoft.com/office/powerpoint/2012/main"/>
+    </p:ext>
+  </p:extLst>
 </p:presentation>
 </file>
 
@@ -254,7 +259,7 @@
           <a:p>
             <a:fld id="{3001F3D3-B64E-45E5-A774-FFEE7077F3D9}" type="datetimeFigureOut">
               <a:rPr lang="en-US" smtClean="0"/>
-              <a:t>6/10/2026</a:t>
+              <a:t>6/15/2026</a:t>
             </a:fld>
             <a:endParaRPr lang="en-US"/>
           </a:p>
@@ -452,7 +457,7 @@
           <a:p>
             <a:fld id="{3001F3D3-B64E-45E5-A774-FFEE7077F3D9}" type="datetimeFigureOut">
               <a:rPr lang="en-US" smtClean="0"/>
-              <a:t>6/10/2026</a:t>
+              <a:t>6/15/2026</a:t>
             </a:fld>
             <a:endParaRPr lang="en-US"/>
           </a:p>
@@ -660,7 +665,7 @@
           <a:p>
             <a:fld id="{3001F3D3-B64E-45E5-A774-FFEE7077F3D9}" type="datetimeFigureOut">
               <a:rPr lang="en-US" smtClean="0"/>
-              <a:t>6/10/2026</a:t>
+              <a:t>6/15/2026</a:t>
             </a:fld>
             <a:endParaRPr lang="en-US"/>
           </a:p>
@@ -858,7 +863,7 @@
           <a:p>
             <a:fld id="{3001F3D3-B64E-45E5-A774-FFEE7077F3D9}" type="datetimeFigureOut">
               <a:rPr lang="en-US" smtClean="0"/>
-              <a:t>6/10/2026</a:t>
+              <a:t>6/15/2026</a:t>
             </a:fld>
             <a:endParaRPr lang="en-US"/>
           </a:p>
@@ -1133,7 +1138,7 @@
           <a:p>
             <a:fld id="{3001F3D3-B64E-45E5-A774-FFEE7077F3D9}" type="datetimeFigureOut">
               <a:rPr lang="en-US" smtClean="0"/>
-              <a:t>6/10/2026</a:t>
+              <a:t>6/15/2026</a:t>
             </a:fld>
             <a:endParaRPr lang="en-US"/>
           </a:p>
@@ -1398,7 +1403,7 @@
           <a:p>
             <a:fld id="{3001F3D3-B64E-45E5-A774-FFEE7077F3D9}" type="datetimeFigureOut">
               <a:rPr lang="en-US" smtClean="0"/>
-              <a:t>6/10/2026</a:t>
+              <a:t>6/15/2026</a:t>
             </a:fld>
             <a:endParaRPr lang="en-US"/>
           </a:p>
@@ -1810,7 +1815,7 @@
           <a:p>
             <a:fld id="{3001F3D3-B64E-45E5-A774-FFEE7077F3D9}" type="datetimeFigureOut">
               <a:rPr lang="en-US" smtClean="0"/>
-              <a:t>6/10/2026</a:t>
+              <a:t>6/15/2026</a:t>
             </a:fld>
             <a:endParaRPr lang="en-US"/>
           </a:p>
@@ -1951,7 +1956,7 @@
           <a:p>
             <a:fld id="{3001F3D3-B64E-45E5-A774-FFEE7077F3D9}" type="datetimeFigureOut">
               <a:rPr lang="en-US" smtClean="0"/>
-              <a:t>6/10/2026</a:t>
+              <a:t>6/15/2026</a:t>
             </a:fld>
             <a:endParaRPr lang="en-US"/>
           </a:p>
@@ -2064,7 +2069,7 @@
           <a:p>
             <a:fld id="{3001F3D3-B64E-45E5-A774-FFEE7077F3D9}" type="datetimeFigureOut">
               <a:rPr lang="en-US" smtClean="0"/>
-              <a:t>6/10/2026</a:t>
+              <a:t>6/15/2026</a:t>
             </a:fld>
             <a:endParaRPr lang="en-US"/>
           </a:p>
@@ -2375,7 +2380,7 @@
           <a:p>
             <a:fld id="{3001F3D3-B64E-45E5-A774-FFEE7077F3D9}" type="datetimeFigureOut">
               <a:rPr lang="en-US" smtClean="0"/>
-              <a:t>6/10/2026</a:t>
+              <a:t>6/15/2026</a:t>
             </a:fld>
             <a:endParaRPr lang="en-US"/>
           </a:p>
@@ -2663,7 +2668,7 @@
           <a:p>
             <a:fld id="{3001F3D3-B64E-45E5-A774-FFEE7077F3D9}" type="datetimeFigureOut">
               <a:rPr lang="en-US" smtClean="0"/>
-              <a:t>6/10/2026</a:t>
+              <a:t>6/15/2026</a:t>
             </a:fld>
             <a:endParaRPr lang="en-US"/>
           </a:p>
@@ -2904,7 +2909,7 @@
           <a:p>
             <a:fld id="{3001F3D3-B64E-45E5-A774-FFEE7077F3D9}" type="datetimeFigureOut">
               <a:rPr lang="en-US" smtClean="0"/>
-              <a:t>6/10/2026</a:t>
+              <a:t>6/15/2026</a:t>
             </a:fld>
             <a:endParaRPr lang="en-US"/>
           </a:p>
@@ -3342,6 +3347,11 @@
           <a:bodyPr/>
           <a:lstStyle/>
           <a:p>
+            <a:pPr>
+              <a:tabLst>
+                <a:tab pos="5257800" algn="l"/>
+              </a:tabLst>
+            </a:pPr>
             <a:r>
               <a:rPr lang="en-US" dirty="0"/>
               <a:t>Charlie’s</a:t>

--- a/Current Presentation/Spring 2026.pptx
+++ b/Current Presentation/Spring 2026.pptx
@@ -2,7 +2,7 @@
 <file path=ppt/presentation.xml><?xml version="1.0" encoding="utf-8"?>
 <p:presentation xmlns:a="http://schemas.openxmlformats.org/drawingml/2006/main" xmlns:r="http://schemas.openxmlformats.org/officeDocument/2006/relationships" xmlns:p="http://schemas.openxmlformats.org/presentationml/2006/main" saveSubsetFonts="1">
   <p:sldMasterIdLst>
-    <p:sldMasterId id="2147483648" r:id="rId1"/>
+    <p:sldMasterId id="2147483660" r:id="rId1"/>
   </p:sldMasterIdLst>
   <p:sldIdLst>
     <p:sldId id="260" r:id="rId2"/>
@@ -13,7 +13,7 @@
     <a:defPPr>
       <a:defRPr lang="en-US"/>
     </a:defPPr>
-    <a:lvl1pPr marL="0" algn="l" defTabSz="914400" rtl="0" eaLnBrk="1" latinLnBrk="0" hangingPunct="1">
+    <a:lvl1pPr marL="0" algn="l" defTabSz="457200" rtl="0" eaLnBrk="1" latinLnBrk="0" hangingPunct="1">
       <a:defRPr sz="1800" kern="1200">
         <a:solidFill>
           <a:schemeClr val="tx1"/>
@@ -23,7 +23,7 @@
         <a:cs typeface="+mn-cs"/>
       </a:defRPr>
     </a:lvl1pPr>
-    <a:lvl2pPr marL="457200" algn="l" defTabSz="914400" rtl="0" eaLnBrk="1" latinLnBrk="0" hangingPunct="1">
+    <a:lvl2pPr marL="457200" algn="l" defTabSz="457200" rtl="0" eaLnBrk="1" latinLnBrk="0" hangingPunct="1">
       <a:defRPr sz="1800" kern="1200">
         <a:solidFill>
           <a:schemeClr val="tx1"/>
@@ -33,7 +33,7 @@
         <a:cs typeface="+mn-cs"/>
       </a:defRPr>
     </a:lvl2pPr>
-    <a:lvl3pPr marL="914400" algn="l" defTabSz="914400" rtl="0" eaLnBrk="1" latinLnBrk="0" hangingPunct="1">
+    <a:lvl3pPr marL="914400" algn="l" defTabSz="457200" rtl="0" eaLnBrk="1" latinLnBrk="0" hangingPunct="1">
       <a:defRPr sz="1800" kern="1200">
         <a:solidFill>
           <a:schemeClr val="tx1"/>
@@ -43,7 +43,7 @@
         <a:cs typeface="+mn-cs"/>
       </a:defRPr>
     </a:lvl3pPr>
-    <a:lvl4pPr marL="1371600" algn="l" defTabSz="914400" rtl="0" eaLnBrk="1" latinLnBrk="0" hangingPunct="1">
+    <a:lvl4pPr marL="1371600" algn="l" defTabSz="457200" rtl="0" eaLnBrk="1" latinLnBrk="0" hangingPunct="1">
       <a:defRPr sz="1800" kern="1200">
         <a:solidFill>
           <a:schemeClr val="tx1"/>
@@ -53,7 +53,7 @@
         <a:cs typeface="+mn-cs"/>
       </a:defRPr>
     </a:lvl4pPr>
-    <a:lvl5pPr marL="1828800" algn="l" defTabSz="914400" rtl="0" eaLnBrk="1" latinLnBrk="0" hangingPunct="1">
+    <a:lvl5pPr marL="1828800" algn="l" defTabSz="457200" rtl="0" eaLnBrk="1" latinLnBrk="0" hangingPunct="1">
       <a:defRPr sz="1800" kern="1200">
         <a:solidFill>
           <a:schemeClr val="tx1"/>
@@ -63,7 +63,7 @@
         <a:cs typeface="+mn-cs"/>
       </a:defRPr>
     </a:lvl5pPr>
-    <a:lvl6pPr marL="2286000" algn="l" defTabSz="914400" rtl="0" eaLnBrk="1" latinLnBrk="0" hangingPunct="1">
+    <a:lvl6pPr marL="2286000" algn="l" defTabSz="457200" rtl="0" eaLnBrk="1" latinLnBrk="0" hangingPunct="1">
       <a:defRPr sz="1800" kern="1200">
         <a:solidFill>
           <a:schemeClr val="tx1"/>
@@ -73,7 +73,7 @@
         <a:cs typeface="+mn-cs"/>
       </a:defRPr>
     </a:lvl6pPr>
-    <a:lvl7pPr marL="2743200" algn="l" defTabSz="914400" rtl="0" eaLnBrk="1" latinLnBrk="0" hangingPunct="1">
+    <a:lvl7pPr marL="2743200" algn="l" defTabSz="457200" rtl="0" eaLnBrk="1" latinLnBrk="0" hangingPunct="1">
       <a:defRPr sz="1800" kern="1200">
         <a:solidFill>
           <a:schemeClr val="tx1"/>
@@ -83,7 +83,7 @@
         <a:cs typeface="+mn-cs"/>
       </a:defRPr>
     </a:lvl7pPr>
-    <a:lvl8pPr marL="3200400" algn="l" defTabSz="914400" rtl="0" eaLnBrk="1" latinLnBrk="0" hangingPunct="1">
+    <a:lvl8pPr marL="3200400" algn="l" defTabSz="457200" rtl="0" eaLnBrk="1" latinLnBrk="0" hangingPunct="1">
       <a:defRPr sz="1800" kern="1200">
         <a:solidFill>
           <a:schemeClr val="tx1"/>
@@ -93,7 +93,7 @@
         <a:cs typeface="+mn-cs"/>
       </a:defRPr>
     </a:lvl8pPr>
-    <a:lvl9pPr marL="3657600" algn="l" defTabSz="914400" rtl="0" eaLnBrk="1" latinLnBrk="0" hangingPunct="1">
+    <a:lvl9pPr marL="3657600" algn="l" defTabSz="457200" rtl="0" eaLnBrk="1" latinLnBrk="0" hangingPunct="1">
       <a:defRPr sz="1800" kern="1200">
         <a:solidFill>
           <a:schemeClr val="tx1"/>
@@ -104,6 +104,11 @@
       </a:defRPr>
     </a:lvl9pPr>
   </p:defaultTextStyle>
+  <p:extLst>
+    <p:ext uri="{EFAFB233-063F-42B5-8137-9DF3F51BA10A}">
+      <p15:sldGuideLst xmlns:p15="http://schemas.microsoft.com/office/powerpoint/2012/main"/>
+    </p:ext>
+  </p:extLst>
 </p:presentation>
 </file>
 
@@ -124,15 +129,39 @@
           <a:chExt cx="0" cy="0"/>
         </a:xfrm>
       </p:grpSpPr>
-      <p:sp>
-        <p:nvSpPr>
-          <p:cNvPr id="2" name="Title 1">
+      <p:pic>
+        <p:nvPicPr>
+          <p:cNvPr id="7" name="Picture 6" descr="C0-HD-BTM.png"/>
+          <p:cNvPicPr>
+            <a:picLocks noChangeAspect="1"/>
+          </p:cNvPicPr>
+          <p:nvPr/>
+        </p:nvPicPr>
+        <p:blipFill>
+          <a:blip r:embed="rId2">
             <a:extLst>
-              <a:ext uri="{FF2B5EF4-FFF2-40B4-BE49-F238E27FC236}">
-                <a16:creationId xmlns:a16="http://schemas.microsoft.com/office/drawing/2014/main" id="{CEB671A4-3A16-47FB-E495-F0BF9A6897F7}"/>
+              <a:ext uri="{28A0092B-C50C-407E-A947-70E740481C1C}">
+                <a14:useLocalDpi xmlns:a14="http://schemas.microsoft.com/office/drawing/2010/main" val="0"/>
               </a:ext>
             </a:extLst>
-          </p:cNvPr>
+          </a:blip>
+          <a:stretch>
+            <a:fillRect/>
+          </a:stretch>
+        </p:blipFill>
+        <p:spPr>
+          <a:xfrm>
+            <a:off x="0" y="4375150"/>
+            <a:ext cx="12192000" cy="2482850"/>
+          </a:xfrm>
+          <a:prstGeom prst="rect">
+            <a:avLst/>
+          </a:prstGeom>
+        </p:spPr>
+      </p:pic>
+      <p:sp>
+        <p:nvSpPr>
+          <p:cNvPr id="2" name="Title 1"/>
           <p:cNvSpPr>
             <a:spLocks noGrp="1"/>
           </p:cNvSpPr>
@@ -142,14 +171,16 @@
         </p:nvSpPr>
         <p:spPr>
           <a:xfrm>
-            <a:off x="1524000" y="1122363"/>
-            <a:ext cx="9144000" cy="2387600"/>
-          </a:xfrm>
-        </p:spPr>
-        <p:txBody>
-          <a:bodyPr anchor="b"/>
+            <a:off x="1371600" y="1803405"/>
+            <a:ext cx="9448800" cy="1825096"/>
+          </a:xfrm>
+        </p:spPr>
+        <p:txBody>
+          <a:bodyPr anchor="b">
+            <a:normAutofit/>
+          </a:bodyPr>
           <a:lstStyle>
-            <a:lvl1pPr algn="ctr">
+            <a:lvl1pPr algn="l">
               <a:defRPr sz="6000"/>
             </a:lvl1pPr>
           </a:lstStyle>
@@ -158,18 +189,13 @@
               <a:rPr lang="en-US"/>
               <a:t>Click to edit Master title style</a:t>
             </a:r>
-          </a:p>
-        </p:txBody>
-      </p:sp>
-      <p:sp>
-        <p:nvSpPr>
-          <p:cNvPr id="3" name="Subtitle 2">
-            <a:extLst>
-              <a:ext uri="{FF2B5EF4-FFF2-40B4-BE49-F238E27FC236}">
-                <a16:creationId xmlns:a16="http://schemas.microsoft.com/office/drawing/2014/main" id="{24DCE5E0-0C39-6C9A-F6F6-3D40D6977AF1}"/>
-              </a:ext>
-            </a:extLst>
-          </p:cNvPr>
+            <a:endParaRPr lang="en-US" dirty="0"/>
+          </a:p>
+        </p:txBody>
+      </p:sp>
+      <p:sp>
+        <p:nvSpPr>
+          <p:cNvPr id="3" name="Subtitle 2"/>
           <p:cNvSpPr>
             <a:spLocks noGrp="1"/>
           </p:cNvSpPr>
@@ -179,16 +205,18 @@
         </p:nvSpPr>
         <p:spPr>
           <a:xfrm>
-            <a:off x="1524000" y="3602038"/>
-            <a:ext cx="9144000" cy="1655762"/>
-          </a:xfrm>
-        </p:spPr>
-        <p:txBody>
-          <a:bodyPr/>
+            <a:off x="1371600" y="3632201"/>
+            <a:ext cx="9448800" cy="685800"/>
+          </a:xfrm>
+        </p:spPr>
+        <p:txBody>
+          <a:bodyPr>
+            <a:normAutofit/>
+          </a:bodyPr>
           <a:lstStyle>
-            <a:lvl1pPr marL="0" indent="0" algn="ctr">
-              <a:buNone/>
-              <a:defRPr sz="2400"/>
+            <a:lvl1pPr marL="0" indent="0" algn="l">
+              <a:buNone/>
+              <a:defRPr sz="2000"/>
             </a:lvl1pPr>
             <a:lvl2pPr marL="457200" indent="0" algn="ctr">
               <a:buNone/>
@@ -228,18 +256,13 @@
               <a:rPr lang="en-US"/>
               <a:t>Click to edit Master subtitle style</a:t>
             </a:r>
-          </a:p>
-        </p:txBody>
-      </p:sp>
-      <p:sp>
-        <p:nvSpPr>
-          <p:cNvPr id="4" name="Date Placeholder 3">
-            <a:extLst>
-              <a:ext uri="{FF2B5EF4-FFF2-40B4-BE49-F238E27FC236}">
-                <a16:creationId xmlns:a16="http://schemas.microsoft.com/office/drawing/2014/main" id="{203E5238-851C-99AC-FED3-E39ADFD3BDC0}"/>
-              </a:ext>
-            </a:extLst>
-          </p:cNvPr>
+            <a:endParaRPr lang="en-US" dirty="0"/>
+          </a:p>
+        </p:txBody>
+      </p:sp>
+      <p:sp>
+        <p:nvSpPr>
+          <p:cNvPr id="4" name="Date Placeholder 3"/>
           <p:cNvSpPr>
             <a:spLocks noGrp="1"/>
           </p:cNvSpPr>
@@ -247,14 +270,19 @@
             <p:ph type="dt" sz="half" idx="10"/>
           </p:nvPr>
         </p:nvSpPr>
-        <p:spPr/>
+        <p:spPr>
+          <a:xfrm>
+            <a:off x="7909561" y="4314328"/>
+            <a:ext cx="2910840" cy="374642"/>
+          </a:xfrm>
+        </p:spPr>
         <p:txBody>
           <a:bodyPr/>
           <a:lstStyle/>
           <a:p>
             <a:fld id="{3001F3D3-B64E-45E5-A774-FFEE7077F3D9}" type="datetimeFigureOut">
               <a:rPr lang="en-US" smtClean="0"/>
-              <a:t>6/10/2026</a:t>
+              <a:t>6/15/2026</a:t>
             </a:fld>
             <a:endParaRPr lang="en-US"/>
           </a:p>
@@ -262,13 +290,7 @@
       </p:sp>
       <p:sp>
         <p:nvSpPr>
-          <p:cNvPr id="5" name="Footer Placeholder 4">
-            <a:extLst>
-              <a:ext uri="{FF2B5EF4-FFF2-40B4-BE49-F238E27FC236}">
-                <a16:creationId xmlns:a16="http://schemas.microsoft.com/office/drawing/2014/main" id="{7A21F872-69F2-D5FA-74E2-03D6CB29266A}"/>
-              </a:ext>
-            </a:extLst>
-          </p:cNvPr>
+          <p:cNvPr id="5" name="Footer Placeholder 4"/>
           <p:cNvSpPr>
             <a:spLocks noGrp="1"/>
           </p:cNvSpPr>
@@ -276,7 +298,12 @@
             <p:ph type="ftr" sz="quarter" idx="11"/>
           </p:nvPr>
         </p:nvSpPr>
-        <p:spPr/>
+        <p:spPr>
+          <a:xfrm>
+            <a:off x="1371600" y="4323845"/>
+            <a:ext cx="6400800" cy="365125"/>
+          </a:xfrm>
+        </p:spPr>
         <p:txBody>
           <a:bodyPr/>
           <a:lstStyle/>
@@ -287,13 +314,7 @@
       </p:sp>
       <p:sp>
         <p:nvSpPr>
-          <p:cNvPr id="6" name="Slide Number Placeholder 5">
-            <a:extLst>
-              <a:ext uri="{FF2B5EF4-FFF2-40B4-BE49-F238E27FC236}">
-                <a16:creationId xmlns:a16="http://schemas.microsoft.com/office/drawing/2014/main" id="{F5F481E8-538C-AE3D-BDBB-CFAC1AB14A17}"/>
-              </a:ext>
-            </a:extLst>
-          </p:cNvPr>
+          <p:cNvPr id="6" name="Slide Number Placeholder 5"/>
           <p:cNvSpPr>
             <a:spLocks noGrp="1"/>
           </p:cNvSpPr>
@@ -301,7 +322,12 @@
             <p:ph type="sldNum" sz="quarter" idx="12"/>
           </p:nvPr>
         </p:nvSpPr>
-        <p:spPr/>
+        <p:spPr>
+          <a:xfrm>
+            <a:off x="8077200" y="1430866"/>
+            <a:ext cx="2743200" cy="365125"/>
+          </a:xfrm>
+        </p:spPr>
         <p:txBody>
           <a:bodyPr/>
           <a:lstStyle/>
@@ -317,7 +343,7 @@
     </p:spTree>
     <p:extLst>
       <p:ext uri="{BB962C8B-B14F-4D97-AF65-F5344CB8AC3E}">
-        <p14:creationId xmlns:p14="http://schemas.microsoft.com/office/powerpoint/2010/main" val="2602440792"/>
+        <p14:creationId xmlns:p14="http://schemas.microsoft.com/office/powerpoint/2010/main" val="1782243600"/>
       </p:ext>
     </p:extLst>
   </p:cSld>
@@ -328,6 +354,2598 @@
 </file>
 
 <file path=ppt/slideLayouts/slideLayout10.xml><?xml version="1.0" encoding="utf-8"?>
+<p:sldLayout xmlns:a="http://schemas.openxmlformats.org/drawingml/2006/main" xmlns:r="http://schemas.openxmlformats.org/officeDocument/2006/relationships" xmlns:p="http://schemas.openxmlformats.org/presentationml/2006/main" preserve="1">
+  <p:cSld name="Panoramic Picture with Caption">
+    <p:spTree>
+      <p:nvGrpSpPr>
+        <p:cNvPr id="1" name=""/>
+        <p:cNvGrpSpPr/>
+        <p:nvPr/>
+      </p:nvGrpSpPr>
+      <p:grpSpPr>
+        <a:xfrm>
+          <a:off x="0" y="0"/>
+          <a:ext cx="0" cy="0"/>
+          <a:chOff x="0" y="0"/>
+          <a:chExt cx="0" cy="0"/>
+        </a:xfrm>
+      </p:grpSpPr>
+      <p:sp>
+        <p:nvSpPr>
+          <p:cNvPr id="2" name="Title 1"/>
+          <p:cNvSpPr>
+            <a:spLocks noGrp="1"/>
+          </p:cNvSpPr>
+          <p:nvPr>
+            <p:ph type="title"/>
+          </p:nvPr>
+        </p:nvSpPr>
+        <p:spPr>
+          <a:xfrm>
+            <a:off x="685777" y="4697360"/>
+            <a:ext cx="10822034" cy="819355"/>
+          </a:xfrm>
+        </p:spPr>
+        <p:txBody>
+          <a:bodyPr anchor="b"/>
+          <a:lstStyle>
+            <a:lvl1pPr algn="l">
+              <a:defRPr sz="3200"/>
+            </a:lvl1pPr>
+          </a:lstStyle>
+          <a:p>
+            <a:r>
+              <a:rPr lang="en-US"/>
+              <a:t>Click to edit Master title style</a:t>
+            </a:r>
+            <a:endParaRPr lang="en-US" dirty="0"/>
+          </a:p>
+        </p:txBody>
+      </p:sp>
+      <p:sp>
+        <p:nvSpPr>
+          <p:cNvPr id="3" name="Picture Placeholder 2"/>
+          <p:cNvSpPr>
+            <a:spLocks noGrp="1" noChangeAspect="1"/>
+          </p:cNvSpPr>
+          <p:nvPr>
+            <p:ph type="pic" idx="1"/>
+          </p:nvPr>
+        </p:nvSpPr>
+        <p:spPr>
+          <a:xfrm>
+            <a:off x="681727" y="941439"/>
+            <a:ext cx="10821840" cy="3478161"/>
+          </a:xfrm>
+        </p:spPr>
+        <p:txBody>
+          <a:bodyPr anchor="t"/>
+          <a:lstStyle>
+            <a:lvl1pPr marL="0" indent="0">
+              <a:buNone/>
+              <a:defRPr sz="3200"/>
+            </a:lvl1pPr>
+            <a:lvl2pPr marL="457200" indent="0">
+              <a:buNone/>
+              <a:defRPr sz="2800"/>
+            </a:lvl2pPr>
+            <a:lvl3pPr marL="914400" indent="0">
+              <a:buNone/>
+              <a:defRPr sz="2400"/>
+            </a:lvl3pPr>
+            <a:lvl4pPr marL="1371600" indent="0">
+              <a:buNone/>
+              <a:defRPr sz="2000"/>
+            </a:lvl4pPr>
+            <a:lvl5pPr marL="1828800" indent="0">
+              <a:buNone/>
+              <a:defRPr sz="2000"/>
+            </a:lvl5pPr>
+            <a:lvl6pPr marL="2286000" indent="0">
+              <a:buNone/>
+              <a:defRPr sz="2000"/>
+            </a:lvl6pPr>
+            <a:lvl7pPr marL="2743200" indent="0">
+              <a:buNone/>
+              <a:defRPr sz="2000"/>
+            </a:lvl7pPr>
+            <a:lvl8pPr marL="3200400" indent="0">
+              <a:buNone/>
+              <a:defRPr sz="2000"/>
+            </a:lvl8pPr>
+            <a:lvl9pPr marL="3657600" indent="0">
+              <a:buNone/>
+              <a:defRPr sz="2000"/>
+            </a:lvl9pPr>
+          </a:lstStyle>
+          <a:p>
+            <a:r>
+              <a:rPr lang="en-US"/>
+              <a:t>Click icon to add picture</a:t>
+            </a:r>
+            <a:endParaRPr lang="en-US" dirty="0"/>
+          </a:p>
+        </p:txBody>
+      </p:sp>
+      <p:sp>
+        <p:nvSpPr>
+          <p:cNvPr id="4" name="Text Placeholder 3"/>
+          <p:cNvSpPr>
+            <a:spLocks noGrp="1"/>
+          </p:cNvSpPr>
+          <p:nvPr>
+            <p:ph type="body" sz="half" idx="2"/>
+          </p:nvPr>
+        </p:nvSpPr>
+        <p:spPr>
+          <a:xfrm>
+            <a:off x="685800" y="5516715"/>
+            <a:ext cx="10820400" cy="701969"/>
+          </a:xfrm>
+        </p:spPr>
+        <p:txBody>
+          <a:bodyPr/>
+          <a:lstStyle>
+            <a:lvl1pPr marL="0" indent="0" algn="l">
+              <a:buNone/>
+              <a:defRPr sz="1600"/>
+            </a:lvl1pPr>
+            <a:lvl2pPr marL="457200" indent="0">
+              <a:buNone/>
+              <a:defRPr sz="1400"/>
+            </a:lvl2pPr>
+            <a:lvl3pPr marL="914400" indent="0">
+              <a:buNone/>
+              <a:defRPr sz="1200"/>
+            </a:lvl3pPr>
+            <a:lvl4pPr marL="1371600" indent="0">
+              <a:buNone/>
+              <a:defRPr sz="1000"/>
+            </a:lvl4pPr>
+            <a:lvl5pPr marL="1828800" indent="0">
+              <a:buNone/>
+              <a:defRPr sz="1000"/>
+            </a:lvl5pPr>
+            <a:lvl6pPr marL="2286000" indent="0">
+              <a:buNone/>
+              <a:defRPr sz="1000"/>
+            </a:lvl6pPr>
+            <a:lvl7pPr marL="2743200" indent="0">
+              <a:buNone/>
+              <a:defRPr sz="1000"/>
+            </a:lvl7pPr>
+            <a:lvl8pPr marL="3200400" indent="0">
+              <a:buNone/>
+              <a:defRPr sz="1000"/>
+            </a:lvl8pPr>
+            <a:lvl9pPr marL="3657600" indent="0">
+              <a:buNone/>
+              <a:defRPr sz="1000"/>
+            </a:lvl9pPr>
+          </a:lstStyle>
+          <a:p>
+            <a:pPr lvl="0"/>
+            <a:r>
+              <a:rPr lang="en-US"/>
+              <a:t>Click to edit Master text styles</a:t>
+            </a:r>
+          </a:p>
+        </p:txBody>
+      </p:sp>
+      <p:sp>
+        <p:nvSpPr>
+          <p:cNvPr id="5" name="Date Placeholder 4"/>
+          <p:cNvSpPr>
+            <a:spLocks noGrp="1"/>
+          </p:cNvSpPr>
+          <p:nvPr>
+            <p:ph type="dt" sz="half" idx="10"/>
+          </p:nvPr>
+        </p:nvSpPr>
+        <p:spPr/>
+        <p:txBody>
+          <a:bodyPr/>
+          <a:lstStyle/>
+          <a:p>
+            <a:fld id="{3001F3D3-B64E-45E5-A774-FFEE7077F3D9}" type="datetimeFigureOut">
+              <a:rPr lang="en-US" smtClean="0"/>
+              <a:t>6/15/2026</a:t>
+            </a:fld>
+            <a:endParaRPr lang="en-US"/>
+          </a:p>
+        </p:txBody>
+      </p:sp>
+      <p:sp>
+        <p:nvSpPr>
+          <p:cNvPr id="6" name="Footer Placeholder 5"/>
+          <p:cNvSpPr>
+            <a:spLocks noGrp="1"/>
+          </p:cNvSpPr>
+          <p:nvPr>
+            <p:ph type="ftr" sz="quarter" idx="11"/>
+          </p:nvPr>
+        </p:nvSpPr>
+        <p:spPr/>
+        <p:txBody>
+          <a:bodyPr/>
+          <a:lstStyle/>
+          <a:p>
+            <a:endParaRPr lang="en-US"/>
+          </a:p>
+        </p:txBody>
+      </p:sp>
+      <p:sp>
+        <p:nvSpPr>
+          <p:cNvPr id="7" name="Slide Number Placeholder 6"/>
+          <p:cNvSpPr>
+            <a:spLocks noGrp="1"/>
+          </p:cNvSpPr>
+          <p:nvPr>
+            <p:ph type="sldNum" sz="quarter" idx="12"/>
+          </p:nvPr>
+        </p:nvSpPr>
+        <p:spPr/>
+        <p:txBody>
+          <a:bodyPr/>
+          <a:lstStyle/>
+          <a:p>
+            <a:fld id="{97D21221-C6A6-4006-A191-9AD020835639}" type="slidenum">
+              <a:rPr lang="en-US" smtClean="0"/>
+              <a:t>‹#›</a:t>
+            </a:fld>
+            <a:endParaRPr lang="en-US"/>
+          </a:p>
+        </p:txBody>
+      </p:sp>
+    </p:spTree>
+    <p:extLst>
+      <p:ext uri="{BB962C8B-B14F-4D97-AF65-F5344CB8AC3E}">
+        <p14:creationId xmlns:p14="http://schemas.microsoft.com/office/powerpoint/2010/main" val="4261869661"/>
+      </p:ext>
+    </p:extLst>
+  </p:cSld>
+  <p:clrMapOvr>
+    <a:masterClrMapping/>
+  </p:clrMapOvr>
+</p:sldLayout>
+</file>
+
+<file path=ppt/slideLayouts/slideLayout11.xml><?xml version="1.0" encoding="utf-8"?>
+<p:sldLayout xmlns:a="http://schemas.openxmlformats.org/drawingml/2006/main" xmlns:r="http://schemas.openxmlformats.org/officeDocument/2006/relationships" xmlns:p="http://schemas.openxmlformats.org/presentationml/2006/main" showMasterSp="0" preserve="1">
+  <p:cSld name="Title and Caption">
+    <p:spTree>
+      <p:nvGrpSpPr>
+        <p:cNvPr id="1" name=""/>
+        <p:cNvGrpSpPr/>
+        <p:nvPr/>
+      </p:nvGrpSpPr>
+      <p:grpSpPr>
+        <a:xfrm>
+          <a:off x="0" y="0"/>
+          <a:ext cx="0" cy="0"/>
+          <a:chOff x="0" y="0"/>
+          <a:chExt cx="0" cy="0"/>
+        </a:xfrm>
+      </p:grpSpPr>
+      <p:pic>
+        <p:nvPicPr>
+          <p:cNvPr id="8" name="Picture 7" descr="C0-HD-BTM.png"/>
+          <p:cNvPicPr>
+            <a:picLocks noChangeAspect="1"/>
+          </p:cNvPicPr>
+          <p:nvPr/>
+        </p:nvPicPr>
+        <p:blipFill>
+          <a:blip r:embed="rId2">
+            <a:extLst>
+              <a:ext uri="{28A0092B-C50C-407E-A947-70E740481C1C}">
+                <a14:useLocalDpi xmlns:a14="http://schemas.microsoft.com/office/drawing/2010/main" val="0"/>
+              </a:ext>
+            </a:extLst>
+          </a:blip>
+          <a:stretch>
+            <a:fillRect/>
+          </a:stretch>
+        </p:blipFill>
+        <p:spPr>
+          <a:xfrm>
+            <a:off x="0" y="4375150"/>
+            <a:ext cx="12192000" cy="2482850"/>
+          </a:xfrm>
+          <a:prstGeom prst="rect">
+            <a:avLst/>
+          </a:prstGeom>
+        </p:spPr>
+      </p:pic>
+      <p:sp>
+        <p:nvSpPr>
+          <p:cNvPr id="2" name="Title 1"/>
+          <p:cNvSpPr>
+            <a:spLocks noGrp="1"/>
+          </p:cNvSpPr>
+          <p:nvPr>
+            <p:ph type="title"/>
+          </p:nvPr>
+        </p:nvSpPr>
+        <p:spPr>
+          <a:xfrm>
+            <a:off x="685800" y="753532"/>
+            <a:ext cx="10820400" cy="2802467"/>
+          </a:xfrm>
+        </p:spPr>
+        <p:txBody>
+          <a:bodyPr anchor="ctr"/>
+          <a:lstStyle>
+            <a:lvl1pPr algn="l">
+              <a:defRPr sz="3200"/>
+            </a:lvl1pPr>
+          </a:lstStyle>
+          <a:p>
+            <a:r>
+              <a:rPr lang="en-US"/>
+              <a:t>Click to edit Master title style</a:t>
+            </a:r>
+            <a:endParaRPr lang="en-US" dirty="0"/>
+          </a:p>
+        </p:txBody>
+      </p:sp>
+      <p:sp>
+        <p:nvSpPr>
+          <p:cNvPr id="4" name="Text Placeholder 3"/>
+          <p:cNvSpPr>
+            <a:spLocks noGrp="1"/>
+          </p:cNvSpPr>
+          <p:nvPr>
+            <p:ph type="body" sz="half" idx="2"/>
+          </p:nvPr>
+        </p:nvSpPr>
+        <p:spPr>
+          <a:xfrm>
+            <a:off x="1024467" y="3649133"/>
+            <a:ext cx="10130516" cy="999067"/>
+          </a:xfrm>
+        </p:spPr>
+        <p:txBody>
+          <a:bodyPr anchor="ctr"/>
+          <a:lstStyle>
+            <a:lvl1pPr marL="0" indent="0">
+              <a:buNone/>
+              <a:defRPr sz="1600"/>
+            </a:lvl1pPr>
+            <a:lvl2pPr marL="457200" indent="0">
+              <a:buNone/>
+              <a:defRPr sz="1400"/>
+            </a:lvl2pPr>
+            <a:lvl3pPr marL="914400" indent="0">
+              <a:buNone/>
+              <a:defRPr sz="1200"/>
+            </a:lvl3pPr>
+            <a:lvl4pPr marL="1371600" indent="0">
+              <a:buNone/>
+              <a:defRPr sz="1000"/>
+            </a:lvl4pPr>
+            <a:lvl5pPr marL="1828800" indent="0">
+              <a:buNone/>
+              <a:defRPr sz="1000"/>
+            </a:lvl5pPr>
+            <a:lvl6pPr marL="2286000" indent="0">
+              <a:buNone/>
+              <a:defRPr sz="1000"/>
+            </a:lvl6pPr>
+            <a:lvl7pPr marL="2743200" indent="0">
+              <a:buNone/>
+              <a:defRPr sz="1000"/>
+            </a:lvl7pPr>
+            <a:lvl8pPr marL="3200400" indent="0">
+              <a:buNone/>
+              <a:defRPr sz="1000"/>
+            </a:lvl8pPr>
+            <a:lvl9pPr marL="3657600" indent="0">
+              <a:buNone/>
+              <a:defRPr sz="1000"/>
+            </a:lvl9pPr>
+          </a:lstStyle>
+          <a:p>
+            <a:pPr lvl="0"/>
+            <a:r>
+              <a:rPr lang="en-US"/>
+              <a:t>Click to edit Master text styles</a:t>
+            </a:r>
+          </a:p>
+        </p:txBody>
+      </p:sp>
+      <p:sp>
+        <p:nvSpPr>
+          <p:cNvPr id="5" name="Date Placeholder 4"/>
+          <p:cNvSpPr>
+            <a:spLocks noGrp="1"/>
+          </p:cNvSpPr>
+          <p:nvPr>
+            <p:ph type="dt" sz="half" idx="10"/>
+          </p:nvPr>
+        </p:nvSpPr>
+        <p:spPr>
+          <a:xfrm>
+            <a:off x="7814452" y="381000"/>
+            <a:ext cx="2910840" cy="365125"/>
+          </a:xfrm>
+        </p:spPr>
+        <p:txBody>
+          <a:bodyPr/>
+          <a:lstStyle>
+            <a:lvl1pPr algn="r">
+              <a:defRPr/>
+            </a:lvl1pPr>
+          </a:lstStyle>
+          <a:p>
+            <a:fld id="{3001F3D3-B64E-45E5-A774-FFEE7077F3D9}" type="datetimeFigureOut">
+              <a:rPr lang="en-US" smtClean="0"/>
+              <a:t>6/15/2026</a:t>
+            </a:fld>
+            <a:endParaRPr lang="en-US"/>
+          </a:p>
+        </p:txBody>
+      </p:sp>
+      <p:sp>
+        <p:nvSpPr>
+          <p:cNvPr id="6" name="Footer Placeholder 5"/>
+          <p:cNvSpPr>
+            <a:spLocks noGrp="1"/>
+          </p:cNvSpPr>
+          <p:nvPr>
+            <p:ph type="ftr" sz="quarter" idx="11"/>
+          </p:nvPr>
+        </p:nvSpPr>
+        <p:spPr>
+          <a:xfrm>
+            <a:off x="685800" y="379941"/>
+            <a:ext cx="6991492" cy="365125"/>
+          </a:xfrm>
+        </p:spPr>
+        <p:txBody>
+          <a:bodyPr/>
+          <a:lstStyle/>
+          <a:p>
+            <a:endParaRPr lang="en-US"/>
+          </a:p>
+        </p:txBody>
+      </p:sp>
+      <p:sp>
+        <p:nvSpPr>
+          <p:cNvPr id="7" name="Slide Number Placeholder 6"/>
+          <p:cNvSpPr>
+            <a:spLocks noGrp="1"/>
+          </p:cNvSpPr>
+          <p:nvPr>
+            <p:ph type="sldNum" sz="quarter" idx="12"/>
+          </p:nvPr>
+        </p:nvSpPr>
+        <p:spPr>
+          <a:xfrm>
+            <a:off x="10862452" y="381000"/>
+            <a:ext cx="643748" cy="365125"/>
+          </a:xfrm>
+        </p:spPr>
+        <p:txBody>
+          <a:bodyPr/>
+          <a:lstStyle/>
+          <a:p>
+            <a:fld id="{97D21221-C6A6-4006-A191-9AD020835639}" type="slidenum">
+              <a:rPr lang="en-US" smtClean="0"/>
+              <a:t>‹#›</a:t>
+            </a:fld>
+            <a:endParaRPr lang="en-US"/>
+          </a:p>
+        </p:txBody>
+      </p:sp>
+    </p:spTree>
+    <p:extLst>
+      <p:ext uri="{BB962C8B-B14F-4D97-AF65-F5344CB8AC3E}">
+        <p14:creationId xmlns:p14="http://schemas.microsoft.com/office/powerpoint/2010/main" val="4116222428"/>
+      </p:ext>
+    </p:extLst>
+  </p:cSld>
+  <p:clrMapOvr>
+    <a:masterClrMapping/>
+  </p:clrMapOvr>
+</p:sldLayout>
+</file>
+
+<file path=ppt/slideLayouts/slideLayout12.xml><?xml version="1.0" encoding="utf-8"?>
+<p:sldLayout xmlns:a="http://schemas.openxmlformats.org/drawingml/2006/main" xmlns:r="http://schemas.openxmlformats.org/officeDocument/2006/relationships" xmlns:p="http://schemas.openxmlformats.org/presentationml/2006/main" showMasterSp="0" preserve="1">
+  <p:cSld name="Quote with Caption">
+    <p:spTree>
+      <p:nvGrpSpPr>
+        <p:cNvPr id="1" name=""/>
+        <p:cNvGrpSpPr/>
+        <p:nvPr/>
+      </p:nvGrpSpPr>
+      <p:grpSpPr>
+        <a:xfrm>
+          <a:off x="0" y="0"/>
+          <a:ext cx="0" cy="0"/>
+          <a:chOff x="0" y="0"/>
+          <a:chExt cx="0" cy="0"/>
+        </a:xfrm>
+      </p:grpSpPr>
+      <p:pic>
+        <p:nvPicPr>
+          <p:cNvPr id="13" name="Picture 12" descr="C0-HD-BTM.png"/>
+          <p:cNvPicPr>
+            <a:picLocks noChangeAspect="1"/>
+          </p:cNvPicPr>
+          <p:nvPr/>
+        </p:nvPicPr>
+        <p:blipFill>
+          <a:blip r:embed="rId2">
+            <a:extLst>
+              <a:ext uri="{28A0092B-C50C-407E-A947-70E740481C1C}">
+                <a14:useLocalDpi xmlns:a14="http://schemas.microsoft.com/office/drawing/2010/main" val="0"/>
+              </a:ext>
+            </a:extLst>
+          </a:blip>
+          <a:stretch>
+            <a:fillRect/>
+          </a:stretch>
+        </p:blipFill>
+        <p:spPr>
+          <a:xfrm>
+            <a:off x="0" y="4375150"/>
+            <a:ext cx="12192000" cy="2482850"/>
+          </a:xfrm>
+          <a:prstGeom prst="rect">
+            <a:avLst/>
+          </a:prstGeom>
+        </p:spPr>
+      </p:pic>
+      <p:sp>
+        <p:nvSpPr>
+          <p:cNvPr id="2" name="Title 1"/>
+          <p:cNvSpPr>
+            <a:spLocks noGrp="1"/>
+          </p:cNvSpPr>
+          <p:nvPr>
+            <p:ph type="title"/>
+          </p:nvPr>
+        </p:nvSpPr>
+        <p:spPr>
+          <a:xfrm>
+            <a:off x="1024467" y="753533"/>
+            <a:ext cx="10151533" cy="2604495"/>
+          </a:xfrm>
+        </p:spPr>
+        <p:txBody>
+          <a:bodyPr anchor="ctr"/>
+          <a:lstStyle>
+            <a:lvl1pPr algn="l">
+              <a:defRPr sz="3200"/>
+            </a:lvl1pPr>
+          </a:lstStyle>
+          <a:p>
+            <a:r>
+              <a:rPr lang="en-US"/>
+              <a:t>Click to edit Master title style</a:t>
+            </a:r>
+            <a:endParaRPr lang="en-US" dirty="0"/>
+          </a:p>
+        </p:txBody>
+      </p:sp>
+      <p:sp>
+        <p:nvSpPr>
+          <p:cNvPr id="12" name="Text Placeholder 3"/>
+          <p:cNvSpPr>
+            <a:spLocks noGrp="1"/>
+          </p:cNvSpPr>
+          <p:nvPr>
+            <p:ph type="body" sz="half" idx="13"/>
+          </p:nvPr>
+        </p:nvSpPr>
+        <p:spPr>
+          <a:xfrm>
+            <a:off x="1303865" y="3365556"/>
+            <a:ext cx="9592736" cy="444443"/>
+          </a:xfrm>
+        </p:spPr>
+        <p:txBody>
+          <a:bodyPr anchor="t">
+            <a:normAutofit/>
+          </a:bodyPr>
+          <a:lstStyle>
+            <a:lvl1pPr marL="0" indent="0">
+              <a:buNone/>
+              <a:defRPr sz="1400"/>
+            </a:lvl1pPr>
+            <a:lvl2pPr marL="457200" indent="0">
+              <a:buNone/>
+              <a:defRPr sz="1400"/>
+            </a:lvl2pPr>
+            <a:lvl3pPr marL="914400" indent="0">
+              <a:buNone/>
+              <a:defRPr sz="1200"/>
+            </a:lvl3pPr>
+            <a:lvl4pPr marL="1371600" indent="0">
+              <a:buNone/>
+              <a:defRPr sz="1000"/>
+            </a:lvl4pPr>
+            <a:lvl5pPr marL="1828800" indent="0">
+              <a:buNone/>
+              <a:defRPr sz="1000"/>
+            </a:lvl5pPr>
+            <a:lvl6pPr marL="2286000" indent="0">
+              <a:buNone/>
+              <a:defRPr sz="1000"/>
+            </a:lvl6pPr>
+            <a:lvl7pPr marL="2743200" indent="0">
+              <a:buNone/>
+              <a:defRPr sz="1000"/>
+            </a:lvl7pPr>
+            <a:lvl8pPr marL="3200400" indent="0">
+              <a:buNone/>
+              <a:defRPr sz="1000"/>
+            </a:lvl8pPr>
+            <a:lvl9pPr marL="3657600" indent="0">
+              <a:buNone/>
+              <a:defRPr sz="1000"/>
+            </a:lvl9pPr>
+          </a:lstStyle>
+          <a:p>
+            <a:pPr lvl="0"/>
+            <a:r>
+              <a:rPr lang="en-US"/>
+              <a:t>Click to edit Master text styles</a:t>
+            </a:r>
+          </a:p>
+        </p:txBody>
+      </p:sp>
+      <p:sp>
+        <p:nvSpPr>
+          <p:cNvPr id="4" name="Text Placeholder 3"/>
+          <p:cNvSpPr>
+            <a:spLocks noGrp="1"/>
+          </p:cNvSpPr>
+          <p:nvPr>
+            <p:ph type="body" sz="half" idx="2"/>
+          </p:nvPr>
+        </p:nvSpPr>
+        <p:spPr>
+          <a:xfrm>
+            <a:off x="1024467" y="3959862"/>
+            <a:ext cx="10151533" cy="679871"/>
+          </a:xfrm>
+        </p:spPr>
+        <p:txBody>
+          <a:bodyPr anchor="ctr">
+            <a:normAutofit/>
+          </a:bodyPr>
+          <a:lstStyle>
+            <a:lvl1pPr marL="0" indent="0">
+              <a:buNone/>
+              <a:defRPr sz="1600"/>
+            </a:lvl1pPr>
+            <a:lvl2pPr marL="457200" indent="0">
+              <a:buNone/>
+              <a:defRPr sz="1400"/>
+            </a:lvl2pPr>
+            <a:lvl3pPr marL="914400" indent="0">
+              <a:buNone/>
+              <a:defRPr sz="1200"/>
+            </a:lvl3pPr>
+            <a:lvl4pPr marL="1371600" indent="0">
+              <a:buNone/>
+              <a:defRPr sz="1000"/>
+            </a:lvl4pPr>
+            <a:lvl5pPr marL="1828800" indent="0">
+              <a:buNone/>
+              <a:defRPr sz="1000"/>
+            </a:lvl5pPr>
+            <a:lvl6pPr marL="2286000" indent="0">
+              <a:buNone/>
+              <a:defRPr sz="1000"/>
+            </a:lvl6pPr>
+            <a:lvl7pPr marL="2743200" indent="0">
+              <a:buNone/>
+              <a:defRPr sz="1000"/>
+            </a:lvl7pPr>
+            <a:lvl8pPr marL="3200400" indent="0">
+              <a:buNone/>
+              <a:defRPr sz="1000"/>
+            </a:lvl8pPr>
+            <a:lvl9pPr marL="3657600" indent="0">
+              <a:buNone/>
+              <a:defRPr sz="1000"/>
+            </a:lvl9pPr>
+          </a:lstStyle>
+          <a:p>
+            <a:pPr lvl="0"/>
+            <a:r>
+              <a:rPr lang="en-US"/>
+              <a:t>Click to edit Master text styles</a:t>
+            </a:r>
+          </a:p>
+        </p:txBody>
+      </p:sp>
+      <p:sp>
+        <p:nvSpPr>
+          <p:cNvPr id="5" name="Date Placeholder 4"/>
+          <p:cNvSpPr>
+            <a:spLocks noGrp="1"/>
+          </p:cNvSpPr>
+          <p:nvPr>
+            <p:ph type="dt" sz="half" idx="10"/>
+          </p:nvPr>
+        </p:nvSpPr>
+        <p:spPr>
+          <a:xfrm>
+            <a:off x="7814452" y="381000"/>
+            <a:ext cx="2910840" cy="365125"/>
+          </a:xfrm>
+        </p:spPr>
+        <p:txBody>
+          <a:bodyPr/>
+          <a:lstStyle>
+            <a:lvl1pPr algn="r">
+              <a:defRPr/>
+            </a:lvl1pPr>
+          </a:lstStyle>
+          <a:p>
+            <a:fld id="{3001F3D3-B64E-45E5-A774-FFEE7077F3D9}" type="datetimeFigureOut">
+              <a:rPr lang="en-US" smtClean="0"/>
+              <a:t>6/15/2026</a:t>
+            </a:fld>
+            <a:endParaRPr lang="en-US"/>
+          </a:p>
+        </p:txBody>
+      </p:sp>
+      <p:sp>
+        <p:nvSpPr>
+          <p:cNvPr id="6" name="Footer Placeholder 5"/>
+          <p:cNvSpPr>
+            <a:spLocks noGrp="1"/>
+          </p:cNvSpPr>
+          <p:nvPr>
+            <p:ph type="ftr" sz="quarter" idx="11"/>
+          </p:nvPr>
+        </p:nvSpPr>
+        <p:spPr>
+          <a:xfrm>
+            <a:off x="685800" y="379941"/>
+            <a:ext cx="6991492" cy="365125"/>
+          </a:xfrm>
+        </p:spPr>
+        <p:txBody>
+          <a:bodyPr/>
+          <a:lstStyle/>
+          <a:p>
+            <a:endParaRPr lang="en-US"/>
+          </a:p>
+        </p:txBody>
+      </p:sp>
+      <p:sp>
+        <p:nvSpPr>
+          <p:cNvPr id="7" name="Slide Number Placeholder 6"/>
+          <p:cNvSpPr>
+            <a:spLocks noGrp="1"/>
+          </p:cNvSpPr>
+          <p:nvPr>
+            <p:ph type="sldNum" sz="quarter" idx="12"/>
+          </p:nvPr>
+        </p:nvSpPr>
+        <p:spPr>
+          <a:xfrm>
+            <a:off x="10862452" y="381000"/>
+            <a:ext cx="643748" cy="365125"/>
+          </a:xfrm>
+        </p:spPr>
+        <p:txBody>
+          <a:bodyPr/>
+          <a:lstStyle/>
+          <a:p>
+            <a:fld id="{97D21221-C6A6-4006-A191-9AD020835639}" type="slidenum">
+              <a:rPr lang="en-US" smtClean="0"/>
+              <a:t>‹#›</a:t>
+            </a:fld>
+            <a:endParaRPr lang="en-US"/>
+          </a:p>
+        </p:txBody>
+      </p:sp>
+      <p:sp>
+        <p:nvSpPr>
+          <p:cNvPr id="9" name="TextBox 8"/>
+          <p:cNvSpPr txBox="1"/>
+          <p:nvPr/>
+        </p:nvSpPr>
+        <p:spPr>
+          <a:xfrm>
+            <a:off x="476250" y="933450"/>
+            <a:ext cx="609600" cy="584776"/>
+          </a:xfrm>
+          <a:prstGeom prst="rect">
+            <a:avLst/>
+          </a:prstGeom>
+        </p:spPr>
+        <p:txBody>
+          <a:bodyPr vert="horz" lIns="91440" tIns="45720" rIns="91440" bIns="45720" rtlCol="0" anchor="ctr">
+            <a:noAutofit/>
+          </a:bodyPr>
+          <a:lstStyle>
+            <a:lvl1pPr>
+              <a:spcBef>
+                <a:spcPct val="0"/>
+              </a:spcBef>
+              <a:buNone/>
+              <a:defRPr sz="3200" b="0" cap="all">
+                <a:ln w="3175" cmpd="sng">
+                  <a:noFill/>
+                </a:ln>
+                <a:effectLst>
+                  <a:glow rad="38100">
+                    <a:schemeClr val="bg1">
+                      <a:lumMod val="65000"/>
+                      <a:lumOff val="35000"/>
+                      <a:alpha val="40000"/>
+                    </a:schemeClr>
+                  </a:glow>
+                  <a:outerShdw blurRad="28575" dist="38100" dir="14040000" algn="tl" rotWithShape="0">
+                    <a:srgbClr val="000000">
+                      <a:alpha val="25000"/>
+                    </a:srgbClr>
+                  </a:outerShdw>
+                </a:effectLst>
+              </a:defRPr>
+            </a:lvl1pPr>
+            <a:lvl2pPr>
+              <a:defRPr>
+                <a:solidFill>
+                  <a:schemeClr val="tx2"/>
+                </a:solidFill>
+              </a:defRPr>
+            </a:lvl2pPr>
+            <a:lvl3pPr>
+              <a:defRPr>
+                <a:solidFill>
+                  <a:schemeClr val="tx2"/>
+                </a:solidFill>
+              </a:defRPr>
+            </a:lvl3pPr>
+            <a:lvl4pPr>
+              <a:defRPr>
+                <a:solidFill>
+                  <a:schemeClr val="tx2"/>
+                </a:solidFill>
+              </a:defRPr>
+            </a:lvl4pPr>
+            <a:lvl5pPr>
+              <a:defRPr>
+                <a:solidFill>
+                  <a:schemeClr val="tx2"/>
+                </a:solidFill>
+              </a:defRPr>
+            </a:lvl5pPr>
+            <a:lvl6pPr>
+              <a:defRPr>
+                <a:solidFill>
+                  <a:schemeClr val="tx2"/>
+                </a:solidFill>
+              </a:defRPr>
+            </a:lvl6pPr>
+            <a:lvl7pPr>
+              <a:defRPr>
+                <a:solidFill>
+                  <a:schemeClr val="tx2"/>
+                </a:solidFill>
+              </a:defRPr>
+            </a:lvl7pPr>
+            <a:lvl8pPr>
+              <a:defRPr>
+                <a:solidFill>
+                  <a:schemeClr val="tx2"/>
+                </a:solidFill>
+              </a:defRPr>
+            </a:lvl8pPr>
+            <a:lvl9pPr>
+              <a:defRPr>
+                <a:solidFill>
+                  <a:schemeClr val="tx2"/>
+                </a:solidFill>
+              </a:defRPr>
+            </a:lvl9pPr>
+          </a:lstStyle>
+          <a:p>
+            <a:pPr lvl="0"/>
+            <a:r>
+              <a:rPr lang="en-US" sz="8000" dirty="0">
+                <a:solidFill>
+                  <a:schemeClr val="tx1"/>
+                </a:solidFill>
+                <a:effectLst/>
+              </a:rPr>
+              <a:t>“</a:t>
+            </a:r>
+          </a:p>
+        </p:txBody>
+      </p:sp>
+      <p:sp>
+        <p:nvSpPr>
+          <p:cNvPr id="10" name="TextBox 9"/>
+          <p:cNvSpPr txBox="1"/>
+          <p:nvPr/>
+        </p:nvSpPr>
+        <p:spPr>
+          <a:xfrm>
+            <a:off x="10984230" y="2701290"/>
+            <a:ext cx="609600" cy="584776"/>
+          </a:xfrm>
+          <a:prstGeom prst="rect">
+            <a:avLst/>
+          </a:prstGeom>
+        </p:spPr>
+        <p:txBody>
+          <a:bodyPr vert="horz" lIns="91440" tIns="45720" rIns="91440" bIns="45720" rtlCol="0" anchor="ctr">
+            <a:noAutofit/>
+          </a:bodyPr>
+          <a:lstStyle>
+            <a:lvl1pPr>
+              <a:spcBef>
+                <a:spcPct val="0"/>
+              </a:spcBef>
+              <a:buNone/>
+              <a:defRPr sz="3200" b="0" cap="all">
+                <a:ln w="3175" cmpd="sng">
+                  <a:noFill/>
+                </a:ln>
+                <a:effectLst>
+                  <a:glow rad="38100">
+                    <a:schemeClr val="bg1">
+                      <a:lumMod val="65000"/>
+                      <a:lumOff val="35000"/>
+                      <a:alpha val="40000"/>
+                    </a:schemeClr>
+                  </a:glow>
+                  <a:outerShdw blurRad="28575" dist="38100" dir="14040000" algn="tl" rotWithShape="0">
+                    <a:srgbClr val="000000">
+                      <a:alpha val="25000"/>
+                    </a:srgbClr>
+                  </a:outerShdw>
+                </a:effectLst>
+              </a:defRPr>
+            </a:lvl1pPr>
+            <a:lvl2pPr>
+              <a:defRPr>
+                <a:solidFill>
+                  <a:schemeClr val="tx2"/>
+                </a:solidFill>
+              </a:defRPr>
+            </a:lvl2pPr>
+            <a:lvl3pPr>
+              <a:defRPr>
+                <a:solidFill>
+                  <a:schemeClr val="tx2"/>
+                </a:solidFill>
+              </a:defRPr>
+            </a:lvl3pPr>
+            <a:lvl4pPr>
+              <a:defRPr>
+                <a:solidFill>
+                  <a:schemeClr val="tx2"/>
+                </a:solidFill>
+              </a:defRPr>
+            </a:lvl4pPr>
+            <a:lvl5pPr>
+              <a:defRPr>
+                <a:solidFill>
+                  <a:schemeClr val="tx2"/>
+                </a:solidFill>
+              </a:defRPr>
+            </a:lvl5pPr>
+            <a:lvl6pPr>
+              <a:defRPr>
+                <a:solidFill>
+                  <a:schemeClr val="tx2"/>
+                </a:solidFill>
+              </a:defRPr>
+            </a:lvl6pPr>
+            <a:lvl7pPr>
+              <a:defRPr>
+                <a:solidFill>
+                  <a:schemeClr val="tx2"/>
+                </a:solidFill>
+              </a:defRPr>
+            </a:lvl7pPr>
+            <a:lvl8pPr>
+              <a:defRPr>
+                <a:solidFill>
+                  <a:schemeClr val="tx2"/>
+                </a:solidFill>
+              </a:defRPr>
+            </a:lvl8pPr>
+            <a:lvl9pPr>
+              <a:defRPr>
+                <a:solidFill>
+                  <a:schemeClr val="tx2"/>
+                </a:solidFill>
+              </a:defRPr>
+            </a:lvl9pPr>
+          </a:lstStyle>
+          <a:p>
+            <a:pPr lvl="0" algn="r"/>
+            <a:r>
+              <a:rPr lang="en-US" sz="8000" dirty="0">
+                <a:solidFill>
+                  <a:schemeClr val="tx1"/>
+                </a:solidFill>
+                <a:effectLst/>
+              </a:rPr>
+              <a:t>”</a:t>
+            </a:r>
+          </a:p>
+        </p:txBody>
+      </p:sp>
+    </p:spTree>
+    <p:extLst>
+      <p:ext uri="{BB962C8B-B14F-4D97-AF65-F5344CB8AC3E}">
+        <p14:creationId xmlns:p14="http://schemas.microsoft.com/office/powerpoint/2010/main" val="1152442554"/>
+      </p:ext>
+    </p:extLst>
+  </p:cSld>
+  <p:clrMapOvr>
+    <a:masterClrMapping/>
+  </p:clrMapOvr>
+</p:sldLayout>
+</file>
+
+<file path=ppt/slideLayouts/slideLayout13.xml><?xml version="1.0" encoding="utf-8"?>
+<p:sldLayout xmlns:a="http://schemas.openxmlformats.org/drawingml/2006/main" xmlns:r="http://schemas.openxmlformats.org/officeDocument/2006/relationships" xmlns:p="http://schemas.openxmlformats.org/presentationml/2006/main" showMasterSp="0" preserve="1">
+  <p:cSld name="Name Card">
+    <p:spTree>
+      <p:nvGrpSpPr>
+        <p:cNvPr id="1" name=""/>
+        <p:cNvGrpSpPr/>
+        <p:nvPr/>
+      </p:nvGrpSpPr>
+      <p:grpSpPr>
+        <a:xfrm>
+          <a:off x="0" y="0"/>
+          <a:ext cx="0" cy="0"/>
+          <a:chOff x="0" y="0"/>
+          <a:chExt cx="0" cy="0"/>
+        </a:xfrm>
+      </p:grpSpPr>
+      <p:pic>
+        <p:nvPicPr>
+          <p:cNvPr id="9" name="Picture 8" descr="C0-HD-BTM.png"/>
+          <p:cNvPicPr>
+            <a:picLocks noChangeAspect="1"/>
+          </p:cNvPicPr>
+          <p:nvPr/>
+        </p:nvPicPr>
+        <p:blipFill>
+          <a:blip r:embed="rId2">
+            <a:extLst>
+              <a:ext uri="{28A0092B-C50C-407E-A947-70E740481C1C}">
+                <a14:useLocalDpi xmlns:a14="http://schemas.microsoft.com/office/drawing/2010/main" val="0"/>
+              </a:ext>
+            </a:extLst>
+          </a:blip>
+          <a:stretch>
+            <a:fillRect/>
+          </a:stretch>
+        </p:blipFill>
+        <p:spPr>
+          <a:xfrm>
+            <a:off x="0" y="4375150"/>
+            <a:ext cx="12192000" cy="2482850"/>
+          </a:xfrm>
+          <a:prstGeom prst="rect">
+            <a:avLst/>
+          </a:prstGeom>
+        </p:spPr>
+      </p:pic>
+      <p:sp>
+        <p:nvSpPr>
+          <p:cNvPr id="2" name="Title 1"/>
+          <p:cNvSpPr>
+            <a:spLocks noGrp="1"/>
+          </p:cNvSpPr>
+          <p:nvPr>
+            <p:ph type="title"/>
+          </p:nvPr>
+        </p:nvSpPr>
+        <p:spPr>
+          <a:xfrm>
+            <a:off x="1024495" y="1124701"/>
+            <a:ext cx="10146186" cy="2511835"/>
+          </a:xfrm>
+        </p:spPr>
+        <p:txBody>
+          <a:bodyPr anchor="b"/>
+          <a:lstStyle>
+            <a:lvl1pPr algn="l">
+              <a:defRPr sz="3200"/>
+            </a:lvl1pPr>
+          </a:lstStyle>
+          <a:p>
+            <a:r>
+              <a:rPr lang="en-US"/>
+              <a:t>Click to edit Master title style</a:t>
+            </a:r>
+            <a:endParaRPr lang="en-US" dirty="0"/>
+          </a:p>
+        </p:txBody>
+      </p:sp>
+      <p:sp>
+        <p:nvSpPr>
+          <p:cNvPr id="4" name="Text Placeholder 3"/>
+          <p:cNvSpPr>
+            <a:spLocks noGrp="1"/>
+          </p:cNvSpPr>
+          <p:nvPr>
+            <p:ph type="body" sz="half" idx="2"/>
+          </p:nvPr>
+        </p:nvSpPr>
+        <p:spPr>
+          <a:xfrm>
+            <a:off x="1024467" y="3648315"/>
+            <a:ext cx="10144654" cy="999885"/>
+          </a:xfrm>
+        </p:spPr>
+        <p:txBody>
+          <a:bodyPr anchor="t"/>
+          <a:lstStyle>
+            <a:lvl1pPr marL="0" indent="0">
+              <a:buNone/>
+              <a:defRPr sz="1600"/>
+            </a:lvl1pPr>
+            <a:lvl2pPr marL="457200" indent="0">
+              <a:buNone/>
+              <a:defRPr sz="1400"/>
+            </a:lvl2pPr>
+            <a:lvl3pPr marL="914400" indent="0">
+              <a:buNone/>
+              <a:defRPr sz="1200"/>
+            </a:lvl3pPr>
+            <a:lvl4pPr marL="1371600" indent="0">
+              <a:buNone/>
+              <a:defRPr sz="1000"/>
+            </a:lvl4pPr>
+            <a:lvl5pPr marL="1828800" indent="0">
+              <a:buNone/>
+              <a:defRPr sz="1000"/>
+            </a:lvl5pPr>
+            <a:lvl6pPr marL="2286000" indent="0">
+              <a:buNone/>
+              <a:defRPr sz="1000"/>
+            </a:lvl6pPr>
+            <a:lvl7pPr marL="2743200" indent="0">
+              <a:buNone/>
+              <a:defRPr sz="1000"/>
+            </a:lvl7pPr>
+            <a:lvl8pPr marL="3200400" indent="0">
+              <a:buNone/>
+              <a:defRPr sz="1000"/>
+            </a:lvl8pPr>
+            <a:lvl9pPr marL="3657600" indent="0">
+              <a:buNone/>
+              <a:defRPr sz="1000"/>
+            </a:lvl9pPr>
+          </a:lstStyle>
+          <a:p>
+            <a:pPr lvl="0"/>
+            <a:r>
+              <a:rPr lang="en-US"/>
+              <a:t>Click to edit Master text styles</a:t>
+            </a:r>
+          </a:p>
+        </p:txBody>
+      </p:sp>
+      <p:sp>
+        <p:nvSpPr>
+          <p:cNvPr id="5" name="Date Placeholder 4"/>
+          <p:cNvSpPr>
+            <a:spLocks noGrp="1"/>
+          </p:cNvSpPr>
+          <p:nvPr>
+            <p:ph type="dt" sz="half" idx="10"/>
+          </p:nvPr>
+        </p:nvSpPr>
+        <p:spPr>
+          <a:xfrm>
+            <a:off x="7814452" y="378883"/>
+            <a:ext cx="2910840" cy="365125"/>
+          </a:xfrm>
+        </p:spPr>
+        <p:txBody>
+          <a:bodyPr/>
+          <a:lstStyle>
+            <a:lvl1pPr algn="r">
+              <a:defRPr/>
+            </a:lvl1pPr>
+          </a:lstStyle>
+          <a:p>
+            <a:fld id="{3001F3D3-B64E-45E5-A774-FFEE7077F3D9}" type="datetimeFigureOut">
+              <a:rPr lang="en-US" smtClean="0"/>
+              <a:t>6/15/2026</a:t>
+            </a:fld>
+            <a:endParaRPr lang="en-US"/>
+          </a:p>
+        </p:txBody>
+      </p:sp>
+      <p:sp>
+        <p:nvSpPr>
+          <p:cNvPr id="6" name="Footer Placeholder 5"/>
+          <p:cNvSpPr>
+            <a:spLocks noGrp="1"/>
+          </p:cNvSpPr>
+          <p:nvPr>
+            <p:ph type="ftr" sz="quarter" idx="11"/>
+          </p:nvPr>
+        </p:nvSpPr>
+        <p:spPr>
+          <a:xfrm>
+            <a:off x="685800" y="378883"/>
+            <a:ext cx="6991492" cy="365125"/>
+          </a:xfrm>
+        </p:spPr>
+        <p:txBody>
+          <a:bodyPr/>
+          <a:lstStyle/>
+          <a:p>
+            <a:endParaRPr lang="en-US"/>
+          </a:p>
+        </p:txBody>
+      </p:sp>
+      <p:sp>
+        <p:nvSpPr>
+          <p:cNvPr id="7" name="Slide Number Placeholder 6"/>
+          <p:cNvSpPr>
+            <a:spLocks noGrp="1"/>
+          </p:cNvSpPr>
+          <p:nvPr>
+            <p:ph type="sldNum" sz="quarter" idx="12"/>
+          </p:nvPr>
+        </p:nvSpPr>
+        <p:spPr>
+          <a:xfrm>
+            <a:off x="10862452" y="381000"/>
+            <a:ext cx="643748" cy="365125"/>
+          </a:xfrm>
+        </p:spPr>
+        <p:txBody>
+          <a:bodyPr/>
+          <a:lstStyle/>
+          <a:p>
+            <a:fld id="{97D21221-C6A6-4006-A191-9AD020835639}" type="slidenum">
+              <a:rPr lang="en-US" smtClean="0"/>
+              <a:t>‹#›</a:t>
+            </a:fld>
+            <a:endParaRPr lang="en-US"/>
+          </a:p>
+        </p:txBody>
+      </p:sp>
+    </p:spTree>
+    <p:extLst>
+      <p:ext uri="{BB962C8B-B14F-4D97-AF65-F5344CB8AC3E}">
+        <p14:creationId xmlns:p14="http://schemas.microsoft.com/office/powerpoint/2010/main" val="3185674226"/>
+      </p:ext>
+    </p:extLst>
+  </p:cSld>
+  <p:clrMapOvr>
+    <a:masterClrMapping/>
+  </p:clrMapOvr>
+</p:sldLayout>
+</file>
+
+<file path=ppt/slideLayouts/slideLayout14.xml><?xml version="1.0" encoding="utf-8"?>
+<p:sldLayout xmlns:a="http://schemas.openxmlformats.org/drawingml/2006/main" xmlns:r="http://schemas.openxmlformats.org/officeDocument/2006/relationships" xmlns:p="http://schemas.openxmlformats.org/presentationml/2006/main" preserve="1">
+  <p:cSld name="3 Column">
+    <p:spTree>
+      <p:nvGrpSpPr>
+        <p:cNvPr id="1" name=""/>
+        <p:cNvGrpSpPr/>
+        <p:nvPr/>
+      </p:nvGrpSpPr>
+      <p:grpSpPr>
+        <a:xfrm>
+          <a:off x="0" y="0"/>
+          <a:ext cx="0" cy="0"/>
+          <a:chOff x="0" y="0"/>
+          <a:chExt cx="0" cy="0"/>
+        </a:xfrm>
+      </p:grpSpPr>
+      <p:sp>
+        <p:nvSpPr>
+          <p:cNvPr id="15" name="Title 1"/>
+          <p:cNvSpPr>
+            <a:spLocks noGrp="1"/>
+          </p:cNvSpPr>
+          <p:nvPr>
+            <p:ph type="title"/>
+          </p:nvPr>
+        </p:nvSpPr>
+        <p:spPr>
+          <a:xfrm>
+            <a:off x="2895600" y="761999"/>
+            <a:ext cx="8610599" cy="1303867"/>
+          </a:xfrm>
+        </p:spPr>
+        <p:txBody>
+          <a:bodyPr/>
+          <a:lstStyle/>
+          <a:p>
+            <a:r>
+              <a:rPr lang="en-US"/>
+              <a:t>Click to edit Master title style</a:t>
+            </a:r>
+            <a:endParaRPr lang="en-US" dirty="0"/>
+          </a:p>
+        </p:txBody>
+      </p:sp>
+      <p:sp>
+        <p:nvSpPr>
+          <p:cNvPr id="7" name="Text Placeholder 2"/>
+          <p:cNvSpPr>
+            <a:spLocks noGrp="1"/>
+          </p:cNvSpPr>
+          <p:nvPr>
+            <p:ph type="body" idx="1"/>
+          </p:nvPr>
+        </p:nvSpPr>
+        <p:spPr>
+          <a:xfrm>
+            <a:off x="685800" y="2202080"/>
+            <a:ext cx="3456432" cy="617320"/>
+          </a:xfrm>
+        </p:spPr>
+        <p:txBody>
+          <a:bodyPr anchor="b">
+            <a:noAutofit/>
+          </a:bodyPr>
+          <a:lstStyle>
+            <a:lvl1pPr marL="0" indent="0">
+              <a:buNone/>
+              <a:defRPr sz="2400" b="0">
+                <a:solidFill>
+                  <a:schemeClr val="tx1"/>
+                </a:solidFill>
+              </a:defRPr>
+            </a:lvl1pPr>
+            <a:lvl2pPr marL="457200" indent="0">
+              <a:buNone/>
+              <a:defRPr sz="2000" b="1"/>
+            </a:lvl2pPr>
+            <a:lvl3pPr marL="914400" indent="0">
+              <a:buNone/>
+              <a:defRPr sz="1800" b="1"/>
+            </a:lvl3pPr>
+            <a:lvl4pPr marL="1371600" indent="0">
+              <a:buNone/>
+              <a:defRPr sz="1600" b="1"/>
+            </a:lvl4pPr>
+            <a:lvl5pPr marL="1828800" indent="0">
+              <a:buNone/>
+              <a:defRPr sz="1600" b="1"/>
+            </a:lvl5pPr>
+            <a:lvl6pPr marL="2286000" indent="0">
+              <a:buNone/>
+              <a:defRPr sz="1600" b="1"/>
+            </a:lvl6pPr>
+            <a:lvl7pPr marL="2743200" indent="0">
+              <a:buNone/>
+              <a:defRPr sz="1600" b="1"/>
+            </a:lvl7pPr>
+            <a:lvl8pPr marL="3200400" indent="0">
+              <a:buNone/>
+              <a:defRPr sz="1600" b="1"/>
+            </a:lvl8pPr>
+            <a:lvl9pPr marL="3657600" indent="0">
+              <a:buNone/>
+              <a:defRPr sz="1600" b="1"/>
+            </a:lvl9pPr>
+          </a:lstStyle>
+          <a:p>
+            <a:pPr lvl="0"/>
+            <a:r>
+              <a:rPr lang="en-US"/>
+              <a:t>Click to edit Master text styles</a:t>
+            </a:r>
+          </a:p>
+        </p:txBody>
+      </p:sp>
+      <p:sp>
+        <p:nvSpPr>
+          <p:cNvPr id="8" name="Text Placeholder 3"/>
+          <p:cNvSpPr>
+            <a:spLocks noGrp="1"/>
+          </p:cNvSpPr>
+          <p:nvPr>
+            <p:ph type="body" sz="half" idx="15"/>
+          </p:nvPr>
+        </p:nvSpPr>
+        <p:spPr>
+          <a:xfrm>
+            <a:off x="685799" y="2904565"/>
+            <a:ext cx="3456432" cy="3314132"/>
+          </a:xfrm>
+        </p:spPr>
+        <p:txBody>
+          <a:bodyPr anchor="t">
+            <a:normAutofit/>
+          </a:bodyPr>
+          <a:lstStyle>
+            <a:lvl1pPr marL="0" indent="0">
+              <a:buNone/>
+              <a:defRPr sz="1400"/>
+            </a:lvl1pPr>
+            <a:lvl2pPr marL="457200" indent="0">
+              <a:buNone/>
+              <a:defRPr sz="1200"/>
+            </a:lvl2pPr>
+            <a:lvl3pPr marL="914400" indent="0">
+              <a:buNone/>
+              <a:defRPr sz="1000"/>
+            </a:lvl3pPr>
+            <a:lvl4pPr marL="1371600" indent="0">
+              <a:buNone/>
+              <a:defRPr sz="900"/>
+            </a:lvl4pPr>
+            <a:lvl5pPr marL="1828800" indent="0">
+              <a:buNone/>
+              <a:defRPr sz="900"/>
+            </a:lvl5pPr>
+            <a:lvl6pPr marL="2286000" indent="0">
+              <a:buNone/>
+              <a:defRPr sz="900"/>
+            </a:lvl6pPr>
+            <a:lvl7pPr marL="2743200" indent="0">
+              <a:buNone/>
+              <a:defRPr sz="900"/>
+            </a:lvl7pPr>
+            <a:lvl8pPr marL="3200400" indent="0">
+              <a:buNone/>
+              <a:defRPr sz="900"/>
+            </a:lvl8pPr>
+            <a:lvl9pPr marL="3657600" indent="0">
+              <a:buNone/>
+              <a:defRPr sz="900"/>
+            </a:lvl9pPr>
+          </a:lstStyle>
+          <a:p>
+            <a:pPr lvl="0"/>
+            <a:r>
+              <a:rPr lang="en-US"/>
+              <a:t>Click to edit Master text styles</a:t>
+            </a:r>
+          </a:p>
+        </p:txBody>
+      </p:sp>
+      <p:sp>
+        <p:nvSpPr>
+          <p:cNvPr id="9" name="Text Placeholder 4"/>
+          <p:cNvSpPr>
+            <a:spLocks noGrp="1"/>
+          </p:cNvSpPr>
+          <p:nvPr>
+            <p:ph type="body" sz="quarter" idx="3"/>
+          </p:nvPr>
+        </p:nvSpPr>
+        <p:spPr>
+          <a:xfrm>
+            <a:off x="4368800" y="2201333"/>
+            <a:ext cx="3456432" cy="626534"/>
+          </a:xfrm>
+        </p:spPr>
+        <p:txBody>
+          <a:bodyPr anchor="b">
+            <a:noAutofit/>
+          </a:bodyPr>
+          <a:lstStyle>
+            <a:lvl1pPr marL="0" indent="0">
+              <a:buNone/>
+              <a:defRPr sz="2400" b="0">
+                <a:solidFill>
+                  <a:schemeClr val="tx1"/>
+                </a:solidFill>
+              </a:defRPr>
+            </a:lvl1pPr>
+            <a:lvl2pPr marL="457200" indent="0">
+              <a:buNone/>
+              <a:defRPr sz="2000" b="1"/>
+            </a:lvl2pPr>
+            <a:lvl3pPr marL="914400" indent="0">
+              <a:buNone/>
+              <a:defRPr sz="1800" b="1"/>
+            </a:lvl3pPr>
+            <a:lvl4pPr marL="1371600" indent="0">
+              <a:buNone/>
+              <a:defRPr sz="1600" b="1"/>
+            </a:lvl4pPr>
+            <a:lvl5pPr marL="1828800" indent="0">
+              <a:buNone/>
+              <a:defRPr sz="1600" b="1"/>
+            </a:lvl5pPr>
+            <a:lvl6pPr marL="2286000" indent="0">
+              <a:buNone/>
+              <a:defRPr sz="1600" b="1"/>
+            </a:lvl6pPr>
+            <a:lvl7pPr marL="2743200" indent="0">
+              <a:buNone/>
+              <a:defRPr sz="1600" b="1"/>
+            </a:lvl7pPr>
+            <a:lvl8pPr marL="3200400" indent="0">
+              <a:buNone/>
+              <a:defRPr sz="1600" b="1"/>
+            </a:lvl8pPr>
+            <a:lvl9pPr marL="3657600" indent="0">
+              <a:buNone/>
+              <a:defRPr sz="1600" b="1"/>
+            </a:lvl9pPr>
+          </a:lstStyle>
+          <a:p>
+            <a:pPr lvl="0"/>
+            <a:r>
+              <a:rPr lang="en-US"/>
+              <a:t>Click to edit Master text styles</a:t>
+            </a:r>
+          </a:p>
+        </p:txBody>
+      </p:sp>
+      <p:sp>
+        <p:nvSpPr>
+          <p:cNvPr id="10" name="Text Placeholder 3"/>
+          <p:cNvSpPr>
+            <a:spLocks noGrp="1"/>
+          </p:cNvSpPr>
+          <p:nvPr>
+            <p:ph type="body" sz="half" idx="16"/>
+          </p:nvPr>
+        </p:nvSpPr>
+        <p:spPr>
+          <a:xfrm>
+            <a:off x="4366858" y="2904067"/>
+            <a:ext cx="3456432" cy="3314618"/>
+          </a:xfrm>
+        </p:spPr>
+        <p:txBody>
+          <a:bodyPr anchor="t">
+            <a:normAutofit/>
+          </a:bodyPr>
+          <a:lstStyle>
+            <a:lvl1pPr marL="0" indent="0">
+              <a:buNone/>
+              <a:defRPr sz="1400"/>
+            </a:lvl1pPr>
+            <a:lvl2pPr marL="457200" indent="0">
+              <a:buNone/>
+              <a:defRPr sz="1200"/>
+            </a:lvl2pPr>
+            <a:lvl3pPr marL="914400" indent="0">
+              <a:buNone/>
+              <a:defRPr sz="1000"/>
+            </a:lvl3pPr>
+            <a:lvl4pPr marL="1371600" indent="0">
+              <a:buNone/>
+              <a:defRPr sz="900"/>
+            </a:lvl4pPr>
+            <a:lvl5pPr marL="1828800" indent="0">
+              <a:buNone/>
+              <a:defRPr sz="900"/>
+            </a:lvl5pPr>
+            <a:lvl6pPr marL="2286000" indent="0">
+              <a:buNone/>
+              <a:defRPr sz="900"/>
+            </a:lvl6pPr>
+            <a:lvl7pPr marL="2743200" indent="0">
+              <a:buNone/>
+              <a:defRPr sz="900"/>
+            </a:lvl7pPr>
+            <a:lvl8pPr marL="3200400" indent="0">
+              <a:buNone/>
+              <a:defRPr sz="900"/>
+            </a:lvl8pPr>
+            <a:lvl9pPr marL="3657600" indent="0">
+              <a:buNone/>
+              <a:defRPr sz="900"/>
+            </a:lvl9pPr>
+          </a:lstStyle>
+          <a:p>
+            <a:pPr lvl="0"/>
+            <a:r>
+              <a:rPr lang="en-US"/>
+              <a:t>Click to edit Master text styles</a:t>
+            </a:r>
+          </a:p>
+        </p:txBody>
+      </p:sp>
+      <p:sp>
+        <p:nvSpPr>
+          <p:cNvPr id="11" name="Text Placeholder 4"/>
+          <p:cNvSpPr>
+            <a:spLocks noGrp="1"/>
+          </p:cNvSpPr>
+          <p:nvPr>
+            <p:ph type="body" sz="quarter" idx="13"/>
+          </p:nvPr>
+        </p:nvSpPr>
+        <p:spPr>
+          <a:xfrm>
+            <a:off x="8051800" y="2192866"/>
+            <a:ext cx="3456432" cy="626534"/>
+          </a:xfrm>
+        </p:spPr>
+        <p:txBody>
+          <a:bodyPr anchor="b">
+            <a:noAutofit/>
+          </a:bodyPr>
+          <a:lstStyle>
+            <a:lvl1pPr marL="0" indent="0">
+              <a:buNone/>
+              <a:defRPr sz="2400" b="0">
+                <a:solidFill>
+                  <a:schemeClr val="tx1"/>
+                </a:solidFill>
+              </a:defRPr>
+            </a:lvl1pPr>
+            <a:lvl2pPr marL="457200" indent="0">
+              <a:buNone/>
+              <a:defRPr sz="2000" b="1"/>
+            </a:lvl2pPr>
+            <a:lvl3pPr marL="914400" indent="0">
+              <a:buNone/>
+              <a:defRPr sz="1800" b="1"/>
+            </a:lvl3pPr>
+            <a:lvl4pPr marL="1371600" indent="0">
+              <a:buNone/>
+              <a:defRPr sz="1600" b="1"/>
+            </a:lvl4pPr>
+            <a:lvl5pPr marL="1828800" indent="0">
+              <a:buNone/>
+              <a:defRPr sz="1600" b="1"/>
+            </a:lvl5pPr>
+            <a:lvl6pPr marL="2286000" indent="0">
+              <a:buNone/>
+              <a:defRPr sz="1600" b="1"/>
+            </a:lvl6pPr>
+            <a:lvl7pPr marL="2743200" indent="0">
+              <a:buNone/>
+              <a:defRPr sz="1600" b="1"/>
+            </a:lvl7pPr>
+            <a:lvl8pPr marL="3200400" indent="0">
+              <a:buNone/>
+              <a:defRPr sz="1600" b="1"/>
+            </a:lvl8pPr>
+            <a:lvl9pPr marL="3657600" indent="0">
+              <a:buNone/>
+              <a:defRPr sz="1600" b="1"/>
+            </a:lvl9pPr>
+          </a:lstStyle>
+          <a:p>
+            <a:pPr lvl="0"/>
+            <a:r>
+              <a:rPr lang="en-US"/>
+              <a:t>Click to edit Master text styles</a:t>
+            </a:r>
+          </a:p>
+        </p:txBody>
+      </p:sp>
+      <p:sp>
+        <p:nvSpPr>
+          <p:cNvPr id="12" name="Text Placeholder 3"/>
+          <p:cNvSpPr>
+            <a:spLocks noGrp="1"/>
+          </p:cNvSpPr>
+          <p:nvPr>
+            <p:ph type="body" sz="half" idx="17"/>
+          </p:nvPr>
+        </p:nvSpPr>
+        <p:spPr>
+          <a:xfrm>
+            <a:off x="8051801" y="2904565"/>
+            <a:ext cx="3456432" cy="3314132"/>
+          </a:xfrm>
+        </p:spPr>
+        <p:txBody>
+          <a:bodyPr anchor="t">
+            <a:normAutofit/>
+          </a:bodyPr>
+          <a:lstStyle>
+            <a:lvl1pPr marL="0" indent="0">
+              <a:buNone/>
+              <a:defRPr sz="1400"/>
+            </a:lvl1pPr>
+            <a:lvl2pPr marL="457200" indent="0">
+              <a:buNone/>
+              <a:defRPr sz="1200"/>
+            </a:lvl2pPr>
+            <a:lvl3pPr marL="914400" indent="0">
+              <a:buNone/>
+              <a:defRPr sz="1000"/>
+            </a:lvl3pPr>
+            <a:lvl4pPr marL="1371600" indent="0">
+              <a:buNone/>
+              <a:defRPr sz="900"/>
+            </a:lvl4pPr>
+            <a:lvl5pPr marL="1828800" indent="0">
+              <a:buNone/>
+              <a:defRPr sz="900"/>
+            </a:lvl5pPr>
+            <a:lvl6pPr marL="2286000" indent="0">
+              <a:buNone/>
+              <a:defRPr sz="900"/>
+            </a:lvl6pPr>
+            <a:lvl7pPr marL="2743200" indent="0">
+              <a:buNone/>
+              <a:defRPr sz="900"/>
+            </a:lvl7pPr>
+            <a:lvl8pPr marL="3200400" indent="0">
+              <a:buNone/>
+              <a:defRPr sz="900"/>
+            </a:lvl8pPr>
+            <a:lvl9pPr marL="3657600" indent="0">
+              <a:buNone/>
+              <a:defRPr sz="900"/>
+            </a:lvl9pPr>
+          </a:lstStyle>
+          <a:p>
+            <a:pPr lvl="0"/>
+            <a:r>
+              <a:rPr lang="en-US"/>
+              <a:t>Click to edit Master text styles</a:t>
+            </a:r>
+          </a:p>
+        </p:txBody>
+      </p:sp>
+      <p:sp>
+        <p:nvSpPr>
+          <p:cNvPr id="3" name="Date Placeholder 2"/>
+          <p:cNvSpPr>
+            <a:spLocks noGrp="1"/>
+          </p:cNvSpPr>
+          <p:nvPr>
+            <p:ph type="dt" sz="half" idx="10"/>
+          </p:nvPr>
+        </p:nvSpPr>
+        <p:spPr/>
+        <p:txBody>
+          <a:bodyPr/>
+          <a:lstStyle/>
+          <a:p>
+            <a:fld id="{3001F3D3-B64E-45E5-A774-FFEE7077F3D9}" type="datetimeFigureOut">
+              <a:rPr lang="en-US" smtClean="0"/>
+              <a:t>6/15/2026</a:t>
+            </a:fld>
+            <a:endParaRPr lang="en-US"/>
+          </a:p>
+        </p:txBody>
+      </p:sp>
+      <p:sp>
+        <p:nvSpPr>
+          <p:cNvPr id="4" name="Footer Placeholder 3"/>
+          <p:cNvSpPr>
+            <a:spLocks noGrp="1"/>
+          </p:cNvSpPr>
+          <p:nvPr>
+            <p:ph type="ftr" sz="quarter" idx="11"/>
+          </p:nvPr>
+        </p:nvSpPr>
+        <p:spPr/>
+        <p:txBody>
+          <a:bodyPr/>
+          <a:lstStyle/>
+          <a:p>
+            <a:endParaRPr lang="en-US"/>
+          </a:p>
+        </p:txBody>
+      </p:sp>
+      <p:sp>
+        <p:nvSpPr>
+          <p:cNvPr id="5" name="Slide Number Placeholder 4"/>
+          <p:cNvSpPr>
+            <a:spLocks noGrp="1"/>
+          </p:cNvSpPr>
+          <p:nvPr>
+            <p:ph type="sldNum" sz="quarter" idx="12"/>
+          </p:nvPr>
+        </p:nvSpPr>
+        <p:spPr/>
+        <p:txBody>
+          <a:bodyPr/>
+          <a:lstStyle/>
+          <a:p>
+            <a:fld id="{97D21221-C6A6-4006-A191-9AD020835639}" type="slidenum">
+              <a:rPr lang="en-US" smtClean="0"/>
+              <a:t>‹#›</a:t>
+            </a:fld>
+            <a:endParaRPr lang="en-US"/>
+          </a:p>
+        </p:txBody>
+      </p:sp>
+    </p:spTree>
+    <p:extLst>
+      <p:ext uri="{BB962C8B-B14F-4D97-AF65-F5344CB8AC3E}">
+        <p14:creationId xmlns:p14="http://schemas.microsoft.com/office/powerpoint/2010/main" val="2887934381"/>
+      </p:ext>
+    </p:extLst>
+  </p:cSld>
+  <p:clrMapOvr>
+    <a:masterClrMapping/>
+  </p:clrMapOvr>
+</p:sldLayout>
+</file>
+
+<file path=ppt/slideLayouts/slideLayout15.xml><?xml version="1.0" encoding="utf-8"?>
+<p:sldLayout xmlns:a="http://schemas.openxmlformats.org/drawingml/2006/main" xmlns:r="http://schemas.openxmlformats.org/officeDocument/2006/relationships" xmlns:p="http://schemas.openxmlformats.org/presentationml/2006/main" preserve="1">
+  <p:cSld name="3 Picture Column">
+    <p:spTree>
+      <p:nvGrpSpPr>
+        <p:cNvPr id="1" name=""/>
+        <p:cNvGrpSpPr/>
+        <p:nvPr/>
+      </p:nvGrpSpPr>
+      <p:grpSpPr>
+        <a:xfrm>
+          <a:off x="0" y="0"/>
+          <a:ext cx="0" cy="0"/>
+          <a:chOff x="0" y="0"/>
+          <a:chExt cx="0" cy="0"/>
+        </a:xfrm>
+      </p:grpSpPr>
+      <p:sp>
+        <p:nvSpPr>
+          <p:cNvPr id="30" name="Title 1"/>
+          <p:cNvSpPr>
+            <a:spLocks noGrp="1"/>
+          </p:cNvSpPr>
+          <p:nvPr>
+            <p:ph type="title"/>
+          </p:nvPr>
+        </p:nvSpPr>
+        <p:spPr>
+          <a:xfrm>
+            <a:off x="2895600" y="762000"/>
+            <a:ext cx="8610599" cy="1295400"/>
+          </a:xfrm>
+        </p:spPr>
+        <p:txBody>
+          <a:bodyPr/>
+          <a:lstStyle/>
+          <a:p>
+            <a:r>
+              <a:rPr lang="en-US"/>
+              <a:t>Click to edit Master title style</a:t>
+            </a:r>
+            <a:endParaRPr lang="en-US" dirty="0"/>
+          </a:p>
+        </p:txBody>
+      </p:sp>
+      <p:sp>
+        <p:nvSpPr>
+          <p:cNvPr id="19" name="Text Placeholder 2"/>
+          <p:cNvSpPr>
+            <a:spLocks noGrp="1"/>
+          </p:cNvSpPr>
+          <p:nvPr>
+            <p:ph type="body" idx="1"/>
+          </p:nvPr>
+        </p:nvSpPr>
+        <p:spPr>
+          <a:xfrm>
+            <a:off x="688618" y="4191000"/>
+            <a:ext cx="3451582" cy="682765"/>
+          </a:xfrm>
+        </p:spPr>
+        <p:txBody>
+          <a:bodyPr anchor="b">
+            <a:noAutofit/>
+          </a:bodyPr>
+          <a:lstStyle>
+            <a:lvl1pPr marL="0" indent="0">
+              <a:buNone/>
+              <a:defRPr sz="2400" b="0">
+                <a:solidFill>
+                  <a:schemeClr val="tx1"/>
+                </a:solidFill>
+              </a:defRPr>
+            </a:lvl1pPr>
+            <a:lvl2pPr marL="457200" indent="0">
+              <a:buNone/>
+              <a:defRPr sz="2000" b="1"/>
+            </a:lvl2pPr>
+            <a:lvl3pPr marL="914400" indent="0">
+              <a:buNone/>
+              <a:defRPr sz="1800" b="1"/>
+            </a:lvl3pPr>
+            <a:lvl4pPr marL="1371600" indent="0">
+              <a:buNone/>
+              <a:defRPr sz="1600" b="1"/>
+            </a:lvl4pPr>
+            <a:lvl5pPr marL="1828800" indent="0">
+              <a:buNone/>
+              <a:defRPr sz="1600" b="1"/>
+            </a:lvl5pPr>
+            <a:lvl6pPr marL="2286000" indent="0">
+              <a:buNone/>
+              <a:defRPr sz="1600" b="1"/>
+            </a:lvl6pPr>
+            <a:lvl7pPr marL="2743200" indent="0">
+              <a:buNone/>
+              <a:defRPr sz="1600" b="1"/>
+            </a:lvl7pPr>
+            <a:lvl8pPr marL="3200400" indent="0">
+              <a:buNone/>
+              <a:defRPr sz="1600" b="1"/>
+            </a:lvl8pPr>
+            <a:lvl9pPr marL="3657600" indent="0">
+              <a:buNone/>
+              <a:defRPr sz="1600" b="1"/>
+            </a:lvl9pPr>
+          </a:lstStyle>
+          <a:p>
+            <a:pPr lvl="0"/>
+            <a:r>
+              <a:rPr lang="en-US"/>
+              <a:t>Click to edit Master text styles</a:t>
+            </a:r>
+          </a:p>
+        </p:txBody>
+      </p:sp>
+      <p:sp>
+        <p:nvSpPr>
+          <p:cNvPr id="20" name="Picture Placeholder 2"/>
+          <p:cNvSpPr>
+            <a:spLocks noGrp="1" noChangeAspect="1"/>
+          </p:cNvSpPr>
+          <p:nvPr>
+            <p:ph type="pic" idx="15"/>
+          </p:nvPr>
+        </p:nvSpPr>
+        <p:spPr>
+          <a:xfrm>
+            <a:off x="688618" y="2362200"/>
+            <a:ext cx="3451582" cy="1524000"/>
+          </a:xfrm>
+          <a:prstGeom prst="roundRect">
+            <a:avLst>
+              <a:gd name="adj" fmla="val 0"/>
+            </a:avLst>
+          </a:prstGeom>
+          <a:effectLst>
+            <a:outerShdw blurRad="50800" dist="50800" dir="5400000" algn="tl" rotWithShape="0">
+              <a:srgbClr val="000000">
+                <a:alpha val="43000"/>
+              </a:srgbClr>
+            </a:outerShdw>
+          </a:effectLst>
+        </p:spPr>
+        <p:txBody>
+          <a:bodyPr anchor="t">
+            <a:normAutofit/>
+          </a:bodyPr>
+          <a:lstStyle>
+            <a:lvl1pPr marL="0" indent="0" algn="ctr">
+              <a:buNone/>
+              <a:defRPr sz="1600"/>
+            </a:lvl1pPr>
+            <a:lvl2pPr marL="457200" indent="0">
+              <a:buNone/>
+              <a:defRPr sz="1600"/>
+            </a:lvl2pPr>
+            <a:lvl3pPr marL="914400" indent="0">
+              <a:buNone/>
+              <a:defRPr sz="1600"/>
+            </a:lvl3pPr>
+            <a:lvl4pPr marL="1371600" indent="0">
+              <a:buNone/>
+              <a:defRPr sz="1600"/>
+            </a:lvl4pPr>
+            <a:lvl5pPr marL="1828800" indent="0">
+              <a:buNone/>
+              <a:defRPr sz="1600"/>
+            </a:lvl5pPr>
+            <a:lvl6pPr marL="2286000" indent="0">
+              <a:buNone/>
+              <a:defRPr sz="1600"/>
+            </a:lvl6pPr>
+            <a:lvl7pPr marL="2743200" indent="0">
+              <a:buNone/>
+              <a:defRPr sz="1600"/>
+            </a:lvl7pPr>
+            <a:lvl8pPr marL="3200400" indent="0">
+              <a:buNone/>
+              <a:defRPr sz="1600"/>
+            </a:lvl8pPr>
+            <a:lvl9pPr marL="3657600" indent="0">
+              <a:buNone/>
+              <a:defRPr sz="1600"/>
+            </a:lvl9pPr>
+          </a:lstStyle>
+          <a:p>
+            <a:r>
+              <a:rPr lang="en-US"/>
+              <a:t>Click icon to add picture</a:t>
+            </a:r>
+            <a:endParaRPr lang="en-US" dirty="0"/>
+          </a:p>
+        </p:txBody>
+      </p:sp>
+      <p:sp>
+        <p:nvSpPr>
+          <p:cNvPr id="21" name="Text Placeholder 3"/>
+          <p:cNvSpPr>
+            <a:spLocks noGrp="1"/>
+          </p:cNvSpPr>
+          <p:nvPr>
+            <p:ph type="body" sz="half" idx="18"/>
+          </p:nvPr>
+        </p:nvSpPr>
+        <p:spPr>
+          <a:xfrm>
+            <a:off x="688618" y="4873764"/>
+            <a:ext cx="3451582" cy="1344921"/>
+          </a:xfrm>
+        </p:spPr>
+        <p:txBody>
+          <a:bodyPr anchor="t">
+            <a:normAutofit/>
+          </a:bodyPr>
+          <a:lstStyle>
+            <a:lvl1pPr marL="0" indent="0">
+              <a:buNone/>
+              <a:defRPr sz="1400"/>
+            </a:lvl1pPr>
+            <a:lvl2pPr marL="457200" indent="0">
+              <a:buNone/>
+              <a:defRPr sz="1200"/>
+            </a:lvl2pPr>
+            <a:lvl3pPr marL="914400" indent="0">
+              <a:buNone/>
+              <a:defRPr sz="1000"/>
+            </a:lvl3pPr>
+            <a:lvl4pPr marL="1371600" indent="0">
+              <a:buNone/>
+              <a:defRPr sz="900"/>
+            </a:lvl4pPr>
+            <a:lvl5pPr marL="1828800" indent="0">
+              <a:buNone/>
+              <a:defRPr sz="900"/>
+            </a:lvl5pPr>
+            <a:lvl6pPr marL="2286000" indent="0">
+              <a:buNone/>
+              <a:defRPr sz="900"/>
+            </a:lvl6pPr>
+            <a:lvl7pPr marL="2743200" indent="0">
+              <a:buNone/>
+              <a:defRPr sz="900"/>
+            </a:lvl7pPr>
+            <a:lvl8pPr marL="3200400" indent="0">
+              <a:buNone/>
+              <a:defRPr sz="900"/>
+            </a:lvl8pPr>
+            <a:lvl9pPr marL="3657600" indent="0">
+              <a:buNone/>
+              <a:defRPr sz="900"/>
+            </a:lvl9pPr>
+          </a:lstStyle>
+          <a:p>
+            <a:pPr lvl="0"/>
+            <a:r>
+              <a:rPr lang="en-US"/>
+              <a:t>Click to edit Master text styles</a:t>
+            </a:r>
+          </a:p>
+        </p:txBody>
+      </p:sp>
+      <p:sp>
+        <p:nvSpPr>
+          <p:cNvPr id="22" name="Text Placeholder 4"/>
+          <p:cNvSpPr>
+            <a:spLocks noGrp="1"/>
+          </p:cNvSpPr>
+          <p:nvPr>
+            <p:ph type="body" sz="quarter" idx="3"/>
+          </p:nvPr>
+        </p:nvSpPr>
+        <p:spPr>
+          <a:xfrm>
+            <a:off x="4374263" y="4191000"/>
+            <a:ext cx="3448935" cy="682765"/>
+          </a:xfrm>
+        </p:spPr>
+        <p:txBody>
+          <a:bodyPr anchor="b">
+            <a:noAutofit/>
+          </a:bodyPr>
+          <a:lstStyle>
+            <a:lvl1pPr marL="0" indent="0">
+              <a:buNone/>
+              <a:defRPr sz="2400" b="0">
+                <a:solidFill>
+                  <a:schemeClr val="tx1"/>
+                </a:solidFill>
+              </a:defRPr>
+            </a:lvl1pPr>
+            <a:lvl2pPr marL="457200" indent="0">
+              <a:buNone/>
+              <a:defRPr sz="2000" b="1"/>
+            </a:lvl2pPr>
+            <a:lvl3pPr marL="914400" indent="0">
+              <a:buNone/>
+              <a:defRPr sz="1800" b="1"/>
+            </a:lvl3pPr>
+            <a:lvl4pPr marL="1371600" indent="0">
+              <a:buNone/>
+              <a:defRPr sz="1600" b="1"/>
+            </a:lvl4pPr>
+            <a:lvl5pPr marL="1828800" indent="0">
+              <a:buNone/>
+              <a:defRPr sz="1600" b="1"/>
+            </a:lvl5pPr>
+            <a:lvl6pPr marL="2286000" indent="0">
+              <a:buNone/>
+              <a:defRPr sz="1600" b="1"/>
+            </a:lvl6pPr>
+            <a:lvl7pPr marL="2743200" indent="0">
+              <a:buNone/>
+              <a:defRPr sz="1600" b="1"/>
+            </a:lvl7pPr>
+            <a:lvl8pPr marL="3200400" indent="0">
+              <a:buNone/>
+              <a:defRPr sz="1600" b="1"/>
+            </a:lvl8pPr>
+            <a:lvl9pPr marL="3657600" indent="0">
+              <a:buNone/>
+              <a:defRPr sz="1600" b="1"/>
+            </a:lvl9pPr>
+          </a:lstStyle>
+          <a:p>
+            <a:pPr lvl="0"/>
+            <a:r>
+              <a:rPr lang="en-US"/>
+              <a:t>Click to edit Master text styles</a:t>
+            </a:r>
+          </a:p>
+        </p:txBody>
+      </p:sp>
+      <p:sp>
+        <p:nvSpPr>
+          <p:cNvPr id="23" name="Picture Placeholder 2"/>
+          <p:cNvSpPr>
+            <a:spLocks noGrp="1" noChangeAspect="1"/>
+          </p:cNvSpPr>
+          <p:nvPr>
+            <p:ph type="pic" idx="21"/>
+          </p:nvPr>
+        </p:nvSpPr>
+        <p:spPr>
+          <a:xfrm>
+            <a:off x="4374263" y="2362200"/>
+            <a:ext cx="3448936" cy="1524000"/>
+          </a:xfrm>
+          <a:prstGeom prst="roundRect">
+            <a:avLst>
+              <a:gd name="adj" fmla="val 0"/>
+            </a:avLst>
+          </a:prstGeom>
+          <a:effectLst>
+            <a:outerShdw blurRad="50800" dist="50800" dir="5400000" algn="tl" rotWithShape="0">
+              <a:srgbClr val="000000">
+                <a:alpha val="43000"/>
+              </a:srgbClr>
+            </a:outerShdw>
+          </a:effectLst>
+        </p:spPr>
+        <p:txBody>
+          <a:bodyPr anchor="t">
+            <a:normAutofit/>
+          </a:bodyPr>
+          <a:lstStyle>
+            <a:lvl1pPr marL="0" indent="0" algn="ctr">
+              <a:buNone/>
+              <a:defRPr sz="1600"/>
+            </a:lvl1pPr>
+            <a:lvl2pPr marL="457200" indent="0">
+              <a:buNone/>
+              <a:defRPr sz="1600"/>
+            </a:lvl2pPr>
+            <a:lvl3pPr marL="914400" indent="0">
+              <a:buNone/>
+              <a:defRPr sz="1600"/>
+            </a:lvl3pPr>
+            <a:lvl4pPr marL="1371600" indent="0">
+              <a:buNone/>
+              <a:defRPr sz="1600"/>
+            </a:lvl4pPr>
+            <a:lvl5pPr marL="1828800" indent="0">
+              <a:buNone/>
+              <a:defRPr sz="1600"/>
+            </a:lvl5pPr>
+            <a:lvl6pPr marL="2286000" indent="0">
+              <a:buNone/>
+              <a:defRPr sz="1600"/>
+            </a:lvl6pPr>
+            <a:lvl7pPr marL="2743200" indent="0">
+              <a:buNone/>
+              <a:defRPr sz="1600"/>
+            </a:lvl7pPr>
+            <a:lvl8pPr marL="3200400" indent="0">
+              <a:buNone/>
+              <a:defRPr sz="1600"/>
+            </a:lvl8pPr>
+            <a:lvl9pPr marL="3657600" indent="0">
+              <a:buNone/>
+              <a:defRPr sz="1600"/>
+            </a:lvl9pPr>
+          </a:lstStyle>
+          <a:p>
+            <a:r>
+              <a:rPr lang="en-US"/>
+              <a:t>Click icon to add picture</a:t>
+            </a:r>
+            <a:endParaRPr lang="en-US" dirty="0"/>
+          </a:p>
+        </p:txBody>
+      </p:sp>
+      <p:sp>
+        <p:nvSpPr>
+          <p:cNvPr id="24" name="Text Placeholder 3"/>
+          <p:cNvSpPr>
+            <a:spLocks noGrp="1"/>
+          </p:cNvSpPr>
+          <p:nvPr>
+            <p:ph type="body" sz="half" idx="19"/>
+          </p:nvPr>
+        </p:nvSpPr>
+        <p:spPr>
+          <a:xfrm>
+            <a:off x="4374264" y="4873763"/>
+            <a:ext cx="3448935" cy="1344921"/>
+          </a:xfrm>
+        </p:spPr>
+        <p:txBody>
+          <a:bodyPr anchor="t">
+            <a:normAutofit/>
+          </a:bodyPr>
+          <a:lstStyle>
+            <a:lvl1pPr marL="0" indent="0">
+              <a:buNone/>
+              <a:defRPr sz="1400"/>
+            </a:lvl1pPr>
+            <a:lvl2pPr marL="457200" indent="0">
+              <a:buNone/>
+              <a:defRPr sz="1200"/>
+            </a:lvl2pPr>
+            <a:lvl3pPr marL="914400" indent="0">
+              <a:buNone/>
+              <a:defRPr sz="1000"/>
+            </a:lvl3pPr>
+            <a:lvl4pPr marL="1371600" indent="0">
+              <a:buNone/>
+              <a:defRPr sz="900"/>
+            </a:lvl4pPr>
+            <a:lvl5pPr marL="1828800" indent="0">
+              <a:buNone/>
+              <a:defRPr sz="900"/>
+            </a:lvl5pPr>
+            <a:lvl6pPr marL="2286000" indent="0">
+              <a:buNone/>
+              <a:defRPr sz="900"/>
+            </a:lvl6pPr>
+            <a:lvl7pPr marL="2743200" indent="0">
+              <a:buNone/>
+              <a:defRPr sz="900"/>
+            </a:lvl7pPr>
+            <a:lvl8pPr marL="3200400" indent="0">
+              <a:buNone/>
+              <a:defRPr sz="900"/>
+            </a:lvl8pPr>
+            <a:lvl9pPr marL="3657600" indent="0">
+              <a:buNone/>
+              <a:defRPr sz="900"/>
+            </a:lvl9pPr>
+          </a:lstStyle>
+          <a:p>
+            <a:pPr lvl="0"/>
+            <a:r>
+              <a:rPr lang="en-US"/>
+              <a:t>Click to edit Master text styles</a:t>
+            </a:r>
+          </a:p>
+        </p:txBody>
+      </p:sp>
+      <p:sp>
+        <p:nvSpPr>
+          <p:cNvPr id="25" name="Text Placeholder 4"/>
+          <p:cNvSpPr>
+            <a:spLocks noGrp="1"/>
+          </p:cNvSpPr>
+          <p:nvPr>
+            <p:ph type="body" sz="quarter" idx="13"/>
+          </p:nvPr>
+        </p:nvSpPr>
+        <p:spPr>
+          <a:xfrm>
+            <a:off x="8049731" y="4191000"/>
+            <a:ext cx="3456469" cy="682765"/>
+          </a:xfrm>
+        </p:spPr>
+        <p:txBody>
+          <a:bodyPr anchor="b">
+            <a:noAutofit/>
+          </a:bodyPr>
+          <a:lstStyle>
+            <a:lvl1pPr marL="0" indent="0">
+              <a:buNone/>
+              <a:defRPr sz="2400" b="0">
+                <a:solidFill>
+                  <a:schemeClr val="tx1"/>
+                </a:solidFill>
+              </a:defRPr>
+            </a:lvl1pPr>
+            <a:lvl2pPr marL="457200" indent="0">
+              <a:buNone/>
+              <a:defRPr sz="2000" b="1"/>
+            </a:lvl2pPr>
+            <a:lvl3pPr marL="914400" indent="0">
+              <a:buNone/>
+              <a:defRPr sz="1800" b="1"/>
+            </a:lvl3pPr>
+            <a:lvl4pPr marL="1371600" indent="0">
+              <a:buNone/>
+              <a:defRPr sz="1600" b="1"/>
+            </a:lvl4pPr>
+            <a:lvl5pPr marL="1828800" indent="0">
+              <a:buNone/>
+              <a:defRPr sz="1600" b="1"/>
+            </a:lvl5pPr>
+            <a:lvl6pPr marL="2286000" indent="0">
+              <a:buNone/>
+              <a:defRPr sz="1600" b="1"/>
+            </a:lvl6pPr>
+            <a:lvl7pPr marL="2743200" indent="0">
+              <a:buNone/>
+              <a:defRPr sz="1600" b="1"/>
+            </a:lvl7pPr>
+            <a:lvl8pPr marL="3200400" indent="0">
+              <a:buNone/>
+              <a:defRPr sz="1600" b="1"/>
+            </a:lvl8pPr>
+            <a:lvl9pPr marL="3657600" indent="0">
+              <a:buNone/>
+              <a:defRPr sz="1600" b="1"/>
+            </a:lvl9pPr>
+          </a:lstStyle>
+          <a:p>
+            <a:pPr lvl="0"/>
+            <a:r>
+              <a:rPr lang="en-US"/>
+              <a:t>Click to edit Master text styles</a:t>
+            </a:r>
+          </a:p>
+        </p:txBody>
+      </p:sp>
+      <p:sp>
+        <p:nvSpPr>
+          <p:cNvPr id="26" name="Picture Placeholder 2"/>
+          <p:cNvSpPr>
+            <a:spLocks noGrp="1" noChangeAspect="1"/>
+          </p:cNvSpPr>
+          <p:nvPr>
+            <p:ph type="pic" idx="22"/>
+          </p:nvPr>
+        </p:nvSpPr>
+        <p:spPr>
+          <a:xfrm>
+            <a:off x="8049855" y="2362200"/>
+            <a:ext cx="3447878" cy="1524000"/>
+          </a:xfrm>
+          <a:prstGeom prst="roundRect">
+            <a:avLst>
+              <a:gd name="adj" fmla="val 0"/>
+            </a:avLst>
+          </a:prstGeom>
+          <a:effectLst>
+            <a:outerShdw blurRad="50800" dist="50800" dir="5400000" algn="tl" rotWithShape="0">
+              <a:srgbClr val="000000">
+                <a:alpha val="43000"/>
+              </a:srgbClr>
+            </a:outerShdw>
+          </a:effectLst>
+        </p:spPr>
+        <p:txBody>
+          <a:bodyPr anchor="t">
+            <a:normAutofit/>
+          </a:bodyPr>
+          <a:lstStyle>
+            <a:lvl1pPr marL="0" indent="0" algn="ctr">
+              <a:buNone/>
+              <a:defRPr sz="1600"/>
+            </a:lvl1pPr>
+            <a:lvl2pPr marL="457200" indent="0">
+              <a:buNone/>
+              <a:defRPr sz="1600"/>
+            </a:lvl2pPr>
+            <a:lvl3pPr marL="914400" indent="0">
+              <a:buNone/>
+              <a:defRPr sz="1600"/>
+            </a:lvl3pPr>
+            <a:lvl4pPr marL="1371600" indent="0">
+              <a:buNone/>
+              <a:defRPr sz="1600"/>
+            </a:lvl4pPr>
+            <a:lvl5pPr marL="1828800" indent="0">
+              <a:buNone/>
+              <a:defRPr sz="1600"/>
+            </a:lvl5pPr>
+            <a:lvl6pPr marL="2286000" indent="0">
+              <a:buNone/>
+              <a:defRPr sz="1600"/>
+            </a:lvl6pPr>
+            <a:lvl7pPr marL="2743200" indent="0">
+              <a:buNone/>
+              <a:defRPr sz="1600"/>
+            </a:lvl7pPr>
+            <a:lvl8pPr marL="3200400" indent="0">
+              <a:buNone/>
+              <a:defRPr sz="1600"/>
+            </a:lvl8pPr>
+            <a:lvl9pPr marL="3657600" indent="0">
+              <a:buNone/>
+              <a:defRPr sz="1600"/>
+            </a:lvl9pPr>
+          </a:lstStyle>
+          <a:p>
+            <a:r>
+              <a:rPr lang="en-US"/>
+              <a:t>Click icon to add picture</a:t>
+            </a:r>
+            <a:endParaRPr lang="en-US" dirty="0"/>
+          </a:p>
+        </p:txBody>
+      </p:sp>
+      <p:sp>
+        <p:nvSpPr>
+          <p:cNvPr id="27" name="Text Placeholder 3"/>
+          <p:cNvSpPr>
+            <a:spLocks noGrp="1"/>
+          </p:cNvSpPr>
+          <p:nvPr>
+            <p:ph type="body" sz="half" idx="20"/>
+          </p:nvPr>
+        </p:nvSpPr>
+        <p:spPr>
+          <a:xfrm>
+            <a:off x="8049731" y="4873761"/>
+            <a:ext cx="3452445" cy="1344921"/>
+          </a:xfrm>
+        </p:spPr>
+        <p:txBody>
+          <a:bodyPr anchor="t">
+            <a:normAutofit/>
+          </a:bodyPr>
+          <a:lstStyle>
+            <a:lvl1pPr marL="0" indent="0">
+              <a:buNone/>
+              <a:defRPr sz="1400"/>
+            </a:lvl1pPr>
+            <a:lvl2pPr marL="457200" indent="0">
+              <a:buNone/>
+              <a:defRPr sz="1200"/>
+            </a:lvl2pPr>
+            <a:lvl3pPr marL="914400" indent="0">
+              <a:buNone/>
+              <a:defRPr sz="1000"/>
+            </a:lvl3pPr>
+            <a:lvl4pPr marL="1371600" indent="0">
+              <a:buNone/>
+              <a:defRPr sz="900"/>
+            </a:lvl4pPr>
+            <a:lvl5pPr marL="1828800" indent="0">
+              <a:buNone/>
+              <a:defRPr sz="900"/>
+            </a:lvl5pPr>
+            <a:lvl6pPr marL="2286000" indent="0">
+              <a:buNone/>
+              <a:defRPr sz="900"/>
+            </a:lvl6pPr>
+            <a:lvl7pPr marL="2743200" indent="0">
+              <a:buNone/>
+              <a:defRPr sz="900"/>
+            </a:lvl7pPr>
+            <a:lvl8pPr marL="3200400" indent="0">
+              <a:buNone/>
+              <a:defRPr sz="900"/>
+            </a:lvl8pPr>
+            <a:lvl9pPr marL="3657600" indent="0">
+              <a:buNone/>
+              <a:defRPr sz="900"/>
+            </a:lvl9pPr>
+          </a:lstStyle>
+          <a:p>
+            <a:pPr lvl="0"/>
+            <a:r>
+              <a:rPr lang="en-US"/>
+              <a:t>Click to edit Master text styles</a:t>
+            </a:r>
+          </a:p>
+        </p:txBody>
+      </p:sp>
+      <p:sp>
+        <p:nvSpPr>
+          <p:cNvPr id="3" name="Date Placeholder 2"/>
+          <p:cNvSpPr>
+            <a:spLocks noGrp="1"/>
+          </p:cNvSpPr>
+          <p:nvPr>
+            <p:ph type="dt" sz="half" idx="10"/>
+          </p:nvPr>
+        </p:nvSpPr>
+        <p:spPr/>
+        <p:txBody>
+          <a:bodyPr/>
+          <a:lstStyle/>
+          <a:p>
+            <a:fld id="{3001F3D3-B64E-45E5-A774-FFEE7077F3D9}" type="datetimeFigureOut">
+              <a:rPr lang="en-US" smtClean="0"/>
+              <a:t>6/15/2026</a:t>
+            </a:fld>
+            <a:endParaRPr lang="en-US"/>
+          </a:p>
+        </p:txBody>
+      </p:sp>
+      <p:sp>
+        <p:nvSpPr>
+          <p:cNvPr id="4" name="Footer Placeholder 3"/>
+          <p:cNvSpPr>
+            <a:spLocks noGrp="1"/>
+          </p:cNvSpPr>
+          <p:nvPr>
+            <p:ph type="ftr" sz="quarter" idx="11"/>
+          </p:nvPr>
+        </p:nvSpPr>
+        <p:spPr/>
+        <p:txBody>
+          <a:bodyPr/>
+          <a:lstStyle/>
+          <a:p>
+            <a:endParaRPr lang="en-US"/>
+          </a:p>
+        </p:txBody>
+      </p:sp>
+      <p:sp>
+        <p:nvSpPr>
+          <p:cNvPr id="5" name="Slide Number Placeholder 4"/>
+          <p:cNvSpPr>
+            <a:spLocks noGrp="1"/>
+          </p:cNvSpPr>
+          <p:nvPr>
+            <p:ph type="sldNum" sz="quarter" idx="12"/>
+          </p:nvPr>
+        </p:nvSpPr>
+        <p:spPr/>
+        <p:txBody>
+          <a:bodyPr/>
+          <a:lstStyle/>
+          <a:p>
+            <a:fld id="{97D21221-C6A6-4006-A191-9AD020835639}" type="slidenum">
+              <a:rPr lang="en-US" smtClean="0"/>
+              <a:t>‹#›</a:t>
+            </a:fld>
+            <a:endParaRPr lang="en-US"/>
+          </a:p>
+        </p:txBody>
+      </p:sp>
+    </p:spTree>
+    <p:extLst>
+      <p:ext uri="{BB962C8B-B14F-4D97-AF65-F5344CB8AC3E}">
+        <p14:creationId xmlns:p14="http://schemas.microsoft.com/office/powerpoint/2010/main" val="2058668136"/>
+      </p:ext>
+    </p:extLst>
+  </p:cSld>
+  <p:clrMapOvr>
+    <a:masterClrMapping/>
+  </p:clrMapOvr>
+</p:sldLayout>
+</file>
+
+<file path=ppt/slideLayouts/slideLayout16.xml><?xml version="1.0" encoding="utf-8"?>
 <p:sldLayout xmlns:a="http://schemas.openxmlformats.org/drawingml/2006/main" xmlns:r="http://schemas.openxmlformats.org/officeDocument/2006/relationships" xmlns:p="http://schemas.openxmlformats.org/presentationml/2006/main" type="vertTx" preserve="1">
   <p:cSld name="Title and Vertical Text">
     <p:spTree>
@@ -346,13 +2964,7 @@
       </p:grpSpPr>
       <p:sp>
         <p:nvSpPr>
-          <p:cNvPr id="2" name="Title 1">
-            <a:extLst>
-              <a:ext uri="{FF2B5EF4-FFF2-40B4-BE49-F238E27FC236}">
-                <a16:creationId xmlns:a16="http://schemas.microsoft.com/office/drawing/2014/main" id="{E81F7391-ACB2-376C-5775-EE98E47BA4C4}"/>
-              </a:ext>
-            </a:extLst>
-          </p:cNvPr>
+          <p:cNvPr id="2" name="Title 1"/>
           <p:cNvSpPr>
             <a:spLocks noGrp="1"/>
           </p:cNvSpPr>
@@ -369,18 +2981,13 @@
               <a:rPr lang="en-US"/>
               <a:t>Click to edit Master title style</a:t>
             </a:r>
-          </a:p>
-        </p:txBody>
-      </p:sp>
-      <p:sp>
-        <p:nvSpPr>
-          <p:cNvPr id="3" name="Vertical Text Placeholder 2">
-            <a:extLst>
-              <a:ext uri="{FF2B5EF4-FFF2-40B4-BE49-F238E27FC236}">
-                <a16:creationId xmlns:a16="http://schemas.microsoft.com/office/drawing/2014/main" id="{CDCC66D9-71A8-45FA-8EEF-2F78573BA71A}"/>
-              </a:ext>
-            </a:extLst>
-          </p:cNvPr>
+            <a:endParaRPr lang="en-US" dirty="0"/>
+          </a:p>
+        </p:txBody>
+      </p:sp>
+      <p:sp>
+        <p:nvSpPr>
+          <p:cNvPr id="3" name="Vertical Text Placeholder 2"/>
           <p:cNvSpPr>
             <a:spLocks noGrp="1"/>
           </p:cNvSpPr>
@@ -388,7 +2995,12 @@
             <p:ph type="body" orient="vert" idx="1"/>
           </p:nvPr>
         </p:nvSpPr>
-        <p:spPr/>
+        <p:spPr>
+          <a:xfrm>
+            <a:off x="685800" y="2194559"/>
+            <a:ext cx="10820400" cy="4024125"/>
+          </a:xfrm>
+        </p:spPr>
         <p:txBody>
           <a:bodyPr vert="eaVert"/>
           <a:lstStyle/>
@@ -426,18 +3038,13 @@
               <a:rPr lang="en-US"/>
               <a:t>Fifth level</a:t>
             </a:r>
-          </a:p>
-        </p:txBody>
-      </p:sp>
-      <p:sp>
-        <p:nvSpPr>
-          <p:cNvPr id="4" name="Date Placeholder 3">
-            <a:extLst>
-              <a:ext uri="{FF2B5EF4-FFF2-40B4-BE49-F238E27FC236}">
-                <a16:creationId xmlns:a16="http://schemas.microsoft.com/office/drawing/2014/main" id="{D1CA85DC-C014-66DA-0FF6-1C1DA3607F06}"/>
-              </a:ext>
-            </a:extLst>
-          </p:cNvPr>
+            <a:endParaRPr lang="en-US" dirty="0"/>
+          </a:p>
+        </p:txBody>
+      </p:sp>
+      <p:sp>
+        <p:nvSpPr>
+          <p:cNvPr id="4" name="Date Placeholder 3"/>
           <p:cNvSpPr>
             <a:spLocks noGrp="1"/>
           </p:cNvSpPr>
@@ -452,7 +3059,7 @@
           <a:p>
             <a:fld id="{3001F3D3-B64E-45E5-A774-FFEE7077F3D9}" type="datetimeFigureOut">
               <a:rPr lang="en-US" smtClean="0"/>
-              <a:t>6/10/2026</a:t>
+              <a:t>6/15/2026</a:t>
             </a:fld>
             <a:endParaRPr lang="en-US"/>
           </a:p>
@@ -460,13 +3067,7 @@
       </p:sp>
       <p:sp>
         <p:nvSpPr>
-          <p:cNvPr id="5" name="Footer Placeholder 4">
-            <a:extLst>
-              <a:ext uri="{FF2B5EF4-FFF2-40B4-BE49-F238E27FC236}">
-                <a16:creationId xmlns:a16="http://schemas.microsoft.com/office/drawing/2014/main" id="{AEFBE6ED-88F7-4014-C35B-B9126AC4E85C}"/>
-              </a:ext>
-            </a:extLst>
-          </p:cNvPr>
+          <p:cNvPr id="5" name="Footer Placeholder 4"/>
           <p:cNvSpPr>
             <a:spLocks noGrp="1"/>
           </p:cNvSpPr>
@@ -485,13 +3086,7 @@
       </p:sp>
       <p:sp>
         <p:nvSpPr>
-          <p:cNvPr id="6" name="Slide Number Placeholder 5">
-            <a:extLst>
-              <a:ext uri="{FF2B5EF4-FFF2-40B4-BE49-F238E27FC236}">
-                <a16:creationId xmlns:a16="http://schemas.microsoft.com/office/drawing/2014/main" id="{0118091A-5071-E7DE-5A93-5B05DC48FD61}"/>
-              </a:ext>
-            </a:extLst>
-          </p:cNvPr>
+          <p:cNvPr id="6" name="Slide Number Placeholder 5"/>
           <p:cNvSpPr>
             <a:spLocks noGrp="1"/>
           </p:cNvSpPr>
@@ -515,7 +3110,7 @@
     </p:spTree>
     <p:extLst>
       <p:ext uri="{BB962C8B-B14F-4D97-AF65-F5344CB8AC3E}">
-        <p14:creationId xmlns:p14="http://schemas.microsoft.com/office/powerpoint/2010/main" val="3825096434"/>
+        <p14:creationId xmlns:p14="http://schemas.microsoft.com/office/powerpoint/2010/main" val="135890790"/>
       </p:ext>
     </p:extLst>
   </p:cSld>
@@ -525,8 +3120,8 @@
 </p:sldLayout>
 </file>
 
-<file path=ppt/slideLayouts/slideLayout11.xml><?xml version="1.0" encoding="utf-8"?>
-<p:sldLayout xmlns:a="http://schemas.openxmlformats.org/drawingml/2006/main" xmlns:r="http://schemas.openxmlformats.org/officeDocument/2006/relationships" xmlns:p="http://schemas.openxmlformats.org/presentationml/2006/main" type="vertTitleAndTx" preserve="1">
+<file path=ppt/slideLayouts/slideLayout17.xml><?xml version="1.0" encoding="utf-8"?>
+<p:sldLayout xmlns:a="http://schemas.openxmlformats.org/drawingml/2006/main" xmlns:r="http://schemas.openxmlformats.org/officeDocument/2006/relationships" xmlns:p="http://schemas.openxmlformats.org/presentationml/2006/main" showMasterSp="0" type="vertTitleAndTx" preserve="1">
   <p:cSld name="Vertical Title and Text">
     <p:spTree>
       <p:nvGrpSpPr>
@@ -542,15 +3137,39 @@
           <a:chExt cx="0" cy="0"/>
         </a:xfrm>
       </p:grpSpPr>
-      <p:sp>
-        <p:nvSpPr>
-          <p:cNvPr id="2" name="Vertical Title 1">
+      <p:pic>
+        <p:nvPicPr>
+          <p:cNvPr id="8" name="Picture 7" descr="C0-HD-BTM.png"/>
+          <p:cNvPicPr>
+            <a:picLocks noChangeAspect="1"/>
+          </p:cNvPicPr>
+          <p:nvPr/>
+        </p:nvPicPr>
+        <p:blipFill>
+          <a:blip r:embed="rId2">
             <a:extLst>
-              <a:ext uri="{FF2B5EF4-FFF2-40B4-BE49-F238E27FC236}">
-                <a16:creationId xmlns:a16="http://schemas.microsoft.com/office/drawing/2014/main" id="{C0292C9A-BE0F-9543-B3F5-6A9296D58BFC}"/>
+              <a:ext uri="{28A0092B-C50C-407E-A947-70E740481C1C}">
+                <a14:useLocalDpi xmlns:a14="http://schemas.microsoft.com/office/drawing/2010/main" val="0"/>
               </a:ext>
             </a:extLst>
-          </p:cNvPr>
+          </a:blip>
+          <a:stretch>
+            <a:fillRect/>
+          </a:stretch>
+        </p:blipFill>
+        <p:spPr>
+          <a:xfrm>
+            <a:off x="0" y="4375150"/>
+            <a:ext cx="12192000" cy="2482850"/>
+          </a:xfrm>
+          <a:prstGeom prst="rect">
+            <a:avLst/>
+          </a:prstGeom>
+        </p:spPr>
+      </p:pic>
+      <p:sp>
+        <p:nvSpPr>
+          <p:cNvPr id="2" name="Vertical Title 1"/>
           <p:cNvSpPr>
             <a:spLocks noGrp="1"/>
           </p:cNvSpPr>
@@ -560,47 +3179,46 @@
         </p:nvSpPr>
         <p:spPr>
           <a:xfrm>
-            <a:off x="8724900" y="365125"/>
-            <a:ext cx="2628900" cy="5811838"/>
+            <a:off x="9448800" y="745066"/>
+            <a:ext cx="2057400" cy="3903133"/>
+          </a:xfrm>
+        </p:spPr>
+        <p:txBody>
+          <a:bodyPr vert="eaVert"/>
+          <a:lstStyle>
+            <a:lvl1pPr algn="l">
+              <a:defRPr/>
+            </a:lvl1pPr>
+          </a:lstStyle>
+          <a:p>
+            <a:r>
+              <a:rPr lang="en-US"/>
+              <a:t>Click to edit Master title style</a:t>
+            </a:r>
+            <a:endParaRPr lang="en-US" dirty="0"/>
+          </a:p>
+        </p:txBody>
+      </p:sp>
+      <p:sp>
+        <p:nvSpPr>
+          <p:cNvPr id="3" name="Vertical Text Placeholder 2"/>
+          <p:cNvSpPr>
+            <a:spLocks noGrp="1"/>
+          </p:cNvSpPr>
+          <p:nvPr>
+            <p:ph type="body" orient="vert" idx="1"/>
+          </p:nvPr>
+        </p:nvSpPr>
+        <p:spPr>
+          <a:xfrm>
+            <a:off x="1024466" y="745067"/>
+            <a:ext cx="8204201" cy="3903133"/>
           </a:xfrm>
         </p:spPr>
         <p:txBody>
           <a:bodyPr vert="eaVert"/>
           <a:lstStyle/>
           <a:p>
-            <a:r>
-              <a:rPr lang="en-US"/>
-              <a:t>Click to edit Master title style</a:t>
-            </a:r>
-          </a:p>
-        </p:txBody>
-      </p:sp>
-      <p:sp>
-        <p:nvSpPr>
-          <p:cNvPr id="3" name="Vertical Text Placeholder 2">
-            <a:extLst>
-              <a:ext uri="{FF2B5EF4-FFF2-40B4-BE49-F238E27FC236}">
-                <a16:creationId xmlns:a16="http://schemas.microsoft.com/office/drawing/2014/main" id="{95956946-D05C-57F5-302A-E8CD86A07DDD}"/>
-              </a:ext>
-            </a:extLst>
-          </p:cNvPr>
-          <p:cNvSpPr>
-            <a:spLocks noGrp="1"/>
-          </p:cNvSpPr>
-          <p:nvPr>
-            <p:ph type="body" orient="vert" idx="1"/>
-          </p:nvPr>
-        </p:nvSpPr>
-        <p:spPr>
-          <a:xfrm>
-            <a:off x="838200" y="365125"/>
-            <a:ext cx="7734300" cy="5811838"/>
-          </a:xfrm>
-        </p:spPr>
-        <p:txBody>
-          <a:bodyPr vert="eaVert"/>
-          <a:lstStyle/>
-          <a:p>
             <a:pPr lvl="0"/>
             <a:r>
               <a:rPr lang="en-US"/>
@@ -634,18 +3252,13 @@
               <a:rPr lang="en-US"/>
               <a:t>Fifth level</a:t>
             </a:r>
-          </a:p>
-        </p:txBody>
-      </p:sp>
-      <p:sp>
-        <p:nvSpPr>
-          <p:cNvPr id="4" name="Date Placeholder 3">
-            <a:extLst>
-              <a:ext uri="{FF2B5EF4-FFF2-40B4-BE49-F238E27FC236}">
-                <a16:creationId xmlns:a16="http://schemas.microsoft.com/office/drawing/2014/main" id="{F53CC1A5-6D46-87D7-A01C-898FE6B87801}"/>
-              </a:ext>
-            </a:extLst>
-          </p:cNvPr>
+            <a:endParaRPr lang="en-US" dirty="0"/>
+          </a:p>
+        </p:txBody>
+      </p:sp>
+      <p:sp>
+        <p:nvSpPr>
+          <p:cNvPr id="4" name="Date Placeholder 3"/>
           <p:cNvSpPr>
             <a:spLocks noGrp="1"/>
           </p:cNvSpPr>
@@ -653,53 +3266,55 @@
             <p:ph type="dt" sz="half" idx="10"/>
           </p:nvPr>
         </p:nvSpPr>
-        <p:spPr/>
+        <p:spPr>
+          <a:xfrm>
+            <a:off x="7814452" y="379941"/>
+            <a:ext cx="2910840" cy="365125"/>
+          </a:xfrm>
+        </p:spPr>
+        <p:txBody>
+          <a:bodyPr/>
+          <a:lstStyle>
+            <a:lvl1pPr algn="r">
+              <a:defRPr/>
+            </a:lvl1pPr>
+          </a:lstStyle>
+          <a:p>
+            <a:fld id="{3001F3D3-B64E-45E5-A774-FFEE7077F3D9}" type="datetimeFigureOut">
+              <a:rPr lang="en-US" smtClean="0"/>
+              <a:t>6/15/2026</a:t>
+            </a:fld>
+            <a:endParaRPr lang="en-US"/>
+          </a:p>
+        </p:txBody>
+      </p:sp>
+      <p:sp>
+        <p:nvSpPr>
+          <p:cNvPr id="5" name="Footer Placeholder 4"/>
+          <p:cNvSpPr>
+            <a:spLocks noGrp="1"/>
+          </p:cNvSpPr>
+          <p:nvPr>
+            <p:ph type="ftr" sz="quarter" idx="11"/>
+          </p:nvPr>
+        </p:nvSpPr>
+        <p:spPr>
+          <a:xfrm>
+            <a:off x="685800" y="381000"/>
+            <a:ext cx="6991492" cy="365125"/>
+          </a:xfrm>
+        </p:spPr>
         <p:txBody>
           <a:bodyPr/>
           <a:lstStyle/>
           <a:p>
-            <a:fld id="{3001F3D3-B64E-45E5-A774-FFEE7077F3D9}" type="datetimeFigureOut">
-              <a:rPr lang="en-US" smtClean="0"/>
-              <a:t>6/10/2026</a:t>
-            </a:fld>
             <a:endParaRPr lang="en-US"/>
           </a:p>
         </p:txBody>
       </p:sp>
       <p:sp>
         <p:nvSpPr>
-          <p:cNvPr id="5" name="Footer Placeholder 4">
-            <a:extLst>
-              <a:ext uri="{FF2B5EF4-FFF2-40B4-BE49-F238E27FC236}">
-                <a16:creationId xmlns:a16="http://schemas.microsoft.com/office/drawing/2014/main" id="{1D93B567-2026-42EF-77C2-19B5535DA383}"/>
-              </a:ext>
-            </a:extLst>
-          </p:cNvPr>
-          <p:cNvSpPr>
-            <a:spLocks noGrp="1"/>
-          </p:cNvSpPr>
-          <p:nvPr>
-            <p:ph type="ftr" sz="quarter" idx="11"/>
-          </p:nvPr>
-        </p:nvSpPr>
-        <p:spPr/>
-        <p:txBody>
-          <a:bodyPr/>
-          <a:lstStyle/>
-          <a:p>
-            <a:endParaRPr lang="en-US"/>
-          </a:p>
-        </p:txBody>
-      </p:sp>
-      <p:sp>
-        <p:nvSpPr>
-          <p:cNvPr id="6" name="Slide Number Placeholder 5">
-            <a:extLst>
-              <a:ext uri="{FF2B5EF4-FFF2-40B4-BE49-F238E27FC236}">
-                <a16:creationId xmlns:a16="http://schemas.microsoft.com/office/drawing/2014/main" id="{615059C7-B99D-7861-163A-10860FEE27AC}"/>
-              </a:ext>
-            </a:extLst>
-          </p:cNvPr>
+          <p:cNvPr id="6" name="Slide Number Placeholder 5"/>
           <p:cNvSpPr>
             <a:spLocks noGrp="1"/>
           </p:cNvSpPr>
@@ -707,7 +3322,12 @@
             <p:ph type="sldNum" sz="quarter" idx="12"/>
           </p:nvPr>
         </p:nvSpPr>
-        <p:spPr/>
+        <p:spPr>
+          <a:xfrm>
+            <a:off x="10862452" y="381000"/>
+            <a:ext cx="643748" cy="365125"/>
+          </a:xfrm>
+        </p:spPr>
         <p:txBody>
           <a:bodyPr/>
           <a:lstStyle/>
@@ -723,7 +3343,7 @@
     </p:spTree>
     <p:extLst>
       <p:ext uri="{BB962C8B-B14F-4D97-AF65-F5344CB8AC3E}">
-        <p14:creationId xmlns:p14="http://schemas.microsoft.com/office/powerpoint/2010/main" val="3139591332"/>
+        <p14:creationId xmlns:p14="http://schemas.microsoft.com/office/powerpoint/2010/main" val="1610195835"/>
       </p:ext>
     </p:extLst>
   </p:cSld>
@@ -752,13 +3372,7 @@
       </p:grpSpPr>
       <p:sp>
         <p:nvSpPr>
-          <p:cNvPr id="2" name="Title 1">
-            <a:extLst>
-              <a:ext uri="{FF2B5EF4-FFF2-40B4-BE49-F238E27FC236}">
-                <a16:creationId xmlns:a16="http://schemas.microsoft.com/office/drawing/2014/main" id="{8D508306-B573-6853-54C9-1BC8CDFB110F}"/>
-              </a:ext>
-            </a:extLst>
-          </p:cNvPr>
+          <p:cNvPr id="2" name="Title 1"/>
           <p:cNvSpPr>
             <a:spLocks noGrp="1"/>
           </p:cNvSpPr>
@@ -775,18 +3389,13 @@
               <a:rPr lang="en-US"/>
               <a:t>Click to edit Master title style</a:t>
             </a:r>
-          </a:p>
-        </p:txBody>
-      </p:sp>
-      <p:sp>
-        <p:nvSpPr>
-          <p:cNvPr id="3" name="Content Placeholder 2">
-            <a:extLst>
-              <a:ext uri="{FF2B5EF4-FFF2-40B4-BE49-F238E27FC236}">
-                <a16:creationId xmlns:a16="http://schemas.microsoft.com/office/drawing/2014/main" id="{65AE420F-8AF5-1177-ACAC-F4AD693CEB03}"/>
-              </a:ext>
-            </a:extLst>
-          </p:cNvPr>
+            <a:endParaRPr lang="en-US" dirty="0"/>
+          </a:p>
+        </p:txBody>
+      </p:sp>
+      <p:sp>
+        <p:nvSpPr>
+          <p:cNvPr id="3" name="Content Placeholder 2"/>
           <p:cNvSpPr>
             <a:spLocks noGrp="1"/>
           </p:cNvSpPr>
@@ -832,18 +3441,13 @@
               <a:rPr lang="en-US"/>
               <a:t>Fifth level</a:t>
             </a:r>
-          </a:p>
-        </p:txBody>
-      </p:sp>
-      <p:sp>
-        <p:nvSpPr>
-          <p:cNvPr id="4" name="Date Placeholder 3">
-            <a:extLst>
-              <a:ext uri="{FF2B5EF4-FFF2-40B4-BE49-F238E27FC236}">
-                <a16:creationId xmlns:a16="http://schemas.microsoft.com/office/drawing/2014/main" id="{D66A7F05-0D57-5DFA-B372-81F77D8F16C8}"/>
-              </a:ext>
-            </a:extLst>
-          </p:cNvPr>
+            <a:endParaRPr lang="en-US" dirty="0"/>
+          </a:p>
+        </p:txBody>
+      </p:sp>
+      <p:sp>
+        <p:nvSpPr>
+          <p:cNvPr id="4" name="Date Placeholder 3"/>
           <p:cNvSpPr>
             <a:spLocks noGrp="1"/>
           </p:cNvSpPr>
@@ -858,7 +3462,7 @@
           <a:p>
             <a:fld id="{3001F3D3-B64E-45E5-A774-FFEE7077F3D9}" type="datetimeFigureOut">
               <a:rPr lang="en-US" smtClean="0"/>
-              <a:t>6/10/2026</a:t>
+              <a:t>6/15/2026</a:t>
             </a:fld>
             <a:endParaRPr lang="en-US"/>
           </a:p>
@@ -866,13 +3470,7 @@
       </p:sp>
       <p:sp>
         <p:nvSpPr>
-          <p:cNvPr id="5" name="Footer Placeholder 4">
-            <a:extLst>
-              <a:ext uri="{FF2B5EF4-FFF2-40B4-BE49-F238E27FC236}">
-                <a16:creationId xmlns:a16="http://schemas.microsoft.com/office/drawing/2014/main" id="{BC52BE0D-25E1-F9C9-E312-8537CE63668C}"/>
-              </a:ext>
-            </a:extLst>
-          </p:cNvPr>
+          <p:cNvPr id="5" name="Footer Placeholder 4"/>
           <p:cNvSpPr>
             <a:spLocks noGrp="1"/>
           </p:cNvSpPr>
@@ -891,13 +3489,7 @@
       </p:sp>
       <p:sp>
         <p:nvSpPr>
-          <p:cNvPr id="6" name="Slide Number Placeholder 5">
-            <a:extLst>
-              <a:ext uri="{FF2B5EF4-FFF2-40B4-BE49-F238E27FC236}">
-                <a16:creationId xmlns:a16="http://schemas.microsoft.com/office/drawing/2014/main" id="{3E819E9D-F2F0-8334-7FE0-D64EF9BAEA8C}"/>
-              </a:ext>
-            </a:extLst>
-          </p:cNvPr>
+          <p:cNvPr id="6" name="Slide Number Placeholder 5"/>
           <p:cNvSpPr>
             <a:spLocks noGrp="1"/>
           </p:cNvSpPr>
@@ -921,7 +3513,7 @@
     </p:spTree>
     <p:extLst>
       <p:ext uri="{BB962C8B-B14F-4D97-AF65-F5344CB8AC3E}">
-        <p14:creationId xmlns:p14="http://schemas.microsoft.com/office/powerpoint/2010/main" val="1915569720"/>
+        <p14:creationId xmlns:p14="http://schemas.microsoft.com/office/powerpoint/2010/main" val="1029577334"/>
       </p:ext>
     </p:extLst>
   </p:cSld>
@@ -932,7 +3524,7 @@
 </file>
 
 <file path=ppt/slideLayouts/slideLayout3.xml><?xml version="1.0" encoding="utf-8"?>
-<p:sldLayout xmlns:a="http://schemas.openxmlformats.org/drawingml/2006/main" xmlns:r="http://schemas.openxmlformats.org/officeDocument/2006/relationships" xmlns:p="http://schemas.openxmlformats.org/presentationml/2006/main" type="secHead" preserve="1">
+<p:sldLayout xmlns:a="http://schemas.openxmlformats.org/drawingml/2006/main" xmlns:r="http://schemas.openxmlformats.org/officeDocument/2006/relationships" xmlns:p="http://schemas.openxmlformats.org/presentationml/2006/main" showMasterSp="0" type="secHead" preserve="1">
   <p:cSld name="Section Header">
     <p:spTree>
       <p:nvGrpSpPr>
@@ -948,15 +3540,39 @@
           <a:chExt cx="0" cy="0"/>
         </a:xfrm>
       </p:grpSpPr>
-      <p:sp>
-        <p:nvSpPr>
-          <p:cNvPr id="2" name="Title 1">
+      <p:pic>
+        <p:nvPicPr>
+          <p:cNvPr id="9" name="Picture 8" descr="C0-HD-BTM.png"/>
+          <p:cNvPicPr>
+            <a:picLocks noChangeAspect="1"/>
+          </p:cNvPicPr>
+          <p:nvPr/>
+        </p:nvPicPr>
+        <p:blipFill>
+          <a:blip r:embed="rId2">
             <a:extLst>
-              <a:ext uri="{FF2B5EF4-FFF2-40B4-BE49-F238E27FC236}">
-                <a16:creationId xmlns:a16="http://schemas.microsoft.com/office/drawing/2014/main" id="{0BCFE40B-898D-7129-66B7-8FCD6903DCF8}"/>
+              <a:ext uri="{28A0092B-C50C-407E-A947-70E740481C1C}">
+                <a14:useLocalDpi xmlns:a14="http://schemas.microsoft.com/office/drawing/2010/main" val="0"/>
               </a:ext>
             </a:extLst>
-          </p:cNvPr>
+          </a:blip>
+          <a:stretch>
+            <a:fillRect/>
+          </a:stretch>
+        </p:blipFill>
+        <p:spPr>
+          <a:xfrm>
+            <a:off x="0" y="4375150"/>
+            <a:ext cx="12192000" cy="2482850"/>
+          </a:xfrm>
+          <a:prstGeom prst="rect">
+            <a:avLst/>
+          </a:prstGeom>
+        </p:spPr>
+      </p:pic>
+      <p:sp>
+        <p:nvSpPr>
+          <p:cNvPr id="2" name="Title 1"/>
           <p:cNvSpPr>
             <a:spLocks noGrp="1"/>
           </p:cNvSpPr>
@@ -966,15 +3582,17 @@
         </p:nvSpPr>
         <p:spPr>
           <a:xfrm>
-            <a:off x="831850" y="1709738"/>
-            <a:ext cx="10515600" cy="2852737"/>
-          </a:xfrm>
-        </p:spPr>
-        <p:txBody>
-          <a:bodyPr anchor="b"/>
+            <a:off x="685800" y="753533"/>
+            <a:ext cx="10820399" cy="2801935"/>
+          </a:xfrm>
+        </p:spPr>
+        <p:txBody>
+          <a:bodyPr anchor="b">
+            <a:normAutofit/>
+          </a:bodyPr>
           <a:lstStyle>
-            <a:lvl1pPr>
-              <a:defRPr sz="6000"/>
+            <a:lvl1pPr algn="r">
+              <a:defRPr sz="4000"/>
             </a:lvl1pPr>
           </a:lstStyle>
           <a:p>
@@ -982,18 +3600,13 @@
               <a:rPr lang="en-US"/>
               <a:t>Click to edit Master title style</a:t>
             </a:r>
-          </a:p>
-        </p:txBody>
-      </p:sp>
-      <p:sp>
-        <p:nvSpPr>
-          <p:cNvPr id="3" name="Text Placeholder 2">
-            <a:extLst>
-              <a:ext uri="{FF2B5EF4-FFF2-40B4-BE49-F238E27FC236}">
-                <a16:creationId xmlns:a16="http://schemas.microsoft.com/office/drawing/2014/main" id="{6786A20B-D06C-ABD3-D0CB-83F7CBECBE07}"/>
-              </a:ext>
-            </a:extLst>
-          </p:cNvPr>
+            <a:endParaRPr lang="en-US" dirty="0"/>
+          </a:p>
+        </p:txBody>
+      </p:sp>
+      <p:sp>
+        <p:nvSpPr>
+          <p:cNvPr id="3" name="Text Placeholder 2"/>
           <p:cNvSpPr>
             <a:spLocks noGrp="1"/>
           </p:cNvSpPr>
@@ -1003,176 +3616,174 @@
         </p:nvSpPr>
         <p:spPr>
           <a:xfrm>
-            <a:off x="831850" y="4589463"/>
-            <a:ext cx="10515600" cy="1500187"/>
+            <a:off x="1024467" y="3641725"/>
+            <a:ext cx="10490200" cy="955675"/>
+          </a:xfrm>
+        </p:spPr>
+        <p:txBody>
+          <a:bodyPr>
+            <a:normAutofit/>
+          </a:bodyPr>
+          <a:lstStyle>
+            <a:lvl1pPr marL="0" indent="0" algn="r">
+              <a:buNone/>
+              <a:defRPr sz="2200">
+                <a:solidFill>
+                  <a:schemeClr val="tx1">
+                    <a:tint val="75000"/>
+                  </a:schemeClr>
+                </a:solidFill>
+              </a:defRPr>
+            </a:lvl1pPr>
+            <a:lvl2pPr marL="457200" indent="0">
+              <a:buNone/>
+              <a:defRPr sz="2000">
+                <a:solidFill>
+                  <a:schemeClr val="tx1">
+                    <a:tint val="75000"/>
+                  </a:schemeClr>
+                </a:solidFill>
+              </a:defRPr>
+            </a:lvl2pPr>
+            <a:lvl3pPr marL="914400" indent="0">
+              <a:buNone/>
+              <a:defRPr sz="1800">
+                <a:solidFill>
+                  <a:schemeClr val="tx1">
+                    <a:tint val="75000"/>
+                  </a:schemeClr>
+                </a:solidFill>
+              </a:defRPr>
+            </a:lvl3pPr>
+            <a:lvl4pPr marL="1371600" indent="0">
+              <a:buNone/>
+              <a:defRPr sz="1600">
+                <a:solidFill>
+                  <a:schemeClr val="tx1">
+                    <a:tint val="75000"/>
+                  </a:schemeClr>
+                </a:solidFill>
+              </a:defRPr>
+            </a:lvl4pPr>
+            <a:lvl5pPr marL="1828800" indent="0">
+              <a:buNone/>
+              <a:defRPr sz="1600">
+                <a:solidFill>
+                  <a:schemeClr val="tx1">
+                    <a:tint val="75000"/>
+                  </a:schemeClr>
+                </a:solidFill>
+              </a:defRPr>
+            </a:lvl5pPr>
+            <a:lvl6pPr marL="2286000" indent="0">
+              <a:buNone/>
+              <a:defRPr sz="1600">
+                <a:solidFill>
+                  <a:schemeClr val="tx1">
+                    <a:tint val="75000"/>
+                  </a:schemeClr>
+                </a:solidFill>
+              </a:defRPr>
+            </a:lvl6pPr>
+            <a:lvl7pPr marL="2743200" indent="0">
+              <a:buNone/>
+              <a:defRPr sz="1600">
+                <a:solidFill>
+                  <a:schemeClr val="tx1">
+                    <a:tint val="75000"/>
+                  </a:schemeClr>
+                </a:solidFill>
+              </a:defRPr>
+            </a:lvl7pPr>
+            <a:lvl8pPr marL="3200400" indent="0">
+              <a:buNone/>
+              <a:defRPr sz="1600">
+                <a:solidFill>
+                  <a:schemeClr val="tx1">
+                    <a:tint val="75000"/>
+                  </a:schemeClr>
+                </a:solidFill>
+              </a:defRPr>
+            </a:lvl8pPr>
+            <a:lvl9pPr marL="3657600" indent="0">
+              <a:buNone/>
+              <a:defRPr sz="1600">
+                <a:solidFill>
+                  <a:schemeClr val="tx1">
+                    <a:tint val="75000"/>
+                  </a:schemeClr>
+                </a:solidFill>
+              </a:defRPr>
+            </a:lvl9pPr>
+          </a:lstStyle>
+          <a:p>
+            <a:pPr lvl="0"/>
+            <a:r>
+              <a:rPr lang="en-US"/>
+              <a:t>Click to edit Master text styles</a:t>
+            </a:r>
+          </a:p>
+        </p:txBody>
+      </p:sp>
+      <p:sp>
+        <p:nvSpPr>
+          <p:cNvPr id="4" name="Date Placeholder 3"/>
+          <p:cNvSpPr>
+            <a:spLocks noGrp="1"/>
+          </p:cNvSpPr>
+          <p:nvPr>
+            <p:ph type="dt" sz="half" idx="10"/>
+          </p:nvPr>
+        </p:nvSpPr>
+        <p:spPr>
+          <a:xfrm>
+            <a:off x="7814452" y="381000"/>
+            <a:ext cx="2910840" cy="365125"/>
           </a:xfrm>
         </p:spPr>
         <p:txBody>
           <a:bodyPr/>
           <a:lstStyle>
-            <a:lvl1pPr marL="0" indent="0">
-              <a:buNone/>
-              <a:defRPr sz="2400">
-                <a:solidFill>
-                  <a:schemeClr val="tx1">
-                    <a:tint val="82000"/>
-                  </a:schemeClr>
-                </a:solidFill>
-              </a:defRPr>
+            <a:lvl1pPr algn="r">
+              <a:defRPr/>
             </a:lvl1pPr>
-            <a:lvl2pPr marL="457200" indent="0">
-              <a:buNone/>
-              <a:defRPr sz="2000">
-                <a:solidFill>
-                  <a:schemeClr val="tx1">
-                    <a:tint val="82000"/>
-                  </a:schemeClr>
-                </a:solidFill>
-              </a:defRPr>
-            </a:lvl2pPr>
-            <a:lvl3pPr marL="914400" indent="0">
-              <a:buNone/>
-              <a:defRPr sz="1800">
-                <a:solidFill>
-                  <a:schemeClr val="tx1">
-                    <a:tint val="82000"/>
-                  </a:schemeClr>
-                </a:solidFill>
-              </a:defRPr>
-            </a:lvl3pPr>
-            <a:lvl4pPr marL="1371600" indent="0">
-              <a:buNone/>
-              <a:defRPr sz="1600">
-                <a:solidFill>
-                  <a:schemeClr val="tx1">
-                    <a:tint val="82000"/>
-                  </a:schemeClr>
-                </a:solidFill>
-              </a:defRPr>
-            </a:lvl4pPr>
-            <a:lvl5pPr marL="1828800" indent="0">
-              <a:buNone/>
-              <a:defRPr sz="1600">
-                <a:solidFill>
-                  <a:schemeClr val="tx1">
-                    <a:tint val="82000"/>
-                  </a:schemeClr>
-                </a:solidFill>
-              </a:defRPr>
-            </a:lvl5pPr>
-            <a:lvl6pPr marL="2286000" indent="0">
-              <a:buNone/>
-              <a:defRPr sz="1600">
-                <a:solidFill>
-                  <a:schemeClr val="tx1">
-                    <a:tint val="82000"/>
-                  </a:schemeClr>
-                </a:solidFill>
-              </a:defRPr>
-            </a:lvl6pPr>
-            <a:lvl7pPr marL="2743200" indent="0">
-              <a:buNone/>
-              <a:defRPr sz="1600">
-                <a:solidFill>
-                  <a:schemeClr val="tx1">
-                    <a:tint val="82000"/>
-                  </a:schemeClr>
-                </a:solidFill>
-              </a:defRPr>
-            </a:lvl7pPr>
-            <a:lvl8pPr marL="3200400" indent="0">
-              <a:buNone/>
-              <a:defRPr sz="1600">
-                <a:solidFill>
-                  <a:schemeClr val="tx1">
-                    <a:tint val="82000"/>
-                  </a:schemeClr>
-                </a:solidFill>
-              </a:defRPr>
-            </a:lvl8pPr>
-            <a:lvl9pPr marL="3657600" indent="0">
-              <a:buNone/>
-              <a:defRPr sz="1600">
-                <a:solidFill>
-                  <a:schemeClr val="tx1">
-                    <a:tint val="82000"/>
-                  </a:schemeClr>
-                </a:solidFill>
-              </a:defRPr>
-            </a:lvl9pPr>
           </a:lstStyle>
           <a:p>
-            <a:pPr lvl="0"/>
-            <a:r>
-              <a:rPr lang="en-US"/>
-              <a:t>Click to edit Master text styles</a:t>
-            </a:r>
-          </a:p>
-        </p:txBody>
-      </p:sp>
-      <p:sp>
-        <p:nvSpPr>
-          <p:cNvPr id="4" name="Date Placeholder 3">
-            <a:extLst>
-              <a:ext uri="{FF2B5EF4-FFF2-40B4-BE49-F238E27FC236}">
-                <a16:creationId xmlns:a16="http://schemas.microsoft.com/office/drawing/2014/main" id="{C44BF742-C1AE-7CDA-6C05-ABD5C491576A}"/>
-              </a:ext>
-            </a:extLst>
-          </p:cNvPr>
-          <p:cNvSpPr>
-            <a:spLocks noGrp="1"/>
-          </p:cNvSpPr>
-          <p:nvPr>
-            <p:ph type="dt" sz="half" idx="10"/>
-          </p:nvPr>
-        </p:nvSpPr>
-        <p:spPr/>
+            <a:fld id="{3001F3D3-B64E-45E5-A774-FFEE7077F3D9}" type="datetimeFigureOut">
+              <a:rPr lang="en-US" smtClean="0"/>
+              <a:t>6/15/2026</a:t>
+            </a:fld>
+            <a:endParaRPr lang="en-US"/>
+          </a:p>
+        </p:txBody>
+      </p:sp>
+      <p:sp>
+        <p:nvSpPr>
+          <p:cNvPr id="5" name="Footer Placeholder 4"/>
+          <p:cNvSpPr>
+            <a:spLocks noGrp="1"/>
+          </p:cNvSpPr>
+          <p:nvPr>
+            <p:ph type="ftr" sz="quarter" idx="11"/>
+          </p:nvPr>
+        </p:nvSpPr>
+        <p:spPr>
+          <a:xfrm>
+            <a:off x="685800" y="381001"/>
+            <a:ext cx="6991492" cy="364065"/>
+          </a:xfrm>
+        </p:spPr>
         <p:txBody>
           <a:bodyPr/>
           <a:lstStyle/>
           <a:p>
-            <a:fld id="{3001F3D3-B64E-45E5-A774-FFEE7077F3D9}" type="datetimeFigureOut">
-              <a:rPr lang="en-US" smtClean="0"/>
-              <a:t>6/10/2026</a:t>
-            </a:fld>
             <a:endParaRPr lang="en-US"/>
           </a:p>
         </p:txBody>
       </p:sp>
       <p:sp>
         <p:nvSpPr>
-          <p:cNvPr id="5" name="Footer Placeholder 4">
-            <a:extLst>
-              <a:ext uri="{FF2B5EF4-FFF2-40B4-BE49-F238E27FC236}">
-                <a16:creationId xmlns:a16="http://schemas.microsoft.com/office/drawing/2014/main" id="{46DC56FD-8C4E-C507-66B9-D316FB2FFC7E}"/>
-              </a:ext>
-            </a:extLst>
-          </p:cNvPr>
-          <p:cNvSpPr>
-            <a:spLocks noGrp="1"/>
-          </p:cNvSpPr>
-          <p:nvPr>
-            <p:ph type="ftr" sz="quarter" idx="11"/>
-          </p:nvPr>
-        </p:nvSpPr>
-        <p:spPr/>
-        <p:txBody>
-          <a:bodyPr/>
-          <a:lstStyle/>
-          <a:p>
-            <a:endParaRPr lang="en-US"/>
-          </a:p>
-        </p:txBody>
-      </p:sp>
-      <p:sp>
-        <p:nvSpPr>
-          <p:cNvPr id="6" name="Slide Number Placeholder 5">
-            <a:extLst>
-              <a:ext uri="{FF2B5EF4-FFF2-40B4-BE49-F238E27FC236}">
-                <a16:creationId xmlns:a16="http://schemas.microsoft.com/office/drawing/2014/main" id="{EDFA6A25-580B-DB86-94A3-72852B18782B}"/>
-              </a:ext>
-            </a:extLst>
-          </p:cNvPr>
+          <p:cNvPr id="6" name="Slide Number Placeholder 5"/>
           <p:cNvSpPr>
             <a:spLocks noGrp="1"/>
           </p:cNvSpPr>
@@ -1180,7 +3791,12 @@
             <p:ph type="sldNum" sz="quarter" idx="12"/>
           </p:nvPr>
         </p:nvSpPr>
-        <p:spPr/>
+        <p:spPr>
+          <a:xfrm>
+            <a:off x="10862452" y="381000"/>
+            <a:ext cx="643748" cy="365125"/>
+          </a:xfrm>
+        </p:spPr>
         <p:txBody>
           <a:bodyPr/>
           <a:lstStyle/>
@@ -1196,7 +3812,7 @@
     </p:spTree>
     <p:extLst>
       <p:ext uri="{BB962C8B-B14F-4D97-AF65-F5344CB8AC3E}">
-        <p14:creationId xmlns:p14="http://schemas.microsoft.com/office/powerpoint/2010/main" val="2190823431"/>
+        <p14:creationId xmlns:p14="http://schemas.microsoft.com/office/powerpoint/2010/main" val="825748657"/>
       </p:ext>
     </p:extLst>
   </p:cSld>
@@ -1225,13 +3841,7 @@
       </p:grpSpPr>
       <p:sp>
         <p:nvSpPr>
-          <p:cNvPr id="2" name="Title 1">
-            <a:extLst>
-              <a:ext uri="{FF2B5EF4-FFF2-40B4-BE49-F238E27FC236}">
-                <a16:creationId xmlns:a16="http://schemas.microsoft.com/office/drawing/2014/main" id="{D2D5773E-0B98-C144-36F3-60D4DC20F8C5}"/>
-              </a:ext>
-            </a:extLst>
-          </p:cNvPr>
+          <p:cNvPr id="2" name="Title 1"/>
           <p:cNvSpPr>
             <a:spLocks noGrp="1"/>
           </p:cNvSpPr>
@@ -1248,18 +3858,13 @@
               <a:rPr lang="en-US"/>
               <a:t>Click to edit Master title style</a:t>
             </a:r>
-          </a:p>
-        </p:txBody>
-      </p:sp>
-      <p:sp>
-        <p:nvSpPr>
-          <p:cNvPr id="3" name="Content Placeholder 2">
-            <a:extLst>
-              <a:ext uri="{FF2B5EF4-FFF2-40B4-BE49-F238E27FC236}">
-                <a16:creationId xmlns:a16="http://schemas.microsoft.com/office/drawing/2014/main" id="{5FD865F0-7112-C513-BF6E-547D67EBE0E3}"/>
-              </a:ext>
-            </a:extLst>
-          </p:cNvPr>
+            <a:endParaRPr lang="en-US" dirty="0"/>
+          </a:p>
+        </p:txBody>
+      </p:sp>
+      <p:sp>
+        <p:nvSpPr>
+          <p:cNvPr id="3" name="Content Placeholder 2"/>
           <p:cNvSpPr>
             <a:spLocks noGrp="1"/>
           </p:cNvSpPr>
@@ -1269,8 +3874,8 @@
         </p:nvSpPr>
         <p:spPr>
           <a:xfrm>
-            <a:off x="838200" y="1825625"/>
-            <a:ext cx="5181600" cy="4351338"/>
+            <a:off x="685800" y="2194559"/>
+            <a:ext cx="5334000" cy="4024125"/>
           </a:xfrm>
         </p:spPr>
         <p:txBody>
@@ -1310,18 +3915,13 @@
               <a:rPr lang="en-US"/>
               <a:t>Fifth level</a:t>
             </a:r>
-          </a:p>
-        </p:txBody>
-      </p:sp>
-      <p:sp>
-        <p:nvSpPr>
-          <p:cNvPr id="4" name="Content Placeholder 3">
-            <a:extLst>
-              <a:ext uri="{FF2B5EF4-FFF2-40B4-BE49-F238E27FC236}">
-                <a16:creationId xmlns:a16="http://schemas.microsoft.com/office/drawing/2014/main" id="{955B9809-BD28-2830-DFA0-B2853F104B4E}"/>
-              </a:ext>
-            </a:extLst>
-          </p:cNvPr>
+            <a:endParaRPr lang="en-US" dirty="0"/>
+          </a:p>
+        </p:txBody>
+      </p:sp>
+      <p:sp>
+        <p:nvSpPr>
+          <p:cNvPr id="4" name="Content Placeholder 3"/>
           <p:cNvSpPr>
             <a:spLocks noGrp="1"/>
           </p:cNvSpPr>
@@ -1331,8 +3931,8 @@
         </p:nvSpPr>
         <p:spPr>
           <a:xfrm>
-            <a:off x="6172200" y="1825625"/>
-            <a:ext cx="5181600" cy="4351338"/>
+            <a:off x="6172200" y="2194559"/>
+            <a:ext cx="5334000" cy="4024125"/>
           </a:xfrm>
         </p:spPr>
         <p:txBody>
@@ -1372,18 +3972,13 @@
               <a:rPr lang="en-US"/>
               <a:t>Fifth level</a:t>
             </a:r>
-          </a:p>
-        </p:txBody>
-      </p:sp>
-      <p:sp>
-        <p:nvSpPr>
-          <p:cNvPr id="5" name="Date Placeholder 4">
-            <a:extLst>
-              <a:ext uri="{FF2B5EF4-FFF2-40B4-BE49-F238E27FC236}">
-                <a16:creationId xmlns:a16="http://schemas.microsoft.com/office/drawing/2014/main" id="{5D3E00BB-0D38-40B9-19E8-E9644AD1CA06}"/>
-              </a:ext>
-            </a:extLst>
-          </p:cNvPr>
+            <a:endParaRPr lang="en-US" dirty="0"/>
+          </a:p>
+        </p:txBody>
+      </p:sp>
+      <p:sp>
+        <p:nvSpPr>
+          <p:cNvPr id="5" name="Date Placeholder 4"/>
           <p:cNvSpPr>
             <a:spLocks noGrp="1"/>
           </p:cNvSpPr>
@@ -1398,7 +3993,7 @@
           <a:p>
             <a:fld id="{3001F3D3-B64E-45E5-A774-FFEE7077F3D9}" type="datetimeFigureOut">
               <a:rPr lang="en-US" smtClean="0"/>
-              <a:t>6/10/2026</a:t>
+              <a:t>6/15/2026</a:t>
             </a:fld>
             <a:endParaRPr lang="en-US"/>
           </a:p>
@@ -1406,13 +4001,7 @@
       </p:sp>
       <p:sp>
         <p:nvSpPr>
-          <p:cNvPr id="6" name="Footer Placeholder 5">
-            <a:extLst>
-              <a:ext uri="{FF2B5EF4-FFF2-40B4-BE49-F238E27FC236}">
-                <a16:creationId xmlns:a16="http://schemas.microsoft.com/office/drawing/2014/main" id="{5B352258-BC09-5CA4-D57A-E7816A33167A}"/>
-              </a:ext>
-            </a:extLst>
-          </p:cNvPr>
+          <p:cNvPr id="6" name="Footer Placeholder 5"/>
           <p:cNvSpPr>
             <a:spLocks noGrp="1"/>
           </p:cNvSpPr>
@@ -1431,13 +4020,7 @@
       </p:sp>
       <p:sp>
         <p:nvSpPr>
-          <p:cNvPr id="7" name="Slide Number Placeholder 6">
-            <a:extLst>
-              <a:ext uri="{FF2B5EF4-FFF2-40B4-BE49-F238E27FC236}">
-                <a16:creationId xmlns:a16="http://schemas.microsoft.com/office/drawing/2014/main" id="{34316905-B40A-2AEF-C2A9-B936B6365F9D}"/>
-              </a:ext>
-            </a:extLst>
-          </p:cNvPr>
+          <p:cNvPr id="7" name="Slide Number Placeholder 6"/>
           <p:cNvSpPr>
             <a:spLocks noGrp="1"/>
           </p:cNvSpPr>
@@ -1461,7 +4044,7 @@
     </p:spTree>
     <p:extLst>
       <p:ext uri="{BB962C8B-B14F-4D97-AF65-F5344CB8AC3E}">
-        <p14:creationId xmlns:p14="http://schemas.microsoft.com/office/powerpoint/2010/main" val="2298109277"/>
+        <p14:creationId xmlns:p14="http://schemas.microsoft.com/office/powerpoint/2010/main" val="2549574207"/>
       </p:ext>
     </p:extLst>
   </p:cSld>
@@ -1490,13 +4073,7 @@
       </p:grpSpPr>
       <p:sp>
         <p:nvSpPr>
-          <p:cNvPr id="2" name="Title 1">
-            <a:extLst>
-              <a:ext uri="{FF2B5EF4-FFF2-40B4-BE49-F238E27FC236}">
-                <a16:creationId xmlns:a16="http://schemas.microsoft.com/office/drawing/2014/main" id="{67734E2C-9EA4-23F7-DD0B-7CAA374B1BDF}"/>
-              </a:ext>
-            </a:extLst>
-          </p:cNvPr>
+          <p:cNvPr id="2" name="Title 1"/>
           <p:cNvSpPr>
             <a:spLocks noGrp="1"/>
           </p:cNvSpPr>
@@ -1506,8 +4083,8 @@
         </p:nvSpPr>
         <p:spPr>
           <a:xfrm>
-            <a:off x="839788" y="365125"/>
-            <a:ext cx="10515600" cy="1325563"/>
+            <a:off x="2895600" y="762000"/>
+            <a:ext cx="8610600" cy="1295400"/>
           </a:xfrm>
         </p:spPr>
         <p:txBody>
@@ -1518,18 +4095,13 @@
               <a:rPr lang="en-US"/>
               <a:t>Click to edit Master title style</a:t>
             </a:r>
-          </a:p>
-        </p:txBody>
-      </p:sp>
-      <p:sp>
-        <p:nvSpPr>
-          <p:cNvPr id="3" name="Text Placeholder 2">
-            <a:extLst>
-              <a:ext uri="{FF2B5EF4-FFF2-40B4-BE49-F238E27FC236}">
-                <a16:creationId xmlns:a16="http://schemas.microsoft.com/office/drawing/2014/main" id="{88D3CFA0-53C3-153D-839D-D75FFD279F1E}"/>
-              </a:ext>
-            </a:extLst>
-          </p:cNvPr>
+            <a:endParaRPr lang="en-US" dirty="0"/>
+          </a:p>
+        </p:txBody>
+      </p:sp>
+      <p:sp>
+        <p:nvSpPr>
+          <p:cNvPr id="3" name="Text Placeholder 2"/>
           <p:cNvSpPr>
             <a:spLocks noGrp="1"/>
           </p:cNvSpPr>
@@ -1539,16 +4111,22 @@
         </p:nvSpPr>
         <p:spPr>
           <a:xfrm>
-            <a:off x="839788" y="1681163"/>
-            <a:ext cx="5157787" cy="823912"/>
-          </a:xfrm>
-        </p:spPr>
-        <p:txBody>
-          <a:bodyPr anchor="b"/>
+            <a:off x="914409" y="2183802"/>
+            <a:ext cx="5079991" cy="823912"/>
+          </a:xfrm>
+        </p:spPr>
+        <p:txBody>
+          <a:bodyPr anchor="b">
+            <a:normAutofit/>
+          </a:bodyPr>
           <a:lstStyle>
             <a:lvl1pPr marL="0" indent="0">
               <a:buNone/>
-              <a:defRPr sz="2400" b="1"/>
+              <a:defRPr sz="2800" b="0">
+                <a:solidFill>
+                  <a:schemeClr val="tx1"/>
+                </a:solidFill>
+              </a:defRPr>
             </a:lvl1pPr>
             <a:lvl2pPr marL="457200" indent="0">
               <a:buNone/>
@@ -1594,13 +4172,7 @@
       </p:sp>
       <p:sp>
         <p:nvSpPr>
-          <p:cNvPr id="4" name="Content Placeholder 3">
-            <a:extLst>
-              <a:ext uri="{FF2B5EF4-FFF2-40B4-BE49-F238E27FC236}">
-                <a16:creationId xmlns:a16="http://schemas.microsoft.com/office/drawing/2014/main" id="{8FAB3D9A-C999-7CE1-7112-2340E0A04853}"/>
-              </a:ext>
-            </a:extLst>
-          </p:cNvPr>
+          <p:cNvPr id="4" name="Content Placeholder 3"/>
           <p:cNvSpPr>
             <a:spLocks noGrp="1"/>
           </p:cNvSpPr>
@@ -1610,8 +4182,8 @@
         </p:nvSpPr>
         <p:spPr>
           <a:xfrm>
-            <a:off x="839788" y="2505075"/>
-            <a:ext cx="5157787" cy="3684588"/>
+            <a:off x="685800" y="3132666"/>
+            <a:ext cx="5311775" cy="3086019"/>
           </a:xfrm>
         </p:spPr>
         <p:txBody>
@@ -1651,18 +4223,13 @@
               <a:rPr lang="en-US"/>
               <a:t>Fifth level</a:t>
             </a:r>
-          </a:p>
-        </p:txBody>
-      </p:sp>
-      <p:sp>
-        <p:nvSpPr>
-          <p:cNvPr id="5" name="Text Placeholder 4">
-            <a:extLst>
-              <a:ext uri="{FF2B5EF4-FFF2-40B4-BE49-F238E27FC236}">
-                <a16:creationId xmlns:a16="http://schemas.microsoft.com/office/drawing/2014/main" id="{D19BC7B3-E203-B704-1302-2121A6DA42DA}"/>
-              </a:ext>
-            </a:extLst>
-          </p:cNvPr>
+            <a:endParaRPr lang="en-US" dirty="0"/>
+          </a:p>
+        </p:txBody>
+      </p:sp>
+      <p:sp>
+        <p:nvSpPr>
+          <p:cNvPr id="5" name="Text Placeholder 4"/>
           <p:cNvSpPr>
             <a:spLocks noGrp="1"/>
           </p:cNvSpPr>
@@ -1672,16 +4239,22 @@
         </p:nvSpPr>
         <p:spPr>
           <a:xfrm>
-            <a:off x="6172200" y="1681163"/>
-            <a:ext cx="5183188" cy="823912"/>
-          </a:xfrm>
-        </p:spPr>
-        <p:txBody>
-          <a:bodyPr anchor="b"/>
+            <a:off x="6400800" y="2183802"/>
+            <a:ext cx="5105400" cy="823912"/>
+          </a:xfrm>
+        </p:spPr>
+        <p:txBody>
+          <a:bodyPr anchor="b">
+            <a:normAutofit/>
+          </a:bodyPr>
           <a:lstStyle>
             <a:lvl1pPr marL="0" indent="0">
               <a:buNone/>
-              <a:defRPr sz="2400" b="1"/>
+              <a:defRPr sz="2800" b="0">
+                <a:solidFill>
+                  <a:schemeClr val="tx1"/>
+                </a:solidFill>
+              </a:defRPr>
             </a:lvl1pPr>
             <a:lvl2pPr marL="457200" indent="0">
               <a:buNone/>
@@ -1727,13 +4300,7 @@
       </p:sp>
       <p:sp>
         <p:nvSpPr>
-          <p:cNvPr id="6" name="Content Placeholder 5">
-            <a:extLst>
-              <a:ext uri="{FF2B5EF4-FFF2-40B4-BE49-F238E27FC236}">
-                <a16:creationId xmlns:a16="http://schemas.microsoft.com/office/drawing/2014/main" id="{E949933D-A22B-09EC-2BEB-E26CB8FCFCC3}"/>
-              </a:ext>
-            </a:extLst>
-          </p:cNvPr>
+          <p:cNvPr id="6" name="Content Placeholder 5"/>
           <p:cNvSpPr>
             <a:spLocks noGrp="1"/>
           </p:cNvSpPr>
@@ -1743,8 +4310,8 @@
         </p:nvSpPr>
         <p:spPr>
           <a:xfrm>
-            <a:off x="6172200" y="2505075"/>
-            <a:ext cx="5183188" cy="3684588"/>
+            <a:off x="6172200" y="3132666"/>
+            <a:ext cx="5334000" cy="3086019"/>
           </a:xfrm>
         </p:spPr>
         <p:txBody>
@@ -1784,18 +4351,13 @@
               <a:rPr lang="en-US"/>
               <a:t>Fifth level</a:t>
             </a:r>
-          </a:p>
-        </p:txBody>
-      </p:sp>
-      <p:sp>
-        <p:nvSpPr>
-          <p:cNvPr id="7" name="Date Placeholder 6">
-            <a:extLst>
-              <a:ext uri="{FF2B5EF4-FFF2-40B4-BE49-F238E27FC236}">
-                <a16:creationId xmlns:a16="http://schemas.microsoft.com/office/drawing/2014/main" id="{CB4675F7-8394-D5DB-178C-A9DC2962F070}"/>
-              </a:ext>
-            </a:extLst>
-          </p:cNvPr>
+            <a:endParaRPr lang="en-US" dirty="0"/>
+          </a:p>
+        </p:txBody>
+      </p:sp>
+      <p:sp>
+        <p:nvSpPr>
+          <p:cNvPr id="7" name="Date Placeholder 6"/>
           <p:cNvSpPr>
             <a:spLocks noGrp="1"/>
           </p:cNvSpPr>
@@ -1810,7 +4372,7 @@
           <a:p>
             <a:fld id="{3001F3D3-B64E-45E5-A774-FFEE7077F3D9}" type="datetimeFigureOut">
               <a:rPr lang="en-US" smtClean="0"/>
-              <a:t>6/10/2026</a:t>
+              <a:t>6/15/2026</a:t>
             </a:fld>
             <a:endParaRPr lang="en-US"/>
           </a:p>
@@ -1818,13 +4380,7 @@
       </p:sp>
       <p:sp>
         <p:nvSpPr>
-          <p:cNvPr id="8" name="Footer Placeholder 7">
-            <a:extLst>
-              <a:ext uri="{FF2B5EF4-FFF2-40B4-BE49-F238E27FC236}">
-                <a16:creationId xmlns:a16="http://schemas.microsoft.com/office/drawing/2014/main" id="{E2660ED0-B1F1-AAFA-3451-717C68A979A7}"/>
-              </a:ext>
-            </a:extLst>
-          </p:cNvPr>
+          <p:cNvPr id="8" name="Footer Placeholder 7"/>
           <p:cNvSpPr>
             <a:spLocks noGrp="1"/>
           </p:cNvSpPr>
@@ -1843,13 +4399,7 @@
       </p:sp>
       <p:sp>
         <p:nvSpPr>
-          <p:cNvPr id="9" name="Slide Number Placeholder 8">
-            <a:extLst>
-              <a:ext uri="{FF2B5EF4-FFF2-40B4-BE49-F238E27FC236}">
-                <a16:creationId xmlns:a16="http://schemas.microsoft.com/office/drawing/2014/main" id="{70E2E095-D395-A1EE-1858-4BF70EDA89EC}"/>
-              </a:ext>
-            </a:extLst>
-          </p:cNvPr>
+          <p:cNvPr id="9" name="Slide Number Placeholder 8"/>
           <p:cNvSpPr>
             <a:spLocks noGrp="1"/>
           </p:cNvSpPr>
@@ -1873,7 +4423,7 @@
     </p:spTree>
     <p:extLst>
       <p:ext uri="{BB962C8B-B14F-4D97-AF65-F5344CB8AC3E}">
-        <p14:creationId xmlns:p14="http://schemas.microsoft.com/office/powerpoint/2010/main" val="2384016355"/>
+        <p14:creationId xmlns:p14="http://schemas.microsoft.com/office/powerpoint/2010/main" val="3448664246"/>
       </p:ext>
     </p:extLst>
   </p:cSld>
@@ -1902,13 +4452,7 @@
       </p:grpSpPr>
       <p:sp>
         <p:nvSpPr>
-          <p:cNvPr id="2" name="Title 1">
-            <a:extLst>
-              <a:ext uri="{FF2B5EF4-FFF2-40B4-BE49-F238E27FC236}">
-                <a16:creationId xmlns:a16="http://schemas.microsoft.com/office/drawing/2014/main" id="{56B6161D-DF1D-74D7-0AC8-1C9551A54963}"/>
-              </a:ext>
-            </a:extLst>
-          </p:cNvPr>
+          <p:cNvPr id="2" name="Title 1"/>
           <p:cNvSpPr>
             <a:spLocks noGrp="1"/>
           </p:cNvSpPr>
@@ -1925,18 +4469,13 @@
               <a:rPr lang="en-US"/>
               <a:t>Click to edit Master title style</a:t>
             </a:r>
-          </a:p>
-        </p:txBody>
-      </p:sp>
-      <p:sp>
-        <p:nvSpPr>
-          <p:cNvPr id="3" name="Date Placeholder 2">
-            <a:extLst>
-              <a:ext uri="{FF2B5EF4-FFF2-40B4-BE49-F238E27FC236}">
-                <a16:creationId xmlns:a16="http://schemas.microsoft.com/office/drawing/2014/main" id="{1F7A43E8-7160-2567-98B7-845A5728369B}"/>
-              </a:ext>
-            </a:extLst>
-          </p:cNvPr>
+            <a:endParaRPr lang="en-US" dirty="0"/>
+          </a:p>
+        </p:txBody>
+      </p:sp>
+      <p:sp>
+        <p:nvSpPr>
+          <p:cNvPr id="3" name="Date Placeholder 2"/>
           <p:cNvSpPr>
             <a:spLocks noGrp="1"/>
           </p:cNvSpPr>
@@ -1951,7 +4490,7 @@
           <a:p>
             <a:fld id="{3001F3D3-B64E-45E5-A774-FFEE7077F3D9}" type="datetimeFigureOut">
               <a:rPr lang="en-US" smtClean="0"/>
-              <a:t>6/10/2026</a:t>
+              <a:t>6/15/2026</a:t>
             </a:fld>
             <a:endParaRPr lang="en-US"/>
           </a:p>
@@ -1959,13 +4498,7 @@
       </p:sp>
       <p:sp>
         <p:nvSpPr>
-          <p:cNvPr id="4" name="Footer Placeholder 3">
-            <a:extLst>
-              <a:ext uri="{FF2B5EF4-FFF2-40B4-BE49-F238E27FC236}">
-                <a16:creationId xmlns:a16="http://schemas.microsoft.com/office/drawing/2014/main" id="{BAE75F9E-095F-5FC2-6074-DFBD3296ACD2}"/>
-              </a:ext>
-            </a:extLst>
-          </p:cNvPr>
+          <p:cNvPr id="4" name="Footer Placeholder 3"/>
           <p:cNvSpPr>
             <a:spLocks noGrp="1"/>
           </p:cNvSpPr>
@@ -1984,13 +4517,7 @@
       </p:sp>
       <p:sp>
         <p:nvSpPr>
-          <p:cNvPr id="5" name="Slide Number Placeholder 4">
-            <a:extLst>
-              <a:ext uri="{FF2B5EF4-FFF2-40B4-BE49-F238E27FC236}">
-                <a16:creationId xmlns:a16="http://schemas.microsoft.com/office/drawing/2014/main" id="{2DFB414F-3619-EF83-A0CF-671AEE5E2BAE}"/>
-              </a:ext>
-            </a:extLst>
-          </p:cNvPr>
+          <p:cNvPr id="5" name="Slide Number Placeholder 4"/>
           <p:cNvSpPr>
             <a:spLocks noGrp="1"/>
           </p:cNvSpPr>
@@ -2014,7 +4541,7 @@
     </p:spTree>
     <p:extLst>
       <p:ext uri="{BB962C8B-B14F-4D97-AF65-F5344CB8AC3E}">
-        <p14:creationId xmlns:p14="http://schemas.microsoft.com/office/powerpoint/2010/main" val="1781456412"/>
+        <p14:creationId xmlns:p14="http://schemas.microsoft.com/office/powerpoint/2010/main" val="2780986284"/>
       </p:ext>
     </p:extLst>
   </p:cSld>
@@ -2043,13 +4570,7 @@
       </p:grpSpPr>
       <p:sp>
         <p:nvSpPr>
-          <p:cNvPr id="2" name="Date Placeholder 1">
-            <a:extLst>
-              <a:ext uri="{FF2B5EF4-FFF2-40B4-BE49-F238E27FC236}">
-                <a16:creationId xmlns:a16="http://schemas.microsoft.com/office/drawing/2014/main" id="{BDAF5C72-6E4C-D8C1-F786-A9F97B1EAF24}"/>
-              </a:ext>
-            </a:extLst>
-          </p:cNvPr>
+          <p:cNvPr id="2" name="Date Placeholder 1"/>
           <p:cNvSpPr>
             <a:spLocks noGrp="1"/>
           </p:cNvSpPr>
@@ -2064,7 +4585,7 @@
           <a:p>
             <a:fld id="{3001F3D3-B64E-45E5-A774-FFEE7077F3D9}" type="datetimeFigureOut">
               <a:rPr lang="en-US" smtClean="0"/>
-              <a:t>6/10/2026</a:t>
+              <a:t>6/15/2026</a:t>
             </a:fld>
             <a:endParaRPr lang="en-US"/>
           </a:p>
@@ -2072,13 +4593,7 @@
       </p:sp>
       <p:sp>
         <p:nvSpPr>
-          <p:cNvPr id="3" name="Footer Placeholder 2">
-            <a:extLst>
-              <a:ext uri="{FF2B5EF4-FFF2-40B4-BE49-F238E27FC236}">
-                <a16:creationId xmlns:a16="http://schemas.microsoft.com/office/drawing/2014/main" id="{1A10A476-FB5B-F40A-63B3-305250FB5B0F}"/>
-              </a:ext>
-            </a:extLst>
-          </p:cNvPr>
+          <p:cNvPr id="3" name="Footer Placeholder 2"/>
           <p:cNvSpPr>
             <a:spLocks noGrp="1"/>
           </p:cNvSpPr>
@@ -2097,13 +4612,7 @@
       </p:sp>
       <p:sp>
         <p:nvSpPr>
-          <p:cNvPr id="4" name="Slide Number Placeholder 3">
-            <a:extLst>
-              <a:ext uri="{FF2B5EF4-FFF2-40B4-BE49-F238E27FC236}">
-                <a16:creationId xmlns:a16="http://schemas.microsoft.com/office/drawing/2014/main" id="{23D67E86-FD0A-9024-3E65-035D0E470FFF}"/>
-              </a:ext>
-            </a:extLst>
-          </p:cNvPr>
+          <p:cNvPr id="4" name="Slide Number Placeholder 3"/>
           <p:cNvSpPr>
             <a:spLocks noGrp="1"/>
           </p:cNvSpPr>
@@ -2127,7 +4636,7 @@
     </p:spTree>
     <p:extLst>
       <p:ext uri="{BB962C8B-B14F-4D97-AF65-F5344CB8AC3E}">
-        <p14:creationId xmlns:p14="http://schemas.microsoft.com/office/powerpoint/2010/main" val="3387328592"/>
+        <p14:creationId xmlns:p14="http://schemas.microsoft.com/office/powerpoint/2010/main" val="2935493839"/>
       </p:ext>
     </p:extLst>
   </p:cSld>
@@ -2156,13 +4665,7 @@
       </p:grpSpPr>
       <p:sp>
         <p:nvSpPr>
-          <p:cNvPr id="2" name="Title 1">
-            <a:extLst>
-              <a:ext uri="{FF2B5EF4-FFF2-40B4-BE49-F238E27FC236}">
-                <a16:creationId xmlns:a16="http://schemas.microsoft.com/office/drawing/2014/main" id="{6912AF57-64AD-ABEF-FED4-A8C9E2A2DDE8}"/>
-              </a:ext>
-            </a:extLst>
-          </p:cNvPr>
+          <p:cNvPr id="2" name="Title 1"/>
           <p:cNvSpPr>
             <a:spLocks noGrp="1"/>
           </p:cNvSpPr>
@@ -2172,14 +4675,14 @@
         </p:nvSpPr>
         <p:spPr>
           <a:xfrm>
-            <a:off x="839788" y="457200"/>
-            <a:ext cx="3932237" cy="1600200"/>
+            <a:off x="685800" y="1524000"/>
+            <a:ext cx="4114800" cy="1600200"/>
           </a:xfrm>
         </p:spPr>
         <p:txBody>
           <a:bodyPr anchor="b"/>
           <a:lstStyle>
-            <a:lvl1pPr>
+            <a:lvl1pPr algn="l">
               <a:defRPr sz="3200"/>
             </a:lvl1pPr>
           </a:lstStyle>
@@ -2188,18 +4691,13 @@
               <a:rPr lang="en-US"/>
               <a:t>Click to edit Master title style</a:t>
             </a:r>
-          </a:p>
-        </p:txBody>
-      </p:sp>
-      <p:sp>
-        <p:nvSpPr>
-          <p:cNvPr id="3" name="Content Placeholder 2">
-            <a:extLst>
-              <a:ext uri="{FF2B5EF4-FFF2-40B4-BE49-F238E27FC236}">
-                <a16:creationId xmlns:a16="http://schemas.microsoft.com/office/drawing/2014/main" id="{04F3C992-BC28-626A-51D1-D43A2E4EFE67}"/>
-              </a:ext>
-            </a:extLst>
-          </p:cNvPr>
+            <a:endParaRPr lang="en-US" dirty="0"/>
+          </a:p>
+        </p:txBody>
+      </p:sp>
+      <p:sp>
+        <p:nvSpPr>
+          <p:cNvPr id="3" name="Content Placeholder 2"/>
           <p:cNvSpPr>
             <a:spLocks noGrp="1"/>
           </p:cNvSpPr>
@@ -2209,41 +4707,13 @@
         </p:nvSpPr>
         <p:spPr>
           <a:xfrm>
-            <a:off x="5183188" y="987425"/>
-            <a:ext cx="6172200" cy="4873625"/>
-          </a:xfrm>
-        </p:spPr>
-        <p:txBody>
-          <a:bodyPr/>
-          <a:lstStyle>
-            <a:lvl1pPr>
-              <a:defRPr sz="3200"/>
-            </a:lvl1pPr>
-            <a:lvl2pPr>
-              <a:defRPr sz="2800"/>
-            </a:lvl2pPr>
-            <a:lvl3pPr>
-              <a:defRPr sz="2400"/>
-            </a:lvl3pPr>
-            <a:lvl4pPr>
-              <a:defRPr sz="2000"/>
-            </a:lvl4pPr>
-            <a:lvl5pPr>
-              <a:defRPr sz="2000"/>
-            </a:lvl5pPr>
-            <a:lvl6pPr>
-              <a:defRPr sz="2000"/>
-            </a:lvl6pPr>
-            <a:lvl7pPr>
-              <a:defRPr sz="2000"/>
-            </a:lvl7pPr>
-            <a:lvl8pPr>
-              <a:defRPr sz="2000"/>
-            </a:lvl8pPr>
-            <a:lvl9pPr>
-              <a:defRPr sz="2000"/>
-            </a:lvl9pPr>
-          </a:lstStyle>
+            <a:off x="4995582" y="746759"/>
+            <a:ext cx="6510618" cy="5471925"/>
+          </a:xfrm>
+        </p:spPr>
+        <p:txBody>
+          <a:bodyPr anchor="ctr"/>
+          <a:lstStyle/>
           <a:p>
             <a:pPr lvl="0"/>
             <a:r>
@@ -2278,18 +4748,13 @@
               <a:rPr lang="en-US"/>
               <a:t>Fifth level</a:t>
             </a:r>
-          </a:p>
-        </p:txBody>
-      </p:sp>
-      <p:sp>
-        <p:nvSpPr>
-          <p:cNvPr id="4" name="Text Placeholder 3">
-            <a:extLst>
-              <a:ext uri="{FF2B5EF4-FFF2-40B4-BE49-F238E27FC236}">
-                <a16:creationId xmlns:a16="http://schemas.microsoft.com/office/drawing/2014/main" id="{D1EDD99B-3484-8446-7DF2-E8923DEE6E02}"/>
-              </a:ext>
-            </a:extLst>
-          </p:cNvPr>
+            <a:endParaRPr lang="en-US" dirty="0"/>
+          </a:p>
+        </p:txBody>
+      </p:sp>
+      <p:sp>
+        <p:nvSpPr>
+          <p:cNvPr id="4" name="Text Placeholder 3"/>
           <p:cNvSpPr>
             <a:spLocks noGrp="1"/>
           </p:cNvSpPr>
@@ -2299,8 +4764,8 @@
         </p:nvSpPr>
         <p:spPr>
           <a:xfrm>
-            <a:off x="839788" y="2057400"/>
-            <a:ext cx="3932237" cy="3811588"/>
+            <a:off x="685800" y="3124199"/>
+            <a:ext cx="4114800" cy="3094485"/>
           </a:xfrm>
         </p:spPr>
         <p:txBody>
@@ -2354,13 +4819,7 @@
       </p:sp>
       <p:sp>
         <p:nvSpPr>
-          <p:cNvPr id="5" name="Date Placeholder 4">
-            <a:extLst>
-              <a:ext uri="{FF2B5EF4-FFF2-40B4-BE49-F238E27FC236}">
-                <a16:creationId xmlns:a16="http://schemas.microsoft.com/office/drawing/2014/main" id="{18445B73-A8A9-47EE-BF77-4EE98B202B78}"/>
-              </a:ext>
-            </a:extLst>
-          </p:cNvPr>
+          <p:cNvPr id="5" name="Date Placeholder 4"/>
           <p:cNvSpPr>
             <a:spLocks noGrp="1"/>
           </p:cNvSpPr>
@@ -2375,7 +4834,7 @@
           <a:p>
             <a:fld id="{3001F3D3-B64E-45E5-A774-FFEE7077F3D9}" type="datetimeFigureOut">
               <a:rPr lang="en-US" smtClean="0"/>
-              <a:t>6/10/2026</a:t>
+              <a:t>6/15/2026</a:t>
             </a:fld>
             <a:endParaRPr lang="en-US"/>
           </a:p>
@@ -2383,13 +4842,7 @@
       </p:sp>
       <p:sp>
         <p:nvSpPr>
-          <p:cNvPr id="6" name="Footer Placeholder 5">
-            <a:extLst>
-              <a:ext uri="{FF2B5EF4-FFF2-40B4-BE49-F238E27FC236}">
-                <a16:creationId xmlns:a16="http://schemas.microsoft.com/office/drawing/2014/main" id="{2C63EF49-0779-27E5-DCD5-280A5EFB8884}"/>
-              </a:ext>
-            </a:extLst>
-          </p:cNvPr>
+          <p:cNvPr id="6" name="Footer Placeholder 5"/>
           <p:cNvSpPr>
             <a:spLocks noGrp="1"/>
           </p:cNvSpPr>
@@ -2408,13 +4861,7 @@
       </p:sp>
       <p:sp>
         <p:nvSpPr>
-          <p:cNvPr id="7" name="Slide Number Placeholder 6">
-            <a:extLst>
-              <a:ext uri="{FF2B5EF4-FFF2-40B4-BE49-F238E27FC236}">
-                <a16:creationId xmlns:a16="http://schemas.microsoft.com/office/drawing/2014/main" id="{AB7D3E5B-0AFD-40F4-AB3F-C79D398B31ED}"/>
-              </a:ext>
-            </a:extLst>
-          </p:cNvPr>
+          <p:cNvPr id="7" name="Slide Number Placeholder 6"/>
           <p:cNvSpPr>
             <a:spLocks noGrp="1"/>
           </p:cNvSpPr>
@@ -2438,7 +4885,7 @@
     </p:spTree>
     <p:extLst>
       <p:ext uri="{BB962C8B-B14F-4D97-AF65-F5344CB8AC3E}">
-        <p14:creationId xmlns:p14="http://schemas.microsoft.com/office/powerpoint/2010/main" val="4006529605"/>
+        <p14:creationId xmlns:p14="http://schemas.microsoft.com/office/powerpoint/2010/main" val="231543349"/>
       </p:ext>
     </p:extLst>
   </p:cSld>
@@ -2467,13 +4914,7 @@
       </p:grpSpPr>
       <p:sp>
         <p:nvSpPr>
-          <p:cNvPr id="2" name="Title 1">
-            <a:extLst>
-              <a:ext uri="{FF2B5EF4-FFF2-40B4-BE49-F238E27FC236}">
-                <a16:creationId xmlns:a16="http://schemas.microsoft.com/office/drawing/2014/main" id="{BAC817B5-B77E-FB7D-BB8D-21045C01D1C2}"/>
-              </a:ext>
-            </a:extLst>
-          </p:cNvPr>
+          <p:cNvPr id="2" name="Title 1"/>
           <p:cNvSpPr>
             <a:spLocks noGrp="1"/>
           </p:cNvSpPr>
@@ -2483,14 +4924,14 @@
         </p:nvSpPr>
         <p:spPr>
           <a:xfrm>
-            <a:off x="839788" y="457200"/>
-            <a:ext cx="3932237" cy="1600200"/>
+            <a:off x="685800" y="1524000"/>
+            <a:ext cx="6873240" cy="1600200"/>
           </a:xfrm>
         </p:spPr>
         <p:txBody>
           <a:bodyPr anchor="b"/>
           <a:lstStyle>
-            <a:lvl1pPr>
+            <a:lvl1pPr algn="l">
               <a:defRPr sz="3200"/>
             </a:lvl1pPr>
           </a:lstStyle>
@@ -2499,20 +4940,15 @@
               <a:rPr lang="en-US"/>
               <a:t>Click to edit Master title style</a:t>
             </a:r>
-          </a:p>
-        </p:txBody>
-      </p:sp>
-      <p:sp>
-        <p:nvSpPr>
-          <p:cNvPr id="3" name="Picture Placeholder 2">
-            <a:extLst>
-              <a:ext uri="{FF2B5EF4-FFF2-40B4-BE49-F238E27FC236}">
-                <a16:creationId xmlns:a16="http://schemas.microsoft.com/office/drawing/2014/main" id="{5D6726F6-B675-2409-2AE8-F5647B1713E0}"/>
-              </a:ext>
-            </a:extLst>
-          </p:cNvPr>
-          <p:cNvSpPr>
-            <a:spLocks noGrp="1"/>
+            <a:endParaRPr lang="en-US" dirty="0"/>
+          </a:p>
+        </p:txBody>
+      </p:sp>
+      <p:sp>
+        <p:nvSpPr>
+          <p:cNvPr id="3" name="Picture Placeholder 2"/>
+          <p:cNvSpPr>
+            <a:spLocks noGrp="1" noChangeAspect="1"/>
           </p:cNvSpPr>
           <p:nvPr>
             <p:ph type="pic" idx="1"/>
@@ -2520,8 +4956,73 @@
         </p:nvSpPr>
         <p:spPr>
           <a:xfrm>
-            <a:off x="5183188" y="987425"/>
-            <a:ext cx="6172200" cy="4873625"/>
+            <a:off x="7861238" y="751241"/>
+            <a:ext cx="3644962" cy="5467443"/>
+          </a:xfrm>
+        </p:spPr>
+        <p:txBody>
+          <a:bodyPr anchor="t"/>
+          <a:lstStyle>
+            <a:lvl1pPr marL="0" indent="0">
+              <a:buNone/>
+              <a:defRPr sz="3200"/>
+            </a:lvl1pPr>
+            <a:lvl2pPr marL="457200" indent="0">
+              <a:buNone/>
+              <a:defRPr sz="2800"/>
+            </a:lvl2pPr>
+            <a:lvl3pPr marL="914400" indent="0">
+              <a:buNone/>
+              <a:defRPr sz="2400"/>
+            </a:lvl3pPr>
+            <a:lvl4pPr marL="1371600" indent="0">
+              <a:buNone/>
+              <a:defRPr sz="2000"/>
+            </a:lvl4pPr>
+            <a:lvl5pPr marL="1828800" indent="0">
+              <a:buNone/>
+              <a:defRPr sz="2000"/>
+            </a:lvl5pPr>
+            <a:lvl6pPr marL="2286000" indent="0">
+              <a:buNone/>
+              <a:defRPr sz="2000"/>
+            </a:lvl6pPr>
+            <a:lvl7pPr marL="2743200" indent="0">
+              <a:buNone/>
+              <a:defRPr sz="2000"/>
+            </a:lvl7pPr>
+            <a:lvl8pPr marL="3200400" indent="0">
+              <a:buNone/>
+              <a:defRPr sz="2000"/>
+            </a:lvl8pPr>
+            <a:lvl9pPr marL="3657600" indent="0">
+              <a:buNone/>
+              <a:defRPr sz="2000"/>
+            </a:lvl9pPr>
+          </a:lstStyle>
+          <a:p>
+            <a:r>
+              <a:rPr lang="en-US"/>
+              <a:t>Click icon to add picture</a:t>
+            </a:r>
+            <a:endParaRPr lang="en-US" dirty="0"/>
+          </a:p>
+        </p:txBody>
+      </p:sp>
+      <p:sp>
+        <p:nvSpPr>
+          <p:cNvPr id="4" name="Text Placeholder 3"/>
+          <p:cNvSpPr>
+            <a:spLocks noGrp="1"/>
+          </p:cNvSpPr>
+          <p:nvPr>
+            <p:ph type="body" sz="half" idx="2"/>
+          </p:nvPr>
+        </p:nvSpPr>
+        <p:spPr>
+          <a:xfrm>
+            <a:off x="685800" y="3124199"/>
+            <a:ext cx="6873240" cy="3094485"/>
           </a:xfrm>
         </p:spPr>
         <p:txBody>
@@ -2529,73 +5030,6 @@
           <a:lstStyle>
             <a:lvl1pPr marL="0" indent="0">
               <a:buNone/>
-              <a:defRPr sz="3200"/>
-            </a:lvl1pPr>
-            <a:lvl2pPr marL="457200" indent="0">
-              <a:buNone/>
-              <a:defRPr sz="2800"/>
-            </a:lvl2pPr>
-            <a:lvl3pPr marL="914400" indent="0">
-              <a:buNone/>
-              <a:defRPr sz="2400"/>
-            </a:lvl3pPr>
-            <a:lvl4pPr marL="1371600" indent="0">
-              <a:buNone/>
-              <a:defRPr sz="2000"/>
-            </a:lvl4pPr>
-            <a:lvl5pPr marL="1828800" indent="0">
-              <a:buNone/>
-              <a:defRPr sz="2000"/>
-            </a:lvl5pPr>
-            <a:lvl6pPr marL="2286000" indent="0">
-              <a:buNone/>
-              <a:defRPr sz="2000"/>
-            </a:lvl6pPr>
-            <a:lvl7pPr marL="2743200" indent="0">
-              <a:buNone/>
-              <a:defRPr sz="2000"/>
-            </a:lvl7pPr>
-            <a:lvl8pPr marL="3200400" indent="0">
-              <a:buNone/>
-              <a:defRPr sz="2000"/>
-            </a:lvl8pPr>
-            <a:lvl9pPr marL="3657600" indent="0">
-              <a:buNone/>
-              <a:defRPr sz="2000"/>
-            </a:lvl9pPr>
-          </a:lstStyle>
-          <a:p>
-            <a:endParaRPr lang="en-US"/>
-          </a:p>
-        </p:txBody>
-      </p:sp>
-      <p:sp>
-        <p:nvSpPr>
-          <p:cNvPr id="4" name="Text Placeholder 3">
-            <a:extLst>
-              <a:ext uri="{FF2B5EF4-FFF2-40B4-BE49-F238E27FC236}">
-                <a16:creationId xmlns:a16="http://schemas.microsoft.com/office/drawing/2014/main" id="{4EB9F671-CEA6-CF58-6BCF-462517DC6290}"/>
-              </a:ext>
-            </a:extLst>
-          </p:cNvPr>
-          <p:cNvSpPr>
-            <a:spLocks noGrp="1"/>
-          </p:cNvSpPr>
-          <p:nvPr>
-            <p:ph type="body" sz="half" idx="2"/>
-          </p:nvPr>
-        </p:nvSpPr>
-        <p:spPr>
-          <a:xfrm>
-            <a:off x="839788" y="2057400"/>
-            <a:ext cx="3932237" cy="3811588"/>
-          </a:xfrm>
-        </p:spPr>
-        <p:txBody>
-          <a:bodyPr/>
-          <a:lstStyle>
-            <a:lvl1pPr marL="0" indent="0">
-              <a:buNone/>
               <a:defRPr sz="1600"/>
             </a:lvl1pPr>
             <a:lvl2pPr marL="457200" indent="0">
@@ -2642,13 +5076,7 @@
       </p:sp>
       <p:sp>
         <p:nvSpPr>
-          <p:cNvPr id="5" name="Date Placeholder 4">
-            <a:extLst>
-              <a:ext uri="{FF2B5EF4-FFF2-40B4-BE49-F238E27FC236}">
-                <a16:creationId xmlns:a16="http://schemas.microsoft.com/office/drawing/2014/main" id="{DD3D9906-D636-4EF1-34E6-E1583C27F979}"/>
-              </a:ext>
-            </a:extLst>
-          </p:cNvPr>
+          <p:cNvPr id="5" name="Date Placeholder 4"/>
           <p:cNvSpPr>
             <a:spLocks noGrp="1"/>
           </p:cNvSpPr>
@@ -2663,7 +5091,7 @@
           <a:p>
             <a:fld id="{3001F3D3-B64E-45E5-A774-FFEE7077F3D9}" type="datetimeFigureOut">
               <a:rPr lang="en-US" smtClean="0"/>
-              <a:t>6/10/2026</a:t>
+              <a:t>6/15/2026</a:t>
             </a:fld>
             <a:endParaRPr lang="en-US"/>
           </a:p>
@@ -2671,13 +5099,7 @@
       </p:sp>
       <p:sp>
         <p:nvSpPr>
-          <p:cNvPr id="6" name="Footer Placeholder 5">
-            <a:extLst>
-              <a:ext uri="{FF2B5EF4-FFF2-40B4-BE49-F238E27FC236}">
-                <a16:creationId xmlns:a16="http://schemas.microsoft.com/office/drawing/2014/main" id="{DD059FD9-5946-EF28-D9BD-FC25EE45D0B7}"/>
-              </a:ext>
-            </a:extLst>
-          </p:cNvPr>
+          <p:cNvPr id="6" name="Footer Placeholder 5"/>
           <p:cNvSpPr>
             <a:spLocks noGrp="1"/>
           </p:cNvSpPr>
@@ -2696,13 +5118,7 @@
       </p:sp>
       <p:sp>
         <p:nvSpPr>
-          <p:cNvPr id="7" name="Slide Number Placeholder 6">
-            <a:extLst>
-              <a:ext uri="{FF2B5EF4-FFF2-40B4-BE49-F238E27FC236}">
-                <a16:creationId xmlns:a16="http://schemas.microsoft.com/office/drawing/2014/main" id="{9A825168-FBF0-A198-E152-8694B9763B09}"/>
-              </a:ext>
-            </a:extLst>
-          </p:cNvPr>
+          <p:cNvPr id="7" name="Slide Number Placeholder 6"/>
           <p:cNvSpPr>
             <a:spLocks noGrp="1"/>
           </p:cNvSpPr>
@@ -2726,7 +5142,7 @@
     </p:spTree>
     <p:extLst>
       <p:ext uri="{BB962C8B-B14F-4D97-AF65-F5344CB8AC3E}">
-        <p14:creationId xmlns:p14="http://schemas.microsoft.com/office/powerpoint/2010/main" val="4202205393"/>
+        <p14:creationId xmlns:p14="http://schemas.microsoft.com/office/powerpoint/2010/main" val="4061933104"/>
       </p:ext>
     </p:extLst>
   </p:cSld>
@@ -2758,15 +5174,39 @@
           <a:chExt cx="0" cy="0"/>
         </a:xfrm>
       </p:grpSpPr>
-      <p:sp>
-        <p:nvSpPr>
-          <p:cNvPr id="2" name="Title Placeholder 1">
+      <p:pic>
+        <p:nvPicPr>
+          <p:cNvPr id="7" name="Picture 6" descr="C0-HD-TOP.png"/>
+          <p:cNvPicPr>
+            <a:picLocks noChangeAspect="1"/>
+          </p:cNvPicPr>
+          <p:nvPr/>
+        </p:nvPicPr>
+        <p:blipFill>
+          <a:blip r:embed="rId19">
             <a:extLst>
-              <a:ext uri="{FF2B5EF4-FFF2-40B4-BE49-F238E27FC236}">
-                <a16:creationId xmlns:a16="http://schemas.microsoft.com/office/drawing/2014/main" id="{76B5D3FB-84A9-58C4-B498-91FD035C7699}"/>
+              <a:ext uri="{28A0092B-C50C-407E-A947-70E740481C1C}">
+                <a14:useLocalDpi xmlns:a14="http://schemas.microsoft.com/office/drawing/2010/main" val="0"/>
               </a:ext>
             </a:extLst>
-          </p:cNvPr>
+          </a:blip>
+          <a:stretch>
+            <a:fillRect/>
+          </a:stretch>
+        </p:blipFill>
+        <p:spPr>
+          <a:xfrm>
+            <a:off x="0" y="0"/>
+            <a:ext cx="12192000" cy="1441450"/>
+          </a:xfrm>
+          <a:prstGeom prst="rect">
+            <a:avLst/>
+          </a:prstGeom>
+        </p:spPr>
+      </p:pic>
+      <p:sp>
+        <p:nvSpPr>
+          <p:cNvPr id="2" name="Title Placeholder 1"/>
           <p:cNvSpPr>
             <a:spLocks noGrp="1"/>
           </p:cNvSpPr>
@@ -2776,8 +5216,8 @@
         </p:nvSpPr>
         <p:spPr>
           <a:xfrm>
-            <a:off x="838200" y="365125"/>
-            <a:ext cx="10515600" cy="1325563"/>
+            <a:off x="2895600" y="764373"/>
+            <a:ext cx="8610600" cy="1293028"/>
           </a:xfrm>
           <a:prstGeom prst="rect">
             <a:avLst/>
@@ -2793,18 +5233,13 @@
               <a:rPr lang="en-US"/>
               <a:t>Click to edit Master title style</a:t>
             </a:r>
-          </a:p>
-        </p:txBody>
-      </p:sp>
-      <p:sp>
-        <p:nvSpPr>
-          <p:cNvPr id="3" name="Text Placeholder 2">
-            <a:extLst>
-              <a:ext uri="{FF2B5EF4-FFF2-40B4-BE49-F238E27FC236}">
-                <a16:creationId xmlns:a16="http://schemas.microsoft.com/office/drawing/2014/main" id="{4AA95B51-FB64-B4C5-F666-A7B51D741C89}"/>
-              </a:ext>
-            </a:extLst>
-          </p:cNvPr>
+            <a:endParaRPr lang="en-US" dirty="0"/>
+          </a:p>
+        </p:txBody>
+      </p:sp>
+      <p:sp>
+        <p:nvSpPr>
+          <p:cNvPr id="3" name="Text Placeholder 2"/>
           <p:cNvSpPr>
             <a:spLocks noGrp="1"/>
           </p:cNvSpPr>
@@ -2814,8 +5249,8 @@
         </p:nvSpPr>
         <p:spPr>
           <a:xfrm>
-            <a:off x="838200" y="1825625"/>
-            <a:ext cx="10515600" cy="4351338"/>
+            <a:off x="685800" y="2194560"/>
+            <a:ext cx="10820400" cy="4024125"/>
           </a:xfrm>
           <a:prstGeom prst="rect">
             <a:avLst/>
@@ -2860,18 +5295,13 @@
               <a:rPr lang="en-US"/>
               <a:t>Fifth level</a:t>
             </a:r>
-          </a:p>
-        </p:txBody>
-      </p:sp>
-      <p:sp>
-        <p:nvSpPr>
-          <p:cNvPr id="4" name="Date Placeholder 3">
-            <a:extLst>
-              <a:ext uri="{FF2B5EF4-FFF2-40B4-BE49-F238E27FC236}">
-                <a16:creationId xmlns:a16="http://schemas.microsoft.com/office/drawing/2014/main" id="{14B72ADC-CA14-950D-CCAF-11F2365E8F07}"/>
-              </a:ext>
-            </a:extLst>
-          </p:cNvPr>
+            <a:endParaRPr lang="en-US" dirty="0"/>
+          </a:p>
+        </p:txBody>
+      </p:sp>
+      <p:sp>
+        <p:nvSpPr>
+          <p:cNvPr id="4" name="Date Placeholder 3"/>
           <p:cNvSpPr>
             <a:spLocks noGrp="1"/>
           </p:cNvSpPr>
@@ -2881,8 +5311,8 @@
         </p:nvSpPr>
         <p:spPr>
           <a:xfrm>
-            <a:off x="838200" y="6356350"/>
-            <a:ext cx="2743200" cy="365125"/>
+            <a:off x="8595360" y="6356350"/>
+            <a:ext cx="2910840" cy="365125"/>
           </a:xfrm>
           <a:prstGeom prst="rect">
             <a:avLst/>
@@ -2891,11 +5321,11 @@
         <p:txBody>
           <a:bodyPr vert="horz" lIns="91440" tIns="45720" rIns="91440" bIns="45720" rtlCol="0" anchor="ctr"/>
           <a:lstStyle>
-            <a:lvl1pPr algn="l">
-              <a:defRPr sz="1200">
+            <a:lvl1pPr algn="r">
+              <a:defRPr sz="1050">
                 <a:solidFill>
                   <a:schemeClr val="tx1">
-                    <a:tint val="82000"/>
+                    <a:tint val="75000"/>
                   </a:schemeClr>
                 </a:solidFill>
               </a:defRPr>
@@ -2904,7 +5334,7 @@
           <a:p>
             <a:fld id="{3001F3D3-B64E-45E5-A774-FFEE7077F3D9}" type="datetimeFigureOut">
               <a:rPr lang="en-US" smtClean="0"/>
-              <a:t>6/10/2026</a:t>
+              <a:t>6/15/2026</a:t>
             </a:fld>
             <a:endParaRPr lang="en-US"/>
           </a:p>
@@ -2912,13 +5342,7 @@
       </p:sp>
       <p:sp>
         <p:nvSpPr>
-          <p:cNvPr id="5" name="Footer Placeholder 4">
-            <a:extLst>
-              <a:ext uri="{FF2B5EF4-FFF2-40B4-BE49-F238E27FC236}">
-                <a16:creationId xmlns:a16="http://schemas.microsoft.com/office/drawing/2014/main" id="{173E122D-0169-D3F9-E7F5-144BD8447AA0}"/>
-              </a:ext>
-            </a:extLst>
-          </p:cNvPr>
+          <p:cNvPr id="5" name="Footer Placeholder 4"/>
           <p:cNvSpPr>
             <a:spLocks noGrp="1"/>
           </p:cNvSpPr>
@@ -2928,8 +5352,8 @@
         </p:nvSpPr>
         <p:spPr>
           <a:xfrm>
-            <a:off x="4038600" y="6356350"/>
-            <a:ext cx="4114800" cy="365125"/>
+            <a:off x="685800" y="6355845"/>
+            <a:ext cx="7772400" cy="365125"/>
           </a:xfrm>
           <a:prstGeom prst="rect">
             <a:avLst/>
@@ -2938,11 +5362,11 @@
         <p:txBody>
           <a:bodyPr vert="horz" lIns="91440" tIns="45720" rIns="91440" bIns="45720" rtlCol="0" anchor="ctr"/>
           <a:lstStyle>
-            <a:lvl1pPr algn="ctr">
-              <a:defRPr sz="1200">
+            <a:lvl1pPr algn="l">
+              <a:defRPr sz="1050">
                 <a:solidFill>
                   <a:schemeClr val="tx1">
-                    <a:tint val="82000"/>
+                    <a:tint val="75000"/>
                   </a:schemeClr>
                 </a:solidFill>
               </a:defRPr>
@@ -2955,13 +5379,7 @@
       </p:sp>
       <p:sp>
         <p:nvSpPr>
-          <p:cNvPr id="6" name="Slide Number Placeholder 5">
-            <a:extLst>
-              <a:ext uri="{FF2B5EF4-FFF2-40B4-BE49-F238E27FC236}">
-                <a16:creationId xmlns:a16="http://schemas.microsoft.com/office/drawing/2014/main" id="{6AF8AAE8-C84B-FB60-89ED-07309DC02768}"/>
-              </a:ext>
-            </a:extLst>
-          </p:cNvPr>
+          <p:cNvPr id="6" name="Slide Number Placeholder 5"/>
           <p:cNvSpPr>
             <a:spLocks noGrp="1"/>
           </p:cNvSpPr>
@@ -2971,7 +5389,7 @@
         </p:nvSpPr>
         <p:spPr>
           <a:xfrm>
-            <a:off x="8610600" y="6356350"/>
+            <a:off x="8763000" y="381000"/>
             <a:ext cx="2743200" cy="365125"/>
           </a:xfrm>
           <a:prstGeom prst="rect">
@@ -2982,10 +5400,10 @@
           <a:bodyPr vert="horz" lIns="91440" tIns="45720" rIns="91440" bIns="45720" rtlCol="0" anchor="ctr"/>
           <a:lstStyle>
             <a:lvl1pPr algn="r">
-              <a:defRPr sz="1200">
+              <a:defRPr sz="1050">
                 <a:solidFill>
                   <a:schemeClr val="tx1">
-                    <a:tint val="82000"/>
+                    <a:tint val="75000"/>
                   </a:schemeClr>
                 </a:solidFill>
               </a:defRPr>
@@ -3003,27 +5421,33 @@
     </p:spTree>
     <p:extLst>
       <p:ext uri="{BB962C8B-B14F-4D97-AF65-F5344CB8AC3E}">
-        <p14:creationId xmlns:p14="http://schemas.microsoft.com/office/powerpoint/2010/main" val="3180042323"/>
+        <p14:creationId xmlns:p14="http://schemas.microsoft.com/office/powerpoint/2010/main" val="3250082275"/>
       </p:ext>
     </p:extLst>
   </p:cSld>
-  <p:clrMap bg1="lt1" tx1="dk1" bg2="lt2" tx2="dk2" accent1="accent1" accent2="accent2" accent3="accent3" accent4="accent4" accent5="accent5" accent6="accent6" hlink="hlink" folHlink="folHlink"/>
+  <p:clrMap bg1="dk1" tx1="lt1" bg2="dk2" tx2="lt2" accent1="accent1" accent2="accent2" accent3="accent3" accent4="accent4" accent5="accent5" accent6="accent6" hlink="hlink" folHlink="folHlink"/>
   <p:sldLayoutIdLst>
-    <p:sldLayoutId id="2147483649" r:id="rId1"/>
-    <p:sldLayoutId id="2147483650" r:id="rId2"/>
-    <p:sldLayoutId id="2147483651" r:id="rId3"/>
-    <p:sldLayoutId id="2147483652" r:id="rId4"/>
-    <p:sldLayoutId id="2147483653" r:id="rId5"/>
-    <p:sldLayoutId id="2147483654" r:id="rId6"/>
-    <p:sldLayoutId id="2147483655" r:id="rId7"/>
-    <p:sldLayoutId id="2147483656" r:id="rId8"/>
-    <p:sldLayoutId id="2147483657" r:id="rId9"/>
-    <p:sldLayoutId id="2147483658" r:id="rId10"/>
-    <p:sldLayoutId id="2147483659" r:id="rId11"/>
+    <p:sldLayoutId id="2147483661" r:id="rId1"/>
+    <p:sldLayoutId id="2147483662" r:id="rId2"/>
+    <p:sldLayoutId id="2147483663" r:id="rId3"/>
+    <p:sldLayoutId id="2147483664" r:id="rId4"/>
+    <p:sldLayoutId id="2147483665" r:id="rId5"/>
+    <p:sldLayoutId id="2147483666" r:id="rId6"/>
+    <p:sldLayoutId id="2147483667" r:id="rId7"/>
+    <p:sldLayoutId id="2147483668" r:id="rId8"/>
+    <p:sldLayoutId id="2147483669" r:id="rId9"/>
+    <p:sldLayoutId id="2147483670" r:id="rId10"/>
+    <p:sldLayoutId id="2147483671" r:id="rId11"/>
+    <p:sldLayoutId id="2147483672" r:id="rId12"/>
+    <p:sldLayoutId id="2147483673" r:id="rId13"/>
+    <p:sldLayoutId id="2147483674" r:id="rId14"/>
+    <p:sldLayoutId id="2147483675" r:id="rId15"/>
+    <p:sldLayoutId id="2147483676" r:id="rId16"/>
+    <p:sldLayoutId id="2147483677" r:id="rId17"/>
   </p:sldLayoutIdLst>
   <p:txStyles>
     <p:titleStyle>
-      <a:lvl1pPr algn="l" defTabSz="914400" rtl="0" eaLnBrk="1" latinLnBrk="0" hangingPunct="1">
+      <a:lvl1pPr algn="r" defTabSz="914400" rtl="0" eaLnBrk="1" latinLnBrk="0" hangingPunct="1">
         <a:lnSpc>
           <a:spcPct val="90000"/>
         </a:lnSpc>
@@ -3031,7 +5455,7 @@
           <a:spcPct val="0"/>
         </a:spcBef>
         <a:buNone/>
-        <a:defRPr sz="4400" kern="1200">
+        <a:defRPr sz="4000" kern="1200" cap="all" baseline="0">
           <a:solidFill>
             <a:schemeClr val="tx1"/>
           </a:solidFill>
@@ -3051,7 +5475,7 @@
         </a:spcBef>
         <a:buFont typeface="Arial" panose="020B0604020202020204" pitchFamily="34" charset="0"/>
         <a:buChar char="•"/>
-        <a:defRPr sz="2800" kern="1200">
+        <a:defRPr sz="2200" kern="1200">
           <a:solidFill>
             <a:schemeClr val="tx1"/>
           </a:solidFill>
@@ -3069,7 +5493,7 @@
         </a:spcBef>
         <a:buFont typeface="Arial" panose="020B0604020202020204" pitchFamily="34" charset="0"/>
         <a:buChar char="•"/>
-        <a:defRPr sz="2400" kern="1200">
+        <a:defRPr sz="2000" kern="1200">
           <a:solidFill>
             <a:schemeClr val="tx1"/>
           </a:solidFill>
@@ -3087,7 +5511,7 @@
         </a:spcBef>
         <a:buFont typeface="Arial" panose="020B0604020202020204" pitchFamily="34" charset="0"/>
         <a:buChar char="•"/>
-        <a:defRPr sz="2000" kern="1200">
+        <a:defRPr sz="1800" kern="1200">
           <a:solidFill>
             <a:schemeClr val="tx1"/>
           </a:solidFill>
@@ -3105,7 +5529,7 @@
         </a:spcBef>
         <a:buFont typeface="Arial" panose="020B0604020202020204" pitchFamily="34" charset="0"/>
         <a:buChar char="•"/>
-        <a:defRPr sz="1800" kern="1200">
+        <a:defRPr sz="1600" kern="1200">
           <a:solidFill>
             <a:schemeClr val="tx1"/>
           </a:solidFill>
@@ -3123,7 +5547,7 @@
         </a:spcBef>
         <a:buFont typeface="Arial" panose="020B0604020202020204" pitchFamily="34" charset="0"/>
         <a:buChar char="•"/>
-        <a:defRPr sz="1800" kern="1200">
+        <a:defRPr sz="1600" kern="1200">
           <a:solidFill>
             <a:schemeClr val="tx1"/>
           </a:solidFill>
@@ -3141,7 +5565,7 @@
         </a:spcBef>
         <a:buFont typeface="Arial" panose="020B0604020202020204" pitchFamily="34" charset="0"/>
         <a:buChar char="•"/>
-        <a:defRPr sz="1800" kern="1200">
+        <a:defRPr sz="1600" kern="1200">
           <a:solidFill>
             <a:schemeClr val="tx1"/>
           </a:solidFill>
@@ -3159,7 +5583,7 @@
         </a:spcBef>
         <a:buFont typeface="Arial" panose="020B0604020202020204" pitchFamily="34" charset="0"/>
         <a:buChar char="•"/>
-        <a:defRPr sz="1800" kern="1200">
+        <a:defRPr sz="1600" kern="1200">
           <a:solidFill>
             <a:schemeClr val="tx1"/>
           </a:solidFill>
@@ -3177,7 +5601,7 @@
         </a:spcBef>
         <a:buFont typeface="Arial" panose="020B0604020202020204" pitchFamily="34" charset="0"/>
         <a:buChar char="•"/>
-        <a:defRPr sz="1800" kern="1200">
+        <a:defRPr sz="1600" kern="1200">
           <a:solidFill>
             <a:schemeClr val="tx1"/>
           </a:solidFill>
@@ -3195,7 +5619,7 @@
         </a:spcBef>
         <a:buFont typeface="Arial" panose="020B0604020202020204" pitchFamily="34" charset="0"/>
         <a:buChar char="•"/>
-        <a:defRPr sz="1800" kern="1200">
+        <a:defRPr sz="1600" kern="1200">
           <a:solidFill>
             <a:schemeClr val="tx1"/>
           </a:solidFill>
@@ -3394,7 +5818,7 @@
         </p:spPr>
         <p:txBody>
           <a:bodyPr vert="horz" lIns="91440" tIns="45720" rIns="91440" bIns="45720" rtlCol="0">
-            <a:normAutofit/>
+            <a:normAutofit fontScale="92500"/>
           </a:bodyPr>
           <a:lstStyle>
             <a:lvl1pPr marL="0" indent="0" algn="ctr" defTabSz="914400" rtl="0" eaLnBrk="1" latinLnBrk="0" hangingPunct="1">
@@ -3593,7 +6017,7 @@
         </p:spPr>
         <p:txBody>
           <a:bodyPr vert="horz" lIns="91440" tIns="45720" rIns="91440" bIns="45720" rtlCol="0">
-            <a:normAutofit/>
+            <a:normAutofit fontScale="92500"/>
           </a:bodyPr>
           <a:lstStyle>
             <a:lvl1pPr marL="0" indent="0" algn="ctr" defTabSz="914400" rtl="0" eaLnBrk="1" latinLnBrk="0" hangingPunct="1">
@@ -4175,13 +6599,13 @@
   <p:clrMapOvr>
     <a:masterClrMapping/>
   </p:clrMapOvr>
-  <mc:AlternateContent xmlns:mc="http://schemas.openxmlformats.org/markup-compatibility/2006">
-    <mc:Choice xmlns:p15="http://schemas.microsoft.com/office/powerpoint/2012/main" Requires="p15">
+  <mc:AlternateContent xmlns:mc="http://schemas.openxmlformats.org/markup-compatibility/2006" xmlns:p15="http://schemas.microsoft.com/office/powerpoint/2012/main">
+    <mc:Choice Requires="p15">
       <p:transition xmlns:p14="http://schemas.microsoft.com/office/powerpoint/2010/main" spd="slow" p14:dur="6000">
         <p15:prstTrans prst="curtains"/>
       </p:transition>
     </mc:Choice>
-    <mc:Fallback>
+    <mc:Fallback xmlns="">
       <p:transition spd="slow">
         <p:fade/>
       </p:transition>
@@ -4537,9 +6961,9 @@
 </file>
 
 <file path=ppt/theme/theme1.xml><?xml version="1.0" encoding="utf-8"?>
-<a:theme xmlns:a="http://schemas.openxmlformats.org/drawingml/2006/main" name="Office Theme">
+<a:theme xmlns:a="http://schemas.openxmlformats.org/drawingml/2006/main" name="Vapor Trail">
   <a:themeElements>
-    <a:clrScheme name="Office">
+    <a:clrScheme name="Vapor Trail">
       <a:dk1>
         <a:sysClr val="windowText" lastClr="000000"/>
       </a:dk1>
@@ -4547,44 +6971,44 @@
         <a:sysClr val="window" lastClr="FFFFFF"/>
       </a:lt1>
       <a:dk2>
-        <a:srgbClr val="0E2841"/>
+        <a:srgbClr val="454545"/>
       </a:dk2>
       <a:lt2>
-        <a:srgbClr val="E8E8E8"/>
+        <a:srgbClr val="DADADA"/>
       </a:lt2>
       <a:accent1>
-        <a:srgbClr val="156082"/>
+        <a:srgbClr val="DF2E28"/>
       </a:accent1>
       <a:accent2>
-        <a:srgbClr val="E97132"/>
+        <a:srgbClr val="FE801A"/>
       </a:accent2>
       <a:accent3>
-        <a:srgbClr val="196B24"/>
+        <a:srgbClr val="E9BF35"/>
       </a:accent3>
       <a:accent4>
-        <a:srgbClr val="0F9ED5"/>
+        <a:srgbClr val="81BB42"/>
       </a:accent4>
       <a:accent5>
-        <a:srgbClr val="A02B93"/>
+        <a:srgbClr val="32C7A9"/>
       </a:accent5>
       <a:accent6>
-        <a:srgbClr val="4EA72E"/>
+        <a:srgbClr val="4A9BDC"/>
       </a:accent6>
       <a:hlink>
-        <a:srgbClr val="467886"/>
+        <a:srgbClr val="F0532B"/>
       </a:hlink>
       <a:folHlink>
-        <a:srgbClr val="96607D"/>
+        <a:srgbClr val="F38B53"/>
       </a:folHlink>
     </a:clrScheme>
-    <a:fontScheme name="Office">
+    <a:fontScheme name="Vapor Trail">
       <a:majorFont>
-        <a:latin typeface="Aptos Display" panose="02110004020202020204"/>
+        <a:latin typeface="Century Gothic" panose="020B0502020202020204"/>
         <a:ea typeface=""/>
         <a:cs typeface=""/>
-        <a:font script="Jpan" typeface="游ゴシック Light"/>
+        <a:font script="Jpan" typeface="ＭＳ Ｐゴシック"/>
         <a:font script="Hang" typeface="맑은 고딕"/>
-        <a:font script="Hans" typeface="等线 Light"/>
+        <a:font script="Hans" typeface="宋体"/>
         <a:font script="Hant" typeface="新細明體"/>
         <a:font script="Arab" typeface="Times New Roman"/>
         <a:font script="Hebr" typeface="Times New Roman"/>
@@ -4612,31 +7036,14 @@
         <a:font script="Viet" typeface="Times New Roman"/>
         <a:font script="Uigh" typeface="Microsoft Uighur"/>
         <a:font script="Geor" typeface="Sylfaen"/>
-        <a:font script="Armn" typeface="Arial"/>
-        <a:font script="Bugi" typeface="Leelawadee UI"/>
-        <a:font script="Bopo" typeface="Microsoft JhengHei"/>
-        <a:font script="Java" typeface="Javanese Text"/>
-        <a:font script="Lisu" typeface="Segoe UI"/>
-        <a:font script="Mymr" typeface="Myanmar Text"/>
-        <a:font script="Nkoo" typeface="Ebrima"/>
-        <a:font script="Olck" typeface="Nirmala UI"/>
-        <a:font script="Osma" typeface="Ebrima"/>
-        <a:font script="Phag" typeface="Phagspa"/>
-        <a:font script="Syrn" typeface="Estrangelo Edessa"/>
-        <a:font script="Syrj" typeface="Estrangelo Edessa"/>
-        <a:font script="Syre" typeface="Estrangelo Edessa"/>
-        <a:font script="Sora" typeface="Nirmala UI"/>
-        <a:font script="Tale" typeface="Microsoft Tai Le"/>
-        <a:font script="Talu" typeface="Microsoft New Tai Lue"/>
-        <a:font script="Tfng" typeface="Ebrima"/>
       </a:majorFont>
       <a:minorFont>
-        <a:latin typeface="Aptos" panose="02110004020202020204"/>
+        <a:latin typeface="Century Gothic" panose="020B0502020202020204"/>
         <a:ea typeface=""/>
         <a:cs typeface=""/>
-        <a:font script="Jpan" typeface="游ゴシック"/>
+        <a:font script="Jpan" typeface="ＭＳ Ｐゴシック"/>
         <a:font script="Hang" typeface="맑은 고딕"/>
-        <a:font script="Hans" typeface="等线"/>
+        <a:font script="Hans" typeface="宋体"/>
         <a:font script="Hant" typeface="新細明體"/>
         <a:font script="Arab" typeface="Arial"/>
         <a:font script="Hebr" typeface="Arial"/>
@@ -4664,26 +7071,9 @@
         <a:font script="Viet" typeface="Arial"/>
         <a:font script="Uigh" typeface="Microsoft Uighur"/>
         <a:font script="Geor" typeface="Sylfaen"/>
-        <a:font script="Armn" typeface="Arial"/>
-        <a:font script="Bugi" typeface="Leelawadee UI"/>
-        <a:font script="Bopo" typeface="Microsoft JhengHei"/>
-        <a:font script="Java" typeface="Javanese Text"/>
-        <a:font script="Lisu" typeface="Segoe UI"/>
-        <a:font script="Mymr" typeface="Myanmar Text"/>
-        <a:font script="Nkoo" typeface="Ebrima"/>
-        <a:font script="Olck" typeface="Nirmala UI"/>
-        <a:font script="Osma" typeface="Ebrima"/>
-        <a:font script="Phag" typeface="Phagspa"/>
-        <a:font script="Syrn" typeface="Estrangelo Edessa"/>
-        <a:font script="Syrj" typeface="Estrangelo Edessa"/>
-        <a:font script="Syre" typeface="Estrangelo Edessa"/>
-        <a:font script="Sora" typeface="Nirmala UI"/>
-        <a:font script="Tale" typeface="Microsoft Tai Le"/>
-        <a:font script="Talu" typeface="Microsoft New Tai Lue"/>
-        <a:font script="Tfng" typeface="Ebrima"/>
       </a:minorFont>
     </a:fontScheme>
-    <a:fmtScheme name="Office">
+    <a:fmtScheme name="Vapor Trail">
       <a:fillStyleLst>
         <a:solidFill>
           <a:schemeClr val="phClr"/>
@@ -4692,23 +7082,24 @@
           <a:gsLst>
             <a:gs pos="0">
               <a:schemeClr val="phClr">
+                <a:tint val="69000"/>
+                <a:alpha val="100000"/>
+                <a:satMod val="109000"/>
                 <a:lumMod val="110000"/>
-                <a:satMod val="105000"/>
-                <a:tint val="67000"/>
               </a:schemeClr>
             </a:gs>
-            <a:gs pos="50000">
+            <a:gs pos="52000">
               <a:schemeClr val="phClr">
-                <a:lumMod val="105000"/>
-                <a:satMod val="103000"/>
-                <a:tint val="73000"/>
+                <a:tint val="74000"/>
+                <a:satMod val="100000"/>
+                <a:lumMod val="104000"/>
               </a:schemeClr>
             </a:gs>
             <a:gs pos="100000">
               <a:schemeClr val="phClr">
-                <a:lumMod val="105000"/>
-                <a:satMod val="109000"/>
-                <a:tint val="81000"/>
+                <a:tint val="78000"/>
+                <a:satMod val="100000"/>
+                <a:lumMod val="100000"/>
               </a:schemeClr>
             </a:gs>
           </a:gsLst>
@@ -4718,23 +7109,16 @@
           <a:gsLst>
             <a:gs pos="0">
               <a:schemeClr val="phClr">
-                <a:satMod val="103000"/>
-                <a:lumMod val="102000"/>
-                <a:tint val="94000"/>
+                <a:tint val="96000"/>
+                <a:satMod val="100000"/>
+                <a:lumMod val="104000"/>
               </a:schemeClr>
             </a:gs>
-            <a:gs pos="50000">
+            <a:gs pos="78000">
               <a:schemeClr val="phClr">
+                <a:shade val="100000"/>
                 <a:satMod val="110000"/>
                 <a:lumMod val="100000"/>
-                <a:shade val="100000"/>
-              </a:schemeClr>
-            </a:gs>
-            <a:gs pos="100000">
-              <a:schemeClr val="phClr">
-                <a:lumMod val="99000"/>
-                <a:satMod val="120000"/>
-                <a:shade val="78000"/>
               </a:schemeClr>
             </a:gs>
           </a:gsLst>
@@ -4742,26 +7126,23 @@
         </a:gradFill>
       </a:fillStyleLst>
       <a:lnStyleLst>
+        <a:ln w="9525" cap="flat" cmpd="sng" algn="ctr">
+          <a:solidFill>
+            <a:schemeClr val="phClr"/>
+          </a:solidFill>
+          <a:prstDash val="solid"/>
+        </a:ln>
         <a:ln w="12700" cap="flat" cmpd="sng" algn="ctr">
           <a:solidFill>
             <a:schemeClr val="phClr"/>
           </a:solidFill>
           <a:prstDash val="solid"/>
-          <a:miter lim="800000"/>
         </a:ln>
         <a:ln w="19050" cap="flat" cmpd="sng" algn="ctr">
           <a:solidFill>
             <a:schemeClr val="phClr"/>
           </a:solidFill>
           <a:prstDash val="solid"/>
-          <a:miter lim="800000"/>
-        </a:ln>
-        <a:ln w="25400" cap="flat" cmpd="sng" algn="ctr">
-          <a:solidFill>
-            <a:schemeClr val="phClr"/>
-          </a:solidFill>
-          <a:prstDash val="solid"/>
-          <a:miter lim="800000"/>
         </a:ln>
       </a:lnStyleLst>
       <a:effectStyleLst>
@@ -4770,15 +7151,33 @@
         </a:effectStyle>
         <a:effectStyle>
           <a:effectLst/>
+          <a:scene3d>
+            <a:camera prst="orthographicFront">
+              <a:rot lat="0" lon="0" rev="0"/>
+            </a:camera>
+            <a:lightRig rig="threePt" dir="t"/>
+          </a:scene3d>
+          <a:sp3d>
+            <a:bevelT w="25400" h="12700"/>
+          </a:sp3d>
         </a:effectStyle>
         <a:effectStyle>
           <a:effectLst>
             <a:outerShdw blurRad="57150" dist="19050" dir="5400000" algn="ctr" rotWithShape="0">
               <a:srgbClr val="000000">
-                <a:alpha val="63000"/>
+                <a:alpha val="48000"/>
               </a:srgbClr>
             </a:outerShdw>
           </a:effectLst>
+          <a:scene3d>
+            <a:camera prst="orthographicFront">
+              <a:rot lat="0" lon="0" rev="0"/>
+            </a:camera>
+            <a:lightRig rig="threePt" dir="t"/>
+          </a:scene3d>
+          <a:sp3d>
+            <a:bevelT w="50800" h="25400"/>
+          </a:sp3d>
         </a:effectStyle>
       </a:effectStyleLst>
       <a:bgFillStyleLst>
@@ -4796,16 +7195,16 @@
             <a:gs pos="0">
               <a:schemeClr val="phClr">
                 <a:tint val="93000"/>
+                <a:shade val="98000"/>
                 <a:satMod val="150000"/>
-                <a:shade val="98000"/>
                 <a:lumMod val="102000"/>
               </a:schemeClr>
             </a:gs>
             <a:gs pos="50000">
               <a:schemeClr val="phClr">
                 <a:tint val="98000"/>
+                <a:shade val="90000"/>
                 <a:satMod val="130000"/>
-                <a:shade val="90000"/>
                 <a:lumMod val="103000"/>
               </a:schemeClr>
             </a:gs>
@@ -4821,31 +7220,11 @@
       </a:bgFillStyleLst>
     </a:fmtScheme>
   </a:themeElements>
-  <a:objectDefaults>
-    <a:lnDef>
-      <a:spPr/>
-      <a:bodyPr/>
-      <a:lstStyle/>
-      <a:style>
-        <a:lnRef idx="2">
-          <a:schemeClr val="accent1"/>
-        </a:lnRef>
-        <a:fillRef idx="0">
-          <a:schemeClr val="accent1"/>
-        </a:fillRef>
-        <a:effectRef idx="1">
-          <a:schemeClr val="accent1"/>
-        </a:effectRef>
-        <a:fontRef idx="minor">
-          <a:schemeClr val="tx1"/>
-        </a:fontRef>
-      </a:style>
-    </a:lnDef>
-  </a:objectDefaults>
+  <a:objectDefaults/>
   <a:extraClrSchemeLst/>
   <a:extLst>
     <a:ext uri="{05A4C25C-085E-4340-85A3-A5531E510DB2}">
-      <thm15:themeFamily xmlns:thm15="http://schemas.microsoft.com/office/thememl/2012/main" name="Office Theme" id="{2E142A2C-CD16-42D6-873A-C26D2A0506FA}" vid="{1BDDFF52-6CD6-40A5-AB3C-68EB2F1E4D0A}"/>
+      <thm15:themeFamily xmlns:thm15="http://schemas.microsoft.com/office/thememl/2012/main" name="Vapor Trail" id="{4FDF2955-7D9C-493C-B9F9-C205151B46CD}" vid="{8F31A783-2159-4870-BC29-2BA7D038EA44}"/>
     </a:ext>
   </a:extLst>
 </a:theme>

--- a/Current Presentation/Spring 2026.pptx
+++ b/Current Presentation/Spring 2026.pptx
@@ -310,7 +310,7 @@
           <a:p>
             <a:fld id="{3001F3D3-B64E-45E5-A774-FFEE7077F3D9}" type="datetimeFigureOut">
               <a:rPr lang="en-US" smtClean="0"/>
-              <a:t>6/15/2026</a:t>
+              <a:t>6/16/2026</a:t>
             </a:fld>
             <a:endParaRPr lang="en-US"/>
           </a:p>
@@ -577,7 +577,7 @@
           <a:p>
             <a:fld id="{3001F3D3-B64E-45E5-A774-FFEE7077F3D9}" type="datetimeFigureOut">
               <a:rPr lang="en-US" smtClean="0"/>
-              <a:t>6/15/2026</a:t>
+              <a:t>6/16/2026</a:t>
             </a:fld>
             <a:endParaRPr lang="en-US"/>
           </a:p>
@@ -808,7 +808,7 @@
           <a:p>
             <a:fld id="{3001F3D3-B64E-45E5-A774-FFEE7077F3D9}" type="datetimeFigureOut">
               <a:rPr lang="en-US" smtClean="0"/>
-              <a:t>6/15/2026</a:t>
+              <a:t>6/16/2026</a:t>
             </a:fld>
             <a:endParaRPr lang="en-US"/>
           </a:p>
@@ -1118,7 +1118,7 @@
           <a:p>
             <a:fld id="{3001F3D3-B64E-45E5-A774-FFEE7077F3D9}" type="datetimeFigureOut">
               <a:rPr lang="en-US" smtClean="0"/>
-              <a:t>6/15/2026</a:t>
+              <a:t>6/16/2026</a:t>
             </a:fld>
             <a:endParaRPr lang="en-US"/>
           </a:p>
@@ -1591,7 +1591,7 @@
           <a:p>
             <a:fld id="{3001F3D3-B64E-45E5-A774-FFEE7077F3D9}" type="datetimeFigureOut">
               <a:rPr lang="en-US" smtClean="0"/>
-              <a:t>6/15/2026</a:t>
+              <a:t>6/16/2026</a:t>
             </a:fld>
             <a:endParaRPr lang="en-US"/>
           </a:p>
@@ -2138,7 +2138,7 @@
           <a:p>
             <a:fld id="{3001F3D3-B64E-45E5-A774-FFEE7077F3D9}" type="datetimeFigureOut">
               <a:rPr lang="en-US" smtClean="0"/>
-              <a:t>6/15/2026</a:t>
+              <a:t>6/16/2026</a:t>
             </a:fld>
             <a:endParaRPr lang="en-US"/>
           </a:p>
@@ -2912,7 +2912,7 @@
           <a:p>
             <a:fld id="{3001F3D3-B64E-45E5-A774-FFEE7077F3D9}" type="datetimeFigureOut">
               <a:rPr lang="en-US" smtClean="0"/>
-              <a:t>6/15/2026</a:t>
+              <a:t>6/16/2026</a:t>
             </a:fld>
             <a:endParaRPr lang="en-US"/>
           </a:p>
@@ -3087,7 +3087,7 @@
           <a:p>
             <a:fld id="{3001F3D3-B64E-45E5-A774-FFEE7077F3D9}" type="datetimeFigureOut">
               <a:rPr lang="en-US" smtClean="0"/>
-              <a:t>6/15/2026</a:t>
+              <a:t>6/16/2026</a:t>
             </a:fld>
             <a:endParaRPr lang="en-US"/>
           </a:p>
@@ -3310,7 +3310,7 @@
           <a:p>
             <a:fld id="{3001F3D3-B64E-45E5-A774-FFEE7077F3D9}" type="datetimeFigureOut">
               <a:rPr lang="en-US" smtClean="0"/>
-              <a:t>6/15/2026</a:t>
+              <a:t>6/16/2026</a:t>
             </a:fld>
             <a:endParaRPr lang="en-US"/>
           </a:p>
@@ -3490,7 +3490,7 @@
           <a:p>
             <a:fld id="{3001F3D3-B64E-45E5-A774-FFEE7077F3D9}" type="datetimeFigureOut">
               <a:rPr lang="en-US" smtClean="0"/>
-              <a:t>6/15/2026</a:t>
+              <a:t>6/16/2026</a:t>
             </a:fld>
             <a:endParaRPr lang="en-US"/>
           </a:p>
@@ -3779,7 +3779,7 @@
           <a:p>
             <a:fld id="{3001F3D3-B64E-45E5-A774-FFEE7077F3D9}" type="datetimeFigureOut">
               <a:rPr lang="en-US" smtClean="0"/>
-              <a:t>6/15/2026</a:t>
+              <a:t>6/16/2026</a:t>
             </a:fld>
             <a:endParaRPr lang="en-US"/>
           </a:p>
@@ -4021,7 +4021,7 @@
           <a:p>
             <a:fld id="{3001F3D3-B64E-45E5-A774-FFEE7077F3D9}" type="datetimeFigureOut">
               <a:rPr lang="en-US" smtClean="0"/>
-              <a:t>6/15/2026</a:t>
+              <a:t>6/16/2026</a:t>
             </a:fld>
             <a:endParaRPr lang="en-US"/>
           </a:p>
@@ -4400,7 +4400,7 @@
           <a:p>
             <a:fld id="{3001F3D3-B64E-45E5-A774-FFEE7077F3D9}" type="datetimeFigureOut">
               <a:rPr lang="en-US" smtClean="0"/>
-              <a:t>6/15/2026</a:t>
+              <a:t>6/16/2026</a:t>
             </a:fld>
             <a:endParaRPr lang="en-US"/>
           </a:p>
@@ -4518,7 +4518,7 @@
           <a:p>
             <a:fld id="{3001F3D3-B64E-45E5-A774-FFEE7077F3D9}" type="datetimeFigureOut">
               <a:rPr lang="en-US" smtClean="0"/>
-              <a:t>6/15/2026</a:t>
+              <a:t>6/16/2026</a:t>
             </a:fld>
             <a:endParaRPr lang="en-US"/>
           </a:p>
@@ -4613,7 +4613,7 @@
           <a:p>
             <a:fld id="{3001F3D3-B64E-45E5-A774-FFEE7077F3D9}" type="datetimeFigureOut">
               <a:rPr lang="en-US" smtClean="0"/>
-              <a:t>6/15/2026</a:t>
+              <a:t>6/16/2026</a:t>
             </a:fld>
             <a:endParaRPr lang="en-US"/>
           </a:p>
@@ -4862,7 +4862,7 @@
           <a:p>
             <a:fld id="{3001F3D3-B64E-45E5-A774-FFEE7077F3D9}" type="datetimeFigureOut">
               <a:rPr lang="en-US" smtClean="0"/>
-              <a:t>6/15/2026</a:t>
+              <a:t>6/16/2026</a:t>
             </a:fld>
             <a:endParaRPr lang="en-US"/>
           </a:p>
@@ -5119,7 +5119,7 @@
           <a:p>
             <a:fld id="{3001F3D3-B64E-45E5-A774-FFEE7077F3D9}" type="datetimeFigureOut">
               <a:rPr lang="en-US" smtClean="0"/>
-              <a:t>6/15/2026</a:t>
+              <a:t>6/16/2026</a:t>
             </a:fld>
             <a:endParaRPr lang="en-US"/>
           </a:p>
@@ -5362,7 +5362,7 @@
           <a:p>
             <a:fld id="{3001F3D3-B64E-45E5-A774-FFEE7077F3D9}" type="datetimeFigureOut">
               <a:rPr lang="en-US" smtClean="0"/>
-              <a:t>6/15/2026</a:t>
+              <a:t>6/16/2026</a:t>
             </a:fld>
             <a:endParaRPr lang="en-US"/>
           </a:p>
@@ -7195,7 +7195,7 @@
           <p:cNvPr id="2" name="Title 1">
             <a:extLst>
               <a:ext uri="{FF2B5EF4-FFF2-40B4-BE49-F238E27FC236}">
-                <a16:creationId xmlns:a16="http://schemas.microsoft.com/office/drawing/2014/main" id="{8EE15C87-6EFB-048E-281E-FA3265247FC2}"/>
+                <a16:creationId xmlns:a16="http://schemas.microsoft.com/office/drawing/2014/main" id="{CABE40B0-7AFB-B285-5066-7B441A27BF72}"/>
               </a:ext>
             </a:extLst>
           </p:cNvPr>
@@ -7220,7 +7220,7 @@
           <p:cNvPr id="3" name="Content Placeholder 2">
             <a:extLst>
               <a:ext uri="{FF2B5EF4-FFF2-40B4-BE49-F238E27FC236}">
-                <a16:creationId xmlns:a16="http://schemas.microsoft.com/office/drawing/2014/main" id="{0862FF5E-C6A3-3A43-45BA-7EC2DD1DCF5E}"/>
+                <a16:creationId xmlns:a16="http://schemas.microsoft.com/office/drawing/2014/main" id="{D4080C78-579B-6737-72DA-8EFC61A29CE1}"/>
               </a:ext>
             </a:extLst>
           </p:cNvPr>
@@ -7243,7 +7243,7 @@
     </p:spTree>
     <p:extLst>
       <p:ext uri="{BB962C8B-B14F-4D97-AF65-F5344CB8AC3E}">
-        <p14:creationId xmlns:p14="http://schemas.microsoft.com/office/powerpoint/2010/main" val="3814986546"/>
+        <p14:creationId xmlns:p14="http://schemas.microsoft.com/office/powerpoint/2010/main" val="1734690963"/>
       </p:ext>
     </p:extLst>
   </p:cSld>

--- a/Current Presentation/Spring 2026.pptx
+++ b/Current Presentation/Spring 2026.pptx
@@ -310,7 +310,7 @@
           <a:p>
             <a:fld id="{3001F3D3-B64E-45E5-A774-FFEE7077F3D9}" type="datetimeFigureOut">
               <a:rPr lang="en-US" smtClean="0"/>
-              <a:t>6/16/2026</a:t>
+              <a:t>6/17/2026</a:t>
             </a:fld>
             <a:endParaRPr lang="en-US"/>
           </a:p>
@@ -577,7 +577,7 @@
           <a:p>
             <a:fld id="{3001F3D3-B64E-45E5-A774-FFEE7077F3D9}" type="datetimeFigureOut">
               <a:rPr lang="en-US" smtClean="0"/>
-              <a:t>6/16/2026</a:t>
+              <a:t>6/17/2026</a:t>
             </a:fld>
             <a:endParaRPr lang="en-US"/>
           </a:p>
@@ -808,7 +808,7 @@
           <a:p>
             <a:fld id="{3001F3D3-B64E-45E5-A774-FFEE7077F3D9}" type="datetimeFigureOut">
               <a:rPr lang="en-US" smtClean="0"/>
-              <a:t>6/16/2026</a:t>
+              <a:t>6/17/2026</a:t>
             </a:fld>
             <a:endParaRPr lang="en-US"/>
           </a:p>
@@ -1118,7 +1118,7 @@
           <a:p>
             <a:fld id="{3001F3D3-B64E-45E5-A774-FFEE7077F3D9}" type="datetimeFigureOut">
               <a:rPr lang="en-US" smtClean="0"/>
-              <a:t>6/16/2026</a:t>
+              <a:t>6/17/2026</a:t>
             </a:fld>
             <a:endParaRPr lang="en-US"/>
           </a:p>
@@ -1591,7 +1591,7 @@
           <a:p>
             <a:fld id="{3001F3D3-B64E-45E5-A774-FFEE7077F3D9}" type="datetimeFigureOut">
               <a:rPr lang="en-US" smtClean="0"/>
-              <a:t>6/16/2026</a:t>
+              <a:t>6/17/2026</a:t>
             </a:fld>
             <a:endParaRPr lang="en-US"/>
           </a:p>
@@ -2138,7 +2138,7 @@
           <a:p>
             <a:fld id="{3001F3D3-B64E-45E5-A774-FFEE7077F3D9}" type="datetimeFigureOut">
               <a:rPr lang="en-US" smtClean="0"/>
-              <a:t>6/16/2026</a:t>
+              <a:t>6/17/2026</a:t>
             </a:fld>
             <a:endParaRPr lang="en-US"/>
           </a:p>
@@ -2912,7 +2912,7 @@
           <a:p>
             <a:fld id="{3001F3D3-B64E-45E5-A774-FFEE7077F3D9}" type="datetimeFigureOut">
               <a:rPr lang="en-US" smtClean="0"/>
-              <a:t>6/16/2026</a:t>
+              <a:t>6/17/2026</a:t>
             </a:fld>
             <a:endParaRPr lang="en-US"/>
           </a:p>
@@ -3087,7 +3087,7 @@
           <a:p>
             <a:fld id="{3001F3D3-B64E-45E5-A774-FFEE7077F3D9}" type="datetimeFigureOut">
               <a:rPr lang="en-US" smtClean="0"/>
-              <a:t>6/16/2026</a:t>
+              <a:t>6/17/2026</a:t>
             </a:fld>
             <a:endParaRPr lang="en-US"/>
           </a:p>
@@ -3310,7 +3310,7 @@
           <a:p>
             <a:fld id="{3001F3D3-B64E-45E5-A774-FFEE7077F3D9}" type="datetimeFigureOut">
               <a:rPr lang="en-US" smtClean="0"/>
-              <a:t>6/16/2026</a:t>
+              <a:t>6/17/2026</a:t>
             </a:fld>
             <a:endParaRPr lang="en-US"/>
           </a:p>
@@ -3490,7 +3490,7 @@
           <a:p>
             <a:fld id="{3001F3D3-B64E-45E5-A774-FFEE7077F3D9}" type="datetimeFigureOut">
               <a:rPr lang="en-US" smtClean="0"/>
-              <a:t>6/16/2026</a:t>
+              <a:t>6/17/2026</a:t>
             </a:fld>
             <a:endParaRPr lang="en-US"/>
           </a:p>
@@ -3779,7 +3779,7 @@
           <a:p>
             <a:fld id="{3001F3D3-B64E-45E5-A774-FFEE7077F3D9}" type="datetimeFigureOut">
               <a:rPr lang="en-US" smtClean="0"/>
-              <a:t>6/16/2026</a:t>
+              <a:t>6/17/2026</a:t>
             </a:fld>
             <a:endParaRPr lang="en-US"/>
           </a:p>
@@ -4021,7 +4021,7 @@
           <a:p>
             <a:fld id="{3001F3D3-B64E-45E5-A774-FFEE7077F3D9}" type="datetimeFigureOut">
               <a:rPr lang="en-US" smtClean="0"/>
-              <a:t>6/16/2026</a:t>
+              <a:t>6/17/2026</a:t>
             </a:fld>
             <a:endParaRPr lang="en-US"/>
           </a:p>
@@ -4400,7 +4400,7 @@
           <a:p>
             <a:fld id="{3001F3D3-B64E-45E5-A774-FFEE7077F3D9}" type="datetimeFigureOut">
               <a:rPr lang="en-US" smtClean="0"/>
-              <a:t>6/16/2026</a:t>
+              <a:t>6/17/2026</a:t>
             </a:fld>
             <a:endParaRPr lang="en-US"/>
           </a:p>
@@ -4518,7 +4518,7 @@
           <a:p>
             <a:fld id="{3001F3D3-B64E-45E5-A774-FFEE7077F3D9}" type="datetimeFigureOut">
               <a:rPr lang="en-US" smtClean="0"/>
-              <a:t>6/16/2026</a:t>
+              <a:t>6/17/2026</a:t>
             </a:fld>
             <a:endParaRPr lang="en-US"/>
           </a:p>
@@ -4613,7 +4613,7 @@
           <a:p>
             <a:fld id="{3001F3D3-B64E-45E5-A774-FFEE7077F3D9}" type="datetimeFigureOut">
               <a:rPr lang="en-US" smtClean="0"/>
-              <a:t>6/16/2026</a:t>
+              <a:t>6/17/2026</a:t>
             </a:fld>
             <a:endParaRPr lang="en-US"/>
           </a:p>
@@ -4862,7 +4862,7 @@
           <a:p>
             <a:fld id="{3001F3D3-B64E-45E5-A774-FFEE7077F3D9}" type="datetimeFigureOut">
               <a:rPr lang="en-US" smtClean="0"/>
-              <a:t>6/16/2026</a:t>
+              <a:t>6/17/2026</a:t>
             </a:fld>
             <a:endParaRPr lang="en-US"/>
           </a:p>
@@ -5119,7 +5119,7 @@
           <a:p>
             <a:fld id="{3001F3D3-B64E-45E5-A774-FFEE7077F3D9}" type="datetimeFigureOut">
               <a:rPr lang="en-US" smtClean="0"/>
-              <a:t>6/16/2026</a:t>
+              <a:t>6/17/2026</a:t>
             </a:fld>
             <a:endParaRPr lang="en-US"/>
           </a:p>
@@ -5362,7 +5362,7 @@
           <a:p>
             <a:fld id="{3001F3D3-B64E-45E5-A774-FFEE7077F3D9}" type="datetimeFigureOut">
               <a:rPr lang="en-US" smtClean="0"/>
-              <a:t>6/16/2026</a:t>
+              <a:t>6/17/2026</a:t>
             </a:fld>
             <a:endParaRPr lang="en-US"/>
           </a:p>
@@ -7211,7 +7211,10 @@
           <a:bodyPr/>
           <a:lstStyle/>
           <a:p>
-            <a:endParaRPr lang="en-US"/>
+            <a:r>
+              <a:rPr lang="en-US" dirty="0"/>
+              <a:t>Tech: Advanced app-dev</a:t>
+            </a:r>
           </a:p>
         </p:txBody>
       </p:sp>
@@ -7236,7 +7239,10 @@
           <a:bodyPr/>
           <a:lstStyle/>
           <a:p>
-            <a:endParaRPr lang="en-US"/>
+            <a:pPr marL="0" indent="0">
+              <a:buNone/>
+            </a:pPr>
+            <a:endParaRPr lang="en-US" dirty="0"/>
           </a:p>
         </p:txBody>
       </p:sp>

--- a/Current Presentation/Spring 2026.pptx
+++ b/Current Presentation/Spring 2026.pptx
@@ -4,6 +4,9 @@
   <p:sldMasterIdLst>
     <p:sldMasterId id="2147483660" r:id="rId1"/>
   </p:sldMasterIdLst>
+  <p:notesMasterIdLst>
+    <p:notesMasterId r:id="rId4"/>
+  </p:notesMasterIdLst>
   <p:sldIdLst>
     <p:sldId id="260" r:id="rId2"/>
     <p:sldId id="261" r:id="rId3"/>
@@ -138,6 +141,439 @@
   </inkml:definitions>
   <inkml:trace contextRef="#ctx0" brushRef="#br0">0 0 24575,'0'0'-8191</inkml:trace>
 </inkml:ink>
+</file>
+
+<file path=ppt/notesMasters/notesMaster1.xml><?xml version="1.0" encoding="utf-8"?>
+<p:notesMaster xmlns:a="http://schemas.openxmlformats.org/drawingml/2006/main" xmlns:r="http://schemas.openxmlformats.org/officeDocument/2006/relationships" xmlns:p="http://schemas.openxmlformats.org/presentationml/2006/main">
+  <p:cSld>
+    <p:bg>
+      <p:bgRef idx="1001">
+        <a:schemeClr val="bg1"/>
+      </p:bgRef>
+    </p:bg>
+    <p:spTree>
+      <p:nvGrpSpPr>
+        <p:cNvPr id="1" name=""/>
+        <p:cNvGrpSpPr/>
+        <p:nvPr/>
+      </p:nvGrpSpPr>
+      <p:grpSpPr>
+        <a:xfrm>
+          <a:off x="0" y="0"/>
+          <a:ext cx="0" cy="0"/>
+          <a:chOff x="0" y="0"/>
+          <a:chExt cx="0" cy="0"/>
+        </a:xfrm>
+      </p:grpSpPr>
+      <p:sp>
+        <p:nvSpPr>
+          <p:cNvPr id="2" name="Header Placeholder 1"/>
+          <p:cNvSpPr>
+            <a:spLocks noGrp="1"/>
+          </p:cNvSpPr>
+          <p:nvPr>
+            <p:ph type="hdr" sz="quarter"/>
+          </p:nvPr>
+        </p:nvSpPr>
+        <p:spPr>
+          <a:xfrm>
+            <a:off x="0" y="0"/>
+            <a:ext cx="2971800" cy="458788"/>
+          </a:xfrm>
+          <a:prstGeom prst="rect">
+            <a:avLst/>
+          </a:prstGeom>
+        </p:spPr>
+        <p:txBody>
+          <a:bodyPr vert="horz" lIns="91440" tIns="45720" rIns="91440" bIns="45720" rtlCol="0"/>
+          <a:lstStyle>
+            <a:lvl1pPr algn="l">
+              <a:defRPr sz="1200"/>
+            </a:lvl1pPr>
+          </a:lstStyle>
+          <a:p>
+            <a:endParaRPr lang="en-US"/>
+          </a:p>
+        </p:txBody>
+      </p:sp>
+      <p:sp>
+        <p:nvSpPr>
+          <p:cNvPr id="3" name="Date Placeholder 2"/>
+          <p:cNvSpPr>
+            <a:spLocks noGrp="1"/>
+          </p:cNvSpPr>
+          <p:nvPr>
+            <p:ph type="dt" idx="1"/>
+          </p:nvPr>
+        </p:nvSpPr>
+        <p:spPr>
+          <a:xfrm>
+            <a:off x="3884613" y="0"/>
+            <a:ext cx="2971800" cy="458788"/>
+          </a:xfrm>
+          <a:prstGeom prst="rect">
+            <a:avLst/>
+          </a:prstGeom>
+        </p:spPr>
+        <p:txBody>
+          <a:bodyPr vert="horz" lIns="91440" tIns="45720" rIns="91440" bIns="45720" rtlCol="0"/>
+          <a:lstStyle>
+            <a:lvl1pPr algn="r">
+              <a:defRPr sz="1200"/>
+            </a:lvl1pPr>
+          </a:lstStyle>
+          <a:p>
+            <a:fld id="{BFAFE299-D31D-47C2-B46C-C3B1749D6A86}" type="datetimeFigureOut">
+              <a:rPr lang="en-US" smtClean="0"/>
+              <a:t>6/17/2026</a:t>
+            </a:fld>
+            <a:endParaRPr lang="en-US"/>
+          </a:p>
+        </p:txBody>
+      </p:sp>
+      <p:sp>
+        <p:nvSpPr>
+          <p:cNvPr id="4" name="Slide Image Placeholder 3"/>
+          <p:cNvSpPr>
+            <a:spLocks noGrp="1" noRot="1" noChangeAspect="1"/>
+          </p:cNvSpPr>
+          <p:nvPr>
+            <p:ph type="sldImg" idx="2"/>
+          </p:nvPr>
+        </p:nvSpPr>
+        <p:spPr>
+          <a:xfrm>
+            <a:off x="685800" y="1143000"/>
+            <a:ext cx="5486400" cy="3086100"/>
+          </a:xfrm>
+          <a:prstGeom prst="rect">
+            <a:avLst/>
+          </a:prstGeom>
+          <a:noFill/>
+          <a:ln w="12700">
+            <a:solidFill>
+              <a:prstClr val="black"/>
+            </a:solidFill>
+          </a:ln>
+        </p:spPr>
+        <p:txBody>
+          <a:bodyPr vert="horz" lIns="91440" tIns="45720" rIns="91440" bIns="45720" rtlCol="0" anchor="ctr"/>
+          <a:lstStyle/>
+          <a:p>
+            <a:endParaRPr lang="en-US"/>
+          </a:p>
+        </p:txBody>
+      </p:sp>
+      <p:sp>
+        <p:nvSpPr>
+          <p:cNvPr id="5" name="Notes Placeholder 4"/>
+          <p:cNvSpPr>
+            <a:spLocks noGrp="1"/>
+          </p:cNvSpPr>
+          <p:nvPr>
+            <p:ph type="body" sz="quarter" idx="3"/>
+          </p:nvPr>
+        </p:nvSpPr>
+        <p:spPr>
+          <a:xfrm>
+            <a:off x="685800" y="4400550"/>
+            <a:ext cx="5486400" cy="3600450"/>
+          </a:xfrm>
+          <a:prstGeom prst="rect">
+            <a:avLst/>
+          </a:prstGeom>
+        </p:spPr>
+        <p:txBody>
+          <a:bodyPr vert="horz" lIns="91440" tIns="45720" rIns="91440" bIns="45720" rtlCol="0"/>
+          <a:lstStyle/>
+          <a:p>
+            <a:pPr lvl="0"/>
+            <a:r>
+              <a:rPr lang="en-US"/>
+              <a:t>Click to edit Master text styles</a:t>
+            </a:r>
+          </a:p>
+          <a:p>
+            <a:pPr lvl="1"/>
+            <a:r>
+              <a:rPr lang="en-US"/>
+              <a:t>Second level</a:t>
+            </a:r>
+          </a:p>
+          <a:p>
+            <a:pPr lvl="2"/>
+            <a:r>
+              <a:rPr lang="en-US"/>
+              <a:t>Third level</a:t>
+            </a:r>
+          </a:p>
+          <a:p>
+            <a:pPr lvl="3"/>
+            <a:r>
+              <a:rPr lang="en-US"/>
+              <a:t>Fourth level</a:t>
+            </a:r>
+          </a:p>
+          <a:p>
+            <a:pPr lvl="4"/>
+            <a:r>
+              <a:rPr lang="en-US"/>
+              <a:t>Fifth level</a:t>
+            </a:r>
+          </a:p>
+        </p:txBody>
+      </p:sp>
+      <p:sp>
+        <p:nvSpPr>
+          <p:cNvPr id="6" name="Footer Placeholder 5"/>
+          <p:cNvSpPr>
+            <a:spLocks noGrp="1"/>
+          </p:cNvSpPr>
+          <p:nvPr>
+            <p:ph type="ftr" sz="quarter" idx="4"/>
+          </p:nvPr>
+        </p:nvSpPr>
+        <p:spPr>
+          <a:xfrm>
+            <a:off x="0" y="8685213"/>
+            <a:ext cx="2971800" cy="458787"/>
+          </a:xfrm>
+          <a:prstGeom prst="rect">
+            <a:avLst/>
+          </a:prstGeom>
+        </p:spPr>
+        <p:txBody>
+          <a:bodyPr vert="horz" lIns="91440" tIns="45720" rIns="91440" bIns="45720" rtlCol="0" anchor="b"/>
+          <a:lstStyle>
+            <a:lvl1pPr algn="l">
+              <a:defRPr sz="1200"/>
+            </a:lvl1pPr>
+          </a:lstStyle>
+          <a:p>
+            <a:endParaRPr lang="en-US"/>
+          </a:p>
+        </p:txBody>
+      </p:sp>
+      <p:sp>
+        <p:nvSpPr>
+          <p:cNvPr id="7" name="Slide Number Placeholder 6"/>
+          <p:cNvSpPr>
+            <a:spLocks noGrp="1"/>
+          </p:cNvSpPr>
+          <p:nvPr>
+            <p:ph type="sldNum" sz="quarter" idx="5"/>
+          </p:nvPr>
+        </p:nvSpPr>
+        <p:spPr>
+          <a:xfrm>
+            <a:off x="3884613" y="8685213"/>
+            <a:ext cx="2971800" cy="458787"/>
+          </a:xfrm>
+          <a:prstGeom prst="rect">
+            <a:avLst/>
+          </a:prstGeom>
+        </p:spPr>
+        <p:txBody>
+          <a:bodyPr vert="horz" lIns="91440" tIns="45720" rIns="91440" bIns="45720" rtlCol="0" anchor="b"/>
+          <a:lstStyle>
+            <a:lvl1pPr algn="r">
+              <a:defRPr sz="1200"/>
+            </a:lvl1pPr>
+          </a:lstStyle>
+          <a:p>
+            <a:fld id="{4BBF2809-F272-465C-B573-2DAF6CD206A2}" type="slidenum">
+              <a:rPr lang="en-US" smtClean="0"/>
+              <a:t>‹#›</a:t>
+            </a:fld>
+            <a:endParaRPr lang="en-US"/>
+          </a:p>
+        </p:txBody>
+      </p:sp>
+    </p:spTree>
+    <p:extLst>
+      <p:ext uri="{BB962C8B-B14F-4D97-AF65-F5344CB8AC3E}">
+        <p14:creationId xmlns:p14="http://schemas.microsoft.com/office/powerpoint/2010/main" val="2544104160"/>
+      </p:ext>
+    </p:extLst>
+  </p:cSld>
+  <p:clrMap bg1="lt1" tx1="dk1" bg2="lt2" tx2="dk2" accent1="accent1" accent2="accent2" accent3="accent3" accent4="accent4" accent5="accent5" accent6="accent6" hlink="hlink" folHlink="folHlink"/>
+  <p:notesStyle>
+    <a:lvl1pPr marL="0" algn="l" defTabSz="914400" rtl="0" eaLnBrk="1" latinLnBrk="0" hangingPunct="1">
+      <a:defRPr sz="1200" kern="1200">
+        <a:solidFill>
+          <a:schemeClr val="tx1"/>
+        </a:solidFill>
+        <a:latin typeface="+mn-lt"/>
+        <a:ea typeface="+mn-ea"/>
+        <a:cs typeface="+mn-cs"/>
+      </a:defRPr>
+    </a:lvl1pPr>
+    <a:lvl2pPr marL="457200" algn="l" defTabSz="914400" rtl="0" eaLnBrk="1" latinLnBrk="0" hangingPunct="1">
+      <a:defRPr sz="1200" kern="1200">
+        <a:solidFill>
+          <a:schemeClr val="tx1"/>
+        </a:solidFill>
+        <a:latin typeface="+mn-lt"/>
+        <a:ea typeface="+mn-ea"/>
+        <a:cs typeface="+mn-cs"/>
+      </a:defRPr>
+    </a:lvl2pPr>
+    <a:lvl3pPr marL="914400" algn="l" defTabSz="914400" rtl="0" eaLnBrk="1" latinLnBrk="0" hangingPunct="1">
+      <a:defRPr sz="1200" kern="1200">
+        <a:solidFill>
+          <a:schemeClr val="tx1"/>
+        </a:solidFill>
+        <a:latin typeface="+mn-lt"/>
+        <a:ea typeface="+mn-ea"/>
+        <a:cs typeface="+mn-cs"/>
+      </a:defRPr>
+    </a:lvl3pPr>
+    <a:lvl4pPr marL="1371600" algn="l" defTabSz="914400" rtl="0" eaLnBrk="1" latinLnBrk="0" hangingPunct="1">
+      <a:defRPr sz="1200" kern="1200">
+        <a:solidFill>
+          <a:schemeClr val="tx1"/>
+        </a:solidFill>
+        <a:latin typeface="+mn-lt"/>
+        <a:ea typeface="+mn-ea"/>
+        <a:cs typeface="+mn-cs"/>
+      </a:defRPr>
+    </a:lvl4pPr>
+    <a:lvl5pPr marL="1828800" algn="l" defTabSz="914400" rtl="0" eaLnBrk="1" latinLnBrk="0" hangingPunct="1">
+      <a:defRPr sz="1200" kern="1200">
+        <a:solidFill>
+          <a:schemeClr val="tx1"/>
+        </a:solidFill>
+        <a:latin typeface="+mn-lt"/>
+        <a:ea typeface="+mn-ea"/>
+        <a:cs typeface="+mn-cs"/>
+      </a:defRPr>
+    </a:lvl5pPr>
+    <a:lvl6pPr marL="2286000" algn="l" defTabSz="914400" rtl="0" eaLnBrk="1" latinLnBrk="0" hangingPunct="1">
+      <a:defRPr sz="1200" kern="1200">
+        <a:solidFill>
+          <a:schemeClr val="tx1"/>
+        </a:solidFill>
+        <a:latin typeface="+mn-lt"/>
+        <a:ea typeface="+mn-ea"/>
+        <a:cs typeface="+mn-cs"/>
+      </a:defRPr>
+    </a:lvl6pPr>
+    <a:lvl7pPr marL="2743200" algn="l" defTabSz="914400" rtl="0" eaLnBrk="1" latinLnBrk="0" hangingPunct="1">
+      <a:defRPr sz="1200" kern="1200">
+        <a:solidFill>
+          <a:schemeClr val="tx1"/>
+        </a:solidFill>
+        <a:latin typeface="+mn-lt"/>
+        <a:ea typeface="+mn-ea"/>
+        <a:cs typeface="+mn-cs"/>
+      </a:defRPr>
+    </a:lvl7pPr>
+    <a:lvl8pPr marL="3200400" algn="l" defTabSz="914400" rtl="0" eaLnBrk="1" latinLnBrk="0" hangingPunct="1">
+      <a:defRPr sz="1200" kern="1200">
+        <a:solidFill>
+          <a:schemeClr val="tx1"/>
+        </a:solidFill>
+        <a:latin typeface="+mn-lt"/>
+        <a:ea typeface="+mn-ea"/>
+        <a:cs typeface="+mn-cs"/>
+      </a:defRPr>
+    </a:lvl8pPr>
+    <a:lvl9pPr marL="3657600" algn="l" defTabSz="914400" rtl="0" eaLnBrk="1" latinLnBrk="0" hangingPunct="1">
+      <a:defRPr sz="1200" kern="1200">
+        <a:solidFill>
+          <a:schemeClr val="tx1"/>
+        </a:solidFill>
+        <a:latin typeface="+mn-lt"/>
+        <a:ea typeface="+mn-ea"/>
+        <a:cs typeface="+mn-cs"/>
+      </a:defRPr>
+    </a:lvl9pPr>
+  </p:notesStyle>
+</p:notesMaster>
+</file>
+
+<file path=ppt/notesSlides/notesSlide1.xml><?xml version="1.0" encoding="utf-8"?>
+<p:notes xmlns:a="http://schemas.openxmlformats.org/drawingml/2006/main" xmlns:r="http://schemas.openxmlformats.org/officeDocument/2006/relationships" xmlns:p="http://schemas.openxmlformats.org/presentationml/2006/main">
+  <p:cSld>
+    <p:spTree>
+      <p:nvGrpSpPr>
+        <p:cNvPr id="1" name=""/>
+        <p:cNvGrpSpPr/>
+        <p:nvPr/>
+      </p:nvGrpSpPr>
+      <p:grpSpPr>
+        <a:xfrm>
+          <a:off x="0" y="0"/>
+          <a:ext cx="0" cy="0"/>
+          <a:chOff x="0" y="0"/>
+          <a:chExt cx="0" cy="0"/>
+        </a:xfrm>
+      </p:grpSpPr>
+      <p:sp>
+        <p:nvSpPr>
+          <p:cNvPr id="2" name="Slide Image Placeholder 1"/>
+          <p:cNvSpPr>
+            <a:spLocks noGrp="1" noRot="1" noChangeAspect="1"/>
+          </p:cNvSpPr>
+          <p:nvPr>
+            <p:ph type="sldImg"/>
+          </p:nvPr>
+        </p:nvSpPr>
+        <p:spPr/>
+      </p:sp>
+      <p:sp>
+        <p:nvSpPr>
+          <p:cNvPr id="3" name="Notes Placeholder 2"/>
+          <p:cNvSpPr>
+            <a:spLocks noGrp="1"/>
+          </p:cNvSpPr>
+          <p:nvPr>
+            <p:ph type="body" idx="1"/>
+          </p:nvPr>
+        </p:nvSpPr>
+        <p:spPr/>
+        <p:txBody>
+          <a:bodyPr/>
+          <a:lstStyle/>
+          <a:p>
+            <a:endParaRPr lang="en-US" dirty="0"/>
+          </a:p>
+        </p:txBody>
+      </p:sp>
+      <p:sp>
+        <p:nvSpPr>
+          <p:cNvPr id="4" name="Slide Number Placeholder 3"/>
+          <p:cNvSpPr>
+            <a:spLocks noGrp="1"/>
+          </p:cNvSpPr>
+          <p:nvPr>
+            <p:ph type="sldNum" sz="quarter" idx="5"/>
+          </p:nvPr>
+        </p:nvSpPr>
+        <p:spPr/>
+        <p:txBody>
+          <a:bodyPr/>
+          <a:lstStyle/>
+          <a:p>
+            <a:fld id="{4BBF2809-F272-465C-B573-2DAF6CD206A2}" type="slidenum">
+              <a:rPr lang="en-US" smtClean="0"/>
+              <a:t>2</a:t>
+            </a:fld>
+            <a:endParaRPr lang="en-US"/>
+          </a:p>
+        </p:txBody>
+      </p:sp>
+    </p:spTree>
+    <p:extLst>
+      <p:ext uri="{BB962C8B-B14F-4D97-AF65-F5344CB8AC3E}">
+        <p14:creationId xmlns:p14="http://schemas.microsoft.com/office/powerpoint/2010/main" val="1177785085"/>
+      </p:ext>
+    </p:extLst>
+  </p:cSld>
+  <p:clrMapOvr>
+    <a:masterClrMapping/>
+  </p:clrMapOvr>
+</p:notes>
 </file>
 
 <file path=ppt/slideLayouts/slideLayout1.xml><?xml version="1.0" encoding="utf-8"?>
@@ -7239,9 +7675,65 @@
           <a:bodyPr/>
           <a:lstStyle/>
           <a:p>
-            <a:pPr marL="0" indent="0">
-              <a:buNone/>
-            </a:pPr>
+            <a:r>
+              <a:rPr lang="en-US" dirty="0"/>
+              <a:t>We worked on two things in advanced </a:t>
+            </a:r>
+            <a:r>
+              <a:rPr lang="en-US" dirty="0" err="1"/>
+              <a:t>appdev</a:t>
+            </a:r>
+            <a:r>
+              <a:rPr lang="en-US" dirty="0"/>
+              <a:t>.</a:t>
+            </a:r>
+          </a:p>
+          <a:p>
+            <a:pPr lvl="1"/>
+            <a:r>
+              <a:rPr lang="en-US" dirty="0"/>
+              <a:t>One of the projects we worked on was the Snack Shack</a:t>
+            </a:r>
+          </a:p>
+          <a:p>
+            <a:pPr lvl="2"/>
+            <a:r>
+              <a:rPr lang="en-US" dirty="0"/>
+              <a:t>In actuality, the most major was, as discussed by Ryan, actually databases and SQL. But I figured you have heard about that from him</a:t>
+            </a:r>
+          </a:p>
+          <a:p>
+            <a:pPr lvl="1"/>
+            <a:r>
+              <a:rPr lang="en-US" dirty="0"/>
+              <a:t>Tasks used:</a:t>
+            </a:r>
+          </a:p>
+          <a:p>
+            <a:pPr lvl="2"/>
+            <a:r>
+              <a:rPr lang="en-US" dirty="0"/>
+              <a:t>Debugging</a:t>
+            </a:r>
+          </a:p>
+          <a:p>
+            <a:pPr lvl="3"/>
+            <a:r>
+              <a:rPr lang="en-US" dirty="0" err="1"/>
+              <a:t>Debuging</a:t>
+            </a:r>
+            <a:endParaRPr lang="en-US" dirty="0"/>
+          </a:p>
+          <a:p>
+            <a:pPr lvl="3"/>
+            <a:r>
+              <a:rPr lang="en-US" dirty="0" err="1"/>
+              <a:t>Debuging</a:t>
+            </a:r>
+            <a:endParaRPr lang="en-US" dirty="0"/>
+          </a:p>
+          <a:p>
+            <a:pPr lvl="3"/>
             <a:endParaRPr lang="en-US" dirty="0"/>
           </a:p>
         </p:txBody>
@@ -7527,4 +8019,319 @@
     </a:ext>
   </a:extLst>
 </a:theme>
+</file>
+
+<file path=ppt/theme/theme2.xml><?xml version="1.0" encoding="utf-8"?>
+<a:theme xmlns:a="http://schemas.openxmlformats.org/drawingml/2006/main" name="Office Theme">
+  <a:themeElements>
+    <a:clrScheme name="Office">
+      <a:dk1>
+        <a:sysClr val="windowText" lastClr="000000"/>
+      </a:dk1>
+      <a:lt1>
+        <a:sysClr val="window" lastClr="FFFFFF"/>
+      </a:lt1>
+      <a:dk2>
+        <a:srgbClr val="0E2841"/>
+      </a:dk2>
+      <a:lt2>
+        <a:srgbClr val="E8E8E8"/>
+      </a:lt2>
+      <a:accent1>
+        <a:srgbClr val="156082"/>
+      </a:accent1>
+      <a:accent2>
+        <a:srgbClr val="E97132"/>
+      </a:accent2>
+      <a:accent3>
+        <a:srgbClr val="196B24"/>
+      </a:accent3>
+      <a:accent4>
+        <a:srgbClr val="0F9ED5"/>
+      </a:accent4>
+      <a:accent5>
+        <a:srgbClr val="A02B93"/>
+      </a:accent5>
+      <a:accent6>
+        <a:srgbClr val="4EA72E"/>
+      </a:accent6>
+      <a:hlink>
+        <a:srgbClr val="467886"/>
+      </a:hlink>
+      <a:folHlink>
+        <a:srgbClr val="96607D"/>
+      </a:folHlink>
+    </a:clrScheme>
+    <a:fontScheme name="Office">
+      <a:majorFont>
+        <a:latin typeface="Aptos Display" panose="02110004020202020204"/>
+        <a:ea typeface=""/>
+        <a:cs typeface=""/>
+        <a:font script="Jpan" typeface="游ゴシック Light"/>
+        <a:font script="Hang" typeface="맑은 고딕"/>
+        <a:font script="Hans" typeface="等线 Light"/>
+        <a:font script="Hant" typeface="新細明體"/>
+        <a:font script="Arab" typeface="Times New Roman"/>
+        <a:font script="Hebr" typeface="Times New Roman"/>
+        <a:font script="Thai" typeface="Angsana New"/>
+        <a:font script="Ethi" typeface="Nyala"/>
+        <a:font script="Beng" typeface="Vrinda"/>
+        <a:font script="Gujr" typeface="Shruti"/>
+        <a:font script="Khmr" typeface="MoolBoran"/>
+        <a:font script="Knda" typeface="Tunga"/>
+        <a:font script="Guru" typeface="Raavi"/>
+        <a:font script="Cans" typeface="Euphemia"/>
+        <a:font script="Cher" typeface="Plantagenet Cherokee"/>
+        <a:font script="Yiii" typeface="Microsoft Yi Baiti"/>
+        <a:font script="Tibt" typeface="Microsoft Himalaya"/>
+        <a:font script="Thaa" typeface="MV Boli"/>
+        <a:font script="Deva" typeface="Mangal"/>
+        <a:font script="Telu" typeface="Gautami"/>
+        <a:font script="Taml" typeface="Latha"/>
+        <a:font script="Syrc" typeface="Estrangelo Edessa"/>
+        <a:font script="Orya" typeface="Kalinga"/>
+        <a:font script="Mlym" typeface="Kartika"/>
+        <a:font script="Laoo" typeface="DokChampa"/>
+        <a:font script="Sinh" typeface="Iskoola Pota"/>
+        <a:font script="Mong" typeface="Mongolian Baiti"/>
+        <a:font script="Viet" typeface="Times New Roman"/>
+        <a:font script="Uigh" typeface="Microsoft Uighur"/>
+        <a:font script="Geor" typeface="Sylfaen"/>
+        <a:font script="Armn" typeface="Arial"/>
+        <a:font script="Bugi" typeface="Leelawadee UI"/>
+        <a:font script="Bopo" typeface="Microsoft JhengHei"/>
+        <a:font script="Java" typeface="Javanese Text"/>
+        <a:font script="Lisu" typeface="Segoe UI"/>
+        <a:font script="Mymr" typeface="Myanmar Text"/>
+        <a:font script="Nkoo" typeface="Ebrima"/>
+        <a:font script="Olck" typeface="Nirmala UI"/>
+        <a:font script="Osma" typeface="Ebrima"/>
+        <a:font script="Phag" typeface="Phagspa"/>
+        <a:font script="Syrn" typeface="Estrangelo Edessa"/>
+        <a:font script="Syrj" typeface="Estrangelo Edessa"/>
+        <a:font script="Syre" typeface="Estrangelo Edessa"/>
+        <a:font script="Sora" typeface="Nirmala UI"/>
+        <a:font script="Tale" typeface="Microsoft Tai Le"/>
+        <a:font script="Talu" typeface="Microsoft New Tai Lue"/>
+        <a:font script="Tfng" typeface="Ebrima"/>
+      </a:majorFont>
+      <a:minorFont>
+        <a:latin typeface="Aptos" panose="02110004020202020204"/>
+        <a:ea typeface=""/>
+        <a:cs typeface=""/>
+        <a:font script="Jpan" typeface="游ゴシック"/>
+        <a:font script="Hang" typeface="맑은 고딕"/>
+        <a:font script="Hans" typeface="等线"/>
+        <a:font script="Hant" typeface="新細明體"/>
+        <a:font script="Arab" typeface="Arial"/>
+        <a:font script="Hebr" typeface="Arial"/>
+        <a:font script="Thai" typeface="Cordia New"/>
+        <a:font script="Ethi" typeface="Nyala"/>
+        <a:font script="Beng" typeface="Vrinda"/>
+        <a:font script="Gujr" typeface="Shruti"/>
+        <a:font script="Khmr" typeface="DaunPenh"/>
+        <a:font script="Knda" typeface="Tunga"/>
+        <a:font script="Guru" typeface="Raavi"/>
+        <a:font script="Cans" typeface="Euphemia"/>
+        <a:font script="Cher" typeface="Plantagenet Cherokee"/>
+        <a:font script="Yiii" typeface="Microsoft Yi Baiti"/>
+        <a:font script="Tibt" typeface="Microsoft Himalaya"/>
+        <a:font script="Thaa" typeface="MV Boli"/>
+        <a:font script="Deva" typeface="Mangal"/>
+        <a:font script="Telu" typeface="Gautami"/>
+        <a:font script="Taml" typeface="Latha"/>
+        <a:font script="Syrc" typeface="Estrangelo Edessa"/>
+        <a:font script="Orya" typeface="Kalinga"/>
+        <a:font script="Mlym" typeface="Kartika"/>
+        <a:font script="Laoo" typeface="DokChampa"/>
+        <a:font script="Sinh" typeface="Iskoola Pota"/>
+        <a:font script="Mong" typeface="Mongolian Baiti"/>
+        <a:font script="Viet" typeface="Arial"/>
+        <a:font script="Uigh" typeface="Microsoft Uighur"/>
+        <a:font script="Geor" typeface="Sylfaen"/>
+        <a:font script="Armn" typeface="Arial"/>
+        <a:font script="Bugi" typeface="Leelawadee UI"/>
+        <a:font script="Bopo" typeface="Microsoft JhengHei"/>
+        <a:font script="Java" typeface="Javanese Text"/>
+        <a:font script="Lisu" typeface="Segoe UI"/>
+        <a:font script="Mymr" typeface="Myanmar Text"/>
+        <a:font script="Nkoo" typeface="Ebrima"/>
+        <a:font script="Olck" typeface="Nirmala UI"/>
+        <a:font script="Osma" typeface="Ebrima"/>
+        <a:font script="Phag" typeface="Phagspa"/>
+        <a:font script="Syrn" typeface="Estrangelo Edessa"/>
+        <a:font script="Syrj" typeface="Estrangelo Edessa"/>
+        <a:font script="Syre" typeface="Estrangelo Edessa"/>
+        <a:font script="Sora" typeface="Nirmala UI"/>
+        <a:font script="Tale" typeface="Microsoft Tai Le"/>
+        <a:font script="Talu" typeface="Microsoft New Tai Lue"/>
+        <a:font script="Tfng" typeface="Ebrima"/>
+      </a:minorFont>
+    </a:fontScheme>
+    <a:fmtScheme name="Office">
+      <a:fillStyleLst>
+        <a:solidFill>
+          <a:schemeClr val="phClr"/>
+        </a:solidFill>
+        <a:gradFill rotWithShape="1">
+          <a:gsLst>
+            <a:gs pos="0">
+              <a:schemeClr val="phClr">
+                <a:lumMod val="110000"/>
+                <a:satMod val="105000"/>
+                <a:tint val="67000"/>
+              </a:schemeClr>
+            </a:gs>
+            <a:gs pos="50000">
+              <a:schemeClr val="phClr">
+                <a:lumMod val="105000"/>
+                <a:satMod val="103000"/>
+                <a:tint val="73000"/>
+              </a:schemeClr>
+            </a:gs>
+            <a:gs pos="100000">
+              <a:schemeClr val="phClr">
+                <a:lumMod val="105000"/>
+                <a:satMod val="109000"/>
+                <a:tint val="81000"/>
+              </a:schemeClr>
+            </a:gs>
+          </a:gsLst>
+          <a:lin ang="5400000" scaled="0"/>
+        </a:gradFill>
+        <a:gradFill rotWithShape="1">
+          <a:gsLst>
+            <a:gs pos="0">
+              <a:schemeClr val="phClr">
+                <a:satMod val="103000"/>
+                <a:lumMod val="102000"/>
+                <a:tint val="94000"/>
+              </a:schemeClr>
+            </a:gs>
+            <a:gs pos="50000">
+              <a:schemeClr val="phClr">
+                <a:satMod val="110000"/>
+                <a:lumMod val="100000"/>
+                <a:shade val="100000"/>
+              </a:schemeClr>
+            </a:gs>
+            <a:gs pos="100000">
+              <a:schemeClr val="phClr">
+                <a:lumMod val="99000"/>
+                <a:satMod val="120000"/>
+                <a:shade val="78000"/>
+              </a:schemeClr>
+            </a:gs>
+          </a:gsLst>
+          <a:lin ang="5400000" scaled="0"/>
+        </a:gradFill>
+      </a:fillStyleLst>
+      <a:lnStyleLst>
+        <a:ln w="12700" cap="flat" cmpd="sng" algn="ctr">
+          <a:solidFill>
+            <a:schemeClr val="phClr"/>
+          </a:solidFill>
+          <a:prstDash val="solid"/>
+          <a:miter lim="800000"/>
+        </a:ln>
+        <a:ln w="19050" cap="flat" cmpd="sng" algn="ctr">
+          <a:solidFill>
+            <a:schemeClr val="phClr"/>
+          </a:solidFill>
+          <a:prstDash val="solid"/>
+          <a:miter lim="800000"/>
+        </a:ln>
+        <a:ln w="25400" cap="flat" cmpd="sng" algn="ctr">
+          <a:solidFill>
+            <a:schemeClr val="phClr"/>
+          </a:solidFill>
+          <a:prstDash val="solid"/>
+          <a:miter lim="800000"/>
+        </a:ln>
+      </a:lnStyleLst>
+      <a:effectStyleLst>
+        <a:effectStyle>
+          <a:effectLst/>
+        </a:effectStyle>
+        <a:effectStyle>
+          <a:effectLst/>
+        </a:effectStyle>
+        <a:effectStyle>
+          <a:effectLst>
+            <a:outerShdw blurRad="57150" dist="19050" dir="5400000" algn="ctr" rotWithShape="0">
+              <a:srgbClr val="000000">
+                <a:alpha val="63000"/>
+              </a:srgbClr>
+            </a:outerShdw>
+          </a:effectLst>
+        </a:effectStyle>
+      </a:effectStyleLst>
+      <a:bgFillStyleLst>
+        <a:solidFill>
+          <a:schemeClr val="phClr"/>
+        </a:solidFill>
+        <a:solidFill>
+          <a:schemeClr val="phClr">
+            <a:tint val="95000"/>
+            <a:satMod val="170000"/>
+          </a:schemeClr>
+        </a:solidFill>
+        <a:gradFill rotWithShape="1">
+          <a:gsLst>
+            <a:gs pos="0">
+              <a:schemeClr val="phClr">
+                <a:tint val="93000"/>
+                <a:satMod val="150000"/>
+                <a:shade val="98000"/>
+                <a:lumMod val="102000"/>
+              </a:schemeClr>
+            </a:gs>
+            <a:gs pos="50000">
+              <a:schemeClr val="phClr">
+                <a:tint val="98000"/>
+                <a:satMod val="130000"/>
+                <a:shade val="90000"/>
+                <a:lumMod val="103000"/>
+              </a:schemeClr>
+            </a:gs>
+            <a:gs pos="100000">
+              <a:schemeClr val="phClr">
+                <a:shade val="63000"/>
+                <a:satMod val="120000"/>
+              </a:schemeClr>
+            </a:gs>
+          </a:gsLst>
+          <a:lin ang="5400000" scaled="0"/>
+        </a:gradFill>
+      </a:bgFillStyleLst>
+    </a:fmtScheme>
+  </a:themeElements>
+  <a:objectDefaults>
+    <a:lnDef>
+      <a:spPr/>
+      <a:bodyPr/>
+      <a:lstStyle/>
+      <a:style>
+        <a:lnRef idx="2">
+          <a:schemeClr val="accent1"/>
+        </a:lnRef>
+        <a:fillRef idx="0">
+          <a:schemeClr val="accent1"/>
+        </a:fillRef>
+        <a:effectRef idx="1">
+          <a:schemeClr val="accent1"/>
+        </a:effectRef>
+        <a:fontRef idx="minor">
+          <a:schemeClr val="tx1"/>
+        </a:fontRef>
+      </a:style>
+    </a:lnDef>
+  </a:objectDefaults>
+  <a:extraClrSchemeLst/>
+  <a:extLst>
+    <a:ext uri="{05A4C25C-085E-4340-85A3-A5531E510DB2}">
+      <thm15:themeFamily xmlns:thm15="http://schemas.microsoft.com/office/thememl/2012/main" name="Office Theme" id="{2E142A2C-CD16-42D6-873A-C26D2A0506FA}" vid="{1BDDFF52-6CD6-40A5-AB3C-68EB2F1E4D0A}"/>
+    </a:ext>
+  </a:extLst>
+</a:theme>
 </file>
--- a/Current Presentation/Spring 2026.pptx
+++ b/Current Presentation/Spring 2026.pptx
@@ -536,7 +536,27 @@
           <a:bodyPr/>
           <a:lstStyle/>
           <a:p>
-            <a:endParaRPr lang="en-US" dirty="0"/>
+            <a:pPr marL="0" marR="0" lvl="0" indent="0" algn="l" defTabSz="914400" rtl="0" eaLnBrk="1" fontAlgn="auto" latinLnBrk="0" hangingPunct="1">
+              <a:lnSpc>
+                <a:spcPct val="100000"/>
+              </a:lnSpc>
+              <a:spcBef>
+                <a:spcPts val="0"/>
+              </a:spcBef>
+              <a:spcAft>
+                <a:spcPts val="0"/>
+              </a:spcAft>
+              <a:buClrTx/>
+              <a:buSzTx/>
+              <a:buFontTx/>
+              <a:buNone/>
+              <a:tabLst/>
+              <a:defRPr/>
+            </a:pPr>
+            <a:r>
+              <a:rPr lang="en-US"/>
+              <a:t>After third debugging, say the “those are my 3” joke</a:t>
+            </a:r>
           </a:p>
         </p:txBody>
       </p:sp>

--- a/Current Presentation/Spring 2026.pptx
+++ b/Current Presentation/Spring 2026.pptx
@@ -554,7 +554,7 @@
               <a:defRPr/>
             </a:pPr>
             <a:r>
-              <a:rPr lang="en-US"/>
+              <a:rPr lang="en-US" dirty="0"/>
               <a:t>After third debugging, say the “those are my 3” joke</a:t>
             </a:r>
           </a:p>
@@ -7739,22 +7739,39 @@
           <a:p>
             <a:pPr lvl="3"/>
             <a:r>
-              <a:rPr lang="en-US" dirty="0" err="1"/>
-              <a:t>Debuging</a:t>
-            </a:r>
-            <a:endParaRPr lang="en-US" dirty="0"/>
+              <a:rPr lang="en-US" dirty="0"/>
+              <a:t>Debugging</a:t>
+            </a:r>
           </a:p>
           <a:p>
             <a:pPr lvl="3"/>
             <a:r>
-              <a:rPr lang="en-US" dirty="0" err="1"/>
-              <a:t>Debuging</a:t>
-            </a:r>
-            <a:endParaRPr lang="en-US" dirty="0"/>
-          </a:p>
-          <a:p>
-            <a:pPr lvl="3"/>
-            <a:endParaRPr lang="en-US" dirty="0"/>
+              <a:rPr lang="en-US" dirty="0"/>
+              <a:t>Debugging</a:t>
+            </a:r>
+          </a:p>
+          <a:p>
+            <a:pPr marL="914400" lvl="2" indent="0">
+              <a:buNone/>
+            </a:pPr>
+            <a:r>
+              <a:rPr lang="en-US" dirty="0"/>
+              <a:t>Okay, in all seriousness</a:t>
+            </a:r>
+          </a:p>
+          <a:p>
+            <a:pPr lvl="2"/>
+            <a:r>
+              <a:rPr lang="en-US" dirty="0"/>
+              <a:t>Critical Thinking</a:t>
+            </a:r>
+          </a:p>
+          <a:p>
+            <a:pPr lvl="2"/>
+            <a:r>
+              <a:rPr lang="en-US" dirty="0"/>
+              <a:t>Trial and Error</a:t>
+            </a:r>
           </a:p>
         </p:txBody>
       </p:sp>

--- a/Current Presentation/Spring 2026.pptx
+++ b/Current Presentation/Spring 2026.pptx
@@ -7692,7 +7692,9 @@
         </p:nvSpPr>
         <p:spPr/>
         <p:txBody>
-          <a:bodyPr/>
+          <a:bodyPr>
+            <a:normAutofit lnSpcReduction="10000"/>
+          </a:bodyPr>
           <a:lstStyle/>
           <a:p>
             <a:r>
@@ -7772,6 +7774,24 @@
               <a:rPr lang="en-US" dirty="0"/>
               <a:t>Trial and Error</a:t>
             </a:r>
+          </a:p>
+          <a:p>
+            <a:pPr lvl="2"/>
+            <a:endParaRPr lang="en-US" dirty="0"/>
+          </a:p>
+          <a:p>
+            <a:pPr marL="0" indent="0">
+              <a:buNone/>
+            </a:pPr>
+            <a:r>
+              <a:rPr lang="en-US" dirty="0"/>
+              <a:t>As for what I gained, it’s mostly just more knowledge, </a:t>
+            </a:r>
+            <a:r>
+              <a:rPr lang="en-US"/>
+              <a:t>in this case about SQL</a:t>
+            </a:r>
+            <a:endParaRPr lang="en-US" dirty="0"/>
           </a:p>
         </p:txBody>
       </p:sp>

--- a/Current Presentation/Spring 2026.pptx
+++ b/Current Presentation/Spring 2026.pptx
@@ -7785,16 +7785,47 @@
             </a:pPr>
             <a:r>
               <a:rPr lang="en-US" dirty="0"/>
-              <a:t>As for what I gained, it’s mostly just more knowledge, </a:t>
-            </a:r>
-            <a:r>
-              <a:rPr lang="en-US"/>
-              <a:t>in this case about SQL</a:t>
-            </a:r>
-            <a:endParaRPr lang="en-US" dirty="0"/>
-          </a:p>
-        </p:txBody>
-      </p:sp>
+              <a:t>As for what I gained, it’s mostly just more knowledge, in this case about SQL</a:t>
+            </a:r>
+          </a:p>
+        </p:txBody>
+      </p:sp>
+      <p:pic>
+        <p:nvPicPr>
+          <p:cNvPr id="5" name="Picture 4">
+            <a:extLst>
+              <a:ext uri="{FF2B5EF4-FFF2-40B4-BE49-F238E27FC236}">
+                <a16:creationId xmlns:a16="http://schemas.microsoft.com/office/drawing/2014/main" id="{268CADBD-0D14-3E82-8FB6-6D1B2C321A8E}"/>
+              </a:ext>
+            </a:extLst>
+          </p:cNvPr>
+          <p:cNvPicPr>
+            <a:picLocks noChangeAspect="1"/>
+          </p:cNvPicPr>
+          <p:nvPr/>
+        </p:nvPicPr>
+        <p:blipFill>
+          <a:blip r:embed="rId3">
+            <a:extLst>
+              <a:ext uri="{28A0092B-C50C-407E-A947-70E740481C1C}">
+                <a14:useLocalDpi xmlns:a14="http://schemas.microsoft.com/office/drawing/2010/main" val="0"/>
+              </a:ext>
+            </a:extLst>
+          </a:blip>
+          <a:stretch>
+            <a:fillRect/>
+          </a:stretch>
+        </p:blipFill>
+        <p:spPr>
+          <a:xfrm>
+            <a:off x="0" y="16625"/>
+            <a:ext cx="4438650" cy="2790825"/>
+          </a:xfrm>
+          <a:prstGeom prst="rect">
+            <a:avLst/>
+          </a:prstGeom>
+        </p:spPr>
+      </p:pic>
     </p:spTree>
     <p:extLst>
       <p:ext uri="{BB962C8B-B14F-4D97-AF65-F5344CB8AC3E}">

--- a/Current Presentation/Spring 2026.pptx
+++ b/Current Presentation/Spring 2026.pptx
@@ -7820,6 +7820,42 @@
           <a:xfrm>
             <a:off x="0" y="16625"/>
             <a:ext cx="4438650" cy="2790825"/>
+          </a:xfrm>
+          <a:prstGeom prst="rect">
+            <a:avLst/>
+          </a:prstGeom>
+        </p:spPr>
+      </p:pic>
+      <p:pic>
+        <p:nvPicPr>
+          <p:cNvPr id="7" name="Picture 6">
+            <a:extLst>
+              <a:ext uri="{FF2B5EF4-FFF2-40B4-BE49-F238E27FC236}">
+                <a16:creationId xmlns:a16="http://schemas.microsoft.com/office/drawing/2014/main" id="{9B92E80F-9BA9-F03F-2D1D-53D6DEDD7AFC}"/>
+              </a:ext>
+            </a:extLst>
+          </p:cNvPr>
+          <p:cNvPicPr>
+            <a:picLocks noChangeAspect="1"/>
+          </p:cNvPicPr>
+          <p:nvPr/>
+        </p:nvPicPr>
+        <p:blipFill>
+          <a:blip r:embed="rId4">
+            <a:extLst>
+              <a:ext uri="{28A0092B-C50C-407E-A947-70E740481C1C}">
+                <a14:useLocalDpi xmlns:a14="http://schemas.microsoft.com/office/drawing/2010/main" val="0"/>
+              </a:ext>
+            </a:extLst>
+          </a:blip>
+          <a:stretch>
+            <a:fillRect/>
+          </a:stretch>
+        </p:blipFill>
+        <p:spPr>
+          <a:xfrm>
+            <a:off x="5892127" y="185574"/>
+            <a:ext cx="4160595" cy="2450625"/>
           </a:xfrm>
           <a:prstGeom prst="rect">
             <a:avLst/>

--- a/Current Presentation/Spring 2026.pptx
+++ b/Current Presentation/Spring 2026.pptx
@@ -7856,6 +7856,42 @@
           <a:xfrm>
             <a:off x="5892127" y="185574"/>
             <a:ext cx="4160595" cy="2450625"/>
+          </a:xfrm>
+          <a:prstGeom prst="rect">
+            <a:avLst/>
+          </a:prstGeom>
+        </p:spPr>
+      </p:pic>
+      <p:pic>
+        <p:nvPicPr>
+          <p:cNvPr id="13" name="Picture 12">
+            <a:extLst>
+              <a:ext uri="{FF2B5EF4-FFF2-40B4-BE49-F238E27FC236}">
+                <a16:creationId xmlns:a16="http://schemas.microsoft.com/office/drawing/2014/main" id="{9601D1C5-433B-BD80-E198-A22441EEC8BF}"/>
+              </a:ext>
+            </a:extLst>
+          </p:cNvPr>
+          <p:cNvPicPr>
+            <a:picLocks noChangeAspect="1"/>
+          </p:cNvPicPr>
+          <p:nvPr/>
+        </p:nvPicPr>
+        <p:blipFill>
+          <a:blip r:embed="rId5">
+            <a:extLst>
+              <a:ext uri="{28A0092B-C50C-407E-A947-70E740481C1C}">
+                <a14:useLocalDpi xmlns:a14="http://schemas.microsoft.com/office/drawing/2010/main" val="0"/>
+              </a:ext>
+            </a:extLst>
+          </a:blip>
+          <a:stretch>
+            <a:fillRect/>
+          </a:stretch>
+        </p:blipFill>
+        <p:spPr>
+          <a:xfrm>
+            <a:off x="0" y="3151927"/>
+            <a:ext cx="4709517" cy="2790825"/>
           </a:xfrm>
           <a:prstGeom prst="rect">
             <a:avLst/>

--- a/Current Presentation/Spring 2026.pptx
+++ b/Current Presentation/Spring 2026.pptx
@@ -7892,6 +7892,42 @@
           <a:xfrm>
             <a:off x="0" y="3151927"/>
             <a:ext cx="4709517" cy="2790825"/>
+          </a:xfrm>
+          <a:prstGeom prst="rect">
+            <a:avLst/>
+          </a:prstGeom>
+        </p:spPr>
+      </p:pic>
+      <p:pic>
+        <p:nvPicPr>
+          <p:cNvPr id="15" name="Picture 14">
+            <a:extLst>
+              <a:ext uri="{FF2B5EF4-FFF2-40B4-BE49-F238E27FC236}">
+                <a16:creationId xmlns:a16="http://schemas.microsoft.com/office/drawing/2014/main" id="{D2864FA8-4E29-92DD-13C5-D334BE828B6C}"/>
+              </a:ext>
+            </a:extLst>
+          </p:cNvPr>
+          <p:cNvPicPr>
+            <a:picLocks noChangeAspect="1"/>
+          </p:cNvPicPr>
+          <p:nvPr/>
+        </p:nvPicPr>
+        <p:blipFill>
+          <a:blip r:embed="rId6">
+            <a:extLst>
+              <a:ext uri="{28A0092B-C50C-407E-A947-70E740481C1C}">
+                <a14:useLocalDpi xmlns:a14="http://schemas.microsoft.com/office/drawing/2010/main" val="0"/>
+              </a:ext>
+            </a:extLst>
+          </a:blip>
+          <a:stretch>
+            <a:fillRect/>
+          </a:stretch>
+        </p:blipFill>
+        <p:spPr>
+          <a:xfrm>
+            <a:off x="5429157" y="2833604"/>
+            <a:ext cx="1333686" cy="1190791"/>
           </a:xfrm>
           <a:prstGeom prst="rect">
             <a:avLst/>

--- a/Current Presentation/Spring 2026.pptx
+++ b/Current Presentation/Spring 2026.pptx
@@ -7785,13 +7785,8 @@
             </a:pPr>
             <a:r>
               <a:rPr lang="en-US" dirty="0"/>
-              <a:t>As for what I gained, it’s mostly just more knowledge, </a:t>
-            </a:r>
-            <a:r>
-              <a:rPr lang="en-US"/>
-              <a:t>in this case about SQL</a:t>
-            </a:r>
-            <a:endParaRPr lang="en-US" dirty="0"/>
+              <a:t>As for what I gained, it’s mostly just more knowledge, in this case about SQL</a:t>
+            </a:r>
           </a:p>
         </p:txBody>
       </p:sp>

--- a/Current Presentation/Spring 2026.pptx
+++ b/Current Presentation/Spring 2026.pptx
@@ -5,11 +5,12 @@
     <p:sldMasterId id="2147483660" r:id="rId1"/>
   </p:sldMasterIdLst>
   <p:notesMasterIdLst>
-    <p:notesMasterId r:id="rId4"/>
+    <p:notesMasterId r:id="rId5"/>
   </p:notesMasterIdLst>
   <p:sldIdLst>
     <p:sldId id="260" r:id="rId2"/>
     <p:sldId id="261" r:id="rId3"/>
+    <p:sldId id="262" r:id="rId4"/>
   </p:sldIdLst>
   <p:sldSz cx="12192000" cy="6858000"/>
   <p:notesSz cx="6858000" cy="9144000"/>
@@ -7794,6 +7795,93 @@
     <p:extLst>
       <p:ext uri="{BB962C8B-B14F-4D97-AF65-F5344CB8AC3E}">
         <p14:creationId xmlns:p14="http://schemas.microsoft.com/office/powerpoint/2010/main" val="1734690963"/>
+      </p:ext>
+    </p:extLst>
+  </p:cSld>
+  <p:clrMapOvr>
+    <a:masterClrMapping/>
+  </p:clrMapOvr>
+</p:sld>
+</file>
+
+<file path=ppt/slides/slide3.xml><?xml version="1.0" encoding="utf-8"?>
+<p:sld xmlns:a="http://schemas.openxmlformats.org/drawingml/2006/main" xmlns:r="http://schemas.openxmlformats.org/officeDocument/2006/relationships" xmlns:p="http://schemas.openxmlformats.org/presentationml/2006/main">
+  <p:cSld>
+    <p:spTree>
+      <p:nvGrpSpPr>
+        <p:cNvPr id="1" name=""/>
+        <p:cNvGrpSpPr/>
+        <p:nvPr/>
+      </p:nvGrpSpPr>
+      <p:grpSpPr>
+        <a:xfrm>
+          <a:off x="0" y="0"/>
+          <a:ext cx="0" cy="0"/>
+          <a:chOff x="0" y="0"/>
+          <a:chExt cx="0" cy="0"/>
+        </a:xfrm>
+      </p:grpSpPr>
+      <p:sp>
+        <p:nvSpPr>
+          <p:cNvPr id="2" name="Title 1">
+            <a:extLst>
+              <a:ext uri="{FF2B5EF4-FFF2-40B4-BE49-F238E27FC236}">
+                <a16:creationId xmlns:a16="http://schemas.microsoft.com/office/drawing/2014/main" id="{D4985CBC-A8D3-D568-87AE-62116BA26CA4}"/>
+              </a:ext>
+            </a:extLst>
+          </p:cNvPr>
+          <p:cNvSpPr>
+            <a:spLocks noGrp="1"/>
+          </p:cNvSpPr>
+          <p:nvPr>
+            <p:ph type="title"/>
+          </p:nvPr>
+        </p:nvSpPr>
+        <p:spPr/>
+        <p:txBody>
+          <a:bodyPr/>
+          <a:lstStyle/>
+          <a:p>
+            <a:r>
+              <a:rPr lang="en-US" dirty="0"/>
+              <a:t>Core</a:t>
+            </a:r>
+            <a:r>
+              <a:rPr lang="en-US"/>
+              <a:t>: Community</a:t>
+            </a:r>
+          </a:p>
+        </p:txBody>
+      </p:sp>
+      <p:sp>
+        <p:nvSpPr>
+          <p:cNvPr id="3" name="Content Placeholder 2">
+            <a:extLst>
+              <a:ext uri="{FF2B5EF4-FFF2-40B4-BE49-F238E27FC236}">
+                <a16:creationId xmlns:a16="http://schemas.microsoft.com/office/drawing/2014/main" id="{DE574F07-D8D0-C8B1-0C37-1C3C8D8A70F7}"/>
+              </a:ext>
+            </a:extLst>
+          </p:cNvPr>
+          <p:cNvSpPr>
+            <a:spLocks noGrp="1"/>
+          </p:cNvSpPr>
+          <p:nvPr>
+            <p:ph idx="1"/>
+          </p:nvPr>
+        </p:nvSpPr>
+        <p:spPr/>
+        <p:txBody>
+          <a:bodyPr/>
+          <a:lstStyle/>
+          <a:p>
+            <a:endParaRPr lang="en-US"/>
+          </a:p>
+        </p:txBody>
+      </p:sp>
+    </p:spTree>
+    <p:extLst>
+      <p:ext uri="{BB962C8B-B14F-4D97-AF65-F5344CB8AC3E}">
+        <p14:creationId xmlns:p14="http://schemas.microsoft.com/office/powerpoint/2010/main" val="535240141"/>
       </p:ext>
     </p:extLst>
   </p:cSld>

--- a/Current Presentation/Spring 2026.pptx
+++ b/Current Presentation/Spring 2026.pptx
@@ -226,7 +226,7 @@
           <a:p>
             <a:fld id="{BFAFE299-D31D-47C2-B46C-C3B1749D6A86}" type="datetimeFigureOut">
               <a:rPr lang="en-US" smtClean="0"/>
-              <a:t>6/17/2026</a:t>
+              <a:t>6/18/2026</a:t>
             </a:fld>
             <a:endParaRPr lang="en-US"/>
           </a:p>
@@ -767,7 +767,7 @@
           <a:p>
             <a:fld id="{3001F3D3-B64E-45E5-A774-FFEE7077F3D9}" type="datetimeFigureOut">
               <a:rPr lang="en-US" smtClean="0"/>
-              <a:t>6/17/2026</a:t>
+              <a:t>6/18/2026</a:t>
             </a:fld>
             <a:endParaRPr lang="en-US"/>
           </a:p>
@@ -1034,7 +1034,7 @@
           <a:p>
             <a:fld id="{3001F3D3-B64E-45E5-A774-FFEE7077F3D9}" type="datetimeFigureOut">
               <a:rPr lang="en-US" smtClean="0"/>
-              <a:t>6/17/2026</a:t>
+              <a:t>6/18/2026</a:t>
             </a:fld>
             <a:endParaRPr lang="en-US"/>
           </a:p>
@@ -1265,7 +1265,7 @@
           <a:p>
             <a:fld id="{3001F3D3-B64E-45E5-A774-FFEE7077F3D9}" type="datetimeFigureOut">
               <a:rPr lang="en-US" smtClean="0"/>
-              <a:t>6/17/2026</a:t>
+              <a:t>6/18/2026</a:t>
             </a:fld>
             <a:endParaRPr lang="en-US"/>
           </a:p>
@@ -1575,7 +1575,7 @@
           <a:p>
             <a:fld id="{3001F3D3-B64E-45E5-A774-FFEE7077F3D9}" type="datetimeFigureOut">
               <a:rPr lang="en-US" smtClean="0"/>
-              <a:t>6/17/2026</a:t>
+              <a:t>6/18/2026</a:t>
             </a:fld>
             <a:endParaRPr lang="en-US"/>
           </a:p>
@@ -2048,7 +2048,7 @@
           <a:p>
             <a:fld id="{3001F3D3-B64E-45E5-A774-FFEE7077F3D9}" type="datetimeFigureOut">
               <a:rPr lang="en-US" smtClean="0"/>
-              <a:t>6/17/2026</a:t>
+              <a:t>6/18/2026</a:t>
             </a:fld>
             <a:endParaRPr lang="en-US"/>
           </a:p>
@@ -2595,7 +2595,7 @@
           <a:p>
             <a:fld id="{3001F3D3-B64E-45E5-A774-FFEE7077F3D9}" type="datetimeFigureOut">
               <a:rPr lang="en-US" smtClean="0"/>
-              <a:t>6/17/2026</a:t>
+              <a:t>6/18/2026</a:t>
             </a:fld>
             <a:endParaRPr lang="en-US"/>
           </a:p>
@@ -3369,7 +3369,7 @@
           <a:p>
             <a:fld id="{3001F3D3-B64E-45E5-A774-FFEE7077F3D9}" type="datetimeFigureOut">
               <a:rPr lang="en-US" smtClean="0"/>
-              <a:t>6/17/2026</a:t>
+              <a:t>6/18/2026</a:t>
             </a:fld>
             <a:endParaRPr lang="en-US"/>
           </a:p>
@@ -3544,7 +3544,7 @@
           <a:p>
             <a:fld id="{3001F3D3-B64E-45E5-A774-FFEE7077F3D9}" type="datetimeFigureOut">
               <a:rPr lang="en-US" smtClean="0"/>
-              <a:t>6/17/2026</a:t>
+              <a:t>6/18/2026</a:t>
             </a:fld>
             <a:endParaRPr lang="en-US"/>
           </a:p>
@@ -3767,7 +3767,7 @@
           <a:p>
             <a:fld id="{3001F3D3-B64E-45E5-A774-FFEE7077F3D9}" type="datetimeFigureOut">
               <a:rPr lang="en-US" smtClean="0"/>
-              <a:t>6/17/2026</a:t>
+              <a:t>6/18/2026</a:t>
             </a:fld>
             <a:endParaRPr lang="en-US"/>
           </a:p>
@@ -3947,7 +3947,7 @@
           <a:p>
             <a:fld id="{3001F3D3-B64E-45E5-A774-FFEE7077F3D9}" type="datetimeFigureOut">
               <a:rPr lang="en-US" smtClean="0"/>
-              <a:t>6/17/2026</a:t>
+              <a:t>6/18/2026</a:t>
             </a:fld>
             <a:endParaRPr lang="en-US"/>
           </a:p>
@@ -4236,7 +4236,7 @@
           <a:p>
             <a:fld id="{3001F3D3-B64E-45E5-A774-FFEE7077F3D9}" type="datetimeFigureOut">
               <a:rPr lang="en-US" smtClean="0"/>
-              <a:t>6/17/2026</a:t>
+              <a:t>6/18/2026</a:t>
             </a:fld>
             <a:endParaRPr lang="en-US"/>
           </a:p>
@@ -4478,7 +4478,7 @@
           <a:p>
             <a:fld id="{3001F3D3-B64E-45E5-A774-FFEE7077F3D9}" type="datetimeFigureOut">
               <a:rPr lang="en-US" smtClean="0"/>
-              <a:t>6/17/2026</a:t>
+              <a:t>6/18/2026</a:t>
             </a:fld>
             <a:endParaRPr lang="en-US"/>
           </a:p>
@@ -4857,7 +4857,7 @@
           <a:p>
             <a:fld id="{3001F3D3-B64E-45E5-A774-FFEE7077F3D9}" type="datetimeFigureOut">
               <a:rPr lang="en-US" smtClean="0"/>
-              <a:t>6/17/2026</a:t>
+              <a:t>6/18/2026</a:t>
             </a:fld>
             <a:endParaRPr lang="en-US"/>
           </a:p>
@@ -4975,7 +4975,7 @@
           <a:p>
             <a:fld id="{3001F3D3-B64E-45E5-A774-FFEE7077F3D9}" type="datetimeFigureOut">
               <a:rPr lang="en-US" smtClean="0"/>
-              <a:t>6/17/2026</a:t>
+              <a:t>6/18/2026</a:t>
             </a:fld>
             <a:endParaRPr lang="en-US"/>
           </a:p>
@@ -5070,7 +5070,7 @@
           <a:p>
             <a:fld id="{3001F3D3-B64E-45E5-A774-FFEE7077F3D9}" type="datetimeFigureOut">
               <a:rPr lang="en-US" smtClean="0"/>
-              <a:t>6/17/2026</a:t>
+              <a:t>6/18/2026</a:t>
             </a:fld>
             <a:endParaRPr lang="en-US"/>
           </a:p>
@@ -5319,7 +5319,7 @@
           <a:p>
             <a:fld id="{3001F3D3-B64E-45E5-A774-FFEE7077F3D9}" type="datetimeFigureOut">
               <a:rPr lang="en-US" smtClean="0"/>
-              <a:t>6/17/2026</a:t>
+              <a:t>6/18/2026</a:t>
             </a:fld>
             <a:endParaRPr lang="en-US"/>
           </a:p>
@@ -5576,7 +5576,7 @@
           <a:p>
             <a:fld id="{3001F3D3-B64E-45E5-A774-FFEE7077F3D9}" type="datetimeFigureOut">
               <a:rPr lang="en-US" smtClean="0"/>
-              <a:t>6/17/2026</a:t>
+              <a:t>6/18/2026</a:t>
             </a:fld>
             <a:endParaRPr lang="en-US"/>
           </a:p>
@@ -5819,7 +5819,7 @@
           <a:p>
             <a:fld id="{3001F3D3-B64E-45E5-A774-FFEE7077F3D9}" type="datetimeFigureOut">
               <a:rPr lang="en-US" smtClean="0"/>
-              <a:t>6/17/2026</a:t>
+              <a:t>6/18/2026</a:t>
             </a:fld>
             <a:endParaRPr lang="en-US"/>
           </a:p>

--- a/Current Presentation/Spring 2026.pptx
+++ b/Current Presentation/Spring 2026.pptx
@@ -226,7 +226,7 @@
           <a:p>
             <a:fld id="{BFAFE299-D31D-47C2-B46C-C3B1749D6A86}" type="datetimeFigureOut">
               <a:rPr lang="en-US" smtClean="0"/>
-              <a:t>6/17/2026</a:t>
+              <a:t>6/18/2026</a:t>
             </a:fld>
             <a:endParaRPr lang="en-US"/>
           </a:p>
@@ -597,6 +597,90 @@
 </p:notes>
 </file>
 
+<file path=ppt/notesSlides/notesSlide2.xml><?xml version="1.0" encoding="utf-8"?>
+<p:notes xmlns:a="http://schemas.openxmlformats.org/drawingml/2006/main" xmlns:r="http://schemas.openxmlformats.org/officeDocument/2006/relationships" xmlns:p="http://schemas.openxmlformats.org/presentationml/2006/main">
+  <p:cSld>
+    <p:spTree>
+      <p:nvGrpSpPr>
+        <p:cNvPr id="1" name=""/>
+        <p:cNvGrpSpPr/>
+        <p:nvPr/>
+      </p:nvGrpSpPr>
+      <p:grpSpPr>
+        <a:xfrm>
+          <a:off x="0" y="0"/>
+          <a:ext cx="0" cy="0"/>
+          <a:chOff x="0" y="0"/>
+          <a:chExt cx="0" cy="0"/>
+        </a:xfrm>
+      </p:grpSpPr>
+      <p:sp>
+        <p:nvSpPr>
+          <p:cNvPr id="2" name="Slide Image Placeholder 1"/>
+          <p:cNvSpPr>
+            <a:spLocks noGrp="1" noRot="1" noChangeAspect="1"/>
+          </p:cNvSpPr>
+          <p:nvPr>
+            <p:ph type="sldImg"/>
+          </p:nvPr>
+        </p:nvSpPr>
+        <p:spPr/>
+      </p:sp>
+      <p:sp>
+        <p:nvSpPr>
+          <p:cNvPr id="3" name="Notes Placeholder 2"/>
+          <p:cNvSpPr>
+            <a:spLocks noGrp="1"/>
+          </p:cNvSpPr>
+          <p:nvPr>
+            <p:ph type="body" idx="1"/>
+          </p:nvPr>
+        </p:nvSpPr>
+        <p:spPr/>
+        <p:txBody>
+          <a:bodyPr/>
+          <a:lstStyle/>
+          <a:p>
+            <a:endParaRPr lang="en-US"/>
+          </a:p>
+        </p:txBody>
+      </p:sp>
+      <p:sp>
+        <p:nvSpPr>
+          <p:cNvPr id="4" name="Slide Number Placeholder 3"/>
+          <p:cNvSpPr>
+            <a:spLocks noGrp="1"/>
+          </p:cNvSpPr>
+          <p:nvPr>
+            <p:ph type="sldNum" sz="quarter" idx="5"/>
+          </p:nvPr>
+        </p:nvSpPr>
+        <p:spPr/>
+        <p:txBody>
+          <a:bodyPr/>
+          <a:lstStyle/>
+          <a:p>
+            <a:fld id="{4BBF2809-F272-465C-B573-2DAF6CD206A2}" type="slidenum">
+              <a:rPr lang="en-US" smtClean="0"/>
+              <a:t>3</a:t>
+            </a:fld>
+            <a:endParaRPr lang="en-US"/>
+          </a:p>
+        </p:txBody>
+      </p:sp>
+    </p:spTree>
+    <p:extLst>
+      <p:ext uri="{BB962C8B-B14F-4D97-AF65-F5344CB8AC3E}">
+        <p14:creationId xmlns:p14="http://schemas.microsoft.com/office/powerpoint/2010/main" val="2187439142"/>
+      </p:ext>
+    </p:extLst>
+  </p:cSld>
+  <p:clrMapOvr>
+    <a:masterClrMapping/>
+  </p:clrMapOvr>
+</p:notes>
+</file>
+
 <file path=ppt/slideLayouts/slideLayout1.xml><?xml version="1.0" encoding="utf-8"?>
 <p:sldLayout xmlns:a="http://schemas.openxmlformats.org/drawingml/2006/main" xmlns:r="http://schemas.openxmlformats.org/officeDocument/2006/relationships" xmlns:p="http://schemas.openxmlformats.org/presentationml/2006/main" type="title" preserve="1">
   <p:cSld name="Title Slide">
@@ -767,7 +851,7 @@
           <a:p>
             <a:fld id="{3001F3D3-B64E-45E5-A774-FFEE7077F3D9}" type="datetimeFigureOut">
               <a:rPr lang="en-US" smtClean="0"/>
-              <a:t>6/17/2026</a:t>
+              <a:t>6/18/2026</a:t>
             </a:fld>
             <a:endParaRPr lang="en-US"/>
           </a:p>
@@ -1034,7 +1118,7 @@
           <a:p>
             <a:fld id="{3001F3D3-B64E-45E5-A774-FFEE7077F3D9}" type="datetimeFigureOut">
               <a:rPr lang="en-US" smtClean="0"/>
-              <a:t>6/17/2026</a:t>
+              <a:t>6/18/2026</a:t>
             </a:fld>
             <a:endParaRPr lang="en-US"/>
           </a:p>
@@ -1265,7 +1349,7 @@
           <a:p>
             <a:fld id="{3001F3D3-B64E-45E5-A774-FFEE7077F3D9}" type="datetimeFigureOut">
               <a:rPr lang="en-US" smtClean="0"/>
-              <a:t>6/17/2026</a:t>
+              <a:t>6/18/2026</a:t>
             </a:fld>
             <a:endParaRPr lang="en-US"/>
           </a:p>
@@ -1575,7 +1659,7 @@
           <a:p>
             <a:fld id="{3001F3D3-B64E-45E5-A774-FFEE7077F3D9}" type="datetimeFigureOut">
               <a:rPr lang="en-US" smtClean="0"/>
-              <a:t>6/17/2026</a:t>
+              <a:t>6/18/2026</a:t>
             </a:fld>
             <a:endParaRPr lang="en-US"/>
           </a:p>
@@ -2048,7 +2132,7 @@
           <a:p>
             <a:fld id="{3001F3D3-B64E-45E5-A774-FFEE7077F3D9}" type="datetimeFigureOut">
               <a:rPr lang="en-US" smtClean="0"/>
-              <a:t>6/17/2026</a:t>
+              <a:t>6/18/2026</a:t>
             </a:fld>
             <a:endParaRPr lang="en-US"/>
           </a:p>
@@ -2595,7 +2679,7 @@
           <a:p>
             <a:fld id="{3001F3D3-B64E-45E5-A774-FFEE7077F3D9}" type="datetimeFigureOut">
               <a:rPr lang="en-US" smtClean="0"/>
-              <a:t>6/17/2026</a:t>
+              <a:t>6/18/2026</a:t>
             </a:fld>
             <a:endParaRPr lang="en-US"/>
           </a:p>
@@ -3369,7 +3453,7 @@
           <a:p>
             <a:fld id="{3001F3D3-B64E-45E5-A774-FFEE7077F3D9}" type="datetimeFigureOut">
               <a:rPr lang="en-US" smtClean="0"/>
-              <a:t>6/17/2026</a:t>
+              <a:t>6/18/2026</a:t>
             </a:fld>
             <a:endParaRPr lang="en-US"/>
           </a:p>
@@ -3544,7 +3628,7 @@
           <a:p>
             <a:fld id="{3001F3D3-B64E-45E5-A774-FFEE7077F3D9}" type="datetimeFigureOut">
               <a:rPr lang="en-US" smtClean="0"/>
-              <a:t>6/17/2026</a:t>
+              <a:t>6/18/2026</a:t>
             </a:fld>
             <a:endParaRPr lang="en-US"/>
           </a:p>
@@ -3767,7 +3851,7 @@
           <a:p>
             <a:fld id="{3001F3D3-B64E-45E5-A774-FFEE7077F3D9}" type="datetimeFigureOut">
               <a:rPr lang="en-US" smtClean="0"/>
-              <a:t>6/17/2026</a:t>
+              <a:t>6/18/2026</a:t>
             </a:fld>
             <a:endParaRPr lang="en-US"/>
           </a:p>
@@ -3947,7 +4031,7 @@
           <a:p>
             <a:fld id="{3001F3D3-B64E-45E5-A774-FFEE7077F3D9}" type="datetimeFigureOut">
               <a:rPr lang="en-US" smtClean="0"/>
-              <a:t>6/17/2026</a:t>
+              <a:t>6/18/2026</a:t>
             </a:fld>
             <a:endParaRPr lang="en-US"/>
           </a:p>
@@ -4236,7 +4320,7 @@
           <a:p>
             <a:fld id="{3001F3D3-B64E-45E5-A774-FFEE7077F3D9}" type="datetimeFigureOut">
               <a:rPr lang="en-US" smtClean="0"/>
-              <a:t>6/17/2026</a:t>
+              <a:t>6/18/2026</a:t>
             </a:fld>
             <a:endParaRPr lang="en-US"/>
           </a:p>
@@ -4478,7 +4562,7 @@
           <a:p>
             <a:fld id="{3001F3D3-B64E-45E5-A774-FFEE7077F3D9}" type="datetimeFigureOut">
               <a:rPr lang="en-US" smtClean="0"/>
-              <a:t>6/17/2026</a:t>
+              <a:t>6/18/2026</a:t>
             </a:fld>
             <a:endParaRPr lang="en-US"/>
           </a:p>
@@ -4857,7 +4941,7 @@
           <a:p>
             <a:fld id="{3001F3D3-B64E-45E5-A774-FFEE7077F3D9}" type="datetimeFigureOut">
               <a:rPr lang="en-US" smtClean="0"/>
-              <a:t>6/17/2026</a:t>
+              <a:t>6/18/2026</a:t>
             </a:fld>
             <a:endParaRPr lang="en-US"/>
           </a:p>
@@ -4975,7 +5059,7 @@
           <a:p>
             <a:fld id="{3001F3D3-B64E-45E5-A774-FFEE7077F3D9}" type="datetimeFigureOut">
               <a:rPr lang="en-US" smtClean="0"/>
-              <a:t>6/17/2026</a:t>
+              <a:t>6/18/2026</a:t>
             </a:fld>
             <a:endParaRPr lang="en-US"/>
           </a:p>
@@ -5070,7 +5154,7 @@
           <a:p>
             <a:fld id="{3001F3D3-B64E-45E5-A774-FFEE7077F3D9}" type="datetimeFigureOut">
               <a:rPr lang="en-US" smtClean="0"/>
-              <a:t>6/17/2026</a:t>
+              <a:t>6/18/2026</a:t>
             </a:fld>
             <a:endParaRPr lang="en-US"/>
           </a:p>
@@ -5319,7 +5403,7 @@
           <a:p>
             <a:fld id="{3001F3D3-B64E-45E5-A774-FFEE7077F3D9}" type="datetimeFigureOut">
               <a:rPr lang="en-US" smtClean="0"/>
-              <a:t>6/17/2026</a:t>
+              <a:t>6/18/2026</a:t>
             </a:fld>
             <a:endParaRPr lang="en-US"/>
           </a:p>
@@ -5576,7 +5660,7 @@
           <a:p>
             <a:fld id="{3001F3D3-B64E-45E5-A774-FFEE7077F3D9}" type="datetimeFigureOut">
               <a:rPr lang="en-US" smtClean="0"/>
-              <a:t>6/17/2026</a:t>
+              <a:t>6/18/2026</a:t>
             </a:fld>
             <a:endParaRPr lang="en-US"/>
           </a:p>
@@ -5819,7 +5903,7 @@
           <a:p>
             <a:fld id="{3001F3D3-B64E-45E5-A774-FFEE7077F3D9}" type="datetimeFigureOut">
               <a:rPr lang="en-US" smtClean="0"/>
-              <a:t>6/17/2026</a:t>
+              <a:t>6/18/2026</a:t>
             </a:fld>
             <a:endParaRPr lang="en-US"/>
           </a:p>
@@ -7874,7 +7958,30 @@
           <a:bodyPr/>
           <a:lstStyle/>
           <a:p>
-            <a:endParaRPr lang="en-US"/>
+            <a:r>
+              <a:rPr lang="en-US" dirty="0"/>
+              <a:t>In community, we learned about, well, our community.</a:t>
+            </a:r>
+          </a:p>
+          <a:p>
+            <a:r>
+              <a:rPr lang="en-US" dirty="0"/>
+              <a:t>While not inherently a skill: </a:t>
+            </a:r>
+          </a:p>
+          <a:p>
+            <a:pPr lvl="1"/>
+            <a:r>
+              <a:rPr lang="en-US" dirty="0"/>
+              <a:t>I learned more about the greater Houston area</a:t>
+            </a:r>
+          </a:p>
+          <a:p>
+            <a:pPr lvl="1"/>
+            <a:r>
+              <a:rPr lang="en-US" dirty="0"/>
+              <a:t>I made a nice slideshow about Charlie Serbia called “who am I”</a:t>
+            </a:r>
           </a:p>
         </p:txBody>
       </p:sp>

--- a/Current Presentation/Spring 2026.pptx
+++ b/Current Presentation/Spring 2026.pptx
@@ -641,7 +641,18 @@
           <a:bodyPr/>
           <a:lstStyle/>
           <a:p>
-            <a:endParaRPr lang="en-US"/>
+            <a:r>
+              <a:rPr lang="en-US" dirty="0"/>
+              <a:t>for “who am you”, explain the whole “the questions where </a:t>
+            </a:r>
+            <a:r>
+              <a:rPr lang="en-US"/>
+              <a:t>in first </a:t>
+            </a:r>
+            <a:r>
+              <a:rPr lang="en-US" dirty="0"/>
+              <a:t>person</a:t>
+            </a:r>
           </a:p>
         </p:txBody>
       </p:sp>
@@ -7980,7 +7991,7 @@
             <a:pPr lvl="1"/>
             <a:r>
               <a:rPr lang="en-US" dirty="0"/>
-              <a:t>I made a nice slideshow about Charlie Serbia called “who am I”</a:t>
+              <a:t>I made a nice slideshow about Charlie Serbia called “who am you”</a:t>
             </a:r>
           </a:p>
         </p:txBody>

--- a/Current Presentation/Spring 2026.pptx
+++ b/Current Presentation/Spring 2026.pptx
@@ -643,16 +643,26 @@
           <a:p>
             <a:r>
               <a:rPr lang="en-US" dirty="0"/>
-              <a:t>for “who am you”, explain the whole “the questions where </a:t>
-            </a:r>
-            <a:r>
-              <a:rPr lang="en-US"/>
-              <a:t>in first </a:t>
-            </a:r>
+              <a:t>for “who am you”, explain the whole “the questions where in first person”</a:t>
+            </a:r>
+          </a:p>
+          <a:p>
+            <a:endParaRPr lang="en-US" dirty="0"/>
+          </a:p>
+          <a:p>
             <a:r>
               <a:rPr lang="en-US" dirty="0"/>
-              <a:t>person</a:t>
-            </a:r>
+              <a:t>Explain reason chose </a:t>
+            </a:r>
+            <a:r>
+              <a:rPr lang="en-US" dirty="0" err="1"/>
+              <a:t>shipchannel</a:t>
+            </a:r>
+            <a:r>
+              <a:rPr lang="en-US"/>
+              <a:t>?</a:t>
+            </a:r>
+            <a:endParaRPr lang="en-US" dirty="0"/>
           </a:p>
         </p:txBody>
       </p:sp>

--- a/Current Presentation/Spring 2026.pptx
+++ b/Current Presentation/Spring 2026.pptx
@@ -659,10 +659,9 @@
               <a:t>shipchannel</a:t>
             </a:r>
             <a:r>
-              <a:rPr lang="en-US"/>
+              <a:rPr lang="en-US" dirty="0"/>
               <a:t>?</a:t>
             </a:r>
-            <a:endParaRPr lang="en-US" dirty="0"/>
           </a:p>
         </p:txBody>
       </p:sp>
@@ -8003,6 +8002,17 @@
               <a:rPr lang="en-US" dirty="0"/>
               <a:t>I made a nice slideshow about Charlie Serbia called “who am you”</a:t>
             </a:r>
+          </a:p>
+          <a:p>
+            <a:r>
+              <a:rPr lang="en-US" dirty="0"/>
+              <a:t>As for how I’d use it, well, it just helps to know what’s around you so you can actually do things. Basically, less “use it” and more “add more things to </a:t>
+            </a:r>
+            <a:r>
+              <a:rPr lang="en-US"/>
+              <a:t>use skills on”</a:t>
+            </a:r>
+            <a:endParaRPr lang="en-US" dirty="0"/>
           </a:p>
         </p:txBody>
       </p:sp>

--- a/Current Presentation/Spring 2026.pptx
+++ b/Current Presentation/Spring 2026.pptx
@@ -5,12 +5,13 @@
     <p:sldMasterId id="2147483660" r:id="rId1"/>
   </p:sldMasterIdLst>
   <p:notesMasterIdLst>
-    <p:notesMasterId r:id="rId5"/>
+    <p:notesMasterId r:id="rId6"/>
   </p:notesMasterIdLst>
   <p:sldIdLst>
     <p:sldId id="260" r:id="rId2"/>
     <p:sldId id="261" r:id="rId3"/>
     <p:sldId id="262" r:id="rId4"/>
+    <p:sldId id="263" r:id="rId5"/>
   </p:sldIdLst>
   <p:sldSz cx="12192000" cy="6858000"/>
   <p:notesSz cx="6858000" cy="9144000"/>
@@ -226,7 +227,7 @@
           <a:p>
             <a:fld id="{BFAFE299-D31D-47C2-B46C-C3B1749D6A86}" type="datetimeFigureOut">
               <a:rPr lang="en-US" smtClean="0"/>
-              <a:t>6/18/2026</a:t>
+              <a:t>6/20/2026</a:t>
             </a:fld>
             <a:endParaRPr lang="en-US"/>
           </a:p>
@@ -701,6 +702,105 @@
 </p:notes>
 </file>
 
+<file path=ppt/notesSlides/notesSlide3.xml><?xml version="1.0" encoding="utf-8"?>
+<p:notes xmlns:a="http://schemas.openxmlformats.org/drawingml/2006/main" xmlns:r="http://schemas.openxmlformats.org/officeDocument/2006/relationships" xmlns:p="http://schemas.openxmlformats.org/presentationml/2006/main">
+  <p:cSld>
+    <p:spTree>
+      <p:nvGrpSpPr>
+        <p:cNvPr id="1" name=""/>
+        <p:cNvGrpSpPr/>
+        <p:nvPr/>
+      </p:nvGrpSpPr>
+      <p:grpSpPr>
+        <a:xfrm>
+          <a:off x="0" y="0"/>
+          <a:ext cx="0" cy="0"/>
+          <a:chOff x="0" y="0"/>
+          <a:chExt cx="0" cy="0"/>
+        </a:xfrm>
+      </p:grpSpPr>
+      <p:sp>
+        <p:nvSpPr>
+          <p:cNvPr id="2" name="Slide Image Placeholder 1"/>
+          <p:cNvSpPr>
+            <a:spLocks noGrp="1" noRot="1" noChangeAspect="1"/>
+          </p:cNvSpPr>
+          <p:nvPr>
+            <p:ph type="sldImg"/>
+          </p:nvPr>
+        </p:nvSpPr>
+        <p:spPr/>
+      </p:sp>
+      <p:sp>
+        <p:nvSpPr>
+          <p:cNvPr id="3" name="Notes Placeholder 2"/>
+          <p:cNvSpPr>
+            <a:spLocks noGrp="1"/>
+          </p:cNvSpPr>
+          <p:nvPr>
+            <p:ph type="body" idx="1"/>
+          </p:nvPr>
+        </p:nvSpPr>
+        <p:spPr/>
+        <p:txBody>
+          <a:bodyPr/>
+          <a:lstStyle/>
+          <a:p>
+            <a:r>
+              <a:rPr lang="en-US" dirty="0"/>
+              <a:t>More </a:t>
+            </a:r>
+            <a:r>
+              <a:rPr lang="en-US" dirty="0" err="1"/>
+              <a:t>deltais</a:t>
+            </a:r>
+            <a:r>
+              <a:rPr lang="en-US" dirty="0"/>
+              <a:t> </a:t>
+            </a:r>
+            <a:r>
+              <a:rPr lang="en-US"/>
+              <a:t>on discussions?</a:t>
+            </a:r>
+          </a:p>
+        </p:txBody>
+      </p:sp>
+      <p:sp>
+        <p:nvSpPr>
+          <p:cNvPr id="4" name="Slide Number Placeholder 3"/>
+          <p:cNvSpPr>
+            <a:spLocks noGrp="1"/>
+          </p:cNvSpPr>
+          <p:nvPr>
+            <p:ph type="sldNum" sz="quarter" idx="5"/>
+          </p:nvPr>
+        </p:nvSpPr>
+        <p:spPr/>
+        <p:txBody>
+          <a:bodyPr/>
+          <a:lstStyle/>
+          <a:p>
+            <a:fld id="{4BBF2809-F272-465C-B573-2DAF6CD206A2}" type="slidenum">
+              <a:rPr lang="en-US" smtClean="0"/>
+              <a:t>4</a:t>
+            </a:fld>
+            <a:endParaRPr lang="en-US"/>
+          </a:p>
+        </p:txBody>
+      </p:sp>
+    </p:spTree>
+    <p:extLst>
+      <p:ext uri="{BB962C8B-B14F-4D97-AF65-F5344CB8AC3E}">
+        <p14:creationId xmlns:p14="http://schemas.microsoft.com/office/powerpoint/2010/main" val="3825243562"/>
+      </p:ext>
+    </p:extLst>
+  </p:cSld>
+  <p:clrMapOvr>
+    <a:masterClrMapping/>
+  </p:clrMapOvr>
+</p:notes>
+</file>
+
 <file path=ppt/slideLayouts/slideLayout1.xml><?xml version="1.0" encoding="utf-8"?>
 <p:sldLayout xmlns:a="http://schemas.openxmlformats.org/drawingml/2006/main" xmlns:r="http://schemas.openxmlformats.org/officeDocument/2006/relationships" xmlns:p="http://schemas.openxmlformats.org/presentationml/2006/main" type="title" preserve="1">
   <p:cSld name="Title Slide">
@@ -871,7 +971,7 @@
           <a:p>
             <a:fld id="{3001F3D3-B64E-45E5-A774-FFEE7077F3D9}" type="datetimeFigureOut">
               <a:rPr lang="en-US" smtClean="0"/>
-              <a:t>6/18/2026</a:t>
+              <a:t>6/20/2026</a:t>
             </a:fld>
             <a:endParaRPr lang="en-US"/>
           </a:p>
@@ -1138,7 +1238,7 @@
           <a:p>
             <a:fld id="{3001F3D3-B64E-45E5-A774-FFEE7077F3D9}" type="datetimeFigureOut">
               <a:rPr lang="en-US" smtClean="0"/>
-              <a:t>6/18/2026</a:t>
+              <a:t>6/20/2026</a:t>
             </a:fld>
             <a:endParaRPr lang="en-US"/>
           </a:p>
@@ -1369,7 +1469,7 @@
           <a:p>
             <a:fld id="{3001F3D3-B64E-45E5-A774-FFEE7077F3D9}" type="datetimeFigureOut">
               <a:rPr lang="en-US" smtClean="0"/>
-              <a:t>6/18/2026</a:t>
+              <a:t>6/20/2026</a:t>
             </a:fld>
             <a:endParaRPr lang="en-US"/>
           </a:p>
@@ -1679,7 +1779,7 @@
           <a:p>
             <a:fld id="{3001F3D3-B64E-45E5-A774-FFEE7077F3D9}" type="datetimeFigureOut">
               <a:rPr lang="en-US" smtClean="0"/>
-              <a:t>6/18/2026</a:t>
+              <a:t>6/20/2026</a:t>
             </a:fld>
             <a:endParaRPr lang="en-US"/>
           </a:p>
@@ -2152,7 +2252,7 @@
           <a:p>
             <a:fld id="{3001F3D3-B64E-45E5-A774-FFEE7077F3D9}" type="datetimeFigureOut">
               <a:rPr lang="en-US" smtClean="0"/>
-              <a:t>6/18/2026</a:t>
+              <a:t>6/20/2026</a:t>
             </a:fld>
             <a:endParaRPr lang="en-US"/>
           </a:p>
@@ -2699,7 +2799,7 @@
           <a:p>
             <a:fld id="{3001F3D3-B64E-45E5-A774-FFEE7077F3D9}" type="datetimeFigureOut">
               <a:rPr lang="en-US" smtClean="0"/>
-              <a:t>6/18/2026</a:t>
+              <a:t>6/20/2026</a:t>
             </a:fld>
             <a:endParaRPr lang="en-US"/>
           </a:p>
@@ -3473,7 +3573,7 @@
           <a:p>
             <a:fld id="{3001F3D3-B64E-45E5-A774-FFEE7077F3D9}" type="datetimeFigureOut">
               <a:rPr lang="en-US" smtClean="0"/>
-              <a:t>6/18/2026</a:t>
+              <a:t>6/20/2026</a:t>
             </a:fld>
             <a:endParaRPr lang="en-US"/>
           </a:p>
@@ -3648,7 +3748,7 @@
           <a:p>
             <a:fld id="{3001F3D3-B64E-45E5-A774-FFEE7077F3D9}" type="datetimeFigureOut">
               <a:rPr lang="en-US" smtClean="0"/>
-              <a:t>6/18/2026</a:t>
+              <a:t>6/20/2026</a:t>
             </a:fld>
             <a:endParaRPr lang="en-US"/>
           </a:p>
@@ -3871,7 +3971,7 @@
           <a:p>
             <a:fld id="{3001F3D3-B64E-45E5-A774-FFEE7077F3D9}" type="datetimeFigureOut">
               <a:rPr lang="en-US" smtClean="0"/>
-              <a:t>6/18/2026</a:t>
+              <a:t>6/20/2026</a:t>
             </a:fld>
             <a:endParaRPr lang="en-US"/>
           </a:p>
@@ -4051,7 +4151,7 @@
           <a:p>
             <a:fld id="{3001F3D3-B64E-45E5-A774-FFEE7077F3D9}" type="datetimeFigureOut">
               <a:rPr lang="en-US" smtClean="0"/>
-              <a:t>6/18/2026</a:t>
+              <a:t>6/20/2026</a:t>
             </a:fld>
             <a:endParaRPr lang="en-US"/>
           </a:p>
@@ -4340,7 +4440,7 @@
           <a:p>
             <a:fld id="{3001F3D3-B64E-45E5-A774-FFEE7077F3D9}" type="datetimeFigureOut">
               <a:rPr lang="en-US" smtClean="0"/>
-              <a:t>6/18/2026</a:t>
+              <a:t>6/20/2026</a:t>
             </a:fld>
             <a:endParaRPr lang="en-US"/>
           </a:p>
@@ -4582,7 +4682,7 @@
           <a:p>
             <a:fld id="{3001F3D3-B64E-45E5-A774-FFEE7077F3D9}" type="datetimeFigureOut">
               <a:rPr lang="en-US" smtClean="0"/>
-              <a:t>6/18/2026</a:t>
+              <a:t>6/20/2026</a:t>
             </a:fld>
             <a:endParaRPr lang="en-US"/>
           </a:p>
@@ -4961,7 +5061,7 @@
           <a:p>
             <a:fld id="{3001F3D3-B64E-45E5-A774-FFEE7077F3D9}" type="datetimeFigureOut">
               <a:rPr lang="en-US" smtClean="0"/>
-              <a:t>6/18/2026</a:t>
+              <a:t>6/20/2026</a:t>
             </a:fld>
             <a:endParaRPr lang="en-US"/>
           </a:p>
@@ -5079,7 +5179,7 @@
           <a:p>
             <a:fld id="{3001F3D3-B64E-45E5-A774-FFEE7077F3D9}" type="datetimeFigureOut">
               <a:rPr lang="en-US" smtClean="0"/>
-              <a:t>6/18/2026</a:t>
+              <a:t>6/20/2026</a:t>
             </a:fld>
             <a:endParaRPr lang="en-US"/>
           </a:p>
@@ -5174,7 +5274,7 @@
           <a:p>
             <a:fld id="{3001F3D3-B64E-45E5-A774-FFEE7077F3D9}" type="datetimeFigureOut">
               <a:rPr lang="en-US" smtClean="0"/>
-              <a:t>6/18/2026</a:t>
+              <a:t>6/20/2026</a:t>
             </a:fld>
             <a:endParaRPr lang="en-US"/>
           </a:p>
@@ -5423,7 +5523,7 @@
           <a:p>
             <a:fld id="{3001F3D3-B64E-45E5-A774-FFEE7077F3D9}" type="datetimeFigureOut">
               <a:rPr lang="en-US" smtClean="0"/>
-              <a:t>6/18/2026</a:t>
+              <a:t>6/20/2026</a:t>
             </a:fld>
             <a:endParaRPr lang="en-US"/>
           </a:p>
@@ -5680,7 +5780,7 @@
           <a:p>
             <a:fld id="{3001F3D3-B64E-45E5-A774-FFEE7077F3D9}" type="datetimeFigureOut">
               <a:rPr lang="en-US" smtClean="0"/>
-              <a:t>6/18/2026</a:t>
+              <a:t>6/20/2026</a:t>
             </a:fld>
             <a:endParaRPr lang="en-US"/>
           </a:p>
@@ -5923,7 +6023,7 @@
           <a:p>
             <a:fld id="{3001F3D3-B64E-45E5-A774-FFEE7077F3D9}" type="datetimeFigureOut">
               <a:rPr lang="en-US" smtClean="0"/>
-              <a:t>6/18/2026</a:t>
+              <a:t>6/20/2026</a:t>
             </a:fld>
             <a:endParaRPr lang="en-US"/>
           </a:p>
@@ -8020,6 +8120,103 @@
     <p:extLst>
       <p:ext uri="{BB962C8B-B14F-4D97-AF65-F5344CB8AC3E}">
         <p14:creationId xmlns:p14="http://schemas.microsoft.com/office/powerpoint/2010/main" val="535240141"/>
+      </p:ext>
+    </p:extLst>
+  </p:cSld>
+  <p:clrMapOvr>
+    <a:masterClrMapping/>
+  </p:clrMapOvr>
+</p:sld>
+</file>
+
+<file path=ppt/slides/slide4.xml><?xml version="1.0" encoding="utf-8"?>
+<p:sld xmlns:a="http://schemas.openxmlformats.org/drawingml/2006/main" xmlns:r="http://schemas.openxmlformats.org/officeDocument/2006/relationships" xmlns:p="http://schemas.openxmlformats.org/presentationml/2006/main">
+  <p:cSld>
+    <p:spTree>
+      <p:nvGrpSpPr>
+        <p:cNvPr id="1" name=""/>
+        <p:cNvGrpSpPr/>
+        <p:nvPr/>
+      </p:nvGrpSpPr>
+      <p:grpSpPr>
+        <a:xfrm>
+          <a:off x="0" y="0"/>
+          <a:ext cx="0" cy="0"/>
+          <a:chOff x="0" y="0"/>
+          <a:chExt cx="0" cy="0"/>
+        </a:xfrm>
+      </p:grpSpPr>
+      <p:sp>
+        <p:nvSpPr>
+          <p:cNvPr id="2" name="Title 1">
+            <a:extLst>
+              <a:ext uri="{FF2B5EF4-FFF2-40B4-BE49-F238E27FC236}">
+                <a16:creationId xmlns:a16="http://schemas.microsoft.com/office/drawing/2014/main" id="{01A87E3D-DE56-CF2C-7E3E-A12305FBC087}"/>
+              </a:ext>
+            </a:extLst>
+          </p:cNvPr>
+          <p:cNvSpPr>
+            <a:spLocks noGrp="1"/>
+          </p:cNvSpPr>
+          <p:nvPr>
+            <p:ph type="title"/>
+          </p:nvPr>
+        </p:nvSpPr>
+        <p:spPr/>
+        <p:txBody>
+          <a:bodyPr/>
+          <a:lstStyle/>
+          <a:p>
+            <a:r>
+              <a:rPr lang="en-US" dirty="0"/>
+              <a:t>Club: star-trek club</a:t>
+            </a:r>
+          </a:p>
+        </p:txBody>
+      </p:sp>
+      <p:sp>
+        <p:nvSpPr>
+          <p:cNvPr id="3" name="Content Placeholder 2">
+            <a:extLst>
+              <a:ext uri="{FF2B5EF4-FFF2-40B4-BE49-F238E27FC236}">
+                <a16:creationId xmlns:a16="http://schemas.microsoft.com/office/drawing/2014/main" id="{08DBE7FE-2E19-A9FF-90F3-B8B62D9B4FCB}"/>
+              </a:ext>
+            </a:extLst>
+          </p:cNvPr>
+          <p:cNvSpPr>
+            <a:spLocks noGrp="1"/>
+          </p:cNvSpPr>
+          <p:nvPr>
+            <p:ph idx="1"/>
+          </p:nvPr>
+        </p:nvSpPr>
+        <p:spPr/>
+        <p:txBody>
+          <a:bodyPr/>
+          <a:lstStyle/>
+          <a:p>
+            <a:pPr marL="0" indent="0">
+              <a:buNone/>
+            </a:pPr>
+            <a:r>
+              <a:rPr lang="en-US" dirty="0"/>
+              <a:t>Well, while there where many good </a:t>
+            </a:r>
+            <a:r>
+              <a:rPr lang="en-US" dirty="0" err="1"/>
+              <a:t>memorys</a:t>
+            </a:r>
+            <a:r>
+              <a:rPr lang="en-US" dirty="0"/>
+              <a:t>, I think one of my favorites had to have been some of the discussions we had about Data</a:t>
+            </a:r>
+          </a:p>
+        </p:txBody>
+      </p:sp>
+    </p:spTree>
+    <p:extLst>
+      <p:ext uri="{BB962C8B-B14F-4D97-AF65-F5344CB8AC3E}">
+        <p14:creationId xmlns:p14="http://schemas.microsoft.com/office/powerpoint/2010/main" val="1829906075"/>
       </p:ext>
     </p:extLst>
   </p:cSld>

--- a/Current Presentation/Spring 2026.pptx
+++ b/Current Presentation/Spring 2026.pptx
@@ -756,11 +756,7 @@
             </a:r>
             <a:r>
               <a:rPr lang="en-US" dirty="0"/>
-              <a:t> </a:t>
-            </a:r>
-            <a:r>
-              <a:rPr lang="en-US"/>
-              <a:t>on discussions?</a:t>
+              <a:t> on discussions?</a:t>
             </a:r>
           </a:p>
         </p:txBody>
@@ -8208,8 +8204,13 @@
             </a:r>
             <a:r>
               <a:rPr lang="en-US" dirty="0"/>
-              <a:t>, I think one of my favorites had to have been some of the discussions we had about Data</a:t>
-            </a:r>
+              <a:t>, I think one of my favorites had to have been some of the discussions we had about Data, specifically the fact that he does have emotions, contrary to his own </a:t>
+            </a:r>
+            <a:r>
+              <a:rPr lang="en-US"/>
+              <a:t>statments</a:t>
+            </a:r>
+            <a:endParaRPr lang="en-US" dirty="0"/>
           </a:p>
         </p:txBody>
       </p:sp>

--- a/Current Presentation/Spring 2026.pptx
+++ b/Current Presentation/Spring 2026.pptx
@@ -5,13 +5,14 @@
     <p:sldMasterId id="2147483660" r:id="rId1"/>
   </p:sldMasterIdLst>
   <p:notesMasterIdLst>
-    <p:notesMasterId r:id="rId6"/>
+    <p:notesMasterId r:id="rId7"/>
   </p:notesMasterIdLst>
   <p:sldIdLst>
     <p:sldId id="260" r:id="rId2"/>
-    <p:sldId id="261" r:id="rId3"/>
-    <p:sldId id="262" r:id="rId4"/>
-    <p:sldId id="263" r:id="rId5"/>
+    <p:sldId id="264" r:id="rId3"/>
+    <p:sldId id="261" r:id="rId4"/>
+    <p:sldId id="262" r:id="rId5"/>
+    <p:sldId id="263" r:id="rId6"/>
   </p:sldIdLst>
   <p:sldSz cx="12192000" cy="6858000"/>
   <p:notesSz cx="6858000" cy="9144000"/>
@@ -227,7 +228,7 @@
           <a:p>
             <a:fld id="{BFAFE299-D31D-47C2-B46C-C3B1749D6A86}" type="datetimeFigureOut">
               <a:rPr lang="en-US" smtClean="0"/>
-              <a:t>6/20/2026</a:t>
+              <a:t>6/22/2026</a:t>
             </a:fld>
             <a:endParaRPr lang="en-US"/>
           </a:p>
@@ -579,7 +580,7 @@
           <a:p>
             <a:fld id="{4BBF2809-F272-465C-B573-2DAF6CD206A2}" type="slidenum">
               <a:rPr lang="en-US" smtClean="0"/>
-              <a:t>2</a:t>
+              <a:t>3</a:t>
             </a:fld>
             <a:endParaRPr lang="en-US"/>
           </a:p>
@@ -683,7 +684,7 @@
           <a:p>
             <a:fld id="{4BBF2809-F272-465C-B573-2DAF6CD206A2}" type="slidenum">
               <a:rPr lang="en-US" smtClean="0"/>
-              <a:t>3</a:t>
+              <a:t>4</a:t>
             </a:fld>
             <a:endParaRPr lang="en-US"/>
           </a:p>
@@ -778,7 +779,7 @@
           <a:p>
             <a:fld id="{4BBF2809-F272-465C-B573-2DAF6CD206A2}" type="slidenum">
               <a:rPr lang="en-US" smtClean="0"/>
-              <a:t>4</a:t>
+              <a:t>5</a:t>
             </a:fld>
             <a:endParaRPr lang="en-US"/>
           </a:p>
@@ -967,7 +968,7 @@
           <a:p>
             <a:fld id="{3001F3D3-B64E-45E5-A774-FFEE7077F3D9}" type="datetimeFigureOut">
               <a:rPr lang="en-US" smtClean="0"/>
-              <a:t>6/20/2026</a:t>
+              <a:t>6/22/2026</a:t>
             </a:fld>
             <a:endParaRPr lang="en-US"/>
           </a:p>
@@ -1234,7 +1235,7 @@
           <a:p>
             <a:fld id="{3001F3D3-B64E-45E5-A774-FFEE7077F3D9}" type="datetimeFigureOut">
               <a:rPr lang="en-US" smtClean="0"/>
-              <a:t>6/20/2026</a:t>
+              <a:t>6/22/2026</a:t>
             </a:fld>
             <a:endParaRPr lang="en-US"/>
           </a:p>
@@ -1465,7 +1466,7 @@
           <a:p>
             <a:fld id="{3001F3D3-B64E-45E5-A774-FFEE7077F3D9}" type="datetimeFigureOut">
               <a:rPr lang="en-US" smtClean="0"/>
-              <a:t>6/20/2026</a:t>
+              <a:t>6/22/2026</a:t>
             </a:fld>
             <a:endParaRPr lang="en-US"/>
           </a:p>
@@ -1775,7 +1776,7 @@
           <a:p>
             <a:fld id="{3001F3D3-B64E-45E5-A774-FFEE7077F3D9}" type="datetimeFigureOut">
               <a:rPr lang="en-US" smtClean="0"/>
-              <a:t>6/20/2026</a:t>
+              <a:t>6/22/2026</a:t>
             </a:fld>
             <a:endParaRPr lang="en-US"/>
           </a:p>
@@ -2248,7 +2249,7 @@
           <a:p>
             <a:fld id="{3001F3D3-B64E-45E5-A774-FFEE7077F3D9}" type="datetimeFigureOut">
               <a:rPr lang="en-US" smtClean="0"/>
-              <a:t>6/20/2026</a:t>
+              <a:t>6/22/2026</a:t>
             </a:fld>
             <a:endParaRPr lang="en-US"/>
           </a:p>
@@ -2795,7 +2796,7 @@
           <a:p>
             <a:fld id="{3001F3D3-B64E-45E5-A774-FFEE7077F3D9}" type="datetimeFigureOut">
               <a:rPr lang="en-US" smtClean="0"/>
-              <a:t>6/20/2026</a:t>
+              <a:t>6/22/2026</a:t>
             </a:fld>
             <a:endParaRPr lang="en-US"/>
           </a:p>
@@ -3569,7 +3570,7 @@
           <a:p>
             <a:fld id="{3001F3D3-B64E-45E5-A774-FFEE7077F3D9}" type="datetimeFigureOut">
               <a:rPr lang="en-US" smtClean="0"/>
-              <a:t>6/20/2026</a:t>
+              <a:t>6/22/2026</a:t>
             </a:fld>
             <a:endParaRPr lang="en-US"/>
           </a:p>
@@ -3744,7 +3745,7 @@
           <a:p>
             <a:fld id="{3001F3D3-B64E-45E5-A774-FFEE7077F3D9}" type="datetimeFigureOut">
               <a:rPr lang="en-US" smtClean="0"/>
-              <a:t>6/20/2026</a:t>
+              <a:t>6/22/2026</a:t>
             </a:fld>
             <a:endParaRPr lang="en-US"/>
           </a:p>
@@ -3967,7 +3968,7 @@
           <a:p>
             <a:fld id="{3001F3D3-B64E-45E5-A774-FFEE7077F3D9}" type="datetimeFigureOut">
               <a:rPr lang="en-US" smtClean="0"/>
-              <a:t>6/20/2026</a:t>
+              <a:t>6/22/2026</a:t>
             </a:fld>
             <a:endParaRPr lang="en-US"/>
           </a:p>
@@ -4147,7 +4148,7 @@
           <a:p>
             <a:fld id="{3001F3D3-B64E-45E5-A774-FFEE7077F3D9}" type="datetimeFigureOut">
               <a:rPr lang="en-US" smtClean="0"/>
-              <a:t>6/20/2026</a:t>
+              <a:t>6/22/2026</a:t>
             </a:fld>
             <a:endParaRPr lang="en-US"/>
           </a:p>
@@ -4436,7 +4437,7 @@
           <a:p>
             <a:fld id="{3001F3D3-B64E-45E5-A774-FFEE7077F3D9}" type="datetimeFigureOut">
               <a:rPr lang="en-US" smtClean="0"/>
-              <a:t>6/20/2026</a:t>
+              <a:t>6/22/2026</a:t>
             </a:fld>
             <a:endParaRPr lang="en-US"/>
           </a:p>
@@ -4678,7 +4679,7 @@
           <a:p>
             <a:fld id="{3001F3D3-B64E-45E5-A774-FFEE7077F3D9}" type="datetimeFigureOut">
               <a:rPr lang="en-US" smtClean="0"/>
-              <a:t>6/20/2026</a:t>
+              <a:t>6/22/2026</a:t>
             </a:fld>
             <a:endParaRPr lang="en-US"/>
           </a:p>
@@ -5057,7 +5058,7 @@
           <a:p>
             <a:fld id="{3001F3D3-B64E-45E5-A774-FFEE7077F3D9}" type="datetimeFigureOut">
               <a:rPr lang="en-US" smtClean="0"/>
-              <a:t>6/20/2026</a:t>
+              <a:t>6/22/2026</a:t>
             </a:fld>
             <a:endParaRPr lang="en-US"/>
           </a:p>
@@ -5175,7 +5176,7 @@
           <a:p>
             <a:fld id="{3001F3D3-B64E-45E5-A774-FFEE7077F3D9}" type="datetimeFigureOut">
               <a:rPr lang="en-US" smtClean="0"/>
-              <a:t>6/20/2026</a:t>
+              <a:t>6/22/2026</a:t>
             </a:fld>
             <a:endParaRPr lang="en-US"/>
           </a:p>
@@ -5270,7 +5271,7 @@
           <a:p>
             <a:fld id="{3001F3D3-B64E-45E5-A774-FFEE7077F3D9}" type="datetimeFigureOut">
               <a:rPr lang="en-US" smtClean="0"/>
-              <a:t>6/20/2026</a:t>
+              <a:t>6/22/2026</a:t>
             </a:fld>
             <a:endParaRPr lang="en-US"/>
           </a:p>
@@ -5519,7 +5520,7 @@
           <a:p>
             <a:fld id="{3001F3D3-B64E-45E5-A774-FFEE7077F3D9}" type="datetimeFigureOut">
               <a:rPr lang="en-US" smtClean="0"/>
-              <a:t>6/20/2026</a:t>
+              <a:t>6/22/2026</a:t>
             </a:fld>
             <a:endParaRPr lang="en-US"/>
           </a:p>
@@ -5776,7 +5777,7 @@
           <a:p>
             <a:fld id="{3001F3D3-B64E-45E5-A774-FFEE7077F3D9}" type="datetimeFigureOut">
               <a:rPr lang="en-US" smtClean="0"/>
-              <a:t>6/20/2026</a:t>
+              <a:t>6/22/2026</a:t>
             </a:fld>
             <a:endParaRPr lang="en-US"/>
           </a:p>
@@ -6019,7 +6020,7 @@
           <a:p>
             <a:fld id="{3001F3D3-B64E-45E5-A774-FFEE7077F3D9}" type="datetimeFigureOut">
               <a:rPr lang="en-US" smtClean="0"/>
-              <a:t>6/20/2026</a:t>
+              <a:t>6/22/2026</a:t>
             </a:fld>
             <a:endParaRPr lang="en-US"/>
           </a:p>
@@ -7852,7 +7853,7 @@
           <p:cNvPr id="2" name="Title 1">
             <a:extLst>
               <a:ext uri="{FF2B5EF4-FFF2-40B4-BE49-F238E27FC236}">
-                <a16:creationId xmlns:a16="http://schemas.microsoft.com/office/drawing/2014/main" id="{CABE40B0-7AFB-B285-5066-7B441A27BF72}"/>
+                <a16:creationId xmlns:a16="http://schemas.microsoft.com/office/drawing/2014/main" id="{53D3B13D-4EA4-72D0-C584-F7E4962CE06F}"/>
               </a:ext>
             </a:extLst>
           </p:cNvPr>
@@ -7868,10 +7869,7 @@
           <a:bodyPr/>
           <a:lstStyle/>
           <a:p>
-            <a:r>
-              <a:rPr lang="en-US" dirty="0"/>
-              <a:t>Tech: Advanced app-dev</a:t>
-            </a:r>
+            <a:endParaRPr lang="en-US"/>
           </a:p>
         </p:txBody>
       </p:sp>
@@ -7880,7 +7878,7 @@
           <p:cNvPr id="3" name="Content Placeholder 2">
             <a:extLst>
               <a:ext uri="{FF2B5EF4-FFF2-40B4-BE49-F238E27FC236}">
-                <a16:creationId xmlns:a16="http://schemas.microsoft.com/office/drawing/2014/main" id="{D4080C78-579B-6737-72DA-8EFC61A29CE1}"/>
+                <a16:creationId xmlns:a16="http://schemas.microsoft.com/office/drawing/2014/main" id="{BD770F2A-2830-597A-D03F-334F7AD6AE4C}"/>
               </a:ext>
             </a:extLst>
           </p:cNvPr>
@@ -7893,108 +7891,17 @@
         </p:nvSpPr>
         <p:spPr/>
         <p:txBody>
-          <a:bodyPr>
-            <a:normAutofit lnSpcReduction="10000"/>
-          </a:bodyPr>
+          <a:bodyPr/>
           <a:lstStyle/>
           <a:p>
-            <a:r>
-              <a:rPr lang="en-US" dirty="0"/>
-              <a:t>We worked on two things in advanced </a:t>
-            </a:r>
-            <a:r>
-              <a:rPr lang="en-US" dirty="0" err="1"/>
-              <a:t>appdev</a:t>
-            </a:r>
-            <a:r>
-              <a:rPr lang="en-US" dirty="0"/>
-              <a:t>.</a:t>
-            </a:r>
-          </a:p>
-          <a:p>
-            <a:pPr lvl="1"/>
-            <a:r>
-              <a:rPr lang="en-US" dirty="0"/>
-              <a:t>One of the projects we worked on was the Snack Shack</a:t>
-            </a:r>
-          </a:p>
-          <a:p>
-            <a:pPr lvl="2"/>
-            <a:r>
-              <a:rPr lang="en-US" dirty="0"/>
-              <a:t>In actuality, the most major was, as discussed by Ryan, actually databases and SQL. But I figured you have heard about that from him</a:t>
-            </a:r>
-          </a:p>
-          <a:p>
-            <a:pPr lvl="1"/>
-            <a:r>
-              <a:rPr lang="en-US" dirty="0"/>
-              <a:t>Tasks used:</a:t>
-            </a:r>
-          </a:p>
-          <a:p>
-            <a:pPr lvl="2"/>
-            <a:r>
-              <a:rPr lang="en-US" dirty="0"/>
-              <a:t>Debugging</a:t>
-            </a:r>
-          </a:p>
-          <a:p>
-            <a:pPr lvl="3"/>
-            <a:r>
-              <a:rPr lang="en-US" dirty="0"/>
-              <a:t>Debugging</a:t>
-            </a:r>
-          </a:p>
-          <a:p>
-            <a:pPr lvl="3"/>
-            <a:r>
-              <a:rPr lang="en-US" dirty="0"/>
-              <a:t>Debugging</a:t>
-            </a:r>
-          </a:p>
-          <a:p>
-            <a:pPr marL="914400" lvl="2" indent="0">
-              <a:buNone/>
-            </a:pPr>
-            <a:r>
-              <a:rPr lang="en-US" dirty="0"/>
-              <a:t>Okay, in all seriousness</a:t>
-            </a:r>
-          </a:p>
-          <a:p>
-            <a:pPr lvl="2"/>
-            <a:r>
-              <a:rPr lang="en-US" dirty="0"/>
-              <a:t>Critical Thinking</a:t>
-            </a:r>
-          </a:p>
-          <a:p>
-            <a:pPr lvl="2"/>
-            <a:r>
-              <a:rPr lang="en-US" dirty="0"/>
-              <a:t>Trial and Error</a:t>
-            </a:r>
-          </a:p>
-          <a:p>
-            <a:pPr lvl="2"/>
-            <a:endParaRPr lang="en-US" dirty="0"/>
-          </a:p>
-          <a:p>
-            <a:pPr marL="0" indent="0">
-              <a:buNone/>
-            </a:pPr>
-            <a:r>
-              <a:rPr lang="en-US" dirty="0"/>
-              <a:t>As for what I gained, it’s mostly just more knowledge, in this case about SQL</a:t>
-            </a:r>
+            <a:endParaRPr lang="en-US"/>
           </a:p>
         </p:txBody>
       </p:sp>
     </p:spTree>
     <p:extLst>
       <p:ext uri="{BB962C8B-B14F-4D97-AF65-F5344CB8AC3E}">
-        <p14:creationId xmlns:p14="http://schemas.microsoft.com/office/powerpoint/2010/main" val="1734690963"/>
+        <p14:creationId xmlns:p14="http://schemas.microsoft.com/office/powerpoint/2010/main" val="394541520"/>
       </p:ext>
     </p:extLst>
   </p:cSld>
@@ -8026,6 +7933,180 @@
           <p:cNvPr id="2" name="Title 1">
             <a:extLst>
               <a:ext uri="{FF2B5EF4-FFF2-40B4-BE49-F238E27FC236}">
+                <a16:creationId xmlns:a16="http://schemas.microsoft.com/office/drawing/2014/main" id="{CABE40B0-7AFB-B285-5066-7B441A27BF72}"/>
+              </a:ext>
+            </a:extLst>
+          </p:cNvPr>
+          <p:cNvSpPr>
+            <a:spLocks noGrp="1"/>
+          </p:cNvSpPr>
+          <p:nvPr>
+            <p:ph type="title"/>
+          </p:nvPr>
+        </p:nvSpPr>
+        <p:spPr/>
+        <p:txBody>
+          <a:bodyPr/>
+          <a:lstStyle/>
+          <a:p>
+            <a:r>
+              <a:rPr lang="en-US" dirty="0"/>
+              <a:t>Tech: Advanced app-dev</a:t>
+            </a:r>
+          </a:p>
+        </p:txBody>
+      </p:sp>
+      <p:sp>
+        <p:nvSpPr>
+          <p:cNvPr id="3" name="Content Placeholder 2">
+            <a:extLst>
+              <a:ext uri="{FF2B5EF4-FFF2-40B4-BE49-F238E27FC236}">
+                <a16:creationId xmlns:a16="http://schemas.microsoft.com/office/drawing/2014/main" id="{D4080C78-579B-6737-72DA-8EFC61A29CE1}"/>
+              </a:ext>
+            </a:extLst>
+          </p:cNvPr>
+          <p:cNvSpPr>
+            <a:spLocks noGrp="1"/>
+          </p:cNvSpPr>
+          <p:nvPr>
+            <p:ph idx="1"/>
+          </p:nvPr>
+        </p:nvSpPr>
+        <p:spPr/>
+        <p:txBody>
+          <a:bodyPr>
+            <a:normAutofit lnSpcReduction="10000"/>
+          </a:bodyPr>
+          <a:lstStyle/>
+          <a:p>
+            <a:r>
+              <a:rPr lang="en-US" dirty="0"/>
+              <a:t>We worked on two things in advanced </a:t>
+            </a:r>
+            <a:r>
+              <a:rPr lang="en-US" dirty="0" err="1"/>
+              <a:t>appdev</a:t>
+            </a:r>
+            <a:r>
+              <a:rPr lang="en-US" dirty="0"/>
+              <a:t>.</a:t>
+            </a:r>
+          </a:p>
+          <a:p>
+            <a:pPr lvl="1"/>
+            <a:r>
+              <a:rPr lang="en-US" dirty="0"/>
+              <a:t>One of the projects we worked on was the Snack Shack</a:t>
+            </a:r>
+          </a:p>
+          <a:p>
+            <a:pPr lvl="2"/>
+            <a:r>
+              <a:rPr lang="en-US" dirty="0"/>
+              <a:t>In actuality, the most major was, as discussed by Ryan, actually databases and SQL. But I figured you have heard about that from him</a:t>
+            </a:r>
+          </a:p>
+          <a:p>
+            <a:pPr lvl="1"/>
+            <a:r>
+              <a:rPr lang="en-US" dirty="0"/>
+              <a:t>Tasks used:</a:t>
+            </a:r>
+          </a:p>
+          <a:p>
+            <a:pPr lvl="2"/>
+            <a:r>
+              <a:rPr lang="en-US" dirty="0"/>
+              <a:t>Debugging</a:t>
+            </a:r>
+          </a:p>
+          <a:p>
+            <a:pPr lvl="3"/>
+            <a:r>
+              <a:rPr lang="en-US" dirty="0"/>
+              <a:t>Debugging</a:t>
+            </a:r>
+          </a:p>
+          <a:p>
+            <a:pPr lvl="3"/>
+            <a:r>
+              <a:rPr lang="en-US" dirty="0"/>
+              <a:t>Debugging</a:t>
+            </a:r>
+          </a:p>
+          <a:p>
+            <a:pPr marL="914400" lvl="2" indent="0">
+              <a:buNone/>
+            </a:pPr>
+            <a:r>
+              <a:rPr lang="en-US" dirty="0"/>
+              <a:t>Okay, in all seriousness</a:t>
+            </a:r>
+          </a:p>
+          <a:p>
+            <a:pPr lvl="2"/>
+            <a:r>
+              <a:rPr lang="en-US" dirty="0"/>
+              <a:t>Critical Thinking</a:t>
+            </a:r>
+          </a:p>
+          <a:p>
+            <a:pPr lvl="2"/>
+            <a:r>
+              <a:rPr lang="en-US" dirty="0"/>
+              <a:t>Trial and Error</a:t>
+            </a:r>
+          </a:p>
+          <a:p>
+            <a:pPr lvl="2"/>
+            <a:endParaRPr lang="en-US" dirty="0"/>
+          </a:p>
+          <a:p>
+            <a:pPr marL="0" indent="0">
+              <a:buNone/>
+            </a:pPr>
+            <a:r>
+              <a:rPr lang="en-US" dirty="0"/>
+              <a:t>As for what I gained, it’s mostly just more knowledge, in this case about SQL</a:t>
+            </a:r>
+          </a:p>
+        </p:txBody>
+      </p:sp>
+    </p:spTree>
+    <p:extLst>
+      <p:ext uri="{BB962C8B-B14F-4D97-AF65-F5344CB8AC3E}">
+        <p14:creationId xmlns:p14="http://schemas.microsoft.com/office/powerpoint/2010/main" val="1734690963"/>
+      </p:ext>
+    </p:extLst>
+  </p:cSld>
+  <p:clrMapOvr>
+    <a:masterClrMapping/>
+  </p:clrMapOvr>
+</p:sld>
+</file>
+
+<file path=ppt/slides/slide4.xml><?xml version="1.0" encoding="utf-8"?>
+<p:sld xmlns:a="http://schemas.openxmlformats.org/drawingml/2006/main" xmlns:r="http://schemas.openxmlformats.org/officeDocument/2006/relationships" xmlns:p="http://schemas.openxmlformats.org/presentationml/2006/main">
+  <p:cSld>
+    <p:spTree>
+      <p:nvGrpSpPr>
+        <p:cNvPr id="1" name=""/>
+        <p:cNvGrpSpPr/>
+        <p:nvPr/>
+      </p:nvGrpSpPr>
+      <p:grpSpPr>
+        <a:xfrm>
+          <a:off x="0" y="0"/>
+          <a:ext cx="0" cy="0"/>
+          <a:chOff x="0" y="0"/>
+          <a:chExt cx="0" cy="0"/>
+        </a:xfrm>
+      </p:grpSpPr>
+      <p:sp>
+        <p:nvSpPr>
+          <p:cNvPr id="2" name="Title 1">
+            <a:extLst>
+              <a:ext uri="{FF2B5EF4-FFF2-40B4-BE49-F238E27FC236}">
                 <a16:creationId xmlns:a16="http://schemas.microsoft.com/office/drawing/2014/main" id="{D4985CBC-A8D3-D568-87AE-62116BA26CA4}"/>
               </a:ext>
             </a:extLst>
@@ -8125,7 +8206,7 @@
 </p:sld>
 </file>
 
-<file path=ppt/slides/slide4.xml><?xml version="1.0" encoding="utf-8"?>
+<file path=ppt/slides/slide5.xml><?xml version="1.0" encoding="utf-8"?>
 <p:sld xmlns:a="http://schemas.openxmlformats.org/drawingml/2006/main" xmlns:r="http://schemas.openxmlformats.org/officeDocument/2006/relationships" xmlns:p="http://schemas.openxmlformats.org/presentationml/2006/main">
   <p:cSld>
     <p:spTree>

--- a/Current Presentation/Spring 2026.pptx
+++ b/Current Presentation/Spring 2026.pptx
@@ -9,10 +9,10 @@
   </p:notesMasterIdLst>
   <p:sldIdLst>
     <p:sldId id="260" r:id="rId2"/>
-    <p:sldId id="264" r:id="rId3"/>
-    <p:sldId id="261" r:id="rId4"/>
-    <p:sldId id="262" r:id="rId5"/>
-    <p:sldId id="263" r:id="rId6"/>
+    <p:sldId id="261" r:id="rId3"/>
+    <p:sldId id="262" r:id="rId4"/>
+    <p:sldId id="263" r:id="rId5"/>
+    <p:sldId id="264" r:id="rId6"/>
   </p:sldIdLst>
   <p:sldSz cx="12192000" cy="6858000"/>
   <p:notesSz cx="6858000" cy="9144000"/>
@@ -117,6 +117,14 @@
     </p:ext>
   </p:extLst>
 </p:presentation>
+</file>
+
+<file path=ppt/revisionInfo.xml><?xml version="1.0" encoding="utf-8"?>
+<p1510:revInfo xmlns:a="http://schemas.openxmlformats.org/drawingml/2006/main" xmlns:r="http://schemas.openxmlformats.org/officeDocument/2006/relationships" xmlns:p1510="http://schemas.microsoft.com/office/powerpoint/2015/10/main">
+  <p1510:revLst>
+    <p1510:client id="{6998B00B-2615-DA7F-16DD-BEDBD145F26F}" v="113" dt="2026-06-22T15:24:41.416"/>
+  </p1510:revLst>
+</p1510:revInfo>
 </file>
 
 <file path=ppt/ink/ink1.xml><?xml version="1.0" encoding="utf-8"?>
@@ -580,7 +588,7 @@
           <a:p>
             <a:fld id="{4BBF2809-F272-465C-B573-2DAF6CD206A2}" type="slidenum">
               <a:rPr lang="en-US" smtClean="0"/>
-              <a:t>3</a:t>
+              <a:t>2</a:t>
             </a:fld>
             <a:endParaRPr lang="en-US"/>
           </a:p>
@@ -684,7 +692,7 @@
           <a:p>
             <a:fld id="{4BBF2809-F272-465C-B573-2DAF6CD206A2}" type="slidenum">
               <a:rPr lang="en-US" smtClean="0"/>
-              <a:t>4</a:t>
+              <a:t>3</a:t>
             </a:fld>
             <a:endParaRPr lang="en-US"/>
           </a:p>
@@ -779,7 +787,7 @@
           <a:p>
             <a:fld id="{4BBF2809-F272-465C-B573-2DAF6CD206A2}" type="slidenum">
               <a:rPr lang="en-US" smtClean="0"/>
-              <a:t>5</a:t>
+              <a:t>4</a:t>
             </a:fld>
             <a:endParaRPr lang="en-US"/>
           </a:p>
@@ -7853,7 +7861,7 @@
           <p:cNvPr id="2" name="Title 1">
             <a:extLst>
               <a:ext uri="{FF2B5EF4-FFF2-40B4-BE49-F238E27FC236}">
-                <a16:creationId xmlns:a16="http://schemas.microsoft.com/office/drawing/2014/main" id="{53D3B13D-4EA4-72D0-C584-F7E4962CE06F}"/>
+                <a16:creationId xmlns:a16="http://schemas.microsoft.com/office/drawing/2014/main" id="{CABE40B0-7AFB-B285-5066-7B441A27BF72}"/>
               </a:ext>
             </a:extLst>
           </p:cNvPr>
@@ -7869,7 +7877,10 @@
           <a:bodyPr/>
           <a:lstStyle/>
           <a:p>
-            <a:endParaRPr lang="en-US"/>
+            <a:r>
+              <a:rPr lang="en-US" dirty="0"/>
+              <a:t>Tech: Advanced app-dev</a:t>
+            </a:r>
           </a:p>
         </p:txBody>
       </p:sp>
@@ -7878,7 +7889,7 @@
           <p:cNvPr id="3" name="Content Placeholder 2">
             <a:extLst>
               <a:ext uri="{FF2B5EF4-FFF2-40B4-BE49-F238E27FC236}">
-                <a16:creationId xmlns:a16="http://schemas.microsoft.com/office/drawing/2014/main" id="{BD770F2A-2830-597A-D03F-334F7AD6AE4C}"/>
+                <a16:creationId xmlns:a16="http://schemas.microsoft.com/office/drawing/2014/main" id="{D4080C78-579B-6737-72DA-8EFC61A29CE1}"/>
               </a:ext>
             </a:extLst>
           </p:cNvPr>
@@ -7891,17 +7902,108 @@
         </p:nvSpPr>
         <p:spPr/>
         <p:txBody>
-          <a:bodyPr/>
+          <a:bodyPr>
+            <a:normAutofit lnSpcReduction="10000"/>
+          </a:bodyPr>
           <a:lstStyle/>
           <a:p>
-            <a:endParaRPr lang="en-US"/>
+            <a:r>
+              <a:rPr lang="en-US" dirty="0"/>
+              <a:t>We worked on two things in advanced </a:t>
+            </a:r>
+            <a:r>
+              <a:rPr lang="en-US" dirty="0" err="1"/>
+              <a:t>appdev</a:t>
+            </a:r>
+            <a:r>
+              <a:rPr lang="en-US" dirty="0"/>
+              <a:t>.</a:t>
+            </a:r>
+          </a:p>
+          <a:p>
+            <a:pPr lvl="1"/>
+            <a:r>
+              <a:rPr lang="en-US" dirty="0"/>
+              <a:t>One of the projects we worked on was the Snack Shack</a:t>
+            </a:r>
+          </a:p>
+          <a:p>
+            <a:pPr lvl="2"/>
+            <a:r>
+              <a:rPr lang="en-US" dirty="0"/>
+              <a:t>In actuality, the most major was, as discussed by Ryan, actually databases and SQL. But I figured you have heard about that from him</a:t>
+            </a:r>
+          </a:p>
+          <a:p>
+            <a:pPr lvl="1"/>
+            <a:r>
+              <a:rPr lang="en-US" dirty="0"/>
+              <a:t>Tasks used:</a:t>
+            </a:r>
+          </a:p>
+          <a:p>
+            <a:pPr lvl="2"/>
+            <a:r>
+              <a:rPr lang="en-US" dirty="0"/>
+              <a:t>Debugging</a:t>
+            </a:r>
+          </a:p>
+          <a:p>
+            <a:pPr lvl="3"/>
+            <a:r>
+              <a:rPr lang="en-US" dirty="0"/>
+              <a:t>Debugging</a:t>
+            </a:r>
+          </a:p>
+          <a:p>
+            <a:pPr lvl="3"/>
+            <a:r>
+              <a:rPr lang="en-US" dirty="0"/>
+              <a:t>Debugging</a:t>
+            </a:r>
+          </a:p>
+          <a:p>
+            <a:pPr marL="914400" lvl="2" indent="0">
+              <a:buNone/>
+            </a:pPr>
+            <a:r>
+              <a:rPr lang="en-US" dirty="0"/>
+              <a:t>Okay, in all seriousness</a:t>
+            </a:r>
+          </a:p>
+          <a:p>
+            <a:pPr lvl="2"/>
+            <a:r>
+              <a:rPr lang="en-US" dirty="0"/>
+              <a:t>Critical Thinking</a:t>
+            </a:r>
+          </a:p>
+          <a:p>
+            <a:pPr lvl="2"/>
+            <a:r>
+              <a:rPr lang="en-US" dirty="0"/>
+              <a:t>Trial and Error</a:t>
+            </a:r>
+          </a:p>
+          <a:p>
+            <a:pPr lvl="2"/>
+            <a:endParaRPr lang="en-US" dirty="0"/>
+          </a:p>
+          <a:p>
+            <a:pPr marL="0" indent="0">
+              <a:buNone/>
+            </a:pPr>
+            <a:r>
+              <a:rPr lang="en-US" dirty="0"/>
+              <a:t>As for what I gained, it’s mostly just more knowledge, in this case about SQL</a:t>
+            </a:r>
           </a:p>
         </p:txBody>
       </p:sp>
     </p:spTree>
     <p:extLst>
       <p:ext uri="{BB962C8B-B14F-4D97-AF65-F5344CB8AC3E}">
-        <p14:creationId xmlns:p14="http://schemas.microsoft.com/office/powerpoint/2010/main" val="394541520"/>
+        <p14:creationId xmlns:p14="http://schemas.microsoft.com/office/powerpoint/2010/main" val="1734690963"/>
       </p:ext>
     </p:extLst>
   </p:cSld>
@@ -7933,7 +8035,7 @@
           <p:cNvPr id="2" name="Title 1">
             <a:extLst>
               <a:ext uri="{FF2B5EF4-FFF2-40B4-BE49-F238E27FC236}">
-                <a16:creationId xmlns:a16="http://schemas.microsoft.com/office/drawing/2014/main" id="{CABE40B0-7AFB-B285-5066-7B441A27BF72}"/>
+                <a16:creationId xmlns:a16="http://schemas.microsoft.com/office/drawing/2014/main" id="{D4985CBC-A8D3-D568-87AE-62116BA26CA4}"/>
               </a:ext>
             </a:extLst>
           </p:cNvPr>
@@ -7951,7 +8053,11 @@
           <a:p>
             <a:r>
               <a:rPr lang="en-US" dirty="0"/>
-              <a:t>Tech: Advanced app-dev</a:t>
+              <a:t>Core</a:t>
+            </a:r>
+            <a:r>
+              <a:rPr lang="en-US"/>
+              <a:t>: Community</a:t>
             </a:r>
           </a:p>
         </p:txBody>
@@ -7961,7 +8067,7 @@
           <p:cNvPr id="3" name="Content Placeholder 2">
             <a:extLst>
               <a:ext uri="{FF2B5EF4-FFF2-40B4-BE49-F238E27FC236}">
-                <a16:creationId xmlns:a16="http://schemas.microsoft.com/office/drawing/2014/main" id="{D4080C78-579B-6737-72DA-8EFC61A29CE1}"/>
+                <a16:creationId xmlns:a16="http://schemas.microsoft.com/office/drawing/2014/main" id="{DE574F07-D8D0-C8B1-0C37-1C3C8D8A70F7}"/>
               </a:ext>
             </a:extLst>
           </p:cNvPr>
@@ -7974,108 +8080,51 @@
         </p:nvSpPr>
         <p:spPr/>
         <p:txBody>
-          <a:bodyPr>
-            <a:normAutofit lnSpcReduction="10000"/>
-          </a:bodyPr>
+          <a:bodyPr/>
           <a:lstStyle/>
           <a:p>
             <a:r>
               <a:rPr lang="en-US" dirty="0"/>
-              <a:t>We worked on two things in advanced </a:t>
-            </a:r>
-            <a:r>
-              <a:rPr lang="en-US" dirty="0" err="1"/>
-              <a:t>appdev</a:t>
-            </a:r>
+              <a:t>In community, we learned about, well, our community.</a:t>
+            </a:r>
+          </a:p>
+          <a:p>
             <a:r>
               <a:rPr lang="en-US" dirty="0"/>
-              <a:t>.</a:t>
+              <a:t>While not inherently a skill: </a:t>
             </a:r>
           </a:p>
           <a:p>
             <a:pPr lvl="1"/>
             <a:r>
               <a:rPr lang="en-US" dirty="0"/>
-              <a:t>One of the projects we worked on was the Snack Shack</a:t>
-            </a:r>
-          </a:p>
-          <a:p>
-            <a:pPr lvl="2"/>
+              <a:t>I learned more about the greater Houston area</a:t>
+            </a:r>
+          </a:p>
+          <a:p>
+            <a:pPr lvl="1"/>
             <a:r>
               <a:rPr lang="en-US" dirty="0"/>
-              <a:t>In actuality, the most major was, as discussed by Ryan, actually databases and SQL. But I figured you have heard about that from him</a:t>
-            </a:r>
-          </a:p>
-          <a:p>
-            <a:pPr lvl="1"/>
+              <a:t>I made a nice slideshow about Charlie Serbia called “who am you”</a:t>
+            </a:r>
+          </a:p>
+          <a:p>
             <a:r>
               <a:rPr lang="en-US" dirty="0"/>
-              <a:t>Tasks used:</a:t>
-            </a:r>
-          </a:p>
-          <a:p>
-            <a:pPr lvl="2"/>
-            <a:r>
-              <a:rPr lang="en-US" dirty="0"/>
-              <a:t>Debugging</a:t>
-            </a:r>
-          </a:p>
-          <a:p>
-            <a:pPr lvl="3"/>
-            <a:r>
-              <a:rPr lang="en-US" dirty="0"/>
-              <a:t>Debugging</a:t>
-            </a:r>
-          </a:p>
-          <a:p>
-            <a:pPr lvl="3"/>
-            <a:r>
-              <a:rPr lang="en-US" dirty="0"/>
-              <a:t>Debugging</a:t>
-            </a:r>
-          </a:p>
-          <a:p>
-            <a:pPr marL="914400" lvl="2" indent="0">
-              <a:buNone/>
-            </a:pPr>
-            <a:r>
-              <a:rPr lang="en-US" dirty="0"/>
-              <a:t>Okay, in all seriousness</a:t>
-            </a:r>
-          </a:p>
-          <a:p>
-            <a:pPr lvl="2"/>
-            <a:r>
-              <a:rPr lang="en-US" dirty="0"/>
-              <a:t>Critical Thinking</a:t>
-            </a:r>
-          </a:p>
-          <a:p>
-            <a:pPr lvl="2"/>
-            <a:r>
-              <a:rPr lang="en-US" dirty="0"/>
-              <a:t>Trial and Error</a:t>
-            </a:r>
-          </a:p>
-          <a:p>
-            <a:pPr lvl="2"/>
+              <a:t>As for how I’d use it, well, it just helps to know what’s around you so you can actually do things. Basically, less “use it” and more “add more things to </a:t>
+            </a:r>
+            <a:r>
+              <a:rPr lang="en-US"/>
+              <a:t>use skills on”</a:t>
+            </a:r>
             <a:endParaRPr lang="en-US" dirty="0"/>
-          </a:p>
-          <a:p>
-            <a:pPr marL="0" indent="0">
-              <a:buNone/>
-            </a:pPr>
-            <a:r>
-              <a:rPr lang="en-US" dirty="0"/>
-              <a:t>As for what I gained, it’s mostly just more knowledge, in this case about SQL</a:t>
-            </a:r>
           </a:p>
         </p:txBody>
       </p:sp>
     </p:spTree>
     <p:extLst>
       <p:ext uri="{BB962C8B-B14F-4D97-AF65-F5344CB8AC3E}">
-        <p14:creationId xmlns:p14="http://schemas.microsoft.com/office/powerpoint/2010/main" val="1734690963"/>
+        <p14:creationId xmlns:p14="http://schemas.microsoft.com/office/powerpoint/2010/main" val="535240141"/>
       </p:ext>
     </p:extLst>
   </p:cSld>
@@ -8107,7 +8156,7 @@
           <p:cNvPr id="2" name="Title 1">
             <a:extLst>
               <a:ext uri="{FF2B5EF4-FFF2-40B4-BE49-F238E27FC236}">
-                <a16:creationId xmlns:a16="http://schemas.microsoft.com/office/drawing/2014/main" id="{D4985CBC-A8D3-D568-87AE-62116BA26CA4}"/>
+                <a16:creationId xmlns:a16="http://schemas.microsoft.com/office/drawing/2014/main" id="{01A87E3D-DE56-CF2C-7E3E-A12305FBC087}"/>
               </a:ext>
             </a:extLst>
           </p:cNvPr>
@@ -8125,11 +8174,7 @@
           <a:p>
             <a:r>
               <a:rPr lang="en-US" dirty="0"/>
-              <a:t>Core</a:t>
-            </a:r>
-            <a:r>
-              <a:rPr lang="en-US"/>
-              <a:t>: Community</a:t>
+              <a:t>Club: star-trek club</a:t>
             </a:r>
           </a:p>
         </p:txBody>
@@ -8139,7 +8184,7 @@
           <p:cNvPr id="3" name="Content Placeholder 2">
             <a:extLst>
               <a:ext uri="{FF2B5EF4-FFF2-40B4-BE49-F238E27FC236}">
-                <a16:creationId xmlns:a16="http://schemas.microsoft.com/office/drawing/2014/main" id="{DE574F07-D8D0-C8B1-0C37-1C3C8D8A70F7}"/>
+                <a16:creationId xmlns:a16="http://schemas.microsoft.com/office/drawing/2014/main" id="{08DBE7FE-2E19-A9FF-90F3-B8B62D9B4FCB}"/>
               </a:ext>
             </a:extLst>
           </p:cNvPr>
@@ -8155,39 +8200,24 @@
           <a:bodyPr/>
           <a:lstStyle/>
           <a:p>
+            <a:pPr marL="0" indent="0">
+              <a:buNone/>
+            </a:pPr>
             <a:r>
               <a:rPr lang="en-US" dirty="0"/>
-              <a:t>In community, we learned about, well, our community.</a:t>
-            </a:r>
-          </a:p>
-          <a:p>
+              <a:t>Well, while there where many good </a:t>
+            </a:r>
+            <a:r>
+              <a:rPr lang="en-US" dirty="0" err="1"/>
+              <a:t>memorys</a:t>
+            </a:r>
             <a:r>
               <a:rPr lang="en-US" dirty="0"/>
-              <a:t>While not inherently a skill: </a:t>
-            </a:r>
-          </a:p>
-          <a:p>
-            <a:pPr lvl="1"/>
-            <a:r>
-              <a:rPr lang="en-US" dirty="0"/>
-              <a:t>I learned more about the greater Houston area</a:t>
-            </a:r>
-          </a:p>
-          <a:p>
-            <a:pPr lvl="1"/>
-            <a:r>
-              <a:rPr lang="en-US" dirty="0"/>
-              <a:t>I made a nice slideshow about Charlie Serbia called “who am you”</a:t>
-            </a:r>
-          </a:p>
-          <a:p>
-            <a:r>
-              <a:rPr lang="en-US" dirty="0"/>
-              <a:t>As for how I’d use it, well, it just helps to know what’s around you so you can actually do things. Basically, less “use it” and more “add more things to </a:t>
-            </a:r>
-            <a:r>
-              <a:rPr lang="en-US"/>
-              <a:t>use skills on”</a:t>
+              <a:t>, I think one of my favorites had to have been some of the discussions we had about Data, specifically the fact that he does have emotions, contrary to his own </a:t>
+            </a:r>
+            <a:r>
+              <a:rPr lang="en-US"/>
+              <a:t>statments</a:t>
             </a:r>
             <a:endParaRPr lang="en-US" dirty="0"/>
           </a:p>
@@ -8196,7 +8226,7 @@
     </p:spTree>
     <p:extLst>
       <p:ext uri="{BB962C8B-B14F-4D97-AF65-F5344CB8AC3E}">
-        <p14:creationId xmlns:p14="http://schemas.microsoft.com/office/powerpoint/2010/main" val="535240141"/>
+        <p14:creationId xmlns:p14="http://schemas.microsoft.com/office/powerpoint/2010/main" val="1829906075"/>
       </p:ext>
     </p:extLst>
   </p:cSld>
@@ -8228,7 +8258,7 @@
           <p:cNvPr id="2" name="Title 1">
             <a:extLst>
               <a:ext uri="{FF2B5EF4-FFF2-40B4-BE49-F238E27FC236}">
-                <a16:creationId xmlns:a16="http://schemas.microsoft.com/office/drawing/2014/main" id="{01A87E3D-DE56-CF2C-7E3E-A12305FBC087}"/>
+                <a16:creationId xmlns:a16="http://schemas.microsoft.com/office/drawing/2014/main" id="{53D3B13D-4EA4-72D0-C584-F7E4962CE06F}"/>
               </a:ext>
             </a:extLst>
           </p:cNvPr>
@@ -8245,8 +8275,8 @@
           <a:lstStyle/>
           <a:p>
             <a:r>
-              <a:rPr lang="en-US" dirty="0"/>
-              <a:t>Club: star-trek club</a:t>
+              <a:rPr lang="en-US"/>
+              <a:t>Favorite memory</a:t>
             </a:r>
           </a:p>
         </p:txBody>
@@ -8256,7 +8286,7 @@
           <p:cNvPr id="3" name="Content Placeholder 2">
             <a:extLst>
               <a:ext uri="{FF2B5EF4-FFF2-40B4-BE49-F238E27FC236}">
-                <a16:creationId xmlns:a16="http://schemas.microsoft.com/office/drawing/2014/main" id="{08DBE7FE-2E19-A9FF-90F3-B8B62D9B4FCB}"/>
+                <a16:creationId xmlns:a16="http://schemas.microsoft.com/office/drawing/2014/main" id="{BD770F2A-2830-597A-D03F-334F7AD6AE4C}"/>
               </a:ext>
             </a:extLst>
           </p:cNvPr>
@@ -8269,27 +8299,38 @@
         </p:nvSpPr>
         <p:spPr/>
         <p:txBody>
-          <a:bodyPr/>
+          <a:bodyPr vert="horz" lIns="91440" tIns="45720" rIns="91440" bIns="45720" rtlCol="0" anchor="t">
+            <a:normAutofit/>
+          </a:bodyPr>
           <a:lstStyle/>
           <a:p>
+            <a:r>
+              <a:rPr lang="en-US"/>
+              <a:t>Well, this term wasn't that memorable, honestly. So, I'm going more with what I did that I'm most proud of.</a:t>
+            </a:r>
+          </a:p>
+          <a:p>
             <a:pPr marL="0" indent="0">
               <a:buNone/>
             </a:pPr>
-            <a:r>
-              <a:rPr lang="en-US" dirty="0"/>
-              <a:t>Well, while there where many good </a:t>
-            </a:r>
-            <a:r>
-              <a:rPr lang="en-US" dirty="0" err="1"/>
-              <a:t>memorys</a:t>
-            </a:r>
-            <a:r>
-              <a:rPr lang="en-US" dirty="0"/>
-              <a:t>, I think one of my favorites had to have been some of the discussions we had about Data, specifically the fact that he does have emotions, contrary to his own </a:t>
-            </a:r>
-            <a:r>
-              <a:rPr lang="en-US"/>
-              <a:t>statments</a:t>
+            <a:endParaRPr lang="en-US" dirty="0"/>
+          </a:p>
+          <a:p>
+            <a:pPr marL="0" indent="0">
+              <a:buNone/>
+            </a:pPr>
+            <a:r>
+              <a:rPr lang="en-US"/>
+              <a:t>That is my "dynamic file path" system. There's no easy way  show an image of it, but basically it allows saving a file within the inside of a programs folder structure.</a:t>
+            </a:r>
+          </a:p>
+          <a:p>
+            <a:pPr marL="0" indent="0">
+              <a:buNone/>
+            </a:pPr>
+            <a:r>
+              <a:rPr lang="en-US"/>
+              <a:t> </a:t>
             </a:r>
             <a:endParaRPr lang="en-US" dirty="0"/>
           </a:p>
@@ -8298,7 +8339,7 @@
     </p:spTree>
     <p:extLst>
       <p:ext uri="{BB962C8B-B14F-4D97-AF65-F5344CB8AC3E}">
-        <p14:creationId xmlns:p14="http://schemas.microsoft.com/office/powerpoint/2010/main" val="1829906075"/>
+        <p14:creationId xmlns:p14="http://schemas.microsoft.com/office/powerpoint/2010/main" val="394541520"/>
       </p:ext>
     </p:extLst>
   </p:cSld>

--- a/Current Presentation/Spring 2026.pptx
+++ b/Current Presentation/Spring 2026.pptx
@@ -122,7 +122,7 @@
 <file path=ppt/revisionInfo.xml><?xml version="1.0" encoding="utf-8"?>
 <p1510:revInfo xmlns:a="http://schemas.openxmlformats.org/drawingml/2006/main" xmlns:r="http://schemas.openxmlformats.org/officeDocument/2006/relationships" xmlns:p1510="http://schemas.microsoft.com/office/powerpoint/2015/10/main">
   <p1510:revLst>
-    <p1510:client id="{6998B00B-2615-DA7F-16DD-BEDBD145F26F}" v="113" dt="2026-06-22T15:24:41.416"/>
+    <p1510:client id="{6998B00B-2615-DA7F-16DD-BEDBD145F26F}" v="142" dt="2026-06-22T15:26:48.182"/>
   </p1510:revLst>
 </p1510:revInfo>
 </file>
@@ -8320,8 +8320,16 @@
               <a:buNone/>
             </a:pPr>
             <a:r>
-              <a:rPr lang="en-US"/>
-              <a:t>That is my "dynamic file path" system. There's no easy way  show an image of it, but basically it allows saving a file within the inside of a programs folder structure.</a:t>
+              <a:rPr lang="en-US" dirty="0"/>
+              <a:t>That is my "dynamic file path" system. There's no easy way  show an image of </a:t>
+            </a:r>
+            <a:r>
+              <a:rPr lang="en-US"/>
+              <a:t>it, but long story short basically it allows </a:t>
+            </a:r>
+            <a:r>
+              <a:rPr lang="en-US" dirty="0"/>
+              <a:t>saving a file within the inside of a programs folder structure.</a:t>
             </a:r>
           </a:p>
           <a:p>

--- a/Current Presentation/Spring 2026.pptx
+++ b/Current Presentation/Spring 2026.pptx
@@ -5,7 +5,7 @@
     <p:sldMasterId id="2147483660" r:id="rId1"/>
   </p:sldMasterIdLst>
   <p:notesMasterIdLst>
-    <p:notesMasterId r:id="rId7"/>
+    <p:notesMasterId r:id="rId8"/>
   </p:notesMasterIdLst>
   <p:sldIdLst>
     <p:sldId id="260" r:id="rId2"/>
@@ -13,6 +13,7 @@
     <p:sldId id="262" r:id="rId4"/>
     <p:sldId id="263" r:id="rId5"/>
     <p:sldId id="264" r:id="rId6"/>
+    <p:sldId id="265" r:id="rId7"/>
   </p:sldIdLst>
   <p:sldSz cx="12192000" cy="6858000"/>
   <p:notesSz cx="6858000" cy="9144000"/>
@@ -122,7 +123,7 @@
 <file path=ppt/revisionInfo.xml><?xml version="1.0" encoding="utf-8"?>
 <p1510:revInfo xmlns:a="http://schemas.openxmlformats.org/drawingml/2006/main" xmlns:r="http://schemas.openxmlformats.org/officeDocument/2006/relationships" xmlns:p1510="http://schemas.microsoft.com/office/powerpoint/2015/10/main">
   <p1510:revLst>
-    <p1510:client id="{6998B00B-2615-DA7F-16DD-BEDBD145F26F}" v="142" dt="2026-06-22T15:26:48.182"/>
+    <p1510:client id="{6998B00B-2615-DA7F-16DD-BEDBD145F26F}" v="155" dt="2026-06-22T15:32:01.324"/>
   </p1510:revLst>
 </p1510:revInfo>
 </file>
@@ -8348,6 +8349,86 @@
     <p:extLst>
       <p:ext uri="{BB962C8B-B14F-4D97-AF65-F5344CB8AC3E}">
         <p14:creationId xmlns:p14="http://schemas.microsoft.com/office/powerpoint/2010/main" val="394541520"/>
+      </p:ext>
+    </p:extLst>
+  </p:cSld>
+  <p:clrMapOvr>
+    <a:masterClrMapping/>
+  </p:clrMapOvr>
+</p:sld>
+</file>
+
+<file path=ppt/slides/slide6.xml><?xml version="1.0" encoding="utf-8"?>
+<p:sld xmlns:a="http://schemas.openxmlformats.org/drawingml/2006/main" xmlns:r="http://schemas.openxmlformats.org/officeDocument/2006/relationships" xmlns:p="http://schemas.openxmlformats.org/presentationml/2006/main">
+  <p:cSld>
+    <p:spTree>
+      <p:nvGrpSpPr>
+        <p:cNvPr id="1" name=""/>
+        <p:cNvGrpSpPr/>
+        <p:nvPr/>
+      </p:nvGrpSpPr>
+      <p:grpSpPr>
+        <a:xfrm>
+          <a:off x="0" y="0"/>
+          <a:ext cx="0" cy="0"/>
+          <a:chOff x="0" y="0"/>
+          <a:chExt cx="0" cy="0"/>
+        </a:xfrm>
+      </p:grpSpPr>
+      <p:sp>
+        <p:nvSpPr>
+          <p:cNvPr id="2" name="Title 1">
+            <a:extLst>
+              <a:ext uri="{FF2B5EF4-FFF2-40B4-BE49-F238E27FC236}">
+                <a16:creationId xmlns:a16="http://schemas.microsoft.com/office/drawing/2014/main" id="{E63EE618-B0C2-B471-2E78-A560436DABD6}"/>
+              </a:ext>
+            </a:extLst>
+          </p:cNvPr>
+          <p:cNvSpPr>
+            <a:spLocks noGrp="1"/>
+          </p:cNvSpPr>
+          <p:nvPr>
+            <p:ph type="title"/>
+          </p:nvPr>
+        </p:nvSpPr>
+        <p:spPr/>
+        <p:txBody>
+          <a:bodyPr/>
+          <a:lstStyle/>
+          <a:p>
+            <a:endParaRPr lang="en-US" dirty="0"/>
+          </a:p>
+        </p:txBody>
+      </p:sp>
+      <p:sp>
+        <p:nvSpPr>
+          <p:cNvPr id="3" name="Content Placeholder 2">
+            <a:extLst>
+              <a:ext uri="{FF2B5EF4-FFF2-40B4-BE49-F238E27FC236}">
+                <a16:creationId xmlns:a16="http://schemas.microsoft.com/office/drawing/2014/main" id="{10471AC3-F161-A9D9-01DF-6E4CFCB54B5D}"/>
+              </a:ext>
+            </a:extLst>
+          </p:cNvPr>
+          <p:cNvSpPr>
+            <a:spLocks noGrp="1"/>
+          </p:cNvSpPr>
+          <p:nvPr>
+            <p:ph idx="1"/>
+          </p:nvPr>
+        </p:nvSpPr>
+        <p:spPr/>
+        <p:txBody>
+          <a:bodyPr/>
+          <a:lstStyle/>
+          <a:p>
+            <a:endParaRPr lang="en-US"/>
+          </a:p>
+        </p:txBody>
+      </p:sp>
+    </p:spTree>
+    <p:extLst>
+      <p:ext uri="{BB962C8B-B14F-4D97-AF65-F5344CB8AC3E}">
+        <p14:creationId xmlns:p14="http://schemas.microsoft.com/office/powerpoint/2010/main" val="1150352523"/>
       </p:ext>
     </p:extLst>
   </p:cSld>

--- a/Current Presentation/Spring 2026.pptx
+++ b/Current Presentation/Spring 2026.pptx
@@ -113,6 +113,20 @@
     </a:lvl9pPr>
   </p:defaultTextStyle>
   <p:extLst>
+    <p:ext uri="{521415D9-36F7-43E2-AB2F-B90AF26B5E84}">
+      <p14:sectionLst xmlns:p14="http://schemas.microsoft.com/office/powerpoint/2010/main">
+        <p14:section name="Default Section" id="{6B736126-433D-4E27-8CA2-964397748075}">
+          <p14:sldIdLst>
+            <p14:sldId id="260"/>
+            <p14:sldId id="261"/>
+            <p14:sldId id="262"/>
+            <p14:sldId id="263"/>
+            <p14:sldId id="264"/>
+            <p14:sldId id="265"/>
+          </p14:sldIdLst>
+        </p14:section>
+      </p14:sectionLst>
+    </p:ext>
     <p:ext uri="{EFAFB233-063F-42B5-8137-9DF3F51BA10A}">
       <p15:sldGuideLst xmlns:p15="http://schemas.microsoft.com/office/powerpoint/2012/main"/>
     </p:ext>
@@ -123,7 +137,8 @@
 <file path=ppt/revisionInfo.xml><?xml version="1.0" encoding="utf-8"?>
 <p1510:revInfo xmlns:a="http://schemas.openxmlformats.org/drawingml/2006/main" xmlns:r="http://schemas.openxmlformats.org/officeDocument/2006/relationships" xmlns:p1510="http://schemas.microsoft.com/office/powerpoint/2015/10/main">
   <p1510:revLst>
-    <p1510:client id="{6998B00B-2615-DA7F-16DD-BEDBD145F26F}" v="155" dt="2026-06-22T15:32:01.324"/>
+    <p1510:client id="{6998B00B-2615-DA7F-16DD-BEDBD145F26F}" v="169" dt="2026-06-22T15:38:36.746"/>
+    <p1510:client id="{ECBCC7A4-2B2E-30B8-636B-1ED04629B37E}" v="16" dt="2026-06-22T15:42:10.420"/>
   </p1510:revLst>
 </p1510:revInfo>
 </file>
@@ -8361,6 +8376,17 @@
 <file path=ppt/slides/slide6.xml><?xml version="1.0" encoding="utf-8"?>
 <p:sld xmlns:a="http://schemas.openxmlformats.org/drawingml/2006/main" xmlns:r="http://schemas.openxmlformats.org/officeDocument/2006/relationships" xmlns:p="http://schemas.openxmlformats.org/presentationml/2006/main">
   <p:cSld>
+    <p:bg>
+      <p:bgPr>
+        <a:blipFill>
+          <a:blip r:embed="rId2"/>
+          <a:stretch>
+            <a:fillRect t="-11000" b="-11000"/>
+          </a:stretch>
+        </a:blipFill>
+        <a:effectLst/>
+      </p:bgPr>
+    </p:bg>
     <p:spTree>
       <p:nvGrpSpPr>
         <p:cNvPr id="1" name=""/>
@@ -8375,56 +8401,6 @@
           <a:chExt cx="0" cy="0"/>
         </a:xfrm>
       </p:grpSpPr>
-      <p:sp>
-        <p:nvSpPr>
-          <p:cNvPr id="2" name="Title 1">
-            <a:extLst>
-              <a:ext uri="{FF2B5EF4-FFF2-40B4-BE49-F238E27FC236}">
-                <a16:creationId xmlns:a16="http://schemas.microsoft.com/office/drawing/2014/main" id="{E63EE618-B0C2-B471-2E78-A560436DABD6}"/>
-              </a:ext>
-            </a:extLst>
-          </p:cNvPr>
-          <p:cNvSpPr>
-            <a:spLocks noGrp="1"/>
-          </p:cNvSpPr>
-          <p:nvPr>
-            <p:ph type="title"/>
-          </p:nvPr>
-        </p:nvSpPr>
-        <p:spPr/>
-        <p:txBody>
-          <a:bodyPr/>
-          <a:lstStyle/>
-          <a:p>
-            <a:endParaRPr lang="en-US" dirty="0"/>
-          </a:p>
-        </p:txBody>
-      </p:sp>
-      <p:sp>
-        <p:nvSpPr>
-          <p:cNvPr id="3" name="Content Placeholder 2">
-            <a:extLst>
-              <a:ext uri="{FF2B5EF4-FFF2-40B4-BE49-F238E27FC236}">
-                <a16:creationId xmlns:a16="http://schemas.microsoft.com/office/drawing/2014/main" id="{10471AC3-F161-A9D9-01DF-6E4CFCB54B5D}"/>
-              </a:ext>
-            </a:extLst>
-          </p:cNvPr>
-          <p:cNvSpPr>
-            <a:spLocks noGrp="1"/>
-          </p:cNvSpPr>
-          <p:nvPr>
-            <p:ph idx="1"/>
-          </p:nvPr>
-        </p:nvSpPr>
-        <p:spPr/>
-        <p:txBody>
-          <a:bodyPr/>
-          <a:lstStyle/>
-          <a:p>
-            <a:endParaRPr lang="en-US"/>
-          </a:p>
-        </p:txBody>
-      </p:sp>
     </p:spTree>
     <p:extLst>
       <p:ext uri="{BB962C8B-B14F-4D97-AF65-F5344CB8AC3E}">

--- a/Current Presentation/Spring 2026.pptx
+++ b/Current Presentation/Spring 2026.pptx
@@ -138,7 +138,7 @@
 <p1510:revInfo xmlns:a="http://schemas.openxmlformats.org/drawingml/2006/main" xmlns:r="http://schemas.openxmlformats.org/officeDocument/2006/relationships" xmlns:p1510="http://schemas.microsoft.com/office/powerpoint/2015/10/main">
   <p1510:revLst>
     <p1510:client id="{6998B00B-2615-DA7F-16DD-BEDBD145F26F}" v="169" dt="2026-06-22T15:38:36.746"/>
-    <p1510:client id="{ECBCC7A4-2B2E-30B8-636B-1ED04629B37E}" v="16" dt="2026-06-22T15:42:10.420"/>
+    <p1510:client id="{ECBCC7A4-2B2E-30B8-636B-1ED04629B37E}" v="33" dt="2026-06-22T15:49:22.341"/>
   </p1510:revLst>
 </p1510:revInfo>
 </file>
@@ -8376,17 +8376,6 @@
 <file path=ppt/slides/slide6.xml><?xml version="1.0" encoding="utf-8"?>
 <p:sld xmlns:a="http://schemas.openxmlformats.org/drawingml/2006/main" xmlns:r="http://schemas.openxmlformats.org/officeDocument/2006/relationships" xmlns:p="http://schemas.openxmlformats.org/presentationml/2006/main">
   <p:cSld>
-    <p:bg>
-      <p:bgPr>
-        <a:blipFill>
-          <a:blip r:embed="rId2"/>
-          <a:stretch>
-            <a:fillRect t="-11000" b="-11000"/>
-          </a:stretch>
-        </a:blipFill>
-        <a:effectLst/>
-      </p:bgPr>
-    </p:bg>
     <p:spTree>
       <p:nvGrpSpPr>
         <p:cNvPr id="1" name=""/>
@@ -8401,10 +8390,89 @@
           <a:chExt cx="0" cy="0"/>
         </a:xfrm>
       </p:grpSpPr>
+      <p:sp>
+        <p:nvSpPr>
+          <p:cNvPr id="4" name="Rectangle 3">
+            <a:extLst>
+              <a:ext uri="{FF2B5EF4-FFF2-40B4-BE49-F238E27FC236}">
+                <a16:creationId xmlns:a16="http://schemas.microsoft.com/office/drawing/2014/main" id="{3BD51B22-6035-47AA-F096-DF50E1293D3E}"/>
+              </a:ext>
+            </a:extLst>
+          </p:cNvPr>
+          <p:cNvSpPr/>
+          <p:nvPr/>
+        </p:nvSpPr>
+        <p:spPr>
+          <a:xfrm>
+            <a:off x="7349" y="2756"/>
+            <a:ext cx="12184099" cy="6973746"/>
+          </a:xfrm>
+          <a:prstGeom prst="rect">
+            <a:avLst/>
+          </a:prstGeom>
+          <a:solidFill>
+            <a:srgbClr val="2A71AC"/>
+          </a:solidFill>
+        </p:spPr>
+        <p:style>
+          <a:lnRef idx="2">
+            <a:schemeClr val="accent1">
+              <a:shade val="15000"/>
+            </a:schemeClr>
+          </a:lnRef>
+          <a:fillRef idx="1">
+            <a:schemeClr val="accent1"/>
+          </a:fillRef>
+          <a:effectRef idx="0">
+            <a:schemeClr val="accent1"/>
+          </a:effectRef>
+          <a:fontRef idx="minor">
+            <a:schemeClr val="lt1"/>
+          </a:fontRef>
+        </p:style>
+        <p:txBody>
+          <a:bodyPr rtlCol="0" anchor="ctr"/>
+          <a:lstStyle/>
+          <a:p>
+            <a:pPr algn="ctr"/>
+            <a:endParaRPr lang="en-US"/>
+          </a:p>
+        </p:txBody>
+      </p:sp>
+      <p:pic>
+        <p:nvPicPr>
+          <p:cNvPr id="3" name="Picture 2" descr="A blue screen with a qr code&#10;&#10;AI-generated content may be incorrect.">
+            <a:extLst>
+              <a:ext uri="{FF2B5EF4-FFF2-40B4-BE49-F238E27FC236}">
+                <a16:creationId xmlns:a16="http://schemas.microsoft.com/office/drawing/2014/main" id="{093AC10B-ECC1-A72C-BD4E-BE5469028DD3}"/>
+              </a:ext>
+            </a:extLst>
+          </p:cNvPr>
+          <p:cNvPicPr>
+            <a:picLocks noChangeAspect="1"/>
+          </p:cNvPicPr>
+          <p:nvPr/>
+        </p:nvPicPr>
+        <p:blipFill>
+          <a:blip r:embed="rId2"/>
+          <a:stretch>
+            <a:fillRect/>
+          </a:stretch>
+        </p:blipFill>
+        <p:spPr>
+          <a:xfrm>
+            <a:off x="3300412" y="1500187"/>
+            <a:ext cx="5591175" cy="3857625"/>
+          </a:xfrm>
+          <a:prstGeom prst="rect">
+            <a:avLst/>
+          </a:prstGeom>
+        </p:spPr>
+      </p:pic>
     </p:spTree>
     <p:extLst>
       <p:ext uri="{BB962C8B-B14F-4D97-AF65-F5344CB8AC3E}">
-        <p14:creationId xmlns:p14="http://schemas.microsoft.com/office/powerpoint/2010/main" val="1150352523"/>
+        <p14:creationId xmlns:p14="http://schemas.microsoft.com/office/powerpoint/2010/main" val="3833004409"/>
       </p:ext>
     </p:extLst>
   </p:cSld>

--- a/Current Presentation/Spring 2026.pptx
+++ b/Current Presentation/Spring 2026.pptx
@@ -138,7 +138,7 @@
 <p1510:revInfo xmlns:a="http://schemas.openxmlformats.org/drawingml/2006/main" xmlns:r="http://schemas.openxmlformats.org/officeDocument/2006/relationships" xmlns:p1510="http://schemas.microsoft.com/office/powerpoint/2015/10/main">
   <p1510:revLst>
     <p1510:client id="{6998B00B-2615-DA7F-16DD-BEDBD145F26F}" v="169" dt="2026-06-22T15:38:36.746"/>
-    <p1510:client id="{ECBCC7A4-2B2E-30B8-636B-1ED04629B37E}" v="33" dt="2026-06-22T15:49:22.341"/>
+    <p1510:client id="{ECBCC7A4-2B2E-30B8-636B-1ED04629B37E}" v="34" dt="2026-06-22T15:56:26.950"/>
   </p1510:revLst>
 </p1510:revInfo>
 </file>
@@ -8404,14 +8404,14 @@
         </p:nvSpPr>
         <p:spPr>
           <a:xfrm>
-            <a:off x="7349" y="2756"/>
-            <a:ext cx="12184099" cy="6973746"/>
+            <a:off x="0" y="0"/>
+            <a:ext cx="12192000" cy="6858000"/>
           </a:xfrm>
           <a:prstGeom prst="rect">
             <a:avLst/>
           </a:prstGeom>
           <a:solidFill>
-            <a:srgbClr val="2A71AC"/>
+            <a:srgbClr val="1070AA"/>
           </a:solidFill>
         </p:spPr>
         <p:style>

--- a/Current Presentation/Spring 2026.pptx
+++ b/Current Presentation/Spring 2026.pptx
@@ -138,7 +138,7 @@
 <p1510:revInfo xmlns:a="http://schemas.openxmlformats.org/drawingml/2006/main" xmlns:r="http://schemas.openxmlformats.org/officeDocument/2006/relationships" xmlns:p1510="http://schemas.microsoft.com/office/powerpoint/2015/10/main">
   <p1510:revLst>
     <p1510:client id="{6998B00B-2615-DA7F-16DD-BEDBD145F26F}" v="169" dt="2026-06-22T15:38:36.746"/>
-    <p1510:client id="{ECBCC7A4-2B2E-30B8-636B-1ED04629B37E}" v="34" dt="2026-06-22T15:56:26.950"/>
+    <p1510:client id="{ECBCC7A4-2B2E-30B8-636B-1ED04629B37E}" v="35" dt="2026-06-22T16:10:01.589"/>
   </p1510:revLst>
 </p1510:revInfo>
 </file>
@@ -8461,8 +8461,8 @@
         </p:blipFill>
         <p:spPr>
           <a:xfrm>
-            <a:off x="3300412" y="1500187"/>
-            <a:ext cx="5591175" cy="3857625"/>
+            <a:off x="1593440" y="1298191"/>
+            <a:ext cx="5324442" cy="3670464"/>
           </a:xfrm>
           <a:prstGeom prst="rect">
             <a:avLst/>

--- a/Current Presentation/Spring 2026.pptx
+++ b/Current Presentation/Spring 2026.pptx
@@ -127,9 +127,6 @@
         </p14:section>
       </p14:sectionLst>
     </p:ext>
-    <p:ext uri="{EFAFB233-063F-42B5-8137-9DF3F51BA10A}">
-      <p15:sldGuideLst xmlns:p15="http://schemas.microsoft.com/office/powerpoint/2012/main"/>
-    </p:ext>
   </p:extLst>
 </p:presentation>
 </file>
@@ -138,7 +135,8 @@
 <p1510:revInfo xmlns:a="http://schemas.openxmlformats.org/drawingml/2006/main" xmlns:r="http://schemas.openxmlformats.org/officeDocument/2006/relationships" xmlns:p1510="http://schemas.microsoft.com/office/powerpoint/2015/10/main">
   <p1510:revLst>
     <p1510:client id="{6998B00B-2615-DA7F-16DD-BEDBD145F26F}" v="169" dt="2026-06-22T15:38:36.746"/>
-    <p1510:client id="{ECBCC7A4-2B2E-30B8-636B-1ED04629B37E}" v="35" dt="2026-06-22T16:10:01.589"/>
+    <p1510:client id="{BA9E5608-3EA5-4EB9-B58B-23EA90833BA8}" v="2" dt="2026-06-22T16:31:05.899"/>
+    <p1510:client id="{ECBCC7A4-2B2E-30B8-636B-1ED04629B37E}" v="53" dt="2026-06-22T16:20:29.604"/>
   </p1510:revLst>
 </p1510:revInfo>
 </file>
@@ -581,7 +579,7 @@
               <a:defRPr/>
             </a:pPr>
             <a:r>
-              <a:rPr lang="en-US" dirty="0"/>
+              <a:rPr lang="en-US"/>
               <a:t>After third debugging, say the “those are my 3” joke</a:t>
             </a:r>
           </a:p>
@@ -668,24 +666,24 @@
           <a:lstStyle/>
           <a:p>
             <a:r>
-              <a:rPr lang="en-US" dirty="0"/>
+              <a:rPr lang="en-US"/>
               <a:t>for “who am you”, explain the whole “the questions where in first person”</a:t>
             </a:r>
           </a:p>
           <a:p>
-            <a:endParaRPr lang="en-US" dirty="0"/>
-          </a:p>
-          <a:p>
-            <a:r>
-              <a:rPr lang="en-US" dirty="0"/>
+            <a:endParaRPr lang="en-US"/>
+          </a:p>
+          <a:p>
+            <a:r>
+              <a:rPr lang="en-US"/>
               <a:t>Explain reason chose </a:t>
             </a:r>
             <a:r>
-              <a:rPr lang="en-US" dirty="0" err="1"/>
+              <a:rPr lang="en-US" err="1"/>
               <a:t>shipchannel</a:t>
             </a:r>
             <a:r>
-              <a:rPr lang="en-US" dirty="0"/>
+              <a:rPr lang="en-US"/>
               <a:t>?</a:t>
             </a:r>
           </a:p>
@@ -772,15 +770,15 @@
           <a:lstStyle/>
           <a:p>
             <a:r>
-              <a:rPr lang="en-US" dirty="0"/>
+              <a:rPr lang="en-US"/>
               <a:t>More </a:t>
             </a:r>
             <a:r>
-              <a:rPr lang="en-US" dirty="0" err="1"/>
+              <a:rPr lang="en-US" err="1"/>
               <a:t>deltais</a:t>
             </a:r>
             <a:r>
-              <a:rPr lang="en-US" dirty="0"/>
+              <a:rPr lang="en-US"/>
               <a:t> on discussions?</a:t>
             </a:r>
           </a:p>
@@ -899,7 +897,6 @@
               <a:rPr lang="en-US"/>
               <a:t>Click to edit Master title style</a:t>
             </a:r>
-            <a:endParaRPr lang="en-US" dirty="0"/>
           </a:p>
         </p:txBody>
       </p:sp>
@@ -966,7 +963,6 @@
               <a:rPr lang="en-US"/>
               <a:t>Click to edit Master subtitle style</a:t>
             </a:r>
-            <a:endParaRPr lang="en-US" dirty="0"/>
           </a:p>
         </p:txBody>
       </p:sp>
@@ -1108,7 +1104,6 @@
               <a:rPr lang="en-US"/>
               <a:t>Click to edit Master title style</a:t>
             </a:r>
-            <a:endParaRPr lang="en-US" dirty="0"/>
           </a:p>
         </p:txBody>
       </p:sp>
@@ -1173,7 +1168,6 @@
               <a:rPr lang="en-US"/>
               <a:t>Click icon to add picture</a:t>
             </a:r>
-            <a:endParaRPr lang="en-US" dirty="0"/>
           </a:p>
         </p:txBody>
       </p:sp>
@@ -1395,7 +1389,6 @@
               <a:rPr lang="en-US"/>
               <a:t>Click to edit Master title style</a:t>
             </a:r>
-            <a:endParaRPr lang="en-US" dirty="0"/>
           </a:p>
         </p:txBody>
       </p:sp>
@@ -1636,7 +1629,6 @@
               <a:rPr lang="en-US"/>
               <a:t>Click to edit Master title style</a:t>
             </a:r>
-            <a:endParaRPr lang="en-US" dirty="0"/>
           </a:p>
         </p:txBody>
       </p:sp>
@@ -1963,7 +1955,7 @@
           <a:p>
             <a:pPr lvl="0"/>
             <a:r>
-              <a:rPr lang="en-US" sz="8000" dirty="0">
+              <a:rPr lang="en-US" sz="8000">
                 <a:solidFill>
                   <a:schemeClr val="tx1"/>
                 </a:solidFill>
@@ -2079,7 +2071,7 @@
           <a:p>
             <a:pPr lvl="0" algn="r"/>
             <a:r>
-              <a:rPr lang="en-US" sz="8000" dirty="0">
+              <a:rPr lang="en-US" sz="8000">
                 <a:solidFill>
                   <a:schemeClr val="tx1"/>
                 </a:solidFill>
@@ -2178,7 +2170,6 @@
               <a:rPr lang="en-US"/>
               <a:t>Click to edit Master title style</a:t>
             </a:r>
-            <a:endParaRPr lang="en-US" dirty="0"/>
           </a:p>
         </p:txBody>
       </p:sp>
@@ -2385,7 +2376,6 @@
               <a:rPr lang="en-US"/>
               <a:t>Click to edit Master title style</a:t>
             </a:r>
-            <a:endParaRPr lang="en-US" dirty="0"/>
           </a:p>
         </p:txBody>
       </p:sp>
@@ -2922,7 +2912,6 @@
               <a:rPr lang="en-US"/>
               <a:t>Click to edit Master title style</a:t>
             </a:r>
-            <a:endParaRPr lang="en-US" dirty="0"/>
           </a:p>
         </p:txBody>
       </p:sp>
@@ -3072,7 +3061,6 @@
               <a:rPr lang="en-US"/>
               <a:t>Click icon to add picture</a:t>
             </a:r>
-            <a:endParaRPr lang="en-US" dirty="0"/>
           </a:p>
         </p:txBody>
       </p:sp>
@@ -3289,7 +3277,6 @@
               <a:rPr lang="en-US"/>
               <a:t>Click icon to add picture</a:t>
             </a:r>
-            <a:endParaRPr lang="en-US" dirty="0"/>
           </a:p>
         </p:txBody>
       </p:sp>
@@ -3506,7 +3493,6 @@
               <a:rPr lang="en-US"/>
               <a:t>Click icon to add picture</a:t>
             </a:r>
-            <a:endParaRPr lang="en-US" dirty="0"/>
           </a:p>
         </p:txBody>
       </p:sp>
@@ -3691,7 +3677,6 @@
               <a:rPr lang="en-US"/>
               <a:t>Click to edit Master title style</a:t>
             </a:r>
-            <a:endParaRPr lang="en-US" dirty="0"/>
           </a:p>
         </p:txBody>
       </p:sp>
@@ -3748,7 +3733,6 @@
               <a:rPr lang="en-US"/>
               <a:t>Fifth level</a:t>
             </a:r>
-            <a:endParaRPr lang="en-US" dirty="0"/>
           </a:p>
         </p:txBody>
       </p:sp>
@@ -3905,7 +3889,6 @@
               <a:rPr lang="en-US"/>
               <a:t>Click to edit Master title style</a:t>
             </a:r>
-            <a:endParaRPr lang="en-US" dirty="0"/>
           </a:p>
         </p:txBody>
       </p:sp>
@@ -3962,7 +3945,6 @@
               <a:rPr lang="en-US"/>
               <a:t>Fifth level</a:t>
             </a:r>
-            <a:endParaRPr lang="en-US" dirty="0"/>
           </a:p>
         </p:txBody>
       </p:sp>
@@ -4099,7 +4081,6 @@
               <a:rPr lang="en-US"/>
               <a:t>Click to edit Master title style</a:t>
             </a:r>
-            <a:endParaRPr lang="en-US" dirty="0"/>
           </a:p>
         </p:txBody>
       </p:sp>
@@ -4151,7 +4132,6 @@
               <a:rPr lang="en-US"/>
               <a:t>Fifth level</a:t>
             </a:r>
-            <a:endParaRPr lang="en-US" dirty="0"/>
           </a:p>
         </p:txBody>
       </p:sp>
@@ -4310,7 +4290,6 @@
               <a:rPr lang="en-US"/>
               <a:t>Click to edit Master title style</a:t>
             </a:r>
-            <a:endParaRPr lang="en-US" dirty="0"/>
           </a:p>
         </p:txBody>
       </p:sp>
@@ -4568,7 +4547,6 @@
               <a:rPr lang="en-US"/>
               <a:t>Click to edit Master title style</a:t>
             </a:r>
-            <a:endParaRPr lang="en-US" dirty="0"/>
           </a:p>
         </p:txBody>
       </p:sp>
@@ -4625,7 +4603,6 @@
               <a:rPr lang="en-US"/>
               <a:t>Fifth level</a:t>
             </a:r>
-            <a:endParaRPr lang="en-US" dirty="0"/>
           </a:p>
         </p:txBody>
       </p:sp>
@@ -4682,7 +4659,6 @@
               <a:rPr lang="en-US"/>
               <a:t>Fifth level</a:t>
             </a:r>
-            <a:endParaRPr lang="en-US" dirty="0"/>
           </a:p>
         </p:txBody>
       </p:sp>
@@ -4805,7 +4781,6 @@
               <a:rPr lang="en-US"/>
               <a:t>Click to edit Master title style</a:t>
             </a:r>
-            <a:endParaRPr lang="en-US" dirty="0"/>
           </a:p>
         </p:txBody>
       </p:sp>
@@ -4933,7 +4908,6 @@
               <a:rPr lang="en-US"/>
               <a:t>Fifth level</a:t>
             </a:r>
-            <a:endParaRPr lang="en-US" dirty="0"/>
           </a:p>
         </p:txBody>
       </p:sp>
@@ -5061,7 +5035,6 @@
               <a:rPr lang="en-US"/>
               <a:t>Fifth level</a:t>
             </a:r>
-            <a:endParaRPr lang="en-US" dirty="0"/>
           </a:p>
         </p:txBody>
       </p:sp>
@@ -5179,7 +5152,6 @@
               <a:rPr lang="en-US"/>
               <a:t>Click to edit Master title style</a:t>
             </a:r>
-            <a:endParaRPr lang="en-US" dirty="0"/>
           </a:p>
         </p:txBody>
       </p:sp>
@@ -5401,7 +5373,6 @@
               <a:rPr lang="en-US"/>
               <a:t>Click to edit Master title style</a:t>
             </a:r>
-            <a:endParaRPr lang="en-US" dirty="0"/>
           </a:p>
         </p:txBody>
       </p:sp>
@@ -5458,7 +5429,6 @@
               <a:rPr lang="en-US"/>
               <a:t>Fifth level</a:t>
             </a:r>
-            <a:endParaRPr lang="en-US" dirty="0"/>
           </a:p>
         </p:txBody>
       </p:sp>
@@ -5650,7 +5620,6 @@
               <a:rPr lang="en-US"/>
               <a:t>Click to edit Master title style</a:t>
             </a:r>
-            <a:endParaRPr lang="en-US" dirty="0"/>
           </a:p>
         </p:txBody>
       </p:sp>
@@ -5715,7 +5684,6 @@
               <a:rPr lang="en-US"/>
               <a:t>Click icon to add picture</a:t>
             </a:r>
-            <a:endParaRPr lang="en-US" dirty="0"/>
           </a:p>
         </p:txBody>
       </p:sp>
@@ -5943,7 +5911,6 @@
               <a:rPr lang="en-US"/>
               <a:t>Click to edit Master title style</a:t>
             </a:r>
-            <a:endParaRPr lang="en-US" dirty="0"/>
           </a:p>
         </p:txBody>
       </p:sp>
@@ -6005,7 +5972,6 @@
               <a:rPr lang="en-US"/>
               <a:t>Fifth level</a:t>
             </a:r>
-            <a:endParaRPr lang="en-US" dirty="0"/>
           </a:p>
         </p:txBody>
       </p:sp>
@@ -6490,14 +6456,14 @@
           <a:lstStyle/>
           <a:p>
             <a:r>
-              <a:rPr lang="en-US" dirty="0"/>
+              <a:rPr lang="en-US"/>
               <a:t>Charlie’s</a:t>
             </a:r>
             <a:br>
-              <a:rPr lang="en-US" dirty="0"/>
+              <a:rPr lang="en-US"/>
             </a:br>
             <a:r>
-              <a:rPr lang="en-US" dirty="0"/>
+              <a:rPr lang="en-US"/>
               <a:t>Spring Term Presentation</a:t>
             </a:r>
           </a:p>
@@ -6696,7 +6662,7 @@
           </a:lstStyle>
           <a:p>
             <a:r>
-              <a:rPr lang="en-US" dirty="0"/>
+              <a:rPr lang="en-US"/>
               <a:t>Charlie</a:t>
             </a:r>
           </a:p>
@@ -6895,7 +6861,7 @@
           </a:lstStyle>
           <a:p>
             <a:r>
-              <a:rPr lang="en-US" dirty="0"/>
+              <a:rPr lang="en-US"/>
               <a:t>Hatch</a:t>
             </a:r>
           </a:p>
@@ -7094,7 +7060,7 @@
           </a:lstStyle>
           <a:p>
             <a:r>
-              <a:rPr lang="en-US" sz="2800" b="1" dirty="0"/>
+              <a:rPr lang="en-US" sz="2800" b="1"/>
               <a:t>B</a:t>
             </a:r>
           </a:p>
@@ -7293,7 +7259,7 @@
           </a:lstStyle>
           <a:p>
             <a:r>
-              <a:rPr lang="en-US" sz="2800" b="1" dirty="0"/>
+              <a:rPr lang="en-US" sz="2800" b="1"/>
               <a:t>y</a:t>
             </a:r>
           </a:p>
@@ -7894,7 +7860,7 @@
           <a:lstStyle/>
           <a:p>
             <a:r>
-              <a:rPr lang="en-US" dirty="0"/>
+              <a:rPr lang="en-US"/>
               <a:t>Tech: Advanced app-dev</a:t>
             </a:r>
           </a:p>
@@ -7924,57 +7890,57 @@
           <a:lstStyle/>
           <a:p>
             <a:r>
-              <a:rPr lang="en-US" dirty="0"/>
+              <a:rPr lang="en-US"/>
               <a:t>We worked on two things in advanced </a:t>
             </a:r>
             <a:r>
-              <a:rPr lang="en-US" dirty="0" err="1"/>
+              <a:rPr lang="en-US" err="1"/>
               <a:t>appdev</a:t>
             </a:r>
             <a:r>
-              <a:rPr lang="en-US" dirty="0"/>
+              <a:rPr lang="en-US"/>
               <a:t>.</a:t>
             </a:r>
           </a:p>
           <a:p>
             <a:pPr lvl="1"/>
             <a:r>
-              <a:rPr lang="en-US" dirty="0"/>
+              <a:rPr lang="en-US"/>
               <a:t>One of the projects we worked on was the Snack Shack</a:t>
             </a:r>
           </a:p>
           <a:p>
             <a:pPr lvl="2"/>
             <a:r>
-              <a:rPr lang="en-US" dirty="0"/>
+              <a:rPr lang="en-US"/>
               <a:t>In actuality, the most major was, as discussed by Ryan, actually databases and SQL. But I figured you have heard about that from him</a:t>
             </a:r>
           </a:p>
           <a:p>
             <a:pPr lvl="1"/>
             <a:r>
-              <a:rPr lang="en-US" dirty="0"/>
+              <a:rPr lang="en-US"/>
               <a:t>Tasks used:</a:t>
             </a:r>
           </a:p>
           <a:p>
             <a:pPr lvl="2"/>
             <a:r>
-              <a:rPr lang="en-US" dirty="0"/>
+              <a:rPr lang="en-US"/>
               <a:t>Debugging</a:t>
             </a:r>
           </a:p>
           <a:p>
             <a:pPr lvl="3"/>
             <a:r>
-              <a:rPr lang="en-US" dirty="0"/>
+              <a:rPr lang="en-US"/>
               <a:t>Debugging</a:t>
             </a:r>
           </a:p>
           <a:p>
             <a:pPr lvl="3"/>
             <a:r>
-              <a:rPr lang="en-US" dirty="0"/>
+              <a:rPr lang="en-US"/>
               <a:t>Debugging</a:t>
             </a:r>
           </a:p>
@@ -7983,34 +7949,34 @@
               <a:buNone/>
             </a:pPr>
             <a:r>
-              <a:rPr lang="en-US" dirty="0"/>
+              <a:rPr lang="en-US"/>
               <a:t>Okay, in all seriousness</a:t>
             </a:r>
           </a:p>
           <a:p>
             <a:pPr lvl="2"/>
             <a:r>
-              <a:rPr lang="en-US" dirty="0"/>
+              <a:rPr lang="en-US"/>
               <a:t>Critical Thinking</a:t>
             </a:r>
           </a:p>
           <a:p>
             <a:pPr lvl="2"/>
             <a:r>
-              <a:rPr lang="en-US" dirty="0"/>
+              <a:rPr lang="en-US"/>
               <a:t>Trial and Error</a:t>
             </a:r>
           </a:p>
           <a:p>
             <a:pPr lvl="2"/>
-            <a:endParaRPr lang="en-US" dirty="0"/>
+            <a:endParaRPr lang="en-US"/>
           </a:p>
           <a:p>
             <a:pPr marL="0" indent="0">
               <a:buNone/>
             </a:pPr>
             <a:r>
-              <a:rPr lang="en-US" dirty="0"/>
+              <a:rPr lang="en-US"/>
               <a:t>As for what I gained, it’s mostly just more knowledge, in this case about SQL</a:t>
             </a:r>
           </a:p>
@@ -8068,12 +8034,8 @@
           <a:lstStyle/>
           <a:p>
             <a:r>
-              <a:rPr lang="en-US" dirty="0"/>
-              <a:t>Core</a:t>
-            </a:r>
-            <a:r>
-              <a:rPr lang="en-US"/>
-              <a:t>: Community</a:t>
+              <a:rPr lang="en-US"/>
+              <a:t>Core: Community</a:t>
             </a:r>
           </a:p>
         </p:txBody>
@@ -8100,40 +8062,35 @@
           <a:lstStyle/>
           <a:p>
             <a:r>
-              <a:rPr lang="en-US" dirty="0"/>
+              <a:rPr lang="en-US"/>
               <a:t>In community, we learned about, well, our community.</a:t>
             </a:r>
           </a:p>
           <a:p>
             <a:r>
-              <a:rPr lang="en-US" dirty="0"/>
+              <a:rPr lang="en-US"/>
               <a:t>While not inherently a skill: </a:t>
             </a:r>
           </a:p>
           <a:p>
             <a:pPr lvl="1"/>
             <a:r>
-              <a:rPr lang="en-US" dirty="0"/>
+              <a:rPr lang="en-US"/>
               <a:t>I learned more about the greater Houston area</a:t>
             </a:r>
           </a:p>
           <a:p>
             <a:pPr lvl="1"/>
             <a:r>
-              <a:rPr lang="en-US" dirty="0"/>
+              <a:rPr lang="en-US"/>
               <a:t>I made a nice slideshow about Charlie Serbia called “who am you”</a:t>
             </a:r>
           </a:p>
           <a:p>
             <a:r>
-              <a:rPr lang="en-US" dirty="0"/>
-              <a:t>As for how I’d use it, well, it just helps to know what’s around you so you can actually do things. Basically, less “use it” and more “add more things to </a:t>
-            </a:r>
-            <a:r>
-              <a:rPr lang="en-US"/>
-              <a:t>use skills on”</a:t>
-            </a:r>
-            <a:endParaRPr lang="en-US" dirty="0"/>
+              <a:rPr lang="en-US"/>
+              <a:t>As for how I’d use it, well, it just helps to know what’s around you so you can actually do things. Basically, less “use it” and more “add more things to use skills on”</a:t>
+            </a:r>
           </a:p>
         </p:txBody>
       </p:sp>
@@ -8189,7 +8146,7 @@
           <a:lstStyle/>
           <a:p>
             <a:r>
-              <a:rPr lang="en-US" dirty="0"/>
+              <a:rPr lang="en-US"/>
               <a:t>Club: star-trek club</a:t>
             </a:r>
           </a:p>
@@ -8220,22 +8177,17 @@
               <a:buNone/>
             </a:pPr>
             <a:r>
-              <a:rPr lang="en-US" dirty="0"/>
+              <a:rPr lang="en-US"/>
               <a:t>Well, while there where many good </a:t>
             </a:r>
             <a:r>
-              <a:rPr lang="en-US" dirty="0" err="1"/>
+              <a:rPr lang="en-US" err="1"/>
               <a:t>memorys</a:t>
             </a:r>
             <a:r>
-              <a:rPr lang="en-US" dirty="0"/>
-              <a:t>, I think one of my favorites had to have been some of the discussions we had about Data, specifically the fact that he does have emotions, contrary to his own </a:t>
-            </a:r>
-            <a:r>
-              <a:rPr lang="en-US"/>
-              <a:t>statments</a:t>
-            </a:r>
-            <a:endParaRPr lang="en-US" dirty="0"/>
+              <a:rPr lang="en-US"/>
+              <a:t>, I think one of my favorites had to have been some of the discussions we had about Data, specifically the fact that he does have emotions, contrary to his own statments</a:t>
+            </a:r>
           </a:p>
         </p:txBody>
       </p:sp>
@@ -8329,23 +8281,15 @@
             <a:pPr marL="0" indent="0">
               <a:buNone/>
             </a:pPr>
-            <a:endParaRPr lang="en-US" dirty="0"/>
+            <a:endParaRPr lang="en-US"/>
           </a:p>
           <a:p>
             <a:pPr marL="0" indent="0">
               <a:buNone/>
             </a:pPr>
             <a:r>
-              <a:rPr lang="en-US" dirty="0"/>
-              <a:t>That is my "dynamic file path" system. There's no easy way  show an image of </a:t>
-            </a:r>
-            <a:r>
-              <a:rPr lang="en-US"/>
-              <a:t>it, but long story short basically it allows </a:t>
-            </a:r>
-            <a:r>
-              <a:rPr lang="en-US" dirty="0"/>
-              <a:t>saving a file within the inside of a programs folder structure.</a:t>
+              <a:rPr lang="en-US"/>
+              <a:t>That is my "dynamic file path" system. There's no easy way  show an image of it, but long story short basically it allows saving a file within the inside of a programs folder structure.</a:t>
             </a:r>
           </a:p>
           <a:p>
@@ -8356,7 +8300,6 @@
               <a:rPr lang="en-US"/>
               <a:t> </a:t>
             </a:r>
-            <a:endParaRPr lang="en-US" dirty="0"/>
           </a:p>
         </p:txBody>
       </p:sp>
@@ -8479,6 +8422,7 @@
   <p:clrMapOvr>
     <a:masterClrMapping/>
   </p:clrMapOvr>
+  <p:transition advClick="0"/>
 </p:sld>
 </file>
 

--- a/Current Presentation/Spring 2026.pptx
+++ b/Current Presentation/Spring 2026.pptx
@@ -5,7 +5,7 @@
     <p:sldMasterId id="2147483660" r:id="rId1"/>
   </p:sldMasterIdLst>
   <p:notesMasterIdLst>
-    <p:notesMasterId r:id="rId8"/>
+    <p:notesMasterId r:id="rId9"/>
   </p:notesMasterIdLst>
   <p:sldIdLst>
     <p:sldId id="260" r:id="rId2"/>
@@ -14,6 +14,7 @@
     <p:sldId id="263" r:id="rId5"/>
     <p:sldId id="264" r:id="rId6"/>
     <p:sldId id="265" r:id="rId7"/>
+    <p:sldId id="266" r:id="rId8"/>
   </p:sldIdLst>
   <p:sldSz cx="12192000" cy="6858000"/>
   <p:notesSz cx="6858000" cy="9144000"/>
@@ -123,6 +124,7 @@
             <p14:sldId id="263"/>
             <p14:sldId id="264"/>
             <p14:sldId id="265"/>
+            <p14:sldId id="266"/>
           </p14:sldIdLst>
         </p14:section>
       </p14:sectionLst>
@@ -135,7 +137,7 @@
 <p1510:revInfo xmlns:a="http://schemas.openxmlformats.org/drawingml/2006/main" xmlns:r="http://schemas.openxmlformats.org/officeDocument/2006/relationships" xmlns:p1510="http://schemas.microsoft.com/office/powerpoint/2015/10/main">
   <p1510:revLst>
     <p1510:client id="{6998B00B-2615-DA7F-16DD-BEDBD145F26F}" v="169" dt="2026-06-22T15:38:36.746"/>
-    <p1510:client id="{BA9E5608-3EA5-4EB9-B58B-23EA90833BA8}" v="2" dt="2026-06-22T16:31:05.899"/>
+    <p1510:client id="{BA9E5608-3EA5-4EB9-B58B-23EA90833BA8}" v="3" dt="2026-06-22T16:38:41.075"/>
     <p1510:client id="{ECBCC7A4-2B2E-30B8-636B-1ED04629B37E}" v="53" dt="2026-06-22T16:20:29.604"/>
   </p1510:revLst>
 </p1510:revInfo>
@@ -8423,6 +8425,159 @@
     <a:masterClrMapping/>
   </p:clrMapOvr>
   <p:transition advClick="0"/>
+</p:sld>
+</file>
+
+<file path=ppt/slides/slide7.xml><?xml version="1.0" encoding="utf-8"?>
+<p:sld xmlns:a="http://schemas.openxmlformats.org/drawingml/2006/main" xmlns:r="http://schemas.openxmlformats.org/officeDocument/2006/relationships" xmlns:p="http://schemas.openxmlformats.org/presentationml/2006/main">
+  <p:cSld>
+    <p:spTree>
+      <p:nvGrpSpPr>
+        <p:cNvPr id="1" name=""/>
+        <p:cNvGrpSpPr/>
+        <p:nvPr/>
+      </p:nvGrpSpPr>
+      <p:grpSpPr>
+        <a:xfrm>
+          <a:off x="0" y="0"/>
+          <a:ext cx="0" cy="0"/>
+          <a:chOff x="0" y="0"/>
+          <a:chExt cx="0" cy="0"/>
+        </a:xfrm>
+      </p:grpSpPr>
+      <p:sp>
+        <p:nvSpPr>
+          <p:cNvPr id="2" name="Notes TextBox"/>
+          <p:cNvSpPr txBox="1"/>
+          <p:nvPr/>
+        </p:nvSpPr>
+        <p:spPr>
+          <a:xfrm>
+            <a:off x="457200" y="304800"/>
+            <a:ext cx="11277600" cy="6248400"/>
+          </a:xfrm>
+          <a:prstGeom prst="rect">
+            <a:avLst/>
+          </a:prstGeom>
+          <a:noFill/>
+        </p:spPr>
+        <p:txBody>
+          <a:bodyPr wrap="square" rtlCol="0">
+            <a:normAutofit/>
+          </a:bodyPr>
+          <a:lstStyle/>
+          <a:p>
+            <a:r>
+              <a:rPr lang="en-US" sz="1400" b="1" dirty="0"/>
+              <a:t>VALIDATION NOTES — context for a future fix (nothing has been fixed yet)</a:t>
+            </a:r>
+          </a:p>
+          <a:p>
+            <a:endParaRPr lang="en-US" sz="700" dirty="0"/>
+          </a:p>
+          <a:p>
+            <a:r>
+              <a:rPr lang="en-US" sz="1050" b="1" dirty="0"/>
+              <a:t>ERROR (verbatim from packer): </a:t>
+            </a:r>
+            <a:r>
+              <a:rPr lang="en-US" sz="1050" dirty="0"/>
+              <a:t>ppt/slides/slide_104_C9102F9E.xml — Element '{http://schemas.openxmlformats.org/presentationml/2006/main}contentPart': Character content is not allowed, because the content type is empty.</a:t>
+            </a:r>
+          </a:p>
+          <a:p>
+            <a:endParaRPr lang="en-US" sz="700" dirty="0"/>
+          </a:p>
+          <a:p>
+            <a:r>
+              <a:rPr lang="en-US" sz="1050" b="1" dirty="0"/>
+              <a:t>ROOT CAUSE: </a:t>
+            </a:r>
+            <a:r>
+              <a:rPr lang="en-US" sz="1050" dirty="0"/>
+              <a:t>Visible slide 4 contains a &lt;p:contentPart&gt; element (a digital-ink annotation). The OOXML schema the validator uses declares p:contentPart as an EMPTY content type, so it permits no character data at all. When the .pptx is unpacked, the XML is pretty-printed, which inserts newline + indentation whitespace BETWEEN the contentPart's child tags. That whitespace counts as "character content" inside an element the schema says must be empty, so validation fails. This is a cosmetic schema-strictness quirk caused by pretty-printing, NOT real corruption — PowerPoint opens the file normally. The deck was therefore packed with --skip-validation.</a:t>
+            </a:r>
+          </a:p>
+          <a:p>
+            <a:endParaRPr lang="en-US" sz="700" dirty="0"/>
+          </a:p>
+          <a:p>
+            <a:r>
+              <a:rPr lang="en-US" sz="1050" b="1" dirty="0"/>
+              <a:t>AFFECTED PART: </a:t>
+            </a:r>
+            <a:r>
+              <a:rPr lang="en-US" sz="1050" dirty="0"/>
+              <a:t>ppt/slides/slide_104_C9102F9E.xml (visible slide 4); the offending node is the &lt;p:contentPart ... r:id="rId2"&gt; block.</a:t>
+            </a:r>
+          </a:p>
+          <a:p>
+            <a:endParaRPr lang="en-US" sz="700" dirty="0"/>
+          </a:p>
+          <a:p>
+            <a:r>
+              <a:rPr lang="en-US" sz="1050" b="1" dirty="0"/>
+              <a:t>POSSIBLE FIXES (pick one):</a:t>
+            </a:r>
+          </a:p>
+          <a:p>
+            <a:r>
+              <a:rPr lang="en-US" sz="1050" dirty="0"/>
+              <a:t>1. Minify just the contentPart element so no whitespace text nodes sit between its child tags.</a:t>
+            </a:r>
+          </a:p>
+          <a:p>
+            <a:r>
+              <a:rPr lang="en-US" sz="1050" dirty="0"/>
+              <a:t>2. Delete the contentPart, its rId2 relationship, and ppt/ink/ink_104_C9102F9E.xml if the ink stroke is unwanted.</a:t>
+            </a:r>
+          </a:p>
+          <a:p>
+            <a:r>
+              <a:rPr lang="en-US" sz="1050" dirty="0"/>
+              <a:t>3. Leave as-is and keep packing with --skip-validation (the file is valid for PowerPoint).</a:t>
+            </a:r>
+          </a:p>
+          <a:p>
+            <a:endParaRPr lang="en-US" sz="700" dirty="0"/>
+          </a:p>
+          <a:p>
+            <a:r>
+              <a:rPr lang="en-US" sz="1050" b="1" dirty="0"/>
+              <a:t>THE ANNOTATION ("that annotation thing"):</a:t>
+            </a:r>
+          </a:p>
+          <a:p>
+            <a:r>
+              <a:rPr lang="en-US" sz="1050" dirty="0"/>
+              <a:t>- Type: digital ink / pen stroke (InkML), surfaced as &lt;p:contentPart name="Ink 3"&gt; on slide 4.</a:t>
+            </a:r>
+          </a:p>
+          <a:p>
+            <a:r>
+              <a:rPr lang="en-US" sz="1050" dirty="0"/>
+              <a:t>- Ink data file: ppt/ink/ink_104_C9102F9E.xml; drawn 2026-06-15T16:24:39 with a 0.035 cm pen.</a:t>
+            </a:r>
+          </a:p>
+          <a:p>
+            <a:r>
+              <a:rPr lang="en-US" sz="1050" dirty="0"/>
+              <a:t>- Geometry on slide: offset x=1133175 y=3095550 EMU, size 360x360 EMU (~0.0004 in) — effectively a single dot.</a:t>
+            </a:r>
+          </a:p>
+          <a:p>
+            <a:r>
+              <a:rPr lang="en-US" sz="1050" dirty="0"/>
+              <a:t>- Trace contents (verbatim): 0 0 24575,'0'0'-8191 — one point, i.e. an accidental tap/dot, not a meaningful drawing.</a:t>
+            </a:r>
+          </a:p>
+        </p:txBody>
+      </p:sp>
+    </p:spTree>
+  </p:cSld>
+  <p:clrMapOvr>
+    <a:masterClrMapping/>
+  </p:clrMapOvr>
 </p:sld>
 </file>
 

--- a/Current Presentation/Spring 2026.pptx
+++ b/Current Presentation/Spring 2026.pptx
@@ -5,7 +5,7 @@
     <p:sldMasterId id="2147483660" r:id="rId1"/>
   </p:sldMasterIdLst>
   <p:notesMasterIdLst>
-    <p:notesMasterId r:id="rId9"/>
+    <p:notesMasterId r:id="rId8"/>
   </p:notesMasterIdLst>
   <p:sldIdLst>
     <p:sldId id="260" r:id="rId2"/>
@@ -14,7 +14,6 @@
     <p:sldId id="263" r:id="rId5"/>
     <p:sldId id="264" r:id="rId6"/>
     <p:sldId id="265" r:id="rId7"/>
-    <p:sldId id="266" r:id="rId8"/>
   </p:sldIdLst>
   <p:sldSz cx="12192000" cy="6858000"/>
   <p:notesSz cx="6858000" cy="9144000"/>
@@ -124,7 +123,6 @@
             <p14:sldId id="263"/>
             <p14:sldId id="264"/>
             <p14:sldId id="265"/>
-            <p14:sldId id="266"/>
           </p14:sldIdLst>
         </p14:section>
       </p14:sectionLst>
@@ -137,7 +135,7 @@
 <p1510:revInfo xmlns:a="http://schemas.openxmlformats.org/drawingml/2006/main" xmlns:r="http://schemas.openxmlformats.org/officeDocument/2006/relationships" xmlns:p1510="http://schemas.microsoft.com/office/powerpoint/2015/10/main">
   <p1510:revLst>
     <p1510:client id="{6998B00B-2615-DA7F-16DD-BEDBD145F26F}" v="169" dt="2026-06-22T15:38:36.746"/>
-    <p1510:client id="{BA9E5608-3EA5-4EB9-B58B-23EA90833BA8}" v="3" dt="2026-06-22T16:38:41.075"/>
+    <p1510:client id="{BA9E5608-3EA5-4EB9-B58B-23EA90833BA8}" v="2" dt="2026-06-22T16:31:05.899"/>
     <p1510:client id="{ECBCC7A4-2B2E-30B8-636B-1ED04629B37E}" v="53" dt="2026-06-22T16:20:29.604"/>
   </p1510:revLst>
 </p1510:revInfo>
@@ -8425,159 +8423,6 @@
     <a:masterClrMapping/>
   </p:clrMapOvr>
   <p:transition advClick="0"/>
-</p:sld>
-</file>
-
-<file path=ppt/slides/slide7.xml><?xml version="1.0" encoding="utf-8"?>
-<p:sld xmlns:a="http://schemas.openxmlformats.org/drawingml/2006/main" xmlns:r="http://schemas.openxmlformats.org/officeDocument/2006/relationships" xmlns:p="http://schemas.openxmlformats.org/presentationml/2006/main">
-  <p:cSld>
-    <p:spTree>
-      <p:nvGrpSpPr>
-        <p:cNvPr id="1" name=""/>
-        <p:cNvGrpSpPr/>
-        <p:nvPr/>
-      </p:nvGrpSpPr>
-      <p:grpSpPr>
-        <a:xfrm>
-          <a:off x="0" y="0"/>
-          <a:ext cx="0" cy="0"/>
-          <a:chOff x="0" y="0"/>
-          <a:chExt cx="0" cy="0"/>
-        </a:xfrm>
-      </p:grpSpPr>
-      <p:sp>
-        <p:nvSpPr>
-          <p:cNvPr id="2" name="Notes TextBox"/>
-          <p:cNvSpPr txBox="1"/>
-          <p:nvPr/>
-        </p:nvSpPr>
-        <p:spPr>
-          <a:xfrm>
-            <a:off x="457200" y="304800"/>
-            <a:ext cx="11277600" cy="6248400"/>
-          </a:xfrm>
-          <a:prstGeom prst="rect">
-            <a:avLst/>
-          </a:prstGeom>
-          <a:noFill/>
-        </p:spPr>
-        <p:txBody>
-          <a:bodyPr wrap="square" rtlCol="0">
-            <a:normAutofit/>
-          </a:bodyPr>
-          <a:lstStyle/>
-          <a:p>
-            <a:r>
-              <a:rPr lang="en-US" sz="1400" b="1" dirty="0"/>
-              <a:t>VALIDATION NOTES — context for a future fix (nothing has been fixed yet)</a:t>
-            </a:r>
-          </a:p>
-          <a:p>
-            <a:endParaRPr lang="en-US" sz="700" dirty="0"/>
-          </a:p>
-          <a:p>
-            <a:r>
-              <a:rPr lang="en-US" sz="1050" b="1" dirty="0"/>
-              <a:t>ERROR (verbatim from packer): </a:t>
-            </a:r>
-            <a:r>
-              <a:rPr lang="en-US" sz="1050" dirty="0"/>
-              <a:t>ppt/slides/slide_104_C9102F9E.xml — Element '{http://schemas.openxmlformats.org/presentationml/2006/main}contentPart': Character content is not allowed, because the content type is empty.</a:t>
-            </a:r>
-          </a:p>
-          <a:p>
-            <a:endParaRPr lang="en-US" sz="700" dirty="0"/>
-          </a:p>
-          <a:p>
-            <a:r>
-              <a:rPr lang="en-US" sz="1050" b="1" dirty="0"/>
-              <a:t>ROOT CAUSE: </a:t>
-            </a:r>
-            <a:r>
-              <a:rPr lang="en-US" sz="1050" dirty="0"/>
-              <a:t>Visible slide 4 contains a &lt;p:contentPart&gt; element (a digital-ink annotation). The OOXML schema the validator uses declares p:contentPart as an EMPTY content type, so it permits no character data at all. When the .pptx is unpacked, the XML is pretty-printed, which inserts newline + indentation whitespace BETWEEN the contentPart's child tags. That whitespace counts as "character content" inside an element the schema says must be empty, so validation fails. This is a cosmetic schema-strictness quirk caused by pretty-printing, NOT real corruption — PowerPoint opens the file normally. The deck was therefore packed with --skip-validation.</a:t>
-            </a:r>
-          </a:p>
-          <a:p>
-            <a:endParaRPr lang="en-US" sz="700" dirty="0"/>
-          </a:p>
-          <a:p>
-            <a:r>
-              <a:rPr lang="en-US" sz="1050" b="1" dirty="0"/>
-              <a:t>AFFECTED PART: </a:t>
-            </a:r>
-            <a:r>
-              <a:rPr lang="en-US" sz="1050" dirty="0"/>
-              <a:t>ppt/slides/slide_104_C9102F9E.xml (visible slide 4); the offending node is the &lt;p:contentPart ... r:id="rId2"&gt; block.</a:t>
-            </a:r>
-          </a:p>
-          <a:p>
-            <a:endParaRPr lang="en-US" sz="700" dirty="0"/>
-          </a:p>
-          <a:p>
-            <a:r>
-              <a:rPr lang="en-US" sz="1050" b="1" dirty="0"/>
-              <a:t>POSSIBLE FIXES (pick one):</a:t>
-            </a:r>
-          </a:p>
-          <a:p>
-            <a:r>
-              <a:rPr lang="en-US" sz="1050" dirty="0"/>
-              <a:t>1. Minify just the contentPart element so no whitespace text nodes sit between its child tags.</a:t>
-            </a:r>
-          </a:p>
-          <a:p>
-            <a:r>
-              <a:rPr lang="en-US" sz="1050" dirty="0"/>
-              <a:t>2. Delete the contentPart, its rId2 relationship, and ppt/ink/ink_104_C9102F9E.xml if the ink stroke is unwanted.</a:t>
-            </a:r>
-          </a:p>
-          <a:p>
-            <a:r>
-              <a:rPr lang="en-US" sz="1050" dirty="0"/>
-              <a:t>3. Leave as-is and keep packing with --skip-validation (the file is valid for PowerPoint).</a:t>
-            </a:r>
-          </a:p>
-          <a:p>
-            <a:endParaRPr lang="en-US" sz="700" dirty="0"/>
-          </a:p>
-          <a:p>
-            <a:r>
-              <a:rPr lang="en-US" sz="1050" b="1" dirty="0"/>
-              <a:t>THE ANNOTATION ("that annotation thing"):</a:t>
-            </a:r>
-          </a:p>
-          <a:p>
-            <a:r>
-              <a:rPr lang="en-US" sz="1050" dirty="0"/>
-              <a:t>- Type: digital ink / pen stroke (InkML), surfaced as &lt;p:contentPart name="Ink 3"&gt; on slide 4.</a:t>
-            </a:r>
-          </a:p>
-          <a:p>
-            <a:r>
-              <a:rPr lang="en-US" sz="1050" dirty="0"/>
-              <a:t>- Ink data file: ppt/ink/ink_104_C9102F9E.xml; drawn 2026-06-15T16:24:39 with a 0.035 cm pen.</a:t>
-            </a:r>
-          </a:p>
-          <a:p>
-            <a:r>
-              <a:rPr lang="en-US" sz="1050" dirty="0"/>
-              <a:t>- Geometry on slide: offset x=1133175 y=3095550 EMU, size 360x360 EMU (~0.0004 in) — effectively a single dot.</a:t>
-            </a:r>
-          </a:p>
-          <a:p>
-            <a:r>
-              <a:rPr lang="en-US" sz="1050" dirty="0"/>
-              <a:t>- Trace contents (verbatim): 0 0 24575,'0'0'-8191 — one point, i.e. an accidental tap/dot, not a meaningful drawing.</a:t>
-            </a:r>
-          </a:p>
-        </p:txBody>
-      </p:sp>
-    </p:spTree>
-  </p:cSld>
-  <p:clrMapOvr>
-    <a:masterClrMapping/>
-  </p:clrMapOvr>
 </p:sld>
 </file>
 

--- a/Current Presentation/Spring 2026.pptx
+++ b/Current Presentation/Spring 2026.pptx
@@ -5,7 +5,7 @@
     <p:sldMasterId id="2147483660" r:id="rId1"/>
   </p:sldMasterIdLst>
   <p:notesMasterIdLst>
-    <p:notesMasterId r:id="rId8"/>
+    <p:notesMasterId r:id="rId9"/>
   </p:notesMasterIdLst>
   <p:sldIdLst>
     <p:sldId id="260" r:id="rId2"/>
@@ -13,7 +13,8 @@
     <p:sldId id="262" r:id="rId4"/>
     <p:sldId id="263" r:id="rId5"/>
     <p:sldId id="264" r:id="rId6"/>
-    <p:sldId id="265" r:id="rId7"/>
+    <p:sldId id="266" r:id="rId7"/>
+    <p:sldId id="265" r:id="rId8"/>
   </p:sldIdLst>
   <p:sldSz cx="12192000" cy="6858000"/>
   <p:notesSz cx="6858000" cy="9144000"/>
@@ -122,6 +123,7 @@
             <p14:sldId id="262"/>
             <p14:sldId id="263"/>
             <p14:sldId id="264"/>
+            <p14:sldId id="266"/>
             <p14:sldId id="265"/>
           </p14:sldIdLst>
         </p14:section>
@@ -135,7 +137,7 @@
 <p1510:revInfo xmlns:a="http://schemas.openxmlformats.org/drawingml/2006/main" xmlns:r="http://schemas.openxmlformats.org/officeDocument/2006/relationships" xmlns:p1510="http://schemas.microsoft.com/office/powerpoint/2015/10/main">
   <p1510:revLst>
     <p1510:client id="{6998B00B-2615-DA7F-16DD-BEDBD145F26F}" v="169" dt="2026-06-22T15:38:36.746"/>
-    <p1510:client id="{BA9E5608-3EA5-4EB9-B58B-23EA90833BA8}" v="2" dt="2026-06-22T16:31:05.899"/>
+    <p1510:client id="{BA9E5608-3EA5-4EB9-B58B-23EA90833BA8}" v="731" dt="2026-06-22T16:59:33.224"/>
     <p1510:client id="{ECBCC7A4-2B2E-30B8-636B-1ED04629B37E}" v="53" dt="2026-06-22T16:20:29.604"/>
   </p1510:revLst>
 </p1510:revInfo>
@@ -165,6 +167,126 @@
     </inkml:brush>
   </inkml:definitions>
   <inkml:trace contextRef="#ctx0" brushRef="#br0">0 0 24575,'0'0'-8191</inkml:trace>
+</inkml:ink>
+</file>
+
+<file path=ppt/ink/ink2.xml><?xml version="1.0" encoding="utf-8"?>
+<inkml:ink xmlns:inkml="http://www.w3.org/2003/InkML">
+  <inkml:definitions>
+    <inkml:context xml:id="ctx0">
+      <inkml:inkSource xml:id="inkSrc0">
+        <inkml:traceFormat>
+          <inkml:channel name="X" type="integer" min="-2.14748E9" max="2.14748E9" units="cm"/>
+          <inkml:channel name="Y" type="integer" min="-2.14748E9" max="2.14748E9" units="cm"/>
+          <inkml:channel name="F" type="integer" max="32767" units="dev"/>
+          <inkml:channel name="OA" type="integer" max="360" units="deg"/>
+          <inkml:channel name="OE" type="integer" max="90" units="deg"/>
+        </inkml:traceFormat>
+        <inkml:channelProperties>
+          <inkml:channelProperty channel="X" name="resolution" value="1000" units="1/cm"/>
+          <inkml:channelProperty channel="Y" name="resolution" value="1000" units="1/cm"/>
+          <inkml:channelProperty channel="F" name="resolution" value="0" units="1/dev"/>
+          <inkml:channelProperty channel="OA" name="resolution" value="1000" units="1/deg"/>
+          <inkml:channelProperty channel="OE" name="resolution" value="1000" units="1/deg"/>
+        </inkml:channelProperties>
+      </inkml:inkSource>
+    </inkml:context>
+    <inkml:brush xml:id="br0">
+      <inkml:brushProperty name="width" value="0.1" units="cm"/>
+      <inkml:brushProperty name="height" value="0.1" units="cm"/>
+    </inkml:brush>
+  </inkml:definitions>
+  <inkml:trace contextRef="#ctx0" brushRef="#br0">12415 4842 16383 0 0,'0'8'0'0'0,"0"12"0"0"0,-4 7 0 0 0,-2 3 0 0 0,1 0 0 0 0,1 0 0 0 0,1-1 0 0 0,-4-2 0 0 0,1 0 0 0 0,0-1 0 0 0,1 0 0 0 0,-2 12 0 0 0,0 4 0 0 0,1 8 0 0 0,-3 16 0 0 0,-4 11 0 0 0,0 4 0 0 0,-6 6 0 0 0,0 1 0 0 0,3 3 0 0 0,0-2 0 0 0,3-2 0 0 0,4-9 0 0 0,3-12 0 0 0,2-13 0 0 0,3-12 0 0 0,1-8 0 0 0,-4-2 0 0 0,-1 4 0 0 0,0 3 0 0 0,-7 13 0 0 0,-2 10 0 0 0,1 17 0 0 0,3 12 0 0 0,4 7 0 0 0,2 5 0 0 0,2 2 0 0 0,2 1 0 0 0,0-1 0 0 0,0-9 0 0 0,1-12 0 0 0,-1-17 0 0 0,1-14 0 0 0,-1-12 0 0 0,0-5 0 0 0,0-3 0 0 0,0-3 0 0 0,0 1 0 0 0,0 1 0 0 0,0 8 0 0 0,-4 5 0 0 0,-2 9 0 0 0,-3 12 0 0 0,-1 8 0 0 0,-3 4 0 0 0,1-2 0 0 0,2-5 0 0 0,3-6 0 0 0,3-2 0 0 0,2-6 0 0 0,1-9 0 0 0,1-7 0 0 0,1-3 0 0 0,-1-3 0 0 0,1 1 0 0 0,-1-1 0 0 0,0 2 0 0 0,1 0 0 0 0,-1 2 0 0 0,0-2 0 0 0,0 3 0 0 0,0-2 0 0 0,0 1 0 0 0,0 4 0 0 0,0 2 0 0 0,0-1 0 0 0,0 0 0 0 0,0 1 0 0 0,0 3 0 0 0,0-4 0 0 0,0 0 0 0 0,0-2 0 0 0,0-1 0 0 0,0 2 0 0 0,0-2 0 0 0,0-3 0 0 0,0-4 0 0 0,0-4 0 0 0,0-1 0 0 0,0-2 0 0 0,0-1 0 0 0,0-1 0 0 0,0 5 0 0 0,-5 5 0 0 0,0 2 0 0 0,-1-1 0 0 0,2 2 0 0 0,1-2 0 0 0,-3 3 0 0 0,-1-1 0 0 0,1 2 0 0 0,2-7 0 0 0</inkml:trace>
+</inkml:ink>
+</file>
+
+<file path=ppt/ink/ink3.xml><?xml version="1.0" encoding="utf-8"?>
+<inkml:ink xmlns:inkml="http://www.w3.org/2003/InkML">
+  <inkml:definitions>
+    <inkml:context xml:id="ctx0">
+      <inkml:inkSource xml:id="inkSrc0">
+        <inkml:traceFormat>
+          <inkml:channel name="X" type="integer" min="-2.14748E9" max="2.14748E9" units="cm"/>
+          <inkml:channel name="Y" type="integer" min="-2.14748E9" max="2.14748E9" units="cm"/>
+          <inkml:channel name="F" type="integer" max="32767" units="dev"/>
+          <inkml:channel name="OA" type="integer" max="360" units="deg"/>
+          <inkml:channel name="OE" type="integer" max="90" units="deg"/>
+        </inkml:traceFormat>
+        <inkml:channelProperties>
+          <inkml:channelProperty channel="X" name="resolution" value="1000" units="1/cm"/>
+          <inkml:channelProperty channel="Y" name="resolution" value="1000" units="1/cm"/>
+          <inkml:channelProperty channel="F" name="resolution" value="0" units="1/dev"/>
+          <inkml:channelProperty channel="OA" name="resolution" value="1000" units="1/deg"/>
+          <inkml:channelProperty channel="OE" name="resolution" value="1000" units="1/deg"/>
+        </inkml:channelProperties>
+      </inkml:inkSource>
+    </inkml:context>
+    <inkml:brush xml:id="br0">
+      <inkml:brushProperty name="width" value="0.1" units="cm"/>
+      <inkml:brushProperty name="height" value="0.1" units="cm"/>
+    </inkml:brush>
+  </inkml:definitions>
+  <inkml:trace contextRef="#ctx0" brushRef="#br0">9366 5821 16383 0 0,'9'4'0'0'0,"11"2"0"0"0,15-1 0 0 0,19 4 0 0 0,26 8 0 0 0,20 2 0 0 0,33 2 0 0 0,27-3 0 0 0,21-5 0 0 0,22-4 0 0 0,12-3 0 0 0,2-4 0 0 0,-4-1 0 0 0,-18-1 0 0 0,-25 3 0 0 0,-32 2 0 0 0,-32-1 0 0 0,-25 0 0 0 0,-17-1 0 0 0,9-1 0 0 0,15-1 0 0 0,14-1 0 0 0,14 0 0 0 0,18 0 0 0 0,4 0 0 0 0,-5-1 0 0 0,-21 1 0 0 0,-21 0 0 0 0,-8 0 0 0 0,3 0 0 0 0,-5 0 0 0 0,-3 0 0 0 0,-11 4 0 0 0,-16 2 0 0 0</inkml:trace>
+</inkml:ink>
+</file>
+
+<file path=ppt/ink/ink4.xml><?xml version="1.0" encoding="utf-8"?>
+<inkml:ink xmlns:inkml="http://www.w3.org/2003/InkML">
+  <inkml:definitions>
+    <inkml:context xml:id="ctx0">
+      <inkml:inkSource xml:id="inkSrc0">
+        <inkml:traceFormat>
+          <inkml:channel name="X" type="integer" min="-2.14748E9" max="2.14748E9" units="cm"/>
+          <inkml:channel name="Y" type="integer" min="-2.14748E9" max="2.14748E9" units="cm"/>
+          <inkml:channel name="F" type="integer" max="32767" units="dev"/>
+          <inkml:channel name="OA" type="integer" max="360" units="deg"/>
+          <inkml:channel name="OE" type="integer" max="90" units="deg"/>
+        </inkml:traceFormat>
+        <inkml:channelProperties>
+          <inkml:channelProperty channel="X" name="resolution" value="1000" units="1/cm"/>
+          <inkml:channelProperty channel="Y" name="resolution" value="1000" units="1/cm"/>
+          <inkml:channelProperty channel="F" name="resolution" value="0" units="1/dev"/>
+          <inkml:channelProperty channel="OA" name="resolution" value="1000" units="1/deg"/>
+          <inkml:channelProperty channel="OE" name="resolution" value="1000" units="1/deg"/>
+        </inkml:channelProperties>
+      </inkml:inkSource>
+    </inkml:context>
+    <inkml:brush xml:id="br0">
+      <inkml:brushProperty name="width" value="0.1" units="cm"/>
+      <inkml:brushProperty name="height" value="0.1" units="cm"/>
+    </inkml:brush>
+  </inkml:definitions>
+  <inkml:trace contextRef="#ctx0" brushRef="#br0">15124 4577 16383 0 0,'4'0'0'0'0,"2"9"0"0"0,-1 11 0 0 0,-4 15 0 0 0,-8 19 0 0 0,-11 26 0 0 0,-11 24 0 0 0,0 35 0 0 0,0 22 0 0 0,5 23 0 0 0,7 14 0 0 0,6 4 0 0 0,5 1 0 0 0,3-7 0 0 0,3-17 0 0 0,-8-3 0 0 0,-2-7 0 0 0,1-6 0 0 0,1 12 0 0 0,2 15 0 0 0,3 22 0 0 0,1 18 0 0 0,1 13 0 0 0,1-1 0 0 0,1-7 0 0 0,-1-22 0 0 0,5-22 0 0 0,1-30 0 0 0,0-30 0 0 0,-2-33 0 0 0,-1-16 0 0 0,-1-13 0 0 0,-1-10 0 0 0,-5-2 0 0 0,-1-2 0 0 0,3-28 0 0 0,16-48 0 0 0,14-51 0 0 0,6-34 0 0 0,7-34 0 0 0,3-22 0 0 0,0-6 0 0 0,5 4 0 0 0,-2 14 0 0 0,-8 23 0 0 0,-3 24 0 0 0,-3 22 0 0 0,-7 20 0 0 0,-8 12 0 0 0,-7 6 0 0 0,-1-3 0 0 0,-3-11 0 0 0,7-17 0 0 0,0-13 0 0 0,7-17 0 0 0,4-8 0 0 0,11-16 0 0 0,-1 6 0 0 0,-3 7 0 0 0,3 5 0 0 0,-1 18 0 0 0,3 23 0 0 0,7 25 0 0 0,23 19 0 0 0,29 14 0 0 0,46 30 0 0 0,41 29 0 0 0,33 15 0 0 0,18 10 0 0 0,12 14 0 0 0,-19 0 0 0 0,-39-14 0 0 0,-30-7 0 0 0,-33-10 0 0 0,-35-7 0 0 0,-31 2 0 0 0,-22 1 0 0 0,-18 4 0 0 0,-11 14 0 0 0,-7 30 0 0 0,-5 27 0 0 0,0 27 0 0 0,-1 16 0 0 0,2 19 0 0 0,0-1 0 0 0,2 0 0 0 0,0-9 0 0 0,0-26 0 0 0,1-32 0 0 0,0-27 0 0 0,1-25 0 0 0,-1-16 0 0 0,0-9 0 0 0,-4-11 0 0 0,-2-8 0 0 0,1-3 0 0 0,0-1 0 0 0,2 0 0 0 0,-3 1 0 0 0,-1-4 0 0 0</inkml:trace>
+</inkml:ink>
+</file>
+
+<file path=ppt/ink/ink5.xml><?xml version="1.0" encoding="utf-8"?>
+<inkml:ink xmlns:inkml="http://www.w3.org/2003/InkML">
+  <inkml:definitions>
+    <inkml:context xml:id="ctx0">
+      <inkml:inkSource xml:id="inkSrc0">
+        <inkml:traceFormat>
+          <inkml:channel name="X" type="integer" min="-2.14748E9" max="2.14748E9" units="cm"/>
+          <inkml:channel name="Y" type="integer" min="-2.14748E9" max="2.14748E9" units="cm"/>
+          <inkml:channel name="F" type="integer" max="32767" units="dev"/>
+          <inkml:channel name="OA" type="integer" max="360" units="deg"/>
+          <inkml:channel name="OE" type="integer" max="90" units="deg"/>
+        </inkml:traceFormat>
+        <inkml:channelProperties>
+          <inkml:channelProperty channel="X" name="resolution" value="1000" units="1/cm"/>
+          <inkml:channelProperty channel="Y" name="resolution" value="1000" units="1/cm"/>
+          <inkml:channelProperty channel="F" name="resolution" value="0" units="1/dev"/>
+          <inkml:channelProperty channel="OA" name="resolution" value="1000" units="1/deg"/>
+          <inkml:channelProperty channel="OE" name="resolution" value="1000" units="1/deg"/>
+        </inkml:channelProperties>
+      </inkml:inkSource>
+    </inkml:context>
+    <inkml:brush xml:id="br0">
+      <inkml:brushProperty name="width" value="0.1" units="cm"/>
+      <inkml:brushProperty name="height" value="0.1" units="cm"/>
+    </inkml:brush>
+  </inkml:definitions>
+  <inkml:trace contextRef="#ctx0" brushRef="#br0">19579 8073 16383 0 0,'4'5'0'0'0,"41"9"0"0"0,59 24 0 0 0,67 19 0 0 0,57 8 0 0 0,45 9 0 0 0,23-6 0 0 0,-9-12 0 0 0,-31-15 0 0 0,-43-14 0 0 0,-40-12 0 0 0,-36-9 0 0 0,-34-5 0 0 0,-29-7 0 0 0,-19-2 0 0 0,-6-9 0 0 0,-3-10 0 0 0,4-13 0 0 0,6-17 0 0 0,-2-7 0 0 0,2-6 0 0 0,-8 0 0 0 0,-12 5 0 0 0,-12-1 0 0 0,-11-2 0 0 0,-7 7 0 0 0,-4 1 0 0 0,-3-3 0 0 0,-2 2 0 0 0,-12-3 0 0 0,-17-7 0 0 0,-20-4 0 0 0,-19 2 0 0 0,-26 0 0 0 0,-11 5 0 0 0,1 8 0 0 0,10 16 0 0 0,13 6 0 0 0,8 10 0 0 0,8 9 0 0 0,7 8 0 0 0,1 2 0 0 0,-6 2 0 0 0,-13 3 0 0 0,-16 1 0 0 0,-7 2 0 0 0,-13 1 0 0 0,-17 13 0 0 0,-7 21 0 0 0,3 19 0 0 0,15 8 0 0 0,25 2 0 0 0,24 4 0 0 0,25 7 0 0 0,19 4 0 0 0,11 6 0 0 0,9 6 0 0 0,4 4 0 0 0,0 4 0 0 0,0 11 0 0 0,-3 8 0 0 0,-10 14 0 0 0,-1 20 0 0 0,-2 22 0 0 0,-2 16 0 0 0,2 10 0 0 0,6 6 0 0 0,17 2 0 0 0,30-4 0 0 0,30-7 0 0 0,18-19 0 0 0,17-19 0 0 0,12-18 0 0 0,-3-26 0 0 0,-8-26 0 0 0,-16-21 0 0 0,-13-13 0 0 0,-15-15 0 0 0,-12-6 0 0 0,-9-9 0 0 0,-10-4 0 0 0,-6-5 0 0 0,-1-6 0 0 0,1-3 0 0 0,6-4 0 0 0,3-2 0 0 0,-3 0 0 0 0</inkml:trace>
 </inkml:ink>
 </file>
 
@@ -8317,6 +8439,415 @@
 </file>
 
 <file path=ppt/slides/slide6.xml><?xml version="1.0" encoding="utf-8"?>
+<p:sld xmlns:a="http://schemas.openxmlformats.org/drawingml/2006/main" xmlns:r="http://schemas.openxmlformats.org/officeDocument/2006/relationships" xmlns:p="http://schemas.openxmlformats.org/presentationml/2006/main">
+  <p:cSld>
+    <p:spTree>
+      <p:nvGrpSpPr>
+        <p:cNvPr id="1" name=""/>
+        <p:cNvGrpSpPr/>
+        <p:nvPr/>
+      </p:nvGrpSpPr>
+      <p:grpSpPr>
+        <a:xfrm>
+          <a:off x="0" y="0"/>
+          <a:ext cx="0" cy="0"/>
+          <a:chOff x="0" y="0"/>
+          <a:chExt cx="0" cy="0"/>
+        </a:xfrm>
+      </p:grpSpPr>
+      <mc:AlternateContent xmlns:mc="http://schemas.openxmlformats.org/markup-compatibility/2006">
+        <mc:Choice xmlns:p14="http://schemas.microsoft.com/office/powerpoint/2010/main" Requires="p14">
+          <p:contentPart p14:bwMode="auto" r:id="rId2">
+            <p14:nvContentPartPr>
+              <p14:cNvPr id="4" name="Ink 3">
+                <a:extLst>
+                  <a:ext uri="{FF2B5EF4-FFF2-40B4-BE49-F238E27FC236}">
+                    <a16:creationId xmlns:a16="http://schemas.microsoft.com/office/drawing/2014/main" id="{1EDF980B-B73B-E6F1-BD42-856A30A6BE57}"/>
+                  </a:ext>
+                </a:extLst>
+              </p14:cNvPr>
+              <p14:cNvContentPartPr/>
+              <p14:nvPr/>
+            </p14:nvContentPartPr>
+            <p14:xfrm>
+              <a:off x="2722977" y="1106714"/>
+              <a:ext cx="143593" cy="1788285"/>
+            </p14:xfrm>
+          </p:contentPart>
+        </mc:Choice>
+        <mc:Fallback>
+          <p:pic>
+            <p:nvPicPr>
+              <p:cNvPr id="4" name="Ink 3">
+                <a:extLst>
+                  <a:ext uri="{FF2B5EF4-FFF2-40B4-BE49-F238E27FC236}">
+                    <a16:creationId xmlns:a16="http://schemas.microsoft.com/office/drawing/2014/main" id="{1EDF980B-B73B-E6F1-BD42-856A30A6BE57}"/>
+                  </a:ext>
+                </a:extLst>
+              </p:cNvPr>
+              <p:cNvPicPr/>
+              <p:nvPr/>
+            </p:nvPicPr>
+            <p:blipFill>
+              <a:blip r:embed="rId3"/>
+              <a:stretch>
+                <a:fillRect/>
+              </a:stretch>
+            </p:blipFill>
+            <p:spPr>
+              <a:xfrm>
+                <a:off x="2705387" y="1089076"/>
+                <a:ext cx="179132" cy="1823921"/>
+              </a:xfrm>
+              <a:prstGeom prst="rect">
+                <a:avLst/>
+              </a:prstGeom>
+            </p:spPr>
+          </p:pic>
+        </mc:Fallback>
+      </mc:AlternateContent>
+      <mc:AlternateContent xmlns:mc="http://schemas.openxmlformats.org/markup-compatibility/2006">
+        <mc:Choice xmlns:p14="http://schemas.microsoft.com/office/powerpoint/2010/main" Requires="p14">
+          <p:contentPart p14:bwMode="auto" r:id="rId4">
+            <p14:nvContentPartPr>
+              <p14:cNvPr id="5" name="Ink 4">
+                <a:extLst>
+                  <a:ext uri="{FF2B5EF4-FFF2-40B4-BE49-F238E27FC236}">
+                    <a16:creationId xmlns:a16="http://schemas.microsoft.com/office/drawing/2014/main" id="{757EC4C2-30F1-69FF-4C46-86AF837196B1}"/>
+                  </a:ext>
+                </a:extLst>
+              </p14:cNvPr>
+              <p14:cNvContentPartPr/>
+              <p14:nvPr/>
+            </p14:nvContentPartPr>
+            <p14:xfrm>
+              <a:off x="1814285" y="1442357"/>
+              <a:ext cx="1370258" cy="58012"/>
+            </p14:xfrm>
+          </p:contentPart>
+        </mc:Choice>
+        <mc:Fallback>
+          <p:pic>
+            <p:nvPicPr>
+              <p:cNvPr id="5" name="Ink 4">
+                <a:extLst>
+                  <a:ext uri="{FF2B5EF4-FFF2-40B4-BE49-F238E27FC236}">
+                    <a16:creationId xmlns:a16="http://schemas.microsoft.com/office/drawing/2014/main" id="{757EC4C2-30F1-69FF-4C46-86AF837196B1}"/>
+                  </a:ext>
+                </a:extLst>
+              </p:cNvPr>
+              <p:cNvPicPr/>
+              <p:nvPr/>
+            </p:nvPicPr>
+            <p:blipFill>
+              <a:blip r:embed="rId5"/>
+              <a:stretch>
+                <a:fillRect/>
+              </a:stretch>
+            </p:blipFill>
+            <p:spPr>
+              <a:xfrm>
+                <a:off x="1796288" y="1424810"/>
+                <a:ext cx="1405891" cy="93464"/>
+              </a:xfrm>
+              <a:prstGeom prst="rect">
+                <a:avLst/>
+              </a:prstGeom>
+            </p:spPr>
+          </p:pic>
+        </mc:Fallback>
+      </mc:AlternateContent>
+      <mc:AlternateContent xmlns:mc="http://schemas.openxmlformats.org/markup-compatibility/2006">
+        <mc:Choice xmlns:p14="http://schemas.microsoft.com/office/powerpoint/2010/main" Requires="p14">
+          <p:contentPart p14:bwMode="auto" r:id="rId6">
+            <p14:nvContentPartPr>
+              <p14:cNvPr id="6" name="Ink 5">
+                <a:extLst>
+                  <a:ext uri="{FF2B5EF4-FFF2-40B4-BE49-F238E27FC236}">
+                    <a16:creationId xmlns:a16="http://schemas.microsoft.com/office/drawing/2014/main" id="{AE39F47C-F515-1FC1-718E-2E6AFEA24484}"/>
+                  </a:ext>
+                </a:extLst>
+              </p14:cNvPr>
+              <p14:cNvContentPartPr/>
+              <p14:nvPr/>
+            </p14:nvContentPartPr>
+            <p14:xfrm>
+              <a:off x="3718586" y="1016000"/>
+              <a:ext cx="1051290" cy="1850280"/>
+            </p14:xfrm>
+          </p:contentPart>
+        </mc:Choice>
+        <mc:Fallback>
+          <p:pic>
+            <p:nvPicPr>
+              <p:cNvPr id="6" name="Ink 5">
+                <a:extLst>
+                  <a:ext uri="{FF2B5EF4-FFF2-40B4-BE49-F238E27FC236}">
+                    <a16:creationId xmlns:a16="http://schemas.microsoft.com/office/drawing/2014/main" id="{AE39F47C-F515-1FC1-718E-2E6AFEA24484}"/>
+                  </a:ext>
+                </a:extLst>
+              </p:cNvPr>
+              <p:cNvPicPr/>
+              <p:nvPr/>
+            </p:nvPicPr>
+            <p:blipFill>
+              <a:blip r:embed="rId7"/>
+              <a:stretch>
+                <a:fillRect/>
+              </a:stretch>
+            </p:blipFill>
+            <p:spPr>
+              <a:xfrm>
+                <a:off x="3700591" y="998005"/>
+                <a:ext cx="1086921" cy="1885911"/>
+              </a:xfrm>
+              <a:prstGeom prst="rect">
+                <a:avLst/>
+              </a:prstGeom>
+            </p:spPr>
+          </p:pic>
+        </mc:Fallback>
+      </mc:AlternateContent>
+      <mc:AlternateContent xmlns:mc="http://schemas.openxmlformats.org/markup-compatibility/2006">
+        <mc:Choice xmlns:p14="http://schemas.microsoft.com/office/powerpoint/2010/main" Requires="p14">
+          <p:contentPart p14:bwMode="auto" r:id="rId8">
+            <p14:nvContentPartPr>
+              <p14:cNvPr id="7" name="Ink 6">
+                <a:extLst>
+                  <a:ext uri="{FF2B5EF4-FFF2-40B4-BE49-F238E27FC236}">
+                    <a16:creationId xmlns:a16="http://schemas.microsoft.com/office/drawing/2014/main" id="{6583D680-F220-D034-D2CD-0D5E74C9B384}"/>
+                  </a:ext>
+                </a:extLst>
+              </p14:cNvPr>
+              <p14:cNvContentPartPr/>
+              <p14:nvPr/>
+            </p14:nvContentPartPr>
+            <p14:xfrm>
+              <a:off x="5315857" y="1877021"/>
+              <a:ext cx="1029104" cy="1308800"/>
+            </p14:xfrm>
+          </p:contentPart>
+        </mc:Choice>
+        <mc:Fallback>
+          <p:pic>
+            <p:nvPicPr>
+              <p:cNvPr id="7" name="Ink 6">
+                <a:extLst>
+                  <a:ext uri="{FF2B5EF4-FFF2-40B4-BE49-F238E27FC236}">
+                    <a16:creationId xmlns:a16="http://schemas.microsoft.com/office/drawing/2014/main" id="{6583D680-F220-D034-D2CD-0D5E74C9B384}"/>
+                  </a:ext>
+                </a:extLst>
+              </p:cNvPr>
+              <p:cNvPicPr/>
+              <p:nvPr/>
+            </p:nvPicPr>
+            <p:blipFill>
+              <a:blip r:embed="rId9"/>
+              <a:stretch>
+                <a:fillRect/>
+              </a:stretch>
+            </p:blipFill>
+            <p:spPr>
+              <a:xfrm>
+                <a:off x="5297866" y="1859388"/>
+                <a:ext cx="1064727" cy="1344426"/>
+              </a:xfrm>
+              <a:prstGeom prst="rect">
+                <a:avLst/>
+              </a:prstGeom>
+            </p:spPr>
+          </p:pic>
+        </mc:Fallback>
+      </mc:AlternateContent>
+      <p:sp>
+        <p:nvSpPr>
+          <p:cNvPr id="11" name="TextBox 10">
+            <a:extLst>
+              <a:ext uri="{FF2B5EF4-FFF2-40B4-BE49-F238E27FC236}">
+                <a16:creationId xmlns:a16="http://schemas.microsoft.com/office/drawing/2014/main" id="{B9F7FF27-934F-61E9-623E-28E67F7A95BB}"/>
+              </a:ext>
+            </a:extLst>
+          </p:cNvPr>
+          <p:cNvSpPr txBox="1"/>
+          <p:nvPr/>
+        </p:nvSpPr>
+        <p:spPr>
+          <a:xfrm>
+            <a:off x="952500" y="1605642"/>
+            <a:ext cx="10392937" cy="523220"/>
+          </a:xfrm>
+          <a:prstGeom prst="rect">
+            <a:avLst/>
+          </a:prstGeom>
+          <a:noFill/>
+        </p:spPr>
+        <p:txBody>
+          <a:bodyPr rot="0" spcFirstLastPara="0" vertOverflow="overflow" horzOverflow="overflow" vert="horz" wrap="square" lIns="91440" tIns="45720" rIns="91440" bIns="45720" numCol="1" spcCol="0" rtlCol="0" fromWordArt="0" anchor="t" anchorCtr="0" forceAA="0" compatLnSpc="1">
+            <a:prstTxWarp prst="textNoShape">
+              <a:avLst/>
+            </a:prstTxWarp>
+            <a:spAutoFit/>
+          </a:bodyPr>
+          <a:lstStyle/>
+          <a:p>
+            <a:r>
+              <a:rPr lang="en-US" sz="2800" b="1"/>
+              <a:t>And now, what you have all been waiting impatiently for:</a:t>
+            </a:r>
+          </a:p>
+        </p:txBody>
+      </p:sp>
+      <p:sp>
+        <p:nvSpPr>
+          <p:cNvPr id="16" name="TextBox 15">
+            <a:extLst>
+              <a:ext uri="{FF2B5EF4-FFF2-40B4-BE49-F238E27FC236}">
+                <a16:creationId xmlns:a16="http://schemas.microsoft.com/office/drawing/2014/main" id="{6B24E668-FDBC-2A58-E24B-5AFE69FF43EA}"/>
+              </a:ext>
+            </a:extLst>
+          </p:cNvPr>
+          <p:cNvSpPr txBox="1"/>
+          <p:nvPr/>
+        </p:nvSpPr>
+        <p:spPr>
+          <a:xfrm>
+            <a:off x="2861127" y="2594428"/>
+            <a:ext cx="1378858" cy="369332"/>
+          </a:xfrm>
+          <a:prstGeom prst="rect">
+            <a:avLst/>
+          </a:prstGeom>
+          <a:noFill/>
+        </p:spPr>
+        <p:txBody>
+          <a:bodyPr rot="0" spcFirstLastPara="0" vertOverflow="overflow" horzOverflow="overflow" vert="horz" wrap="square" lIns="91440" tIns="45720" rIns="91440" bIns="45720" numCol="1" spcCol="0" rtlCol="0" fromWordArt="0" anchor="t" anchorCtr="0" forceAA="0" compatLnSpc="1">
+            <a:prstTxWarp prst="textNoShape">
+              <a:avLst/>
+            </a:prstTxWarp>
+            <a:spAutoFit/>
+          </a:bodyPr>
+          <a:lstStyle/>
+          <a:p>
+            <a:r>
+              <a:rPr lang="en-US" dirty="0"/>
+              <a:t>The </a:t>
+            </a:r>
+            <a:r>
+              <a:rPr lang="en-US" dirty="0" err="1"/>
+              <a:t>en</a:t>
+            </a:r>
+            <a:r>
+              <a:rPr lang="en-US" dirty="0"/>
+              <a:t>...</a:t>
+            </a:r>
+          </a:p>
+        </p:txBody>
+      </p:sp>
+      <p:sp>
+        <p:nvSpPr>
+          <p:cNvPr id="17" name="TextBox 16">
+            <a:extLst>
+              <a:ext uri="{FF2B5EF4-FFF2-40B4-BE49-F238E27FC236}">
+                <a16:creationId xmlns:a16="http://schemas.microsoft.com/office/drawing/2014/main" id="{C941C5D6-1C32-1CCA-8A25-4DBCADF7A7AF}"/>
+              </a:ext>
+            </a:extLst>
+          </p:cNvPr>
+          <p:cNvSpPr txBox="1"/>
+          <p:nvPr/>
+        </p:nvSpPr>
+        <p:spPr>
+          <a:xfrm>
+            <a:off x="1560285" y="3432627"/>
+            <a:ext cx="3588655" cy="1200329"/>
+          </a:xfrm>
+          <a:prstGeom prst="rect">
+            <a:avLst/>
+          </a:prstGeom>
+          <a:noFill/>
+        </p:spPr>
+        <p:txBody>
+          <a:bodyPr rot="0" spcFirstLastPara="0" vertOverflow="overflow" horzOverflow="overflow" vert="horz" wrap="square" lIns="91440" tIns="45720" rIns="91440" bIns="45720" numCol="1" spcCol="0" rtlCol="0" fromWordArt="0" anchor="t" anchorCtr="0" forceAA="0" compatLnSpc="1">
+            <a:prstTxWarp prst="textNoShape">
+              <a:avLst/>
+            </a:prstTxWarp>
+            <a:spAutoFit/>
+          </a:bodyPr>
+          <a:lstStyle/>
+          <a:p>
+            <a:r>
+              <a:rPr lang="en-US" dirty="0"/>
+              <a:t>Oh, wait, actually, first, the meaning of Life, The Universe, and Everything is, as we all know, 42</a:t>
+            </a:r>
+          </a:p>
+        </p:txBody>
+      </p:sp>
+      <p:sp>
+        <p:nvSpPr>
+          <p:cNvPr id="18" name="TextBox 17">
+            <a:extLst>
+              <a:ext uri="{FF2B5EF4-FFF2-40B4-BE49-F238E27FC236}">
+                <a16:creationId xmlns:a16="http://schemas.microsoft.com/office/drawing/2014/main" id="{61FE8BD0-21F9-4A30-81A2-C2148D1A885A}"/>
+              </a:ext>
+            </a:extLst>
+          </p:cNvPr>
+          <p:cNvSpPr txBox="1"/>
+          <p:nvPr/>
+        </p:nvSpPr>
+        <p:spPr>
+          <a:xfrm>
+            <a:off x="6105072" y="3428999"/>
+            <a:ext cx="3202212" cy="923330"/>
+          </a:xfrm>
+          <a:prstGeom prst="rect">
+            <a:avLst/>
+          </a:prstGeom>
+          <a:noFill/>
+        </p:spPr>
+        <p:txBody>
+          <a:bodyPr rot="0" spcFirstLastPara="0" vertOverflow="overflow" horzOverflow="overflow" vert="horz" wrap="square" lIns="91440" tIns="45720" rIns="91440" bIns="45720" numCol="1" spcCol="0" rtlCol="0" fromWordArt="0" anchor="t" anchorCtr="0" forceAA="0" compatLnSpc="1">
+            <a:prstTxWarp prst="textNoShape">
+              <a:avLst/>
+            </a:prstTxWarp>
+            <a:spAutoFit/>
+          </a:bodyPr>
+          <a:lstStyle/>
+          <a:p>
+            <a:r>
+              <a:rPr lang="en-US" dirty="0"/>
+              <a:t>So, obviously we don't understand the </a:t>
+            </a:r>
+            <a:r>
+              <a:rPr lang="en-US"/>
+              <a:t>question. </a:t>
+            </a:r>
+          </a:p>
+          <a:p>
+            <a:r>
+              <a:rPr lang="en-US" dirty="0"/>
+              <a:t>Well, I found it. </a:t>
+            </a:r>
+            <a:r>
+              <a:rPr lang="en-US"/>
+              <a:t>It is</a:t>
+            </a:r>
+            <a:endParaRPr lang="en-US" dirty="0"/>
+          </a:p>
+        </p:txBody>
+      </p:sp>
+    </p:spTree>
+    <p:extLst>
+      <p:ext uri="{BB962C8B-B14F-4D97-AF65-F5344CB8AC3E}">
+        <p14:creationId xmlns:p14="http://schemas.microsoft.com/office/powerpoint/2010/main" val="411591964"/>
+      </p:ext>
+    </p:extLst>
+  </p:cSld>
+  <p:clrMapOvr>
+    <a:masterClrMapping/>
+  </p:clrMapOvr>
+</p:sld>
+</file>
+
+<file path=ppt/slides/slide7.xml><?xml version="1.0" encoding="utf-8"?>
 <p:sld xmlns:a="http://schemas.openxmlformats.org/drawingml/2006/main" xmlns:r="http://schemas.openxmlformats.org/officeDocument/2006/relationships" xmlns:p="http://schemas.openxmlformats.org/presentationml/2006/main">
   <p:cSld>
     <p:spTree>

--- a/Current Presentation/Spring 2026.pptx
+++ b/Current Presentation/Spring 2026.pptx
@@ -5,7 +5,7 @@
     <p:sldMasterId id="2147483660" r:id="rId1"/>
   </p:sldMasterIdLst>
   <p:notesMasterIdLst>
-    <p:notesMasterId r:id="rId9"/>
+    <p:notesMasterId r:id="rId7"/>
   </p:notesMasterIdLst>
   <p:sldIdLst>
     <p:sldId id="260" r:id="rId2"/>
@@ -13,8 +13,6 @@
     <p:sldId id="262" r:id="rId4"/>
     <p:sldId id="263" r:id="rId5"/>
     <p:sldId id="264" r:id="rId6"/>
-    <p:sldId id="266" r:id="rId7"/>
-    <p:sldId id="265" r:id="rId8"/>
   </p:sldIdLst>
   <p:sldSz cx="12192000" cy="6858000"/>
   <p:notesSz cx="6858000" cy="9144000"/>
@@ -114,20 +112,8 @@
     </a:lvl9pPr>
   </p:defaultTextStyle>
   <p:extLst>
-    <p:ext uri="{521415D9-36F7-43E2-AB2F-B90AF26B5E84}">
-      <p14:sectionLst xmlns:p14="http://schemas.microsoft.com/office/powerpoint/2010/main">
-        <p14:section name="Default Section" id="{6B736126-433D-4E27-8CA2-964397748075}">
-          <p14:sldIdLst>
-            <p14:sldId id="260"/>
-            <p14:sldId id="261"/>
-            <p14:sldId id="262"/>
-            <p14:sldId id="263"/>
-            <p14:sldId id="264"/>
-            <p14:sldId id="266"/>
-            <p14:sldId id="265"/>
-          </p14:sldIdLst>
-        </p14:section>
-      </p14:sectionLst>
+    <p:ext uri="{EFAFB233-063F-42B5-8137-9DF3F51BA10A}">
+      <p15:sldGuideLst xmlns:p15="http://schemas.microsoft.com/office/powerpoint/2012/main"/>
     </p:ext>
   </p:extLst>
 </p:presentation>
@@ -136,9 +122,7 @@
 <file path=ppt/revisionInfo.xml><?xml version="1.0" encoding="utf-8"?>
 <p1510:revInfo xmlns:a="http://schemas.openxmlformats.org/drawingml/2006/main" xmlns:r="http://schemas.openxmlformats.org/officeDocument/2006/relationships" xmlns:p1510="http://schemas.microsoft.com/office/powerpoint/2015/10/main">
   <p1510:revLst>
-    <p1510:client id="{6998B00B-2615-DA7F-16DD-BEDBD145F26F}" v="169" dt="2026-06-22T15:38:36.746"/>
-    <p1510:client id="{BA9E5608-3EA5-4EB9-B58B-23EA90833BA8}" v="731" dt="2026-06-22T16:59:33.224"/>
-    <p1510:client id="{ECBCC7A4-2B2E-30B8-636B-1ED04629B37E}" v="53" dt="2026-06-22T16:20:29.604"/>
+    <p1510:client id="{6998B00B-2615-DA7F-16DD-BEDBD145F26F}" v="142" dt="2026-06-22T15:26:48.182"/>
   </p1510:revLst>
 </p1510:revInfo>
 </file>
@@ -167,126 +151,6 @@
     </inkml:brush>
   </inkml:definitions>
   <inkml:trace contextRef="#ctx0" brushRef="#br0">0 0 24575,'0'0'-8191</inkml:trace>
-</inkml:ink>
-</file>
-
-<file path=ppt/ink/ink2.xml><?xml version="1.0" encoding="utf-8"?>
-<inkml:ink xmlns:inkml="http://www.w3.org/2003/InkML">
-  <inkml:definitions>
-    <inkml:context xml:id="ctx0">
-      <inkml:inkSource xml:id="inkSrc0">
-        <inkml:traceFormat>
-          <inkml:channel name="X" type="integer" min="-2.14748E9" max="2.14748E9" units="cm"/>
-          <inkml:channel name="Y" type="integer" min="-2.14748E9" max="2.14748E9" units="cm"/>
-          <inkml:channel name="F" type="integer" max="32767" units="dev"/>
-          <inkml:channel name="OA" type="integer" max="360" units="deg"/>
-          <inkml:channel name="OE" type="integer" max="90" units="deg"/>
-        </inkml:traceFormat>
-        <inkml:channelProperties>
-          <inkml:channelProperty channel="X" name="resolution" value="1000" units="1/cm"/>
-          <inkml:channelProperty channel="Y" name="resolution" value="1000" units="1/cm"/>
-          <inkml:channelProperty channel="F" name="resolution" value="0" units="1/dev"/>
-          <inkml:channelProperty channel="OA" name="resolution" value="1000" units="1/deg"/>
-          <inkml:channelProperty channel="OE" name="resolution" value="1000" units="1/deg"/>
-        </inkml:channelProperties>
-      </inkml:inkSource>
-    </inkml:context>
-    <inkml:brush xml:id="br0">
-      <inkml:brushProperty name="width" value="0.1" units="cm"/>
-      <inkml:brushProperty name="height" value="0.1" units="cm"/>
-    </inkml:brush>
-  </inkml:definitions>
-  <inkml:trace contextRef="#ctx0" brushRef="#br0">12415 4842 16383 0 0,'0'8'0'0'0,"0"12"0"0"0,-4 7 0 0 0,-2 3 0 0 0,1 0 0 0 0,1 0 0 0 0,1-1 0 0 0,-4-2 0 0 0,1 0 0 0 0,0-1 0 0 0,1 0 0 0 0,-2 12 0 0 0,0 4 0 0 0,1 8 0 0 0,-3 16 0 0 0,-4 11 0 0 0,0 4 0 0 0,-6 6 0 0 0,0 1 0 0 0,3 3 0 0 0,0-2 0 0 0,3-2 0 0 0,4-9 0 0 0,3-12 0 0 0,2-13 0 0 0,3-12 0 0 0,1-8 0 0 0,-4-2 0 0 0,-1 4 0 0 0,0 3 0 0 0,-7 13 0 0 0,-2 10 0 0 0,1 17 0 0 0,3 12 0 0 0,4 7 0 0 0,2 5 0 0 0,2 2 0 0 0,2 1 0 0 0,0-1 0 0 0,0-9 0 0 0,1-12 0 0 0,-1-17 0 0 0,1-14 0 0 0,-1-12 0 0 0,0-5 0 0 0,0-3 0 0 0,0-3 0 0 0,0 1 0 0 0,0 1 0 0 0,0 8 0 0 0,-4 5 0 0 0,-2 9 0 0 0,-3 12 0 0 0,-1 8 0 0 0,-3 4 0 0 0,1-2 0 0 0,2-5 0 0 0,3-6 0 0 0,3-2 0 0 0,2-6 0 0 0,1-9 0 0 0,1-7 0 0 0,1-3 0 0 0,-1-3 0 0 0,1 1 0 0 0,-1-1 0 0 0,0 2 0 0 0,1 0 0 0 0,-1 2 0 0 0,0-2 0 0 0,0 3 0 0 0,0-2 0 0 0,0 1 0 0 0,0 4 0 0 0,0 2 0 0 0,0-1 0 0 0,0 0 0 0 0,0 1 0 0 0,0 3 0 0 0,0-4 0 0 0,0 0 0 0 0,0-2 0 0 0,0-1 0 0 0,0 2 0 0 0,0-2 0 0 0,0-3 0 0 0,0-4 0 0 0,0-4 0 0 0,0-1 0 0 0,0-2 0 0 0,0-1 0 0 0,0-1 0 0 0,0 5 0 0 0,-5 5 0 0 0,0 2 0 0 0,-1-1 0 0 0,2 2 0 0 0,1-2 0 0 0,-3 3 0 0 0,-1-1 0 0 0,1 2 0 0 0,2-7 0 0 0</inkml:trace>
-</inkml:ink>
-</file>
-
-<file path=ppt/ink/ink3.xml><?xml version="1.0" encoding="utf-8"?>
-<inkml:ink xmlns:inkml="http://www.w3.org/2003/InkML">
-  <inkml:definitions>
-    <inkml:context xml:id="ctx0">
-      <inkml:inkSource xml:id="inkSrc0">
-        <inkml:traceFormat>
-          <inkml:channel name="X" type="integer" min="-2.14748E9" max="2.14748E9" units="cm"/>
-          <inkml:channel name="Y" type="integer" min="-2.14748E9" max="2.14748E9" units="cm"/>
-          <inkml:channel name="F" type="integer" max="32767" units="dev"/>
-          <inkml:channel name="OA" type="integer" max="360" units="deg"/>
-          <inkml:channel name="OE" type="integer" max="90" units="deg"/>
-        </inkml:traceFormat>
-        <inkml:channelProperties>
-          <inkml:channelProperty channel="X" name="resolution" value="1000" units="1/cm"/>
-          <inkml:channelProperty channel="Y" name="resolution" value="1000" units="1/cm"/>
-          <inkml:channelProperty channel="F" name="resolution" value="0" units="1/dev"/>
-          <inkml:channelProperty channel="OA" name="resolution" value="1000" units="1/deg"/>
-          <inkml:channelProperty channel="OE" name="resolution" value="1000" units="1/deg"/>
-        </inkml:channelProperties>
-      </inkml:inkSource>
-    </inkml:context>
-    <inkml:brush xml:id="br0">
-      <inkml:brushProperty name="width" value="0.1" units="cm"/>
-      <inkml:brushProperty name="height" value="0.1" units="cm"/>
-    </inkml:brush>
-  </inkml:definitions>
-  <inkml:trace contextRef="#ctx0" brushRef="#br0">9366 5821 16383 0 0,'9'4'0'0'0,"11"2"0"0"0,15-1 0 0 0,19 4 0 0 0,26 8 0 0 0,20 2 0 0 0,33 2 0 0 0,27-3 0 0 0,21-5 0 0 0,22-4 0 0 0,12-3 0 0 0,2-4 0 0 0,-4-1 0 0 0,-18-1 0 0 0,-25 3 0 0 0,-32 2 0 0 0,-32-1 0 0 0,-25 0 0 0 0,-17-1 0 0 0,9-1 0 0 0,15-1 0 0 0,14-1 0 0 0,14 0 0 0 0,18 0 0 0 0,4 0 0 0 0,-5-1 0 0 0,-21 1 0 0 0,-21 0 0 0 0,-8 0 0 0 0,3 0 0 0 0,-5 0 0 0 0,-3 0 0 0 0,-11 4 0 0 0,-16 2 0 0 0</inkml:trace>
-</inkml:ink>
-</file>
-
-<file path=ppt/ink/ink4.xml><?xml version="1.0" encoding="utf-8"?>
-<inkml:ink xmlns:inkml="http://www.w3.org/2003/InkML">
-  <inkml:definitions>
-    <inkml:context xml:id="ctx0">
-      <inkml:inkSource xml:id="inkSrc0">
-        <inkml:traceFormat>
-          <inkml:channel name="X" type="integer" min="-2.14748E9" max="2.14748E9" units="cm"/>
-          <inkml:channel name="Y" type="integer" min="-2.14748E9" max="2.14748E9" units="cm"/>
-          <inkml:channel name="F" type="integer" max="32767" units="dev"/>
-          <inkml:channel name="OA" type="integer" max="360" units="deg"/>
-          <inkml:channel name="OE" type="integer" max="90" units="deg"/>
-        </inkml:traceFormat>
-        <inkml:channelProperties>
-          <inkml:channelProperty channel="X" name="resolution" value="1000" units="1/cm"/>
-          <inkml:channelProperty channel="Y" name="resolution" value="1000" units="1/cm"/>
-          <inkml:channelProperty channel="F" name="resolution" value="0" units="1/dev"/>
-          <inkml:channelProperty channel="OA" name="resolution" value="1000" units="1/deg"/>
-          <inkml:channelProperty channel="OE" name="resolution" value="1000" units="1/deg"/>
-        </inkml:channelProperties>
-      </inkml:inkSource>
-    </inkml:context>
-    <inkml:brush xml:id="br0">
-      <inkml:brushProperty name="width" value="0.1" units="cm"/>
-      <inkml:brushProperty name="height" value="0.1" units="cm"/>
-    </inkml:brush>
-  </inkml:definitions>
-  <inkml:trace contextRef="#ctx0" brushRef="#br0">15124 4577 16383 0 0,'4'0'0'0'0,"2"9"0"0"0,-1 11 0 0 0,-4 15 0 0 0,-8 19 0 0 0,-11 26 0 0 0,-11 24 0 0 0,0 35 0 0 0,0 22 0 0 0,5 23 0 0 0,7 14 0 0 0,6 4 0 0 0,5 1 0 0 0,3-7 0 0 0,3-17 0 0 0,-8-3 0 0 0,-2-7 0 0 0,1-6 0 0 0,1 12 0 0 0,2 15 0 0 0,3 22 0 0 0,1 18 0 0 0,1 13 0 0 0,1-1 0 0 0,1-7 0 0 0,-1-22 0 0 0,5-22 0 0 0,1-30 0 0 0,0-30 0 0 0,-2-33 0 0 0,-1-16 0 0 0,-1-13 0 0 0,-1-10 0 0 0,-5-2 0 0 0,-1-2 0 0 0,3-28 0 0 0,16-48 0 0 0,14-51 0 0 0,6-34 0 0 0,7-34 0 0 0,3-22 0 0 0,0-6 0 0 0,5 4 0 0 0,-2 14 0 0 0,-8 23 0 0 0,-3 24 0 0 0,-3 22 0 0 0,-7 20 0 0 0,-8 12 0 0 0,-7 6 0 0 0,-1-3 0 0 0,-3-11 0 0 0,7-17 0 0 0,0-13 0 0 0,7-17 0 0 0,4-8 0 0 0,11-16 0 0 0,-1 6 0 0 0,-3 7 0 0 0,3 5 0 0 0,-1 18 0 0 0,3 23 0 0 0,7 25 0 0 0,23 19 0 0 0,29 14 0 0 0,46 30 0 0 0,41 29 0 0 0,33 15 0 0 0,18 10 0 0 0,12 14 0 0 0,-19 0 0 0 0,-39-14 0 0 0,-30-7 0 0 0,-33-10 0 0 0,-35-7 0 0 0,-31 2 0 0 0,-22 1 0 0 0,-18 4 0 0 0,-11 14 0 0 0,-7 30 0 0 0,-5 27 0 0 0,0 27 0 0 0,-1 16 0 0 0,2 19 0 0 0,0-1 0 0 0,2 0 0 0 0,0-9 0 0 0,0-26 0 0 0,1-32 0 0 0,0-27 0 0 0,1-25 0 0 0,-1-16 0 0 0,0-9 0 0 0,-4-11 0 0 0,-2-8 0 0 0,1-3 0 0 0,0-1 0 0 0,2 0 0 0 0,-3 1 0 0 0,-1-4 0 0 0</inkml:trace>
-</inkml:ink>
-</file>
-
-<file path=ppt/ink/ink5.xml><?xml version="1.0" encoding="utf-8"?>
-<inkml:ink xmlns:inkml="http://www.w3.org/2003/InkML">
-  <inkml:definitions>
-    <inkml:context xml:id="ctx0">
-      <inkml:inkSource xml:id="inkSrc0">
-        <inkml:traceFormat>
-          <inkml:channel name="X" type="integer" min="-2.14748E9" max="2.14748E9" units="cm"/>
-          <inkml:channel name="Y" type="integer" min="-2.14748E9" max="2.14748E9" units="cm"/>
-          <inkml:channel name="F" type="integer" max="32767" units="dev"/>
-          <inkml:channel name="OA" type="integer" max="360" units="deg"/>
-          <inkml:channel name="OE" type="integer" max="90" units="deg"/>
-        </inkml:traceFormat>
-        <inkml:channelProperties>
-          <inkml:channelProperty channel="X" name="resolution" value="1000" units="1/cm"/>
-          <inkml:channelProperty channel="Y" name="resolution" value="1000" units="1/cm"/>
-          <inkml:channelProperty channel="F" name="resolution" value="0" units="1/dev"/>
-          <inkml:channelProperty channel="OA" name="resolution" value="1000" units="1/deg"/>
-          <inkml:channelProperty channel="OE" name="resolution" value="1000" units="1/deg"/>
-        </inkml:channelProperties>
-      </inkml:inkSource>
-    </inkml:context>
-    <inkml:brush xml:id="br0">
-      <inkml:brushProperty name="width" value="0.1" units="cm"/>
-      <inkml:brushProperty name="height" value="0.1" units="cm"/>
-    </inkml:brush>
-  </inkml:definitions>
-  <inkml:trace contextRef="#ctx0" brushRef="#br0">19579 8073 16383 0 0,'4'5'0'0'0,"41"9"0"0"0,59 24 0 0 0,67 19 0 0 0,57 8 0 0 0,45 9 0 0 0,23-6 0 0 0,-9-12 0 0 0,-31-15 0 0 0,-43-14 0 0 0,-40-12 0 0 0,-36-9 0 0 0,-34-5 0 0 0,-29-7 0 0 0,-19-2 0 0 0,-6-9 0 0 0,-3-10 0 0 0,4-13 0 0 0,6-17 0 0 0,-2-7 0 0 0,2-6 0 0 0,-8 0 0 0 0,-12 5 0 0 0,-12-1 0 0 0,-11-2 0 0 0,-7 7 0 0 0,-4 1 0 0 0,-3-3 0 0 0,-2 2 0 0 0,-12-3 0 0 0,-17-7 0 0 0,-20-4 0 0 0,-19 2 0 0 0,-26 0 0 0 0,-11 5 0 0 0,1 8 0 0 0,10 16 0 0 0,13 6 0 0 0,8 10 0 0 0,8 9 0 0 0,7 8 0 0 0,1 2 0 0 0,-6 2 0 0 0,-13 3 0 0 0,-16 1 0 0 0,-7 2 0 0 0,-13 1 0 0 0,-17 13 0 0 0,-7 21 0 0 0,3 19 0 0 0,15 8 0 0 0,25 2 0 0 0,24 4 0 0 0,25 7 0 0 0,19 4 0 0 0,11 6 0 0 0,9 6 0 0 0,4 4 0 0 0,0 4 0 0 0,0 11 0 0 0,-3 8 0 0 0,-10 14 0 0 0,-1 20 0 0 0,-2 22 0 0 0,-2 16 0 0 0,2 10 0 0 0,6 6 0 0 0,17 2 0 0 0,30-4 0 0 0,30-7 0 0 0,18-19 0 0 0,17-19 0 0 0,12-18 0 0 0,-3-26 0 0 0,-8-26 0 0 0,-16-21 0 0 0,-13-13 0 0 0,-15-15 0 0 0,-12-6 0 0 0,-9-9 0 0 0,-10-4 0 0 0,-6-5 0 0 0,-1-6 0 0 0,1-3 0 0 0,6-4 0 0 0,3-2 0 0 0,-3 0 0 0 0</inkml:trace>
 </inkml:ink>
 </file>
 
@@ -701,7 +565,7 @@
               <a:defRPr/>
             </a:pPr>
             <a:r>
-              <a:rPr lang="en-US"/>
+              <a:rPr lang="en-US" dirty="0"/>
               <a:t>After third debugging, say the “those are my 3” joke</a:t>
             </a:r>
           </a:p>
@@ -788,24 +652,24 @@
           <a:lstStyle/>
           <a:p>
             <a:r>
-              <a:rPr lang="en-US"/>
+              <a:rPr lang="en-US" dirty="0"/>
               <a:t>for “who am you”, explain the whole “the questions where in first person”</a:t>
             </a:r>
           </a:p>
           <a:p>
-            <a:endParaRPr lang="en-US"/>
-          </a:p>
-          <a:p>
-            <a:r>
-              <a:rPr lang="en-US"/>
+            <a:endParaRPr lang="en-US" dirty="0"/>
+          </a:p>
+          <a:p>
+            <a:r>
+              <a:rPr lang="en-US" dirty="0"/>
               <a:t>Explain reason chose </a:t>
             </a:r>
             <a:r>
-              <a:rPr lang="en-US" err="1"/>
+              <a:rPr lang="en-US" dirty="0" err="1"/>
               <a:t>shipchannel</a:t>
             </a:r>
             <a:r>
-              <a:rPr lang="en-US"/>
+              <a:rPr lang="en-US" dirty="0"/>
               <a:t>?</a:t>
             </a:r>
           </a:p>
@@ -892,15 +756,15 @@
           <a:lstStyle/>
           <a:p>
             <a:r>
-              <a:rPr lang="en-US"/>
+              <a:rPr lang="en-US" dirty="0"/>
               <a:t>More </a:t>
             </a:r>
             <a:r>
-              <a:rPr lang="en-US" err="1"/>
+              <a:rPr lang="en-US" dirty="0" err="1"/>
               <a:t>deltais</a:t>
             </a:r>
             <a:r>
-              <a:rPr lang="en-US"/>
+              <a:rPr lang="en-US" dirty="0"/>
               <a:t> on discussions?</a:t>
             </a:r>
           </a:p>
@@ -1019,6 +883,7 @@
               <a:rPr lang="en-US"/>
               <a:t>Click to edit Master title style</a:t>
             </a:r>
+            <a:endParaRPr lang="en-US" dirty="0"/>
           </a:p>
         </p:txBody>
       </p:sp>
@@ -1085,6 +950,7 @@
               <a:rPr lang="en-US"/>
               <a:t>Click to edit Master subtitle style</a:t>
             </a:r>
+            <a:endParaRPr lang="en-US" dirty="0"/>
           </a:p>
         </p:txBody>
       </p:sp>
@@ -1226,6 +1092,7 @@
               <a:rPr lang="en-US"/>
               <a:t>Click to edit Master title style</a:t>
             </a:r>
+            <a:endParaRPr lang="en-US" dirty="0"/>
           </a:p>
         </p:txBody>
       </p:sp>
@@ -1290,6 +1157,7 @@
               <a:rPr lang="en-US"/>
               <a:t>Click icon to add picture</a:t>
             </a:r>
+            <a:endParaRPr lang="en-US" dirty="0"/>
           </a:p>
         </p:txBody>
       </p:sp>
@@ -1511,6 +1379,7 @@
               <a:rPr lang="en-US"/>
               <a:t>Click to edit Master title style</a:t>
             </a:r>
+            <a:endParaRPr lang="en-US" dirty="0"/>
           </a:p>
         </p:txBody>
       </p:sp>
@@ -1751,6 +1620,7 @@
               <a:rPr lang="en-US"/>
               <a:t>Click to edit Master title style</a:t>
             </a:r>
+            <a:endParaRPr lang="en-US" dirty="0"/>
           </a:p>
         </p:txBody>
       </p:sp>
@@ -2077,7 +1947,7 @@
           <a:p>
             <a:pPr lvl="0"/>
             <a:r>
-              <a:rPr lang="en-US" sz="8000">
+              <a:rPr lang="en-US" sz="8000" dirty="0">
                 <a:solidFill>
                   <a:schemeClr val="tx1"/>
                 </a:solidFill>
@@ -2193,7 +2063,7 @@
           <a:p>
             <a:pPr lvl="0" algn="r"/>
             <a:r>
-              <a:rPr lang="en-US" sz="8000">
+              <a:rPr lang="en-US" sz="8000" dirty="0">
                 <a:solidFill>
                   <a:schemeClr val="tx1"/>
                 </a:solidFill>
@@ -2292,6 +2162,7 @@
               <a:rPr lang="en-US"/>
               <a:t>Click to edit Master title style</a:t>
             </a:r>
+            <a:endParaRPr lang="en-US" dirty="0"/>
           </a:p>
         </p:txBody>
       </p:sp>
@@ -2498,6 +2369,7 @@
               <a:rPr lang="en-US"/>
               <a:t>Click to edit Master title style</a:t>
             </a:r>
+            <a:endParaRPr lang="en-US" dirty="0"/>
           </a:p>
         </p:txBody>
       </p:sp>
@@ -3034,6 +2906,7 @@
               <a:rPr lang="en-US"/>
               <a:t>Click to edit Master title style</a:t>
             </a:r>
+            <a:endParaRPr lang="en-US" dirty="0"/>
           </a:p>
         </p:txBody>
       </p:sp>
@@ -3183,6 +3056,7 @@
               <a:rPr lang="en-US"/>
               <a:t>Click icon to add picture</a:t>
             </a:r>
+            <a:endParaRPr lang="en-US" dirty="0"/>
           </a:p>
         </p:txBody>
       </p:sp>
@@ -3399,6 +3273,7 @@
               <a:rPr lang="en-US"/>
               <a:t>Click icon to add picture</a:t>
             </a:r>
+            <a:endParaRPr lang="en-US" dirty="0"/>
           </a:p>
         </p:txBody>
       </p:sp>
@@ -3615,6 +3490,7 @@
               <a:rPr lang="en-US"/>
               <a:t>Click icon to add picture</a:t>
             </a:r>
+            <a:endParaRPr lang="en-US" dirty="0"/>
           </a:p>
         </p:txBody>
       </p:sp>
@@ -3799,6 +3675,7 @@
               <a:rPr lang="en-US"/>
               <a:t>Click to edit Master title style</a:t>
             </a:r>
+            <a:endParaRPr lang="en-US" dirty="0"/>
           </a:p>
         </p:txBody>
       </p:sp>
@@ -3855,6 +3732,7 @@
               <a:rPr lang="en-US"/>
               <a:t>Fifth level</a:t>
             </a:r>
+            <a:endParaRPr lang="en-US" dirty="0"/>
           </a:p>
         </p:txBody>
       </p:sp>
@@ -4011,6 +3889,7 @@
               <a:rPr lang="en-US"/>
               <a:t>Click to edit Master title style</a:t>
             </a:r>
+            <a:endParaRPr lang="en-US" dirty="0"/>
           </a:p>
         </p:txBody>
       </p:sp>
@@ -4067,6 +3946,7 @@
               <a:rPr lang="en-US"/>
               <a:t>Fifth level</a:t>
             </a:r>
+            <a:endParaRPr lang="en-US" dirty="0"/>
           </a:p>
         </p:txBody>
       </p:sp>
@@ -4203,6 +4083,7 @@
               <a:rPr lang="en-US"/>
               <a:t>Click to edit Master title style</a:t>
             </a:r>
+            <a:endParaRPr lang="en-US" dirty="0"/>
           </a:p>
         </p:txBody>
       </p:sp>
@@ -4254,6 +4135,7 @@
               <a:rPr lang="en-US"/>
               <a:t>Fifth level</a:t>
             </a:r>
+            <a:endParaRPr lang="en-US" dirty="0"/>
           </a:p>
         </p:txBody>
       </p:sp>
@@ -4412,6 +4294,7 @@
               <a:rPr lang="en-US"/>
               <a:t>Click to edit Master title style</a:t>
             </a:r>
+            <a:endParaRPr lang="en-US" dirty="0"/>
           </a:p>
         </p:txBody>
       </p:sp>
@@ -4669,6 +4552,7 @@
               <a:rPr lang="en-US"/>
               <a:t>Click to edit Master title style</a:t>
             </a:r>
+            <a:endParaRPr lang="en-US" dirty="0"/>
           </a:p>
         </p:txBody>
       </p:sp>
@@ -4725,6 +4609,7 @@
               <a:rPr lang="en-US"/>
               <a:t>Fifth level</a:t>
             </a:r>
+            <a:endParaRPr lang="en-US" dirty="0"/>
           </a:p>
         </p:txBody>
       </p:sp>
@@ -4781,6 +4666,7 @@
               <a:rPr lang="en-US"/>
               <a:t>Fifth level</a:t>
             </a:r>
+            <a:endParaRPr lang="en-US" dirty="0"/>
           </a:p>
         </p:txBody>
       </p:sp>
@@ -4903,6 +4789,7 @@
               <a:rPr lang="en-US"/>
               <a:t>Click to edit Master title style</a:t>
             </a:r>
+            <a:endParaRPr lang="en-US" dirty="0"/>
           </a:p>
         </p:txBody>
       </p:sp>
@@ -5030,6 +4917,7 @@
               <a:rPr lang="en-US"/>
               <a:t>Fifth level</a:t>
             </a:r>
+            <a:endParaRPr lang="en-US" dirty="0"/>
           </a:p>
         </p:txBody>
       </p:sp>
@@ -5157,6 +5045,7 @@
               <a:rPr lang="en-US"/>
               <a:t>Fifth level</a:t>
             </a:r>
+            <a:endParaRPr lang="en-US" dirty="0"/>
           </a:p>
         </p:txBody>
       </p:sp>
@@ -5274,6 +5163,7 @@
               <a:rPr lang="en-US"/>
               <a:t>Click to edit Master title style</a:t>
             </a:r>
+            <a:endParaRPr lang="en-US" dirty="0"/>
           </a:p>
         </p:txBody>
       </p:sp>
@@ -5495,6 +5385,7 @@
               <a:rPr lang="en-US"/>
               <a:t>Click to edit Master title style</a:t>
             </a:r>
+            <a:endParaRPr lang="en-US" dirty="0"/>
           </a:p>
         </p:txBody>
       </p:sp>
@@ -5551,6 +5442,7 @@
               <a:rPr lang="en-US"/>
               <a:t>Fifth level</a:t>
             </a:r>
+            <a:endParaRPr lang="en-US" dirty="0"/>
           </a:p>
         </p:txBody>
       </p:sp>
@@ -5742,6 +5634,7 @@
               <a:rPr lang="en-US"/>
               <a:t>Click to edit Master title style</a:t>
             </a:r>
+            <a:endParaRPr lang="en-US" dirty="0"/>
           </a:p>
         </p:txBody>
       </p:sp>
@@ -5806,6 +5699,7 @@
               <a:rPr lang="en-US"/>
               <a:t>Click icon to add picture</a:t>
             </a:r>
+            <a:endParaRPr lang="en-US" dirty="0"/>
           </a:p>
         </p:txBody>
       </p:sp>
@@ -6033,6 +5927,7 @@
               <a:rPr lang="en-US"/>
               <a:t>Click to edit Master title style</a:t>
             </a:r>
+            <a:endParaRPr lang="en-US" dirty="0"/>
           </a:p>
         </p:txBody>
       </p:sp>
@@ -6094,6 +5989,7 @@
               <a:rPr lang="en-US"/>
               <a:t>Fifth level</a:t>
             </a:r>
+            <a:endParaRPr lang="en-US" dirty="0"/>
           </a:p>
         </p:txBody>
       </p:sp>
@@ -6578,14 +6474,14 @@
           <a:lstStyle/>
           <a:p>
             <a:r>
-              <a:rPr lang="en-US"/>
+              <a:rPr lang="en-US" dirty="0"/>
               <a:t>Charlie’s</a:t>
             </a:r>
             <a:br>
-              <a:rPr lang="en-US"/>
+              <a:rPr lang="en-US" dirty="0"/>
             </a:br>
             <a:r>
-              <a:rPr lang="en-US"/>
+              <a:rPr lang="en-US" dirty="0"/>
               <a:t>Spring Term Presentation</a:t>
             </a:r>
           </a:p>
@@ -6784,7 +6680,7 @@
           </a:lstStyle>
           <a:p>
             <a:r>
-              <a:rPr lang="en-US"/>
+              <a:rPr lang="en-US" dirty="0"/>
               <a:t>Charlie</a:t>
             </a:r>
           </a:p>
@@ -6983,7 +6879,7 @@
           </a:lstStyle>
           <a:p>
             <a:r>
-              <a:rPr lang="en-US"/>
+              <a:rPr lang="en-US" dirty="0"/>
               <a:t>Hatch</a:t>
             </a:r>
           </a:p>
@@ -7182,7 +7078,7 @@
           </a:lstStyle>
           <a:p>
             <a:r>
-              <a:rPr lang="en-US" sz="2800" b="1"/>
+              <a:rPr lang="en-US" sz="2800" b="1" dirty="0"/>
               <a:t>B</a:t>
             </a:r>
           </a:p>
@@ -7381,7 +7277,7 @@
           </a:lstStyle>
           <a:p>
             <a:r>
-              <a:rPr lang="en-US" sz="2800" b="1"/>
+              <a:rPr lang="en-US" sz="2800" b="1" dirty="0"/>
               <a:t>y</a:t>
             </a:r>
           </a:p>
@@ -7982,7 +7878,7 @@
           <a:lstStyle/>
           <a:p>
             <a:r>
-              <a:rPr lang="en-US"/>
+              <a:rPr lang="en-US" dirty="0"/>
               <a:t>Tech: Advanced app-dev</a:t>
             </a:r>
           </a:p>
@@ -8012,57 +7908,57 @@
           <a:lstStyle/>
           <a:p>
             <a:r>
-              <a:rPr lang="en-US"/>
+              <a:rPr lang="en-US" dirty="0"/>
               <a:t>We worked on two things in advanced </a:t>
             </a:r>
             <a:r>
-              <a:rPr lang="en-US" err="1"/>
+              <a:rPr lang="en-US" dirty="0" err="1"/>
               <a:t>appdev</a:t>
             </a:r>
             <a:r>
-              <a:rPr lang="en-US"/>
+              <a:rPr lang="en-US" dirty="0"/>
               <a:t>.</a:t>
             </a:r>
           </a:p>
           <a:p>
             <a:pPr lvl="1"/>
             <a:r>
-              <a:rPr lang="en-US"/>
+              <a:rPr lang="en-US" dirty="0"/>
               <a:t>One of the projects we worked on was the Snack Shack</a:t>
             </a:r>
           </a:p>
           <a:p>
             <a:pPr lvl="2"/>
             <a:r>
-              <a:rPr lang="en-US"/>
+              <a:rPr lang="en-US" dirty="0"/>
               <a:t>In actuality, the most major was, as discussed by Ryan, actually databases and SQL. But I figured you have heard about that from him</a:t>
             </a:r>
           </a:p>
           <a:p>
             <a:pPr lvl="1"/>
             <a:r>
-              <a:rPr lang="en-US"/>
+              <a:rPr lang="en-US" dirty="0"/>
               <a:t>Tasks used:</a:t>
             </a:r>
           </a:p>
           <a:p>
             <a:pPr lvl="2"/>
             <a:r>
-              <a:rPr lang="en-US"/>
+              <a:rPr lang="en-US" dirty="0"/>
               <a:t>Debugging</a:t>
             </a:r>
           </a:p>
           <a:p>
             <a:pPr lvl="3"/>
             <a:r>
-              <a:rPr lang="en-US"/>
+              <a:rPr lang="en-US" dirty="0"/>
               <a:t>Debugging</a:t>
             </a:r>
           </a:p>
           <a:p>
             <a:pPr lvl="3"/>
             <a:r>
-              <a:rPr lang="en-US"/>
+              <a:rPr lang="en-US" dirty="0"/>
               <a:t>Debugging</a:t>
             </a:r>
           </a:p>
@@ -8071,34 +7967,34 @@
               <a:buNone/>
             </a:pPr>
             <a:r>
-              <a:rPr lang="en-US"/>
+              <a:rPr lang="en-US" dirty="0"/>
               <a:t>Okay, in all seriousness</a:t>
             </a:r>
           </a:p>
           <a:p>
             <a:pPr lvl="2"/>
             <a:r>
-              <a:rPr lang="en-US"/>
+              <a:rPr lang="en-US" dirty="0"/>
               <a:t>Critical Thinking</a:t>
             </a:r>
           </a:p>
           <a:p>
             <a:pPr lvl="2"/>
             <a:r>
-              <a:rPr lang="en-US"/>
+              <a:rPr lang="en-US" dirty="0"/>
               <a:t>Trial and Error</a:t>
             </a:r>
           </a:p>
           <a:p>
             <a:pPr lvl="2"/>
-            <a:endParaRPr lang="en-US"/>
+            <a:endParaRPr lang="en-US" dirty="0"/>
           </a:p>
           <a:p>
             <a:pPr marL="0" indent="0">
               <a:buNone/>
             </a:pPr>
             <a:r>
-              <a:rPr lang="en-US"/>
+              <a:rPr lang="en-US" dirty="0"/>
               <a:t>As for what I gained, it’s mostly just more knowledge, in this case about SQL</a:t>
             </a:r>
           </a:p>
@@ -8156,8 +8052,12 @@
           <a:lstStyle/>
           <a:p>
             <a:r>
-              <a:rPr lang="en-US"/>
-              <a:t>Core: Community</a:t>
+              <a:rPr lang="en-US" dirty="0"/>
+              <a:t>Core</a:t>
+            </a:r>
+            <a:r>
+              <a:rPr lang="en-US"/>
+              <a:t>: Community</a:t>
             </a:r>
           </a:p>
         </p:txBody>
@@ -8184,35 +8084,40 @@
           <a:lstStyle/>
           <a:p>
             <a:r>
-              <a:rPr lang="en-US"/>
+              <a:rPr lang="en-US" dirty="0"/>
               <a:t>In community, we learned about, well, our community.</a:t>
             </a:r>
           </a:p>
           <a:p>
             <a:r>
-              <a:rPr lang="en-US"/>
+              <a:rPr lang="en-US" dirty="0"/>
               <a:t>While not inherently a skill: </a:t>
             </a:r>
           </a:p>
           <a:p>
             <a:pPr lvl="1"/>
             <a:r>
-              <a:rPr lang="en-US"/>
+              <a:rPr lang="en-US" dirty="0"/>
               <a:t>I learned more about the greater Houston area</a:t>
             </a:r>
           </a:p>
           <a:p>
             <a:pPr lvl="1"/>
             <a:r>
-              <a:rPr lang="en-US"/>
+              <a:rPr lang="en-US" dirty="0"/>
               <a:t>I made a nice slideshow about Charlie Serbia called “who am you”</a:t>
             </a:r>
           </a:p>
           <a:p>
             <a:r>
-              <a:rPr lang="en-US"/>
-              <a:t>As for how I’d use it, well, it just helps to know what’s around you so you can actually do things. Basically, less “use it” and more “add more things to use skills on”</a:t>
-            </a:r>
+              <a:rPr lang="en-US" dirty="0"/>
+              <a:t>As for how I’d use it, well, it just helps to know what’s around you so you can actually do things. Basically, less “use it” and more “add more things to </a:t>
+            </a:r>
+            <a:r>
+              <a:rPr lang="en-US"/>
+              <a:t>use skills on”</a:t>
+            </a:r>
+            <a:endParaRPr lang="en-US" dirty="0"/>
           </a:p>
         </p:txBody>
       </p:sp>
@@ -8268,7 +8173,7 @@
           <a:lstStyle/>
           <a:p>
             <a:r>
-              <a:rPr lang="en-US"/>
+              <a:rPr lang="en-US" dirty="0"/>
               <a:t>Club: star-trek club</a:t>
             </a:r>
           </a:p>
@@ -8299,17 +8204,22 @@
               <a:buNone/>
             </a:pPr>
             <a:r>
-              <a:rPr lang="en-US"/>
+              <a:rPr lang="en-US" dirty="0"/>
               <a:t>Well, while there where many good </a:t>
             </a:r>
             <a:r>
-              <a:rPr lang="en-US" err="1"/>
+              <a:rPr lang="en-US" dirty="0" err="1"/>
               <a:t>memorys</a:t>
             </a:r>
             <a:r>
-              <a:rPr lang="en-US"/>
-              <a:t>, I think one of my favorites had to have been some of the discussions we had about Data, specifically the fact that he does have emotions, contrary to his own statments</a:t>
-            </a:r>
+              <a:rPr lang="en-US" dirty="0"/>
+              <a:t>, I think one of my favorites had to have been some of the discussions we had about Data, specifically the fact that he does have emotions, contrary to his own </a:t>
+            </a:r>
+            <a:r>
+              <a:rPr lang="en-US"/>
+              <a:t>statments</a:t>
+            </a:r>
+            <a:endParaRPr lang="en-US" dirty="0"/>
           </a:p>
         </p:txBody>
       </p:sp>
@@ -8403,15 +8313,23 @@
             <a:pPr marL="0" indent="0">
               <a:buNone/>
             </a:pPr>
-            <a:endParaRPr lang="en-US"/>
+            <a:endParaRPr lang="en-US" dirty="0"/>
           </a:p>
           <a:p>
             <a:pPr marL="0" indent="0">
               <a:buNone/>
             </a:pPr>
             <a:r>
-              <a:rPr lang="en-US"/>
-              <a:t>That is my "dynamic file path" system. There's no easy way  show an image of it, but long story short basically it allows saving a file within the inside of a programs folder structure.</a:t>
+              <a:rPr lang="en-US" dirty="0"/>
+              <a:t>That is my "dynamic file path" system. There's no easy way  show an image of </a:t>
+            </a:r>
+            <a:r>
+              <a:rPr lang="en-US"/>
+              <a:t>it, but long story short basically it allows </a:t>
+            </a:r>
+            <a:r>
+              <a:rPr lang="en-US" dirty="0"/>
+              <a:t>saving a file within the inside of a programs folder structure.</a:t>
             </a:r>
           </a:p>
           <a:p>
@@ -8422,6 +8340,7 @@
               <a:rPr lang="en-US"/>
               <a:t> </a:t>
             </a:r>
+            <a:endParaRPr lang="en-US" dirty="0"/>
           </a:p>
         </p:txBody>
       </p:sp>
@@ -8435,525 +8354,6 @@
   <p:clrMapOvr>
     <a:masterClrMapping/>
   </p:clrMapOvr>
-</p:sld>
-</file>
-
-<file path=ppt/slides/slide6.xml><?xml version="1.0" encoding="utf-8"?>
-<p:sld xmlns:a="http://schemas.openxmlformats.org/drawingml/2006/main" xmlns:r="http://schemas.openxmlformats.org/officeDocument/2006/relationships" xmlns:p="http://schemas.openxmlformats.org/presentationml/2006/main">
-  <p:cSld>
-    <p:spTree>
-      <p:nvGrpSpPr>
-        <p:cNvPr id="1" name=""/>
-        <p:cNvGrpSpPr/>
-        <p:nvPr/>
-      </p:nvGrpSpPr>
-      <p:grpSpPr>
-        <a:xfrm>
-          <a:off x="0" y="0"/>
-          <a:ext cx="0" cy="0"/>
-          <a:chOff x="0" y="0"/>
-          <a:chExt cx="0" cy="0"/>
-        </a:xfrm>
-      </p:grpSpPr>
-      <mc:AlternateContent xmlns:mc="http://schemas.openxmlformats.org/markup-compatibility/2006">
-        <mc:Choice xmlns:p14="http://schemas.microsoft.com/office/powerpoint/2010/main" Requires="p14">
-          <p:contentPart p14:bwMode="auto" r:id="rId2">
-            <p14:nvContentPartPr>
-              <p14:cNvPr id="4" name="Ink 3">
-                <a:extLst>
-                  <a:ext uri="{FF2B5EF4-FFF2-40B4-BE49-F238E27FC236}">
-                    <a16:creationId xmlns:a16="http://schemas.microsoft.com/office/drawing/2014/main" id="{1EDF980B-B73B-E6F1-BD42-856A30A6BE57}"/>
-                  </a:ext>
-                </a:extLst>
-              </p14:cNvPr>
-              <p14:cNvContentPartPr/>
-              <p14:nvPr/>
-            </p14:nvContentPartPr>
-            <p14:xfrm>
-              <a:off x="2722977" y="1106714"/>
-              <a:ext cx="143593" cy="1788285"/>
-            </p14:xfrm>
-          </p:contentPart>
-        </mc:Choice>
-        <mc:Fallback>
-          <p:pic>
-            <p:nvPicPr>
-              <p:cNvPr id="4" name="Ink 3">
-                <a:extLst>
-                  <a:ext uri="{FF2B5EF4-FFF2-40B4-BE49-F238E27FC236}">
-                    <a16:creationId xmlns:a16="http://schemas.microsoft.com/office/drawing/2014/main" id="{1EDF980B-B73B-E6F1-BD42-856A30A6BE57}"/>
-                  </a:ext>
-                </a:extLst>
-              </p:cNvPr>
-              <p:cNvPicPr/>
-              <p:nvPr/>
-            </p:nvPicPr>
-            <p:blipFill>
-              <a:blip r:embed="rId3"/>
-              <a:stretch>
-                <a:fillRect/>
-              </a:stretch>
-            </p:blipFill>
-            <p:spPr>
-              <a:xfrm>
-                <a:off x="2705387" y="1089076"/>
-                <a:ext cx="179132" cy="1823921"/>
-              </a:xfrm>
-              <a:prstGeom prst="rect">
-                <a:avLst/>
-              </a:prstGeom>
-            </p:spPr>
-          </p:pic>
-        </mc:Fallback>
-      </mc:AlternateContent>
-      <mc:AlternateContent xmlns:mc="http://schemas.openxmlformats.org/markup-compatibility/2006">
-        <mc:Choice xmlns:p14="http://schemas.microsoft.com/office/powerpoint/2010/main" Requires="p14">
-          <p:contentPart p14:bwMode="auto" r:id="rId4">
-            <p14:nvContentPartPr>
-              <p14:cNvPr id="5" name="Ink 4">
-                <a:extLst>
-                  <a:ext uri="{FF2B5EF4-FFF2-40B4-BE49-F238E27FC236}">
-                    <a16:creationId xmlns:a16="http://schemas.microsoft.com/office/drawing/2014/main" id="{757EC4C2-30F1-69FF-4C46-86AF837196B1}"/>
-                  </a:ext>
-                </a:extLst>
-              </p14:cNvPr>
-              <p14:cNvContentPartPr/>
-              <p14:nvPr/>
-            </p14:nvContentPartPr>
-            <p14:xfrm>
-              <a:off x="1814285" y="1442357"/>
-              <a:ext cx="1370258" cy="58012"/>
-            </p14:xfrm>
-          </p:contentPart>
-        </mc:Choice>
-        <mc:Fallback>
-          <p:pic>
-            <p:nvPicPr>
-              <p:cNvPr id="5" name="Ink 4">
-                <a:extLst>
-                  <a:ext uri="{FF2B5EF4-FFF2-40B4-BE49-F238E27FC236}">
-                    <a16:creationId xmlns:a16="http://schemas.microsoft.com/office/drawing/2014/main" id="{757EC4C2-30F1-69FF-4C46-86AF837196B1}"/>
-                  </a:ext>
-                </a:extLst>
-              </p:cNvPr>
-              <p:cNvPicPr/>
-              <p:nvPr/>
-            </p:nvPicPr>
-            <p:blipFill>
-              <a:blip r:embed="rId5"/>
-              <a:stretch>
-                <a:fillRect/>
-              </a:stretch>
-            </p:blipFill>
-            <p:spPr>
-              <a:xfrm>
-                <a:off x="1796288" y="1424810"/>
-                <a:ext cx="1405891" cy="93464"/>
-              </a:xfrm>
-              <a:prstGeom prst="rect">
-                <a:avLst/>
-              </a:prstGeom>
-            </p:spPr>
-          </p:pic>
-        </mc:Fallback>
-      </mc:AlternateContent>
-      <mc:AlternateContent xmlns:mc="http://schemas.openxmlformats.org/markup-compatibility/2006">
-        <mc:Choice xmlns:p14="http://schemas.microsoft.com/office/powerpoint/2010/main" Requires="p14">
-          <p:contentPart p14:bwMode="auto" r:id="rId6">
-            <p14:nvContentPartPr>
-              <p14:cNvPr id="6" name="Ink 5">
-                <a:extLst>
-                  <a:ext uri="{FF2B5EF4-FFF2-40B4-BE49-F238E27FC236}">
-                    <a16:creationId xmlns:a16="http://schemas.microsoft.com/office/drawing/2014/main" id="{AE39F47C-F515-1FC1-718E-2E6AFEA24484}"/>
-                  </a:ext>
-                </a:extLst>
-              </p14:cNvPr>
-              <p14:cNvContentPartPr/>
-              <p14:nvPr/>
-            </p14:nvContentPartPr>
-            <p14:xfrm>
-              <a:off x="3718586" y="1016000"/>
-              <a:ext cx="1051290" cy="1850280"/>
-            </p14:xfrm>
-          </p:contentPart>
-        </mc:Choice>
-        <mc:Fallback>
-          <p:pic>
-            <p:nvPicPr>
-              <p:cNvPr id="6" name="Ink 5">
-                <a:extLst>
-                  <a:ext uri="{FF2B5EF4-FFF2-40B4-BE49-F238E27FC236}">
-                    <a16:creationId xmlns:a16="http://schemas.microsoft.com/office/drawing/2014/main" id="{AE39F47C-F515-1FC1-718E-2E6AFEA24484}"/>
-                  </a:ext>
-                </a:extLst>
-              </p:cNvPr>
-              <p:cNvPicPr/>
-              <p:nvPr/>
-            </p:nvPicPr>
-            <p:blipFill>
-              <a:blip r:embed="rId7"/>
-              <a:stretch>
-                <a:fillRect/>
-              </a:stretch>
-            </p:blipFill>
-            <p:spPr>
-              <a:xfrm>
-                <a:off x="3700591" y="998005"/>
-                <a:ext cx="1086921" cy="1885911"/>
-              </a:xfrm>
-              <a:prstGeom prst="rect">
-                <a:avLst/>
-              </a:prstGeom>
-            </p:spPr>
-          </p:pic>
-        </mc:Fallback>
-      </mc:AlternateContent>
-      <mc:AlternateContent xmlns:mc="http://schemas.openxmlformats.org/markup-compatibility/2006">
-        <mc:Choice xmlns:p14="http://schemas.microsoft.com/office/powerpoint/2010/main" Requires="p14">
-          <p:contentPart p14:bwMode="auto" r:id="rId8">
-            <p14:nvContentPartPr>
-              <p14:cNvPr id="7" name="Ink 6">
-                <a:extLst>
-                  <a:ext uri="{FF2B5EF4-FFF2-40B4-BE49-F238E27FC236}">
-                    <a16:creationId xmlns:a16="http://schemas.microsoft.com/office/drawing/2014/main" id="{6583D680-F220-D034-D2CD-0D5E74C9B384}"/>
-                  </a:ext>
-                </a:extLst>
-              </p14:cNvPr>
-              <p14:cNvContentPartPr/>
-              <p14:nvPr/>
-            </p14:nvContentPartPr>
-            <p14:xfrm>
-              <a:off x="5315857" y="1877021"/>
-              <a:ext cx="1029104" cy="1308800"/>
-            </p14:xfrm>
-          </p:contentPart>
-        </mc:Choice>
-        <mc:Fallback>
-          <p:pic>
-            <p:nvPicPr>
-              <p:cNvPr id="7" name="Ink 6">
-                <a:extLst>
-                  <a:ext uri="{FF2B5EF4-FFF2-40B4-BE49-F238E27FC236}">
-                    <a16:creationId xmlns:a16="http://schemas.microsoft.com/office/drawing/2014/main" id="{6583D680-F220-D034-D2CD-0D5E74C9B384}"/>
-                  </a:ext>
-                </a:extLst>
-              </p:cNvPr>
-              <p:cNvPicPr/>
-              <p:nvPr/>
-            </p:nvPicPr>
-            <p:blipFill>
-              <a:blip r:embed="rId9"/>
-              <a:stretch>
-                <a:fillRect/>
-              </a:stretch>
-            </p:blipFill>
-            <p:spPr>
-              <a:xfrm>
-                <a:off x="5297866" y="1859388"/>
-                <a:ext cx="1064727" cy="1344426"/>
-              </a:xfrm>
-              <a:prstGeom prst="rect">
-                <a:avLst/>
-              </a:prstGeom>
-            </p:spPr>
-          </p:pic>
-        </mc:Fallback>
-      </mc:AlternateContent>
-      <p:sp>
-        <p:nvSpPr>
-          <p:cNvPr id="11" name="TextBox 10">
-            <a:extLst>
-              <a:ext uri="{FF2B5EF4-FFF2-40B4-BE49-F238E27FC236}">
-                <a16:creationId xmlns:a16="http://schemas.microsoft.com/office/drawing/2014/main" id="{B9F7FF27-934F-61E9-623E-28E67F7A95BB}"/>
-              </a:ext>
-            </a:extLst>
-          </p:cNvPr>
-          <p:cNvSpPr txBox="1"/>
-          <p:nvPr/>
-        </p:nvSpPr>
-        <p:spPr>
-          <a:xfrm>
-            <a:off x="952500" y="1605642"/>
-            <a:ext cx="10392937" cy="523220"/>
-          </a:xfrm>
-          <a:prstGeom prst="rect">
-            <a:avLst/>
-          </a:prstGeom>
-          <a:noFill/>
-        </p:spPr>
-        <p:txBody>
-          <a:bodyPr rot="0" spcFirstLastPara="0" vertOverflow="overflow" horzOverflow="overflow" vert="horz" wrap="square" lIns="91440" tIns="45720" rIns="91440" bIns="45720" numCol="1" spcCol="0" rtlCol="0" fromWordArt="0" anchor="t" anchorCtr="0" forceAA="0" compatLnSpc="1">
-            <a:prstTxWarp prst="textNoShape">
-              <a:avLst/>
-            </a:prstTxWarp>
-            <a:spAutoFit/>
-          </a:bodyPr>
-          <a:lstStyle/>
-          <a:p>
-            <a:r>
-              <a:rPr lang="en-US" sz="2800" b="1"/>
-              <a:t>And now, what you have all been waiting impatiently for:</a:t>
-            </a:r>
-          </a:p>
-        </p:txBody>
-      </p:sp>
-      <p:sp>
-        <p:nvSpPr>
-          <p:cNvPr id="16" name="TextBox 15">
-            <a:extLst>
-              <a:ext uri="{FF2B5EF4-FFF2-40B4-BE49-F238E27FC236}">
-                <a16:creationId xmlns:a16="http://schemas.microsoft.com/office/drawing/2014/main" id="{6B24E668-FDBC-2A58-E24B-5AFE69FF43EA}"/>
-              </a:ext>
-            </a:extLst>
-          </p:cNvPr>
-          <p:cNvSpPr txBox="1"/>
-          <p:nvPr/>
-        </p:nvSpPr>
-        <p:spPr>
-          <a:xfrm>
-            <a:off x="2861127" y="2594428"/>
-            <a:ext cx="1378858" cy="369332"/>
-          </a:xfrm>
-          <a:prstGeom prst="rect">
-            <a:avLst/>
-          </a:prstGeom>
-          <a:noFill/>
-        </p:spPr>
-        <p:txBody>
-          <a:bodyPr rot="0" spcFirstLastPara="0" vertOverflow="overflow" horzOverflow="overflow" vert="horz" wrap="square" lIns="91440" tIns="45720" rIns="91440" bIns="45720" numCol="1" spcCol="0" rtlCol="0" fromWordArt="0" anchor="t" anchorCtr="0" forceAA="0" compatLnSpc="1">
-            <a:prstTxWarp prst="textNoShape">
-              <a:avLst/>
-            </a:prstTxWarp>
-            <a:spAutoFit/>
-          </a:bodyPr>
-          <a:lstStyle/>
-          <a:p>
-            <a:r>
-              <a:rPr lang="en-US" dirty="0"/>
-              <a:t>The </a:t>
-            </a:r>
-            <a:r>
-              <a:rPr lang="en-US" dirty="0" err="1"/>
-              <a:t>en</a:t>
-            </a:r>
-            <a:r>
-              <a:rPr lang="en-US" dirty="0"/>
-              <a:t>...</a:t>
-            </a:r>
-          </a:p>
-        </p:txBody>
-      </p:sp>
-      <p:sp>
-        <p:nvSpPr>
-          <p:cNvPr id="17" name="TextBox 16">
-            <a:extLst>
-              <a:ext uri="{FF2B5EF4-FFF2-40B4-BE49-F238E27FC236}">
-                <a16:creationId xmlns:a16="http://schemas.microsoft.com/office/drawing/2014/main" id="{C941C5D6-1C32-1CCA-8A25-4DBCADF7A7AF}"/>
-              </a:ext>
-            </a:extLst>
-          </p:cNvPr>
-          <p:cNvSpPr txBox="1"/>
-          <p:nvPr/>
-        </p:nvSpPr>
-        <p:spPr>
-          <a:xfrm>
-            <a:off x="1560285" y="3432627"/>
-            <a:ext cx="3588655" cy="1200329"/>
-          </a:xfrm>
-          <a:prstGeom prst="rect">
-            <a:avLst/>
-          </a:prstGeom>
-          <a:noFill/>
-        </p:spPr>
-        <p:txBody>
-          <a:bodyPr rot="0" spcFirstLastPara="0" vertOverflow="overflow" horzOverflow="overflow" vert="horz" wrap="square" lIns="91440" tIns="45720" rIns="91440" bIns="45720" numCol="1" spcCol="0" rtlCol="0" fromWordArt="0" anchor="t" anchorCtr="0" forceAA="0" compatLnSpc="1">
-            <a:prstTxWarp prst="textNoShape">
-              <a:avLst/>
-            </a:prstTxWarp>
-            <a:spAutoFit/>
-          </a:bodyPr>
-          <a:lstStyle/>
-          <a:p>
-            <a:r>
-              <a:rPr lang="en-US" dirty="0"/>
-              <a:t>Oh, wait, actually, first, the meaning of Life, The Universe, and Everything is, as we all know, 42</a:t>
-            </a:r>
-          </a:p>
-        </p:txBody>
-      </p:sp>
-      <p:sp>
-        <p:nvSpPr>
-          <p:cNvPr id="18" name="TextBox 17">
-            <a:extLst>
-              <a:ext uri="{FF2B5EF4-FFF2-40B4-BE49-F238E27FC236}">
-                <a16:creationId xmlns:a16="http://schemas.microsoft.com/office/drawing/2014/main" id="{61FE8BD0-21F9-4A30-81A2-C2148D1A885A}"/>
-              </a:ext>
-            </a:extLst>
-          </p:cNvPr>
-          <p:cNvSpPr txBox="1"/>
-          <p:nvPr/>
-        </p:nvSpPr>
-        <p:spPr>
-          <a:xfrm>
-            <a:off x="6105072" y="3428999"/>
-            <a:ext cx="3202212" cy="923330"/>
-          </a:xfrm>
-          <a:prstGeom prst="rect">
-            <a:avLst/>
-          </a:prstGeom>
-          <a:noFill/>
-        </p:spPr>
-        <p:txBody>
-          <a:bodyPr rot="0" spcFirstLastPara="0" vertOverflow="overflow" horzOverflow="overflow" vert="horz" wrap="square" lIns="91440" tIns="45720" rIns="91440" bIns="45720" numCol="1" spcCol="0" rtlCol="0" fromWordArt="0" anchor="t" anchorCtr="0" forceAA="0" compatLnSpc="1">
-            <a:prstTxWarp prst="textNoShape">
-              <a:avLst/>
-            </a:prstTxWarp>
-            <a:spAutoFit/>
-          </a:bodyPr>
-          <a:lstStyle/>
-          <a:p>
-            <a:r>
-              <a:rPr lang="en-US" dirty="0"/>
-              <a:t>So, obviously we don't understand the </a:t>
-            </a:r>
-            <a:r>
-              <a:rPr lang="en-US"/>
-              <a:t>question. </a:t>
-            </a:r>
-          </a:p>
-          <a:p>
-            <a:r>
-              <a:rPr lang="en-US" dirty="0"/>
-              <a:t>Well, I found it. </a:t>
-            </a:r>
-            <a:r>
-              <a:rPr lang="en-US"/>
-              <a:t>It is</a:t>
-            </a:r>
-            <a:endParaRPr lang="en-US" dirty="0"/>
-          </a:p>
-        </p:txBody>
-      </p:sp>
-    </p:spTree>
-    <p:extLst>
-      <p:ext uri="{BB962C8B-B14F-4D97-AF65-F5344CB8AC3E}">
-        <p14:creationId xmlns:p14="http://schemas.microsoft.com/office/powerpoint/2010/main" val="411591964"/>
-      </p:ext>
-    </p:extLst>
-  </p:cSld>
-  <p:clrMapOvr>
-    <a:masterClrMapping/>
-  </p:clrMapOvr>
-</p:sld>
-</file>
-
-<file path=ppt/slides/slide7.xml><?xml version="1.0" encoding="utf-8"?>
-<p:sld xmlns:a="http://schemas.openxmlformats.org/drawingml/2006/main" xmlns:r="http://schemas.openxmlformats.org/officeDocument/2006/relationships" xmlns:p="http://schemas.openxmlformats.org/presentationml/2006/main">
-  <p:cSld>
-    <p:spTree>
-      <p:nvGrpSpPr>
-        <p:cNvPr id="1" name=""/>
-        <p:cNvGrpSpPr/>
-        <p:nvPr/>
-      </p:nvGrpSpPr>
-      <p:grpSpPr>
-        <a:xfrm>
-          <a:off x="0" y="0"/>
-          <a:ext cx="0" cy="0"/>
-          <a:chOff x="0" y="0"/>
-          <a:chExt cx="0" cy="0"/>
-        </a:xfrm>
-      </p:grpSpPr>
-      <p:sp>
-        <p:nvSpPr>
-          <p:cNvPr id="4" name="Rectangle 3">
-            <a:extLst>
-              <a:ext uri="{FF2B5EF4-FFF2-40B4-BE49-F238E27FC236}">
-                <a16:creationId xmlns:a16="http://schemas.microsoft.com/office/drawing/2014/main" id="{3BD51B22-6035-47AA-F096-DF50E1293D3E}"/>
-              </a:ext>
-            </a:extLst>
-          </p:cNvPr>
-          <p:cNvSpPr/>
-          <p:nvPr/>
-        </p:nvSpPr>
-        <p:spPr>
-          <a:xfrm>
-            <a:off x="0" y="0"/>
-            <a:ext cx="12192000" cy="6858000"/>
-          </a:xfrm>
-          <a:prstGeom prst="rect">
-            <a:avLst/>
-          </a:prstGeom>
-          <a:solidFill>
-            <a:srgbClr val="1070AA"/>
-          </a:solidFill>
-        </p:spPr>
-        <p:style>
-          <a:lnRef idx="2">
-            <a:schemeClr val="accent1">
-              <a:shade val="15000"/>
-            </a:schemeClr>
-          </a:lnRef>
-          <a:fillRef idx="1">
-            <a:schemeClr val="accent1"/>
-          </a:fillRef>
-          <a:effectRef idx="0">
-            <a:schemeClr val="accent1"/>
-          </a:effectRef>
-          <a:fontRef idx="minor">
-            <a:schemeClr val="lt1"/>
-          </a:fontRef>
-        </p:style>
-        <p:txBody>
-          <a:bodyPr rtlCol="0" anchor="ctr"/>
-          <a:lstStyle/>
-          <a:p>
-            <a:pPr algn="ctr"/>
-            <a:endParaRPr lang="en-US"/>
-          </a:p>
-        </p:txBody>
-      </p:sp>
-      <p:pic>
-        <p:nvPicPr>
-          <p:cNvPr id="3" name="Picture 2" descr="A blue screen with a qr code&#10;&#10;AI-generated content may be incorrect.">
-            <a:extLst>
-              <a:ext uri="{FF2B5EF4-FFF2-40B4-BE49-F238E27FC236}">
-                <a16:creationId xmlns:a16="http://schemas.microsoft.com/office/drawing/2014/main" id="{093AC10B-ECC1-A72C-BD4E-BE5469028DD3}"/>
-              </a:ext>
-            </a:extLst>
-          </p:cNvPr>
-          <p:cNvPicPr>
-            <a:picLocks noChangeAspect="1"/>
-          </p:cNvPicPr>
-          <p:nvPr/>
-        </p:nvPicPr>
-        <p:blipFill>
-          <a:blip r:embed="rId2"/>
-          <a:stretch>
-            <a:fillRect/>
-          </a:stretch>
-        </p:blipFill>
-        <p:spPr>
-          <a:xfrm>
-            <a:off x="1593440" y="1298191"/>
-            <a:ext cx="5324442" cy="3670464"/>
-          </a:xfrm>
-          <a:prstGeom prst="rect">
-            <a:avLst/>
-          </a:prstGeom>
-        </p:spPr>
-      </p:pic>
-    </p:spTree>
-    <p:extLst>
-      <p:ext uri="{BB962C8B-B14F-4D97-AF65-F5344CB8AC3E}">
-        <p14:creationId xmlns:p14="http://schemas.microsoft.com/office/powerpoint/2010/main" val="3833004409"/>
-      </p:ext>
-    </p:extLst>
-  </p:cSld>
-  <p:clrMapOvr>
-    <a:masterClrMapping/>
-  </p:clrMapOvr>
-  <p:transition advClick="0"/>
 </p:sld>
 </file>
 

--- a/Current Presentation/Spring 2026.pptx
+++ b/Current Presentation/Spring 2026.pptx
@@ -5,7 +5,7 @@
     <p:sldMasterId id="2147483660" r:id="rId1"/>
   </p:sldMasterIdLst>
   <p:notesMasterIdLst>
-    <p:notesMasterId r:id="rId7"/>
+    <p:notesMasterId r:id="rId8"/>
   </p:notesMasterIdLst>
   <p:sldIdLst>
     <p:sldId id="260" r:id="rId2"/>
@@ -13,6 +13,7 @@
     <p:sldId id="262" r:id="rId4"/>
     <p:sldId id="263" r:id="rId5"/>
     <p:sldId id="264" r:id="rId6"/>
+    <p:sldId id="266" r:id="rId7"/>
   </p:sldIdLst>
   <p:sldSz cx="12192000" cy="6858000"/>
   <p:notesSz cx="6858000" cy="9144000"/>
@@ -123,6 +124,7 @@
 <p1510:revInfo xmlns:a="http://schemas.openxmlformats.org/drawingml/2006/main" xmlns:r="http://schemas.openxmlformats.org/officeDocument/2006/relationships" xmlns:p1510="http://schemas.microsoft.com/office/powerpoint/2015/10/main">
   <p1510:revLst>
     <p1510:client id="{6998B00B-2615-DA7F-16DD-BEDBD145F26F}" v="142" dt="2026-06-22T15:26:48.182"/>
+    <p1510:client id="{B3D8BC0C-D2E7-1DB9-11BC-BCF84AD0F7D9}" v="10" dt="2026-06-23T15:35:35.982"/>
   </p1510:revLst>
 </p1510:revInfo>
 </file>
@@ -154,6 +156,130 @@
 </inkml:ink>
 </file>
 
+<file path=ppt/ink/ink2.xml><?xml version="1.0" encoding="utf-8"?>
+<inkml:ink xmlns:inkml="http://www.w3.org/2003/InkML">
+  <inkml:definitions>
+    <inkml:context xml:id="ctx0">
+      <inkml:inkSource xml:id="inkSrc0">
+        <inkml:traceFormat>
+          <inkml:channel name="X" type="integer" min="-2.14748E9" max="2.14748E9" units="cm"/>
+          <inkml:channel name="Y" type="integer" min="-2.14748E9" max="2.14748E9" units="cm"/>
+          <inkml:channel name="F" type="integer" max="32767" units="dev"/>
+          <inkml:channel name="OA" type="integer" max="360" units="deg"/>
+          <inkml:channel name="OE" type="integer" max="90" units="deg"/>
+        </inkml:traceFormat>
+        <inkml:channelProperties>
+          <inkml:channelProperty channel="X" name="resolution" value="1000" units="1/cm"/>
+          <inkml:channelProperty channel="Y" name="resolution" value="1000" units="1/cm"/>
+          <inkml:channelProperty channel="F" name="resolution" value="0" units="1/dev"/>
+          <inkml:channelProperty channel="OA" name="resolution" value="1000" units="1/deg"/>
+          <inkml:channelProperty channel="OE" name="resolution" value="1000" units="1/deg"/>
+        </inkml:channelProperties>
+      </inkml:inkSource>
+      <inkml:timestamp xml:id="ts0" timeString="2026-06-22T16:59:40.399"/>
+    </inkml:context>
+    <inkml:brush xml:id="br0">
+      <inkml:brushProperty name="width" value="0.1" units="cm"/>
+      <inkml:brushProperty name="height" value="0.1" units="cm"/>
+    </inkml:brush>
+  </inkml:definitions>
+  <inkml:trace contextRef="#ctx0" brushRef="#br0">12415 4842 16383 0 0,'0'8'0'0'0,"0"12"0"0"0,-4 7 0 0 0,-2 3 0 0 0,1 0 0 0 0,1 0 0 0 0,1-1 0 0 0,-4-2 0 0 0,1 0 0 0 0,0-1 0 0 0,1 0 0 0 0,-2 12 0 0 0,0 4 0 0 0,1 8 0 0 0,-3 16 0 0 0,-4 11 0 0 0,0 4 0 0 0,-6 6 0 0 0,0 1 0 0 0,3 3 0 0 0,0-2 0 0 0,3-2 0 0 0,4-9 0 0 0,3-12 0 0 0,2-13 0 0 0,3-12 0 0 0,1-8 0 0 0,-4-2 0 0 0,-1 4 0 0 0,0 3 0 0 0,-7 13 0 0 0,-2 10 0 0 0,1 17 0 0 0,3 12 0 0 0,4 7 0 0 0,2 5 0 0 0,2 2 0 0 0,2 1 0 0 0,0-1 0 0 0,0-9 0 0 0,1-12 0 0 0,-1-17 0 0 0,1-14 0 0 0,-1-12 0 0 0,0-5 0 0 0,0-3 0 0 0,0-3 0 0 0,0 1 0 0 0,0 1 0 0 0,0 8 0 0 0,-4 5 0 0 0,-2 9 0 0 0,-3 12 0 0 0,-1 8 0 0 0,-3 4 0 0 0,1-2 0 0 0,2-5 0 0 0,3-6 0 0 0,3-2 0 0 0,2-6 0 0 0,1-9 0 0 0,1-7 0 0 0,1-3 0 0 0,-1-3 0 0 0,1 1 0 0 0,-1-1 0 0 0,0 2 0 0 0,1 0 0 0 0,-1 2 0 0 0,0-2 0 0 0,0 3 0 0 0,0-2 0 0 0,0 1 0 0 0,0 4 0 0 0,0 2 0 0 0,0-1 0 0 0,0 0 0 0 0,0 1 0 0 0,0 3 0 0 0,0-4 0 0 0,0 0 0 0 0,0-2 0 0 0,0-1 0 0 0,0 2 0 0 0,0-2 0 0 0,0-3 0 0 0,0-4 0 0 0,0-4 0 0 0,0-1 0 0 0,0-2 0 0 0,0-1 0 0 0,0-1 0 0 0,0 5 0 0 0,-5 5 0 0 0,0 2 0 0 0,-1-1 0 0 0,2 2 0 0 0,1-2 0 0 0,-3 3 0 0 0,-1-1 0 0 0,1 2 0 0 0,2-7 0 0 0</inkml:trace>
+</inkml:ink>
+</file>
+
+<file path=ppt/ink/ink3.xml><?xml version="1.0" encoding="utf-8"?>
+<inkml:ink xmlns:inkml="http://www.w3.org/2003/InkML">
+  <inkml:definitions>
+    <inkml:context xml:id="ctx0">
+      <inkml:inkSource xml:id="inkSrc0">
+        <inkml:traceFormat>
+          <inkml:channel name="X" type="integer" min="-2.14748E9" max="2.14748E9" units="cm"/>
+          <inkml:channel name="Y" type="integer" min="-2.14748E9" max="2.14748E9" units="cm"/>
+          <inkml:channel name="F" type="integer" max="32767" units="dev"/>
+          <inkml:channel name="OA" type="integer" max="360" units="deg"/>
+          <inkml:channel name="OE" type="integer" max="90" units="deg"/>
+        </inkml:traceFormat>
+        <inkml:channelProperties>
+          <inkml:channelProperty channel="X" name="resolution" value="1000" units="1/cm"/>
+          <inkml:channelProperty channel="Y" name="resolution" value="1000" units="1/cm"/>
+          <inkml:channelProperty channel="F" name="resolution" value="0" units="1/dev"/>
+          <inkml:channelProperty channel="OA" name="resolution" value="1000" units="1/deg"/>
+          <inkml:channelProperty channel="OE" name="resolution" value="1000" units="1/deg"/>
+        </inkml:channelProperties>
+      </inkml:inkSource>
+      <inkml:timestamp xml:id="ts0" timeString="2026-06-22T16:59:40.400"/>
+    </inkml:context>
+    <inkml:brush xml:id="br0">
+      <inkml:brushProperty name="width" value="0.1" units="cm"/>
+      <inkml:brushProperty name="height" value="0.1" units="cm"/>
+    </inkml:brush>
+  </inkml:definitions>
+  <inkml:trace contextRef="#ctx0" brushRef="#br0">9366 5821 16383 0 0,'9'4'0'0'0,"11"2"0"0"0,15-1 0 0 0,19 4 0 0 0,26 8 0 0 0,20 2 0 0 0,33 2 0 0 0,27-3 0 0 0,21-5 0 0 0,22-4 0 0 0,12-3 0 0 0,2-4 0 0 0,-4-1 0 0 0,-18-1 0 0 0,-25 3 0 0 0,-32 2 0 0 0,-32-1 0 0 0,-25 0 0 0 0,-17-1 0 0 0,9-1 0 0 0,15-1 0 0 0,14-1 0 0 0,14 0 0 0 0,18 0 0 0 0,4 0 0 0 0,-5-1 0 0 0,-21 1 0 0 0,-21 0 0 0 0,-8 0 0 0 0,3 0 0 0 0,-5 0 0 0 0,-3 0 0 0 0,-11 4 0 0 0,-16 2 0 0 0</inkml:trace>
+</inkml:ink>
+</file>
+
+<file path=ppt/ink/ink4.xml><?xml version="1.0" encoding="utf-8"?>
+<inkml:ink xmlns:inkml="http://www.w3.org/2003/InkML">
+  <inkml:definitions>
+    <inkml:context xml:id="ctx0">
+      <inkml:inkSource xml:id="inkSrc0">
+        <inkml:traceFormat>
+          <inkml:channel name="X" type="integer" min="-2.14748E9" max="2.14748E9" units="cm"/>
+          <inkml:channel name="Y" type="integer" min="-2.14748E9" max="2.14748E9" units="cm"/>
+          <inkml:channel name="F" type="integer" max="32767" units="dev"/>
+          <inkml:channel name="OA" type="integer" max="360" units="deg"/>
+          <inkml:channel name="OE" type="integer" max="90" units="deg"/>
+        </inkml:traceFormat>
+        <inkml:channelProperties>
+          <inkml:channelProperty channel="X" name="resolution" value="1000" units="1/cm"/>
+          <inkml:channelProperty channel="Y" name="resolution" value="1000" units="1/cm"/>
+          <inkml:channelProperty channel="F" name="resolution" value="0" units="1/dev"/>
+          <inkml:channelProperty channel="OA" name="resolution" value="1000" units="1/deg"/>
+          <inkml:channelProperty channel="OE" name="resolution" value="1000" units="1/deg"/>
+        </inkml:channelProperties>
+      </inkml:inkSource>
+      <inkml:timestamp xml:id="ts0" timeString="2026-06-22T16:59:40.401"/>
+    </inkml:context>
+    <inkml:brush xml:id="br0">
+      <inkml:brushProperty name="width" value="0.1" units="cm"/>
+      <inkml:brushProperty name="height" value="0.1" units="cm"/>
+    </inkml:brush>
+  </inkml:definitions>
+  <inkml:trace contextRef="#ctx0" brushRef="#br0">15124 4577 16383 0 0,'4'0'0'0'0,"2"9"0"0"0,-1 11 0 0 0,-4 15 0 0 0,-8 19 0 0 0,-11 26 0 0 0,-11 24 0 0 0,0 35 0 0 0,0 22 0 0 0,5 23 0 0 0,7 14 0 0 0,6 4 0 0 0,5 1 0 0 0,3-7 0 0 0,3-17 0 0 0,-8-3 0 0 0,-2-7 0 0 0,1-6 0 0 0,1 12 0 0 0,2 15 0 0 0,3 22 0 0 0,1 18 0 0 0,1 13 0 0 0,1-1 0 0 0,1-7 0 0 0,-1-22 0 0 0,5-22 0 0 0,1-30 0 0 0,0-30 0 0 0,-2-33 0 0 0,-1-16 0 0 0,-1-13 0 0 0,-1-10 0 0 0,-5-2 0 0 0,-1-2 0 0 0,3-28 0 0 0,16-48 0 0 0,14-51 0 0 0,6-34 0 0 0,7-34 0 0 0,3-22 0 0 0,0-6 0 0 0,5 4 0 0 0,-2 14 0 0 0,-8 23 0 0 0,-3 24 0 0 0,-3 22 0 0 0,-7 20 0 0 0,-8 12 0 0 0,-7 6 0 0 0,-1-3 0 0 0,-3-11 0 0 0,7-17 0 0 0,0-13 0 0 0,7-17 0 0 0,4-8 0 0 0,11-16 0 0 0,-1 6 0 0 0,-3 7 0 0 0,3 5 0 0 0,-1 18 0 0 0,3 23 0 0 0,7 25 0 0 0,23 19 0 0 0,29 14 0 0 0,46 30 0 0 0,41 29 0 0 0,33 15 0 0 0,18 10 0 0 0,12 14 0 0 0,-19 0 0 0 0,-39-14 0 0 0,-30-7 0 0 0,-33-10 0 0 0,-35-7 0 0 0,-31 2 0 0 0,-22 1 0 0 0,-18 4 0 0 0,-11 14 0 0 0,-7 30 0 0 0,-5 27 0 0 0,0 27 0 0 0,-1 16 0 0 0,2 19 0 0 0,0-1 0 0 0,2 0 0 0 0,0-9 0 0 0,0-26 0 0 0,1-32 0 0 0,0-27 0 0 0,1-25 0 0 0,-1-16 0 0 0,0-9 0 0 0,-4-11 0 0 0,-2-8 0 0 0,1-3 0 0 0,0-1 0 0 0,2 0 0 0 0,-3 1 0 0 0,-1-4 0 0 0</inkml:trace>
+</inkml:ink>
+</file>
+
+<file path=ppt/ink/ink5.xml><?xml version="1.0" encoding="utf-8"?>
+<inkml:ink xmlns:inkml="http://www.w3.org/2003/InkML">
+  <inkml:definitions>
+    <inkml:context xml:id="ctx0">
+      <inkml:inkSource xml:id="inkSrc0">
+        <inkml:traceFormat>
+          <inkml:channel name="X" type="integer" min="-2.14748E9" max="2.14748E9" units="cm"/>
+          <inkml:channel name="Y" type="integer" min="-2.14748E9" max="2.14748E9" units="cm"/>
+          <inkml:channel name="F" type="integer" max="32767" units="dev"/>
+          <inkml:channel name="OA" type="integer" max="360" units="deg"/>
+          <inkml:channel name="OE" type="integer" max="90" units="deg"/>
+        </inkml:traceFormat>
+        <inkml:channelProperties>
+          <inkml:channelProperty channel="X" name="resolution" value="1000" units="1/cm"/>
+          <inkml:channelProperty channel="Y" name="resolution" value="1000" units="1/cm"/>
+          <inkml:channelProperty channel="F" name="resolution" value="0" units="1/dev"/>
+          <inkml:channelProperty channel="OA" name="resolution" value="1000" units="1/deg"/>
+          <inkml:channelProperty channel="OE" name="resolution" value="1000" units="1/deg"/>
+        </inkml:channelProperties>
+      </inkml:inkSource>
+      <inkml:timestamp xml:id="ts0" timeString="2026-06-22T16:59:40.402"/>
+    </inkml:context>
+    <inkml:brush xml:id="br0">
+      <inkml:brushProperty name="width" value="0.1" units="cm"/>
+      <inkml:brushProperty name="height" value="0.1" units="cm"/>
+    </inkml:brush>
+  </inkml:definitions>
+  <inkml:trace contextRef="#ctx0" brushRef="#br0">19579 8073 16383 0 0,'4'5'0'0'0,"41"9"0"0"0,59 24 0 0 0,67 19 0 0 0,57 8 0 0 0,45 9 0 0 0,23-6 0 0 0,-9-12 0 0 0,-31-15 0 0 0,-43-14 0 0 0,-40-12 0 0 0,-36-9 0 0 0,-34-5 0 0 0,-29-7 0 0 0,-19-2 0 0 0,-6-9 0 0 0,-3-10 0 0 0,4-13 0 0 0,6-17 0 0 0,-2-7 0 0 0,2-6 0 0 0,-8 0 0 0 0,-12 5 0 0 0,-12-1 0 0 0,-11-2 0 0 0,-7 7 0 0 0,-4 1 0 0 0,-3-3 0 0 0,-2 2 0 0 0,-12-3 0 0 0,-17-7 0 0 0,-20-4 0 0 0,-19 2 0 0 0,-26 0 0 0 0,-11 5 0 0 0,1 8 0 0 0,10 16 0 0 0,13 6 0 0 0,8 10 0 0 0,8 9 0 0 0,7 8 0 0 0,1 2 0 0 0,-6 2 0 0 0,-13 3 0 0 0,-16 1 0 0 0,-7 2 0 0 0,-13 1 0 0 0,-17 13 0 0 0,-7 21 0 0 0,3 19 0 0 0,15 8 0 0 0,25 2 0 0 0,24 4 0 0 0,25 7 0 0 0,19 4 0 0 0,11 6 0 0 0,9 6 0 0 0,4 4 0 0 0,0 4 0 0 0,0 11 0 0 0,-3 8 0 0 0,-10 14 0 0 0,-1 20 0 0 0,-2 22 0 0 0,-2 16 0 0 0,2 10 0 0 0,6 6 0 0 0,17 2 0 0 0,30-4 0 0 0,30-7 0 0 0,18-19 0 0 0,17-19 0 0 0,12-18 0 0 0,-3-26 0 0 0,-8-26 0 0 0,-16-21 0 0 0,-13-13 0 0 0,-15-15 0 0 0,-12-6 0 0 0,-9-9 0 0 0,-10-4 0 0 0,-6-5 0 0 0,-1-6 0 0 0,1-3 0 0 0,6-4 0 0 0,3-2 0 0 0,-3 0 0 0 0</inkml:trace>
+</inkml:ink>
+</file>
+
 <file path=ppt/notesMasters/notesMaster1.xml><?xml version="1.0" encoding="utf-8"?>
 <p:notesMaster xmlns:a="http://schemas.openxmlformats.org/drawingml/2006/main" xmlns:r="http://schemas.openxmlformats.org/officeDocument/2006/relationships" xmlns:p="http://schemas.openxmlformats.org/presentationml/2006/main">
   <p:cSld>
@@ -236,7 +362,7 @@
           <a:p>
             <a:fld id="{BFAFE299-D31D-47C2-B46C-C3B1749D6A86}" type="datetimeFigureOut">
               <a:rPr lang="en-US" smtClean="0"/>
-              <a:t>6/22/2026</a:t>
+              <a:t>6/23/2026</a:t>
             </a:fld>
             <a:endParaRPr lang="en-US"/>
           </a:p>
@@ -976,7 +1102,7 @@
           <a:p>
             <a:fld id="{3001F3D3-B64E-45E5-A774-FFEE7077F3D9}" type="datetimeFigureOut">
               <a:rPr lang="en-US" smtClean="0"/>
-              <a:t>6/22/2026</a:t>
+              <a:t>6/23/2026</a:t>
             </a:fld>
             <a:endParaRPr lang="en-US"/>
           </a:p>
@@ -1243,7 +1369,7 @@
           <a:p>
             <a:fld id="{3001F3D3-B64E-45E5-A774-FFEE7077F3D9}" type="datetimeFigureOut">
               <a:rPr lang="en-US" smtClean="0"/>
-              <a:t>6/22/2026</a:t>
+              <a:t>6/23/2026</a:t>
             </a:fld>
             <a:endParaRPr lang="en-US"/>
           </a:p>
@@ -1474,7 +1600,7 @@
           <a:p>
             <a:fld id="{3001F3D3-B64E-45E5-A774-FFEE7077F3D9}" type="datetimeFigureOut">
               <a:rPr lang="en-US" smtClean="0"/>
-              <a:t>6/22/2026</a:t>
+              <a:t>6/23/2026</a:t>
             </a:fld>
             <a:endParaRPr lang="en-US"/>
           </a:p>
@@ -1784,7 +1910,7 @@
           <a:p>
             <a:fld id="{3001F3D3-B64E-45E5-A774-FFEE7077F3D9}" type="datetimeFigureOut">
               <a:rPr lang="en-US" smtClean="0"/>
-              <a:t>6/22/2026</a:t>
+              <a:t>6/23/2026</a:t>
             </a:fld>
             <a:endParaRPr lang="en-US"/>
           </a:p>
@@ -2257,7 +2383,7 @@
           <a:p>
             <a:fld id="{3001F3D3-B64E-45E5-A774-FFEE7077F3D9}" type="datetimeFigureOut">
               <a:rPr lang="en-US" smtClean="0"/>
-              <a:t>6/22/2026</a:t>
+              <a:t>6/23/2026</a:t>
             </a:fld>
             <a:endParaRPr lang="en-US"/>
           </a:p>
@@ -2804,7 +2930,7 @@
           <a:p>
             <a:fld id="{3001F3D3-B64E-45E5-A774-FFEE7077F3D9}" type="datetimeFigureOut">
               <a:rPr lang="en-US" smtClean="0"/>
-              <a:t>6/22/2026</a:t>
+              <a:t>6/23/2026</a:t>
             </a:fld>
             <a:endParaRPr lang="en-US"/>
           </a:p>
@@ -3578,7 +3704,7 @@
           <a:p>
             <a:fld id="{3001F3D3-B64E-45E5-A774-FFEE7077F3D9}" type="datetimeFigureOut">
               <a:rPr lang="en-US" smtClean="0"/>
-              <a:t>6/22/2026</a:t>
+              <a:t>6/23/2026</a:t>
             </a:fld>
             <a:endParaRPr lang="en-US"/>
           </a:p>
@@ -3753,7 +3879,7 @@
           <a:p>
             <a:fld id="{3001F3D3-B64E-45E5-A774-FFEE7077F3D9}" type="datetimeFigureOut">
               <a:rPr lang="en-US" smtClean="0"/>
-              <a:t>6/22/2026</a:t>
+              <a:t>6/23/2026</a:t>
             </a:fld>
             <a:endParaRPr lang="en-US"/>
           </a:p>
@@ -3976,7 +4102,7 @@
           <a:p>
             <a:fld id="{3001F3D3-B64E-45E5-A774-FFEE7077F3D9}" type="datetimeFigureOut">
               <a:rPr lang="en-US" smtClean="0"/>
-              <a:t>6/22/2026</a:t>
+              <a:t>6/23/2026</a:t>
             </a:fld>
             <a:endParaRPr lang="en-US"/>
           </a:p>
@@ -4156,7 +4282,7 @@
           <a:p>
             <a:fld id="{3001F3D3-B64E-45E5-A774-FFEE7077F3D9}" type="datetimeFigureOut">
               <a:rPr lang="en-US" smtClean="0"/>
-              <a:t>6/22/2026</a:t>
+              <a:t>6/23/2026</a:t>
             </a:fld>
             <a:endParaRPr lang="en-US"/>
           </a:p>
@@ -4445,7 +4571,7 @@
           <a:p>
             <a:fld id="{3001F3D3-B64E-45E5-A774-FFEE7077F3D9}" type="datetimeFigureOut">
               <a:rPr lang="en-US" smtClean="0"/>
-              <a:t>6/22/2026</a:t>
+              <a:t>6/23/2026</a:t>
             </a:fld>
             <a:endParaRPr lang="en-US"/>
           </a:p>
@@ -4687,7 +4813,7 @@
           <a:p>
             <a:fld id="{3001F3D3-B64E-45E5-A774-FFEE7077F3D9}" type="datetimeFigureOut">
               <a:rPr lang="en-US" smtClean="0"/>
-              <a:t>6/22/2026</a:t>
+              <a:t>6/23/2026</a:t>
             </a:fld>
             <a:endParaRPr lang="en-US"/>
           </a:p>
@@ -5066,7 +5192,7 @@
           <a:p>
             <a:fld id="{3001F3D3-B64E-45E5-A774-FFEE7077F3D9}" type="datetimeFigureOut">
               <a:rPr lang="en-US" smtClean="0"/>
-              <a:t>6/22/2026</a:t>
+              <a:t>6/23/2026</a:t>
             </a:fld>
             <a:endParaRPr lang="en-US"/>
           </a:p>
@@ -5184,7 +5310,7 @@
           <a:p>
             <a:fld id="{3001F3D3-B64E-45E5-A774-FFEE7077F3D9}" type="datetimeFigureOut">
               <a:rPr lang="en-US" smtClean="0"/>
-              <a:t>6/22/2026</a:t>
+              <a:t>6/23/2026</a:t>
             </a:fld>
             <a:endParaRPr lang="en-US"/>
           </a:p>
@@ -5279,7 +5405,7 @@
           <a:p>
             <a:fld id="{3001F3D3-B64E-45E5-A774-FFEE7077F3D9}" type="datetimeFigureOut">
               <a:rPr lang="en-US" smtClean="0"/>
-              <a:t>6/22/2026</a:t>
+              <a:t>6/23/2026</a:t>
             </a:fld>
             <a:endParaRPr lang="en-US"/>
           </a:p>
@@ -5528,7 +5654,7 @@
           <a:p>
             <a:fld id="{3001F3D3-B64E-45E5-A774-FFEE7077F3D9}" type="datetimeFigureOut">
               <a:rPr lang="en-US" smtClean="0"/>
-              <a:t>6/22/2026</a:t>
+              <a:t>6/23/2026</a:t>
             </a:fld>
             <a:endParaRPr lang="en-US"/>
           </a:p>
@@ -5785,7 +5911,7 @@
           <a:p>
             <a:fld id="{3001F3D3-B64E-45E5-A774-FFEE7077F3D9}" type="datetimeFigureOut">
               <a:rPr lang="en-US" smtClean="0"/>
-              <a:t>6/22/2026</a:t>
+              <a:t>6/23/2026</a:t>
             </a:fld>
             <a:endParaRPr lang="en-US"/>
           </a:p>
@@ -6028,7 +6154,7 @@
           <a:p>
             <a:fld id="{3001F3D3-B64E-45E5-A774-FFEE7077F3D9}" type="datetimeFigureOut">
               <a:rPr lang="en-US" smtClean="0"/>
-              <a:t>6/22/2026</a:t>
+              <a:t>6/23/2026</a:t>
             </a:fld>
             <a:endParaRPr lang="en-US"/>
           </a:p>
@@ -8348,6 +8474,278 @@
     <p:extLst>
       <p:ext uri="{BB962C8B-B14F-4D97-AF65-F5344CB8AC3E}">
         <p14:creationId xmlns:p14="http://schemas.microsoft.com/office/powerpoint/2010/main" val="394541520"/>
+      </p:ext>
+    </p:extLst>
+  </p:cSld>
+  <p:clrMapOvr>
+    <a:masterClrMapping/>
+  </p:clrMapOvr>
+</p:sld>
+</file>
+
+<file path=ppt/slides/slide6.xml><?xml version="1.0" encoding="utf-8"?>
+<p:sld xmlns:a="http://schemas.openxmlformats.org/drawingml/2006/main" xmlns:r="http://schemas.openxmlformats.org/officeDocument/2006/relationships" xmlns:p="http://schemas.openxmlformats.org/presentationml/2006/main">
+  <p:cSld>
+    <p:spTree>
+      <p:nvGrpSpPr>
+        <p:cNvPr id="1" name=""/>
+        <p:cNvGrpSpPr/>
+        <p:nvPr/>
+      </p:nvGrpSpPr>
+      <p:grpSpPr>
+        <a:xfrm>
+          <a:off x="0" y="0"/>
+          <a:ext cx="0" cy="0"/>
+          <a:chOff x="0" y="0"/>
+          <a:chExt cx="0" cy="0"/>
+        </a:xfrm>
+      </p:grpSpPr>
+      <mc:AlternateContent xmlns:mc="http://schemas.openxmlformats.org/markup-compatibility/2006">
+        <mc:Choice xmlns:p14="http://schemas.microsoft.com/office/powerpoint/2010/main" Requires="p14">
+          <p:contentPart p14:bwMode="auto" r:id="rId2">
+            <p14:nvContentPartPr>
+              <p14:cNvPr id="4" name="Ink 3">
+                <a:extLst>
+                  <a:ext uri="{FF2B5EF4-FFF2-40B4-BE49-F238E27FC236}">
+                    <a16:creationId xmlns:a16="http://schemas.microsoft.com/office/drawing/2014/main" id="{1EDF980B-B73B-E6F1-BD42-856A30A6BE57}"/>
+                  </a:ext>
+                </a:extLst>
+              </p14:cNvPr>
+              <p14:cNvContentPartPr/>
+              <p14:nvPr/>
+            </p14:nvContentPartPr>
+            <p14:xfrm>
+              <a:off x="2722977" y="1106714"/>
+              <a:ext cx="143593" cy="1788285"/>
+            </p14:xfrm>
+          </p:contentPart>
+        </mc:Choice>
+        <mc:Fallback>
+          <p:pic>
+            <p:nvPicPr>
+              <p:cNvPr id="4" name="Ink 3">
+                <a:extLst>
+                  <a:ext uri="{FF2B5EF4-FFF2-40B4-BE49-F238E27FC236}">
+                    <a16:creationId xmlns:a16="http://schemas.microsoft.com/office/drawing/2014/main" id="{1EDF980B-B73B-E6F1-BD42-856A30A6BE57}"/>
+                  </a:ext>
+                </a:extLst>
+              </p:cNvPr>
+              <p:cNvPicPr/>
+              <p:nvPr/>
+            </p:nvPicPr>
+            <p:blipFill>
+              <a:blip r:embed="rId3"/>
+              <a:stretch>
+                <a:fillRect/>
+              </a:stretch>
+            </p:blipFill>
+            <p:spPr>
+              <a:xfrm>
+                <a:off x="2704983" y="1088716"/>
+                <a:ext cx="179221" cy="1823921"/>
+              </a:xfrm>
+              <a:prstGeom prst="rect">
+                <a:avLst/>
+              </a:prstGeom>
+            </p:spPr>
+          </p:pic>
+        </mc:Fallback>
+      </mc:AlternateContent>
+      <mc:AlternateContent xmlns:mc="http://schemas.openxmlformats.org/markup-compatibility/2006">
+        <mc:Choice xmlns:p14="http://schemas.microsoft.com/office/powerpoint/2010/main" Requires="p14">
+          <p:contentPart p14:bwMode="auto" r:id="rId4">
+            <p14:nvContentPartPr>
+              <p14:cNvPr id="5" name="Ink 4">
+                <a:extLst>
+                  <a:ext uri="{FF2B5EF4-FFF2-40B4-BE49-F238E27FC236}">
+                    <a16:creationId xmlns:a16="http://schemas.microsoft.com/office/drawing/2014/main" id="{757EC4C2-30F1-69FF-4C46-86AF837196B1}"/>
+                  </a:ext>
+                </a:extLst>
+              </p14:cNvPr>
+              <p14:cNvContentPartPr/>
+              <p14:nvPr/>
+            </p14:nvContentPartPr>
+            <p14:xfrm>
+              <a:off x="1814285" y="1442357"/>
+              <a:ext cx="1370258" cy="58012"/>
+            </p14:xfrm>
+          </p:contentPart>
+        </mc:Choice>
+        <mc:Fallback>
+          <p:pic>
+            <p:nvPicPr>
+              <p:cNvPr id="5" name="Ink 4">
+                <a:extLst>
+                  <a:ext uri="{FF2B5EF4-FFF2-40B4-BE49-F238E27FC236}">
+                    <a16:creationId xmlns:a16="http://schemas.microsoft.com/office/drawing/2014/main" id="{757EC4C2-30F1-69FF-4C46-86AF837196B1}"/>
+                  </a:ext>
+                </a:extLst>
+              </p:cNvPr>
+              <p:cNvPicPr/>
+              <p:nvPr/>
+            </p:nvPicPr>
+            <p:blipFill>
+              <a:blip r:embed="rId5"/>
+              <a:stretch>
+                <a:fillRect/>
+              </a:stretch>
+            </p:blipFill>
+            <p:spPr>
+              <a:xfrm>
+                <a:off x="1796293" y="1424452"/>
+                <a:ext cx="1405882" cy="93464"/>
+              </a:xfrm>
+              <a:prstGeom prst="rect">
+                <a:avLst/>
+              </a:prstGeom>
+            </p:spPr>
+          </p:pic>
+        </mc:Fallback>
+      </mc:AlternateContent>
+      <mc:AlternateContent xmlns:mc="http://schemas.openxmlformats.org/markup-compatibility/2006">
+        <mc:Choice xmlns:p14="http://schemas.microsoft.com/office/powerpoint/2010/main" Requires="p14">
+          <p:contentPart p14:bwMode="auto" r:id="rId6">
+            <p14:nvContentPartPr>
+              <p14:cNvPr id="6" name="Ink 5">
+                <a:extLst>
+                  <a:ext uri="{FF2B5EF4-FFF2-40B4-BE49-F238E27FC236}">
+                    <a16:creationId xmlns:a16="http://schemas.microsoft.com/office/drawing/2014/main" id="{AE39F47C-F515-1FC1-718E-2E6AFEA24484}"/>
+                  </a:ext>
+                </a:extLst>
+              </p14:cNvPr>
+              <p14:cNvContentPartPr/>
+              <p14:nvPr/>
+            </p14:nvContentPartPr>
+            <p14:xfrm>
+              <a:off x="3718586" y="1016000"/>
+              <a:ext cx="1051290" cy="1850280"/>
+            </p14:xfrm>
+          </p:contentPart>
+        </mc:Choice>
+        <mc:Fallback>
+          <p:pic>
+            <p:nvPicPr>
+              <p:cNvPr id="6" name="Ink 5">
+                <a:extLst>
+                  <a:ext uri="{FF2B5EF4-FFF2-40B4-BE49-F238E27FC236}">
+                    <a16:creationId xmlns:a16="http://schemas.microsoft.com/office/drawing/2014/main" id="{AE39F47C-F515-1FC1-718E-2E6AFEA24484}"/>
+                  </a:ext>
+                </a:extLst>
+              </p:cNvPr>
+              <p:cNvPicPr/>
+              <p:nvPr/>
+            </p:nvPicPr>
+            <p:blipFill>
+              <a:blip r:embed="rId7"/>
+              <a:stretch>
+                <a:fillRect/>
+              </a:stretch>
+            </p:blipFill>
+            <p:spPr>
+              <a:xfrm>
+                <a:off x="3700597" y="998005"/>
+                <a:ext cx="1086909" cy="1885911"/>
+              </a:xfrm>
+              <a:prstGeom prst="rect">
+                <a:avLst/>
+              </a:prstGeom>
+            </p:spPr>
+          </p:pic>
+        </mc:Fallback>
+      </mc:AlternateContent>
+      <mc:AlternateContent xmlns:mc="http://schemas.openxmlformats.org/markup-compatibility/2006">
+        <mc:Choice xmlns:p14="http://schemas.microsoft.com/office/powerpoint/2010/main" Requires="p14">
+          <p:contentPart p14:bwMode="auto" r:id="rId8">
+            <p14:nvContentPartPr>
+              <p14:cNvPr id="7" name="Ink 6">
+                <a:extLst>
+                  <a:ext uri="{FF2B5EF4-FFF2-40B4-BE49-F238E27FC236}">
+                    <a16:creationId xmlns:a16="http://schemas.microsoft.com/office/drawing/2014/main" id="{6583D680-F220-D034-D2CD-0D5E74C9B384}"/>
+                  </a:ext>
+                </a:extLst>
+              </p14:cNvPr>
+              <p14:cNvContentPartPr/>
+              <p14:nvPr/>
+            </p14:nvContentPartPr>
+            <p14:xfrm>
+              <a:off x="5315857" y="1877021"/>
+              <a:ext cx="1029104" cy="1308800"/>
+            </p14:xfrm>
+          </p:contentPart>
+        </mc:Choice>
+        <mc:Fallback>
+          <p:pic>
+            <p:nvPicPr>
+              <p:cNvPr id="7" name="Ink 6">
+                <a:extLst>
+                  <a:ext uri="{FF2B5EF4-FFF2-40B4-BE49-F238E27FC236}">
+                    <a16:creationId xmlns:a16="http://schemas.microsoft.com/office/drawing/2014/main" id="{6583D680-F220-D034-D2CD-0D5E74C9B384}"/>
+                  </a:ext>
+                </a:extLst>
+              </p:cNvPr>
+              <p:cNvPicPr/>
+              <p:nvPr/>
+            </p:nvPicPr>
+            <p:blipFill>
+              <a:blip r:embed="rId9"/>
+              <a:stretch>
+                <a:fillRect/>
+              </a:stretch>
+            </p:blipFill>
+            <p:spPr>
+              <a:xfrm>
+                <a:off x="5297866" y="1859023"/>
+                <a:ext cx="1064727" cy="1344436"/>
+              </a:xfrm>
+              <a:prstGeom prst="rect">
+                <a:avLst/>
+              </a:prstGeom>
+            </p:spPr>
+          </p:pic>
+        </mc:Fallback>
+      </mc:AlternateContent>
+      <p:sp>
+        <p:nvSpPr>
+          <p:cNvPr id="11" name="TextBox 10">
+            <a:extLst>
+              <a:ext uri="{FF2B5EF4-FFF2-40B4-BE49-F238E27FC236}">
+                <a16:creationId xmlns:a16="http://schemas.microsoft.com/office/drawing/2014/main" id="{B9F7FF27-934F-61E9-623E-28E67F7A95BB}"/>
+              </a:ext>
+            </a:extLst>
+          </p:cNvPr>
+          <p:cNvSpPr txBox="1"/>
+          <p:nvPr/>
+        </p:nvSpPr>
+        <p:spPr>
+          <a:xfrm>
+            <a:off x="763814" y="582385"/>
+            <a:ext cx="10392937" cy="523220"/>
+          </a:xfrm>
+          <a:prstGeom prst="rect">
+            <a:avLst/>
+          </a:prstGeom>
+          <a:noFill/>
+        </p:spPr>
+        <p:txBody>
+          <a:bodyPr rot="0" spcFirstLastPara="0" vertOverflow="overflow" horzOverflow="overflow" vert="horz" wrap="square" lIns="91440" tIns="45720" rIns="91440" bIns="45720" numCol="1" spcCol="0" rtlCol="0" fromWordArt="0" anchor="t" anchorCtr="0" forceAA="0" compatLnSpc="1">
+            <a:prstTxWarp prst="textNoShape">
+              <a:avLst/>
+            </a:prstTxWarp>
+            <a:spAutoFit/>
+          </a:bodyPr>
+          <a:lstStyle/>
+          <a:p>
+            <a:r>
+              <a:rPr lang="en-US" sz="2800" b="1"/>
+              <a:t>And now, what you have all been waiting impatiently for:</a:t>
+            </a:r>
+          </a:p>
+        </p:txBody>
+      </p:sp>
+    </p:spTree>
+    <p:extLst>
+      <p:ext uri="{BB962C8B-B14F-4D97-AF65-F5344CB8AC3E}">
+        <p14:creationId xmlns:p14="http://schemas.microsoft.com/office/powerpoint/2010/main" val="411591964"/>
       </p:ext>
     </p:extLst>
   </p:cSld>

--- a/Current Presentation/Spring 2026.pptx
+++ b/Current Presentation/Spring 2026.pptx
@@ -124,7 +124,7 @@
 <p1510:revInfo xmlns:a="http://schemas.openxmlformats.org/drawingml/2006/main" xmlns:r="http://schemas.openxmlformats.org/officeDocument/2006/relationships" xmlns:p1510="http://schemas.microsoft.com/office/powerpoint/2015/10/main">
   <p1510:revLst>
     <p1510:client id="{6998B00B-2615-DA7F-16DD-BEDBD145F26F}" v="142" dt="2026-06-22T15:26:48.182"/>
-    <p1510:client id="{B3D8BC0C-D2E7-1DB9-11BC-BCF84AD0F7D9}" v="10" dt="2026-06-23T15:35:35.982"/>
+    <p1510:client id="{B3D8BC0C-D2E7-1DB9-11BC-BCF84AD0F7D9}" v="258" dt="2026-06-23T15:51:44.607"/>
   </p1510:revLst>
 </p1510:revInfo>
 </file>
@@ -176,37 +176,6 @@
           <inkml:channelProperty channel="OE" name="resolution" value="1000" units="1/deg"/>
         </inkml:channelProperties>
       </inkml:inkSource>
-      <inkml:timestamp xml:id="ts0" timeString="2026-06-22T16:59:40.399"/>
-    </inkml:context>
-    <inkml:brush xml:id="br0">
-      <inkml:brushProperty name="width" value="0.1" units="cm"/>
-      <inkml:brushProperty name="height" value="0.1" units="cm"/>
-    </inkml:brush>
-  </inkml:definitions>
-  <inkml:trace contextRef="#ctx0" brushRef="#br0">12415 4842 16383 0 0,'0'8'0'0'0,"0"12"0"0"0,-4 7 0 0 0,-2 3 0 0 0,1 0 0 0 0,1 0 0 0 0,1-1 0 0 0,-4-2 0 0 0,1 0 0 0 0,0-1 0 0 0,1 0 0 0 0,-2 12 0 0 0,0 4 0 0 0,1 8 0 0 0,-3 16 0 0 0,-4 11 0 0 0,0 4 0 0 0,-6 6 0 0 0,0 1 0 0 0,3 3 0 0 0,0-2 0 0 0,3-2 0 0 0,4-9 0 0 0,3-12 0 0 0,2-13 0 0 0,3-12 0 0 0,1-8 0 0 0,-4-2 0 0 0,-1 4 0 0 0,0 3 0 0 0,-7 13 0 0 0,-2 10 0 0 0,1 17 0 0 0,3 12 0 0 0,4 7 0 0 0,2 5 0 0 0,2 2 0 0 0,2 1 0 0 0,0-1 0 0 0,0-9 0 0 0,1-12 0 0 0,-1-17 0 0 0,1-14 0 0 0,-1-12 0 0 0,0-5 0 0 0,0-3 0 0 0,0-3 0 0 0,0 1 0 0 0,0 1 0 0 0,0 8 0 0 0,-4 5 0 0 0,-2 9 0 0 0,-3 12 0 0 0,-1 8 0 0 0,-3 4 0 0 0,1-2 0 0 0,2-5 0 0 0,3-6 0 0 0,3-2 0 0 0,2-6 0 0 0,1-9 0 0 0,1-7 0 0 0,1-3 0 0 0,-1-3 0 0 0,1 1 0 0 0,-1-1 0 0 0,0 2 0 0 0,1 0 0 0 0,-1 2 0 0 0,0-2 0 0 0,0 3 0 0 0,0-2 0 0 0,0 1 0 0 0,0 4 0 0 0,0 2 0 0 0,0-1 0 0 0,0 0 0 0 0,0 1 0 0 0,0 3 0 0 0,0-4 0 0 0,0 0 0 0 0,0-2 0 0 0,0-1 0 0 0,0 2 0 0 0,0-2 0 0 0,0-3 0 0 0,0-4 0 0 0,0-4 0 0 0,0-1 0 0 0,0-2 0 0 0,0-1 0 0 0,0-1 0 0 0,0 5 0 0 0,-5 5 0 0 0,0 2 0 0 0,-1-1 0 0 0,2 2 0 0 0,1-2 0 0 0,-3 3 0 0 0,-1-1 0 0 0,1 2 0 0 0,2-7 0 0 0</inkml:trace>
-</inkml:ink>
-</file>
-
-<file path=ppt/ink/ink3.xml><?xml version="1.0" encoding="utf-8"?>
-<inkml:ink xmlns:inkml="http://www.w3.org/2003/InkML">
-  <inkml:definitions>
-    <inkml:context xml:id="ctx0">
-      <inkml:inkSource xml:id="inkSrc0">
-        <inkml:traceFormat>
-          <inkml:channel name="X" type="integer" min="-2.14748E9" max="2.14748E9" units="cm"/>
-          <inkml:channel name="Y" type="integer" min="-2.14748E9" max="2.14748E9" units="cm"/>
-          <inkml:channel name="F" type="integer" max="32767" units="dev"/>
-          <inkml:channel name="OA" type="integer" max="360" units="deg"/>
-          <inkml:channel name="OE" type="integer" max="90" units="deg"/>
-        </inkml:traceFormat>
-        <inkml:channelProperties>
-          <inkml:channelProperty channel="X" name="resolution" value="1000" units="1/cm"/>
-          <inkml:channelProperty channel="Y" name="resolution" value="1000" units="1/cm"/>
-          <inkml:channelProperty channel="F" name="resolution" value="0" units="1/dev"/>
-          <inkml:channelProperty channel="OA" name="resolution" value="1000" units="1/deg"/>
-          <inkml:channelProperty channel="OE" name="resolution" value="1000" units="1/deg"/>
-        </inkml:channelProperties>
-      </inkml:inkSource>
       <inkml:timestamp xml:id="ts0" timeString="2026-06-22T16:59:40.400"/>
     </inkml:context>
     <inkml:brush xml:id="br0">
@@ -215,68 +184,6 @@
     </inkml:brush>
   </inkml:definitions>
   <inkml:trace contextRef="#ctx0" brushRef="#br0">9366 5821 16383 0 0,'9'4'0'0'0,"11"2"0"0"0,15-1 0 0 0,19 4 0 0 0,26 8 0 0 0,20 2 0 0 0,33 2 0 0 0,27-3 0 0 0,21-5 0 0 0,22-4 0 0 0,12-3 0 0 0,2-4 0 0 0,-4-1 0 0 0,-18-1 0 0 0,-25 3 0 0 0,-32 2 0 0 0,-32-1 0 0 0,-25 0 0 0 0,-17-1 0 0 0,9-1 0 0 0,15-1 0 0 0,14-1 0 0 0,14 0 0 0 0,18 0 0 0 0,4 0 0 0 0,-5-1 0 0 0,-21 1 0 0 0,-21 0 0 0 0,-8 0 0 0 0,3 0 0 0 0,-5 0 0 0 0,-3 0 0 0 0,-11 4 0 0 0,-16 2 0 0 0</inkml:trace>
-</inkml:ink>
-</file>
-
-<file path=ppt/ink/ink4.xml><?xml version="1.0" encoding="utf-8"?>
-<inkml:ink xmlns:inkml="http://www.w3.org/2003/InkML">
-  <inkml:definitions>
-    <inkml:context xml:id="ctx0">
-      <inkml:inkSource xml:id="inkSrc0">
-        <inkml:traceFormat>
-          <inkml:channel name="X" type="integer" min="-2.14748E9" max="2.14748E9" units="cm"/>
-          <inkml:channel name="Y" type="integer" min="-2.14748E9" max="2.14748E9" units="cm"/>
-          <inkml:channel name="F" type="integer" max="32767" units="dev"/>
-          <inkml:channel name="OA" type="integer" max="360" units="deg"/>
-          <inkml:channel name="OE" type="integer" max="90" units="deg"/>
-        </inkml:traceFormat>
-        <inkml:channelProperties>
-          <inkml:channelProperty channel="X" name="resolution" value="1000" units="1/cm"/>
-          <inkml:channelProperty channel="Y" name="resolution" value="1000" units="1/cm"/>
-          <inkml:channelProperty channel="F" name="resolution" value="0" units="1/dev"/>
-          <inkml:channelProperty channel="OA" name="resolution" value="1000" units="1/deg"/>
-          <inkml:channelProperty channel="OE" name="resolution" value="1000" units="1/deg"/>
-        </inkml:channelProperties>
-      </inkml:inkSource>
-      <inkml:timestamp xml:id="ts0" timeString="2026-06-22T16:59:40.401"/>
-    </inkml:context>
-    <inkml:brush xml:id="br0">
-      <inkml:brushProperty name="width" value="0.1" units="cm"/>
-      <inkml:brushProperty name="height" value="0.1" units="cm"/>
-    </inkml:brush>
-  </inkml:definitions>
-  <inkml:trace contextRef="#ctx0" brushRef="#br0">15124 4577 16383 0 0,'4'0'0'0'0,"2"9"0"0"0,-1 11 0 0 0,-4 15 0 0 0,-8 19 0 0 0,-11 26 0 0 0,-11 24 0 0 0,0 35 0 0 0,0 22 0 0 0,5 23 0 0 0,7 14 0 0 0,6 4 0 0 0,5 1 0 0 0,3-7 0 0 0,3-17 0 0 0,-8-3 0 0 0,-2-7 0 0 0,1-6 0 0 0,1 12 0 0 0,2 15 0 0 0,3 22 0 0 0,1 18 0 0 0,1 13 0 0 0,1-1 0 0 0,1-7 0 0 0,-1-22 0 0 0,5-22 0 0 0,1-30 0 0 0,0-30 0 0 0,-2-33 0 0 0,-1-16 0 0 0,-1-13 0 0 0,-1-10 0 0 0,-5-2 0 0 0,-1-2 0 0 0,3-28 0 0 0,16-48 0 0 0,14-51 0 0 0,6-34 0 0 0,7-34 0 0 0,3-22 0 0 0,0-6 0 0 0,5 4 0 0 0,-2 14 0 0 0,-8 23 0 0 0,-3 24 0 0 0,-3 22 0 0 0,-7 20 0 0 0,-8 12 0 0 0,-7 6 0 0 0,-1-3 0 0 0,-3-11 0 0 0,7-17 0 0 0,0-13 0 0 0,7-17 0 0 0,4-8 0 0 0,11-16 0 0 0,-1 6 0 0 0,-3 7 0 0 0,3 5 0 0 0,-1 18 0 0 0,3 23 0 0 0,7 25 0 0 0,23 19 0 0 0,29 14 0 0 0,46 30 0 0 0,41 29 0 0 0,33 15 0 0 0,18 10 0 0 0,12 14 0 0 0,-19 0 0 0 0,-39-14 0 0 0,-30-7 0 0 0,-33-10 0 0 0,-35-7 0 0 0,-31 2 0 0 0,-22 1 0 0 0,-18 4 0 0 0,-11 14 0 0 0,-7 30 0 0 0,-5 27 0 0 0,0 27 0 0 0,-1 16 0 0 0,2 19 0 0 0,0-1 0 0 0,2 0 0 0 0,0-9 0 0 0,0-26 0 0 0,1-32 0 0 0,0-27 0 0 0,1-25 0 0 0,-1-16 0 0 0,0-9 0 0 0,-4-11 0 0 0,-2-8 0 0 0,1-3 0 0 0,0-1 0 0 0,2 0 0 0 0,-3 1 0 0 0,-1-4 0 0 0</inkml:trace>
-</inkml:ink>
-</file>
-
-<file path=ppt/ink/ink5.xml><?xml version="1.0" encoding="utf-8"?>
-<inkml:ink xmlns:inkml="http://www.w3.org/2003/InkML">
-  <inkml:definitions>
-    <inkml:context xml:id="ctx0">
-      <inkml:inkSource xml:id="inkSrc0">
-        <inkml:traceFormat>
-          <inkml:channel name="X" type="integer" min="-2.14748E9" max="2.14748E9" units="cm"/>
-          <inkml:channel name="Y" type="integer" min="-2.14748E9" max="2.14748E9" units="cm"/>
-          <inkml:channel name="F" type="integer" max="32767" units="dev"/>
-          <inkml:channel name="OA" type="integer" max="360" units="deg"/>
-          <inkml:channel name="OE" type="integer" max="90" units="deg"/>
-        </inkml:traceFormat>
-        <inkml:channelProperties>
-          <inkml:channelProperty channel="X" name="resolution" value="1000" units="1/cm"/>
-          <inkml:channelProperty channel="Y" name="resolution" value="1000" units="1/cm"/>
-          <inkml:channelProperty channel="F" name="resolution" value="0" units="1/dev"/>
-          <inkml:channelProperty channel="OA" name="resolution" value="1000" units="1/deg"/>
-          <inkml:channelProperty channel="OE" name="resolution" value="1000" units="1/deg"/>
-        </inkml:channelProperties>
-      </inkml:inkSource>
-      <inkml:timestamp xml:id="ts0" timeString="2026-06-22T16:59:40.402"/>
-    </inkml:context>
-    <inkml:brush xml:id="br0">
-      <inkml:brushProperty name="width" value="0.1" units="cm"/>
-      <inkml:brushProperty name="height" value="0.1" units="cm"/>
-    </inkml:brush>
-  </inkml:definitions>
-  <inkml:trace contextRef="#ctx0" brushRef="#br0">19579 8073 16383 0 0,'4'5'0'0'0,"41"9"0"0"0,59 24 0 0 0,67 19 0 0 0,57 8 0 0 0,45 9 0 0 0,23-6 0 0 0,-9-12 0 0 0,-31-15 0 0 0,-43-14 0 0 0,-40-12 0 0 0,-36-9 0 0 0,-34-5 0 0 0,-29-7 0 0 0,-19-2 0 0 0,-6-9 0 0 0,-3-10 0 0 0,4-13 0 0 0,6-17 0 0 0,-2-7 0 0 0,2-6 0 0 0,-8 0 0 0 0,-12 5 0 0 0,-12-1 0 0 0,-11-2 0 0 0,-7 7 0 0 0,-4 1 0 0 0,-3-3 0 0 0,-2 2 0 0 0,-12-3 0 0 0,-17-7 0 0 0,-20-4 0 0 0,-19 2 0 0 0,-26 0 0 0 0,-11 5 0 0 0,1 8 0 0 0,10 16 0 0 0,13 6 0 0 0,8 10 0 0 0,8 9 0 0 0,7 8 0 0 0,1 2 0 0 0,-6 2 0 0 0,-13 3 0 0 0,-16 1 0 0 0,-7 2 0 0 0,-13 1 0 0 0,-17 13 0 0 0,-7 21 0 0 0,3 19 0 0 0,15 8 0 0 0,25 2 0 0 0,24 4 0 0 0,25 7 0 0 0,19 4 0 0 0,11 6 0 0 0,9 6 0 0 0,4 4 0 0 0,0 4 0 0 0,0 11 0 0 0,-3 8 0 0 0,-10 14 0 0 0,-1 20 0 0 0,-2 22 0 0 0,-2 16 0 0 0,2 10 0 0 0,6 6 0 0 0,17 2 0 0 0,30-4 0 0 0,30-7 0 0 0,18-19 0 0 0,17-19 0 0 0,12-18 0 0 0,-3-26 0 0 0,-8-26 0 0 0,-16-21 0 0 0,-13-13 0 0 0,-15-15 0 0 0,-12-6 0 0 0,-9-9 0 0 0,-10-4 0 0 0,-6-5 0 0 0,-1-6 0 0 0,1-3 0 0 0,6-4 0 0 0,3-2 0 0 0,-3 0 0 0 0</inkml:trace>
 </inkml:ink>
 </file>
 
@@ -8504,57 +8411,6 @@
         <mc:Choice xmlns:p14="http://schemas.microsoft.com/office/powerpoint/2010/main" Requires="p14">
           <p:contentPart p14:bwMode="auto" r:id="rId2">
             <p14:nvContentPartPr>
-              <p14:cNvPr id="4" name="Ink 3">
-                <a:extLst>
-                  <a:ext uri="{FF2B5EF4-FFF2-40B4-BE49-F238E27FC236}">
-                    <a16:creationId xmlns:a16="http://schemas.microsoft.com/office/drawing/2014/main" id="{1EDF980B-B73B-E6F1-BD42-856A30A6BE57}"/>
-                  </a:ext>
-                </a:extLst>
-              </p14:cNvPr>
-              <p14:cNvContentPartPr/>
-              <p14:nvPr/>
-            </p14:nvContentPartPr>
-            <p14:xfrm>
-              <a:off x="2722977" y="1106714"/>
-              <a:ext cx="143593" cy="1788285"/>
-            </p14:xfrm>
-          </p:contentPart>
-        </mc:Choice>
-        <mc:Fallback>
-          <p:pic>
-            <p:nvPicPr>
-              <p:cNvPr id="4" name="Ink 3">
-                <a:extLst>
-                  <a:ext uri="{FF2B5EF4-FFF2-40B4-BE49-F238E27FC236}">
-                    <a16:creationId xmlns:a16="http://schemas.microsoft.com/office/drawing/2014/main" id="{1EDF980B-B73B-E6F1-BD42-856A30A6BE57}"/>
-                  </a:ext>
-                </a:extLst>
-              </p:cNvPr>
-              <p:cNvPicPr/>
-              <p:nvPr/>
-            </p:nvPicPr>
-            <p:blipFill>
-              <a:blip r:embed="rId3"/>
-              <a:stretch>
-                <a:fillRect/>
-              </a:stretch>
-            </p:blipFill>
-            <p:spPr>
-              <a:xfrm>
-                <a:off x="2704983" y="1088716"/>
-                <a:ext cx="179221" cy="1823921"/>
-              </a:xfrm>
-              <a:prstGeom prst="rect">
-                <a:avLst/>
-              </a:prstGeom>
-            </p:spPr>
-          </p:pic>
-        </mc:Fallback>
-      </mc:AlternateContent>
-      <mc:AlternateContent xmlns:mc="http://schemas.openxmlformats.org/markup-compatibility/2006">
-        <mc:Choice xmlns:p14="http://schemas.microsoft.com/office/powerpoint/2010/main" Requires="p14">
-          <p:contentPart p14:bwMode="auto" r:id="rId4">
-            <p14:nvContentPartPr>
               <p14:cNvPr id="5" name="Ink 4">
                 <a:extLst>
                   <a:ext uri="{FF2B5EF4-FFF2-40B4-BE49-F238E27FC236}">
@@ -8585,7 +8441,7 @@
               <p:nvPr/>
             </p:nvPicPr>
             <p:blipFill>
-              <a:blip r:embed="rId5"/>
+              <a:blip r:embed="rId3"/>
               <a:stretch>
                 <a:fillRect/>
               </a:stretch>
@@ -8602,108 +8458,6 @@
           </p:pic>
         </mc:Fallback>
       </mc:AlternateContent>
-      <mc:AlternateContent xmlns:mc="http://schemas.openxmlformats.org/markup-compatibility/2006">
-        <mc:Choice xmlns:p14="http://schemas.microsoft.com/office/powerpoint/2010/main" Requires="p14">
-          <p:contentPart p14:bwMode="auto" r:id="rId6">
-            <p14:nvContentPartPr>
-              <p14:cNvPr id="6" name="Ink 5">
-                <a:extLst>
-                  <a:ext uri="{FF2B5EF4-FFF2-40B4-BE49-F238E27FC236}">
-                    <a16:creationId xmlns:a16="http://schemas.microsoft.com/office/drawing/2014/main" id="{AE39F47C-F515-1FC1-718E-2E6AFEA24484}"/>
-                  </a:ext>
-                </a:extLst>
-              </p14:cNvPr>
-              <p14:cNvContentPartPr/>
-              <p14:nvPr/>
-            </p14:nvContentPartPr>
-            <p14:xfrm>
-              <a:off x="3718586" y="1016000"/>
-              <a:ext cx="1051290" cy="1850280"/>
-            </p14:xfrm>
-          </p:contentPart>
-        </mc:Choice>
-        <mc:Fallback>
-          <p:pic>
-            <p:nvPicPr>
-              <p:cNvPr id="6" name="Ink 5">
-                <a:extLst>
-                  <a:ext uri="{FF2B5EF4-FFF2-40B4-BE49-F238E27FC236}">
-                    <a16:creationId xmlns:a16="http://schemas.microsoft.com/office/drawing/2014/main" id="{AE39F47C-F515-1FC1-718E-2E6AFEA24484}"/>
-                  </a:ext>
-                </a:extLst>
-              </p:cNvPr>
-              <p:cNvPicPr/>
-              <p:nvPr/>
-            </p:nvPicPr>
-            <p:blipFill>
-              <a:blip r:embed="rId7"/>
-              <a:stretch>
-                <a:fillRect/>
-              </a:stretch>
-            </p:blipFill>
-            <p:spPr>
-              <a:xfrm>
-                <a:off x="3700597" y="998005"/>
-                <a:ext cx="1086909" cy="1885911"/>
-              </a:xfrm>
-              <a:prstGeom prst="rect">
-                <a:avLst/>
-              </a:prstGeom>
-            </p:spPr>
-          </p:pic>
-        </mc:Fallback>
-      </mc:AlternateContent>
-      <mc:AlternateContent xmlns:mc="http://schemas.openxmlformats.org/markup-compatibility/2006">
-        <mc:Choice xmlns:p14="http://schemas.microsoft.com/office/powerpoint/2010/main" Requires="p14">
-          <p:contentPart p14:bwMode="auto" r:id="rId8">
-            <p14:nvContentPartPr>
-              <p14:cNvPr id="7" name="Ink 6">
-                <a:extLst>
-                  <a:ext uri="{FF2B5EF4-FFF2-40B4-BE49-F238E27FC236}">
-                    <a16:creationId xmlns:a16="http://schemas.microsoft.com/office/drawing/2014/main" id="{6583D680-F220-D034-D2CD-0D5E74C9B384}"/>
-                  </a:ext>
-                </a:extLst>
-              </p14:cNvPr>
-              <p14:cNvContentPartPr/>
-              <p14:nvPr/>
-            </p14:nvContentPartPr>
-            <p14:xfrm>
-              <a:off x="5315857" y="1877021"/>
-              <a:ext cx="1029104" cy="1308800"/>
-            </p14:xfrm>
-          </p:contentPart>
-        </mc:Choice>
-        <mc:Fallback>
-          <p:pic>
-            <p:nvPicPr>
-              <p:cNvPr id="7" name="Ink 6">
-                <a:extLst>
-                  <a:ext uri="{FF2B5EF4-FFF2-40B4-BE49-F238E27FC236}">
-                    <a16:creationId xmlns:a16="http://schemas.microsoft.com/office/drawing/2014/main" id="{6583D680-F220-D034-D2CD-0D5E74C9B384}"/>
-                  </a:ext>
-                </a:extLst>
-              </p:cNvPr>
-              <p:cNvPicPr/>
-              <p:nvPr/>
-            </p:nvPicPr>
-            <p:blipFill>
-              <a:blip r:embed="rId9"/>
-              <a:stretch>
-                <a:fillRect/>
-              </a:stretch>
-            </p:blipFill>
-            <p:spPr>
-              <a:xfrm>
-                <a:off x="5297866" y="1859023"/>
-                <a:ext cx="1064727" cy="1344436"/>
-              </a:xfrm>
-              <a:prstGeom prst="rect">
-                <a:avLst/>
-              </a:prstGeom>
-            </p:spPr>
-          </p:pic>
-        </mc:Fallback>
-      </mc:AlternateContent>
       <p:sp>
         <p:nvSpPr>
           <p:cNvPr id="11" name="TextBox 10">
@@ -8738,6 +8492,219 @@
             <a:r>
               <a:rPr lang="en-US" sz="2800" b="1"/>
               <a:t>And now, what you have all been waiting impatiently for:</a:t>
+            </a:r>
+          </a:p>
+        </p:txBody>
+      </p:sp>
+      <p:sp>
+        <p:nvSpPr>
+          <p:cNvPr id="2" name="TextBox 1">
+            <a:extLst>
+              <a:ext uri="{FF2B5EF4-FFF2-40B4-BE49-F238E27FC236}">
+                <a16:creationId xmlns:a16="http://schemas.microsoft.com/office/drawing/2014/main" id="{CEB79FAF-285C-B18F-6774-DF3457199FCE}"/>
+              </a:ext>
+            </a:extLst>
+          </p:cNvPr>
+          <p:cNvSpPr txBox="1"/>
+          <p:nvPr/>
+        </p:nvSpPr>
+        <p:spPr>
+          <a:xfrm>
+            <a:off x="772583" y="1566333"/>
+            <a:ext cx="6021916" cy="369332"/>
+          </a:xfrm>
+          <a:prstGeom prst="rect">
+            <a:avLst/>
+          </a:prstGeom>
+          <a:noFill/>
+        </p:spPr>
+        <p:txBody>
+          <a:bodyPr rot="0" spcFirstLastPara="0" vertOverflow="overflow" horzOverflow="overflow" vert="horz" wrap="square" lIns="91440" tIns="45720" rIns="91440" bIns="45720" numCol="1" spcCol="0" rtlCol="0" fromWordArt="0" anchor="t" anchorCtr="0" forceAA="0" compatLnSpc="1">
+            <a:prstTxWarp prst="textNoShape">
+              <a:avLst/>
+            </a:prstTxWarp>
+            <a:spAutoFit/>
+          </a:bodyPr>
+          <a:lstStyle/>
+          <a:p>
+            <a:r>
+              <a:rPr lang="en-US"/>
+              <a:t>The End</a:t>
+            </a:r>
+          </a:p>
+        </p:txBody>
+      </p:sp>
+      <p:sp>
+        <p:nvSpPr>
+          <p:cNvPr id="3" name="TextBox 2">
+            <a:extLst>
+              <a:ext uri="{FF2B5EF4-FFF2-40B4-BE49-F238E27FC236}">
+                <a16:creationId xmlns:a16="http://schemas.microsoft.com/office/drawing/2014/main" id="{C97490C5-02DB-8C68-FD24-F2396E20873C}"/>
+              </a:ext>
+            </a:extLst>
+          </p:cNvPr>
+          <p:cNvSpPr txBox="1"/>
+          <p:nvPr/>
+        </p:nvSpPr>
+        <p:spPr>
+          <a:xfrm>
+            <a:off x="765325" y="2059817"/>
+            <a:ext cx="2081288" cy="369332"/>
+          </a:xfrm>
+          <a:prstGeom prst="rect">
+            <a:avLst/>
+          </a:prstGeom>
+          <a:noFill/>
+        </p:spPr>
+        <p:txBody>
+          <a:bodyPr rot="0" spcFirstLastPara="0" vertOverflow="overflow" horzOverflow="overflow" vert="horz" wrap="square" lIns="91440" tIns="45720" rIns="91440" bIns="45720" numCol="1" spcCol="0" rtlCol="0" fromWordArt="0" anchor="t" anchorCtr="0" forceAA="0" compatLnSpc="1">
+            <a:prstTxWarp prst="textNoShape">
+              <a:avLst/>
+            </a:prstTxWarp>
+            <a:spAutoFit/>
+          </a:bodyPr>
+          <a:lstStyle/>
+          <a:p>
+            <a:r>
+              <a:rPr lang="en-US" dirty="0"/>
+              <a:t>Fooled </a:t>
+            </a:r>
+            <a:r>
+              <a:rPr lang="en-US" dirty="0" err="1"/>
+              <a:t>ya</a:t>
+            </a:r>
+            <a:r>
+              <a:rPr lang="en-US" dirty="0"/>
+              <a:t>!</a:t>
+            </a:r>
+          </a:p>
+        </p:txBody>
+      </p:sp>
+      <p:sp>
+        <p:nvSpPr>
+          <p:cNvPr id="8" name="TextBox 7">
+            <a:extLst>
+              <a:ext uri="{FF2B5EF4-FFF2-40B4-BE49-F238E27FC236}">
+                <a16:creationId xmlns:a16="http://schemas.microsoft.com/office/drawing/2014/main" id="{1DC97F59-AFB0-CCFF-08D4-BE0394F1A3E9}"/>
+              </a:ext>
+            </a:extLst>
+          </p:cNvPr>
+          <p:cNvSpPr txBox="1"/>
+          <p:nvPr/>
+        </p:nvSpPr>
+        <p:spPr>
+          <a:xfrm>
+            <a:off x="761396" y="2428119"/>
+            <a:ext cx="3565373" cy="369332"/>
+          </a:xfrm>
+          <a:prstGeom prst="rect">
+            <a:avLst/>
+          </a:prstGeom>
+          <a:noFill/>
+        </p:spPr>
+        <p:txBody>
+          <a:bodyPr rot="0" spcFirstLastPara="0" vertOverflow="overflow" horzOverflow="overflow" vert="horz" wrap="square" lIns="91440" tIns="45720" rIns="91440" bIns="45720" numCol="1" spcCol="0" rtlCol="0" fromWordArt="0" anchor="t" anchorCtr="0" forceAA="0" compatLnSpc="1">
+            <a:prstTxWarp prst="textNoShape">
+              <a:avLst/>
+            </a:prstTxWarp>
+            <a:spAutoFit/>
+          </a:bodyPr>
+          <a:lstStyle/>
+          <a:p>
+            <a:r>
+              <a:rPr lang="en-US"/>
+              <a:t>Thanks for watching!</a:t>
+            </a:r>
+          </a:p>
+        </p:txBody>
+      </p:sp>
+      <p:sp>
+        <p:nvSpPr>
+          <p:cNvPr id="9" name="TextBox 8">
+            <a:extLst>
+              <a:ext uri="{FF2B5EF4-FFF2-40B4-BE49-F238E27FC236}">
+                <a16:creationId xmlns:a16="http://schemas.microsoft.com/office/drawing/2014/main" id="{0B89CE64-C45D-434C-8FE2-7373EB98BE66}"/>
+              </a:ext>
+            </a:extLst>
+          </p:cNvPr>
+          <p:cNvSpPr txBox="1"/>
+          <p:nvPr/>
+        </p:nvSpPr>
+        <p:spPr>
+          <a:xfrm>
+            <a:off x="774700" y="3035904"/>
+            <a:ext cx="4022271" cy="646331"/>
+          </a:xfrm>
+          <a:prstGeom prst="rect">
+            <a:avLst/>
+          </a:prstGeom>
+          <a:noFill/>
+        </p:spPr>
+        <p:txBody>
+          <a:bodyPr rot="0" spcFirstLastPara="0" vertOverflow="overflow" horzOverflow="overflow" vert="horz" wrap="square" lIns="91440" tIns="45720" rIns="91440" bIns="45720" numCol="1" spcCol="0" rtlCol="0" fromWordArt="0" anchor="t" anchorCtr="0" forceAA="0" compatLnSpc="1">
+            <a:prstTxWarp prst="textNoShape">
+              <a:avLst/>
+            </a:prstTxWarp>
+            <a:spAutoFit/>
+          </a:bodyPr>
+          <a:lstStyle/>
+          <a:p>
+            <a:r>
+              <a:rPr lang="en-US" dirty="0"/>
+              <a:t>Now, for </a:t>
+            </a:r>
+            <a:r>
+              <a:rPr lang="en-US" dirty="0" err="1"/>
+              <a:t>reall</a:t>
+            </a:r>
+            <a:r>
+              <a:rPr lang="en-US" dirty="0"/>
+              <a:t> this time:</a:t>
+            </a:r>
+            <a:br>
+              <a:rPr lang="en-US" dirty="0"/>
+            </a:br>
+            <a:r>
+              <a:rPr lang="en-US" dirty="0"/>
+              <a:t>The end!</a:t>
+            </a:r>
+          </a:p>
+        </p:txBody>
+      </p:sp>
+      <p:sp>
+        <p:nvSpPr>
+          <p:cNvPr id="10" name="TextBox 9">
+            <a:extLst>
+              <a:ext uri="{FF2B5EF4-FFF2-40B4-BE49-F238E27FC236}">
+                <a16:creationId xmlns:a16="http://schemas.microsoft.com/office/drawing/2014/main" id="{6E0B117B-22F6-84D8-A97C-EA05E52160D0}"/>
+              </a:ext>
+            </a:extLst>
+          </p:cNvPr>
+          <p:cNvSpPr txBox="1"/>
+          <p:nvPr/>
+        </p:nvSpPr>
+        <p:spPr>
+          <a:xfrm>
+            <a:off x="1745039" y="1566331"/>
+            <a:ext cx="390374" cy="369332"/>
+          </a:xfrm>
+          <a:prstGeom prst="rect">
+            <a:avLst/>
+          </a:prstGeom>
+          <a:noFill/>
+        </p:spPr>
+        <p:txBody>
+          <a:bodyPr rot="0" spcFirstLastPara="0" vertOverflow="overflow" horzOverflow="overflow" vert="horz" wrap="square" lIns="91440" tIns="45720" rIns="91440" bIns="45720" numCol="1" spcCol="0" rtlCol="0" fromWordArt="0" anchor="t" anchorCtr="0" forceAA="0" compatLnSpc="1">
+            <a:prstTxWarp prst="textNoShape">
+              <a:avLst/>
+            </a:prstTxWarp>
+            <a:spAutoFit/>
+          </a:bodyPr>
+          <a:lstStyle/>
+          <a:p>
+            <a:r>
+              <a:rPr lang="en-US"/>
+              <a:t>...</a:t>
             </a:r>
           </a:p>
         </p:txBody>
@@ -8752,6 +8719,124 @@
   <p:clrMapOvr>
     <a:masterClrMapping/>
   </p:clrMapOvr>
+  <mc:AlternateContent xmlns:mc="http://schemas.openxmlformats.org/markup-compatibility/2006">
+    <mc:Choice xmlns:p15="http://schemas.microsoft.com/office/powerpoint/2012/main" Requires="p15">
+      <p:transition xmlns:p14="http://schemas.microsoft.com/office/powerpoint/2010/main" spd="slow" p14:dur="2000">
+        <p15:prstTrans prst="fracture"/>
+      </p:transition>
+    </mc:Choice>
+    <mc:Fallback>
+      <p:transition spd="slow">
+        <p:fade/>
+      </p:transition>
+    </mc:Fallback>
+  </mc:AlternateContent>
+  <p:timing>
+    <p:tnLst>
+      <p:par>
+        <p:cTn id="1" dur="indefinite" restart="never" nodeType="tmRoot">
+          <p:childTnLst>
+            <p:seq concurrent="1" nextAc="seek">
+              <p:cTn id="2" dur="indefinite" nodeType="mainSeq">
+                <p:childTnLst>
+                  <p:par>
+                    <p:cTn id="3" fill="hold">
+                      <p:stCondLst>
+                        <p:cond delay="indefinite"/>
+                      </p:stCondLst>
+                      <p:childTnLst>
+                        <p:par>
+                          <p:cTn id="4" fill="hold">
+                            <p:stCondLst>
+                              <p:cond delay="0"/>
+                            </p:stCondLst>
+                            <p:childTnLst>
+                              <p:par>
+                                <p:cTn id="5" presetID="1" presetClass="entr" presetSubtype="0" fill="hold" grpId="0" nodeType="clickEffect">
+                                  <p:stCondLst>
+                                    <p:cond delay="0"/>
+                                  </p:stCondLst>
+                                  <p:childTnLst>
+                                    <p:set>
+                                      <p:cBhvr>
+                                        <p:cTn id="6" dur="1" fill="hold">
+                                          <p:stCondLst>
+                                            <p:cond delay="0"/>
+                                          </p:stCondLst>
+                                        </p:cTn>
+                                        <p:tgtEl>
+                                          <p:spTgt spid="2"/>
+                                        </p:tgtEl>
+                                        <p:attrNameLst>
+                                          <p:attrName>style.visibility</p:attrName>
+                                        </p:attrNameLst>
+                                      </p:cBhvr>
+                                      <p:to>
+                                        <p:strVal val="visible"/>
+                                      </p:to>
+                                    </p:set>
+                                  </p:childTnLst>
+                                </p:cTn>
+                              </p:par>
+                              <p:par>
+                                <p:cTn id="7" presetID="1" presetClass="entr" presetSubtype="0" fill="hold" grpId="0" nodeType="withEffect">
+                                  <p:stCondLst>
+                                    <p:cond delay="250"/>
+                                  </p:stCondLst>
+                                  <p:childTnLst>
+                                    <p:set>
+                                      <p:cBhvr>
+                                        <p:cTn id="8" dur="1" fill="hold">
+                                          <p:stCondLst>
+                                            <p:cond delay="0"/>
+                                          </p:stCondLst>
+                                        </p:cTn>
+                                        <p:tgtEl>
+                                          <p:spTgt spid="10"/>
+                                        </p:tgtEl>
+                                        <p:attrNameLst>
+                                          <p:attrName>style.visibility</p:attrName>
+                                        </p:attrNameLst>
+                                      </p:cBhvr>
+                                      <p:to>
+                                        <p:strVal val="visible"/>
+                                      </p:to>
+                                    </p:set>
+                                  </p:childTnLst>
+                                </p:cTn>
+                              </p:par>
+                            </p:childTnLst>
+                          </p:cTn>
+                        </p:par>
+                      </p:childTnLst>
+                    </p:cTn>
+                  </p:par>
+                </p:childTnLst>
+              </p:cTn>
+              <p:prevCondLst>
+                <p:cond evt="onPrev" delay="0">
+                  <p:tgtEl>
+                    <p:sldTgt/>
+                  </p:tgtEl>
+                </p:cond>
+              </p:prevCondLst>
+              <p:nextCondLst>
+                <p:cond evt="onNext" delay="0">
+                  <p:tgtEl>
+                    <p:sldTgt/>
+                  </p:tgtEl>
+                </p:cond>
+              </p:nextCondLst>
+            </p:seq>
+          </p:childTnLst>
+        </p:cTn>
+      </p:par>
+    </p:tnLst>
+    <p:bldLst>
+      <p:bldP spid="2" grpId="0"/>
+      <p:bldP spid="10" grpId="0"/>
+    </p:bldLst>
+  </p:timing>
 </p:sld>
 </file>
 

--- a/Current Presentation/Spring 2026.pptx
+++ b/Current Presentation/Spring 2026.pptx
@@ -124,7 +124,7 @@
 <p1510:revInfo xmlns:a="http://schemas.openxmlformats.org/drawingml/2006/main" xmlns:r="http://schemas.openxmlformats.org/officeDocument/2006/relationships" xmlns:p1510="http://schemas.microsoft.com/office/powerpoint/2015/10/main">
   <p1510:revLst>
     <p1510:client id="{6998B00B-2615-DA7F-16DD-BEDBD145F26F}" v="142" dt="2026-06-22T15:26:48.182"/>
-    <p1510:client id="{B3D8BC0C-D2E7-1DB9-11BC-BCF84AD0F7D9}" v="258" dt="2026-06-23T15:51:44.607"/>
+    <p1510:client id="{B3D8BC0C-D2E7-1DB9-11BC-BCF84AD0F7D9}" v="270" dt="2026-06-23T16:52:06.983"/>
   </p1510:revLst>
 </p1510:revInfo>
 </file>
@@ -8033,6 +8033,66 @@
           </a:p>
         </p:txBody>
       </p:sp>
+      <p:pic>
+        <p:nvPicPr>
+          <p:cNvPr id="4" name="Picture 3" descr="A screenshot of a computer&#10;&#10;AI-generated content may be incorrect.">
+            <a:extLst>
+              <a:ext uri="{FF2B5EF4-FFF2-40B4-BE49-F238E27FC236}">
+                <a16:creationId xmlns:a16="http://schemas.microsoft.com/office/drawing/2014/main" id="{EF2AC355-9018-DB92-EA42-158D8C270C9B}"/>
+              </a:ext>
+            </a:extLst>
+          </p:cNvPr>
+          <p:cNvPicPr>
+            <a:picLocks noChangeAspect="1"/>
+          </p:cNvPicPr>
+          <p:nvPr/>
+        </p:nvPicPr>
+        <p:blipFill>
+          <a:blip r:embed="rId3"/>
+          <a:stretch>
+            <a:fillRect/>
+          </a:stretch>
+        </p:blipFill>
+        <p:spPr>
+          <a:xfrm>
+            <a:off x="6402161" y="2831873"/>
+            <a:ext cx="4438650" cy="2790825"/>
+          </a:xfrm>
+          <a:prstGeom prst="rect">
+            <a:avLst/>
+          </a:prstGeom>
+        </p:spPr>
+      </p:pic>
+      <p:pic>
+        <p:nvPicPr>
+          <p:cNvPr id="7" name="Picture 6" descr="A screenshot of a computer&#10;&#10;AI-generated content may be incorrect.">
+            <a:extLst>
+              <a:ext uri="{FF2B5EF4-FFF2-40B4-BE49-F238E27FC236}">
+                <a16:creationId xmlns:a16="http://schemas.microsoft.com/office/drawing/2014/main" id="{CDB3469D-2D61-248F-34C0-6D9412488077}"/>
+              </a:ext>
+            </a:extLst>
+          </p:cNvPr>
+          <p:cNvPicPr>
+            <a:picLocks noChangeAspect="1"/>
+          </p:cNvPicPr>
+          <p:nvPr/>
+        </p:nvPicPr>
+        <p:blipFill>
+          <a:blip r:embed="rId3"/>
+          <a:stretch>
+            <a:fillRect/>
+          </a:stretch>
+        </p:blipFill>
+        <p:spPr>
+          <a:xfrm>
+            <a:off x="3876675" y="2033587"/>
+            <a:ext cx="4438650" cy="2790825"/>
+          </a:xfrm>
+          <a:prstGeom prst="rect">
+            <a:avLst/>
+          </a:prstGeom>
+        </p:spPr>
+      </p:pic>
     </p:spTree>
     <p:extLst>
       <p:ext uri="{BB962C8B-B14F-4D97-AF65-F5344CB8AC3E}">
@@ -8407,8 +8467,8 @@
           <a:chExt cx="0" cy="0"/>
         </a:xfrm>
       </p:grpSpPr>
-      <mc:AlternateContent xmlns:mc="http://schemas.openxmlformats.org/markup-compatibility/2006">
-        <mc:Choice xmlns:p14="http://schemas.microsoft.com/office/powerpoint/2010/main" Requires="p14">
+      <mc:AlternateContent xmlns:mc="http://schemas.openxmlformats.org/markup-compatibility/2006" xmlns:p14="http://schemas.microsoft.com/office/powerpoint/2010/main">
+        <mc:Choice Requires="p14">
           <p:contentPart p14:bwMode="auto" r:id="rId2">
             <p14:nvContentPartPr>
               <p14:cNvPr id="5" name="Ink 4">
@@ -8427,7 +8487,7 @@
             </p14:xfrm>
           </p:contentPart>
         </mc:Choice>
-        <mc:Fallback>
+        <mc:Fallback xmlns="">
           <p:pic>
             <p:nvPicPr>
               <p:cNvPr id="5" name="Ink 4">
@@ -8719,13 +8779,13 @@
   <p:clrMapOvr>
     <a:masterClrMapping/>
   </p:clrMapOvr>
-  <mc:AlternateContent xmlns:mc="http://schemas.openxmlformats.org/markup-compatibility/2006">
-    <mc:Choice xmlns:p15="http://schemas.microsoft.com/office/powerpoint/2012/main" Requires="p15">
+  <mc:AlternateContent xmlns:mc="http://schemas.openxmlformats.org/markup-compatibility/2006" xmlns:p15="http://schemas.microsoft.com/office/powerpoint/2012/main">
+    <mc:Choice Requires="p15">
       <p:transition xmlns:p14="http://schemas.microsoft.com/office/powerpoint/2010/main" spd="slow" p14:dur="2000">
         <p15:prstTrans prst="fracture"/>
       </p:transition>
     </mc:Choice>
-    <mc:Fallback>
+    <mc:Fallback xmlns="">
       <p:transition spd="slow">
         <p:fade/>
       </p:transition>

--- a/Current Presentation/Spring 2026.pptx
+++ b/Current Presentation/Spring 2026.pptx
@@ -124,7 +124,7 @@
 <p1510:revInfo xmlns:a="http://schemas.openxmlformats.org/drawingml/2006/main" xmlns:r="http://schemas.openxmlformats.org/officeDocument/2006/relationships" xmlns:p1510="http://schemas.microsoft.com/office/powerpoint/2015/10/main">
   <p1510:revLst>
     <p1510:client id="{6998B00B-2615-DA7F-16DD-BEDBD145F26F}" v="142" dt="2026-06-22T15:26:48.182"/>
-    <p1510:client id="{B3D8BC0C-D2E7-1DB9-11BC-BCF84AD0F7D9}" v="270" dt="2026-06-23T16:52:06.983"/>
+    <p1510:client id="{B3D8BC0C-D2E7-1DB9-11BC-BCF84AD0F7D9}" v="274" dt="2026-06-23T16:53:09.827"/>
   </p1510:revLst>
 </p1510:revInfo>
 </file>
@@ -8087,6 +8087,66 @@
           <a:xfrm>
             <a:off x="3876675" y="2033587"/>
             <a:ext cx="4438650" cy="2790825"/>
+          </a:xfrm>
+          <a:prstGeom prst="rect">
+            <a:avLst/>
+          </a:prstGeom>
+        </p:spPr>
+      </p:pic>
+      <p:pic>
+        <p:nvPicPr>
+          <p:cNvPr id="8" name="Picture 7" descr="A screenshot of a computer&#10;&#10;AI-generated content may be incorrect.">
+            <a:extLst>
+              <a:ext uri="{FF2B5EF4-FFF2-40B4-BE49-F238E27FC236}">
+                <a16:creationId xmlns:a16="http://schemas.microsoft.com/office/drawing/2014/main" id="{CC8E914B-D6C6-9F6E-85C7-1E8D1255F3EB}"/>
+              </a:ext>
+            </a:extLst>
+          </p:cNvPr>
+          <p:cNvPicPr>
+            <a:picLocks noChangeAspect="1"/>
+          </p:cNvPicPr>
+          <p:nvPr/>
+        </p:nvPicPr>
+        <p:blipFill>
+          <a:blip r:embed="rId4"/>
+          <a:stretch>
+            <a:fillRect/>
+          </a:stretch>
+        </p:blipFill>
+        <p:spPr>
+          <a:xfrm>
+            <a:off x="2109787" y="1081088"/>
+            <a:ext cx="7972425" cy="4695825"/>
+          </a:xfrm>
+          <a:prstGeom prst="rect">
+            <a:avLst/>
+          </a:prstGeom>
+        </p:spPr>
+      </p:pic>
+      <p:pic>
+        <p:nvPicPr>
+          <p:cNvPr id="9" name="Picture 8" descr="A screenshot of a computer error&#10;&#10;AI-generated content may be incorrect.">
+            <a:extLst>
+              <a:ext uri="{FF2B5EF4-FFF2-40B4-BE49-F238E27FC236}">
+                <a16:creationId xmlns:a16="http://schemas.microsoft.com/office/drawing/2014/main" id="{0B528D0D-73C7-10B6-E3FB-B4A6C198227A}"/>
+              </a:ext>
+            </a:extLst>
+          </p:cNvPr>
+          <p:cNvPicPr>
+            <a:picLocks noChangeAspect="1"/>
+          </p:cNvPicPr>
+          <p:nvPr/>
+        </p:nvPicPr>
+        <p:blipFill>
+          <a:blip r:embed="rId5"/>
+          <a:stretch>
+            <a:fillRect/>
+          </a:stretch>
+        </p:blipFill>
+        <p:spPr>
+          <a:xfrm>
+            <a:off x="5429250" y="2833687"/>
+            <a:ext cx="1333500" cy="1190625"/>
           </a:xfrm>
           <a:prstGeom prst="rect">
             <a:avLst/>

--- a/Current Presentation/Spring 2026.pptx
+++ b/Current Presentation/Spring 2026.pptx
@@ -124,7 +124,7 @@
 <p1510:revInfo xmlns:a="http://schemas.openxmlformats.org/drawingml/2006/main" xmlns:r="http://schemas.openxmlformats.org/officeDocument/2006/relationships" xmlns:p1510="http://schemas.microsoft.com/office/powerpoint/2015/10/main">
   <p1510:revLst>
     <p1510:client id="{6998B00B-2615-DA7F-16DD-BEDBD145F26F}" v="142" dt="2026-06-22T15:26:48.182"/>
-    <p1510:client id="{B3D8BC0C-D2E7-1DB9-11BC-BCF84AD0F7D9}" v="274" dt="2026-06-23T16:53:09.827"/>
+    <p1510:client id="{B3D8BC0C-D2E7-1DB9-11BC-BCF84AD0F7D9}" v="280" dt="2026-06-23T16:55:35.782"/>
   </p1510:revLst>
 </p1510:revInfo>
 </file>
@@ -8274,6 +8274,96 @@
           </a:p>
         </p:txBody>
       </p:sp>
+      <p:pic>
+        <p:nvPicPr>
+          <p:cNvPr id="4" name="Picture 3" descr="A screenshot of a computer&#10;&#10;AI-generated content may be incorrect.">
+            <a:extLst>
+              <a:ext uri="{FF2B5EF4-FFF2-40B4-BE49-F238E27FC236}">
+                <a16:creationId xmlns:a16="http://schemas.microsoft.com/office/drawing/2014/main" id="{239A0962-7E72-4B34-0F53-82426DD95215}"/>
+              </a:ext>
+            </a:extLst>
+          </p:cNvPr>
+          <p:cNvPicPr>
+            <a:picLocks noChangeAspect="1"/>
+          </p:cNvPicPr>
+          <p:nvPr/>
+        </p:nvPicPr>
+        <p:blipFill>
+          <a:blip r:embed="rId3"/>
+          <a:stretch>
+            <a:fillRect/>
+          </a:stretch>
+        </p:blipFill>
+        <p:spPr>
+          <a:xfrm>
+            <a:off x="1052513" y="214313"/>
+            <a:ext cx="10086975" cy="6429375"/>
+          </a:xfrm>
+          <a:prstGeom prst="rect">
+            <a:avLst/>
+          </a:prstGeom>
+        </p:spPr>
+      </p:pic>
+      <p:pic>
+        <p:nvPicPr>
+          <p:cNvPr id="5" name="Picture 4" descr="A purple background with white text&#10;&#10;AI-generated content may be incorrect.">
+            <a:extLst>
+              <a:ext uri="{FF2B5EF4-FFF2-40B4-BE49-F238E27FC236}">
+                <a16:creationId xmlns:a16="http://schemas.microsoft.com/office/drawing/2014/main" id="{7387F6A9-EF4E-32F1-1457-20419E787273}"/>
+              </a:ext>
+            </a:extLst>
+          </p:cNvPr>
+          <p:cNvPicPr>
+            <a:picLocks noChangeAspect="1"/>
+          </p:cNvPicPr>
+          <p:nvPr/>
+        </p:nvPicPr>
+        <p:blipFill>
+          <a:blip r:embed="rId4"/>
+          <a:stretch>
+            <a:fillRect/>
+          </a:stretch>
+        </p:blipFill>
+        <p:spPr>
+          <a:xfrm>
+            <a:off x="3086100" y="2705100"/>
+            <a:ext cx="6019800" cy="1447800"/>
+          </a:xfrm>
+          <a:prstGeom prst="rect">
+            <a:avLst/>
+          </a:prstGeom>
+        </p:spPr>
+      </p:pic>
+      <p:pic>
+        <p:nvPicPr>
+          <p:cNvPr id="6" name="Picture 5" descr="A screenshot of a computer&#10;&#10;AI-generated content may be incorrect.">
+            <a:extLst>
+              <a:ext uri="{FF2B5EF4-FFF2-40B4-BE49-F238E27FC236}">
+                <a16:creationId xmlns:a16="http://schemas.microsoft.com/office/drawing/2014/main" id="{A8A767F7-FA26-7431-0FD0-3C51BD635C0C}"/>
+              </a:ext>
+            </a:extLst>
+          </p:cNvPr>
+          <p:cNvPicPr>
+            <a:picLocks noChangeAspect="1"/>
+          </p:cNvPicPr>
+          <p:nvPr/>
+        </p:nvPicPr>
+        <p:blipFill>
+          <a:blip r:embed="rId5"/>
+          <a:stretch>
+            <a:fillRect/>
+          </a:stretch>
+        </p:blipFill>
+        <p:spPr>
+          <a:xfrm>
+            <a:off x="1576387" y="1081088"/>
+            <a:ext cx="9039225" cy="4695825"/>
+          </a:xfrm>
+          <a:prstGeom prst="rect">
+            <a:avLst/>
+          </a:prstGeom>
+        </p:spPr>
+      </p:pic>
     </p:spTree>
     <p:extLst>
       <p:ext uri="{BB962C8B-B14F-4D97-AF65-F5344CB8AC3E}">

--- a/Current Presentation/Spring 2026.pptx
+++ b/Current Presentation/Spring 2026.pptx
@@ -124,7 +124,7 @@
 <p1510:revInfo xmlns:a="http://schemas.openxmlformats.org/drawingml/2006/main" xmlns:r="http://schemas.openxmlformats.org/officeDocument/2006/relationships" xmlns:p1510="http://schemas.microsoft.com/office/powerpoint/2015/10/main">
   <p1510:revLst>
     <p1510:client id="{6998B00B-2615-DA7F-16DD-BEDBD145F26F}" v="142" dt="2026-06-22T15:26:48.182"/>
-    <p1510:client id="{B3D8BC0C-D2E7-1DB9-11BC-BCF84AD0F7D9}" v="280" dt="2026-06-23T16:55:35.782"/>
+    <p1510:client id="{B3D8BC0C-D2E7-1DB9-11BC-BCF84AD0F7D9}" v="385" dt="2026-06-23T17:03:14.193"/>
   </p1510:revLst>
 </p1510:revInfo>
 </file>
@@ -8233,7 +8233,9 @@
         </p:nvSpPr>
         <p:spPr/>
         <p:txBody>
-          <a:bodyPr/>
+          <a:bodyPr vert="horz" lIns="91440" tIns="45720" rIns="91440" bIns="45720" rtlCol="0" anchor="t">
+            <a:normAutofit/>
+          </a:bodyPr>
           <a:lstStyle/>
           <a:p>
             <a:r>
@@ -8263,14 +8265,39 @@
           </a:p>
           <a:p>
             <a:r>
+              <a:rPr lang="en-US"/>
+              <a:t>We also worked on a pamphlet about our area. One of the parts I did was about cypress (not the tree)</a:t>
+            </a:r>
+            <a:endParaRPr lang="en-US" dirty="0"/>
+          </a:p>
+          <a:p>
+            <a:pPr lvl="1"/>
+            <a:r>
               <a:rPr lang="en-US" dirty="0"/>
-              <a:t>As for how I’d use it, well, it just helps to know what’s around you so you can actually do things. Basically, less “use it” and more “add more things to </a:t>
-            </a:r>
-            <a:r>
-              <a:rPr lang="en-US"/>
-              <a:t>use skills on”</a:t>
-            </a:r>
-            <a:endParaRPr lang="en-US" dirty="0"/>
+              <a:t>I </a:t>
+            </a:r>
+            <a:r>
+              <a:rPr lang="en-US" dirty="0" err="1"/>
+              <a:t>didin't</a:t>
+            </a:r>
+            <a:r>
+              <a:rPr lang="en-US" dirty="0"/>
+              <a:t> finish it, but I started on one about the ship </a:t>
+            </a:r>
+            <a:r>
+              <a:rPr lang="en-US" dirty="0" err="1"/>
+              <a:t>channell</a:t>
+            </a:r>
+            <a:r>
+              <a:rPr lang="en-US" dirty="0"/>
+              <a:t>, which just flowed on in!</a:t>
+            </a:r>
+          </a:p>
+          <a:p>
+            <a:r>
+              <a:rPr lang="en-US" dirty="0"/>
+              <a:t>As for how I’d use it, well, it just helps to know what’s around you so you can actually do things. Basically, less “use it” and more “add more things to use skills on”</a:t>
+            </a:r>
           </a:p>
         </p:txBody>
       </p:sp>
@@ -8296,8 +8323,8 @@
         </p:blipFill>
         <p:spPr>
           <a:xfrm>
-            <a:off x="1052513" y="214313"/>
-            <a:ext cx="10086975" cy="6429375"/>
+            <a:off x="8955541" y="1716541"/>
+            <a:ext cx="2038804" cy="1327604"/>
           </a:xfrm>
           <a:prstGeom prst="rect">
             <a:avLst/>
@@ -8326,8 +8353,8 @@
         </p:blipFill>
         <p:spPr>
           <a:xfrm>
-            <a:off x="3086100" y="2705100"/>
-            <a:ext cx="6019800" cy="1447800"/>
+            <a:off x="4421414" y="179614"/>
+            <a:ext cx="3770086" cy="910772"/>
           </a:xfrm>
           <a:prstGeom prst="rect">
             <a:avLst/>
@@ -8336,10 +8363,10 @@
       </p:pic>
       <p:pic>
         <p:nvPicPr>
-          <p:cNvPr id="6" name="Picture 5" descr="A screenshot of a computer&#10;&#10;AI-generated content may be incorrect.">
+          <p:cNvPr id="7" name="Picture 6" descr="A screenshot of a cell phone&#10;&#10;AI-generated content may be incorrect.">
             <a:extLst>
               <a:ext uri="{FF2B5EF4-FFF2-40B4-BE49-F238E27FC236}">
-                <a16:creationId xmlns:a16="http://schemas.microsoft.com/office/drawing/2014/main" id="{A8A767F7-FA26-7431-0FD0-3C51BD635C0C}"/>
+                <a16:creationId xmlns:a16="http://schemas.microsoft.com/office/drawing/2014/main" id="{C8BE3EA2-3B10-6F4F-35B6-0F2EF51D5485}"/>
               </a:ext>
             </a:extLst>
           </p:cNvPr>
@@ -8356,8 +8383,8 @@
         </p:blipFill>
         <p:spPr>
           <a:xfrm>
-            <a:off x="1576387" y="1081088"/>
-            <a:ext cx="9039225" cy="4695825"/>
+            <a:off x="1587" y="176893"/>
+            <a:ext cx="4242255" cy="1808843"/>
           </a:xfrm>
           <a:prstGeom prst="rect">
             <a:avLst/>

--- a/Current Presentation/Spring 2026.pptx
+++ b/Current Presentation/Spring 2026.pptx
@@ -124,7 +124,7 @@
 <p1510:revInfo xmlns:a="http://schemas.openxmlformats.org/drawingml/2006/main" xmlns:r="http://schemas.openxmlformats.org/officeDocument/2006/relationships" xmlns:p1510="http://schemas.microsoft.com/office/powerpoint/2015/10/main">
   <p1510:revLst>
     <p1510:client id="{6998B00B-2615-DA7F-16DD-BEDBD145F26F}" v="142" dt="2026-06-22T15:26:48.182"/>
-    <p1510:client id="{B3D8BC0C-D2E7-1DB9-11BC-BCF84AD0F7D9}" v="385" dt="2026-06-23T17:03:14.193"/>
+    <p1510:client id="{B3D8BC0C-D2E7-1DB9-11BC-BCF84AD0F7D9}" v="405" dt="2026-06-23T17:11:02.823"/>
   </p1510:revLst>
 </p1510:revInfo>
 </file>
@@ -7875,6 +7875,14 @@
 <file path=ppt/slides/slide2.xml><?xml version="1.0" encoding="utf-8"?>
 <p:sld xmlns:a="http://schemas.openxmlformats.org/drawingml/2006/main" xmlns:r="http://schemas.openxmlformats.org/officeDocument/2006/relationships" xmlns:p="http://schemas.openxmlformats.org/presentationml/2006/main">
   <p:cSld>
+    <p:bg>
+      <p:bgPr>
+        <a:solidFill>
+          <a:schemeClr val="bg1"/>
+        </a:solidFill>
+        <a:effectLst/>
+      </p:bgPr>
+    </p:bg>
     <p:spTree>
       <p:nvGrpSpPr>
         <p:cNvPr id="1" name=""/>
@@ -7889,6 +7897,111 @@
           <a:chExt cx="0" cy="0"/>
         </a:xfrm>
       </p:grpSpPr>
+      <p:sp useBgFill="1">
+        <p:nvSpPr>
+          <p:cNvPr id="14" name="Rectangle 13">
+            <a:extLst>
+              <a:ext uri="{FF2B5EF4-FFF2-40B4-BE49-F238E27FC236}">
+                <a16:creationId xmlns:a16="http://schemas.microsoft.com/office/drawing/2014/main" id="{72B6B1FE-6B01-4FC2-BCF5-012C5239C1F1}"/>
+              </a:ext>
+              <a:ext uri="{C183D7F6-B498-43B3-948B-1728B52AA6E4}">
+                <adec:decorative xmlns:adec="http://schemas.microsoft.com/office/drawing/2017/decorative" val="1"/>
+              </a:ext>
+            </a:extLst>
+          </p:cNvPr>
+          <p:cNvSpPr>
+            <a:spLocks noGrp="1" noRot="1" noChangeAspect="1" noMove="1" noResize="1" noEditPoints="1" noAdjustHandles="1" noChangeArrowheads="1" noChangeShapeType="1" noTextEdit="1"/>
+          </p:cNvSpPr>
+          <p:nvPr>
+            <p:extLst>
+              <p:ext uri="{386F3935-93C4-4BCD-93E2-E3B085C9AB24}">
+                <p16:designElem xmlns:p16="http://schemas.microsoft.com/office/powerpoint/2015/main" val="1"/>
+              </p:ext>
+            </p:extLst>
+          </p:nvPr>
+        </p:nvSpPr>
+        <p:spPr>
+          <a:xfrm>
+            <a:off x="0" y="0"/>
+            <a:ext cx="12192000" cy="6858000"/>
+          </a:xfrm>
+          <a:prstGeom prst="rect">
+            <a:avLst/>
+          </a:prstGeom>
+          <a:ln>
+            <a:noFill/>
+          </a:ln>
+        </p:spPr>
+        <p:style>
+          <a:lnRef idx="2">
+            <a:schemeClr val="accent1">
+              <a:shade val="50000"/>
+            </a:schemeClr>
+          </a:lnRef>
+          <a:fillRef idx="1">
+            <a:schemeClr val="accent1"/>
+          </a:fillRef>
+          <a:effectRef idx="0">
+            <a:schemeClr val="accent1"/>
+          </a:effectRef>
+          <a:fontRef idx="minor">
+            <a:schemeClr val="lt1"/>
+          </a:fontRef>
+        </p:style>
+        <p:txBody>
+          <a:bodyPr rtlCol="0" anchor="ctr"/>
+          <a:lstStyle/>
+          <a:p>
+            <a:pPr algn="ctr"/>
+            <a:endParaRPr lang="en-US"/>
+          </a:p>
+        </p:txBody>
+      </p:sp>
+      <p:pic>
+        <p:nvPicPr>
+          <p:cNvPr id="16" name="Picture 15">
+            <a:extLst>
+              <a:ext uri="{FF2B5EF4-FFF2-40B4-BE49-F238E27FC236}">
+                <a16:creationId xmlns:a16="http://schemas.microsoft.com/office/drawing/2014/main" id="{9B69754F-41F0-4EE1-98C6-2FDDD9538C9D}"/>
+              </a:ext>
+              <a:ext uri="{C183D7F6-B498-43B3-948B-1728B52AA6E4}">
+                <adec:decorative xmlns:adec="http://schemas.microsoft.com/office/drawing/2017/decorative" val="1"/>
+              </a:ext>
+            </a:extLst>
+          </p:cNvPr>
+          <p:cNvPicPr>
+            <a:picLocks noGrp="1" noRot="1" noChangeAspect="1" noMove="1" noResize="1" noEditPoints="1" noAdjustHandles="1" noChangeArrowheads="1" noChangeShapeType="1" noCrop="1"/>
+          </p:cNvPicPr>
+          <p:nvPr>
+            <p:extLst>
+              <p:ext uri="{386F3935-93C4-4BCD-93E2-E3B085C9AB24}">
+                <p16:designElem xmlns:p16="http://schemas.microsoft.com/office/powerpoint/2015/main" val="1"/>
+              </p:ext>
+            </p:extLst>
+          </p:nvPr>
+        </p:nvPicPr>
+        <p:blipFill>
+          <a:blip r:embed="rId3">
+            <a:extLst>
+              <a:ext uri="{28A0092B-C50C-407E-A947-70E740481C1C}">
+                <a14:useLocalDpi xmlns:a14="http://schemas.microsoft.com/office/drawing/2010/main" val="0"/>
+              </a:ext>
+            </a:extLst>
+          </a:blip>
+          <a:stretch>
+            <a:fillRect/>
+          </a:stretch>
+        </p:blipFill>
+        <p:spPr>
+          <a:xfrm>
+            <a:off x="0" y="0"/>
+            <a:ext cx="12192000" cy="1441450"/>
+          </a:xfrm>
+          <a:prstGeom prst="rect">
+            <a:avLst/>
+          </a:prstGeom>
+        </p:spPr>
+      </p:pic>
       <p:sp>
         <p:nvSpPr>
           <p:cNvPr id="2" name="Title 1">
@@ -7905,9 +8018,16 @@
             <p:ph type="title"/>
           </p:nvPr>
         </p:nvSpPr>
-        <p:spPr/>
-        <p:txBody>
-          <a:bodyPr/>
+        <p:spPr>
+          <a:xfrm>
+            <a:off x="685800" y="764373"/>
+            <a:ext cx="4753466" cy="1293028"/>
+          </a:xfrm>
+        </p:spPr>
+        <p:txBody>
+          <a:bodyPr>
+            <a:normAutofit/>
+          </a:bodyPr>
           <a:lstStyle/>
           <a:p>
             <a:r>
@@ -7933,65 +8053,62 @@
             <p:ph idx="1"/>
           </p:nvPr>
         </p:nvSpPr>
-        <p:spPr/>
+        <p:spPr>
+          <a:xfrm>
+            <a:off x="685801" y="2194560"/>
+            <a:ext cx="4753466" cy="4024125"/>
+          </a:xfrm>
+        </p:spPr>
         <p:txBody>
           <a:bodyPr>
-            <a:normAutofit lnSpcReduction="10000"/>
+            <a:normAutofit/>
           </a:bodyPr>
           <a:lstStyle/>
           <a:p>
             <a:r>
-              <a:rPr lang="en-US" dirty="0"/>
-              <a:t>We worked on two things in advanced </a:t>
-            </a:r>
-            <a:r>
-              <a:rPr lang="en-US" dirty="0" err="1"/>
-              <a:t>appdev</a:t>
-            </a:r>
-            <a:r>
-              <a:rPr lang="en-US" dirty="0"/>
-              <a:t>.</a:t>
+              <a:rPr lang="en-US" sz="1300"/>
+              <a:t>We worked on two things in advanced appdev.</a:t>
             </a:r>
           </a:p>
           <a:p>
             <a:pPr lvl="1"/>
             <a:r>
-              <a:rPr lang="en-US" dirty="0"/>
+              <a:rPr lang="en-US" sz="1300"/>
               <a:t>One of the projects we worked on was the Snack Shack</a:t>
             </a:r>
           </a:p>
           <a:p>
             <a:pPr lvl="2"/>
             <a:r>
-              <a:rPr lang="en-US" dirty="0"/>
+              <a:rPr lang="en-US" sz="1300"/>
               <a:t>In actuality, the most major was, as discussed by Ryan, actually databases and SQL. But I figured you have heard about that from him</a:t>
             </a:r>
           </a:p>
           <a:p>
             <a:pPr lvl="1"/>
             <a:r>
-              <a:rPr lang="en-US" dirty="0"/>
+              <a:rPr lang="en-US" sz="1300"/>
               <a:t>Tasks used:</a:t>
             </a:r>
           </a:p>
           <a:p>
             <a:pPr lvl="2"/>
             <a:r>
-              <a:rPr lang="en-US" dirty="0"/>
+              <a:rPr lang="en-US" sz="1300"/>
               <a:t>Debugging</a:t>
             </a:r>
           </a:p>
           <a:p>
             <a:pPr lvl="3"/>
             <a:r>
-              <a:rPr lang="en-US" dirty="0"/>
+              <a:rPr lang="en-US" sz="1300"/>
               <a:t>Debugging</a:t>
             </a:r>
           </a:p>
           <a:p>
             <a:pPr lvl="3"/>
             <a:r>
-              <a:rPr lang="en-US" dirty="0"/>
+              <a:rPr lang="en-US" sz="1300"/>
               <a:t>Debugging</a:t>
             </a:r>
           </a:p>
@@ -8000,105 +8117,115 @@
               <a:buNone/>
             </a:pPr>
             <a:r>
-              <a:rPr lang="en-US" dirty="0"/>
+              <a:rPr lang="en-US" sz="1300"/>
               <a:t>Okay, in all seriousness</a:t>
             </a:r>
           </a:p>
           <a:p>
             <a:pPr lvl="2"/>
             <a:r>
-              <a:rPr lang="en-US" dirty="0"/>
+              <a:rPr lang="en-US" sz="1300"/>
               <a:t>Critical Thinking</a:t>
             </a:r>
           </a:p>
           <a:p>
             <a:pPr lvl="2"/>
             <a:r>
-              <a:rPr lang="en-US" dirty="0"/>
+              <a:rPr lang="en-US" sz="1300"/>
               <a:t>Trial and Error</a:t>
             </a:r>
           </a:p>
           <a:p>
             <a:pPr lvl="2"/>
-            <a:endParaRPr lang="en-US" dirty="0"/>
+            <a:endParaRPr lang="en-US" sz="1300"/>
           </a:p>
           <a:p>
             <a:pPr marL="0" indent="0">
               <a:buNone/>
             </a:pPr>
             <a:r>
-              <a:rPr lang="en-US" dirty="0"/>
+              <a:rPr lang="en-US" sz="1300"/>
               <a:t>As for what I gained, it’s mostly just more knowledge, in this case about SQL</a:t>
             </a:r>
           </a:p>
         </p:txBody>
       </p:sp>
-      <p:pic>
-        <p:nvPicPr>
-          <p:cNvPr id="4" name="Picture 3" descr="A screenshot of a computer&#10;&#10;AI-generated content may be incorrect.">
+      <p:sp>
+        <p:nvSpPr>
+          <p:cNvPr id="18" name="Rounded Rectangle 29">
             <a:extLst>
               <a:ext uri="{FF2B5EF4-FFF2-40B4-BE49-F238E27FC236}">
-                <a16:creationId xmlns:a16="http://schemas.microsoft.com/office/drawing/2014/main" id="{EF2AC355-9018-DB92-EA42-158D8C270C9B}"/>
+                <a16:creationId xmlns:a16="http://schemas.microsoft.com/office/drawing/2014/main" id="{C02E8FC7-9C8C-45D3-B2E0-E76BB859E1E0}"/>
+              </a:ext>
+              <a:ext uri="{C183D7F6-B498-43B3-948B-1728B52AA6E4}">
+                <adec:decorative xmlns:adec="http://schemas.microsoft.com/office/drawing/2017/decorative" val="1"/>
               </a:ext>
             </a:extLst>
           </p:cNvPr>
-          <p:cNvPicPr>
-            <a:picLocks noChangeAspect="1"/>
-          </p:cNvPicPr>
-          <p:nvPr/>
-        </p:nvPicPr>
-        <p:blipFill>
-          <a:blip r:embed="rId3"/>
-          <a:stretch>
-            <a:fillRect/>
-          </a:stretch>
-        </p:blipFill>
+          <p:cNvSpPr>
+            <a:spLocks noGrp="1" noRot="1" noChangeAspect="1" noMove="1" noResize="1" noEditPoints="1" noAdjustHandles="1" noChangeArrowheads="1" noChangeShapeType="1" noTextEdit="1"/>
+          </p:cNvSpPr>
+          <p:nvPr>
+            <p:extLst>
+              <p:ext uri="{386F3935-93C4-4BCD-93E2-E3B085C9AB24}">
+                <p16:designElem xmlns:p16="http://schemas.microsoft.com/office/powerpoint/2015/main" val="1"/>
+              </p:ext>
+            </p:extLst>
+          </p:nvPr>
+        </p:nvSpPr>
         <p:spPr>
           <a:xfrm>
-            <a:off x="6402161" y="2831873"/>
-            <a:ext cx="4438650" cy="2790825"/>
+            <a:off x="6125065" y="1127125"/>
+            <a:ext cx="5381135" cy="4987926"/>
           </a:xfrm>
-          <a:prstGeom prst="rect">
-            <a:avLst/>
+          <a:prstGeom prst="roundRect">
+            <a:avLst>
+              <a:gd name="adj" fmla="val 2403"/>
+            </a:avLst>
           </a:prstGeom>
+          <a:solidFill>
+            <a:srgbClr val="FFFFFF"/>
+          </a:solidFill>
+          <a:ln>
+            <a:noFill/>
+          </a:ln>
+          <a:effectLst>
+            <a:innerShdw blurRad="114300">
+              <a:prstClr val="black"/>
+            </a:innerShdw>
+          </a:effectLst>
         </p:spPr>
-      </p:pic>
+        <p:style>
+          <a:lnRef idx="2">
+            <a:schemeClr val="accent1">
+              <a:shade val="50000"/>
+            </a:schemeClr>
+          </a:lnRef>
+          <a:fillRef idx="1">
+            <a:schemeClr val="accent1"/>
+          </a:fillRef>
+          <a:effectRef idx="0">
+            <a:schemeClr val="accent1"/>
+          </a:effectRef>
+          <a:fontRef idx="minor">
+            <a:schemeClr val="lt1"/>
+          </a:fontRef>
+        </p:style>
+        <p:txBody>
+          <a:bodyPr rtlCol="0" anchor="ctr"/>
+          <a:lstStyle/>
+          <a:p>
+            <a:pPr algn="ctr"/>
+            <a:endParaRPr lang="en-US"/>
+          </a:p>
+        </p:txBody>
+      </p:sp>
       <p:pic>
         <p:nvPicPr>
-          <p:cNvPr id="7" name="Picture 6" descr="A screenshot of a computer&#10;&#10;AI-generated content may be incorrect.">
+          <p:cNvPr id="9" name="Picture 8" descr="A screenshot of a computer error&#10;&#10;AI-generated content may be incorrect.">
             <a:extLst>
               <a:ext uri="{FF2B5EF4-FFF2-40B4-BE49-F238E27FC236}">
-                <a16:creationId xmlns:a16="http://schemas.microsoft.com/office/drawing/2014/main" id="{CDB3469D-2D61-248F-34C0-6D9412488077}"/>
-              </a:ext>
-            </a:extLst>
-          </p:cNvPr>
-          <p:cNvPicPr>
-            <a:picLocks noChangeAspect="1"/>
-          </p:cNvPicPr>
-          <p:nvPr/>
-        </p:nvPicPr>
-        <p:blipFill>
-          <a:blip r:embed="rId3"/>
-          <a:stretch>
-            <a:fillRect/>
-          </a:stretch>
-        </p:blipFill>
-        <p:spPr>
-          <a:xfrm>
-            <a:off x="3876675" y="2033587"/>
-            <a:ext cx="4438650" cy="2790825"/>
-          </a:xfrm>
-          <a:prstGeom prst="rect">
-            <a:avLst/>
-          </a:prstGeom>
-        </p:spPr>
-      </p:pic>
-      <p:pic>
-        <p:nvPicPr>
-          <p:cNvPr id="8" name="Picture 7" descr="A screenshot of a computer&#10;&#10;AI-generated content may be incorrect.">
-            <a:extLst>
-              <a:ext uri="{FF2B5EF4-FFF2-40B4-BE49-F238E27FC236}">
-                <a16:creationId xmlns:a16="http://schemas.microsoft.com/office/drawing/2014/main" id="{CC8E914B-D6C6-9F6E-85C7-1E8D1255F3EB}"/>
+                <a16:creationId xmlns:a16="http://schemas.microsoft.com/office/drawing/2014/main" id="{0B528D0D-73C7-10B6-E3FB-B4A6C198227A}"/>
               </a:ext>
             </a:extLst>
           </p:cNvPr>
@@ -8115,20 +8242,88 @@
         </p:blipFill>
         <p:spPr>
           <a:xfrm>
-            <a:off x="2109787" y="1081088"/>
-            <a:ext cx="7972425" cy="4695825"/>
+            <a:off x="6657290" y="1917568"/>
+            <a:ext cx="1949285" cy="1740432"/>
           </a:xfrm>
           <a:prstGeom prst="rect">
             <a:avLst/>
           </a:prstGeom>
         </p:spPr>
       </p:pic>
+      <p:sp>
+        <p:nvSpPr>
+          <p:cNvPr id="20" name="Round Single Corner Rectangle 35">
+            <a:extLst>
+              <a:ext uri="{FF2B5EF4-FFF2-40B4-BE49-F238E27FC236}">
+                <a16:creationId xmlns:a16="http://schemas.microsoft.com/office/drawing/2014/main" id="{F80CFC61-D49F-4C18-8984-2F7A8E015225}"/>
+              </a:ext>
+              <a:ext uri="{C183D7F6-B498-43B3-948B-1728B52AA6E4}">
+                <adec:decorative xmlns:adec="http://schemas.microsoft.com/office/drawing/2017/decorative" val="1"/>
+              </a:ext>
+            </a:extLst>
+          </p:cNvPr>
+          <p:cNvSpPr>
+            <a:spLocks noGrp="1" noRot="1" noChangeAspect="1" noMove="1" noResize="1" noEditPoints="1" noAdjustHandles="1" noChangeArrowheads="1" noChangeShapeType="1" noTextEdit="1"/>
+          </p:cNvSpPr>
+          <p:nvPr>
+            <p:extLst>
+              <p:ext uri="{386F3935-93C4-4BCD-93E2-E3B085C9AB24}">
+                <p16:designElem xmlns:p16="http://schemas.microsoft.com/office/powerpoint/2015/main" val="1"/>
+              </p:ext>
+            </p:extLst>
+          </p:nvPr>
+        </p:nvSpPr>
+        <p:spPr>
+          <a:xfrm rot="16200000">
+            <a:off x="6406240" y="1673848"/>
+            <a:ext cx="2451386" cy="2227874"/>
+          </a:xfrm>
+          <a:prstGeom prst="round1Rect">
+            <a:avLst>
+              <a:gd name="adj" fmla="val 2864"/>
+            </a:avLst>
+          </a:prstGeom>
+          <a:noFill/>
+          <a:ln w="12700">
+            <a:solidFill>
+              <a:schemeClr val="bg1">
+                <a:lumMod val="50000"/>
+                <a:lumOff val="50000"/>
+              </a:schemeClr>
+            </a:solidFill>
+          </a:ln>
+        </p:spPr>
+        <p:style>
+          <a:lnRef idx="2">
+            <a:schemeClr val="accent1">
+              <a:shade val="50000"/>
+            </a:schemeClr>
+          </a:lnRef>
+          <a:fillRef idx="1">
+            <a:schemeClr val="accent1"/>
+          </a:fillRef>
+          <a:effectRef idx="0">
+            <a:schemeClr val="accent1"/>
+          </a:effectRef>
+          <a:fontRef idx="minor">
+            <a:schemeClr val="lt1"/>
+          </a:fontRef>
+        </p:style>
+        <p:txBody>
+          <a:bodyPr rtlCol="0" anchor="ctr"/>
+          <a:lstStyle/>
+          <a:p>
+            <a:pPr algn="ctr"/>
+            <a:endParaRPr lang="en-US"/>
+          </a:p>
+        </p:txBody>
+      </p:sp>
       <p:pic>
         <p:nvPicPr>
-          <p:cNvPr id="9" name="Picture 8" descr="A screenshot of a computer error&#10;&#10;AI-generated content may be incorrect.">
+          <p:cNvPr id="7" name="Picture 6" descr="A screenshot of a computer&#10;&#10;AI-generated content may be incorrect.">
             <a:extLst>
               <a:ext uri="{FF2B5EF4-FFF2-40B4-BE49-F238E27FC236}">
-                <a16:creationId xmlns:a16="http://schemas.microsoft.com/office/drawing/2014/main" id="{0B528D0D-73C7-10B6-E3FB-B4A6C198227A}"/>
+                <a16:creationId xmlns:a16="http://schemas.microsoft.com/office/drawing/2014/main" id="{CDB3469D-2D61-248F-34C0-6D9412488077}"/>
               </a:ext>
             </a:extLst>
           </p:cNvPr>
@@ -8145,14 +8340,278 @@
         </p:blipFill>
         <p:spPr>
           <a:xfrm>
-            <a:off x="5429250" y="2833687"/>
-            <a:ext cx="1333500" cy="1190625"/>
+            <a:off x="9026758" y="1702363"/>
+            <a:ext cx="1949252" cy="1228029"/>
           </a:xfrm>
           <a:prstGeom prst="rect">
             <a:avLst/>
           </a:prstGeom>
         </p:spPr>
       </p:pic>
+      <p:sp>
+        <p:nvSpPr>
+          <p:cNvPr id="22" name="Round Single Corner Rectangle 55">
+            <a:extLst>
+              <a:ext uri="{FF2B5EF4-FFF2-40B4-BE49-F238E27FC236}">
+                <a16:creationId xmlns:a16="http://schemas.microsoft.com/office/drawing/2014/main" id="{E3F050CD-47CE-475B-895F-9AFDA1B45943}"/>
+              </a:ext>
+              <a:ext uri="{C183D7F6-B498-43B3-948B-1728B52AA6E4}">
+                <adec:decorative xmlns:adec="http://schemas.microsoft.com/office/drawing/2017/decorative" val="1"/>
+              </a:ext>
+            </a:extLst>
+          </p:cNvPr>
+          <p:cNvSpPr>
+            <a:spLocks noGrp="1" noRot="1" noChangeAspect="1" noMove="1" noResize="1" noEditPoints="1" noAdjustHandles="1" noChangeArrowheads="1" noChangeShapeType="1" noTextEdit="1"/>
+          </p:cNvSpPr>
+          <p:nvPr>
+            <p:extLst>
+              <p:ext uri="{386F3935-93C4-4BCD-93E2-E3B085C9AB24}">
+                <p16:designElem xmlns:p16="http://schemas.microsoft.com/office/powerpoint/2015/main" val="1"/>
+              </p:ext>
+            </p:extLst>
+          </p:nvPr>
+        </p:nvSpPr>
+        <p:spPr>
+          <a:xfrm rot="5400000" flipH="1">
+            <a:off x="9240519" y="1200156"/>
+            <a:ext cx="1521731" cy="2232443"/>
+          </a:xfrm>
+          <a:prstGeom prst="round1Rect">
+            <a:avLst>
+              <a:gd name="adj" fmla="val 2864"/>
+            </a:avLst>
+          </a:prstGeom>
+          <a:noFill/>
+          <a:ln w="12700">
+            <a:solidFill>
+              <a:schemeClr val="bg1">
+                <a:lumMod val="50000"/>
+                <a:lumOff val="50000"/>
+              </a:schemeClr>
+            </a:solidFill>
+          </a:ln>
+        </p:spPr>
+        <p:style>
+          <a:lnRef idx="2">
+            <a:schemeClr val="accent1">
+              <a:shade val="50000"/>
+            </a:schemeClr>
+          </a:lnRef>
+          <a:fillRef idx="1">
+            <a:schemeClr val="accent1"/>
+          </a:fillRef>
+          <a:effectRef idx="0">
+            <a:schemeClr val="accent1"/>
+          </a:effectRef>
+          <a:fontRef idx="minor">
+            <a:schemeClr val="lt1"/>
+          </a:fontRef>
+        </p:style>
+        <p:txBody>
+          <a:bodyPr rtlCol="0" anchor="ctr"/>
+          <a:lstStyle/>
+          <a:p>
+            <a:pPr algn="ctr"/>
+            <a:endParaRPr lang="en-US"/>
+          </a:p>
+        </p:txBody>
+      </p:sp>
+      <p:pic>
+        <p:nvPicPr>
+          <p:cNvPr id="8" name="Picture 7" descr="A screenshot of a computer&#10;&#10;AI-generated content may be incorrect.">
+            <a:extLst>
+              <a:ext uri="{FF2B5EF4-FFF2-40B4-BE49-F238E27FC236}">
+                <a16:creationId xmlns:a16="http://schemas.microsoft.com/office/drawing/2014/main" id="{CC8E914B-D6C6-9F6E-85C7-1E8D1255F3EB}"/>
+              </a:ext>
+            </a:extLst>
+          </p:cNvPr>
+          <p:cNvPicPr>
+            <a:picLocks noChangeAspect="1"/>
+          </p:cNvPicPr>
+          <p:nvPr/>
+        </p:nvPicPr>
+        <p:blipFill>
+          <a:blip r:embed="rId6"/>
+          <a:stretch>
+            <a:fillRect/>
+          </a:stretch>
+        </p:blipFill>
+        <p:spPr>
+          <a:xfrm>
+            <a:off x="6659574" y="4344180"/>
+            <a:ext cx="1949285" cy="1150078"/>
+          </a:xfrm>
+          <a:prstGeom prst="rect">
+            <a:avLst/>
+          </a:prstGeom>
+        </p:spPr>
+      </p:pic>
+      <p:sp>
+        <p:nvSpPr>
+          <p:cNvPr id="24" name="Round Single Corner Rectangle 33">
+            <a:extLst>
+              <a:ext uri="{FF2B5EF4-FFF2-40B4-BE49-F238E27FC236}">
+                <a16:creationId xmlns:a16="http://schemas.microsoft.com/office/drawing/2014/main" id="{1873C5AC-8DD3-477A-89AA-365B7AEABED7}"/>
+              </a:ext>
+              <a:ext uri="{C183D7F6-B498-43B3-948B-1728B52AA6E4}">
+                <adec:decorative xmlns:adec="http://schemas.microsoft.com/office/drawing/2017/decorative" val="1"/>
+              </a:ext>
+            </a:extLst>
+          </p:cNvPr>
+          <p:cNvSpPr>
+            <a:spLocks noGrp="1" noRot="1" noChangeAspect="1" noMove="1" noResize="1" noEditPoints="1" noAdjustHandles="1" noChangeArrowheads="1" noChangeShapeType="1" noTextEdit="1"/>
+          </p:cNvSpPr>
+          <p:nvPr>
+            <p:extLst>
+              <p:ext uri="{386F3935-93C4-4BCD-93E2-E3B085C9AB24}">
+                <p16:designElem xmlns:p16="http://schemas.microsoft.com/office/powerpoint/2015/main" val="1"/>
+              </p:ext>
+            </p:extLst>
+          </p:nvPr>
+        </p:nvSpPr>
+        <p:spPr>
+          <a:xfrm rot="5400000" flipV="1">
+            <a:off x="6873351" y="3802998"/>
+            <a:ext cx="1521731" cy="2232443"/>
+          </a:xfrm>
+          <a:prstGeom prst="round1Rect">
+            <a:avLst>
+              <a:gd name="adj" fmla="val 2864"/>
+            </a:avLst>
+          </a:prstGeom>
+          <a:noFill/>
+          <a:ln w="12700">
+            <a:solidFill>
+              <a:schemeClr val="bg1">
+                <a:lumMod val="50000"/>
+                <a:lumOff val="50000"/>
+              </a:schemeClr>
+            </a:solidFill>
+          </a:ln>
+        </p:spPr>
+        <p:style>
+          <a:lnRef idx="2">
+            <a:schemeClr val="accent1">
+              <a:shade val="50000"/>
+            </a:schemeClr>
+          </a:lnRef>
+          <a:fillRef idx="1">
+            <a:schemeClr val="accent1"/>
+          </a:fillRef>
+          <a:effectRef idx="0">
+            <a:schemeClr val="accent1"/>
+          </a:effectRef>
+          <a:fontRef idx="minor">
+            <a:schemeClr val="lt1"/>
+          </a:fontRef>
+        </p:style>
+        <p:txBody>
+          <a:bodyPr rtlCol="0" anchor="ctr"/>
+          <a:lstStyle/>
+          <a:p>
+            <a:pPr algn="ctr"/>
+            <a:endParaRPr lang="en-US"/>
+          </a:p>
+        </p:txBody>
+      </p:sp>
+      <p:pic>
+        <p:nvPicPr>
+          <p:cNvPr id="4" name="Picture 3" descr="A screenshot of a computer&#10;&#10;AI-generated content may be incorrect.">
+            <a:extLst>
+              <a:ext uri="{FF2B5EF4-FFF2-40B4-BE49-F238E27FC236}">
+                <a16:creationId xmlns:a16="http://schemas.microsoft.com/office/drawing/2014/main" id="{EF2AC355-9018-DB92-EA42-158D8C270C9B}"/>
+              </a:ext>
+            </a:extLst>
+          </p:cNvPr>
+          <p:cNvPicPr>
+            <a:picLocks noChangeAspect="1"/>
+          </p:cNvPicPr>
+          <p:nvPr/>
+        </p:nvPicPr>
+        <p:blipFill>
+          <a:blip r:embed="rId5"/>
+          <a:stretch>
+            <a:fillRect/>
+          </a:stretch>
+        </p:blipFill>
+        <p:spPr>
+          <a:xfrm>
+            <a:off x="9024458" y="3835762"/>
+            <a:ext cx="1949285" cy="1228049"/>
+          </a:xfrm>
+          <a:prstGeom prst="rect">
+            <a:avLst/>
+          </a:prstGeom>
+        </p:spPr>
+      </p:pic>
+      <p:sp>
+        <p:nvSpPr>
+          <p:cNvPr id="26" name="Round Single Corner Rectangle 56">
+            <a:extLst>
+              <a:ext uri="{FF2B5EF4-FFF2-40B4-BE49-F238E27FC236}">
+                <a16:creationId xmlns:a16="http://schemas.microsoft.com/office/drawing/2014/main" id="{3A09FE69-EE44-43FC-98AB-E534FF681B22}"/>
+              </a:ext>
+              <a:ext uri="{C183D7F6-B498-43B3-948B-1728B52AA6E4}">
+                <adec:decorative xmlns:adec="http://schemas.microsoft.com/office/drawing/2017/decorative" val="1"/>
+              </a:ext>
+            </a:extLst>
+          </p:cNvPr>
+          <p:cNvSpPr>
+            <a:spLocks noGrp="1" noRot="1" noChangeAspect="1" noMove="1" noResize="1" noEditPoints="1" noAdjustHandles="1" noChangeArrowheads="1" noChangeShapeType="1" noTextEdit="1"/>
+          </p:cNvSpPr>
+          <p:nvPr>
+            <p:extLst>
+              <p:ext uri="{386F3935-93C4-4BCD-93E2-E3B085C9AB24}">
+                <p16:designElem xmlns:p16="http://schemas.microsoft.com/office/powerpoint/2015/main" val="1"/>
+              </p:ext>
+            </p:extLst>
+          </p:nvPr>
+        </p:nvSpPr>
+        <p:spPr>
+          <a:xfrm rot="16200000" flipH="1" flipV="1">
+            <a:off x="8773408" y="3335850"/>
+            <a:ext cx="2451386" cy="2227874"/>
+          </a:xfrm>
+          <a:prstGeom prst="round1Rect">
+            <a:avLst>
+              <a:gd name="adj" fmla="val 2864"/>
+            </a:avLst>
+          </a:prstGeom>
+          <a:noFill/>
+          <a:ln w="12700">
+            <a:solidFill>
+              <a:schemeClr val="bg1">
+                <a:lumMod val="50000"/>
+                <a:lumOff val="50000"/>
+              </a:schemeClr>
+            </a:solidFill>
+          </a:ln>
+        </p:spPr>
+        <p:style>
+          <a:lnRef idx="2">
+            <a:schemeClr val="accent1">
+              <a:shade val="50000"/>
+            </a:schemeClr>
+          </a:lnRef>
+          <a:fillRef idx="1">
+            <a:schemeClr val="accent1"/>
+          </a:fillRef>
+          <a:effectRef idx="0">
+            <a:schemeClr val="accent1"/>
+          </a:effectRef>
+          <a:fontRef idx="minor">
+            <a:schemeClr val="lt1"/>
+          </a:fontRef>
+        </p:style>
+        <p:txBody>
+          <a:bodyPr rtlCol="0" anchor="ctr"/>
+          <a:lstStyle/>
+          <a:p>
+            <a:pPr algn="ctr"/>
+            <a:endParaRPr lang="en-US"/>
+          </a:p>
+        </p:txBody>
+      </p:sp>
     </p:spTree>
     <p:extLst>
       <p:ext uri="{BB962C8B-B14F-4D97-AF65-F5344CB8AC3E}">
@@ -8163,6 +8622,1343 @@
   <p:clrMapOvr>
     <a:masterClrMapping/>
   </p:clrMapOvr>
+  <p:timing>
+    <p:tnLst>
+      <p:par>
+        <p:cTn id="1" dur="indefinite" restart="never" nodeType="tmRoot">
+          <p:childTnLst>
+            <p:seq concurrent="1" nextAc="seek">
+              <p:cTn id="2" dur="indefinite" nodeType="mainSeq">
+                <p:childTnLst>
+                  <p:par>
+                    <p:cTn id="3" fill="hold">
+                      <p:stCondLst>
+                        <p:cond delay="indefinite"/>
+                      </p:stCondLst>
+                      <p:childTnLst>
+                        <p:par>
+                          <p:cTn id="4" fill="hold">
+                            <p:stCondLst>
+                              <p:cond delay="0"/>
+                            </p:stCondLst>
+                            <p:childTnLst>
+                              <p:par>
+                                <p:cTn id="5" presetID="37" presetClass="entr" presetSubtype="0" fill="hold" grpId="0" nodeType="clickEffect">
+                                  <p:stCondLst>
+                                    <p:cond delay="0"/>
+                                  </p:stCondLst>
+                                  <p:childTnLst>
+                                    <p:set>
+                                      <p:cBhvr>
+                                        <p:cTn id="6" dur="1" fill="hold">
+                                          <p:stCondLst>
+                                            <p:cond delay="0"/>
+                                          </p:stCondLst>
+                                        </p:cTn>
+                                        <p:tgtEl>
+                                          <p:spTgt spid="2"/>
+                                        </p:tgtEl>
+                                        <p:attrNameLst>
+                                          <p:attrName>style.visibility</p:attrName>
+                                        </p:attrNameLst>
+                                      </p:cBhvr>
+                                      <p:to>
+                                        <p:strVal val="visible"/>
+                                      </p:to>
+                                    </p:set>
+                                    <p:animEffect transition="in" filter="fade">
+                                      <p:cBhvr>
+                                        <p:cTn id="7" dur="1000"/>
+                                        <p:tgtEl>
+                                          <p:spTgt spid="2"/>
+                                        </p:tgtEl>
+                                      </p:cBhvr>
+                                    </p:animEffect>
+                                    <p:anim calcmode="lin" valueType="num">
+                                      <p:cBhvr>
+                                        <p:cTn id="8" dur="1000" fill="hold"/>
+                                        <p:tgtEl>
+                                          <p:spTgt spid="2"/>
+                                        </p:tgtEl>
+                                        <p:attrNameLst>
+                                          <p:attrName>ppt_x</p:attrName>
+                                        </p:attrNameLst>
+                                      </p:cBhvr>
+                                      <p:tavLst>
+                                        <p:tav tm="0">
+                                          <p:val>
+                                            <p:strVal val="#ppt_x"/>
+                                          </p:val>
+                                        </p:tav>
+                                        <p:tav tm="100000">
+                                          <p:val>
+                                            <p:strVal val="#ppt_x"/>
+                                          </p:val>
+                                        </p:tav>
+                                      </p:tavLst>
+                                    </p:anim>
+                                    <p:anim calcmode="lin" valueType="num">
+                                      <p:cBhvr>
+                                        <p:cTn id="9" dur="900" decel="100000" fill="hold"/>
+                                        <p:tgtEl>
+                                          <p:spTgt spid="2"/>
+                                        </p:tgtEl>
+                                        <p:attrNameLst>
+                                          <p:attrName>ppt_y</p:attrName>
+                                        </p:attrNameLst>
+                                      </p:cBhvr>
+                                      <p:tavLst>
+                                        <p:tav tm="0">
+                                          <p:val>
+                                            <p:strVal val="#ppt_y+1"/>
+                                          </p:val>
+                                        </p:tav>
+                                        <p:tav tm="100000">
+                                          <p:val>
+                                            <p:strVal val="#ppt_y-.03"/>
+                                          </p:val>
+                                        </p:tav>
+                                      </p:tavLst>
+                                    </p:anim>
+                                    <p:anim calcmode="lin" valueType="num">
+                                      <p:cBhvr>
+                                        <p:cTn id="10" dur="100" accel="100000" fill="hold">
+                                          <p:stCondLst>
+                                            <p:cond delay="900"/>
+                                          </p:stCondLst>
+                                        </p:cTn>
+                                        <p:tgtEl>
+                                          <p:spTgt spid="2"/>
+                                        </p:tgtEl>
+                                        <p:attrNameLst>
+                                          <p:attrName>ppt_y</p:attrName>
+                                        </p:attrNameLst>
+                                      </p:cBhvr>
+                                      <p:tavLst>
+                                        <p:tav tm="0">
+                                          <p:val>
+                                            <p:strVal val="#ppt_y-.03"/>
+                                          </p:val>
+                                        </p:tav>
+                                        <p:tav tm="100000">
+                                          <p:val>
+                                            <p:strVal val="#ppt_y"/>
+                                          </p:val>
+                                        </p:tav>
+                                      </p:tavLst>
+                                    </p:anim>
+                                  </p:childTnLst>
+                                </p:cTn>
+                              </p:par>
+                            </p:childTnLst>
+                          </p:cTn>
+                        </p:par>
+                      </p:childTnLst>
+                    </p:cTn>
+                  </p:par>
+                  <p:par>
+                    <p:cTn id="11" fill="hold">
+                      <p:stCondLst>
+                        <p:cond delay="indefinite"/>
+                      </p:stCondLst>
+                      <p:childTnLst>
+                        <p:par>
+                          <p:cTn id="12" fill="hold">
+                            <p:stCondLst>
+                              <p:cond delay="0"/>
+                            </p:stCondLst>
+                            <p:childTnLst>
+                              <p:par>
+                                <p:cTn id="13" presetID="2" presetClass="entr" presetSubtype="4" fill="hold" grpId="0" nodeType="clickEffect">
+                                  <p:stCondLst>
+                                    <p:cond delay="0"/>
+                                  </p:stCondLst>
+                                  <p:childTnLst>
+                                    <p:set>
+                                      <p:cBhvr>
+                                        <p:cTn id="14" dur="1" fill="hold">
+                                          <p:stCondLst>
+                                            <p:cond delay="0"/>
+                                          </p:stCondLst>
+                                        </p:cTn>
+                                        <p:tgtEl>
+                                          <p:spTgt spid="3">
+                                            <p:txEl>
+                                              <p:pRg st="0" end="0"/>
+                                            </p:txEl>
+                                          </p:spTgt>
+                                        </p:tgtEl>
+                                        <p:attrNameLst>
+                                          <p:attrName>style.visibility</p:attrName>
+                                        </p:attrNameLst>
+                                      </p:cBhvr>
+                                      <p:to>
+                                        <p:strVal val="visible"/>
+                                      </p:to>
+                                    </p:set>
+                                    <p:anim calcmode="lin" valueType="num">
+                                      <p:cBhvr additive="base">
+                                        <p:cTn id="15" dur="500" fill="hold"/>
+                                        <p:tgtEl>
+                                          <p:spTgt spid="3">
+                                            <p:txEl>
+                                              <p:pRg st="0" end="0"/>
+                                            </p:txEl>
+                                          </p:spTgt>
+                                        </p:tgtEl>
+                                        <p:attrNameLst>
+                                          <p:attrName>ppt_x</p:attrName>
+                                        </p:attrNameLst>
+                                      </p:cBhvr>
+                                      <p:tavLst>
+                                        <p:tav tm="0">
+                                          <p:val>
+                                            <p:strVal val="#ppt_x"/>
+                                          </p:val>
+                                        </p:tav>
+                                        <p:tav tm="100000">
+                                          <p:val>
+                                            <p:strVal val="#ppt_x"/>
+                                          </p:val>
+                                        </p:tav>
+                                      </p:tavLst>
+                                    </p:anim>
+                                    <p:anim calcmode="lin" valueType="num">
+                                      <p:cBhvr additive="base">
+                                        <p:cTn id="16" dur="500" fill="hold"/>
+                                        <p:tgtEl>
+                                          <p:spTgt spid="3">
+                                            <p:txEl>
+                                              <p:pRg st="0" end="0"/>
+                                            </p:txEl>
+                                          </p:spTgt>
+                                        </p:tgtEl>
+                                        <p:attrNameLst>
+                                          <p:attrName>ppt_y</p:attrName>
+                                        </p:attrNameLst>
+                                      </p:cBhvr>
+                                      <p:tavLst>
+                                        <p:tav tm="0">
+                                          <p:val>
+                                            <p:strVal val="1+#ppt_h/2"/>
+                                          </p:val>
+                                        </p:tav>
+                                        <p:tav tm="100000">
+                                          <p:val>
+                                            <p:strVal val="#ppt_y"/>
+                                          </p:val>
+                                        </p:tav>
+                                      </p:tavLst>
+                                    </p:anim>
+                                  </p:childTnLst>
+                                </p:cTn>
+                              </p:par>
+                              <p:par>
+                                <p:cTn id="17" presetID="2" presetClass="entr" presetSubtype="4" fill="hold" grpId="0" nodeType="withEffect">
+                                  <p:stCondLst>
+                                    <p:cond delay="0"/>
+                                  </p:stCondLst>
+                                  <p:childTnLst>
+                                    <p:set>
+                                      <p:cBhvr>
+                                        <p:cTn id="18" dur="1" fill="hold">
+                                          <p:stCondLst>
+                                            <p:cond delay="0"/>
+                                          </p:stCondLst>
+                                        </p:cTn>
+                                        <p:tgtEl>
+                                          <p:spTgt spid="3">
+                                            <p:txEl>
+                                              <p:pRg st="1" end="1"/>
+                                            </p:txEl>
+                                          </p:spTgt>
+                                        </p:tgtEl>
+                                        <p:attrNameLst>
+                                          <p:attrName>style.visibility</p:attrName>
+                                        </p:attrNameLst>
+                                      </p:cBhvr>
+                                      <p:to>
+                                        <p:strVal val="visible"/>
+                                      </p:to>
+                                    </p:set>
+                                    <p:anim calcmode="lin" valueType="num">
+                                      <p:cBhvr additive="base">
+                                        <p:cTn id="19" dur="500" fill="hold"/>
+                                        <p:tgtEl>
+                                          <p:spTgt spid="3">
+                                            <p:txEl>
+                                              <p:pRg st="1" end="1"/>
+                                            </p:txEl>
+                                          </p:spTgt>
+                                        </p:tgtEl>
+                                        <p:attrNameLst>
+                                          <p:attrName>ppt_x</p:attrName>
+                                        </p:attrNameLst>
+                                      </p:cBhvr>
+                                      <p:tavLst>
+                                        <p:tav tm="0">
+                                          <p:val>
+                                            <p:strVal val="#ppt_x"/>
+                                          </p:val>
+                                        </p:tav>
+                                        <p:tav tm="100000">
+                                          <p:val>
+                                            <p:strVal val="#ppt_x"/>
+                                          </p:val>
+                                        </p:tav>
+                                      </p:tavLst>
+                                    </p:anim>
+                                    <p:anim calcmode="lin" valueType="num">
+                                      <p:cBhvr additive="base">
+                                        <p:cTn id="20" dur="500" fill="hold"/>
+                                        <p:tgtEl>
+                                          <p:spTgt spid="3">
+                                            <p:txEl>
+                                              <p:pRg st="1" end="1"/>
+                                            </p:txEl>
+                                          </p:spTgt>
+                                        </p:tgtEl>
+                                        <p:attrNameLst>
+                                          <p:attrName>ppt_y</p:attrName>
+                                        </p:attrNameLst>
+                                      </p:cBhvr>
+                                      <p:tavLst>
+                                        <p:tav tm="0">
+                                          <p:val>
+                                            <p:strVal val="1+#ppt_h/2"/>
+                                          </p:val>
+                                        </p:tav>
+                                        <p:tav tm="100000">
+                                          <p:val>
+                                            <p:strVal val="#ppt_y"/>
+                                          </p:val>
+                                        </p:tav>
+                                      </p:tavLst>
+                                    </p:anim>
+                                  </p:childTnLst>
+                                </p:cTn>
+                              </p:par>
+                              <p:par>
+                                <p:cTn id="21" presetID="2" presetClass="entr" presetSubtype="4" fill="hold" grpId="0" nodeType="withEffect">
+                                  <p:stCondLst>
+                                    <p:cond delay="0"/>
+                                  </p:stCondLst>
+                                  <p:childTnLst>
+                                    <p:set>
+                                      <p:cBhvr>
+                                        <p:cTn id="22" dur="1" fill="hold">
+                                          <p:stCondLst>
+                                            <p:cond delay="0"/>
+                                          </p:stCondLst>
+                                        </p:cTn>
+                                        <p:tgtEl>
+                                          <p:spTgt spid="3">
+                                            <p:txEl>
+                                              <p:pRg st="2" end="2"/>
+                                            </p:txEl>
+                                          </p:spTgt>
+                                        </p:tgtEl>
+                                        <p:attrNameLst>
+                                          <p:attrName>style.visibility</p:attrName>
+                                        </p:attrNameLst>
+                                      </p:cBhvr>
+                                      <p:to>
+                                        <p:strVal val="visible"/>
+                                      </p:to>
+                                    </p:set>
+                                    <p:anim calcmode="lin" valueType="num">
+                                      <p:cBhvr additive="base">
+                                        <p:cTn id="23" dur="500" fill="hold"/>
+                                        <p:tgtEl>
+                                          <p:spTgt spid="3">
+                                            <p:txEl>
+                                              <p:pRg st="2" end="2"/>
+                                            </p:txEl>
+                                          </p:spTgt>
+                                        </p:tgtEl>
+                                        <p:attrNameLst>
+                                          <p:attrName>ppt_x</p:attrName>
+                                        </p:attrNameLst>
+                                      </p:cBhvr>
+                                      <p:tavLst>
+                                        <p:tav tm="0">
+                                          <p:val>
+                                            <p:strVal val="#ppt_x"/>
+                                          </p:val>
+                                        </p:tav>
+                                        <p:tav tm="100000">
+                                          <p:val>
+                                            <p:strVal val="#ppt_x"/>
+                                          </p:val>
+                                        </p:tav>
+                                      </p:tavLst>
+                                    </p:anim>
+                                    <p:anim calcmode="lin" valueType="num">
+                                      <p:cBhvr additive="base">
+                                        <p:cTn id="24" dur="500" fill="hold"/>
+                                        <p:tgtEl>
+                                          <p:spTgt spid="3">
+                                            <p:txEl>
+                                              <p:pRg st="2" end="2"/>
+                                            </p:txEl>
+                                          </p:spTgt>
+                                        </p:tgtEl>
+                                        <p:attrNameLst>
+                                          <p:attrName>ppt_y</p:attrName>
+                                        </p:attrNameLst>
+                                      </p:cBhvr>
+                                      <p:tavLst>
+                                        <p:tav tm="0">
+                                          <p:val>
+                                            <p:strVal val="1+#ppt_h/2"/>
+                                          </p:val>
+                                        </p:tav>
+                                        <p:tav tm="100000">
+                                          <p:val>
+                                            <p:strVal val="#ppt_y"/>
+                                          </p:val>
+                                        </p:tav>
+                                      </p:tavLst>
+                                    </p:anim>
+                                  </p:childTnLst>
+                                </p:cTn>
+                              </p:par>
+                              <p:par>
+                                <p:cTn id="25" presetID="2" presetClass="entr" presetSubtype="4" fill="hold" grpId="0" nodeType="withEffect">
+                                  <p:stCondLst>
+                                    <p:cond delay="0"/>
+                                  </p:stCondLst>
+                                  <p:childTnLst>
+                                    <p:set>
+                                      <p:cBhvr>
+                                        <p:cTn id="26" dur="1" fill="hold">
+                                          <p:stCondLst>
+                                            <p:cond delay="0"/>
+                                          </p:stCondLst>
+                                        </p:cTn>
+                                        <p:tgtEl>
+                                          <p:spTgt spid="3">
+                                            <p:txEl>
+                                              <p:pRg st="3" end="3"/>
+                                            </p:txEl>
+                                          </p:spTgt>
+                                        </p:tgtEl>
+                                        <p:attrNameLst>
+                                          <p:attrName>style.visibility</p:attrName>
+                                        </p:attrNameLst>
+                                      </p:cBhvr>
+                                      <p:to>
+                                        <p:strVal val="visible"/>
+                                      </p:to>
+                                    </p:set>
+                                    <p:anim calcmode="lin" valueType="num">
+                                      <p:cBhvr additive="base">
+                                        <p:cTn id="27" dur="500" fill="hold"/>
+                                        <p:tgtEl>
+                                          <p:spTgt spid="3">
+                                            <p:txEl>
+                                              <p:pRg st="3" end="3"/>
+                                            </p:txEl>
+                                          </p:spTgt>
+                                        </p:tgtEl>
+                                        <p:attrNameLst>
+                                          <p:attrName>ppt_x</p:attrName>
+                                        </p:attrNameLst>
+                                      </p:cBhvr>
+                                      <p:tavLst>
+                                        <p:tav tm="0">
+                                          <p:val>
+                                            <p:strVal val="#ppt_x"/>
+                                          </p:val>
+                                        </p:tav>
+                                        <p:tav tm="100000">
+                                          <p:val>
+                                            <p:strVal val="#ppt_x"/>
+                                          </p:val>
+                                        </p:tav>
+                                      </p:tavLst>
+                                    </p:anim>
+                                    <p:anim calcmode="lin" valueType="num">
+                                      <p:cBhvr additive="base">
+                                        <p:cTn id="28" dur="500" fill="hold"/>
+                                        <p:tgtEl>
+                                          <p:spTgt spid="3">
+                                            <p:txEl>
+                                              <p:pRg st="3" end="3"/>
+                                            </p:txEl>
+                                          </p:spTgt>
+                                        </p:tgtEl>
+                                        <p:attrNameLst>
+                                          <p:attrName>ppt_y</p:attrName>
+                                        </p:attrNameLst>
+                                      </p:cBhvr>
+                                      <p:tavLst>
+                                        <p:tav tm="0">
+                                          <p:val>
+                                            <p:strVal val="1+#ppt_h/2"/>
+                                          </p:val>
+                                        </p:tav>
+                                        <p:tav tm="100000">
+                                          <p:val>
+                                            <p:strVal val="#ppt_y"/>
+                                          </p:val>
+                                        </p:tav>
+                                      </p:tavLst>
+                                    </p:anim>
+                                  </p:childTnLst>
+                                </p:cTn>
+                              </p:par>
+                              <p:par>
+                                <p:cTn id="29" presetID="2" presetClass="entr" presetSubtype="4" fill="hold" grpId="0" nodeType="withEffect">
+                                  <p:stCondLst>
+                                    <p:cond delay="0"/>
+                                  </p:stCondLst>
+                                  <p:childTnLst>
+                                    <p:set>
+                                      <p:cBhvr>
+                                        <p:cTn id="30" dur="1" fill="hold">
+                                          <p:stCondLst>
+                                            <p:cond delay="0"/>
+                                          </p:stCondLst>
+                                        </p:cTn>
+                                        <p:tgtEl>
+                                          <p:spTgt spid="3">
+                                            <p:txEl>
+                                              <p:pRg st="4" end="4"/>
+                                            </p:txEl>
+                                          </p:spTgt>
+                                        </p:tgtEl>
+                                        <p:attrNameLst>
+                                          <p:attrName>style.visibility</p:attrName>
+                                        </p:attrNameLst>
+                                      </p:cBhvr>
+                                      <p:to>
+                                        <p:strVal val="visible"/>
+                                      </p:to>
+                                    </p:set>
+                                    <p:anim calcmode="lin" valueType="num">
+                                      <p:cBhvr additive="base">
+                                        <p:cTn id="31" dur="500" fill="hold"/>
+                                        <p:tgtEl>
+                                          <p:spTgt spid="3">
+                                            <p:txEl>
+                                              <p:pRg st="4" end="4"/>
+                                            </p:txEl>
+                                          </p:spTgt>
+                                        </p:tgtEl>
+                                        <p:attrNameLst>
+                                          <p:attrName>ppt_x</p:attrName>
+                                        </p:attrNameLst>
+                                      </p:cBhvr>
+                                      <p:tavLst>
+                                        <p:tav tm="0">
+                                          <p:val>
+                                            <p:strVal val="#ppt_x"/>
+                                          </p:val>
+                                        </p:tav>
+                                        <p:tav tm="100000">
+                                          <p:val>
+                                            <p:strVal val="#ppt_x"/>
+                                          </p:val>
+                                        </p:tav>
+                                      </p:tavLst>
+                                    </p:anim>
+                                    <p:anim calcmode="lin" valueType="num">
+                                      <p:cBhvr additive="base">
+                                        <p:cTn id="32" dur="500" fill="hold"/>
+                                        <p:tgtEl>
+                                          <p:spTgt spid="3">
+                                            <p:txEl>
+                                              <p:pRg st="4" end="4"/>
+                                            </p:txEl>
+                                          </p:spTgt>
+                                        </p:tgtEl>
+                                        <p:attrNameLst>
+                                          <p:attrName>ppt_y</p:attrName>
+                                        </p:attrNameLst>
+                                      </p:cBhvr>
+                                      <p:tavLst>
+                                        <p:tav tm="0">
+                                          <p:val>
+                                            <p:strVal val="1+#ppt_h/2"/>
+                                          </p:val>
+                                        </p:tav>
+                                        <p:tav tm="100000">
+                                          <p:val>
+                                            <p:strVal val="#ppt_y"/>
+                                          </p:val>
+                                        </p:tav>
+                                      </p:tavLst>
+                                    </p:anim>
+                                  </p:childTnLst>
+                                </p:cTn>
+                              </p:par>
+                              <p:par>
+                                <p:cTn id="33" presetID="2" presetClass="entr" presetSubtype="4" fill="hold" grpId="0" nodeType="withEffect">
+                                  <p:stCondLst>
+                                    <p:cond delay="0"/>
+                                  </p:stCondLst>
+                                  <p:childTnLst>
+                                    <p:set>
+                                      <p:cBhvr>
+                                        <p:cTn id="34" dur="1" fill="hold">
+                                          <p:stCondLst>
+                                            <p:cond delay="0"/>
+                                          </p:stCondLst>
+                                        </p:cTn>
+                                        <p:tgtEl>
+                                          <p:spTgt spid="3">
+                                            <p:txEl>
+                                              <p:pRg st="5" end="5"/>
+                                            </p:txEl>
+                                          </p:spTgt>
+                                        </p:tgtEl>
+                                        <p:attrNameLst>
+                                          <p:attrName>style.visibility</p:attrName>
+                                        </p:attrNameLst>
+                                      </p:cBhvr>
+                                      <p:to>
+                                        <p:strVal val="visible"/>
+                                      </p:to>
+                                    </p:set>
+                                    <p:anim calcmode="lin" valueType="num">
+                                      <p:cBhvr additive="base">
+                                        <p:cTn id="35" dur="500" fill="hold"/>
+                                        <p:tgtEl>
+                                          <p:spTgt spid="3">
+                                            <p:txEl>
+                                              <p:pRg st="5" end="5"/>
+                                            </p:txEl>
+                                          </p:spTgt>
+                                        </p:tgtEl>
+                                        <p:attrNameLst>
+                                          <p:attrName>ppt_x</p:attrName>
+                                        </p:attrNameLst>
+                                      </p:cBhvr>
+                                      <p:tavLst>
+                                        <p:tav tm="0">
+                                          <p:val>
+                                            <p:strVal val="#ppt_x"/>
+                                          </p:val>
+                                        </p:tav>
+                                        <p:tav tm="100000">
+                                          <p:val>
+                                            <p:strVal val="#ppt_x"/>
+                                          </p:val>
+                                        </p:tav>
+                                      </p:tavLst>
+                                    </p:anim>
+                                    <p:anim calcmode="lin" valueType="num">
+                                      <p:cBhvr additive="base">
+                                        <p:cTn id="36" dur="500" fill="hold"/>
+                                        <p:tgtEl>
+                                          <p:spTgt spid="3">
+                                            <p:txEl>
+                                              <p:pRg st="5" end="5"/>
+                                            </p:txEl>
+                                          </p:spTgt>
+                                        </p:tgtEl>
+                                        <p:attrNameLst>
+                                          <p:attrName>ppt_y</p:attrName>
+                                        </p:attrNameLst>
+                                      </p:cBhvr>
+                                      <p:tavLst>
+                                        <p:tav tm="0">
+                                          <p:val>
+                                            <p:strVal val="1+#ppt_h/2"/>
+                                          </p:val>
+                                        </p:tav>
+                                        <p:tav tm="100000">
+                                          <p:val>
+                                            <p:strVal val="#ppt_y"/>
+                                          </p:val>
+                                        </p:tav>
+                                      </p:tavLst>
+                                    </p:anim>
+                                  </p:childTnLst>
+                                </p:cTn>
+                              </p:par>
+                              <p:par>
+                                <p:cTn id="37" presetID="2" presetClass="entr" presetSubtype="4" fill="hold" grpId="0" nodeType="withEffect">
+                                  <p:stCondLst>
+                                    <p:cond delay="0"/>
+                                  </p:stCondLst>
+                                  <p:childTnLst>
+                                    <p:set>
+                                      <p:cBhvr>
+                                        <p:cTn id="38" dur="1" fill="hold">
+                                          <p:stCondLst>
+                                            <p:cond delay="0"/>
+                                          </p:stCondLst>
+                                        </p:cTn>
+                                        <p:tgtEl>
+                                          <p:spTgt spid="3">
+                                            <p:txEl>
+                                              <p:pRg st="6" end="6"/>
+                                            </p:txEl>
+                                          </p:spTgt>
+                                        </p:tgtEl>
+                                        <p:attrNameLst>
+                                          <p:attrName>style.visibility</p:attrName>
+                                        </p:attrNameLst>
+                                      </p:cBhvr>
+                                      <p:to>
+                                        <p:strVal val="visible"/>
+                                      </p:to>
+                                    </p:set>
+                                    <p:anim calcmode="lin" valueType="num">
+                                      <p:cBhvr additive="base">
+                                        <p:cTn id="39" dur="500" fill="hold"/>
+                                        <p:tgtEl>
+                                          <p:spTgt spid="3">
+                                            <p:txEl>
+                                              <p:pRg st="6" end="6"/>
+                                            </p:txEl>
+                                          </p:spTgt>
+                                        </p:tgtEl>
+                                        <p:attrNameLst>
+                                          <p:attrName>ppt_x</p:attrName>
+                                        </p:attrNameLst>
+                                      </p:cBhvr>
+                                      <p:tavLst>
+                                        <p:tav tm="0">
+                                          <p:val>
+                                            <p:strVal val="#ppt_x"/>
+                                          </p:val>
+                                        </p:tav>
+                                        <p:tav tm="100000">
+                                          <p:val>
+                                            <p:strVal val="#ppt_x"/>
+                                          </p:val>
+                                        </p:tav>
+                                      </p:tavLst>
+                                    </p:anim>
+                                    <p:anim calcmode="lin" valueType="num">
+                                      <p:cBhvr additive="base">
+                                        <p:cTn id="40" dur="500" fill="hold"/>
+                                        <p:tgtEl>
+                                          <p:spTgt spid="3">
+                                            <p:txEl>
+                                              <p:pRg st="6" end="6"/>
+                                            </p:txEl>
+                                          </p:spTgt>
+                                        </p:tgtEl>
+                                        <p:attrNameLst>
+                                          <p:attrName>ppt_y</p:attrName>
+                                        </p:attrNameLst>
+                                      </p:cBhvr>
+                                      <p:tavLst>
+                                        <p:tav tm="0">
+                                          <p:val>
+                                            <p:strVal val="1+#ppt_h/2"/>
+                                          </p:val>
+                                        </p:tav>
+                                        <p:tav tm="100000">
+                                          <p:val>
+                                            <p:strVal val="#ppt_y"/>
+                                          </p:val>
+                                        </p:tav>
+                                      </p:tavLst>
+                                    </p:anim>
+                                  </p:childTnLst>
+                                </p:cTn>
+                              </p:par>
+                              <p:par>
+                                <p:cTn id="41" presetID="2" presetClass="entr" presetSubtype="4" fill="hold" grpId="0" nodeType="withEffect">
+                                  <p:stCondLst>
+                                    <p:cond delay="0"/>
+                                  </p:stCondLst>
+                                  <p:childTnLst>
+                                    <p:set>
+                                      <p:cBhvr>
+                                        <p:cTn id="42" dur="1" fill="hold">
+                                          <p:stCondLst>
+                                            <p:cond delay="0"/>
+                                          </p:stCondLst>
+                                        </p:cTn>
+                                        <p:tgtEl>
+                                          <p:spTgt spid="3">
+                                            <p:txEl>
+                                              <p:pRg st="7" end="7"/>
+                                            </p:txEl>
+                                          </p:spTgt>
+                                        </p:tgtEl>
+                                        <p:attrNameLst>
+                                          <p:attrName>style.visibility</p:attrName>
+                                        </p:attrNameLst>
+                                      </p:cBhvr>
+                                      <p:to>
+                                        <p:strVal val="visible"/>
+                                      </p:to>
+                                    </p:set>
+                                    <p:anim calcmode="lin" valueType="num">
+                                      <p:cBhvr additive="base">
+                                        <p:cTn id="43" dur="500" fill="hold"/>
+                                        <p:tgtEl>
+                                          <p:spTgt spid="3">
+                                            <p:txEl>
+                                              <p:pRg st="7" end="7"/>
+                                            </p:txEl>
+                                          </p:spTgt>
+                                        </p:tgtEl>
+                                        <p:attrNameLst>
+                                          <p:attrName>ppt_x</p:attrName>
+                                        </p:attrNameLst>
+                                      </p:cBhvr>
+                                      <p:tavLst>
+                                        <p:tav tm="0">
+                                          <p:val>
+                                            <p:strVal val="#ppt_x"/>
+                                          </p:val>
+                                        </p:tav>
+                                        <p:tav tm="100000">
+                                          <p:val>
+                                            <p:strVal val="#ppt_x"/>
+                                          </p:val>
+                                        </p:tav>
+                                      </p:tavLst>
+                                    </p:anim>
+                                    <p:anim calcmode="lin" valueType="num">
+                                      <p:cBhvr additive="base">
+                                        <p:cTn id="44" dur="500" fill="hold"/>
+                                        <p:tgtEl>
+                                          <p:spTgt spid="3">
+                                            <p:txEl>
+                                              <p:pRg st="7" end="7"/>
+                                            </p:txEl>
+                                          </p:spTgt>
+                                        </p:tgtEl>
+                                        <p:attrNameLst>
+                                          <p:attrName>ppt_y</p:attrName>
+                                        </p:attrNameLst>
+                                      </p:cBhvr>
+                                      <p:tavLst>
+                                        <p:tav tm="0">
+                                          <p:val>
+                                            <p:strVal val="1+#ppt_h/2"/>
+                                          </p:val>
+                                        </p:tav>
+                                        <p:tav tm="100000">
+                                          <p:val>
+                                            <p:strVal val="#ppt_y"/>
+                                          </p:val>
+                                        </p:tav>
+                                      </p:tavLst>
+                                    </p:anim>
+                                  </p:childTnLst>
+                                </p:cTn>
+                              </p:par>
+                              <p:par>
+                                <p:cTn id="45" presetID="2" presetClass="entr" presetSubtype="4" fill="hold" grpId="0" nodeType="withEffect">
+                                  <p:stCondLst>
+                                    <p:cond delay="0"/>
+                                  </p:stCondLst>
+                                  <p:childTnLst>
+                                    <p:set>
+                                      <p:cBhvr>
+                                        <p:cTn id="46" dur="1" fill="hold">
+                                          <p:stCondLst>
+                                            <p:cond delay="0"/>
+                                          </p:stCondLst>
+                                        </p:cTn>
+                                        <p:tgtEl>
+                                          <p:spTgt spid="3">
+                                            <p:txEl>
+                                              <p:pRg st="8" end="8"/>
+                                            </p:txEl>
+                                          </p:spTgt>
+                                        </p:tgtEl>
+                                        <p:attrNameLst>
+                                          <p:attrName>style.visibility</p:attrName>
+                                        </p:attrNameLst>
+                                      </p:cBhvr>
+                                      <p:to>
+                                        <p:strVal val="visible"/>
+                                      </p:to>
+                                    </p:set>
+                                    <p:anim calcmode="lin" valueType="num">
+                                      <p:cBhvr additive="base">
+                                        <p:cTn id="47" dur="500" fill="hold"/>
+                                        <p:tgtEl>
+                                          <p:spTgt spid="3">
+                                            <p:txEl>
+                                              <p:pRg st="8" end="8"/>
+                                            </p:txEl>
+                                          </p:spTgt>
+                                        </p:tgtEl>
+                                        <p:attrNameLst>
+                                          <p:attrName>ppt_x</p:attrName>
+                                        </p:attrNameLst>
+                                      </p:cBhvr>
+                                      <p:tavLst>
+                                        <p:tav tm="0">
+                                          <p:val>
+                                            <p:strVal val="#ppt_x"/>
+                                          </p:val>
+                                        </p:tav>
+                                        <p:tav tm="100000">
+                                          <p:val>
+                                            <p:strVal val="#ppt_x"/>
+                                          </p:val>
+                                        </p:tav>
+                                      </p:tavLst>
+                                    </p:anim>
+                                    <p:anim calcmode="lin" valueType="num">
+                                      <p:cBhvr additive="base">
+                                        <p:cTn id="48" dur="500" fill="hold"/>
+                                        <p:tgtEl>
+                                          <p:spTgt spid="3">
+                                            <p:txEl>
+                                              <p:pRg st="8" end="8"/>
+                                            </p:txEl>
+                                          </p:spTgt>
+                                        </p:tgtEl>
+                                        <p:attrNameLst>
+                                          <p:attrName>ppt_y</p:attrName>
+                                        </p:attrNameLst>
+                                      </p:cBhvr>
+                                      <p:tavLst>
+                                        <p:tav tm="0">
+                                          <p:val>
+                                            <p:strVal val="1+#ppt_h/2"/>
+                                          </p:val>
+                                        </p:tav>
+                                        <p:tav tm="100000">
+                                          <p:val>
+                                            <p:strVal val="#ppt_y"/>
+                                          </p:val>
+                                        </p:tav>
+                                      </p:tavLst>
+                                    </p:anim>
+                                  </p:childTnLst>
+                                </p:cTn>
+                              </p:par>
+                              <p:par>
+                                <p:cTn id="49" presetID="2" presetClass="entr" presetSubtype="4" fill="hold" grpId="0" nodeType="withEffect">
+                                  <p:stCondLst>
+                                    <p:cond delay="0"/>
+                                  </p:stCondLst>
+                                  <p:childTnLst>
+                                    <p:set>
+                                      <p:cBhvr>
+                                        <p:cTn id="50" dur="1" fill="hold">
+                                          <p:stCondLst>
+                                            <p:cond delay="0"/>
+                                          </p:stCondLst>
+                                        </p:cTn>
+                                        <p:tgtEl>
+                                          <p:spTgt spid="3">
+                                            <p:txEl>
+                                              <p:pRg st="9" end="9"/>
+                                            </p:txEl>
+                                          </p:spTgt>
+                                        </p:tgtEl>
+                                        <p:attrNameLst>
+                                          <p:attrName>style.visibility</p:attrName>
+                                        </p:attrNameLst>
+                                      </p:cBhvr>
+                                      <p:to>
+                                        <p:strVal val="visible"/>
+                                      </p:to>
+                                    </p:set>
+                                    <p:anim calcmode="lin" valueType="num">
+                                      <p:cBhvr additive="base">
+                                        <p:cTn id="51" dur="500" fill="hold"/>
+                                        <p:tgtEl>
+                                          <p:spTgt spid="3">
+                                            <p:txEl>
+                                              <p:pRg st="9" end="9"/>
+                                            </p:txEl>
+                                          </p:spTgt>
+                                        </p:tgtEl>
+                                        <p:attrNameLst>
+                                          <p:attrName>ppt_x</p:attrName>
+                                        </p:attrNameLst>
+                                      </p:cBhvr>
+                                      <p:tavLst>
+                                        <p:tav tm="0">
+                                          <p:val>
+                                            <p:strVal val="#ppt_x"/>
+                                          </p:val>
+                                        </p:tav>
+                                        <p:tav tm="100000">
+                                          <p:val>
+                                            <p:strVal val="#ppt_x"/>
+                                          </p:val>
+                                        </p:tav>
+                                      </p:tavLst>
+                                    </p:anim>
+                                    <p:anim calcmode="lin" valueType="num">
+                                      <p:cBhvr additive="base">
+                                        <p:cTn id="52" dur="500" fill="hold"/>
+                                        <p:tgtEl>
+                                          <p:spTgt spid="3">
+                                            <p:txEl>
+                                              <p:pRg st="9" end="9"/>
+                                            </p:txEl>
+                                          </p:spTgt>
+                                        </p:tgtEl>
+                                        <p:attrNameLst>
+                                          <p:attrName>ppt_y</p:attrName>
+                                        </p:attrNameLst>
+                                      </p:cBhvr>
+                                      <p:tavLst>
+                                        <p:tav tm="0">
+                                          <p:val>
+                                            <p:strVal val="1+#ppt_h/2"/>
+                                          </p:val>
+                                        </p:tav>
+                                        <p:tav tm="100000">
+                                          <p:val>
+                                            <p:strVal val="#ppt_y"/>
+                                          </p:val>
+                                        </p:tav>
+                                      </p:tavLst>
+                                    </p:anim>
+                                  </p:childTnLst>
+                                </p:cTn>
+                              </p:par>
+                            </p:childTnLst>
+                          </p:cTn>
+                        </p:par>
+                      </p:childTnLst>
+                    </p:cTn>
+                  </p:par>
+                  <p:par>
+                    <p:cTn id="53" fill="hold">
+                      <p:stCondLst>
+                        <p:cond delay="indefinite"/>
+                      </p:stCondLst>
+                      <p:childTnLst>
+                        <p:par>
+                          <p:cTn id="54" fill="hold">
+                            <p:stCondLst>
+                              <p:cond delay="0"/>
+                            </p:stCondLst>
+                            <p:childTnLst>
+                              <p:par>
+                                <p:cTn id="55" presetID="2" presetClass="entr" presetSubtype="4" fill="hold" grpId="0" nodeType="clickEffect">
+                                  <p:stCondLst>
+                                    <p:cond delay="0"/>
+                                  </p:stCondLst>
+                                  <p:childTnLst>
+                                    <p:set>
+                                      <p:cBhvr>
+                                        <p:cTn id="56" dur="1" fill="hold">
+                                          <p:stCondLst>
+                                            <p:cond delay="0"/>
+                                          </p:stCondLst>
+                                        </p:cTn>
+                                        <p:tgtEl>
+                                          <p:spTgt spid="3">
+                                            <p:txEl>
+                                              <p:pRg st="11" end="11"/>
+                                            </p:txEl>
+                                          </p:spTgt>
+                                        </p:tgtEl>
+                                        <p:attrNameLst>
+                                          <p:attrName>style.visibility</p:attrName>
+                                        </p:attrNameLst>
+                                      </p:cBhvr>
+                                      <p:to>
+                                        <p:strVal val="visible"/>
+                                      </p:to>
+                                    </p:set>
+                                    <p:anim calcmode="lin" valueType="num">
+                                      <p:cBhvr additive="base">
+                                        <p:cTn id="57" dur="500" fill="hold"/>
+                                        <p:tgtEl>
+                                          <p:spTgt spid="3">
+                                            <p:txEl>
+                                              <p:pRg st="11" end="11"/>
+                                            </p:txEl>
+                                          </p:spTgt>
+                                        </p:tgtEl>
+                                        <p:attrNameLst>
+                                          <p:attrName>ppt_x</p:attrName>
+                                        </p:attrNameLst>
+                                      </p:cBhvr>
+                                      <p:tavLst>
+                                        <p:tav tm="0">
+                                          <p:val>
+                                            <p:strVal val="#ppt_x"/>
+                                          </p:val>
+                                        </p:tav>
+                                        <p:tav tm="100000">
+                                          <p:val>
+                                            <p:strVal val="#ppt_x"/>
+                                          </p:val>
+                                        </p:tav>
+                                      </p:tavLst>
+                                    </p:anim>
+                                    <p:anim calcmode="lin" valueType="num">
+                                      <p:cBhvr additive="base">
+                                        <p:cTn id="58" dur="500" fill="hold"/>
+                                        <p:tgtEl>
+                                          <p:spTgt spid="3">
+                                            <p:txEl>
+                                              <p:pRg st="11" end="11"/>
+                                            </p:txEl>
+                                          </p:spTgt>
+                                        </p:tgtEl>
+                                        <p:attrNameLst>
+                                          <p:attrName>ppt_y</p:attrName>
+                                        </p:attrNameLst>
+                                      </p:cBhvr>
+                                      <p:tavLst>
+                                        <p:tav tm="0">
+                                          <p:val>
+                                            <p:strVal val="1+#ppt_h/2"/>
+                                          </p:val>
+                                        </p:tav>
+                                        <p:tav tm="100000">
+                                          <p:val>
+                                            <p:strVal val="#ppt_y"/>
+                                          </p:val>
+                                        </p:tav>
+                                      </p:tavLst>
+                                    </p:anim>
+                                  </p:childTnLst>
+                                </p:cTn>
+                              </p:par>
+                            </p:childTnLst>
+                          </p:cTn>
+                        </p:par>
+                      </p:childTnLst>
+                    </p:cTn>
+                  </p:par>
+                  <p:par>
+                    <p:cTn id="59" fill="hold">
+                      <p:stCondLst>
+                        <p:cond delay="indefinite"/>
+                      </p:stCondLst>
+                      <p:childTnLst>
+                        <p:par>
+                          <p:cTn id="60" fill="hold">
+                            <p:stCondLst>
+                              <p:cond delay="0"/>
+                            </p:stCondLst>
+                            <p:childTnLst>
+                              <p:par>
+                                <p:cTn id="61" presetID="1" presetClass="entr" presetSubtype="0" fill="hold" nodeType="clickEffect">
+                                  <p:stCondLst>
+                                    <p:cond delay="0"/>
+                                  </p:stCondLst>
+                                  <p:childTnLst>
+                                    <p:set>
+                                      <p:cBhvr>
+                                        <p:cTn id="62" dur="1" fill="hold">
+                                          <p:stCondLst>
+                                            <p:cond delay="0"/>
+                                          </p:stCondLst>
+                                        </p:cTn>
+                                        <p:tgtEl>
+                                          <p:spTgt spid="9"/>
+                                        </p:tgtEl>
+                                        <p:attrNameLst>
+                                          <p:attrName>style.visibility</p:attrName>
+                                        </p:attrNameLst>
+                                      </p:cBhvr>
+                                      <p:to>
+                                        <p:strVal val="visible"/>
+                                      </p:to>
+                                    </p:set>
+                                  </p:childTnLst>
+                                </p:cTn>
+                              </p:par>
+                              <p:par>
+                                <p:cTn id="63" presetID="1" presetClass="entr" presetSubtype="0" fill="hold" nodeType="withEffect">
+                                  <p:stCondLst>
+                                    <p:cond delay="0"/>
+                                  </p:stCondLst>
+                                  <p:childTnLst>
+                                    <p:set>
+                                      <p:cBhvr>
+                                        <p:cTn id="64" dur="1" fill="hold">
+                                          <p:stCondLst>
+                                            <p:cond delay="0"/>
+                                          </p:stCondLst>
+                                        </p:cTn>
+                                        <p:tgtEl>
+                                          <p:spTgt spid="8"/>
+                                        </p:tgtEl>
+                                        <p:attrNameLst>
+                                          <p:attrName>style.visibility</p:attrName>
+                                        </p:attrNameLst>
+                                      </p:cBhvr>
+                                      <p:to>
+                                        <p:strVal val="visible"/>
+                                      </p:to>
+                                    </p:set>
+                                  </p:childTnLst>
+                                </p:cTn>
+                              </p:par>
+                            </p:childTnLst>
+                          </p:cTn>
+                        </p:par>
+                      </p:childTnLst>
+                    </p:cTn>
+                  </p:par>
+                  <p:par>
+                    <p:cTn id="65" fill="hold">
+                      <p:stCondLst>
+                        <p:cond delay="indefinite"/>
+                      </p:stCondLst>
+                      <p:childTnLst>
+                        <p:par>
+                          <p:cTn id="66" fill="hold">
+                            <p:stCondLst>
+                              <p:cond delay="0"/>
+                            </p:stCondLst>
+                            <p:childTnLst>
+                              <p:par>
+                                <p:cTn id="67" presetID="1" presetClass="entr" presetSubtype="0" fill="hold" nodeType="clickEffect">
+                                  <p:stCondLst>
+                                    <p:cond delay="0"/>
+                                  </p:stCondLst>
+                                  <p:childTnLst>
+                                    <p:set>
+                                      <p:cBhvr>
+                                        <p:cTn id="68" dur="1" fill="hold">
+                                          <p:stCondLst>
+                                            <p:cond delay="0"/>
+                                          </p:stCondLst>
+                                        </p:cTn>
+                                        <p:tgtEl>
+                                          <p:spTgt spid="7"/>
+                                        </p:tgtEl>
+                                        <p:attrNameLst>
+                                          <p:attrName>style.visibility</p:attrName>
+                                        </p:attrNameLst>
+                                      </p:cBhvr>
+                                      <p:to>
+                                        <p:strVal val="visible"/>
+                                      </p:to>
+                                    </p:set>
+                                  </p:childTnLst>
+                                </p:cTn>
+                              </p:par>
+                              <p:par>
+                                <p:cTn id="69" presetID="1" presetClass="entr" presetSubtype="0" fill="hold" nodeType="withEffect">
+                                  <p:stCondLst>
+                                    <p:cond delay="0"/>
+                                  </p:stCondLst>
+                                  <p:childTnLst>
+                                    <p:set>
+                                      <p:cBhvr>
+                                        <p:cTn id="70" dur="1" fill="hold">
+                                          <p:stCondLst>
+                                            <p:cond delay="0"/>
+                                          </p:stCondLst>
+                                        </p:cTn>
+                                        <p:tgtEl>
+                                          <p:spTgt spid="4"/>
+                                        </p:tgtEl>
+                                        <p:attrNameLst>
+                                          <p:attrName>style.visibility</p:attrName>
+                                        </p:attrNameLst>
+                                      </p:cBhvr>
+                                      <p:to>
+                                        <p:strVal val="visible"/>
+                                      </p:to>
+                                    </p:set>
+                                  </p:childTnLst>
+                                </p:cTn>
+                              </p:par>
+                              <p:par>
+                                <p:cTn id="71" presetID="1" presetClass="exit" presetSubtype="0" fill="hold" nodeType="withEffect">
+                                  <p:stCondLst>
+                                    <p:cond delay="0"/>
+                                  </p:stCondLst>
+                                  <p:childTnLst>
+                                    <p:set>
+                                      <p:cBhvr>
+                                        <p:cTn id="72" dur="1" fill="hold">
+                                          <p:stCondLst>
+                                            <p:cond delay="0"/>
+                                          </p:stCondLst>
+                                        </p:cTn>
+                                        <p:tgtEl>
+                                          <p:spTgt spid="9"/>
+                                        </p:tgtEl>
+                                        <p:attrNameLst>
+                                          <p:attrName>style.visibility</p:attrName>
+                                        </p:attrNameLst>
+                                      </p:cBhvr>
+                                      <p:to>
+                                        <p:strVal val="hidden"/>
+                                      </p:to>
+                                    </p:set>
+                                  </p:childTnLst>
+                                </p:cTn>
+                              </p:par>
+                              <p:par>
+                                <p:cTn id="73" presetID="10" presetClass="entr" presetSubtype="0" fill="hold" nodeType="withEffect">
+                                  <p:stCondLst>
+                                    <p:cond delay="0"/>
+                                  </p:stCondLst>
+                                  <p:childTnLst>
+                                    <p:set>
+                                      <p:cBhvr>
+                                        <p:cTn id="74" dur="1" fill="hold">
+                                          <p:stCondLst>
+                                            <p:cond delay="0"/>
+                                          </p:stCondLst>
+                                        </p:cTn>
+                                        <p:tgtEl>
+                                          <p:spTgt spid="8"/>
+                                        </p:tgtEl>
+                                        <p:attrNameLst>
+                                          <p:attrName>style.visibility</p:attrName>
+                                        </p:attrNameLst>
+                                      </p:cBhvr>
+                                      <p:to>
+                                        <p:strVal val="visible"/>
+                                      </p:to>
+                                    </p:set>
+                                    <p:animEffect transition="in" filter="fade">
+                                      <p:cBhvr>
+                                        <p:cTn id="75" dur="500"/>
+                                        <p:tgtEl>
+                                          <p:spTgt spid="8"/>
+                                        </p:tgtEl>
+                                      </p:cBhvr>
+                                    </p:animEffect>
+                                  </p:childTnLst>
+                                </p:cTn>
+                              </p:par>
+                            </p:childTnLst>
+                          </p:cTn>
+                        </p:par>
+                      </p:childTnLst>
+                    </p:cTn>
+                  </p:par>
+                </p:childTnLst>
+              </p:cTn>
+              <p:prevCondLst>
+                <p:cond evt="onPrev" delay="0">
+                  <p:tgtEl>
+                    <p:sldTgt/>
+                  </p:tgtEl>
+                </p:cond>
+              </p:prevCondLst>
+              <p:nextCondLst>
+                <p:cond evt="onNext" delay="0">
+                  <p:tgtEl>
+                    <p:sldTgt/>
+                  </p:tgtEl>
+                </p:cond>
+              </p:nextCondLst>
+            </p:seq>
+          </p:childTnLst>
+        </p:cTn>
+      </p:par>
+    </p:tnLst>
+    <p:bldLst>
+      <p:bldP spid="2" grpId="0"/>
+      <p:bldP spid="3" grpId="0" build="p"/>
+    </p:bldLst>
+  </p:timing>
 </p:sld>
 </file>
 
@@ -8323,8 +10119,8 @@
         </p:blipFill>
         <p:spPr>
           <a:xfrm>
-            <a:off x="8955541" y="1716541"/>
-            <a:ext cx="2038804" cy="1327604"/>
+            <a:off x="8941027" y="1716542"/>
+            <a:ext cx="2452461" cy="1617889"/>
           </a:xfrm>
           <a:prstGeom prst="rect">
             <a:avLst/>

--- a/Current Presentation/Spring 2026.pptx
+++ b/Current Presentation/Spring 2026.pptx
@@ -124,7 +124,7 @@
 <p1510:revInfo xmlns:a="http://schemas.openxmlformats.org/drawingml/2006/main" xmlns:r="http://schemas.openxmlformats.org/officeDocument/2006/relationships" xmlns:p1510="http://schemas.microsoft.com/office/powerpoint/2015/10/main">
   <p1510:revLst>
     <p1510:client id="{6998B00B-2615-DA7F-16DD-BEDBD145F26F}" v="142" dt="2026-06-22T15:26:48.182"/>
-    <p1510:client id="{B3D8BC0C-D2E7-1DB9-11BC-BCF84AD0F7D9}" v="405" dt="2026-06-23T17:11:02.823"/>
+    <p1510:client id="{B3D8BC0C-D2E7-1DB9-11BC-BCF84AD0F7D9}" v="548" dt="2026-06-23T17:24:54.676"/>
   </p1510:revLst>
 </p1510:revInfo>
 </file>
@@ -600,6 +600,23 @@
             <a:r>
               <a:rPr lang="en-US" dirty="0"/>
               <a:t>After third debugging, say the “those are my 3” joke</a:t>
+            </a:r>
+          </a:p>
+          <a:p>
+            <a:pPr>
+              <a:defRPr/>
+            </a:pPr>
+            <a:r>
+              <a:rPr lang="en-US" dirty="0"/>
+              <a:t>Art skills  = </a:t>
+            </a:r>
+            <a:r>
+              <a:rPr lang="en-US" dirty="0" err="1"/>
+              <a:t>purchaseing</a:t>
+            </a:r>
+            <a:r>
+              <a:rPr lang="en-US" dirty="0"/>
+              <a:t> interface</a:t>
             </a:r>
           </a:p>
         </p:txBody>
@@ -7875,14 +7892,6 @@
 <file path=ppt/slides/slide2.xml><?xml version="1.0" encoding="utf-8"?>
 <p:sld xmlns:a="http://schemas.openxmlformats.org/drawingml/2006/main" xmlns:r="http://schemas.openxmlformats.org/officeDocument/2006/relationships" xmlns:p="http://schemas.openxmlformats.org/presentationml/2006/main">
   <p:cSld>
-    <p:bg>
-      <p:bgPr>
-        <a:solidFill>
-          <a:schemeClr val="bg1"/>
-        </a:solidFill>
-        <a:effectLst/>
-      </p:bgPr>
-    </p:bg>
     <p:spTree>
       <p:nvGrpSpPr>
         <p:cNvPr id="1" name=""/>
@@ -7897,111 +7906,6 @@
           <a:chExt cx="0" cy="0"/>
         </a:xfrm>
       </p:grpSpPr>
-      <p:sp useBgFill="1">
-        <p:nvSpPr>
-          <p:cNvPr id="14" name="Rectangle 13">
-            <a:extLst>
-              <a:ext uri="{FF2B5EF4-FFF2-40B4-BE49-F238E27FC236}">
-                <a16:creationId xmlns:a16="http://schemas.microsoft.com/office/drawing/2014/main" id="{72B6B1FE-6B01-4FC2-BCF5-012C5239C1F1}"/>
-              </a:ext>
-              <a:ext uri="{C183D7F6-B498-43B3-948B-1728B52AA6E4}">
-                <adec:decorative xmlns:adec="http://schemas.microsoft.com/office/drawing/2017/decorative" val="1"/>
-              </a:ext>
-            </a:extLst>
-          </p:cNvPr>
-          <p:cNvSpPr>
-            <a:spLocks noGrp="1" noRot="1" noChangeAspect="1" noMove="1" noResize="1" noEditPoints="1" noAdjustHandles="1" noChangeArrowheads="1" noChangeShapeType="1" noTextEdit="1"/>
-          </p:cNvSpPr>
-          <p:nvPr>
-            <p:extLst>
-              <p:ext uri="{386F3935-93C4-4BCD-93E2-E3B085C9AB24}">
-                <p16:designElem xmlns:p16="http://schemas.microsoft.com/office/powerpoint/2015/main" val="1"/>
-              </p:ext>
-            </p:extLst>
-          </p:nvPr>
-        </p:nvSpPr>
-        <p:spPr>
-          <a:xfrm>
-            <a:off x="0" y="0"/>
-            <a:ext cx="12192000" cy="6858000"/>
-          </a:xfrm>
-          <a:prstGeom prst="rect">
-            <a:avLst/>
-          </a:prstGeom>
-          <a:ln>
-            <a:noFill/>
-          </a:ln>
-        </p:spPr>
-        <p:style>
-          <a:lnRef idx="2">
-            <a:schemeClr val="accent1">
-              <a:shade val="50000"/>
-            </a:schemeClr>
-          </a:lnRef>
-          <a:fillRef idx="1">
-            <a:schemeClr val="accent1"/>
-          </a:fillRef>
-          <a:effectRef idx="0">
-            <a:schemeClr val="accent1"/>
-          </a:effectRef>
-          <a:fontRef idx="minor">
-            <a:schemeClr val="lt1"/>
-          </a:fontRef>
-        </p:style>
-        <p:txBody>
-          <a:bodyPr rtlCol="0" anchor="ctr"/>
-          <a:lstStyle/>
-          <a:p>
-            <a:pPr algn="ctr"/>
-            <a:endParaRPr lang="en-US"/>
-          </a:p>
-        </p:txBody>
-      </p:sp>
-      <p:pic>
-        <p:nvPicPr>
-          <p:cNvPr id="16" name="Picture 15">
-            <a:extLst>
-              <a:ext uri="{FF2B5EF4-FFF2-40B4-BE49-F238E27FC236}">
-                <a16:creationId xmlns:a16="http://schemas.microsoft.com/office/drawing/2014/main" id="{9B69754F-41F0-4EE1-98C6-2FDDD9538C9D}"/>
-              </a:ext>
-              <a:ext uri="{C183D7F6-B498-43B3-948B-1728B52AA6E4}">
-                <adec:decorative xmlns:adec="http://schemas.microsoft.com/office/drawing/2017/decorative" val="1"/>
-              </a:ext>
-            </a:extLst>
-          </p:cNvPr>
-          <p:cNvPicPr>
-            <a:picLocks noGrp="1" noRot="1" noChangeAspect="1" noMove="1" noResize="1" noEditPoints="1" noAdjustHandles="1" noChangeArrowheads="1" noChangeShapeType="1" noCrop="1"/>
-          </p:cNvPicPr>
-          <p:nvPr>
-            <p:extLst>
-              <p:ext uri="{386F3935-93C4-4BCD-93E2-E3B085C9AB24}">
-                <p16:designElem xmlns:p16="http://schemas.microsoft.com/office/powerpoint/2015/main" val="1"/>
-              </p:ext>
-            </p:extLst>
-          </p:nvPr>
-        </p:nvPicPr>
-        <p:blipFill>
-          <a:blip r:embed="rId3">
-            <a:extLst>
-              <a:ext uri="{28A0092B-C50C-407E-A947-70E740481C1C}">
-                <a14:useLocalDpi xmlns:a14="http://schemas.microsoft.com/office/drawing/2010/main" val="0"/>
-              </a:ext>
-            </a:extLst>
-          </a:blip>
-          <a:stretch>
-            <a:fillRect/>
-          </a:stretch>
-        </p:blipFill>
-        <p:spPr>
-          <a:xfrm>
-            <a:off x="0" y="0"/>
-            <a:ext cx="12192000" cy="1441450"/>
-          </a:xfrm>
-          <a:prstGeom prst="rect">
-            <a:avLst/>
-          </a:prstGeom>
-        </p:spPr>
-      </p:pic>
       <p:sp>
         <p:nvSpPr>
           <p:cNvPr id="2" name="Title 1">
@@ -8018,16 +7922,9 @@
             <p:ph type="title"/>
           </p:nvPr>
         </p:nvSpPr>
-        <p:spPr>
-          <a:xfrm>
-            <a:off x="685800" y="764373"/>
-            <a:ext cx="4753466" cy="1293028"/>
-          </a:xfrm>
-        </p:spPr>
-        <p:txBody>
-          <a:bodyPr>
-            <a:normAutofit/>
-          </a:bodyPr>
+        <p:spPr/>
+        <p:txBody>
+          <a:bodyPr/>
           <a:lstStyle/>
           <a:p>
             <a:r>
@@ -8053,62 +7950,65 @@
             <p:ph idx="1"/>
           </p:nvPr>
         </p:nvSpPr>
-        <p:spPr>
-          <a:xfrm>
-            <a:off x="685801" y="2194560"/>
-            <a:ext cx="4753466" cy="4024125"/>
-          </a:xfrm>
-        </p:spPr>
-        <p:txBody>
-          <a:bodyPr>
-            <a:normAutofit/>
+        <p:spPr/>
+        <p:txBody>
+          <a:bodyPr vert="horz" lIns="91440" tIns="45720" rIns="91440" bIns="45720" rtlCol="0" anchor="t">
+            <a:normAutofit fontScale="92500" lnSpcReduction="10000"/>
           </a:bodyPr>
           <a:lstStyle/>
           <a:p>
             <a:r>
-              <a:rPr lang="en-US" sz="1300"/>
-              <a:t>We worked on two things in advanced appdev.</a:t>
+              <a:rPr lang="en-US" dirty="0"/>
+              <a:t>We worked on two things in advanced </a:t>
+            </a:r>
+            <a:r>
+              <a:rPr lang="en-US" err="1"/>
+              <a:t>appdev</a:t>
+            </a:r>
+            <a:r>
+              <a:rPr lang="en-US" dirty="0"/>
+              <a:t>.</a:t>
             </a:r>
           </a:p>
           <a:p>
             <a:pPr lvl="1"/>
             <a:r>
-              <a:rPr lang="en-US" sz="1300"/>
+              <a:rPr lang="en-US" dirty="0"/>
               <a:t>One of the projects we worked on was the Snack Shack</a:t>
             </a:r>
           </a:p>
           <a:p>
             <a:pPr lvl="2"/>
             <a:r>
-              <a:rPr lang="en-US" sz="1300"/>
+              <a:rPr lang="en-US" dirty="0"/>
               <a:t>In actuality, the most major was, as discussed by Ryan, actually databases and SQL. But I figured you have heard about that from him</a:t>
             </a:r>
           </a:p>
           <a:p>
             <a:pPr lvl="1"/>
             <a:r>
-              <a:rPr lang="en-US" sz="1300"/>
+              <a:rPr lang="en-US" dirty="0"/>
               <a:t>Tasks used:</a:t>
             </a:r>
           </a:p>
           <a:p>
             <a:pPr lvl="2"/>
             <a:r>
-              <a:rPr lang="en-US" sz="1300"/>
+              <a:rPr lang="en-US" dirty="0"/>
               <a:t>Debugging</a:t>
             </a:r>
           </a:p>
           <a:p>
             <a:pPr lvl="3"/>
             <a:r>
-              <a:rPr lang="en-US" sz="1300"/>
+              <a:rPr lang="en-US" dirty="0"/>
               <a:t>Debugging</a:t>
             </a:r>
           </a:p>
           <a:p>
             <a:pPr lvl="3"/>
             <a:r>
-              <a:rPr lang="en-US" sz="1300"/>
+              <a:rPr lang="en-US" dirty="0"/>
               <a:t>Debugging</a:t>
             </a:r>
           </a:p>
@@ -8117,109 +8017,77 @@
               <a:buNone/>
             </a:pPr>
             <a:r>
-              <a:rPr lang="en-US" sz="1300"/>
+              <a:rPr lang="en-US" dirty="0"/>
               <a:t>Okay, in all seriousness</a:t>
             </a:r>
           </a:p>
           <a:p>
             <a:pPr lvl="2"/>
             <a:r>
-              <a:rPr lang="en-US" sz="1300"/>
+              <a:rPr lang="en-US" dirty="0"/>
               <a:t>Critical Thinking</a:t>
             </a:r>
           </a:p>
           <a:p>
             <a:pPr lvl="2"/>
             <a:r>
-              <a:rPr lang="en-US" sz="1300"/>
+              <a:rPr lang="en-US" dirty="0"/>
               <a:t>Trial and Error</a:t>
             </a:r>
           </a:p>
           <a:p>
             <a:pPr lvl="2"/>
-            <a:endParaRPr lang="en-US" sz="1300"/>
+            <a:r>
+              <a:rPr lang="en-US"/>
+              <a:t>"Art"</a:t>
+            </a:r>
+            <a:endParaRPr lang="en-US" dirty="0"/>
+          </a:p>
+          <a:p>
+            <a:pPr lvl="2"/>
+            <a:endParaRPr lang="en-US" dirty="0"/>
           </a:p>
           <a:p>
             <a:pPr marL="0" indent="0">
               <a:buNone/>
             </a:pPr>
             <a:r>
-              <a:rPr lang="en-US" sz="1300"/>
+              <a:rPr lang="en-US" dirty="0"/>
               <a:t>As for what I gained, it’s mostly just more knowledge, in this case about SQL</a:t>
             </a:r>
           </a:p>
         </p:txBody>
       </p:sp>
-      <p:sp>
-        <p:nvSpPr>
-          <p:cNvPr id="18" name="Rounded Rectangle 29">
+      <p:pic>
+        <p:nvPicPr>
+          <p:cNvPr id="8" name="Picture 7" descr="A screenshot of a computer&#10;&#10;AI-generated content may be incorrect.">
             <a:extLst>
               <a:ext uri="{FF2B5EF4-FFF2-40B4-BE49-F238E27FC236}">
-                <a16:creationId xmlns:a16="http://schemas.microsoft.com/office/drawing/2014/main" id="{C02E8FC7-9C8C-45D3-B2E0-E76BB859E1E0}"/>
-              </a:ext>
-              <a:ext uri="{C183D7F6-B498-43B3-948B-1728B52AA6E4}">
-                <adec:decorative xmlns:adec="http://schemas.microsoft.com/office/drawing/2017/decorative" val="1"/>
+                <a16:creationId xmlns:a16="http://schemas.microsoft.com/office/drawing/2014/main" id="{CC8E914B-D6C6-9F6E-85C7-1E8D1255F3EB}"/>
               </a:ext>
             </a:extLst>
           </p:cNvPr>
-          <p:cNvSpPr>
-            <a:spLocks noGrp="1" noRot="1" noChangeAspect="1" noMove="1" noResize="1" noEditPoints="1" noAdjustHandles="1" noChangeArrowheads="1" noChangeShapeType="1" noTextEdit="1"/>
-          </p:cNvSpPr>
-          <p:nvPr>
-            <p:extLst>
-              <p:ext uri="{386F3935-93C4-4BCD-93E2-E3B085C9AB24}">
-                <p16:designElem xmlns:p16="http://schemas.microsoft.com/office/powerpoint/2015/main" val="1"/>
-              </p:ext>
-            </p:extLst>
-          </p:nvPr>
-        </p:nvSpPr>
+          <p:cNvPicPr>
+            <a:picLocks noChangeAspect="1"/>
+          </p:cNvPicPr>
+          <p:nvPr/>
+        </p:nvPicPr>
+        <p:blipFill>
+          <a:blip r:embed="rId3"/>
+          <a:stretch>
+            <a:fillRect/>
+          </a:stretch>
+        </p:blipFill>
         <p:spPr>
           <a:xfrm>
-            <a:off x="6125065" y="1127125"/>
-            <a:ext cx="5381135" cy="4987926"/>
+            <a:off x="5128759" y="3316287"/>
+            <a:ext cx="3792311" cy="2257427"/>
           </a:xfrm>
-          <a:prstGeom prst="roundRect">
-            <a:avLst>
-              <a:gd name="adj" fmla="val 2403"/>
-            </a:avLst>
+          <a:prstGeom prst="rect">
+            <a:avLst/>
           </a:prstGeom>
-          <a:solidFill>
-            <a:srgbClr val="FFFFFF"/>
-          </a:solidFill>
-          <a:ln>
-            <a:noFill/>
-          </a:ln>
-          <a:effectLst>
-            <a:innerShdw blurRad="114300">
-              <a:prstClr val="black"/>
-            </a:innerShdw>
-          </a:effectLst>
         </p:spPr>
-        <p:style>
-          <a:lnRef idx="2">
-            <a:schemeClr val="accent1">
-              <a:shade val="50000"/>
-            </a:schemeClr>
-          </a:lnRef>
-          <a:fillRef idx="1">
-            <a:schemeClr val="accent1"/>
-          </a:fillRef>
-          <a:effectRef idx="0">
-            <a:schemeClr val="accent1"/>
-          </a:effectRef>
-          <a:fontRef idx="minor">
-            <a:schemeClr val="lt1"/>
-          </a:fontRef>
-        </p:style>
-        <p:txBody>
-          <a:bodyPr rtlCol="0" anchor="ctr"/>
-          <a:lstStyle/>
-          <a:p>
-            <a:pPr algn="ctr"/>
-            <a:endParaRPr lang="en-US"/>
-          </a:p>
-        </p:txBody>
-      </p:sp>
+      </p:pic>
       <p:pic>
         <p:nvPicPr>
           <p:cNvPr id="9" name="Picture 8" descr="A screenshot of a computer error&#10;&#10;AI-generated content may be incorrect.">
@@ -8242,88 +8110,20 @@
         </p:blipFill>
         <p:spPr>
           <a:xfrm>
-            <a:off x="6657290" y="1917568"/>
-            <a:ext cx="1949285" cy="1740432"/>
+            <a:off x="3658507" y="3319915"/>
+            <a:ext cx="1333500" cy="1190625"/>
           </a:xfrm>
           <a:prstGeom prst="rect">
             <a:avLst/>
           </a:prstGeom>
         </p:spPr>
       </p:pic>
-      <p:sp>
-        <p:nvSpPr>
-          <p:cNvPr id="20" name="Round Single Corner Rectangle 35">
+      <p:pic>
+        <p:nvPicPr>
+          <p:cNvPr id="10" name="Picture 9" descr="A screenshot of a computer&#10;&#10;AI-generated content may be incorrect.">
             <a:extLst>
               <a:ext uri="{FF2B5EF4-FFF2-40B4-BE49-F238E27FC236}">
-                <a16:creationId xmlns:a16="http://schemas.microsoft.com/office/drawing/2014/main" id="{F80CFC61-D49F-4C18-8984-2F7A8E015225}"/>
-              </a:ext>
-              <a:ext uri="{C183D7F6-B498-43B3-948B-1728B52AA6E4}">
-                <adec:decorative xmlns:adec="http://schemas.microsoft.com/office/drawing/2017/decorative" val="1"/>
-              </a:ext>
-            </a:extLst>
-          </p:cNvPr>
-          <p:cNvSpPr>
-            <a:spLocks noGrp="1" noRot="1" noChangeAspect="1" noMove="1" noResize="1" noEditPoints="1" noAdjustHandles="1" noChangeArrowheads="1" noChangeShapeType="1" noTextEdit="1"/>
-          </p:cNvSpPr>
-          <p:nvPr>
-            <p:extLst>
-              <p:ext uri="{386F3935-93C4-4BCD-93E2-E3B085C9AB24}">
-                <p16:designElem xmlns:p16="http://schemas.microsoft.com/office/powerpoint/2015/main" val="1"/>
-              </p:ext>
-            </p:extLst>
-          </p:nvPr>
-        </p:nvSpPr>
-        <p:spPr>
-          <a:xfrm rot="16200000">
-            <a:off x="6406240" y="1673848"/>
-            <a:ext cx="2451386" cy="2227874"/>
-          </a:xfrm>
-          <a:prstGeom prst="round1Rect">
-            <a:avLst>
-              <a:gd name="adj" fmla="val 2864"/>
-            </a:avLst>
-          </a:prstGeom>
-          <a:noFill/>
-          <a:ln w="12700">
-            <a:solidFill>
-              <a:schemeClr val="bg1">
-                <a:lumMod val="50000"/>
-                <a:lumOff val="50000"/>
-              </a:schemeClr>
-            </a:solidFill>
-          </a:ln>
-        </p:spPr>
-        <p:style>
-          <a:lnRef idx="2">
-            <a:schemeClr val="accent1">
-              <a:shade val="50000"/>
-            </a:schemeClr>
-          </a:lnRef>
-          <a:fillRef idx="1">
-            <a:schemeClr val="accent1"/>
-          </a:fillRef>
-          <a:effectRef idx="0">
-            <a:schemeClr val="accent1"/>
-          </a:effectRef>
-          <a:fontRef idx="minor">
-            <a:schemeClr val="lt1"/>
-          </a:fontRef>
-        </p:style>
-        <p:txBody>
-          <a:bodyPr rtlCol="0" anchor="ctr"/>
-          <a:lstStyle/>
-          <a:p>
-            <a:pPr algn="ctr"/>
-            <a:endParaRPr lang="en-US"/>
-          </a:p>
-        </p:txBody>
-      </p:sp>
-      <p:pic>
-        <p:nvPicPr>
-          <p:cNvPr id="7" name="Picture 6" descr="A screenshot of a computer&#10;&#10;AI-generated content may be incorrect.">
-            <a:extLst>
-              <a:ext uri="{FF2B5EF4-FFF2-40B4-BE49-F238E27FC236}">
-                <a16:creationId xmlns:a16="http://schemas.microsoft.com/office/drawing/2014/main" id="{CDB3469D-2D61-248F-34C0-6D9412488077}"/>
+                <a16:creationId xmlns:a16="http://schemas.microsoft.com/office/drawing/2014/main" id="{A4FEF701-8AE1-1EA2-FC6E-32098BBEAA8B}"/>
               </a:ext>
             </a:extLst>
           </p:cNvPr>
@@ -8340,88 +8140,20 @@
         </p:blipFill>
         <p:spPr>
           <a:xfrm>
-            <a:off x="9026758" y="1702363"/>
-            <a:ext cx="1949252" cy="1228029"/>
+            <a:off x="7563303" y="3318101"/>
+            <a:ext cx="3386365" cy="2130425"/>
           </a:xfrm>
           <a:prstGeom prst="rect">
             <a:avLst/>
           </a:prstGeom>
         </p:spPr>
       </p:pic>
-      <p:sp>
-        <p:nvSpPr>
-          <p:cNvPr id="22" name="Round Single Corner Rectangle 55">
+      <p:pic>
+        <p:nvPicPr>
+          <p:cNvPr id="11" name="Picture 10" descr="A screenshot of a computer&#10;&#10;AI-generated content may be incorrect.">
             <a:extLst>
               <a:ext uri="{FF2B5EF4-FFF2-40B4-BE49-F238E27FC236}">
-                <a16:creationId xmlns:a16="http://schemas.microsoft.com/office/drawing/2014/main" id="{E3F050CD-47CE-475B-895F-9AFDA1B45943}"/>
-              </a:ext>
-              <a:ext uri="{C183D7F6-B498-43B3-948B-1728B52AA6E4}">
-                <adec:decorative xmlns:adec="http://schemas.microsoft.com/office/drawing/2017/decorative" val="1"/>
-              </a:ext>
-            </a:extLst>
-          </p:cNvPr>
-          <p:cNvSpPr>
-            <a:spLocks noGrp="1" noRot="1" noChangeAspect="1" noMove="1" noResize="1" noEditPoints="1" noAdjustHandles="1" noChangeArrowheads="1" noChangeShapeType="1" noTextEdit="1"/>
-          </p:cNvSpPr>
-          <p:nvPr>
-            <p:extLst>
-              <p:ext uri="{386F3935-93C4-4BCD-93E2-E3B085C9AB24}">
-                <p16:designElem xmlns:p16="http://schemas.microsoft.com/office/powerpoint/2015/main" val="1"/>
-              </p:ext>
-            </p:extLst>
-          </p:nvPr>
-        </p:nvSpPr>
-        <p:spPr>
-          <a:xfrm rot="5400000" flipH="1">
-            <a:off x="9240519" y="1200156"/>
-            <a:ext cx="1521731" cy="2232443"/>
-          </a:xfrm>
-          <a:prstGeom prst="round1Rect">
-            <a:avLst>
-              <a:gd name="adj" fmla="val 2864"/>
-            </a:avLst>
-          </a:prstGeom>
-          <a:noFill/>
-          <a:ln w="12700">
-            <a:solidFill>
-              <a:schemeClr val="bg1">
-                <a:lumMod val="50000"/>
-                <a:lumOff val="50000"/>
-              </a:schemeClr>
-            </a:solidFill>
-          </a:ln>
-        </p:spPr>
-        <p:style>
-          <a:lnRef idx="2">
-            <a:schemeClr val="accent1">
-              <a:shade val="50000"/>
-            </a:schemeClr>
-          </a:lnRef>
-          <a:fillRef idx="1">
-            <a:schemeClr val="accent1"/>
-          </a:fillRef>
-          <a:effectRef idx="0">
-            <a:schemeClr val="accent1"/>
-          </a:effectRef>
-          <a:fontRef idx="minor">
-            <a:schemeClr val="lt1"/>
-          </a:fontRef>
-        </p:style>
-        <p:txBody>
-          <a:bodyPr rtlCol="0" anchor="ctr"/>
-          <a:lstStyle/>
-          <a:p>
-            <a:pPr algn="ctr"/>
-            <a:endParaRPr lang="en-US"/>
-          </a:p>
-        </p:txBody>
-      </p:sp>
-      <p:pic>
-        <p:nvPicPr>
-          <p:cNvPr id="8" name="Picture 7" descr="A screenshot of a computer&#10;&#10;AI-generated content may be incorrect.">
-            <a:extLst>
-              <a:ext uri="{FF2B5EF4-FFF2-40B4-BE49-F238E27FC236}">
-                <a16:creationId xmlns:a16="http://schemas.microsoft.com/office/drawing/2014/main" id="{CC8E914B-D6C6-9F6E-85C7-1E8D1255F3EB}"/>
+                <a16:creationId xmlns:a16="http://schemas.microsoft.com/office/drawing/2014/main" id="{179F5C94-8C6A-C79E-9F7C-66DC9A9A306D}"/>
               </a:ext>
             </a:extLst>
           </p:cNvPr>
@@ -8438,180 +8170,14 @@
         </p:blipFill>
         <p:spPr>
           <a:xfrm>
-            <a:off x="6659574" y="4344180"/>
-            <a:ext cx="1949285" cy="1150078"/>
+            <a:off x="3660774" y="3319915"/>
+            <a:ext cx="3904344" cy="2256973"/>
           </a:xfrm>
           <a:prstGeom prst="rect">
             <a:avLst/>
           </a:prstGeom>
         </p:spPr>
       </p:pic>
-      <p:sp>
-        <p:nvSpPr>
-          <p:cNvPr id="24" name="Round Single Corner Rectangle 33">
-            <a:extLst>
-              <a:ext uri="{FF2B5EF4-FFF2-40B4-BE49-F238E27FC236}">
-                <a16:creationId xmlns:a16="http://schemas.microsoft.com/office/drawing/2014/main" id="{1873C5AC-8DD3-477A-89AA-365B7AEABED7}"/>
-              </a:ext>
-              <a:ext uri="{C183D7F6-B498-43B3-948B-1728B52AA6E4}">
-                <adec:decorative xmlns:adec="http://schemas.microsoft.com/office/drawing/2017/decorative" val="1"/>
-              </a:ext>
-            </a:extLst>
-          </p:cNvPr>
-          <p:cNvSpPr>
-            <a:spLocks noGrp="1" noRot="1" noChangeAspect="1" noMove="1" noResize="1" noEditPoints="1" noAdjustHandles="1" noChangeArrowheads="1" noChangeShapeType="1" noTextEdit="1"/>
-          </p:cNvSpPr>
-          <p:nvPr>
-            <p:extLst>
-              <p:ext uri="{386F3935-93C4-4BCD-93E2-E3B085C9AB24}">
-                <p16:designElem xmlns:p16="http://schemas.microsoft.com/office/powerpoint/2015/main" val="1"/>
-              </p:ext>
-            </p:extLst>
-          </p:nvPr>
-        </p:nvSpPr>
-        <p:spPr>
-          <a:xfrm rot="5400000" flipV="1">
-            <a:off x="6873351" y="3802998"/>
-            <a:ext cx="1521731" cy="2232443"/>
-          </a:xfrm>
-          <a:prstGeom prst="round1Rect">
-            <a:avLst>
-              <a:gd name="adj" fmla="val 2864"/>
-            </a:avLst>
-          </a:prstGeom>
-          <a:noFill/>
-          <a:ln w="12700">
-            <a:solidFill>
-              <a:schemeClr val="bg1">
-                <a:lumMod val="50000"/>
-                <a:lumOff val="50000"/>
-              </a:schemeClr>
-            </a:solidFill>
-          </a:ln>
-        </p:spPr>
-        <p:style>
-          <a:lnRef idx="2">
-            <a:schemeClr val="accent1">
-              <a:shade val="50000"/>
-            </a:schemeClr>
-          </a:lnRef>
-          <a:fillRef idx="1">
-            <a:schemeClr val="accent1"/>
-          </a:fillRef>
-          <a:effectRef idx="0">
-            <a:schemeClr val="accent1"/>
-          </a:effectRef>
-          <a:fontRef idx="minor">
-            <a:schemeClr val="lt1"/>
-          </a:fontRef>
-        </p:style>
-        <p:txBody>
-          <a:bodyPr rtlCol="0" anchor="ctr"/>
-          <a:lstStyle/>
-          <a:p>
-            <a:pPr algn="ctr"/>
-            <a:endParaRPr lang="en-US"/>
-          </a:p>
-        </p:txBody>
-      </p:sp>
-      <p:pic>
-        <p:nvPicPr>
-          <p:cNvPr id="4" name="Picture 3" descr="A screenshot of a computer&#10;&#10;AI-generated content may be incorrect.">
-            <a:extLst>
-              <a:ext uri="{FF2B5EF4-FFF2-40B4-BE49-F238E27FC236}">
-                <a16:creationId xmlns:a16="http://schemas.microsoft.com/office/drawing/2014/main" id="{EF2AC355-9018-DB92-EA42-158D8C270C9B}"/>
-              </a:ext>
-            </a:extLst>
-          </p:cNvPr>
-          <p:cNvPicPr>
-            <a:picLocks noChangeAspect="1"/>
-          </p:cNvPicPr>
-          <p:nvPr/>
-        </p:nvPicPr>
-        <p:blipFill>
-          <a:blip r:embed="rId5"/>
-          <a:stretch>
-            <a:fillRect/>
-          </a:stretch>
-        </p:blipFill>
-        <p:spPr>
-          <a:xfrm>
-            <a:off x="9024458" y="3835762"/>
-            <a:ext cx="1949285" cy="1228049"/>
-          </a:xfrm>
-          <a:prstGeom prst="rect">
-            <a:avLst/>
-          </a:prstGeom>
-        </p:spPr>
-      </p:pic>
-      <p:sp>
-        <p:nvSpPr>
-          <p:cNvPr id="26" name="Round Single Corner Rectangle 56">
-            <a:extLst>
-              <a:ext uri="{FF2B5EF4-FFF2-40B4-BE49-F238E27FC236}">
-                <a16:creationId xmlns:a16="http://schemas.microsoft.com/office/drawing/2014/main" id="{3A09FE69-EE44-43FC-98AB-E534FF681B22}"/>
-              </a:ext>
-              <a:ext uri="{C183D7F6-B498-43B3-948B-1728B52AA6E4}">
-                <adec:decorative xmlns:adec="http://schemas.microsoft.com/office/drawing/2017/decorative" val="1"/>
-              </a:ext>
-            </a:extLst>
-          </p:cNvPr>
-          <p:cNvSpPr>
-            <a:spLocks noGrp="1" noRot="1" noChangeAspect="1" noMove="1" noResize="1" noEditPoints="1" noAdjustHandles="1" noChangeArrowheads="1" noChangeShapeType="1" noTextEdit="1"/>
-          </p:cNvSpPr>
-          <p:nvPr>
-            <p:extLst>
-              <p:ext uri="{386F3935-93C4-4BCD-93E2-E3B085C9AB24}">
-                <p16:designElem xmlns:p16="http://schemas.microsoft.com/office/powerpoint/2015/main" val="1"/>
-              </p:ext>
-            </p:extLst>
-          </p:nvPr>
-        </p:nvSpPr>
-        <p:spPr>
-          <a:xfrm rot="16200000" flipH="1" flipV="1">
-            <a:off x="8773408" y="3335850"/>
-            <a:ext cx="2451386" cy="2227874"/>
-          </a:xfrm>
-          <a:prstGeom prst="round1Rect">
-            <a:avLst>
-              <a:gd name="adj" fmla="val 2864"/>
-            </a:avLst>
-          </a:prstGeom>
-          <a:noFill/>
-          <a:ln w="12700">
-            <a:solidFill>
-              <a:schemeClr val="bg1">
-                <a:lumMod val="50000"/>
-                <a:lumOff val="50000"/>
-              </a:schemeClr>
-            </a:solidFill>
-          </a:ln>
-        </p:spPr>
-        <p:style>
-          <a:lnRef idx="2">
-            <a:schemeClr val="accent1">
-              <a:shade val="50000"/>
-            </a:schemeClr>
-          </a:lnRef>
-          <a:fillRef idx="1">
-            <a:schemeClr val="accent1"/>
-          </a:fillRef>
-          <a:effectRef idx="0">
-            <a:schemeClr val="accent1"/>
-          </a:effectRef>
-          <a:fontRef idx="minor">
-            <a:schemeClr val="lt1"/>
-          </a:fontRef>
-        </p:style>
-        <p:txBody>
-          <a:bodyPr rtlCol="0" anchor="ctr"/>
-          <a:lstStyle/>
-          <a:p>
-            <a:pPr algn="ctr"/>
-            <a:endParaRPr lang="en-US"/>
-          </a:p>
-        </p:txBody>
-      </p:sp>
     </p:spTree>
     <p:extLst>
       <p:ext uri="{BB962C8B-B14F-4D97-AF65-F5344CB8AC3E}">
@@ -8643,7 +8209,7 @@
                             </p:stCondLst>
                             <p:childTnLst>
                               <p:par>
-                                <p:cTn id="5" presetID="37" presetClass="entr" presetSubtype="0" fill="hold" grpId="0" nodeType="clickEffect">
+                                <p:cTn id="5" presetID="2" presetClass="entr" presetSubtype="4" fill="hold" grpId="0" nodeType="clickEffect">
                                   <p:stCondLst>
                                     <p:cond delay="0"/>
                                   </p:stCondLst>
@@ -8666,17 +8232,9 @@
                                         <p:strVal val="visible"/>
                                       </p:to>
                                     </p:set>
-                                    <p:animEffect transition="in" filter="fade">
-                                      <p:cBhvr>
-                                        <p:cTn id="7" dur="1000"/>
-                                        <p:tgtEl>
-                                          <p:spTgt spid="2"/>
-                                        </p:tgtEl>
-                                      </p:cBhvr>
-                                    </p:animEffect>
                                     <p:anim calcmode="lin" valueType="num">
-                                      <p:cBhvr>
-                                        <p:cTn id="8" dur="1000" fill="hold"/>
+                                      <p:cBhvr additive="base">
+                                        <p:cTn id="7" dur="500" fill="hold"/>
                                         <p:tgtEl>
                                           <p:spTgt spid="2"/>
                                         </p:tgtEl>
@@ -8698,8 +8256,8 @@
                                       </p:tavLst>
                                     </p:anim>
                                     <p:anim calcmode="lin" valueType="num">
-                                      <p:cBhvr>
-                                        <p:cTn id="9" dur="900" decel="100000" fill="hold"/>
+                                      <p:cBhvr additive="base">
+                                        <p:cTn id="8" dur="500" fill="hold"/>
                                         <p:tgtEl>
                                           <p:spTgt spid="2"/>
                                         </p:tgtEl>
@@ -8710,34 +8268,7 @@
                                       <p:tavLst>
                                         <p:tav tm="0">
                                           <p:val>
-                                            <p:strVal val="#ppt_y+1"/>
-                                          </p:val>
-                                        </p:tav>
-                                        <p:tav tm="100000">
-                                          <p:val>
-                                            <p:strVal val="#ppt_y-.03"/>
-                                          </p:val>
-                                        </p:tav>
-                                      </p:tavLst>
-                                    </p:anim>
-                                    <p:anim calcmode="lin" valueType="num">
-                                      <p:cBhvr>
-                                        <p:cTn id="10" dur="100" accel="100000" fill="hold">
-                                          <p:stCondLst>
-                                            <p:cond delay="900"/>
-                                          </p:stCondLst>
-                                        </p:cTn>
-                                        <p:tgtEl>
-                                          <p:spTgt spid="2"/>
-                                        </p:tgtEl>
-                                        <p:attrNameLst>
-                                          <p:attrName>ppt_y</p:attrName>
-                                        </p:attrNameLst>
-                                      </p:cBhvr>
-                                      <p:tavLst>
-                                        <p:tav tm="0">
-                                          <p:val>
-                                            <p:strVal val="#ppt_y-.03"/>
+                                            <p:strVal val="1+#ppt_h/2"/>
                                           </p:val>
                                         </p:tav>
                                         <p:tav tm="100000">
@@ -8753,30 +8284,21 @@
                             </p:childTnLst>
                           </p:cTn>
                         </p:par>
-                      </p:childTnLst>
-                    </p:cTn>
-                  </p:par>
-                  <p:par>
-                    <p:cTn id="11" fill="hold">
-                      <p:stCondLst>
-                        <p:cond delay="indefinite"/>
-                      </p:stCondLst>
-                      <p:childTnLst>
                         <p:par>
-                          <p:cTn id="12" fill="hold">
+                          <p:cTn id="9" fill="hold">
                             <p:stCondLst>
-                              <p:cond delay="0"/>
+                              <p:cond delay="500"/>
                             </p:stCondLst>
                             <p:childTnLst>
                               <p:par>
-                                <p:cTn id="13" presetID="2" presetClass="entr" presetSubtype="4" fill="hold" grpId="0" nodeType="clickEffect">
+                                <p:cTn id="10" presetID="2" presetClass="entr" presetSubtype="4" fill="hold" grpId="0" nodeType="afterEffect">
                                   <p:stCondLst>
-                                    <p:cond delay="0"/>
+                                    <p:cond delay="500"/>
                                   </p:stCondLst>
                                   <p:childTnLst>
                                     <p:set>
                                       <p:cBhvr>
-                                        <p:cTn id="14" dur="1" fill="hold">
+                                        <p:cTn id="11" dur="1" fill="hold">
                                           <p:stCondLst>
                                             <p:cond delay="0"/>
                                           </p:stCondLst>
@@ -8798,7 +8320,7 @@
                                     </p:set>
                                     <p:anim calcmode="lin" valueType="num">
                                       <p:cBhvr additive="base">
-                                        <p:cTn id="15" dur="500" fill="hold"/>
+                                        <p:cTn id="12" dur="500" fill="hold"/>
                                         <p:tgtEl>
                                           <p:spTgt spid="3">
                                             <p:txEl>
@@ -8825,7 +8347,7 @@
                                     </p:anim>
                                     <p:anim calcmode="lin" valueType="num">
                                       <p:cBhvr additive="base">
-                                        <p:cTn id="16" dur="500" fill="hold"/>
+                                        <p:cTn id="13" dur="500" fill="hold"/>
                                         <p:tgtEl>
                                           <p:spTgt spid="3">
                                             <p:txEl>
@@ -8854,14 +8376,14 @@
                                 </p:cTn>
                               </p:par>
                               <p:par>
-                                <p:cTn id="17" presetID="2" presetClass="entr" presetSubtype="4" fill="hold" grpId="0" nodeType="withEffect">
+                                <p:cTn id="14" presetID="2" presetClass="entr" presetSubtype="4" fill="hold" grpId="0" nodeType="withEffect">
                                   <p:stCondLst>
                                     <p:cond delay="0"/>
                                   </p:stCondLst>
                                   <p:childTnLst>
                                     <p:set>
                                       <p:cBhvr>
-                                        <p:cTn id="18" dur="1" fill="hold">
+                                        <p:cTn id="15" dur="1" fill="hold">
                                           <p:stCondLst>
                                             <p:cond delay="0"/>
                                           </p:stCondLst>
@@ -8883,7 +8405,7 @@
                                     </p:set>
                                     <p:anim calcmode="lin" valueType="num">
                                       <p:cBhvr additive="base">
-                                        <p:cTn id="19" dur="500" fill="hold"/>
+                                        <p:cTn id="16" dur="500" fill="hold"/>
                                         <p:tgtEl>
                                           <p:spTgt spid="3">
                                             <p:txEl>
@@ -8910,7 +8432,7 @@
                                     </p:anim>
                                     <p:anim calcmode="lin" valueType="num">
                                       <p:cBhvr additive="base">
-                                        <p:cTn id="20" dur="500" fill="hold"/>
+                                        <p:cTn id="17" dur="500" fill="hold"/>
                                         <p:tgtEl>
                                           <p:spTgt spid="3">
                                             <p:txEl>
@@ -8939,14 +8461,14 @@
                                 </p:cTn>
                               </p:par>
                               <p:par>
-                                <p:cTn id="21" presetID="2" presetClass="entr" presetSubtype="4" fill="hold" grpId="0" nodeType="withEffect">
+                                <p:cTn id="18" presetID="2" presetClass="entr" presetSubtype="4" fill="hold" grpId="0" nodeType="withEffect">
                                   <p:stCondLst>
                                     <p:cond delay="0"/>
                                   </p:stCondLst>
                                   <p:childTnLst>
                                     <p:set>
                                       <p:cBhvr>
-                                        <p:cTn id="22" dur="1" fill="hold">
+                                        <p:cTn id="19" dur="1" fill="hold">
                                           <p:stCondLst>
                                             <p:cond delay="0"/>
                                           </p:stCondLst>
@@ -8968,7 +8490,7 @@
                                     </p:set>
                                     <p:anim calcmode="lin" valueType="num">
                                       <p:cBhvr additive="base">
-                                        <p:cTn id="23" dur="500" fill="hold"/>
+                                        <p:cTn id="20" dur="500" fill="hold"/>
                                         <p:tgtEl>
                                           <p:spTgt spid="3">
                                             <p:txEl>
@@ -8995,7 +8517,7 @@
                                     </p:anim>
                                     <p:anim calcmode="lin" valueType="num">
                                       <p:cBhvr additive="base">
-                                        <p:cTn id="24" dur="500" fill="hold"/>
+                                        <p:cTn id="21" dur="500" fill="hold"/>
                                         <p:tgtEl>
                                           <p:spTgt spid="3">
                                             <p:txEl>
@@ -9024,14 +8546,14 @@
                                 </p:cTn>
                               </p:par>
                               <p:par>
-                                <p:cTn id="25" presetID="2" presetClass="entr" presetSubtype="4" fill="hold" grpId="0" nodeType="withEffect">
+                                <p:cTn id="22" presetID="2" presetClass="entr" presetSubtype="4" fill="hold" grpId="0" nodeType="withEffect">
                                   <p:stCondLst>
                                     <p:cond delay="0"/>
                                   </p:stCondLst>
                                   <p:childTnLst>
                                     <p:set>
                                       <p:cBhvr>
-                                        <p:cTn id="26" dur="1" fill="hold">
+                                        <p:cTn id="23" dur="1" fill="hold">
                                           <p:stCondLst>
                                             <p:cond delay="0"/>
                                           </p:stCondLst>
@@ -9053,7 +8575,7 @@
                                     </p:set>
                                     <p:anim calcmode="lin" valueType="num">
                                       <p:cBhvr additive="base">
-                                        <p:cTn id="27" dur="500" fill="hold"/>
+                                        <p:cTn id="24" dur="500" fill="hold"/>
                                         <p:tgtEl>
                                           <p:spTgt spid="3">
                                             <p:txEl>
@@ -9080,7 +8602,7 @@
                                     </p:anim>
                                     <p:anim calcmode="lin" valueType="num">
                                       <p:cBhvr additive="base">
-                                        <p:cTn id="28" dur="500" fill="hold"/>
+                                        <p:cTn id="25" dur="500" fill="hold"/>
                                         <p:tgtEl>
                                           <p:spTgt spid="3">
                                             <p:txEl>
@@ -9109,14 +8631,14 @@
                                 </p:cTn>
                               </p:par>
                               <p:par>
-                                <p:cTn id="29" presetID="2" presetClass="entr" presetSubtype="4" fill="hold" grpId="0" nodeType="withEffect">
+                                <p:cTn id="26" presetID="2" presetClass="entr" presetSubtype="4" fill="hold" grpId="0" nodeType="withEffect">
                                   <p:stCondLst>
                                     <p:cond delay="0"/>
                                   </p:stCondLst>
                                   <p:childTnLst>
                                     <p:set>
                                       <p:cBhvr>
-                                        <p:cTn id="30" dur="1" fill="hold">
+                                        <p:cTn id="27" dur="1" fill="hold">
                                           <p:stCondLst>
                                             <p:cond delay="0"/>
                                           </p:stCondLst>
@@ -9138,7 +8660,7 @@
                                     </p:set>
                                     <p:anim calcmode="lin" valueType="num">
                                       <p:cBhvr additive="base">
-                                        <p:cTn id="31" dur="500" fill="hold"/>
+                                        <p:cTn id="28" dur="500" fill="hold"/>
                                         <p:tgtEl>
                                           <p:spTgt spid="3">
                                             <p:txEl>
@@ -9165,7 +8687,7 @@
                                     </p:anim>
                                     <p:anim calcmode="lin" valueType="num">
                                       <p:cBhvr additive="base">
-                                        <p:cTn id="32" dur="500" fill="hold"/>
+                                        <p:cTn id="29" dur="500" fill="hold"/>
                                         <p:tgtEl>
                                           <p:spTgt spid="3">
                                             <p:txEl>
@@ -9194,14 +8716,14 @@
                                 </p:cTn>
                               </p:par>
                               <p:par>
-                                <p:cTn id="33" presetID="2" presetClass="entr" presetSubtype="4" fill="hold" grpId="0" nodeType="withEffect">
+                                <p:cTn id="30" presetID="2" presetClass="entr" presetSubtype="4" fill="hold" grpId="0" nodeType="withEffect">
                                   <p:stCondLst>
                                     <p:cond delay="0"/>
                                   </p:stCondLst>
                                   <p:childTnLst>
                                     <p:set>
                                       <p:cBhvr>
-                                        <p:cTn id="34" dur="1" fill="hold">
+                                        <p:cTn id="31" dur="1" fill="hold">
                                           <p:stCondLst>
                                             <p:cond delay="0"/>
                                           </p:stCondLst>
@@ -9223,7 +8745,7 @@
                                     </p:set>
                                     <p:anim calcmode="lin" valueType="num">
                                       <p:cBhvr additive="base">
-                                        <p:cTn id="35" dur="500" fill="hold"/>
+                                        <p:cTn id="32" dur="500" fill="hold"/>
                                         <p:tgtEl>
                                           <p:spTgt spid="3">
                                             <p:txEl>
@@ -9250,7 +8772,7 @@
                                     </p:anim>
                                     <p:anim calcmode="lin" valueType="num">
                                       <p:cBhvr additive="base">
-                                        <p:cTn id="36" dur="500" fill="hold"/>
+                                        <p:cTn id="33" dur="500" fill="hold"/>
                                         <p:tgtEl>
                                           <p:spTgt spid="3">
                                             <p:txEl>
@@ -9279,14 +8801,14 @@
                                 </p:cTn>
                               </p:par>
                               <p:par>
-                                <p:cTn id="37" presetID="2" presetClass="entr" presetSubtype="4" fill="hold" grpId="0" nodeType="withEffect">
+                                <p:cTn id="34" presetID="2" presetClass="entr" presetSubtype="4" fill="hold" grpId="0" nodeType="withEffect">
                                   <p:stCondLst>
                                     <p:cond delay="0"/>
                                   </p:stCondLst>
                                   <p:childTnLst>
                                     <p:set>
                                       <p:cBhvr>
-                                        <p:cTn id="38" dur="1" fill="hold">
+                                        <p:cTn id="35" dur="1" fill="hold">
                                           <p:stCondLst>
                                             <p:cond delay="0"/>
                                           </p:stCondLst>
@@ -9308,7 +8830,7 @@
                                     </p:set>
                                     <p:anim calcmode="lin" valueType="num">
                                       <p:cBhvr additive="base">
-                                        <p:cTn id="39" dur="500" fill="hold"/>
+                                        <p:cTn id="36" dur="500" fill="hold"/>
                                         <p:tgtEl>
                                           <p:spTgt spid="3">
                                             <p:txEl>
@@ -9335,7 +8857,7 @@
                                     </p:anim>
                                     <p:anim calcmode="lin" valueType="num">
                                       <p:cBhvr additive="base">
-                                        <p:cTn id="40" dur="500" fill="hold"/>
+                                        <p:cTn id="37" dur="500" fill="hold"/>
                                         <p:tgtEl>
                                           <p:spTgt spid="3">
                                             <p:txEl>
@@ -9364,14 +8886,14 @@
                                 </p:cTn>
                               </p:par>
                               <p:par>
-                                <p:cTn id="41" presetID="2" presetClass="entr" presetSubtype="4" fill="hold" grpId="0" nodeType="withEffect">
+                                <p:cTn id="38" presetID="1" presetClass="exit" presetSubtype="0" fill="hold" grpId="0" nodeType="withEffect">
                                   <p:stCondLst>
                                     <p:cond delay="0"/>
                                   </p:stCondLst>
                                   <p:childTnLst>
                                     <p:set>
                                       <p:cBhvr>
-                                        <p:cTn id="42" dur="1" fill="hold">
+                                        <p:cTn id="39" dur="1" fill="hold">
                                           <p:stCondLst>
                                             <p:cond delay="0"/>
                                           </p:stCondLst>
@@ -9388,75 +8910,21 @@
                                         </p:attrNameLst>
                                       </p:cBhvr>
                                       <p:to>
-                                        <p:strVal val="visible"/>
+                                        <p:strVal val="hidden"/>
                                       </p:to>
                                     </p:set>
-                                    <p:anim calcmode="lin" valueType="num">
-                                      <p:cBhvr additive="base">
-                                        <p:cTn id="43" dur="500" fill="hold"/>
-                                        <p:tgtEl>
-                                          <p:spTgt spid="3">
-                                            <p:txEl>
-                                              <p:pRg st="7" end="7"/>
-                                            </p:txEl>
-                                          </p:spTgt>
-                                        </p:tgtEl>
-                                        <p:attrNameLst>
-                                          <p:attrName>ppt_x</p:attrName>
-                                        </p:attrNameLst>
-                                      </p:cBhvr>
-                                      <p:tavLst>
-                                        <p:tav tm="0">
-                                          <p:val>
-                                            <p:strVal val="#ppt_x"/>
-                                          </p:val>
-                                        </p:tav>
-                                        <p:tav tm="100000">
-                                          <p:val>
-                                            <p:strVal val="#ppt_x"/>
-                                          </p:val>
-                                        </p:tav>
-                                      </p:tavLst>
-                                    </p:anim>
-                                    <p:anim calcmode="lin" valueType="num">
-                                      <p:cBhvr additive="base">
-                                        <p:cTn id="44" dur="500" fill="hold"/>
-                                        <p:tgtEl>
-                                          <p:spTgt spid="3">
-                                            <p:txEl>
-                                              <p:pRg st="7" end="7"/>
-                                            </p:txEl>
-                                          </p:spTgt>
-                                        </p:tgtEl>
-                                        <p:attrNameLst>
-                                          <p:attrName>ppt_y</p:attrName>
-                                        </p:attrNameLst>
-                                      </p:cBhvr>
-                                      <p:tavLst>
-                                        <p:tav tm="0">
-                                          <p:val>
-                                            <p:strVal val="1+#ppt_h/2"/>
-                                          </p:val>
-                                        </p:tav>
-                                        <p:tav tm="100000">
-                                          <p:val>
-                                            <p:strVal val="#ppt_y"/>
-                                          </p:val>
-                                        </p:tav>
-                                      </p:tavLst>
-                                    </p:anim>
                                   </p:childTnLst>
                                 </p:cTn>
                               </p:par>
                               <p:par>
-                                <p:cTn id="45" presetID="2" presetClass="entr" presetSubtype="4" fill="hold" grpId="0" nodeType="withEffect">
+                                <p:cTn id="40" presetID="2" presetClass="entr" presetSubtype="4" fill="hold" grpId="0" nodeType="withEffect">
                                   <p:stCondLst>
                                     <p:cond delay="0"/>
                                   </p:stCondLst>
                                   <p:childTnLst>
                                     <p:set>
                                       <p:cBhvr>
-                                        <p:cTn id="46" dur="1" fill="hold">
+                                        <p:cTn id="41" dur="1" fill="hold">
                                           <p:stCondLst>
                                             <p:cond delay="0"/>
                                           </p:stCondLst>
@@ -9478,7 +8946,7 @@
                                     </p:set>
                                     <p:anim calcmode="lin" valueType="num">
                                       <p:cBhvr additive="base">
-                                        <p:cTn id="47" dur="500" fill="hold"/>
+                                        <p:cTn id="42" dur="500" fill="hold"/>
                                         <p:tgtEl>
                                           <p:spTgt spid="3">
                                             <p:txEl>
@@ -9505,7 +8973,7 @@
                                     </p:anim>
                                     <p:anim calcmode="lin" valueType="num">
                                       <p:cBhvr additive="base">
-                                        <p:cTn id="48" dur="500" fill="hold"/>
+                                        <p:cTn id="43" dur="500" fill="hold"/>
                                         <p:tgtEl>
                                           <p:spTgt spid="3">
                                             <p:txEl>
@@ -9534,14 +9002,14 @@
                                 </p:cTn>
                               </p:par>
                               <p:par>
-                                <p:cTn id="49" presetID="2" presetClass="entr" presetSubtype="4" fill="hold" grpId="0" nodeType="withEffect">
+                                <p:cTn id="44" presetID="2" presetClass="entr" presetSubtype="4" fill="hold" grpId="0" nodeType="withEffect">
                                   <p:stCondLst>
                                     <p:cond delay="0"/>
                                   </p:stCondLst>
                                   <p:childTnLst>
                                     <p:set>
                                       <p:cBhvr>
-                                        <p:cTn id="50" dur="1" fill="hold">
+                                        <p:cTn id="45" dur="1" fill="hold">
                                           <p:stCondLst>
                                             <p:cond delay="0"/>
                                           </p:stCondLst>
@@ -9563,7 +9031,7 @@
                                     </p:set>
                                     <p:anim calcmode="lin" valueType="num">
                                       <p:cBhvr additive="base">
-                                        <p:cTn id="51" dur="500" fill="hold"/>
+                                        <p:cTn id="46" dur="500" fill="hold"/>
                                         <p:tgtEl>
                                           <p:spTgt spid="3">
                                             <p:txEl>
@@ -9590,11 +9058,96 @@
                                     </p:anim>
                                     <p:anim calcmode="lin" valueType="num">
                                       <p:cBhvr additive="base">
-                                        <p:cTn id="52" dur="500" fill="hold"/>
+                                        <p:cTn id="47" dur="500" fill="hold"/>
                                         <p:tgtEl>
                                           <p:spTgt spid="3">
                                             <p:txEl>
                                               <p:pRg st="9" end="9"/>
+                                            </p:txEl>
+                                          </p:spTgt>
+                                        </p:tgtEl>
+                                        <p:attrNameLst>
+                                          <p:attrName>ppt_y</p:attrName>
+                                        </p:attrNameLst>
+                                      </p:cBhvr>
+                                      <p:tavLst>
+                                        <p:tav tm="0">
+                                          <p:val>
+                                            <p:strVal val="1+#ppt_h/2"/>
+                                          </p:val>
+                                        </p:tav>
+                                        <p:tav tm="100000">
+                                          <p:val>
+                                            <p:strVal val="#ppt_y"/>
+                                          </p:val>
+                                        </p:tav>
+                                      </p:tavLst>
+                                    </p:anim>
+                                  </p:childTnLst>
+                                </p:cTn>
+                              </p:par>
+                              <p:par>
+                                <p:cTn id="48" presetID="2" presetClass="entr" presetSubtype="4" fill="hold" grpId="0" nodeType="withEffect">
+                                  <p:stCondLst>
+                                    <p:cond delay="0"/>
+                                  </p:stCondLst>
+                                  <p:childTnLst>
+                                    <p:set>
+                                      <p:cBhvr>
+                                        <p:cTn id="49" dur="1" fill="hold">
+                                          <p:stCondLst>
+                                            <p:cond delay="0"/>
+                                          </p:stCondLst>
+                                        </p:cTn>
+                                        <p:tgtEl>
+                                          <p:spTgt spid="3">
+                                            <p:txEl>
+                                              <p:pRg st="10" end="10"/>
+                                            </p:txEl>
+                                          </p:spTgt>
+                                        </p:tgtEl>
+                                        <p:attrNameLst>
+                                          <p:attrName>style.visibility</p:attrName>
+                                        </p:attrNameLst>
+                                      </p:cBhvr>
+                                      <p:to>
+                                        <p:strVal val="visible"/>
+                                      </p:to>
+                                    </p:set>
+                                    <p:anim calcmode="lin" valueType="num">
+                                      <p:cBhvr additive="base">
+                                        <p:cTn id="50" dur="500" fill="hold"/>
+                                        <p:tgtEl>
+                                          <p:spTgt spid="3">
+                                            <p:txEl>
+                                              <p:pRg st="10" end="10"/>
+                                            </p:txEl>
+                                          </p:spTgt>
+                                        </p:tgtEl>
+                                        <p:attrNameLst>
+                                          <p:attrName>ppt_x</p:attrName>
+                                        </p:attrNameLst>
+                                      </p:cBhvr>
+                                      <p:tavLst>
+                                        <p:tav tm="0">
+                                          <p:val>
+                                            <p:strVal val="#ppt_x"/>
+                                          </p:val>
+                                        </p:tav>
+                                        <p:tav tm="100000">
+                                          <p:val>
+                                            <p:strVal val="#ppt_x"/>
+                                          </p:val>
+                                        </p:tav>
+                                      </p:tavLst>
+                                    </p:anim>
+                                    <p:anim calcmode="lin" valueType="num">
+                                      <p:cBhvr additive="base">
+                                        <p:cTn id="51" dur="500" fill="hold"/>
+                                        <p:tgtEl>
+                                          <p:spTgt spid="3">
+                                            <p:txEl>
+                                              <p:pRg st="10" end="10"/>
                                             </p:txEl>
                                           </p:spTgt>
                                         </p:tgtEl>
@@ -9625,26 +9178,26 @@
                     </p:cTn>
                   </p:par>
                   <p:par>
-                    <p:cTn id="53" fill="hold">
+                    <p:cTn id="52" fill="hold">
                       <p:stCondLst>
                         <p:cond delay="indefinite"/>
                       </p:stCondLst>
                       <p:childTnLst>
                         <p:par>
-                          <p:cTn id="54" fill="hold">
+                          <p:cTn id="53" fill="hold">
                             <p:stCondLst>
                               <p:cond delay="0"/>
                             </p:stCondLst>
                             <p:childTnLst>
                               <p:par>
-                                <p:cTn id="55" presetID="2" presetClass="entr" presetSubtype="4" fill="hold" grpId="0" nodeType="clickEffect">
+                                <p:cTn id="54" presetID="2" presetClass="entr" presetSubtype="4" fill="hold" grpId="0" nodeType="clickEffect">
                                   <p:stCondLst>
                                     <p:cond delay="0"/>
                                   </p:stCondLst>
                                   <p:childTnLst>
                                     <p:set>
                                       <p:cBhvr>
-                                        <p:cTn id="56" dur="1" fill="hold">
+                                        <p:cTn id="55" dur="1" fill="hold">
                                           <p:stCondLst>
                                             <p:cond delay="0"/>
                                           </p:stCondLst>
@@ -9652,7 +9205,7 @@
                                         <p:tgtEl>
                                           <p:spTgt spid="3">
                                             <p:txEl>
-                                              <p:pRg st="11" end="11"/>
+                                              <p:pRg st="12" end="12"/>
                                             </p:txEl>
                                           </p:spTgt>
                                         </p:tgtEl>
@@ -9666,11 +9219,11 @@
                                     </p:set>
                                     <p:anim calcmode="lin" valueType="num">
                                       <p:cBhvr additive="base">
-                                        <p:cTn id="57" dur="500" fill="hold"/>
+                                        <p:cTn id="56" dur="500" fill="hold"/>
                                         <p:tgtEl>
                                           <p:spTgt spid="3">
                                             <p:txEl>
-                                              <p:pRg st="11" end="11"/>
+                                              <p:pRg st="12" end="12"/>
                                             </p:txEl>
                                           </p:spTgt>
                                         </p:tgtEl>
@@ -9693,13 +9246,86 @@
                                     </p:anim>
                                     <p:anim calcmode="lin" valueType="num">
                                       <p:cBhvr additive="base">
-                                        <p:cTn id="58" dur="500" fill="hold"/>
+                                        <p:cTn id="57" dur="500" fill="hold"/>
                                         <p:tgtEl>
                                           <p:spTgt spid="3">
                                             <p:txEl>
-                                              <p:pRg st="11" end="11"/>
+                                              <p:pRg st="12" end="12"/>
                                             </p:txEl>
                                           </p:spTgt>
+                                        </p:tgtEl>
+                                        <p:attrNameLst>
+                                          <p:attrName>ppt_y</p:attrName>
+                                        </p:attrNameLst>
+                                      </p:cBhvr>
+                                      <p:tavLst>
+                                        <p:tav tm="0">
+                                          <p:val>
+                                            <p:strVal val="1+#ppt_h/2"/>
+                                          </p:val>
+                                        </p:tav>
+                                        <p:tav tm="100000">
+                                          <p:val>
+                                            <p:strVal val="#ppt_y"/>
+                                          </p:val>
+                                        </p:tav>
+                                      </p:tavLst>
+                                    </p:anim>
+                                  </p:childTnLst>
+                                </p:cTn>
+                              </p:par>
+                              <p:par>
+                                <p:cTn id="58" presetID="2" presetClass="entr" presetSubtype="4" fill="hold" nodeType="withEffect">
+                                  <p:stCondLst>
+                                    <p:cond delay="250"/>
+                                  </p:stCondLst>
+                                  <p:childTnLst>
+                                    <p:set>
+                                      <p:cBhvr>
+                                        <p:cTn id="59" dur="1" fill="hold">
+                                          <p:stCondLst>
+                                            <p:cond delay="0"/>
+                                          </p:stCondLst>
+                                        </p:cTn>
+                                        <p:tgtEl>
+                                          <p:spTgt spid="9"/>
+                                        </p:tgtEl>
+                                        <p:attrNameLst>
+                                          <p:attrName>style.visibility</p:attrName>
+                                        </p:attrNameLst>
+                                      </p:cBhvr>
+                                      <p:to>
+                                        <p:strVal val="visible"/>
+                                      </p:to>
+                                    </p:set>
+                                    <p:anim calcmode="lin" valueType="num">
+                                      <p:cBhvr additive="base">
+                                        <p:cTn id="60" dur="500" fill="hold"/>
+                                        <p:tgtEl>
+                                          <p:spTgt spid="9"/>
+                                        </p:tgtEl>
+                                        <p:attrNameLst>
+                                          <p:attrName>ppt_x</p:attrName>
+                                        </p:attrNameLst>
+                                      </p:cBhvr>
+                                      <p:tavLst>
+                                        <p:tav tm="0">
+                                          <p:val>
+                                            <p:strVal val="#ppt_x"/>
+                                          </p:val>
+                                        </p:tav>
+                                        <p:tav tm="100000">
+                                          <p:val>
+                                            <p:strVal val="#ppt_x"/>
+                                          </p:val>
+                                        </p:tav>
+                                      </p:tavLst>
+                                    </p:anim>
+                                    <p:anim calcmode="lin" valueType="num">
+                                      <p:cBhvr additive="base">
+                                        <p:cTn id="61" dur="500" fill="hold"/>
+                                        <p:tgtEl>
+                                          <p:spTgt spid="9"/>
                                         </p:tgtEl>
                                         <p:attrNameLst>
                                           <p:attrName>ppt_y</p:attrName>
@@ -9728,53 +9354,26 @@
                     </p:cTn>
                   </p:par>
                   <p:par>
-                    <p:cTn id="59" fill="hold">
+                    <p:cTn id="62" fill="hold">
                       <p:stCondLst>
                         <p:cond delay="indefinite"/>
                       </p:stCondLst>
                       <p:childTnLst>
                         <p:par>
-                          <p:cTn id="60" fill="hold">
+                          <p:cTn id="63" fill="hold">
                             <p:stCondLst>
                               <p:cond delay="0"/>
                             </p:stCondLst>
                             <p:childTnLst>
                               <p:par>
-                                <p:cTn id="61" presetID="1" presetClass="entr" presetSubtype="0" fill="hold" nodeType="clickEffect">
+                                <p:cTn id="64" presetID="2" presetClass="entr" presetSubtype="2" fill="hold" nodeType="clickEffect">
                                   <p:stCondLst>
                                     <p:cond delay="0"/>
                                   </p:stCondLst>
                                   <p:childTnLst>
                                     <p:set>
                                       <p:cBhvr>
-                                        <p:cTn id="62" dur="1" fill="hold">
-                                          <p:stCondLst>
-                                            <p:cond delay="0"/>
-                                          </p:stCondLst>
-                                        </p:cTn>
-                                        <p:tgtEl>
-                                          <p:spTgt spid="9"/>
-                                        </p:tgtEl>
-                                        <p:attrNameLst>
-                                          <p:attrName>style.visibility</p:attrName>
-                                        </p:attrNameLst>
-                                      </p:cBhvr>
-                                      <p:to>
-                                        <p:strVal val="visible"/>
-                                      </p:to>
-                                    </p:set>
-                                  </p:childTnLst>
-                                </p:cTn>
-                              </p:par>
-                              <p:par>
-                                <p:cTn id="63" presetID="1" presetClass="entr" presetSubtype="0" fill="hold" nodeType="withEffect">
-                                  <p:stCondLst>
-                                    <p:cond delay="0"/>
-                                  </p:stCondLst>
-                                  <p:childTnLst>
-                                    <p:set>
-                                      <p:cBhvr>
-                                        <p:cTn id="64" dur="1" fill="hold">
+                                        <p:cTn id="65" dur="1" fill="hold">
                                           <p:stCondLst>
                                             <p:cond delay="0"/>
                                           </p:stCondLst>
@@ -9790,6 +9389,52 @@
                                         <p:strVal val="visible"/>
                                       </p:to>
                                     </p:set>
+                                    <p:anim calcmode="lin" valueType="num">
+                                      <p:cBhvr additive="base">
+                                        <p:cTn id="66" dur="500" fill="hold"/>
+                                        <p:tgtEl>
+                                          <p:spTgt spid="8"/>
+                                        </p:tgtEl>
+                                        <p:attrNameLst>
+                                          <p:attrName>ppt_x</p:attrName>
+                                        </p:attrNameLst>
+                                      </p:cBhvr>
+                                      <p:tavLst>
+                                        <p:tav tm="0">
+                                          <p:val>
+                                            <p:strVal val="1+#ppt_w/2"/>
+                                          </p:val>
+                                        </p:tav>
+                                        <p:tav tm="100000">
+                                          <p:val>
+                                            <p:strVal val="#ppt_x"/>
+                                          </p:val>
+                                        </p:tav>
+                                      </p:tavLst>
+                                    </p:anim>
+                                    <p:anim calcmode="lin" valueType="num">
+                                      <p:cBhvr additive="base">
+                                        <p:cTn id="67" dur="500" fill="hold"/>
+                                        <p:tgtEl>
+                                          <p:spTgt spid="8"/>
+                                        </p:tgtEl>
+                                        <p:attrNameLst>
+                                          <p:attrName>ppt_y</p:attrName>
+                                        </p:attrNameLst>
+                                      </p:cBhvr>
+                                      <p:tavLst>
+                                        <p:tav tm="0">
+                                          <p:val>
+                                            <p:strVal val="#ppt_y"/>
+                                          </p:val>
+                                        </p:tav>
+                                        <p:tav tm="100000">
+                                          <p:val>
+                                            <p:strVal val="#ppt_y"/>
+                                          </p:val>
+                                        </p:tav>
+                                      </p:tavLst>
+                                    </p:anim>
                                   </p:childTnLst>
                                 </p:cTn>
                               </p:par>
@@ -9800,80 +9445,53 @@
                     </p:cTn>
                   </p:par>
                   <p:par>
-                    <p:cTn id="65" fill="hold">
+                    <p:cTn id="68" fill="hold">
                       <p:stCondLst>
                         <p:cond delay="indefinite"/>
                       </p:stCondLst>
                       <p:childTnLst>
                         <p:par>
-                          <p:cTn id="66" fill="hold">
+                          <p:cTn id="69" fill="hold">
                             <p:stCondLst>
                               <p:cond delay="0"/>
                             </p:stCondLst>
                             <p:childTnLst>
                               <p:par>
-                                <p:cTn id="67" presetID="1" presetClass="entr" presetSubtype="0" fill="hold" nodeType="clickEffect">
+                                <p:cTn id="70" presetID="1" presetClass="exit" presetSubtype="0" fill="hold" nodeType="clickEffect">
                                   <p:stCondLst>
                                     <p:cond delay="0"/>
                                   </p:stCondLst>
                                   <p:childTnLst>
                                     <p:set>
                                       <p:cBhvr>
-                                        <p:cTn id="68" dur="1" fill="hold">
+                                        <p:cTn id="71" dur="1" fill="hold">
                                           <p:stCondLst>
                                             <p:cond delay="0"/>
                                           </p:stCondLst>
                                         </p:cTn>
                                         <p:tgtEl>
-                                          <p:spTgt spid="7"/>
+                                          <p:spTgt spid="8"/>
                                         </p:tgtEl>
                                         <p:attrNameLst>
                                           <p:attrName>style.visibility</p:attrName>
                                         </p:attrNameLst>
                                       </p:cBhvr>
                                       <p:to>
-                                        <p:strVal val="visible"/>
+                                        <p:strVal val="hidden"/>
                                       </p:to>
                                     </p:set>
                                   </p:childTnLst>
                                 </p:cTn>
                               </p:par>
                               <p:par>
-                                <p:cTn id="69" presetID="1" presetClass="entr" presetSubtype="0" fill="hold" nodeType="withEffect">
+                                <p:cTn id="72" presetID="1" presetClass="exit" presetSubtype="0" fill="hold" nodeType="withEffect">
                                   <p:stCondLst>
                                     <p:cond delay="0"/>
                                   </p:stCondLst>
                                   <p:childTnLst>
                                     <p:set>
                                       <p:cBhvr>
-                                        <p:cTn id="70" dur="1" fill="hold">
-                                          <p:stCondLst>
-                                            <p:cond delay="0"/>
-                                          </p:stCondLst>
-                                        </p:cTn>
-                                        <p:tgtEl>
-                                          <p:spTgt spid="4"/>
-                                        </p:tgtEl>
-                                        <p:attrNameLst>
-                                          <p:attrName>style.visibility</p:attrName>
-                                        </p:attrNameLst>
-                                      </p:cBhvr>
-                                      <p:to>
-                                        <p:strVal val="visible"/>
-                                      </p:to>
-                                    </p:set>
-                                  </p:childTnLst>
-                                </p:cTn>
-                              </p:par>
-                              <p:par>
-                                <p:cTn id="71" presetID="1" presetClass="exit" presetSubtype="0" fill="hold" nodeType="withEffect">
-                                  <p:stCondLst>
-                                    <p:cond delay="0"/>
-                                  </p:stCondLst>
-                                  <p:childTnLst>
-                                    <p:set>
-                                      <p:cBhvr>
-                                        <p:cTn id="72" dur="1" fill="hold">
+                                        <p:cTn id="73" dur="1" fill="hold">
                                           <p:stCondLst>
                                             <p:cond delay="0"/>
                                           </p:stCondLst>
@@ -9893,20 +9511,20 @@
                                 </p:cTn>
                               </p:par>
                               <p:par>
-                                <p:cTn id="73" presetID="10" presetClass="entr" presetSubtype="0" fill="hold" nodeType="withEffect">
+                                <p:cTn id="74" presetID="2" presetClass="entr" presetSubtype="2" fill="hold" nodeType="withEffect">
                                   <p:stCondLst>
                                     <p:cond delay="0"/>
                                   </p:stCondLst>
                                   <p:childTnLst>
                                     <p:set>
                                       <p:cBhvr>
-                                        <p:cTn id="74" dur="1" fill="hold">
+                                        <p:cTn id="75" dur="1" fill="hold">
                                           <p:stCondLst>
                                             <p:cond delay="0"/>
                                           </p:stCondLst>
                                         </p:cTn>
                                         <p:tgtEl>
-                                          <p:spTgt spid="8"/>
+                                          <p:spTgt spid="11"/>
                                         </p:tgtEl>
                                         <p:attrNameLst>
                                           <p:attrName>style.visibility</p:attrName>
@@ -9916,14 +9534,125 @@
                                         <p:strVal val="visible"/>
                                       </p:to>
                                     </p:set>
-                                    <p:animEffect transition="in" filter="fade">
+                                    <p:anim calcmode="lin" valueType="num">
+                                      <p:cBhvr additive="base">
+                                        <p:cTn id="76" dur="500" fill="hold"/>
+                                        <p:tgtEl>
+                                          <p:spTgt spid="11"/>
+                                        </p:tgtEl>
+                                        <p:attrNameLst>
+                                          <p:attrName>ppt_x</p:attrName>
+                                        </p:attrNameLst>
+                                      </p:cBhvr>
+                                      <p:tavLst>
+                                        <p:tav tm="0">
+                                          <p:val>
+                                            <p:strVal val="1+#ppt_w/2"/>
+                                          </p:val>
+                                        </p:tav>
+                                        <p:tav tm="100000">
+                                          <p:val>
+                                            <p:strVal val="#ppt_x"/>
+                                          </p:val>
+                                        </p:tav>
+                                      </p:tavLst>
+                                    </p:anim>
+                                    <p:anim calcmode="lin" valueType="num">
+                                      <p:cBhvr additive="base">
+                                        <p:cTn id="77" dur="500" fill="hold"/>
+                                        <p:tgtEl>
+                                          <p:spTgt spid="11"/>
+                                        </p:tgtEl>
+                                        <p:attrNameLst>
+                                          <p:attrName>ppt_y</p:attrName>
+                                        </p:attrNameLst>
+                                      </p:cBhvr>
+                                      <p:tavLst>
+                                        <p:tav tm="0">
+                                          <p:val>
+                                            <p:strVal val="#ppt_y"/>
+                                          </p:val>
+                                        </p:tav>
+                                        <p:tav tm="100000">
+                                          <p:val>
+                                            <p:strVal val="#ppt_y"/>
+                                          </p:val>
+                                        </p:tav>
+                                      </p:tavLst>
+                                    </p:anim>
+                                  </p:childTnLst>
+                                </p:cTn>
+                              </p:par>
+                              <p:par>
+                                <p:cTn id="78" presetID="2" presetClass="entr" presetSubtype="2" fill="hold" nodeType="withEffect">
+                                  <p:stCondLst>
+                                    <p:cond delay="0"/>
+                                  </p:stCondLst>
+                                  <p:childTnLst>
+                                    <p:set>
                                       <p:cBhvr>
-                                        <p:cTn id="75" dur="500"/>
+                                        <p:cTn id="79" dur="1" fill="hold">
+                                          <p:stCondLst>
+                                            <p:cond delay="0"/>
+                                          </p:stCondLst>
+                                        </p:cTn>
                                         <p:tgtEl>
-                                          <p:spTgt spid="8"/>
+                                          <p:spTgt spid="10"/>
                                         </p:tgtEl>
+                                        <p:attrNameLst>
+                                          <p:attrName>style.visibility</p:attrName>
+                                        </p:attrNameLst>
                                       </p:cBhvr>
-                                    </p:animEffect>
+                                      <p:to>
+                                        <p:strVal val="visible"/>
+                                      </p:to>
+                                    </p:set>
+                                    <p:anim calcmode="lin" valueType="num">
+                                      <p:cBhvr additive="base">
+                                        <p:cTn id="80" dur="500" fill="hold"/>
+                                        <p:tgtEl>
+                                          <p:spTgt spid="10"/>
+                                        </p:tgtEl>
+                                        <p:attrNameLst>
+                                          <p:attrName>ppt_x</p:attrName>
+                                        </p:attrNameLst>
+                                      </p:cBhvr>
+                                      <p:tavLst>
+                                        <p:tav tm="0">
+                                          <p:val>
+                                            <p:strVal val="1+#ppt_w/2"/>
+                                          </p:val>
+                                        </p:tav>
+                                        <p:tav tm="100000">
+                                          <p:val>
+                                            <p:strVal val="#ppt_x"/>
+                                          </p:val>
+                                        </p:tav>
+                                      </p:tavLst>
+                                    </p:anim>
+                                    <p:anim calcmode="lin" valueType="num">
+                                      <p:cBhvr additive="base">
+                                        <p:cTn id="81" dur="500" fill="hold"/>
+                                        <p:tgtEl>
+                                          <p:spTgt spid="10"/>
+                                        </p:tgtEl>
+                                        <p:attrNameLst>
+                                          <p:attrName>ppt_y</p:attrName>
+                                        </p:attrNameLst>
+                                      </p:cBhvr>
+                                      <p:tavLst>
+                                        <p:tav tm="0">
+                                          <p:val>
+                                            <p:strVal val="#ppt_y"/>
+                                          </p:val>
+                                        </p:tav>
+                                        <p:tav tm="100000">
+                                          <p:val>
+                                            <p:strVal val="#ppt_y"/>
+                                          </p:val>
+                                        </p:tav>
+                                      </p:tavLst>
+                                    </p:anim>
                                   </p:childTnLst>
                                 </p:cTn>
                               </p:par>

--- a/Current Presentation/Spring 2026.pptx
+++ b/Current Presentation/Spring 2026.pptx
@@ -124,7 +124,7 @@
 <p1510:revInfo xmlns:a="http://schemas.openxmlformats.org/drawingml/2006/main" xmlns:r="http://schemas.openxmlformats.org/officeDocument/2006/relationships" xmlns:p1510="http://schemas.microsoft.com/office/powerpoint/2015/10/main">
   <p1510:revLst>
     <p1510:client id="{6998B00B-2615-DA7F-16DD-BEDBD145F26F}" v="142" dt="2026-06-22T15:26:48.182"/>
-    <p1510:client id="{B3D8BC0C-D2E7-1DB9-11BC-BCF84AD0F7D9}" v="548" dt="2026-06-23T17:24:54.676"/>
+    <p1510:client id="{B3D8BC0C-D2E7-1DB9-11BC-BCF84AD0F7D9}" v="553" dt="2026-06-23T17:27:16.521"/>
   </p1510:revLst>
 </p1510:revInfo>
 </file>
@@ -8188,6 +8188,18 @@
   <p:clrMapOvr>
     <a:masterClrMapping/>
   </p:clrMapOvr>
+  <mc:AlternateContent xmlns:mc="http://schemas.openxmlformats.org/markup-compatibility/2006">
+    <mc:Choice xmlns:p15="http://schemas.microsoft.com/office/powerpoint/2012/main" Requires="p15">
+      <p:transition xmlns:p14="http://schemas.microsoft.com/office/powerpoint/2010/main" spd="slow" p14:dur="2000">
+        <p15:prstTrans prst="fallOver"/>
+      </p:transition>
+    </mc:Choice>
+    <mc:Fallback>
+      <p:transition spd="slow">
+        <p:fade/>
+      </p:transition>
+    </mc:Fallback>
+  </mc:AlternateContent>
   <p:timing>
     <p:tnLst>
       <p:par>
@@ -9926,6 +9938,9 @@
   <p:clrMapOvr>
     <a:masterClrMapping/>
   </p:clrMapOvr>
+  <p:transition spd="slow">
+    <p:cover/>
+  </p:transition>
 </p:sld>
 </file>
 
@@ -10028,6 +10043,9 @@
   <p:clrMapOvr>
     <a:masterClrMapping/>
   </p:clrMapOvr>
+  <p:transition spd="med">
+    <p:pull/>
+  </p:transition>
 </p:sld>
 </file>
 
@@ -10149,6 +10167,18 @@
   <p:clrMapOvr>
     <a:masterClrMapping/>
   </p:clrMapOvr>
+  <mc:AlternateContent xmlns:mc="http://schemas.openxmlformats.org/markup-compatibility/2006">
+    <mc:Choice xmlns:p14="http://schemas.microsoft.com/office/powerpoint/2010/main" Requires="p14">
+      <p:transition p14:dur="100">
+        <p:cut/>
+      </p:transition>
+    </mc:Choice>
+    <mc:Fallback>
+      <p:transition>
+        <p:cut/>
+      </p:transition>
+    </mc:Fallback>
+  </mc:AlternateContent>
 </p:sld>
 </file>
 

--- a/Current Presentation/Spring 2026.pptx
+++ b/Current Presentation/Spring 2026.pptx
@@ -124,7 +124,7 @@
 <p1510:revInfo xmlns:a="http://schemas.openxmlformats.org/drawingml/2006/main" xmlns:r="http://schemas.openxmlformats.org/officeDocument/2006/relationships" xmlns:p1510="http://schemas.microsoft.com/office/powerpoint/2015/10/main">
   <p1510:revLst>
     <p1510:client id="{6998B00B-2615-DA7F-16DD-BEDBD145F26F}" v="142" dt="2026-06-22T15:26:48.182"/>
-    <p1510:client id="{B3D8BC0C-D2E7-1DB9-11BC-BCF84AD0F7D9}" v="553" dt="2026-06-23T17:27:16.521"/>
+    <p1510:client id="{B3D8BC0C-D2E7-1DB9-11BC-BCF84AD0F7D9}" v="606" dt="2026-06-23T17:35:12.308"/>
   </p1510:revLst>
 </p1510:revInfo>
 </file>
@@ -8387,15 +8387,24 @@
                                   </p:childTnLst>
                                 </p:cTn>
                               </p:par>
+                            </p:childTnLst>
+                          </p:cTn>
+                        </p:par>
+                        <p:par>
+                          <p:cTn id="14" fill="hold">
+                            <p:stCondLst>
+                              <p:cond delay="1500"/>
+                            </p:stCondLst>
+                            <p:childTnLst>
                               <p:par>
-                                <p:cTn id="14" presetID="2" presetClass="entr" presetSubtype="4" fill="hold" grpId="0" nodeType="withEffect">
+                                <p:cTn id="15" presetID="2" presetClass="entr" presetSubtype="4" fill="hold" grpId="0" nodeType="afterEffect">
                                   <p:stCondLst>
                                     <p:cond delay="0"/>
                                   </p:stCondLst>
                                   <p:childTnLst>
                                     <p:set>
                                       <p:cBhvr>
-                                        <p:cTn id="15" dur="1" fill="hold">
+                                        <p:cTn id="16" dur="1" fill="hold">
                                           <p:stCondLst>
                                             <p:cond delay="0"/>
                                           </p:stCondLst>
@@ -8417,7 +8426,7 @@
                                     </p:set>
                                     <p:anim calcmode="lin" valueType="num">
                                       <p:cBhvr additive="base">
-                                        <p:cTn id="16" dur="500" fill="hold"/>
+                                        <p:cTn id="17" dur="500" fill="hold"/>
                                         <p:tgtEl>
                                           <p:spTgt spid="3">
                                             <p:txEl>
@@ -8444,7 +8453,7 @@
                                     </p:anim>
                                     <p:anim calcmode="lin" valueType="num">
                                       <p:cBhvr additive="base">
-                                        <p:cTn id="17" dur="500" fill="hold"/>
+                                        <p:cTn id="18" dur="500" fill="hold"/>
                                         <p:tgtEl>
                                           <p:spTgt spid="3">
                                             <p:txEl>
@@ -8473,14 +8482,14 @@
                                 </p:cTn>
                               </p:par>
                               <p:par>
-                                <p:cTn id="18" presetID="2" presetClass="entr" presetSubtype="4" fill="hold" grpId="0" nodeType="withEffect">
+                                <p:cTn id="19" presetID="2" presetClass="entr" presetSubtype="4" fill="hold" grpId="0" nodeType="withEffect">
                                   <p:stCondLst>
                                     <p:cond delay="0"/>
                                   </p:stCondLst>
                                   <p:childTnLst>
                                     <p:set>
                                       <p:cBhvr>
-                                        <p:cTn id="19" dur="1" fill="hold">
+                                        <p:cTn id="20" dur="1" fill="hold">
                                           <p:stCondLst>
                                             <p:cond delay="0"/>
                                           </p:stCondLst>
@@ -8502,7 +8511,7 @@
                                     </p:set>
                                     <p:anim calcmode="lin" valueType="num">
                                       <p:cBhvr additive="base">
-                                        <p:cTn id="20" dur="500" fill="hold"/>
+                                        <p:cTn id="21" dur="500" fill="hold"/>
                                         <p:tgtEl>
                                           <p:spTgt spid="3">
                                             <p:txEl>
@@ -8529,7 +8538,7 @@
                                     </p:anim>
                                     <p:anim calcmode="lin" valueType="num">
                                       <p:cBhvr additive="base">
-                                        <p:cTn id="21" dur="500" fill="hold"/>
+                                        <p:cTn id="22" dur="500" fill="hold"/>
                                         <p:tgtEl>
                                           <p:spTgt spid="3">
                                             <p:txEl>
@@ -8558,14 +8567,14 @@
                                 </p:cTn>
                               </p:par>
                               <p:par>
-                                <p:cTn id="22" presetID="2" presetClass="entr" presetSubtype="4" fill="hold" grpId="0" nodeType="withEffect">
+                                <p:cTn id="23" presetID="2" presetClass="entr" presetSubtype="4" fill="hold" grpId="0" nodeType="withEffect">
                                   <p:stCondLst>
                                     <p:cond delay="0"/>
                                   </p:stCondLst>
                                   <p:childTnLst>
                                     <p:set>
                                       <p:cBhvr>
-                                        <p:cTn id="23" dur="1" fill="hold">
+                                        <p:cTn id="24" dur="1" fill="hold">
                                           <p:stCondLst>
                                             <p:cond delay="0"/>
                                           </p:stCondLst>
@@ -8587,7 +8596,7 @@
                                     </p:set>
                                     <p:anim calcmode="lin" valueType="num">
                                       <p:cBhvr additive="base">
-                                        <p:cTn id="24" dur="500" fill="hold"/>
+                                        <p:cTn id="25" dur="500" fill="hold"/>
                                         <p:tgtEl>
                                           <p:spTgt spid="3">
                                             <p:txEl>
@@ -8614,7 +8623,7 @@
                                     </p:anim>
                                     <p:anim calcmode="lin" valueType="num">
                                       <p:cBhvr additive="base">
-                                        <p:cTn id="25" dur="500" fill="hold"/>
+                                        <p:cTn id="26" dur="500" fill="hold"/>
                                         <p:tgtEl>
                                           <p:spTgt spid="3">
                                             <p:txEl>
@@ -8643,14 +8652,14 @@
                                 </p:cTn>
                               </p:par>
                               <p:par>
-                                <p:cTn id="26" presetID="2" presetClass="entr" presetSubtype="4" fill="hold" grpId="0" nodeType="withEffect">
+                                <p:cTn id="27" presetID="2" presetClass="entr" presetSubtype="4" fill="hold" grpId="0" nodeType="withEffect">
                                   <p:stCondLst>
                                     <p:cond delay="0"/>
                                   </p:stCondLst>
                                   <p:childTnLst>
                                     <p:set>
                                       <p:cBhvr>
-                                        <p:cTn id="27" dur="1" fill="hold">
+                                        <p:cTn id="28" dur="1" fill="hold">
                                           <p:stCondLst>
                                             <p:cond delay="0"/>
                                           </p:stCondLst>
@@ -8672,7 +8681,7 @@
                                     </p:set>
                                     <p:anim calcmode="lin" valueType="num">
                                       <p:cBhvr additive="base">
-                                        <p:cTn id="28" dur="500" fill="hold"/>
+                                        <p:cTn id="29" dur="500" fill="hold"/>
                                         <p:tgtEl>
                                           <p:spTgt spid="3">
                                             <p:txEl>
@@ -8699,7 +8708,7 @@
                                     </p:anim>
                                     <p:anim calcmode="lin" valueType="num">
                                       <p:cBhvr additive="base">
-                                        <p:cTn id="29" dur="500" fill="hold"/>
+                                        <p:cTn id="30" dur="500" fill="hold"/>
                                         <p:tgtEl>
                                           <p:spTgt spid="3">
                                             <p:txEl>
@@ -8728,14 +8737,14 @@
                                 </p:cTn>
                               </p:par>
                               <p:par>
-                                <p:cTn id="30" presetID="2" presetClass="entr" presetSubtype="4" fill="hold" grpId="0" nodeType="withEffect">
+                                <p:cTn id="31" presetID="2" presetClass="entr" presetSubtype="4" fill="hold" grpId="0" nodeType="withEffect">
                                   <p:stCondLst>
                                     <p:cond delay="0"/>
                                   </p:stCondLst>
                                   <p:childTnLst>
                                     <p:set>
                                       <p:cBhvr>
-                                        <p:cTn id="31" dur="1" fill="hold">
+                                        <p:cTn id="32" dur="1" fill="hold">
                                           <p:stCondLst>
                                             <p:cond delay="0"/>
                                           </p:stCondLst>
@@ -8757,7 +8766,7 @@
                                     </p:set>
                                     <p:anim calcmode="lin" valueType="num">
                                       <p:cBhvr additive="base">
-                                        <p:cTn id="32" dur="500" fill="hold"/>
+                                        <p:cTn id="33" dur="500" fill="hold"/>
                                         <p:tgtEl>
                                           <p:spTgt spid="3">
                                             <p:txEl>
@@ -8784,7 +8793,7 @@
                                     </p:anim>
                                     <p:anim calcmode="lin" valueType="num">
                                       <p:cBhvr additive="base">
-                                        <p:cTn id="33" dur="500" fill="hold"/>
+                                        <p:cTn id="34" dur="500" fill="hold"/>
                                         <p:tgtEl>
                                           <p:spTgt spid="3">
                                             <p:txEl>
@@ -8813,14 +8822,14 @@
                                 </p:cTn>
                               </p:par>
                               <p:par>
-                                <p:cTn id="34" presetID="2" presetClass="entr" presetSubtype="4" fill="hold" grpId="0" nodeType="withEffect">
+                                <p:cTn id="35" presetID="2" presetClass="entr" presetSubtype="4" fill="hold" grpId="0" nodeType="withEffect">
                                   <p:stCondLst>
                                     <p:cond delay="0"/>
                                   </p:stCondLst>
                                   <p:childTnLst>
                                     <p:set>
                                       <p:cBhvr>
-                                        <p:cTn id="35" dur="1" fill="hold">
+                                        <p:cTn id="36" dur="1" fill="hold">
                                           <p:stCondLst>
                                             <p:cond delay="0"/>
                                           </p:stCondLst>
@@ -8842,7 +8851,7 @@
                                     </p:set>
                                     <p:anim calcmode="lin" valueType="num">
                                       <p:cBhvr additive="base">
-                                        <p:cTn id="36" dur="500" fill="hold"/>
+                                        <p:cTn id="37" dur="500" fill="hold"/>
                                         <p:tgtEl>
                                           <p:spTgt spid="3">
                                             <p:txEl>
@@ -8869,7 +8878,7 @@
                                     </p:anim>
                                     <p:anim calcmode="lin" valueType="num">
                                       <p:cBhvr additive="base">
-                                        <p:cTn id="37" dur="500" fill="hold"/>
+                                        <p:cTn id="38" dur="500" fill="hold"/>
                                         <p:tgtEl>
                                           <p:spTgt spid="3">
                                             <p:txEl>
@@ -8898,14 +8907,14 @@
                                 </p:cTn>
                               </p:par>
                               <p:par>
-                                <p:cTn id="38" presetID="1" presetClass="exit" presetSubtype="0" fill="hold" grpId="0" nodeType="withEffect">
+                                <p:cTn id="39" presetID="1" presetClass="exit" presetSubtype="0" fill="hold" grpId="0" nodeType="withEffect">
                                   <p:stCondLst>
                                     <p:cond delay="0"/>
                                   </p:stCondLst>
                                   <p:childTnLst>
                                     <p:set>
                                       <p:cBhvr>
-                                        <p:cTn id="39" dur="1" fill="hold">
+                                        <p:cTn id="40" dur="1" fill="hold">
                                           <p:stCondLst>
                                             <p:cond delay="0"/>
                                           </p:stCondLst>
@@ -8929,14 +8938,14 @@
                                 </p:cTn>
                               </p:par>
                               <p:par>
-                                <p:cTn id="40" presetID="2" presetClass="entr" presetSubtype="4" fill="hold" grpId="0" nodeType="withEffect">
+                                <p:cTn id="41" presetID="2" presetClass="entr" presetSubtype="4" fill="hold" grpId="0" nodeType="withEffect">
                                   <p:stCondLst>
                                     <p:cond delay="0"/>
                                   </p:stCondLst>
                                   <p:childTnLst>
                                     <p:set>
                                       <p:cBhvr>
-                                        <p:cTn id="41" dur="1" fill="hold">
+                                        <p:cTn id="42" dur="1" fill="hold">
                                           <p:stCondLst>
                                             <p:cond delay="0"/>
                                           </p:stCondLst>
@@ -8958,7 +8967,7 @@
                                     </p:set>
                                     <p:anim calcmode="lin" valueType="num">
                                       <p:cBhvr additive="base">
-                                        <p:cTn id="42" dur="500" fill="hold"/>
+                                        <p:cTn id="43" dur="500" fill="hold"/>
                                         <p:tgtEl>
                                           <p:spTgt spid="3">
                                             <p:txEl>
@@ -8985,7 +8994,7 @@
                                     </p:anim>
                                     <p:anim calcmode="lin" valueType="num">
                                       <p:cBhvr additive="base">
-                                        <p:cTn id="43" dur="500" fill="hold"/>
+                                        <p:cTn id="44" dur="500" fill="hold"/>
                                         <p:tgtEl>
                                           <p:spTgt spid="3">
                                             <p:txEl>
@@ -9014,14 +9023,14 @@
                                 </p:cTn>
                               </p:par>
                               <p:par>
-                                <p:cTn id="44" presetID="2" presetClass="entr" presetSubtype="4" fill="hold" grpId="0" nodeType="withEffect">
+                                <p:cTn id="45" presetID="2" presetClass="entr" presetSubtype="4" fill="hold" grpId="0" nodeType="withEffect">
                                   <p:stCondLst>
                                     <p:cond delay="0"/>
                                   </p:stCondLst>
                                   <p:childTnLst>
                                     <p:set>
                                       <p:cBhvr>
-                                        <p:cTn id="45" dur="1" fill="hold">
+                                        <p:cTn id="46" dur="1" fill="hold">
                                           <p:stCondLst>
                                             <p:cond delay="0"/>
                                           </p:stCondLst>
@@ -9043,7 +9052,7 @@
                                     </p:set>
                                     <p:anim calcmode="lin" valueType="num">
                                       <p:cBhvr additive="base">
-                                        <p:cTn id="46" dur="500" fill="hold"/>
+                                        <p:cTn id="47" dur="500" fill="hold"/>
                                         <p:tgtEl>
                                           <p:spTgt spid="3">
                                             <p:txEl>
@@ -9070,7 +9079,7 @@
                                     </p:anim>
                                     <p:anim calcmode="lin" valueType="num">
                                       <p:cBhvr additive="base">
-                                        <p:cTn id="47" dur="500" fill="hold"/>
+                                        <p:cTn id="48" dur="500" fill="hold"/>
                                         <p:tgtEl>
                                           <p:spTgt spid="3">
                                             <p:txEl>
@@ -9099,14 +9108,14 @@
                                 </p:cTn>
                               </p:par>
                               <p:par>
-                                <p:cTn id="48" presetID="2" presetClass="entr" presetSubtype="4" fill="hold" grpId="0" nodeType="withEffect">
+                                <p:cTn id="49" presetID="2" presetClass="entr" presetSubtype="4" fill="hold" grpId="0" nodeType="withEffect">
                                   <p:stCondLst>
                                     <p:cond delay="0"/>
                                   </p:stCondLst>
                                   <p:childTnLst>
                                     <p:set>
                                       <p:cBhvr>
-                                        <p:cTn id="49" dur="1" fill="hold">
+                                        <p:cTn id="50" dur="1" fill="hold">
                                           <p:stCondLst>
                                             <p:cond delay="0"/>
                                           </p:stCondLst>
@@ -9128,7 +9137,7 @@
                                     </p:set>
                                     <p:anim calcmode="lin" valueType="num">
                                       <p:cBhvr additive="base">
-                                        <p:cTn id="50" dur="500" fill="hold"/>
+                                        <p:cTn id="51" dur="500" fill="hold"/>
                                         <p:tgtEl>
                                           <p:spTgt spid="3">
                                             <p:txEl>
@@ -9155,7 +9164,7 @@
                                     </p:anim>
                                     <p:anim calcmode="lin" valueType="num">
                                       <p:cBhvr additive="base">
-                                        <p:cTn id="51" dur="500" fill="hold"/>
+                                        <p:cTn id="52" dur="500" fill="hold"/>
                                         <p:tgtEl>
                                           <p:spTgt spid="3">
                                             <p:txEl>
@@ -9183,33 +9192,15 @@
                                   </p:childTnLst>
                                 </p:cTn>
                               </p:par>
-                            </p:childTnLst>
-                          </p:cTn>
-                        </p:par>
-                      </p:childTnLst>
-                    </p:cTn>
-                  </p:par>
-                  <p:par>
-                    <p:cTn id="52" fill="hold">
-                      <p:stCondLst>
-                        <p:cond delay="indefinite"/>
-                      </p:stCondLst>
-                      <p:childTnLst>
-                        <p:par>
-                          <p:cTn id="53" fill="hold">
-                            <p:stCondLst>
-                              <p:cond delay="0"/>
-                            </p:stCondLst>
-                            <p:childTnLst>
                               <p:par>
-                                <p:cTn id="54" presetID="2" presetClass="entr" presetSubtype="4" fill="hold" grpId="0" nodeType="clickEffect">
+                                <p:cTn id="53" presetID="2" presetClass="entr" presetSubtype="4" fill="hold" grpId="0" nodeType="withEffect">
                                   <p:stCondLst>
                                     <p:cond delay="0"/>
                                   </p:stCondLst>
                                   <p:childTnLst>
                                     <p:set>
                                       <p:cBhvr>
-                                        <p:cTn id="55" dur="1" fill="hold">
+                                        <p:cTn id="54" dur="1" fill="hold">
                                           <p:stCondLst>
                                             <p:cond delay="0"/>
                                           </p:stCondLst>
@@ -9231,7 +9222,7 @@
                                     </p:set>
                                     <p:anim calcmode="lin" valueType="num">
                                       <p:cBhvr additive="base">
-                                        <p:cTn id="56" dur="500" fill="hold"/>
+                                        <p:cTn id="55" dur="500" fill="hold"/>
                                         <p:tgtEl>
                                           <p:spTgt spid="3">
                                             <p:txEl>
@@ -9258,7 +9249,7 @@
                                     </p:anim>
                                     <p:anim calcmode="lin" valueType="num">
                                       <p:cBhvr additive="base">
-                                        <p:cTn id="57" dur="500" fill="hold"/>
+                                        <p:cTn id="56" dur="500" fill="hold"/>
                                         <p:tgtEl>
                                           <p:spTgt spid="3">
                                             <p:txEl>
@@ -9287,14 +9278,14 @@
                                 </p:cTn>
                               </p:par>
                               <p:par>
-                                <p:cTn id="58" presetID="2" presetClass="entr" presetSubtype="4" fill="hold" nodeType="withEffect">
+                                <p:cTn id="57" presetID="2" presetClass="entr" presetSubtype="4" fill="hold" nodeType="withEffect">
                                   <p:stCondLst>
                                     <p:cond delay="250"/>
                                   </p:stCondLst>
                                   <p:childTnLst>
                                     <p:set>
                                       <p:cBhvr>
-                                        <p:cTn id="59" dur="1" fill="hold">
+                                        <p:cTn id="58" dur="1" fill="hold">
                                           <p:stCondLst>
                                             <p:cond delay="0"/>
                                           </p:stCondLst>
@@ -9312,7 +9303,7 @@
                                     </p:set>
                                     <p:anim calcmode="lin" valueType="num">
                                       <p:cBhvr additive="base">
-                                        <p:cTn id="60" dur="500" fill="hold"/>
+                                        <p:cTn id="59" dur="500" fill="hold"/>
                                         <p:tgtEl>
                                           <p:spTgt spid="9"/>
                                         </p:tgtEl>
@@ -9335,7 +9326,7 @@
                                     </p:anim>
                                     <p:anim calcmode="lin" valueType="num">
                                       <p:cBhvr additive="base">
-                                        <p:cTn id="61" dur="500" fill="hold"/>
+                                        <p:cTn id="60" dur="500" fill="hold"/>
                                         <p:tgtEl>
                                           <p:spTgt spid="9"/>
                                         </p:tgtEl>
@@ -9366,26 +9357,26 @@
                     </p:cTn>
                   </p:par>
                   <p:par>
-                    <p:cTn id="62" fill="hold">
+                    <p:cTn id="61" fill="hold">
                       <p:stCondLst>
                         <p:cond delay="indefinite"/>
                       </p:stCondLst>
                       <p:childTnLst>
                         <p:par>
-                          <p:cTn id="63" fill="hold">
+                          <p:cTn id="62" fill="hold">
                             <p:stCondLst>
                               <p:cond delay="0"/>
                             </p:stCondLst>
                             <p:childTnLst>
                               <p:par>
-                                <p:cTn id="64" presetID="2" presetClass="entr" presetSubtype="2" fill="hold" nodeType="clickEffect">
+                                <p:cTn id="63" presetID="2" presetClass="entr" presetSubtype="2" fill="hold" nodeType="clickEffect">
                                   <p:stCondLst>
                                     <p:cond delay="0"/>
                                   </p:stCondLst>
                                   <p:childTnLst>
                                     <p:set>
                                       <p:cBhvr>
-                                        <p:cTn id="65" dur="1" fill="hold">
+                                        <p:cTn id="64" dur="1" fill="hold">
                                           <p:stCondLst>
                                             <p:cond delay="0"/>
                                           </p:stCondLst>
@@ -9403,7 +9394,7 @@
                                     </p:set>
                                     <p:anim calcmode="lin" valueType="num">
                                       <p:cBhvr additive="base">
-                                        <p:cTn id="66" dur="500" fill="hold"/>
+                                        <p:cTn id="65" dur="500" fill="hold"/>
                                         <p:tgtEl>
                                           <p:spTgt spid="8"/>
                                         </p:tgtEl>
@@ -9426,7 +9417,7 @@
                                     </p:anim>
                                     <p:anim calcmode="lin" valueType="num">
                                       <p:cBhvr additive="base">
-                                        <p:cTn id="67" dur="500" fill="hold"/>
+                                        <p:cTn id="66" dur="500" fill="hold"/>
                                         <p:tgtEl>
                                           <p:spTgt spid="8"/>
                                         </p:tgtEl>
@@ -9457,26 +9448,26 @@
                     </p:cTn>
                   </p:par>
                   <p:par>
-                    <p:cTn id="68" fill="hold">
+                    <p:cTn id="67" fill="hold">
                       <p:stCondLst>
                         <p:cond delay="indefinite"/>
                       </p:stCondLst>
                       <p:childTnLst>
                         <p:par>
-                          <p:cTn id="69" fill="hold">
+                          <p:cTn id="68" fill="hold">
                             <p:stCondLst>
                               <p:cond delay="0"/>
                             </p:stCondLst>
                             <p:childTnLst>
                               <p:par>
-                                <p:cTn id="70" presetID="1" presetClass="exit" presetSubtype="0" fill="hold" nodeType="clickEffect">
+                                <p:cTn id="69" presetID="1" presetClass="exit" presetSubtype="0" fill="hold" nodeType="clickEffect">
                                   <p:stCondLst>
                                     <p:cond delay="0"/>
                                   </p:stCondLst>
                                   <p:childTnLst>
                                     <p:set>
                                       <p:cBhvr>
-                                        <p:cTn id="71" dur="1" fill="hold">
+                                        <p:cTn id="70" dur="1" fill="hold">
                                           <p:stCondLst>
                                             <p:cond delay="0"/>
                                           </p:stCondLst>
@@ -9496,14 +9487,14 @@
                                 </p:cTn>
                               </p:par>
                               <p:par>
-                                <p:cTn id="72" presetID="1" presetClass="exit" presetSubtype="0" fill="hold" nodeType="withEffect">
+                                <p:cTn id="71" presetID="1" presetClass="exit" presetSubtype="0" fill="hold" nodeType="withEffect">
                                   <p:stCondLst>
                                     <p:cond delay="0"/>
                                   </p:stCondLst>
                                   <p:childTnLst>
                                     <p:set>
                                       <p:cBhvr>
-                                        <p:cTn id="73" dur="1" fill="hold">
+                                        <p:cTn id="72" dur="1" fill="hold">
                                           <p:stCondLst>
                                             <p:cond delay="0"/>
                                           </p:stCondLst>
@@ -9523,14 +9514,14 @@
                                 </p:cTn>
                               </p:par>
                               <p:par>
-                                <p:cTn id="74" presetID="2" presetClass="entr" presetSubtype="2" fill="hold" nodeType="withEffect">
+                                <p:cTn id="73" presetID="2" presetClass="entr" presetSubtype="2" fill="hold" nodeType="withEffect">
                                   <p:stCondLst>
                                     <p:cond delay="0"/>
                                   </p:stCondLst>
                                   <p:childTnLst>
                                     <p:set>
                                       <p:cBhvr>
-                                        <p:cTn id="75" dur="1" fill="hold">
+                                        <p:cTn id="74" dur="1" fill="hold">
                                           <p:stCondLst>
                                             <p:cond delay="0"/>
                                           </p:stCondLst>
@@ -9548,7 +9539,7 @@
                                     </p:set>
                                     <p:anim calcmode="lin" valueType="num">
                                       <p:cBhvr additive="base">
-                                        <p:cTn id="76" dur="500" fill="hold"/>
+                                        <p:cTn id="75" dur="500" fill="hold"/>
                                         <p:tgtEl>
                                           <p:spTgt spid="11"/>
                                         </p:tgtEl>
@@ -9571,7 +9562,7 @@
                                     </p:anim>
                                     <p:anim calcmode="lin" valueType="num">
                                       <p:cBhvr additive="base">
-                                        <p:cTn id="77" dur="500" fill="hold"/>
+                                        <p:cTn id="76" dur="500" fill="hold"/>
                                         <p:tgtEl>
                                           <p:spTgt spid="11"/>
                                         </p:tgtEl>
@@ -9596,14 +9587,14 @@
                                 </p:cTn>
                               </p:par>
                               <p:par>
-                                <p:cTn id="78" presetID="2" presetClass="entr" presetSubtype="2" fill="hold" nodeType="withEffect">
+                                <p:cTn id="77" presetID="2" presetClass="entr" presetSubtype="2" fill="hold" nodeType="withEffect">
                                   <p:stCondLst>
                                     <p:cond delay="0"/>
                                   </p:stCondLst>
                                   <p:childTnLst>
                                     <p:set>
                                       <p:cBhvr>
-                                        <p:cTn id="79" dur="1" fill="hold">
+                                        <p:cTn id="78" dur="1" fill="hold">
                                           <p:stCondLst>
                                             <p:cond delay="0"/>
                                           </p:stCondLst>
@@ -9621,7 +9612,7 @@
                                     </p:set>
                                     <p:anim calcmode="lin" valueType="num">
                                       <p:cBhvr additive="base">
-                                        <p:cTn id="80" dur="500" fill="hold"/>
+                                        <p:cTn id="79" dur="500" fill="hold"/>
                                         <p:tgtEl>
                                           <p:spTgt spid="10"/>
                                         </p:tgtEl>
@@ -9644,7 +9635,7 @@
                                     </p:anim>
                                     <p:anim calcmode="lin" valueType="num">
                                       <p:cBhvr additive="base">
-                                        <p:cTn id="81" dur="500" fill="hold"/>
+                                        <p:cTn id="80" dur="500" fill="hold"/>
                                         <p:tgtEl>
                                           <p:spTgt spid="10"/>
                                         </p:tgtEl>
@@ -9890,7 +9881,7 @@
         </p:blipFill>
         <p:spPr>
           <a:xfrm>
-            <a:off x="4421414" y="179614"/>
+            <a:off x="4348843" y="179614"/>
             <a:ext cx="3770086" cy="910772"/>
           </a:xfrm>
           <a:prstGeom prst="rect">
@@ -9920,7 +9911,7 @@
         </p:blipFill>
         <p:spPr>
           <a:xfrm>
-            <a:off x="1587" y="176893"/>
+            <a:off x="-70984" y="176893"/>
             <a:ext cx="4242255" cy="1808843"/>
           </a:xfrm>
           <a:prstGeom prst="rect">
@@ -9941,6 +9932,790 @@
   <p:transition spd="slow">
     <p:cover/>
   </p:transition>
+  <p:timing>
+    <p:tnLst>
+      <p:par>
+        <p:cTn id="1" dur="indefinite" restart="never" nodeType="tmRoot">
+          <p:childTnLst>
+            <p:seq concurrent="1" nextAc="seek">
+              <p:cTn id="2" dur="indefinite" nodeType="mainSeq">
+                <p:childTnLst>
+                  <p:par>
+                    <p:cTn id="3" fill="hold">
+                      <p:stCondLst>
+                        <p:cond delay="indefinite"/>
+                        <p:cond evt="onBegin" delay="0">
+                          <p:tn val="2"/>
+                        </p:cond>
+                      </p:stCondLst>
+                      <p:childTnLst>
+                        <p:par>
+                          <p:cTn id="4" fill="hold">
+                            <p:stCondLst>
+                              <p:cond delay="0"/>
+                            </p:stCondLst>
+                            <p:childTnLst>
+                              <p:par>
+                                <p:cTn id="5" presetID="2" presetClass="entr" presetSubtype="4" fill="hold" grpId="0" nodeType="afterEffect">
+                                  <p:stCondLst>
+                                    <p:cond delay="0"/>
+                                  </p:stCondLst>
+                                  <p:childTnLst>
+                                    <p:set>
+                                      <p:cBhvr>
+                                        <p:cTn id="6" dur="1" fill="hold">
+                                          <p:stCondLst>
+                                            <p:cond delay="0"/>
+                                          </p:stCondLst>
+                                        </p:cTn>
+                                        <p:tgtEl>
+                                          <p:spTgt spid="3">
+                                            <p:txEl>
+                                              <p:pRg st="0" end="0"/>
+                                            </p:txEl>
+                                          </p:spTgt>
+                                        </p:tgtEl>
+                                        <p:attrNameLst>
+                                          <p:attrName>style.visibility</p:attrName>
+                                        </p:attrNameLst>
+                                      </p:cBhvr>
+                                      <p:to>
+                                        <p:strVal val="visible"/>
+                                      </p:to>
+                                    </p:set>
+                                    <p:anim calcmode="lin" valueType="num">
+                                      <p:cBhvr additive="base">
+                                        <p:cTn id="7" dur="500" fill="hold"/>
+                                        <p:tgtEl>
+                                          <p:spTgt spid="3">
+                                            <p:txEl>
+                                              <p:pRg st="0" end="0"/>
+                                            </p:txEl>
+                                          </p:spTgt>
+                                        </p:tgtEl>
+                                        <p:attrNameLst>
+                                          <p:attrName>ppt_x</p:attrName>
+                                        </p:attrNameLst>
+                                      </p:cBhvr>
+                                      <p:tavLst>
+                                        <p:tav tm="0">
+                                          <p:val>
+                                            <p:strVal val="#ppt_x"/>
+                                          </p:val>
+                                        </p:tav>
+                                        <p:tav tm="100000">
+                                          <p:val>
+                                            <p:strVal val="#ppt_x"/>
+                                          </p:val>
+                                        </p:tav>
+                                      </p:tavLst>
+                                    </p:anim>
+                                    <p:anim calcmode="lin" valueType="num">
+                                      <p:cBhvr additive="base">
+                                        <p:cTn id="8" dur="500" fill="hold"/>
+                                        <p:tgtEl>
+                                          <p:spTgt spid="3">
+                                            <p:txEl>
+                                              <p:pRg st="0" end="0"/>
+                                            </p:txEl>
+                                          </p:spTgt>
+                                        </p:tgtEl>
+                                        <p:attrNameLst>
+                                          <p:attrName>ppt_y</p:attrName>
+                                        </p:attrNameLst>
+                                      </p:cBhvr>
+                                      <p:tavLst>
+                                        <p:tav tm="0">
+                                          <p:val>
+                                            <p:strVal val="1+#ppt_h/2"/>
+                                          </p:val>
+                                        </p:tav>
+                                        <p:tav tm="100000">
+                                          <p:val>
+                                            <p:strVal val="#ppt_y"/>
+                                          </p:val>
+                                        </p:tav>
+                                      </p:tavLst>
+                                    </p:anim>
+                                  </p:childTnLst>
+                                </p:cTn>
+                              </p:par>
+                            </p:childTnLst>
+                          </p:cTn>
+                        </p:par>
+                      </p:childTnLst>
+                    </p:cTn>
+                  </p:par>
+                  <p:par>
+                    <p:cTn id="9" fill="hold">
+                      <p:stCondLst>
+                        <p:cond delay="indefinite"/>
+                      </p:stCondLst>
+                      <p:childTnLst>
+                        <p:par>
+                          <p:cTn id="10" fill="hold">
+                            <p:stCondLst>
+                              <p:cond delay="0"/>
+                            </p:stCondLst>
+                            <p:childTnLst>
+                              <p:par>
+                                <p:cTn id="11" presetID="2" presetClass="entr" presetSubtype="4" fill="hold" grpId="0" nodeType="clickEffect">
+                                  <p:stCondLst>
+                                    <p:cond delay="0"/>
+                                  </p:stCondLst>
+                                  <p:childTnLst>
+                                    <p:set>
+                                      <p:cBhvr>
+                                        <p:cTn id="12" dur="1" fill="hold">
+                                          <p:stCondLst>
+                                            <p:cond delay="0"/>
+                                          </p:stCondLst>
+                                        </p:cTn>
+                                        <p:tgtEl>
+                                          <p:spTgt spid="3">
+                                            <p:txEl>
+                                              <p:pRg st="1" end="1"/>
+                                            </p:txEl>
+                                          </p:spTgt>
+                                        </p:tgtEl>
+                                        <p:attrNameLst>
+                                          <p:attrName>style.visibility</p:attrName>
+                                        </p:attrNameLst>
+                                      </p:cBhvr>
+                                      <p:to>
+                                        <p:strVal val="visible"/>
+                                      </p:to>
+                                    </p:set>
+                                    <p:anim calcmode="lin" valueType="num">
+                                      <p:cBhvr additive="base">
+                                        <p:cTn id="13" dur="500" fill="hold"/>
+                                        <p:tgtEl>
+                                          <p:spTgt spid="3">
+                                            <p:txEl>
+                                              <p:pRg st="1" end="1"/>
+                                            </p:txEl>
+                                          </p:spTgt>
+                                        </p:tgtEl>
+                                        <p:attrNameLst>
+                                          <p:attrName>ppt_x</p:attrName>
+                                        </p:attrNameLst>
+                                      </p:cBhvr>
+                                      <p:tavLst>
+                                        <p:tav tm="0">
+                                          <p:val>
+                                            <p:strVal val="#ppt_x"/>
+                                          </p:val>
+                                        </p:tav>
+                                        <p:tav tm="100000">
+                                          <p:val>
+                                            <p:strVal val="#ppt_x"/>
+                                          </p:val>
+                                        </p:tav>
+                                      </p:tavLst>
+                                    </p:anim>
+                                    <p:anim calcmode="lin" valueType="num">
+                                      <p:cBhvr additive="base">
+                                        <p:cTn id="14" dur="500" fill="hold"/>
+                                        <p:tgtEl>
+                                          <p:spTgt spid="3">
+                                            <p:txEl>
+                                              <p:pRg st="1" end="1"/>
+                                            </p:txEl>
+                                          </p:spTgt>
+                                        </p:tgtEl>
+                                        <p:attrNameLst>
+                                          <p:attrName>ppt_y</p:attrName>
+                                        </p:attrNameLst>
+                                      </p:cBhvr>
+                                      <p:tavLst>
+                                        <p:tav tm="0">
+                                          <p:val>
+                                            <p:strVal val="1+#ppt_h/2"/>
+                                          </p:val>
+                                        </p:tav>
+                                        <p:tav tm="100000">
+                                          <p:val>
+                                            <p:strVal val="#ppt_y"/>
+                                          </p:val>
+                                        </p:tav>
+                                      </p:tavLst>
+                                    </p:anim>
+                                  </p:childTnLst>
+                                </p:cTn>
+                              </p:par>
+                              <p:par>
+                                <p:cTn id="15" presetID="2" presetClass="entr" presetSubtype="4" fill="hold" grpId="0" nodeType="withEffect">
+                                  <p:stCondLst>
+                                    <p:cond delay="0"/>
+                                  </p:stCondLst>
+                                  <p:childTnLst>
+                                    <p:set>
+                                      <p:cBhvr>
+                                        <p:cTn id="16" dur="1" fill="hold">
+                                          <p:stCondLst>
+                                            <p:cond delay="0"/>
+                                          </p:stCondLst>
+                                        </p:cTn>
+                                        <p:tgtEl>
+                                          <p:spTgt spid="3">
+                                            <p:txEl>
+                                              <p:pRg st="2" end="2"/>
+                                            </p:txEl>
+                                          </p:spTgt>
+                                        </p:tgtEl>
+                                        <p:attrNameLst>
+                                          <p:attrName>style.visibility</p:attrName>
+                                        </p:attrNameLst>
+                                      </p:cBhvr>
+                                      <p:to>
+                                        <p:strVal val="visible"/>
+                                      </p:to>
+                                    </p:set>
+                                    <p:anim calcmode="lin" valueType="num">
+                                      <p:cBhvr additive="base">
+                                        <p:cTn id="17" dur="500" fill="hold"/>
+                                        <p:tgtEl>
+                                          <p:spTgt spid="3">
+                                            <p:txEl>
+                                              <p:pRg st="2" end="2"/>
+                                            </p:txEl>
+                                          </p:spTgt>
+                                        </p:tgtEl>
+                                        <p:attrNameLst>
+                                          <p:attrName>ppt_x</p:attrName>
+                                        </p:attrNameLst>
+                                      </p:cBhvr>
+                                      <p:tavLst>
+                                        <p:tav tm="0">
+                                          <p:val>
+                                            <p:strVal val="#ppt_x"/>
+                                          </p:val>
+                                        </p:tav>
+                                        <p:tav tm="100000">
+                                          <p:val>
+                                            <p:strVal val="#ppt_x"/>
+                                          </p:val>
+                                        </p:tav>
+                                      </p:tavLst>
+                                    </p:anim>
+                                    <p:anim calcmode="lin" valueType="num">
+                                      <p:cBhvr additive="base">
+                                        <p:cTn id="18" dur="500" fill="hold"/>
+                                        <p:tgtEl>
+                                          <p:spTgt spid="3">
+                                            <p:txEl>
+                                              <p:pRg st="2" end="2"/>
+                                            </p:txEl>
+                                          </p:spTgt>
+                                        </p:tgtEl>
+                                        <p:attrNameLst>
+                                          <p:attrName>ppt_y</p:attrName>
+                                        </p:attrNameLst>
+                                      </p:cBhvr>
+                                      <p:tavLst>
+                                        <p:tav tm="0">
+                                          <p:val>
+                                            <p:strVal val="1+#ppt_h/2"/>
+                                          </p:val>
+                                        </p:tav>
+                                        <p:tav tm="100000">
+                                          <p:val>
+                                            <p:strVal val="#ppt_y"/>
+                                          </p:val>
+                                        </p:tav>
+                                      </p:tavLst>
+                                    </p:anim>
+                                  </p:childTnLst>
+                                </p:cTn>
+                              </p:par>
+                              <p:par>
+                                <p:cTn id="19" presetID="2" presetClass="entr" presetSubtype="4" fill="hold" grpId="0" nodeType="withEffect">
+                                  <p:stCondLst>
+                                    <p:cond delay="0"/>
+                                  </p:stCondLst>
+                                  <p:childTnLst>
+                                    <p:set>
+                                      <p:cBhvr>
+                                        <p:cTn id="20" dur="1" fill="hold">
+                                          <p:stCondLst>
+                                            <p:cond delay="0"/>
+                                          </p:stCondLst>
+                                        </p:cTn>
+                                        <p:tgtEl>
+                                          <p:spTgt spid="3">
+                                            <p:txEl>
+                                              <p:pRg st="3" end="3"/>
+                                            </p:txEl>
+                                          </p:spTgt>
+                                        </p:tgtEl>
+                                        <p:attrNameLst>
+                                          <p:attrName>style.visibility</p:attrName>
+                                        </p:attrNameLst>
+                                      </p:cBhvr>
+                                      <p:to>
+                                        <p:strVal val="visible"/>
+                                      </p:to>
+                                    </p:set>
+                                    <p:anim calcmode="lin" valueType="num">
+                                      <p:cBhvr additive="base">
+                                        <p:cTn id="21" dur="500" fill="hold"/>
+                                        <p:tgtEl>
+                                          <p:spTgt spid="3">
+                                            <p:txEl>
+                                              <p:pRg st="3" end="3"/>
+                                            </p:txEl>
+                                          </p:spTgt>
+                                        </p:tgtEl>
+                                        <p:attrNameLst>
+                                          <p:attrName>ppt_x</p:attrName>
+                                        </p:attrNameLst>
+                                      </p:cBhvr>
+                                      <p:tavLst>
+                                        <p:tav tm="0">
+                                          <p:val>
+                                            <p:strVal val="#ppt_x"/>
+                                          </p:val>
+                                        </p:tav>
+                                        <p:tav tm="100000">
+                                          <p:val>
+                                            <p:strVal val="#ppt_x"/>
+                                          </p:val>
+                                        </p:tav>
+                                      </p:tavLst>
+                                    </p:anim>
+                                    <p:anim calcmode="lin" valueType="num">
+                                      <p:cBhvr additive="base">
+                                        <p:cTn id="22" dur="500" fill="hold"/>
+                                        <p:tgtEl>
+                                          <p:spTgt spid="3">
+                                            <p:txEl>
+                                              <p:pRg st="3" end="3"/>
+                                            </p:txEl>
+                                          </p:spTgt>
+                                        </p:tgtEl>
+                                        <p:attrNameLst>
+                                          <p:attrName>ppt_y</p:attrName>
+                                        </p:attrNameLst>
+                                      </p:cBhvr>
+                                      <p:tavLst>
+                                        <p:tav tm="0">
+                                          <p:val>
+                                            <p:strVal val="1+#ppt_h/2"/>
+                                          </p:val>
+                                        </p:tav>
+                                        <p:tav tm="100000">
+                                          <p:val>
+                                            <p:strVal val="#ppt_y"/>
+                                          </p:val>
+                                        </p:tav>
+                                      </p:tavLst>
+                                    </p:anim>
+                                  </p:childTnLst>
+                                </p:cTn>
+                              </p:par>
+                            </p:childTnLst>
+                          </p:cTn>
+                        </p:par>
+                        <p:par>
+                          <p:cTn id="23" fill="hold">
+                            <p:stCondLst>
+                              <p:cond delay="500"/>
+                            </p:stCondLst>
+                            <p:childTnLst>
+                              <p:par>
+                                <p:cTn id="24" presetID="2" presetClass="entr" presetSubtype="4" fill="hold" grpId="0" nodeType="afterEffect">
+                                  <p:stCondLst>
+                                    <p:cond delay="0"/>
+                                  </p:stCondLst>
+                                  <p:childTnLst>
+                                    <p:set>
+                                      <p:cBhvr>
+                                        <p:cTn id="25" dur="1" fill="hold">
+                                          <p:stCondLst>
+                                            <p:cond delay="0"/>
+                                          </p:stCondLst>
+                                        </p:cTn>
+                                        <p:tgtEl>
+                                          <p:spTgt spid="3">
+                                            <p:txEl>
+                                              <p:pRg st="4" end="4"/>
+                                            </p:txEl>
+                                          </p:spTgt>
+                                        </p:tgtEl>
+                                        <p:attrNameLst>
+                                          <p:attrName>style.visibility</p:attrName>
+                                        </p:attrNameLst>
+                                      </p:cBhvr>
+                                      <p:to>
+                                        <p:strVal val="visible"/>
+                                      </p:to>
+                                    </p:set>
+                                    <p:anim calcmode="lin" valueType="num">
+                                      <p:cBhvr additive="base">
+                                        <p:cTn id="26" dur="500" fill="hold"/>
+                                        <p:tgtEl>
+                                          <p:spTgt spid="3">
+                                            <p:txEl>
+                                              <p:pRg st="4" end="4"/>
+                                            </p:txEl>
+                                          </p:spTgt>
+                                        </p:tgtEl>
+                                        <p:attrNameLst>
+                                          <p:attrName>ppt_x</p:attrName>
+                                        </p:attrNameLst>
+                                      </p:cBhvr>
+                                      <p:tavLst>
+                                        <p:tav tm="0">
+                                          <p:val>
+                                            <p:strVal val="#ppt_x"/>
+                                          </p:val>
+                                        </p:tav>
+                                        <p:tav tm="100000">
+                                          <p:val>
+                                            <p:strVal val="#ppt_x"/>
+                                          </p:val>
+                                        </p:tav>
+                                      </p:tavLst>
+                                    </p:anim>
+                                    <p:anim calcmode="lin" valueType="num">
+                                      <p:cBhvr additive="base">
+                                        <p:cTn id="27" dur="500" fill="hold"/>
+                                        <p:tgtEl>
+                                          <p:spTgt spid="3">
+                                            <p:txEl>
+                                              <p:pRg st="4" end="4"/>
+                                            </p:txEl>
+                                          </p:spTgt>
+                                        </p:tgtEl>
+                                        <p:attrNameLst>
+                                          <p:attrName>ppt_y</p:attrName>
+                                        </p:attrNameLst>
+                                      </p:cBhvr>
+                                      <p:tavLst>
+                                        <p:tav tm="0">
+                                          <p:val>
+                                            <p:strVal val="1+#ppt_h/2"/>
+                                          </p:val>
+                                        </p:tav>
+                                        <p:tav tm="100000">
+                                          <p:val>
+                                            <p:strVal val="#ppt_y"/>
+                                          </p:val>
+                                        </p:tav>
+                                      </p:tavLst>
+                                    </p:anim>
+                                  </p:childTnLst>
+                                </p:cTn>
+                              </p:par>
+                              <p:par>
+                                <p:cTn id="28" presetID="2" presetClass="entr" presetSubtype="4" fill="hold" grpId="0" nodeType="withEffect">
+                                  <p:stCondLst>
+                                    <p:cond delay="0"/>
+                                  </p:stCondLst>
+                                  <p:childTnLst>
+                                    <p:set>
+                                      <p:cBhvr>
+                                        <p:cTn id="29" dur="1" fill="hold">
+                                          <p:stCondLst>
+                                            <p:cond delay="0"/>
+                                          </p:stCondLst>
+                                        </p:cTn>
+                                        <p:tgtEl>
+                                          <p:spTgt spid="3">
+                                            <p:txEl>
+                                              <p:pRg st="5" end="5"/>
+                                            </p:txEl>
+                                          </p:spTgt>
+                                        </p:tgtEl>
+                                        <p:attrNameLst>
+                                          <p:attrName>style.visibility</p:attrName>
+                                        </p:attrNameLst>
+                                      </p:cBhvr>
+                                      <p:to>
+                                        <p:strVal val="visible"/>
+                                      </p:to>
+                                    </p:set>
+                                    <p:anim calcmode="lin" valueType="num">
+                                      <p:cBhvr additive="base">
+                                        <p:cTn id="30" dur="500" fill="hold"/>
+                                        <p:tgtEl>
+                                          <p:spTgt spid="3">
+                                            <p:txEl>
+                                              <p:pRg st="5" end="5"/>
+                                            </p:txEl>
+                                          </p:spTgt>
+                                        </p:tgtEl>
+                                        <p:attrNameLst>
+                                          <p:attrName>ppt_x</p:attrName>
+                                        </p:attrNameLst>
+                                      </p:cBhvr>
+                                      <p:tavLst>
+                                        <p:tav tm="0">
+                                          <p:val>
+                                            <p:strVal val="#ppt_x"/>
+                                          </p:val>
+                                        </p:tav>
+                                        <p:tav tm="100000">
+                                          <p:val>
+                                            <p:strVal val="#ppt_x"/>
+                                          </p:val>
+                                        </p:tav>
+                                      </p:tavLst>
+                                    </p:anim>
+                                    <p:anim calcmode="lin" valueType="num">
+                                      <p:cBhvr additive="base">
+                                        <p:cTn id="31" dur="500" fill="hold"/>
+                                        <p:tgtEl>
+                                          <p:spTgt spid="3">
+                                            <p:txEl>
+                                              <p:pRg st="5" end="5"/>
+                                            </p:txEl>
+                                          </p:spTgt>
+                                        </p:tgtEl>
+                                        <p:attrNameLst>
+                                          <p:attrName>ppt_y</p:attrName>
+                                        </p:attrNameLst>
+                                      </p:cBhvr>
+                                      <p:tavLst>
+                                        <p:tav tm="0">
+                                          <p:val>
+                                            <p:strVal val="1+#ppt_h/2"/>
+                                          </p:val>
+                                        </p:tav>
+                                        <p:tav tm="100000">
+                                          <p:val>
+                                            <p:strVal val="#ppt_y"/>
+                                          </p:val>
+                                        </p:tav>
+                                      </p:tavLst>
+                                    </p:anim>
+                                  </p:childTnLst>
+                                </p:cTn>
+                              </p:par>
+                            </p:childTnLst>
+                          </p:cTn>
+                        </p:par>
+                        <p:par>
+                          <p:cTn id="32" fill="hold">
+                            <p:stCondLst>
+                              <p:cond delay="1000"/>
+                            </p:stCondLst>
+                            <p:childTnLst>
+                              <p:par>
+                                <p:cTn id="33" presetID="2" presetClass="entr" presetSubtype="4" fill="hold" grpId="0" nodeType="afterEffect">
+                                  <p:stCondLst>
+                                    <p:cond delay="0"/>
+                                  </p:stCondLst>
+                                  <p:childTnLst>
+                                    <p:set>
+                                      <p:cBhvr>
+                                        <p:cTn id="34" dur="1" fill="hold">
+                                          <p:stCondLst>
+                                            <p:cond delay="0"/>
+                                          </p:stCondLst>
+                                        </p:cTn>
+                                        <p:tgtEl>
+                                          <p:spTgt spid="3">
+                                            <p:txEl>
+                                              <p:pRg st="6" end="6"/>
+                                            </p:txEl>
+                                          </p:spTgt>
+                                        </p:tgtEl>
+                                        <p:attrNameLst>
+                                          <p:attrName>style.visibility</p:attrName>
+                                        </p:attrNameLst>
+                                      </p:cBhvr>
+                                      <p:to>
+                                        <p:strVal val="visible"/>
+                                      </p:to>
+                                    </p:set>
+                                    <p:anim calcmode="lin" valueType="num">
+                                      <p:cBhvr additive="base">
+                                        <p:cTn id="35" dur="500" fill="hold"/>
+                                        <p:tgtEl>
+                                          <p:spTgt spid="3">
+                                            <p:txEl>
+                                              <p:pRg st="6" end="6"/>
+                                            </p:txEl>
+                                          </p:spTgt>
+                                        </p:tgtEl>
+                                        <p:attrNameLst>
+                                          <p:attrName>ppt_x</p:attrName>
+                                        </p:attrNameLst>
+                                      </p:cBhvr>
+                                      <p:tavLst>
+                                        <p:tav tm="0">
+                                          <p:val>
+                                            <p:strVal val="#ppt_x"/>
+                                          </p:val>
+                                        </p:tav>
+                                        <p:tav tm="100000">
+                                          <p:val>
+                                            <p:strVal val="#ppt_x"/>
+                                          </p:val>
+                                        </p:tav>
+                                      </p:tavLst>
+                                    </p:anim>
+                                    <p:anim calcmode="lin" valueType="num">
+                                      <p:cBhvr additive="base">
+                                        <p:cTn id="36" dur="500" fill="hold"/>
+                                        <p:tgtEl>
+                                          <p:spTgt spid="3">
+                                            <p:txEl>
+                                              <p:pRg st="6" end="6"/>
+                                            </p:txEl>
+                                          </p:spTgt>
+                                        </p:tgtEl>
+                                        <p:attrNameLst>
+                                          <p:attrName>ppt_y</p:attrName>
+                                        </p:attrNameLst>
+                                      </p:cBhvr>
+                                      <p:tavLst>
+                                        <p:tav tm="0">
+                                          <p:val>
+                                            <p:strVal val="1+#ppt_h/2"/>
+                                          </p:val>
+                                        </p:tav>
+                                        <p:tav tm="100000">
+                                          <p:val>
+                                            <p:strVal val="#ppt_y"/>
+                                          </p:val>
+                                        </p:tav>
+                                      </p:tavLst>
+                                    </p:anim>
+                                  </p:childTnLst>
+                                </p:cTn>
+                              </p:par>
+                            </p:childTnLst>
+                          </p:cTn>
+                        </p:par>
+                      </p:childTnLst>
+                    </p:cTn>
+                  </p:par>
+                  <p:par>
+                    <p:cTn id="37" fill="hold">
+                      <p:stCondLst>
+                        <p:cond delay="indefinite"/>
+                      </p:stCondLst>
+                      <p:childTnLst>
+                        <p:par>
+                          <p:cTn id="38" fill="hold">
+                            <p:stCondLst>
+                              <p:cond delay="0"/>
+                            </p:stCondLst>
+                            <p:childTnLst>
+                              <p:par>
+                                <p:cTn id="39" presetID="1" presetClass="exit" presetSubtype="0" fill="hold" nodeType="clickEffect">
+                                  <p:stCondLst>
+                                    <p:cond delay="0"/>
+                                  </p:stCondLst>
+                                  <p:childTnLst>
+                                    <p:set>
+                                      <p:cBhvr>
+                                        <p:cTn id="40" dur="1" fill="hold">
+                                          <p:stCondLst>
+                                            <p:cond delay="0"/>
+                                          </p:stCondLst>
+                                        </p:cTn>
+                                        <p:tgtEl>
+                                          <p:spTgt spid="7"/>
+                                        </p:tgtEl>
+                                        <p:attrNameLst>
+                                          <p:attrName>style.visibility</p:attrName>
+                                        </p:attrNameLst>
+                                      </p:cBhvr>
+                                      <p:to>
+                                        <p:strVal val="hidden"/>
+                                      </p:to>
+                                    </p:set>
+                                  </p:childTnLst>
+                                </p:cTn>
+                              </p:par>
+                              <p:par>
+                                <p:cTn id="41" presetID="1" presetClass="exit" presetSubtype="0" fill="hold" nodeType="withEffect">
+                                  <p:stCondLst>
+                                    <p:cond delay="0"/>
+                                  </p:stCondLst>
+                                  <p:childTnLst>
+                                    <p:set>
+                                      <p:cBhvr>
+                                        <p:cTn id="42" dur="1" fill="hold">
+                                          <p:stCondLst>
+                                            <p:cond delay="0"/>
+                                          </p:stCondLst>
+                                        </p:cTn>
+                                        <p:tgtEl>
+                                          <p:spTgt spid="5"/>
+                                        </p:tgtEl>
+                                        <p:attrNameLst>
+                                          <p:attrName>style.visibility</p:attrName>
+                                        </p:attrNameLst>
+                                      </p:cBhvr>
+                                      <p:to>
+                                        <p:strVal val="hidden"/>
+                                      </p:to>
+                                    </p:set>
+                                  </p:childTnLst>
+                                </p:cTn>
+                              </p:par>
+                              <p:par>
+                                <p:cTn id="43" presetID="1" presetClass="entr" presetSubtype="0" fill="hold" nodeType="withEffect">
+                                  <p:stCondLst>
+                                    <p:cond delay="0"/>
+                                  </p:stCondLst>
+                                  <p:childTnLst>
+                                    <p:set>
+                                      <p:cBhvr>
+                                        <p:cTn id="44" dur="1" fill="hold">
+                                          <p:stCondLst>
+                                            <p:cond delay="0"/>
+                                          </p:stCondLst>
+                                        </p:cTn>
+                                        <p:tgtEl>
+                                          <p:spTgt spid="4"/>
+                                        </p:tgtEl>
+                                        <p:attrNameLst>
+                                          <p:attrName>style.visibility</p:attrName>
+                                        </p:attrNameLst>
+                                      </p:cBhvr>
+                                      <p:to>
+                                        <p:strVal val="visible"/>
+                                      </p:to>
+                                    </p:set>
+                                  </p:childTnLst>
+                                </p:cTn>
+                              </p:par>
+                            </p:childTnLst>
+                          </p:cTn>
+                        </p:par>
+                      </p:childTnLst>
+                    </p:cTn>
+                  </p:par>
+                </p:childTnLst>
+              </p:cTn>
+              <p:prevCondLst>
+                <p:cond evt="onPrev" delay="0">
+                  <p:tgtEl>
+                    <p:sldTgt/>
+                  </p:tgtEl>
+                </p:cond>
+              </p:prevCondLst>
+              <p:nextCondLst>
+                <p:cond evt="onNext" delay="0">
+                  <p:tgtEl>
+                    <p:sldTgt/>
+                  </p:tgtEl>
+                </p:cond>
+              </p:nextCondLst>
+            </p:seq>
+          </p:childTnLst>
+        </p:cTn>
+      </p:par>
+    </p:tnLst>
+    <p:bldLst>
+      <p:bldP spid="3" grpId="0" build="p"/>
+    </p:bldLst>
+  </p:timing>
 </p:sld>
 </file>
 
@@ -10046,6 +10821,216 @@
   <p:transition spd="med">
     <p:pull/>
   </p:transition>
+  <p:timing>
+    <p:tnLst>
+      <p:par>
+        <p:cTn id="1" dur="indefinite" restart="never" nodeType="tmRoot">
+          <p:childTnLst>
+            <p:seq concurrent="1" nextAc="seek">
+              <p:cTn id="2" dur="indefinite" nodeType="mainSeq">
+                <p:childTnLst>
+                  <p:par>
+                    <p:cTn id="3" fill="hold">
+                      <p:stCondLst>
+                        <p:cond delay="indefinite"/>
+                      </p:stCondLst>
+                      <p:childTnLst>
+                        <p:par>
+                          <p:cTn id="4" fill="hold">
+                            <p:stCondLst>
+                              <p:cond delay="0"/>
+                            </p:stCondLst>
+                            <p:childTnLst>
+                              <p:par>
+                                <p:cTn id="5" presetID="2" presetClass="entr" presetSubtype="4" fill="hold" grpId="0" nodeType="clickEffect">
+                                  <p:stCondLst>
+                                    <p:cond delay="0"/>
+                                  </p:stCondLst>
+                                  <p:childTnLst>
+                                    <p:set>
+                                      <p:cBhvr>
+                                        <p:cTn id="6" dur="1" fill="hold">
+                                          <p:stCondLst>
+                                            <p:cond delay="0"/>
+                                          </p:stCondLst>
+                                        </p:cTn>
+                                        <p:tgtEl>
+                                          <p:spTgt spid="2"/>
+                                        </p:tgtEl>
+                                        <p:attrNameLst>
+                                          <p:attrName>style.visibility</p:attrName>
+                                        </p:attrNameLst>
+                                      </p:cBhvr>
+                                      <p:to>
+                                        <p:strVal val="visible"/>
+                                      </p:to>
+                                    </p:set>
+                                    <p:anim calcmode="lin" valueType="num">
+                                      <p:cBhvr additive="base">
+                                        <p:cTn id="7" dur="500" fill="hold"/>
+                                        <p:tgtEl>
+                                          <p:spTgt spid="2"/>
+                                        </p:tgtEl>
+                                        <p:attrNameLst>
+                                          <p:attrName>ppt_x</p:attrName>
+                                        </p:attrNameLst>
+                                      </p:cBhvr>
+                                      <p:tavLst>
+                                        <p:tav tm="0">
+                                          <p:val>
+                                            <p:strVal val="#ppt_x"/>
+                                          </p:val>
+                                        </p:tav>
+                                        <p:tav tm="100000">
+                                          <p:val>
+                                            <p:strVal val="#ppt_x"/>
+                                          </p:val>
+                                        </p:tav>
+                                      </p:tavLst>
+                                    </p:anim>
+                                    <p:anim calcmode="lin" valueType="num">
+                                      <p:cBhvr additive="base">
+                                        <p:cTn id="8" dur="500" fill="hold"/>
+                                        <p:tgtEl>
+                                          <p:spTgt spid="2"/>
+                                        </p:tgtEl>
+                                        <p:attrNameLst>
+                                          <p:attrName>ppt_y</p:attrName>
+                                        </p:attrNameLst>
+                                      </p:cBhvr>
+                                      <p:tavLst>
+                                        <p:tav tm="0">
+                                          <p:val>
+                                            <p:strVal val="1+#ppt_h/2"/>
+                                          </p:val>
+                                        </p:tav>
+                                        <p:tav tm="100000">
+                                          <p:val>
+                                            <p:strVal val="#ppt_y"/>
+                                          </p:val>
+                                        </p:tav>
+                                      </p:tavLst>
+                                    </p:anim>
+                                  </p:childTnLst>
+                                </p:cTn>
+                              </p:par>
+                              <p:par>
+                                <p:cTn id="9" presetID="2" presetClass="entr" presetSubtype="4" fill="hold" grpId="0" nodeType="withEffect">
+                                  <p:stCondLst>
+                                    <p:cond delay="0"/>
+                                  </p:stCondLst>
+                                  <p:childTnLst>
+                                    <p:set>
+                                      <p:cBhvr>
+                                        <p:cTn id="10" dur="1" fill="hold">
+                                          <p:stCondLst>
+                                            <p:cond delay="0"/>
+                                          </p:stCondLst>
+                                        </p:cTn>
+                                        <p:tgtEl>
+                                          <p:spTgt spid="3">
+                                            <p:txEl>
+                                              <p:pRg st="0" end="0"/>
+                                            </p:txEl>
+                                          </p:spTgt>
+                                        </p:tgtEl>
+                                        <p:attrNameLst>
+                                          <p:attrName>style.visibility</p:attrName>
+                                        </p:attrNameLst>
+                                      </p:cBhvr>
+                                      <p:to>
+                                        <p:strVal val="visible"/>
+                                      </p:to>
+                                    </p:set>
+                                    <p:anim calcmode="lin" valueType="num">
+                                      <p:cBhvr additive="base">
+                                        <p:cTn id="11" dur="500" fill="hold"/>
+                                        <p:tgtEl>
+                                          <p:spTgt spid="3">
+                                            <p:txEl>
+                                              <p:pRg st="0" end="0"/>
+                                            </p:txEl>
+                                          </p:spTgt>
+                                        </p:tgtEl>
+                                        <p:attrNameLst>
+                                          <p:attrName>ppt_x</p:attrName>
+                                        </p:attrNameLst>
+                                      </p:cBhvr>
+                                      <p:tavLst>
+                                        <p:tav tm="0">
+                                          <p:val>
+                                            <p:strVal val="#ppt_x"/>
+                                          </p:val>
+                                        </p:tav>
+                                        <p:tav tm="100000">
+                                          <p:val>
+                                            <p:strVal val="#ppt_x"/>
+                                          </p:val>
+                                        </p:tav>
+                                      </p:tavLst>
+                                    </p:anim>
+                                    <p:anim calcmode="lin" valueType="num">
+                                      <p:cBhvr additive="base">
+                                        <p:cTn id="12" dur="500" fill="hold"/>
+                                        <p:tgtEl>
+                                          <p:spTgt spid="3">
+                                            <p:txEl>
+                                              <p:pRg st="0" end="0"/>
+                                            </p:txEl>
+                                          </p:spTgt>
+                                        </p:tgtEl>
+                                        <p:attrNameLst>
+                                          <p:attrName>ppt_y</p:attrName>
+                                        </p:attrNameLst>
+                                      </p:cBhvr>
+                                      <p:tavLst>
+                                        <p:tav tm="0">
+                                          <p:val>
+                                            <p:strVal val="1+#ppt_h/2"/>
+                                          </p:val>
+                                        </p:tav>
+                                        <p:tav tm="100000">
+                                          <p:val>
+                                            <p:strVal val="#ppt_y"/>
+                                          </p:val>
+                                        </p:tav>
+                                      </p:tavLst>
+                                    </p:anim>
+                                  </p:childTnLst>
+                                </p:cTn>
+                              </p:par>
+                            </p:childTnLst>
+                          </p:cTn>
+                        </p:par>
+                      </p:childTnLst>
+                    </p:cTn>
+                  </p:par>
+                </p:childTnLst>
+              </p:cTn>
+              <p:prevCondLst>
+                <p:cond evt="onPrev" delay="0">
+                  <p:tgtEl>
+                    <p:sldTgt/>
+                  </p:tgtEl>
+                </p:cond>
+              </p:prevCondLst>
+              <p:nextCondLst>
+                <p:cond evt="onNext" delay="0">
+                  <p:tgtEl>
+                    <p:sldTgt/>
+                  </p:tgtEl>
+                </p:cond>
+              </p:nextCondLst>
+            </p:seq>
+          </p:childTnLst>
+        </p:cTn>
+      </p:par>
+    </p:tnLst>
+    <p:bldLst>
+      <p:bldP spid="2" grpId="0"/>
+      <p:bldP spid="3" grpId="0" build="p"/>
+    </p:bldLst>
+  </p:timing>
 </p:sld>
 </file>
 
@@ -10179,6 +11164,413 @@
       </p:transition>
     </mc:Fallback>
   </mc:AlternateContent>
+  <p:timing>
+    <p:tnLst>
+      <p:par>
+        <p:cTn id="1" dur="indefinite" restart="never" nodeType="tmRoot">
+          <p:childTnLst>
+            <p:seq concurrent="1" nextAc="seek">
+              <p:cTn id="2" dur="indefinite" nodeType="mainSeq">
+                <p:childTnLst>
+                  <p:par>
+                    <p:cTn id="3" fill="hold">
+                      <p:stCondLst>
+                        <p:cond delay="indefinite"/>
+                      </p:stCondLst>
+                      <p:childTnLst>
+                        <p:par>
+                          <p:cTn id="4" fill="hold">
+                            <p:stCondLst>
+                              <p:cond delay="0"/>
+                            </p:stCondLst>
+                            <p:childTnLst>
+                              <p:par>
+                                <p:cTn id="5" presetID="2" presetClass="entr" presetSubtype="4" fill="hold" grpId="0" nodeType="clickEffect">
+                                  <p:stCondLst>
+                                    <p:cond delay="0"/>
+                                  </p:stCondLst>
+                                  <p:childTnLst>
+                                    <p:set>
+                                      <p:cBhvr>
+                                        <p:cTn id="6" dur="1" fill="hold">
+                                          <p:stCondLst>
+                                            <p:cond delay="0"/>
+                                          </p:stCondLst>
+                                        </p:cTn>
+                                        <p:tgtEl>
+                                          <p:spTgt spid="2"/>
+                                        </p:tgtEl>
+                                        <p:attrNameLst>
+                                          <p:attrName>style.visibility</p:attrName>
+                                        </p:attrNameLst>
+                                      </p:cBhvr>
+                                      <p:to>
+                                        <p:strVal val="visible"/>
+                                      </p:to>
+                                    </p:set>
+                                    <p:anim calcmode="lin" valueType="num">
+                                      <p:cBhvr additive="base">
+                                        <p:cTn id="7" dur="500" fill="hold"/>
+                                        <p:tgtEl>
+                                          <p:spTgt spid="2"/>
+                                        </p:tgtEl>
+                                        <p:attrNameLst>
+                                          <p:attrName>ppt_x</p:attrName>
+                                        </p:attrNameLst>
+                                      </p:cBhvr>
+                                      <p:tavLst>
+                                        <p:tav tm="0">
+                                          <p:val>
+                                            <p:strVal val="#ppt_x"/>
+                                          </p:val>
+                                        </p:tav>
+                                        <p:tav tm="100000">
+                                          <p:val>
+                                            <p:strVal val="#ppt_x"/>
+                                          </p:val>
+                                        </p:tav>
+                                      </p:tavLst>
+                                    </p:anim>
+                                    <p:anim calcmode="lin" valueType="num">
+                                      <p:cBhvr additive="base">
+                                        <p:cTn id="8" dur="500" fill="hold"/>
+                                        <p:tgtEl>
+                                          <p:spTgt spid="2"/>
+                                        </p:tgtEl>
+                                        <p:attrNameLst>
+                                          <p:attrName>ppt_y</p:attrName>
+                                        </p:attrNameLst>
+                                      </p:cBhvr>
+                                      <p:tavLst>
+                                        <p:tav tm="0">
+                                          <p:val>
+                                            <p:strVal val="1+#ppt_h/2"/>
+                                          </p:val>
+                                        </p:tav>
+                                        <p:tav tm="100000">
+                                          <p:val>
+                                            <p:strVal val="#ppt_y"/>
+                                          </p:val>
+                                        </p:tav>
+                                      </p:tavLst>
+                                    </p:anim>
+                                  </p:childTnLst>
+                                </p:cTn>
+                              </p:par>
+                            </p:childTnLst>
+                          </p:cTn>
+                        </p:par>
+                        <p:par>
+                          <p:cTn id="9" fill="hold">
+                            <p:stCondLst>
+                              <p:cond delay="500"/>
+                            </p:stCondLst>
+                            <p:childTnLst>
+                              <p:par>
+                                <p:cTn id="10" presetID="2" presetClass="entr" presetSubtype="4" fill="hold" grpId="0" nodeType="afterEffect">
+                                  <p:stCondLst>
+                                    <p:cond delay="0"/>
+                                  </p:stCondLst>
+                                  <p:childTnLst>
+                                    <p:set>
+                                      <p:cBhvr>
+                                        <p:cTn id="11" dur="1" fill="hold">
+                                          <p:stCondLst>
+                                            <p:cond delay="0"/>
+                                          </p:stCondLst>
+                                        </p:cTn>
+                                        <p:tgtEl>
+                                          <p:spTgt spid="3">
+                                            <p:txEl>
+                                              <p:pRg st="0" end="0"/>
+                                            </p:txEl>
+                                          </p:spTgt>
+                                        </p:tgtEl>
+                                        <p:attrNameLst>
+                                          <p:attrName>style.visibility</p:attrName>
+                                        </p:attrNameLst>
+                                      </p:cBhvr>
+                                      <p:to>
+                                        <p:strVal val="visible"/>
+                                      </p:to>
+                                    </p:set>
+                                    <p:anim calcmode="lin" valueType="num">
+                                      <p:cBhvr additive="base">
+                                        <p:cTn id="12" dur="500" fill="hold"/>
+                                        <p:tgtEl>
+                                          <p:spTgt spid="3">
+                                            <p:txEl>
+                                              <p:pRg st="0" end="0"/>
+                                            </p:txEl>
+                                          </p:spTgt>
+                                        </p:tgtEl>
+                                        <p:attrNameLst>
+                                          <p:attrName>ppt_x</p:attrName>
+                                        </p:attrNameLst>
+                                      </p:cBhvr>
+                                      <p:tavLst>
+                                        <p:tav tm="0">
+                                          <p:val>
+                                            <p:strVal val="#ppt_x"/>
+                                          </p:val>
+                                        </p:tav>
+                                        <p:tav tm="100000">
+                                          <p:val>
+                                            <p:strVal val="#ppt_x"/>
+                                          </p:val>
+                                        </p:tav>
+                                      </p:tavLst>
+                                    </p:anim>
+                                    <p:anim calcmode="lin" valueType="num">
+                                      <p:cBhvr additive="base">
+                                        <p:cTn id="13" dur="500" fill="hold"/>
+                                        <p:tgtEl>
+                                          <p:spTgt spid="3">
+                                            <p:txEl>
+                                              <p:pRg st="0" end="0"/>
+                                            </p:txEl>
+                                          </p:spTgt>
+                                        </p:tgtEl>
+                                        <p:attrNameLst>
+                                          <p:attrName>ppt_y</p:attrName>
+                                        </p:attrNameLst>
+                                      </p:cBhvr>
+                                      <p:tavLst>
+                                        <p:tav tm="0">
+                                          <p:val>
+                                            <p:strVal val="1+#ppt_h/2"/>
+                                          </p:val>
+                                        </p:tav>
+                                        <p:tav tm="100000">
+                                          <p:val>
+                                            <p:strVal val="#ppt_y"/>
+                                          </p:val>
+                                        </p:tav>
+                                      </p:tavLst>
+                                    </p:anim>
+                                  </p:childTnLst>
+                                </p:cTn>
+                              </p:par>
+                            </p:childTnLst>
+                          </p:cTn>
+                        </p:par>
+                        <p:par>
+                          <p:cTn id="14" fill="hold">
+                            <p:stCondLst>
+                              <p:cond delay="1000"/>
+                            </p:stCondLst>
+                            <p:childTnLst>
+                              <p:par>
+                                <p:cTn id="15" presetID="2" presetClass="entr" presetSubtype="4" fill="hold" grpId="0" nodeType="afterEffect">
+                                  <p:stCondLst>
+                                    <p:cond delay="0"/>
+                                  </p:stCondLst>
+                                  <p:childTnLst>
+                                    <p:set>
+                                      <p:cBhvr>
+                                        <p:cTn id="16" dur="1" fill="hold">
+                                          <p:stCondLst>
+                                            <p:cond delay="0"/>
+                                          </p:stCondLst>
+                                        </p:cTn>
+                                        <p:tgtEl>
+                                          <p:spTgt spid="3">
+                                            <p:txEl>
+                                              <p:pRg st="2" end="2"/>
+                                            </p:txEl>
+                                          </p:spTgt>
+                                        </p:tgtEl>
+                                        <p:attrNameLst>
+                                          <p:attrName>style.visibility</p:attrName>
+                                        </p:attrNameLst>
+                                      </p:cBhvr>
+                                      <p:to>
+                                        <p:strVal val="visible"/>
+                                      </p:to>
+                                    </p:set>
+                                    <p:anim calcmode="lin" valueType="num">
+                                      <p:cBhvr additive="base">
+                                        <p:cTn id="17" dur="500" fill="hold"/>
+                                        <p:tgtEl>
+                                          <p:spTgt spid="3">
+                                            <p:txEl>
+                                              <p:pRg st="2" end="2"/>
+                                            </p:txEl>
+                                          </p:spTgt>
+                                        </p:tgtEl>
+                                        <p:attrNameLst>
+                                          <p:attrName>ppt_x</p:attrName>
+                                        </p:attrNameLst>
+                                      </p:cBhvr>
+                                      <p:tavLst>
+                                        <p:tav tm="0">
+                                          <p:val>
+                                            <p:strVal val="#ppt_x"/>
+                                          </p:val>
+                                        </p:tav>
+                                        <p:tav tm="100000">
+                                          <p:val>
+                                            <p:strVal val="#ppt_x"/>
+                                          </p:val>
+                                        </p:tav>
+                                      </p:tavLst>
+                                    </p:anim>
+                                    <p:anim calcmode="lin" valueType="num">
+                                      <p:cBhvr additive="base">
+                                        <p:cTn id="18" dur="500" fill="hold"/>
+                                        <p:tgtEl>
+                                          <p:spTgt spid="3">
+                                            <p:txEl>
+                                              <p:pRg st="2" end="2"/>
+                                            </p:txEl>
+                                          </p:spTgt>
+                                        </p:tgtEl>
+                                        <p:attrNameLst>
+                                          <p:attrName>ppt_y</p:attrName>
+                                        </p:attrNameLst>
+                                      </p:cBhvr>
+                                      <p:tavLst>
+                                        <p:tav tm="0">
+                                          <p:val>
+                                            <p:strVal val="1+#ppt_h/2"/>
+                                          </p:val>
+                                        </p:tav>
+                                        <p:tav tm="100000">
+                                          <p:val>
+                                            <p:strVal val="#ppt_y"/>
+                                          </p:val>
+                                        </p:tav>
+                                      </p:tavLst>
+                                    </p:anim>
+                                  </p:childTnLst>
+                                </p:cTn>
+                              </p:par>
+                            </p:childTnLst>
+                          </p:cTn>
+                        </p:par>
+                        <p:par>
+                          <p:cTn id="19" fill="hold">
+                            <p:stCondLst>
+                              <p:cond delay="1500"/>
+                            </p:stCondLst>
+                            <p:childTnLst>
+                              <p:par>
+                                <p:cTn id="20" presetID="2" presetClass="entr" presetSubtype="4" fill="hold" grpId="0" nodeType="afterEffect">
+                                  <p:stCondLst>
+                                    <p:cond delay="0"/>
+                                  </p:stCondLst>
+                                  <p:childTnLst>
+                                    <p:set>
+                                      <p:cBhvr>
+                                        <p:cTn id="21" dur="1" fill="hold">
+                                          <p:stCondLst>
+                                            <p:cond delay="0"/>
+                                          </p:stCondLst>
+                                        </p:cTn>
+                                        <p:tgtEl>
+                                          <p:spTgt spid="3">
+                                            <p:txEl>
+                                              <p:pRg st="3" end="3"/>
+                                            </p:txEl>
+                                          </p:spTgt>
+                                        </p:tgtEl>
+                                        <p:attrNameLst>
+                                          <p:attrName>style.visibility</p:attrName>
+                                        </p:attrNameLst>
+                                      </p:cBhvr>
+                                      <p:to>
+                                        <p:strVal val="visible"/>
+                                      </p:to>
+                                    </p:set>
+                                    <p:anim calcmode="lin" valueType="num">
+                                      <p:cBhvr additive="base">
+                                        <p:cTn id="22" dur="500" fill="hold"/>
+                                        <p:tgtEl>
+                                          <p:spTgt spid="3">
+                                            <p:txEl>
+                                              <p:pRg st="3" end="3"/>
+                                            </p:txEl>
+                                          </p:spTgt>
+                                        </p:tgtEl>
+                                        <p:attrNameLst>
+                                          <p:attrName>ppt_x</p:attrName>
+                                        </p:attrNameLst>
+                                      </p:cBhvr>
+                                      <p:tavLst>
+                                        <p:tav tm="0">
+                                          <p:val>
+                                            <p:strVal val="#ppt_x"/>
+                                          </p:val>
+                                        </p:tav>
+                                        <p:tav tm="100000">
+                                          <p:val>
+                                            <p:strVal val="#ppt_x"/>
+                                          </p:val>
+                                        </p:tav>
+                                      </p:tavLst>
+                                    </p:anim>
+                                    <p:anim calcmode="lin" valueType="num">
+                                      <p:cBhvr additive="base">
+                                        <p:cTn id="23" dur="500" fill="hold"/>
+                                        <p:tgtEl>
+                                          <p:spTgt spid="3">
+                                            <p:txEl>
+                                              <p:pRg st="3" end="3"/>
+                                            </p:txEl>
+                                          </p:spTgt>
+                                        </p:tgtEl>
+                                        <p:attrNameLst>
+                                          <p:attrName>ppt_y</p:attrName>
+                                        </p:attrNameLst>
+                                      </p:cBhvr>
+                                      <p:tavLst>
+                                        <p:tav tm="0">
+                                          <p:val>
+                                            <p:strVal val="1+#ppt_h/2"/>
+                                          </p:val>
+                                        </p:tav>
+                                        <p:tav tm="100000">
+                                          <p:val>
+                                            <p:strVal val="#ppt_y"/>
+                                          </p:val>
+                                        </p:tav>
+                                      </p:tavLst>
+                                    </p:anim>
+                                  </p:childTnLst>
+                                </p:cTn>
+                              </p:par>
+                            </p:childTnLst>
+                          </p:cTn>
+                        </p:par>
+                      </p:childTnLst>
+                    </p:cTn>
+                  </p:par>
+                </p:childTnLst>
+              </p:cTn>
+              <p:prevCondLst>
+                <p:cond evt="onPrev" delay="0">
+                  <p:tgtEl>
+                    <p:sldTgt/>
+                  </p:tgtEl>
+                </p:cond>
+              </p:prevCondLst>
+              <p:nextCondLst>
+                <p:cond evt="onNext" delay="0">
+                  <p:tgtEl>
+                    <p:sldTgt/>
+                  </p:tgtEl>
+                </p:cond>
+              </p:nextCondLst>
+            </p:seq>
+          </p:childTnLst>
+        </p:cTn>
+      </p:par>
+    </p:tnLst>
+    <p:bldLst>
+      <p:bldP spid="2" grpId="0"/>
+      <p:bldP spid="3" grpId="0" build="p"/>
+    </p:bldLst>
+  </p:timing>
 </p:sld>
 </file>
 
@@ -10340,7 +11732,7 @@
         </p:nvSpPr>
         <p:spPr>
           <a:xfrm>
-            <a:off x="765325" y="2059817"/>
+            <a:off x="772582" y="1566331"/>
             <a:ext cx="2081288" cy="369332"/>
           </a:xfrm>
           <a:prstGeom prst="rect">
@@ -10386,7 +11778,7 @@
         </p:nvSpPr>
         <p:spPr>
           <a:xfrm>
-            <a:off x="761396" y="2428119"/>
+            <a:off x="775910" y="1934633"/>
             <a:ext cx="3565373" cy="369332"/>
           </a:xfrm>
           <a:prstGeom prst="rect">
@@ -10511,18 +11903,9 @@
   <p:clrMapOvr>
     <a:masterClrMapping/>
   </p:clrMapOvr>
-  <mc:AlternateContent xmlns:mc="http://schemas.openxmlformats.org/markup-compatibility/2006" xmlns:p15="http://schemas.microsoft.com/office/powerpoint/2012/main">
-    <mc:Choice Requires="p15">
-      <p:transition xmlns:p14="http://schemas.microsoft.com/office/powerpoint/2010/main" spd="slow" p14:dur="2000">
-        <p15:prstTrans prst="fracture"/>
-      </p:transition>
-    </mc:Choice>
-    <mc:Fallback xmlns="">
-      <p:transition spd="slow">
-        <p:fade/>
-      </p:transition>
-    </mc:Fallback>
-  </mc:AlternateContent>
+  <p:transition spd="slow">
+    <p:wipe/>
+  </p:transition>
   <p:timing>
     <p:tnLst>
       <p:par>
@@ -10544,7 +11927,7 @@
                             </p:stCondLst>
                             <p:childTnLst>
                               <p:par>
-                                <p:cTn id="5" presetID="1" presetClass="entr" presetSubtype="0" fill="hold" grpId="0" nodeType="clickEffect">
+                                <p:cTn id="5" presetID="16" presetClass="entr" presetSubtype="21" fill="hold" grpId="0" nodeType="clickEffect">
                                   <p:stCondLst>
                                     <p:cond delay="0"/>
                                   </p:stCondLst>
@@ -10552,6 +11935,59 @@
                                     <p:set>
                                       <p:cBhvr>
                                         <p:cTn id="6" dur="1" fill="hold">
+                                          <p:stCondLst>
+                                            <p:cond delay="0"/>
+                                          </p:stCondLst>
+                                        </p:cTn>
+                                        <p:tgtEl>
+                                          <p:spTgt spid="11"/>
+                                        </p:tgtEl>
+                                        <p:attrNameLst>
+                                          <p:attrName>style.visibility</p:attrName>
+                                        </p:attrNameLst>
+                                      </p:cBhvr>
+                                      <p:to>
+                                        <p:strVal val="visible"/>
+                                      </p:to>
+                                    </p:set>
+                                    <p:animEffect transition="in" filter="barn(inVertical)">
+                                      <p:cBhvr>
+                                        <p:cTn id="7" dur="500"/>
+                                        <p:tgtEl>
+                                          <p:spTgt spid="11"/>
+                                        </p:tgtEl>
+                                      </p:cBhvr>
+                                    </p:animEffect>
+                                  </p:childTnLst>
+                                </p:cTn>
+                              </p:par>
+                            </p:childTnLst>
+                          </p:cTn>
+                        </p:par>
+                      </p:childTnLst>
+                    </p:cTn>
+                  </p:par>
+                  <p:par>
+                    <p:cTn id="8" fill="hold">
+                      <p:stCondLst>
+                        <p:cond delay="indefinite"/>
+                      </p:stCondLst>
+                      <p:childTnLst>
+                        <p:par>
+                          <p:cTn id="9" fill="hold">
+                            <p:stCondLst>
+                              <p:cond delay="0"/>
+                            </p:stCondLst>
+                            <p:childTnLst>
+                              <p:par>
+                                <p:cTn id="10" presetID="1" presetClass="entr" presetSubtype="0" fill="hold" grpId="0" nodeType="clickEffect">
+                                  <p:stCondLst>
+                                    <p:cond delay="0"/>
+                                  </p:stCondLst>
+                                  <p:childTnLst>
+                                    <p:set>
+                                      <p:cBhvr>
+                                        <p:cTn id="11" dur="1" fill="hold">
                                           <p:stCondLst>
                                             <p:cond delay="0"/>
                                           </p:stCondLst>
@@ -10571,20 +12007,56 @@
                                 </p:cTn>
                               </p:par>
                               <p:par>
-                                <p:cTn id="7" presetID="1" presetClass="entr" presetSubtype="0" fill="hold" grpId="0" nodeType="withEffect">
+                                <p:cTn id="12" presetID="1" presetClass="exit" presetSubtype="0" fill="hold" grpId="1" nodeType="withEffect">
                                   <p:stCondLst>
-                                    <p:cond delay="250"/>
+                                    <p:cond delay="750"/>
                                   </p:stCondLst>
                                   <p:childTnLst>
                                     <p:set>
                                       <p:cBhvr>
-                                        <p:cTn id="8" dur="1" fill="hold">
+                                        <p:cTn id="13" dur="1" fill="hold">
                                           <p:stCondLst>
                                             <p:cond delay="0"/>
                                           </p:stCondLst>
                                         </p:cTn>
                                         <p:tgtEl>
-                                          <p:spTgt spid="10"/>
+                                          <p:spTgt spid="2"/>
+                                        </p:tgtEl>
+                                        <p:attrNameLst>
+                                          <p:attrName>style.visibility</p:attrName>
+                                        </p:attrNameLst>
+                                      </p:cBhvr>
+                                      <p:to>
+                                        <p:strVal val="hidden"/>
+                                      </p:to>
+                                    </p:set>
+                                  </p:childTnLst>
+                                </p:cTn>
+                              </p:par>
+                            </p:childTnLst>
+                          </p:cTn>
+                        </p:par>
+                        <p:par>
+                          <p:cTn id="14" fill="hold">
+                            <p:stCondLst>
+                              <p:cond delay="750"/>
+                            </p:stCondLst>
+                            <p:childTnLst>
+                              <p:par>
+                                <p:cTn id="15" presetID="1" presetClass="entr" presetSubtype="0" fill="hold" grpId="0" nodeType="afterEffect">
+                                  <p:stCondLst>
+                                    <p:cond delay="0"/>
+                                  </p:stCondLst>
+                                  <p:childTnLst>
+                                    <p:set>
+                                      <p:cBhvr>
+                                        <p:cTn id="16" dur="1" fill="hold">
+                                          <p:stCondLst>
+                                            <p:cond delay="0"/>
+                                          </p:stCondLst>
+                                        </p:cTn>
+                                        <p:tgtEl>
+                                          <p:spTgt spid="3"/>
                                         </p:tgtEl>
                                         <p:attrNameLst>
                                           <p:attrName>style.visibility</p:attrName>
@@ -10594,6 +12066,133 @@
                                         <p:strVal val="visible"/>
                                       </p:to>
                                     </p:set>
+                                  </p:childTnLst>
+                                </p:cTn>
+                              </p:par>
+                            </p:childTnLst>
+                          </p:cTn>
+                        </p:par>
+                        <p:par>
+                          <p:cTn id="17" fill="hold">
+                            <p:stCondLst>
+                              <p:cond delay="750"/>
+                            </p:stCondLst>
+                            <p:childTnLst>
+                              <p:par>
+                                <p:cTn id="18" presetID="1" presetClass="entr" presetSubtype="0" fill="hold" grpId="0" nodeType="afterEffect">
+                                  <p:stCondLst>
+                                    <p:cond delay="0"/>
+                                  </p:stCondLst>
+                                  <p:childTnLst>
+                                    <p:set>
+                                      <p:cBhvr>
+                                        <p:cTn id="19" dur="1" fill="hold">
+                                          <p:stCondLst>
+                                            <p:cond delay="0"/>
+                                          </p:stCondLst>
+                                        </p:cTn>
+                                        <p:tgtEl>
+                                          <p:spTgt spid="8"/>
+                                        </p:tgtEl>
+                                        <p:attrNameLst>
+                                          <p:attrName>style.visibility</p:attrName>
+                                        </p:attrNameLst>
+                                      </p:cBhvr>
+                                      <p:to>
+                                        <p:strVal val="visible"/>
+                                      </p:to>
+                                    </p:set>
+                                  </p:childTnLst>
+                                </p:cTn>
+                              </p:par>
+                            </p:childTnLst>
+                          </p:cTn>
+                        </p:par>
+                      </p:childTnLst>
+                    </p:cTn>
+                  </p:par>
+                  <p:par>
+                    <p:cTn id="20" fill="hold">
+                      <p:stCondLst>
+                        <p:cond delay="indefinite"/>
+                      </p:stCondLst>
+                      <p:childTnLst>
+                        <p:par>
+                          <p:cTn id="21" fill="hold">
+                            <p:stCondLst>
+                              <p:cond delay="0"/>
+                            </p:stCondLst>
+                            <p:childTnLst>
+                              <p:par>
+                                <p:cTn id="22" presetID="2" presetClass="entr" presetSubtype="4" fill="hold" grpId="0" nodeType="clickEffect">
+                                  <p:stCondLst>
+                                    <p:cond delay="0"/>
+                                  </p:stCondLst>
+                                  <p:childTnLst>
+                                    <p:set>
+                                      <p:cBhvr>
+                                        <p:cTn id="23" dur="1" fill="hold">
+                                          <p:stCondLst>
+                                            <p:cond delay="0"/>
+                                          </p:stCondLst>
+                                        </p:cTn>
+                                        <p:tgtEl>
+                                          <p:spTgt spid="9"/>
+                                        </p:tgtEl>
+                                        <p:attrNameLst>
+                                          <p:attrName>style.visibility</p:attrName>
+                                        </p:attrNameLst>
+                                      </p:cBhvr>
+                                      <p:to>
+                                        <p:strVal val="visible"/>
+                                      </p:to>
+                                    </p:set>
+                                    <p:anim calcmode="lin" valueType="num">
+                                      <p:cBhvr additive="base">
+                                        <p:cTn id="24" dur="500" fill="hold"/>
+                                        <p:tgtEl>
+                                          <p:spTgt spid="9"/>
+                                        </p:tgtEl>
+                                        <p:attrNameLst>
+                                          <p:attrName>ppt_x</p:attrName>
+                                        </p:attrNameLst>
+                                      </p:cBhvr>
+                                      <p:tavLst>
+                                        <p:tav tm="0">
+                                          <p:val>
+                                            <p:strVal val="#ppt_x"/>
+                                          </p:val>
+                                        </p:tav>
+                                        <p:tav tm="100000">
+                                          <p:val>
+                                            <p:strVal val="#ppt_x"/>
+                                          </p:val>
+                                        </p:tav>
+                                      </p:tavLst>
+                                    </p:anim>
+                                    <p:anim calcmode="lin" valueType="num">
+                                      <p:cBhvr additive="base">
+                                        <p:cTn id="25" dur="500" fill="hold"/>
+                                        <p:tgtEl>
+                                          <p:spTgt spid="9"/>
+                                        </p:tgtEl>
+                                        <p:attrNameLst>
+                                          <p:attrName>ppt_y</p:attrName>
+                                        </p:attrNameLst>
+                                      </p:cBhvr>
+                                      <p:tavLst>
+                                        <p:tav tm="0">
+                                          <p:val>
+                                            <p:strVal val="1+#ppt_h/2"/>
+                                          </p:val>
+                                        </p:tav>
+                                        <p:tav tm="100000">
+                                          <p:val>
+                                            <p:strVal val="#ppt_y"/>
+                                          </p:val>
+                                        </p:tav>
+                                      </p:tavLst>
+                                    </p:anim>
                                   </p:childTnLst>
                                 </p:cTn>
                               </p:par>
@@ -10625,8 +12224,12 @@
       </p:par>
     </p:tnLst>
     <p:bldLst>
+      <p:bldP spid="11" grpId="0"/>
       <p:bldP spid="2" grpId="0"/>
-      <p:bldP spid="10" grpId="0"/>
+      <p:bldP spid="2" grpId="1"/>
+      <p:bldP spid="3" grpId="0"/>
+      <p:bldP spid="8" grpId="0"/>
+      <p:bldP spid="9" grpId="0"/>
     </p:bldLst>
   </p:timing>
 </p:sld>
